--- a/downloads/presentations/modules/anl-210.pptx
+++ b/downloads/presentations/modules/anl-210.pptx
@@ -615,7 +615,8 @@
               <a:t>Technical Deep Dive
 Machine learning development typically begins with a defined prediction or classification task. The task should be specific enough to test. “Use AI to improve surveillance” is too vague. “Classify incoming reports into routine review, expedited review, and supervisor review based on defined criteria” is more actionable. A clear task allows staff to define the target label, required features, acceptance criteria, and human review process.
 Data preparation is often the most important and time-consuming step. Public health data may contain missing values, duplicate records, delayed reporting, inconsistent coding, local terminology, free-text notes, and changes over time. Feature engineering translates raw data into model inputs, but it can also embed assumptions. For example, using prior healthcare utilization as a feature may reflect access to care as much as underlying risk.
-Training, validation, and test datasets serve different purposes. Training data are used to fit the model. Validation data are used to tune choices during development. Test data are used to estimate performance on data not used to build the model. Public health teams should be cautious when a vendor reports only development performance without external validation or realistic operational testing.</a:t>
+Training, validation, and test datasets serve different purposes. Training data are used to fit the model. Validation data are used to tune choices during development. Test data are used to estimate performance on data not used to build the model. Public health teams should be cautious when a vendor reports only development performance without external validation or realistic operational testing.
+Application guidance: Connect the concept to public health purpose, responsible use, required safeguards, documentation, and the next action a department should take.</a:t>
             </a:r>
             <a:endParaRPr lang="en-US" dirty="0"/>
           </a:p>
@@ -705,7 +706,8 @@
               <a:rPr lang="en-US" dirty="0"/>
               <a:t>Technical Deep Dive
 Model performance should be interpreted in relation to the workflow. A model with high overall accuracy may still miss rare but important events. A model with many false positives may burden staff and create alert fatigue. A model with many false negatives may miss cases, outbreaks, or communities needing support. Thresholds should be selected based on public health consequences, not only technical optimization.
-Human review should be designed into the workflow before deployment. Reviewers need to understand what the model output means, what it does not mean, and when to override or escalate. Staff also need feedback channels so model errors can be documented, analyzed, and used to improve monitoring or retraining decisions.</a:t>
+Human review should be designed into the workflow before deployment. Reviewers need to understand what the model output means, what it does not mean, and when to override or escalate. Staff also need feedback channels so model errors can be documented, analyzed, and used to improve monitoring or retraining decisions.
+Application guidance: Connect the concept to public health purpose, responsible use, required safeguards, documentation, and the next action a department should take.</a:t>
             </a:r>
             <a:endParaRPr lang="en-US" dirty="0"/>
           </a:p>
@@ -796,7 +798,8 @@
               <a:t>Risks, Failure Modes, and Guardrails
 Biased or inconsistent labels. If historical labels reflect unequal detection, inconsistent review, or limited resources, the model may reproduce those patterns. Guardrails include label audits, expert review, subgroup analysis, and documentation of label limitations.
 Data leakage. Data leakage occurs when information that would not be available at the time of decision is used during training. Guardrails include temporal validation, careful feature review, and independent testing.
-Overfitting and poor generalization. A model may perform well on development data but poorly in a new jurisdiction, time period, or population. Guardrails include held-out testing, external validation, drift monitoring, and conservative deployment.</a:t>
+Overfitting and poor generalization. A model may perform well on development data but poorly in a new jurisdiction, time period, or population. Guardrails include held-out testing, external validation, drift monitoring, and conservative deployment.
+Application guidance: Identify what could go wrong, who could be affected, what safeguards are needed, and what evidence should be reviewed before use expands.</a:t>
             </a:r>
             <a:endParaRPr lang="en-US" dirty="0"/>
           </a:p>
@@ -885,7 +888,8 @@
             <a:r>
               <a:rPr lang="en-US" dirty="0"/>
               <a:t>Risks, Failure Modes, and Guardrails
-Misuse of prediction as explanation. A model can predict risk without explaining cause. Guardrails include clear communication, training, and restrictions against causal claims unless supported by appropriate study design.</a:t>
+Misuse of prediction as explanation. A model can predict risk without explaining cause. Guardrails include clear communication, training, and restrictions against causal claims unless supported by appropriate study design.
+Application guidance: Identify what could go wrong, who could be affected, what safeguards are needed, and what evidence should be reviewed before use expands.</a:t>
             </a:r>
             <a:endParaRPr lang="en-US" dirty="0"/>
           </a:p>
@@ -975,7 +979,8 @@
               <a:rPr lang="en-US" dirty="0"/>
               <a:t>Application to AI-Supported Workflows
 Machine learning may support generative AI, predictive analytics, NLP, anomaly detection, and agentic workflows. In generative AI systems, machine learning concepts help staff understand why outputs may be fluent but unreliable. In predictive workflows, machine learning literacy helps staff evaluate risk scores, thresholds, and subgroup performance. In agentic workflows, models may trigger actions, making validation, permissions, and human approval especially important.
-The practical application is disciplined use. Staff should define intended use, validate performance, document limitations, monitor drift, and ensure that human reviewers remain accountable for consequential public health actions. Machine learning should be treated as an analytic support method within a governed workflow.</a:t>
+The practical application is disciplined use. Staff should define intended use, validate performance, document limitations, monitor drift, and ensure that human reviewers remain accountable for consequential public health actions. Machine learning should be treated as an analytic support method within a governed workflow.
+Application guidance: Use the concept to clarify workflow changes, dependencies, staffing, procurement requirements, training needs, and implementation checkpoints.</a:t>
             </a:r>
             <a:endParaRPr lang="en-US" dirty="0"/>
           </a:p>
@@ -1066,7 +1071,8 @@
               <a:t>Reflection Questions
 What public health task would the model support: classification, prediction, ranking, clustering, or exploration?
 What label would be used, and how reliable or equitable is that label?
-Which features might reflect access, documentation, or reporting bias rather than true risk?</a:t>
+Which features might reflect access, documentation, or reporting bias rather than true risk?
+Application guidance: Connect the concept to public health purpose, responsible use, required safeguards, documentation, and the next action a department should take.</a:t>
             </a:r>
             <a:endParaRPr lang="en-US" dirty="0"/>
           </a:p>
@@ -1156,7 +1162,8 @@
               <a:rPr lang="en-US" dirty="0"/>
               <a:t>Reflection Questions
 What errors would be most harmful in this workflow?
-Who would review model outputs, override them, and document concerns?</a:t>
+Who would review model outputs, override them, and document concerns?
+Application guidance: Connect the concept to public health purpose, responsible use, required safeguards, documentation, and the next action a department should take.</a:t>
             </a:r>
             <a:endParaRPr lang="en-US" dirty="0"/>
           </a:p>
@@ -1246,7 +1253,8 @@
               <a:rPr lang="en-US" dirty="0"/>
               <a:t>Practical Exercise
 Create a machine learning use case review worksheet for one public health workflow. The worksheet should describe the public health task, intended use, data sources, candidate features, proposed label, likely users, performance measures, subgroup review needs, human review points, and monitoring requirements.
-This exercise should produce a governance-ready artifact. Learners should identify at least three reasons the model might fail and at least three safeguards that should be in place before pilot testing.</a:t>
+This exercise should produce a governance-ready artifact. Learners should identify at least three reasons the model might fail and at least three safeguards that should be in place before pilot testing.
+Application guidance: Use the assignment to test whether you can explain the concept, apply it to a realistic public health situation, and identify what would need review before the work moves forward.</a:t>
             </a:r>
             <a:endParaRPr lang="en-US" dirty="0"/>
           </a:p>
@@ -1337,7 +1345,8 @@
               <a:t>Expected Artifact or Evidence
 Machine learning use case review worksheet
 Feature and label inventory
-Initial model risk and safeguard list</a:t>
+Initial model risk and safeguard list
+Application guidance: Connect the concept to public health purpose, responsible use, required safeguards, documentation, and the next action a department should take.</a:t>
             </a:r>
             <a:endParaRPr lang="en-US" dirty="0"/>
           </a:p>
@@ -1426,7 +1435,8 @@
             <a:r>
               <a:rPr lang="en-US" dirty="0"/>
               <a:t>Expected Artifact or Evidence
-Human review and monitoring notes</a:t>
+Human review and monitoring notes
+Application guidance: Connect the concept to public health purpose, responsible use, required safeguards, documentation, and the next action a department should take.</a:t>
             </a:r>
             <a:endParaRPr lang="en-US" dirty="0"/>
           </a:p>
@@ -1610,7 +1620,8 @@
 Machine learning use case review worksheet
 Feature and label inventory
 Initial model risk and safeguard list
-Human review and monitoring notes</a:t>
+Human review and monitoring notes
+Application guidance: Use the assignment to test whether you can explain the concept, apply it to a realistic public health situation, and identify what would need review before the work moves forward.</a:t>
             </a:r>
             <a:endParaRPr lang="en-US" dirty="0"/>
           </a:p>
@@ -1703,7 +1714,8 @@
 2. Why can historical labels create risk?
 3. What is overfitting?
 4. What should determine model thresholds in public health workflows?
-5. What is strong completion evidence for this module?</a:t>
+5. What is strong completion evidence for this module?
+Application guidance: Use the assignment to test whether you can explain the concept, apply it to a realistic public health situation, and identify what would need review before the work moves forward.</a:t>
             </a:r>
             <a:endParaRPr lang="en-US" dirty="0"/>
           </a:p>
@@ -1795,7 +1807,8 @@
 CDC Evaluation Framework: https://www.cdc.gov/evaluation/
 NIST Artificial Intelligence Risk Management Framework: https://www.nist.gov/itl/ai-risk-management-framework
 NIST AI RMF Generative AI Profile: https://www.nist.gov/publications/artificial-intelligence-risk-management-framework-generative-artificial-intelligence
-CDC Public Health Data Strategy: https://www.cdc.gov/public-health-data-strategy/php/about/index.html</a:t>
+CDC Public Health Data Strategy: https://www.cdc.gov/public-health-data-strategy/php/about/index.html
+Application guidance: Connect the concept to public health purpose, responsible use, required safeguards, documentation, and the next action a department should take.</a:t>
             </a:r>
             <a:endParaRPr lang="en-US" dirty="0"/>
           </a:p>
@@ -2074,7 +2087,8 @@
 Describe features, labels, training data, validation data, and test data.
 Identify when a machine learning approach may be appropriate for a public health workflow and when a simpler method may be preferable.
 Recognize common machine learning risks, including overfitting, biased labels, data leakage, and poor generalization.
-Interpret basic model performance questions in relation to epidemiologic and operational decision-making.</a:t>
+Interpret basic model performance questions in relation to epidemiologic and operational decision-making.
+Application guidance: Use the assignment to test whether you can explain the concept, apply it to a realistic public health situation, and identify what would need review before the work moves forward.</a:t>
             </a:r>
             <a:endParaRPr lang="en-US" dirty="0"/>
           </a:p>
@@ -2163,7 +2177,8 @@
             <a:r>
               <a:rPr lang="en-US" dirty="0"/>
               <a:t>Learning Objectives
-Produce a machine learning use case review worksheet for a real or realistic public health workflow.</a:t>
+Produce a machine learning use case review worksheet for a real or realistic public health workflow.
+Application guidance: Use the assignment to test whether you can explain the concept, apply it to a realistic public health situation, and identify what would need review before the work moves forward.</a:t>
             </a:r>
             <a:endParaRPr lang="en-US" dirty="0"/>
           </a:p>
@@ -2254,7 +2269,8 @@
               <a:t>Module Overview
 Machine learning is a set of methods that allow computer systems to identify patterns in data and use those patterns to classify, predict, cluster, or prioritize information. In public health, machine learning may support surveillance triage, outbreak signal review, risk stratification, case classification, anomaly detection, service planning, or quality improvement. The purpose of this module is not to turn every learner into a data scientist. The purpose is to help public health informaticians, epidemiologists, and technologists understand the concepts needed to evaluate whether a machine learning approach is appropriate, valid, equitable, and operationally useful.
 Machine learning should be understood as one analytic option among many. Traditional epidemiologic methods, rules-based logic, statistical models, and human judgment remain essential in many public health workflows. A machine learning model may be helpful when patterns are complex, high-dimensional, or difficult to express as simple rules. It may be inappropriate when data are sparse, labels are unreliable, the decision is highly consequential, or the public health question requires causal interpretation rather than prediction.
-This module introduces supervised learning, unsupervised learning, features, labels, training data, validation data, test data, overfitting, generalization, and model performance. Learners will connect these concepts to public health examples and identify the safeguards needed before machine learning outputs are used to support public health action.</a:t>
+This module introduces supervised learning, unsupervised learning, features, labels, training data, validation data, test data, overfitting, generalization, and model performance. Learners will connect these concepts to public health examples and identify the safeguards needed before machine learning outputs are used to support public health action.
+Application guidance: Connect the concept to public health purpose, responsible use, required safeguards, documentation, and the next action a department should take.</a:t>
             </a:r>
             <a:endParaRPr lang="en-US" dirty="0"/>
           </a:p>
@@ -2345,7 +2361,8 @@
               <a:t>Why This Topic Matters for Public Health AI
 Machine learning matters for public health AI because many proposed tools rely on classification, prediction, ranking, or pattern detection. A surveillance team may want to classify incoming reports by urgency. An epidemiology team may want to detect unusual disease patterns. A program may want to prioritize outreach based on predicted risk. Each of these uses can affect who receives attention, services, investigation, or resources.
 Public health staff need enough machine learning literacy to ask whether the model is aligned with the public health purpose. A model built to predict an outcome is not the same as a model that explains why the outcome occurred. A model that performs well in one jurisdiction, population, or reporting environment may not perform well elsewhere. A model trained on historical public health actions may learn historical practice patterns, including under-detection or unequal service access.
-The most important public health question is whether the model improves decision-making safely and equitably. This requires more than a performance score. Staff must understand the source data, label quality, model limitations, subgroup performance, workflow impact, human review process, and monitoring plan. Machine learning should strengthen public health practice, not obscure uncertainty or shift responsibility away from accountable staff.</a:t>
+The most important public health question is whether the model improves decision-making safely and equitably. This requires more than a performance score. Staff must understand the source data, label quality, model limitations, subgroup performance, workflow impact, human review process, and monitoring plan. Machine learning should strengthen public health practice, not obscure uncertainty or shift responsibility away from accountable staff.
+Application guidance: Connect the concept to public health purpose, responsible use, required safeguards, documentation, and the next action a department should take.</a:t>
             </a:r>
             <a:endParaRPr lang="en-US" dirty="0"/>
           </a:p>
@@ -2435,7 +2452,8 @@
               <a:rPr lang="en-US" dirty="0"/>
               <a:t>Public Health Example
 A health department may consider a machine learning model to classify environmental health complaints by likely urgency. Historical complaint text, location, facility type, prior violations, and resolution outcomes may be used as features. The label might be whether the complaint was ultimately assigned high priority by trained staff. This sounds useful, but the label may reflect staffing capacity or historical prioritization patterns rather than true urgency.
-To use this model responsibly, staff would need to evaluate the training data, define the intended use, test performance on recent complaints, review errors by complaint type and community, and decide whether the output is advisory or operational. The model might help sort a queue, but it should not prevent staff from reviewing complaints that do not match historical patterns. The public health example shows that model design decisions become program decisions.</a:t>
+To use this model responsibly, staff would need to evaluate the training data, define the intended use, test performance on recent complaints, review errors by complaint type and community, and decide whether the output is advisory or operational. The model might help sort a queue, but it should not prevent staff from reviewing complaints that do not match historical patterns. The public health example shows that model design decisions become program decisions.
+Application guidance: Connect the concept to public health purpose, responsible use, required safeguards, documentation, and the next action a department should take.</a:t>
             </a:r>
             <a:endParaRPr lang="en-US" dirty="0"/>
           </a:p>
@@ -3206,8 +3224,8 @@
         </p:nvSpPr>
         <p:spPr>
           <a:xfrm>
-            <a:off x="9966960" y="6537960"/>
-            <a:ext cx="1645920" cy="201168"/>
+            <a:off x="9646920" y="6537960"/>
+            <a:ext cx="1965960" cy="201168"/>
           </a:xfrm>
           <a:prstGeom prst="rect">
             <a:avLst/>
@@ -3231,7 +3249,7 @@
                 <a:ea typeface="Aptos" pitchFamily="34" charset="-122"/>
                 <a:cs typeface="Aptos" pitchFamily="34" charset="-120"/>
               </a:rPr>
-              <a:t>Â© Paula Soper</a:t>
+              <a:t>Copyright Paula Soper</a:t>
             </a:r>
             <a:endParaRPr lang="en-US" sz="800" dirty="0"/>
           </a:p>
@@ -3278,77 +3296,13 @@
       </p:sp>
       <p:sp>
         <p:nvSpPr>
-          <p:cNvPr id="8" name="Shape 6"/>
+          <p:cNvPr id="8" name="Text 6"/>
           <p:cNvSpPr/>
           <p:nvPr/>
         </p:nvSpPr>
         <p:spPr>
           <a:xfrm>
             <a:off x="640080" y="658368"/>
-            <a:ext cx="420624" cy="420624"/>
-          </a:xfrm>
-          <a:prstGeom prst="ellipse">
-            <a:avLst/>
-          </a:prstGeom>
-          <a:solidFill>
-            <a:srgbClr val="0068B7"/>
-          </a:solidFill>
-          <a:ln w="12700">
-            <a:solidFill>
-              <a:srgbClr val="0068B7"/>
-            </a:solidFill>
-            <a:prstDash val="solid"/>
-          </a:ln>
-        </p:spPr>
-      </p:sp>
-      <p:sp>
-        <p:nvSpPr>
-          <p:cNvPr id="9" name="Text 7"/>
-          <p:cNvSpPr/>
-          <p:nvPr/>
-        </p:nvSpPr>
-        <p:spPr>
-          <a:xfrm>
-            <a:off x="640080" y="731520"/>
-            <a:ext cx="420624" cy="164592"/>
-          </a:xfrm>
-          <a:prstGeom prst="rect">
-            <a:avLst/>
-          </a:prstGeom>
-          <a:noFill/>
-          <a:ln/>
-        </p:spPr>
-        <p:txBody>
-          <a:bodyPr wrap="square" lIns="0" tIns="0" rIns="0" bIns="0" rtlCol="0" anchor="ctr"/>
-          <a:lstStyle/>
-          <a:p>
-            <a:pPr algn="ctr" indent="0" marL="0">
-              <a:buNone/>
-            </a:pPr>
-            <a:r>
-              <a:rPr lang="en-US" sz="1100" b="1" dirty="0">
-                <a:solidFill>
-                  <a:srgbClr val="FFFFFF"/>
-                </a:solidFill>
-                <a:latin typeface="Aptos" pitchFamily="34" charset="0"/>
-                <a:ea typeface="Aptos" pitchFamily="34" charset="-122"/>
-                <a:cs typeface="Aptos" pitchFamily="34" charset="-120"/>
-              </a:rPr>
-              <a:t>5</a:t>
-            </a:r>
-            <a:endParaRPr lang="en-US" sz="1100" dirty="0"/>
-          </a:p>
-        </p:txBody>
-      </p:sp>
-      <p:sp>
-        <p:nvSpPr>
-          <p:cNvPr id="10" name="Text 8"/>
-          <p:cNvSpPr/>
-          <p:nvPr/>
-        </p:nvSpPr>
-        <p:spPr>
-          <a:xfrm>
-            <a:off x="640080" y="621792"/>
             <a:ext cx="10881360" cy="713232"/>
           </a:xfrm>
           <a:prstGeom prst="rect">
@@ -3383,14 +3337,14 @@
       </p:sp>
       <p:sp>
         <p:nvSpPr>
-          <p:cNvPr id="11" name="Text 9"/>
+          <p:cNvPr id="9" name="Text 7"/>
           <p:cNvSpPr/>
           <p:nvPr/>
         </p:nvSpPr>
         <p:spPr>
           <a:xfrm>
             <a:off x="868680" y="1508760"/>
-            <a:ext cx="6537960" cy="4160520"/>
+            <a:ext cx="6309360" cy="4160520"/>
           </a:xfrm>
           <a:prstGeom prst="rect">
             <a:avLst/>
@@ -3449,18 +3403,18 @@
       </p:sp>
       <p:sp>
         <p:nvSpPr>
-          <p:cNvPr id="12" name="Shape 10"/>
-          <p:cNvSpPr/>
-          <p:nvPr/>
-        </p:nvSpPr>
-        <p:spPr>
-          <a:xfrm>
-            <a:off x="7909560" y="1417320"/>
-            <a:ext cx="3154680" cy="1828800"/>
+          <p:cNvPr id="10" name="Shape 8"/>
+          <p:cNvSpPr/>
+          <p:nvPr/>
+        </p:nvSpPr>
+        <p:spPr>
+          <a:xfrm>
+            <a:off x="7635240" y="1325880"/>
+            <a:ext cx="3474720" cy="1325880"/>
           </a:xfrm>
           <a:prstGeom prst="roundRect">
             <a:avLst>
-              <a:gd name="adj" fmla="val 6000"/>
+              <a:gd name="adj" fmla="val 8276"/>
             </a:avLst>
           </a:prstGeom>
           <a:solidFill>
@@ -3476,14 +3430,14 @@
       </p:sp>
       <p:sp>
         <p:nvSpPr>
-          <p:cNvPr id="13" name="Text 11"/>
-          <p:cNvSpPr/>
-          <p:nvPr/>
-        </p:nvSpPr>
-        <p:spPr>
-          <a:xfrm>
-            <a:off x="8074152" y="1563624"/>
-            <a:ext cx="2825496" cy="256032"/>
+          <p:cNvPr id="11" name="Text 9"/>
+          <p:cNvSpPr/>
+          <p:nvPr/>
+        </p:nvSpPr>
+        <p:spPr>
+          <a:xfrm>
+            <a:off x="7799832" y="1472184"/>
+            <a:ext cx="3145536" cy="256032"/>
           </a:xfrm>
           <a:prstGeom prst="rect">
             <a:avLst/>
@@ -3507,7 +3461,7 @@
                 <a:ea typeface="Aptos" pitchFamily="34" charset="-122"/>
                 <a:cs typeface="Aptos" pitchFamily="34" charset="-120"/>
               </a:rPr>
-              <a:t>Key idea</a:t>
+              <a:t>Core concept</a:t>
             </a:r>
             <a:endParaRPr lang="en-US" sz="1300" dirty="0"/>
           </a:p>
@@ -3515,14 +3469,14 @@
       </p:sp>
       <p:sp>
         <p:nvSpPr>
-          <p:cNvPr id="14" name="Text 12"/>
-          <p:cNvSpPr/>
-          <p:nvPr/>
-        </p:nvSpPr>
-        <p:spPr>
-          <a:xfrm>
-            <a:off x="8074152" y="1920240"/>
-            <a:ext cx="2825496" cy="1188720"/>
+          <p:cNvPr id="12" name="Text 10"/>
+          <p:cNvSpPr/>
+          <p:nvPr/>
+        </p:nvSpPr>
+        <p:spPr>
+          <a:xfrm>
+            <a:off x="7799832" y="1828800"/>
+            <a:ext cx="3145536" cy="685800"/>
           </a:xfrm>
           <a:prstGeom prst="rect">
             <a:avLst/>
@@ -3556,18 +3510,159 @@
       </p:sp>
       <p:sp>
         <p:nvSpPr>
-          <p:cNvPr id="15" name="Shape 13"/>
-          <p:cNvSpPr/>
-          <p:nvPr/>
-        </p:nvSpPr>
-        <p:spPr>
-          <a:xfrm>
-            <a:off x="7909560" y="3520440"/>
-            <a:ext cx="3154680" cy="1737360"/>
+          <p:cNvPr id="13" name="Shape 11"/>
+          <p:cNvSpPr/>
+          <p:nvPr/>
+        </p:nvSpPr>
+        <p:spPr>
+          <a:xfrm>
+            <a:off x="7635240" y="2788920"/>
+            <a:ext cx="3474720" cy="1536192"/>
           </a:xfrm>
           <a:prstGeom prst="roundRect">
             <a:avLst>
-              <a:gd name="adj" fmla="val 6316"/>
+              <a:gd name="adj" fmla="val 7143"/>
+            </a:avLst>
+          </a:prstGeom>
+          <a:solidFill>
+            <a:srgbClr val="FFFFFF">
+              <a:alpha val="88000"/>
+            </a:srgbClr>
+          </a:solidFill>
+          <a:ln w="12700">
+            <a:solidFill>
+              <a:srgbClr val="D6E8F2"/>
+            </a:solidFill>
+            <a:prstDash val="solid"/>
+          </a:ln>
+        </p:spPr>
+      </p:sp>
+      <p:sp>
+        <p:nvSpPr>
+          <p:cNvPr id="14" name="Shape 12"/>
+          <p:cNvSpPr/>
+          <p:nvPr/>
+        </p:nvSpPr>
+        <p:spPr>
+          <a:xfrm>
+            <a:off x="8074152" y="3291840"/>
+            <a:ext cx="2596896" cy="749808"/>
+          </a:xfrm>
+          <a:prstGeom prst="rect">
+            <a:avLst/>
+          </a:prstGeom>
+          <a:solidFill>
+            <a:srgbClr val="EAF6F8"/>
+          </a:solidFill>
+          <a:ln w="12700">
+            <a:solidFill>
+              <a:srgbClr val="8ABBD8"/>
+            </a:solidFill>
+            <a:prstDash val="solid"/>
+          </a:ln>
+        </p:spPr>
+      </p:sp>
+      <p:sp>
+        <p:nvSpPr>
+          <p:cNvPr id="15" name="Shape 13"/>
+          <p:cNvSpPr/>
+          <p:nvPr/>
+        </p:nvSpPr>
+        <p:spPr>
+          <a:xfrm>
+            <a:off x="8202168" y="3721608"/>
+            <a:ext cx="2340864" cy="0"/>
+          </a:xfrm>
+          <a:prstGeom prst="line">
+            <a:avLst/>
+          </a:prstGeom>
+          <a:noFill/>
+          <a:ln w="19050">
+            <a:solidFill>
+              <a:srgbClr val="0068B7"/>
+            </a:solidFill>
+            <a:prstDash val="solid"/>
+          </a:ln>
+        </p:spPr>
+      </p:sp>
+      <p:sp>
+        <p:nvSpPr>
+          <p:cNvPr id="16" name="Shape 14"/>
+          <p:cNvSpPr/>
+          <p:nvPr/>
+        </p:nvSpPr>
+        <p:spPr>
+          <a:xfrm>
+            <a:off x="9198864" y="4206240"/>
+            <a:ext cx="347472" cy="347472"/>
+          </a:xfrm>
+          <a:prstGeom prst="ellipse">
+            <a:avLst/>
+          </a:prstGeom>
+          <a:solidFill>
+            <a:srgbClr val="2F8A28"/>
+          </a:solidFill>
+          <a:ln w="12700">
+            <a:solidFill>
+              <a:srgbClr val="2F8A28"/>
+            </a:solidFill>
+            <a:prstDash val="solid"/>
+          </a:ln>
+        </p:spPr>
+      </p:sp>
+      <p:sp>
+        <p:nvSpPr>
+          <p:cNvPr id="17" name="Text 15"/>
+          <p:cNvSpPr/>
+          <p:nvPr/>
+        </p:nvSpPr>
+        <p:spPr>
+          <a:xfrm>
+            <a:off x="7909560" y="3977640"/>
+            <a:ext cx="2926080" cy="182880"/>
+          </a:xfrm>
+          <a:prstGeom prst="rect">
+            <a:avLst/>
+          </a:prstGeom>
+          <a:noFill/>
+          <a:ln/>
+        </p:spPr>
+        <p:txBody>
+          <a:bodyPr wrap="square" lIns="0" tIns="0" rIns="0" bIns="0" rtlCol="0" anchor="ctr"/>
+          <a:lstStyle/>
+          <a:p>
+            <a:pPr algn="ctr" indent="0" marL="0">
+              <a:buNone/>
+            </a:pPr>
+            <a:r>
+              <a:rPr lang="en-US" sz="1000" dirty="0">
+                <a:solidFill>
+                  <a:srgbClr val="003A63"/>
+                </a:solidFill>
+                <a:latin typeface="Aptos" pitchFamily="34" charset="0"/>
+                <a:ea typeface="Aptos" pitchFamily="34" charset="-122"/>
+                <a:cs typeface="Aptos" pitchFamily="34" charset="-120"/>
+              </a:rPr>
+              <a:t>Concept to action</a:t>
+            </a:r>
+            <a:endParaRPr lang="en-US" sz="1000" dirty="0"/>
+          </a:p>
+        </p:txBody>
+      </p:sp>
+      <p:sp>
+        <p:nvSpPr>
+          <p:cNvPr id="18" name="Shape 16"/>
+          <p:cNvSpPr/>
+          <p:nvPr/>
+        </p:nvSpPr>
+        <p:spPr>
+          <a:xfrm>
+            <a:off x="7635240" y="4498848"/>
+            <a:ext cx="3474720" cy="1143000"/>
+          </a:xfrm>
+          <a:prstGeom prst="roundRect">
+            <a:avLst>
+              <a:gd name="adj" fmla="val 9600"/>
             </a:avLst>
           </a:prstGeom>
           <a:solidFill>
@@ -3583,14 +3678,14 @@
       </p:sp>
       <p:sp>
         <p:nvSpPr>
-          <p:cNvPr id="16" name="Text 14"/>
-          <p:cNvSpPr/>
-          <p:nvPr/>
-        </p:nvSpPr>
-        <p:spPr>
-          <a:xfrm>
-            <a:off x="8074152" y="3666744"/>
-            <a:ext cx="2825496" cy="256032"/>
+          <p:cNvPr id="19" name="Text 17"/>
+          <p:cNvSpPr/>
+          <p:nvPr/>
+        </p:nvSpPr>
+        <p:spPr>
+          <a:xfrm>
+            <a:off x="7799832" y="4645152"/>
+            <a:ext cx="3145536" cy="256032"/>
           </a:xfrm>
           <a:prstGeom prst="rect">
             <a:avLst/>
@@ -3614,7 +3709,7 @@
                 <a:ea typeface="Aptos" pitchFamily="34" charset="-122"/>
                 <a:cs typeface="Aptos" pitchFamily="34" charset="-120"/>
               </a:rPr>
-              <a:t>Use this for</a:t>
+              <a:t>Apply it</a:t>
             </a:r>
             <a:endParaRPr lang="en-US" sz="1300" dirty="0"/>
           </a:p>
@@ -3622,14 +3717,14 @@
       </p:sp>
       <p:sp>
         <p:nvSpPr>
-          <p:cNvPr id="17" name="Text 15"/>
-          <p:cNvSpPr/>
-          <p:nvPr/>
-        </p:nvSpPr>
-        <p:spPr>
-          <a:xfrm>
-            <a:off x="8074152" y="4023360"/>
-            <a:ext cx="2825496" cy="1097280"/>
+          <p:cNvPr id="20" name="Text 18"/>
+          <p:cNvSpPr/>
+          <p:nvPr/>
+        </p:nvSpPr>
+        <p:spPr>
+          <a:xfrm>
+            <a:off x="7799832" y="5001768"/>
+            <a:ext cx="3145536" cy="502920"/>
           </a:xfrm>
           <a:prstGeom prst="rect">
             <a:avLst/>
@@ -3655,7 +3750,7 @@
                 <a:ea typeface="Aptos" pitchFamily="34" charset="-122"/>
                 <a:cs typeface="Aptos" pitchFamily="34" charset="-120"/>
               </a:rPr>
-              <a:t>Connect the concept to public health decisions, safeguards, documentation, or implementation work.</a:t>
+              <a:t>Connect the concept to public health purpose, responsible use, required safeguards, documentation, and the next action a department should take.</a:t>
             </a:r>
             <a:endParaRPr lang="en-US" sz="1550" dirty="0"/>
           </a:p>
@@ -3829,8 +3924,8 @@
         </p:nvSpPr>
         <p:spPr>
           <a:xfrm>
-            <a:off x="9966960" y="6537960"/>
-            <a:ext cx="1645920" cy="201168"/>
+            <a:off x="9646920" y="6537960"/>
+            <a:ext cx="1965960" cy="201168"/>
           </a:xfrm>
           <a:prstGeom prst="rect">
             <a:avLst/>
@@ -3854,7 +3949,7 @@
                 <a:ea typeface="Aptos" pitchFamily="34" charset="-122"/>
                 <a:cs typeface="Aptos" pitchFamily="34" charset="-120"/>
               </a:rPr>
-              <a:t>Â© Paula Soper</a:t>
+              <a:t>Copyright Paula Soper</a:t>
             </a:r>
             <a:endParaRPr lang="en-US" sz="800" dirty="0"/>
           </a:p>
@@ -3949,7 +4044,7 @@
         <p:spPr>
           <a:xfrm>
             <a:off x="868680" y="1508760"/>
-            <a:ext cx="6537960" cy="4160520"/>
+            <a:ext cx="6309360" cy="4160520"/>
           </a:xfrm>
           <a:prstGeom prst="rect">
             <a:avLst/>
@@ -4014,12 +4109,12 @@
         </p:nvSpPr>
         <p:spPr>
           <a:xfrm>
-            <a:off x="7909560" y="1417320"/>
-            <a:ext cx="3154680" cy="1828800"/>
+            <a:off x="7635240" y="1325880"/>
+            <a:ext cx="3474720" cy="1325880"/>
           </a:xfrm>
           <a:prstGeom prst="roundRect">
             <a:avLst>
-              <a:gd name="adj" fmla="val 6000"/>
+              <a:gd name="adj" fmla="val 8276"/>
             </a:avLst>
           </a:prstGeom>
           <a:solidFill>
@@ -4041,8 +4136,8 @@
         </p:nvSpPr>
         <p:spPr>
           <a:xfrm>
-            <a:off x="8074152" y="1563624"/>
-            <a:ext cx="2825496" cy="256032"/>
+            <a:off x="7799832" y="1472184"/>
+            <a:ext cx="3145536" cy="256032"/>
           </a:xfrm>
           <a:prstGeom prst="rect">
             <a:avLst/>
@@ -4066,7 +4161,7 @@
                 <a:ea typeface="Aptos" pitchFamily="34" charset="-122"/>
                 <a:cs typeface="Aptos" pitchFamily="34" charset="-120"/>
               </a:rPr>
-              <a:t>Key idea</a:t>
+              <a:t>Core concept</a:t>
             </a:r>
             <a:endParaRPr lang="en-US" sz="1300" dirty="0"/>
           </a:p>
@@ -4080,8 +4175,8 @@
         </p:nvSpPr>
         <p:spPr>
           <a:xfrm>
-            <a:off x="8074152" y="1920240"/>
-            <a:ext cx="2825496" cy="1188720"/>
+            <a:off x="7799832" y="1828800"/>
+            <a:ext cx="3145536" cy="685800"/>
           </a:xfrm>
           <a:prstGeom prst="rect">
             <a:avLst/>
@@ -4121,12 +4216,153 @@
         </p:nvSpPr>
         <p:spPr>
           <a:xfrm>
-            <a:off x="7909560" y="3520440"/>
-            <a:ext cx="3154680" cy="1737360"/>
+            <a:off x="7635240" y="2788920"/>
+            <a:ext cx="3474720" cy="1536192"/>
           </a:xfrm>
           <a:prstGeom prst="roundRect">
             <a:avLst>
-              <a:gd name="adj" fmla="val 6316"/>
+              <a:gd name="adj" fmla="val 7143"/>
+            </a:avLst>
+          </a:prstGeom>
+          <a:solidFill>
+            <a:srgbClr val="FFFFFF">
+              <a:alpha val="88000"/>
+            </a:srgbClr>
+          </a:solidFill>
+          <a:ln w="12700">
+            <a:solidFill>
+              <a:srgbClr val="D6E8F2"/>
+            </a:solidFill>
+            <a:prstDash val="solid"/>
+          </a:ln>
+        </p:spPr>
+      </p:sp>
+      <p:sp>
+        <p:nvSpPr>
+          <p:cNvPr id="14" name="Shape 12"/>
+          <p:cNvSpPr/>
+          <p:nvPr/>
+        </p:nvSpPr>
+        <p:spPr>
+          <a:xfrm>
+            <a:off x="8074152" y="3291840"/>
+            <a:ext cx="2596896" cy="749808"/>
+          </a:xfrm>
+          <a:prstGeom prst="rect">
+            <a:avLst/>
+          </a:prstGeom>
+          <a:solidFill>
+            <a:srgbClr val="EAF6F8"/>
+          </a:solidFill>
+          <a:ln w="12700">
+            <a:solidFill>
+              <a:srgbClr val="8ABBD8"/>
+            </a:solidFill>
+            <a:prstDash val="solid"/>
+          </a:ln>
+        </p:spPr>
+      </p:sp>
+      <p:sp>
+        <p:nvSpPr>
+          <p:cNvPr id="15" name="Shape 13"/>
+          <p:cNvSpPr/>
+          <p:nvPr/>
+        </p:nvSpPr>
+        <p:spPr>
+          <a:xfrm>
+            <a:off x="8202168" y="3721608"/>
+            <a:ext cx="2340864" cy="0"/>
+          </a:xfrm>
+          <a:prstGeom prst="line">
+            <a:avLst/>
+          </a:prstGeom>
+          <a:noFill/>
+          <a:ln w="19050">
+            <a:solidFill>
+              <a:srgbClr val="0068B7"/>
+            </a:solidFill>
+            <a:prstDash val="solid"/>
+          </a:ln>
+        </p:spPr>
+      </p:sp>
+      <p:sp>
+        <p:nvSpPr>
+          <p:cNvPr id="16" name="Shape 14"/>
+          <p:cNvSpPr/>
+          <p:nvPr/>
+        </p:nvSpPr>
+        <p:spPr>
+          <a:xfrm>
+            <a:off x="9198864" y="4206240"/>
+            <a:ext cx="347472" cy="347472"/>
+          </a:xfrm>
+          <a:prstGeom prst="ellipse">
+            <a:avLst/>
+          </a:prstGeom>
+          <a:solidFill>
+            <a:srgbClr val="2F8A28"/>
+          </a:solidFill>
+          <a:ln w="12700">
+            <a:solidFill>
+              <a:srgbClr val="2F8A28"/>
+            </a:solidFill>
+            <a:prstDash val="solid"/>
+          </a:ln>
+        </p:spPr>
+      </p:sp>
+      <p:sp>
+        <p:nvSpPr>
+          <p:cNvPr id="17" name="Text 15"/>
+          <p:cNvSpPr/>
+          <p:nvPr/>
+        </p:nvSpPr>
+        <p:spPr>
+          <a:xfrm>
+            <a:off x="7909560" y="3977640"/>
+            <a:ext cx="2926080" cy="182880"/>
+          </a:xfrm>
+          <a:prstGeom prst="rect">
+            <a:avLst/>
+          </a:prstGeom>
+          <a:noFill/>
+          <a:ln/>
+        </p:spPr>
+        <p:txBody>
+          <a:bodyPr wrap="square" lIns="0" tIns="0" rIns="0" bIns="0" rtlCol="0" anchor="ctr"/>
+          <a:lstStyle/>
+          <a:p>
+            <a:pPr algn="ctr" indent="0" marL="0">
+              <a:buNone/>
+            </a:pPr>
+            <a:r>
+              <a:rPr lang="en-US" sz="1000" dirty="0">
+                <a:solidFill>
+                  <a:srgbClr val="003A63"/>
+                </a:solidFill>
+                <a:latin typeface="Aptos" pitchFamily="34" charset="0"/>
+                <a:ea typeface="Aptos" pitchFamily="34" charset="-122"/>
+                <a:cs typeface="Aptos" pitchFamily="34" charset="-120"/>
+              </a:rPr>
+              <a:t>Concept to action</a:t>
+            </a:r>
+            <a:endParaRPr lang="en-US" sz="1000" dirty="0"/>
+          </a:p>
+        </p:txBody>
+      </p:sp>
+      <p:sp>
+        <p:nvSpPr>
+          <p:cNvPr id="18" name="Shape 16"/>
+          <p:cNvSpPr/>
+          <p:nvPr/>
+        </p:nvSpPr>
+        <p:spPr>
+          <a:xfrm>
+            <a:off x="7635240" y="4498848"/>
+            <a:ext cx="3474720" cy="1143000"/>
+          </a:xfrm>
+          <a:prstGeom prst="roundRect">
+            <a:avLst>
+              <a:gd name="adj" fmla="val 9600"/>
             </a:avLst>
           </a:prstGeom>
           <a:solidFill>
@@ -4142,14 +4378,14 @@
       </p:sp>
       <p:sp>
         <p:nvSpPr>
-          <p:cNvPr id="14" name="Text 12"/>
-          <p:cNvSpPr/>
-          <p:nvPr/>
-        </p:nvSpPr>
-        <p:spPr>
-          <a:xfrm>
-            <a:off x="8074152" y="3666744"/>
-            <a:ext cx="2825496" cy="256032"/>
+          <p:cNvPr id="19" name="Text 17"/>
+          <p:cNvSpPr/>
+          <p:nvPr/>
+        </p:nvSpPr>
+        <p:spPr>
+          <a:xfrm>
+            <a:off x="7799832" y="4645152"/>
+            <a:ext cx="3145536" cy="256032"/>
           </a:xfrm>
           <a:prstGeom prst="rect">
             <a:avLst/>
@@ -4173,7 +4409,7 @@
                 <a:ea typeface="Aptos" pitchFamily="34" charset="-122"/>
                 <a:cs typeface="Aptos" pitchFamily="34" charset="-120"/>
               </a:rPr>
-              <a:t>Use this for</a:t>
+              <a:t>Apply it</a:t>
             </a:r>
             <a:endParaRPr lang="en-US" sz="1300" dirty="0"/>
           </a:p>
@@ -4181,14 +4417,14 @@
       </p:sp>
       <p:sp>
         <p:nvSpPr>
-          <p:cNvPr id="15" name="Text 13"/>
-          <p:cNvSpPr/>
-          <p:nvPr/>
-        </p:nvSpPr>
-        <p:spPr>
-          <a:xfrm>
-            <a:off x="8074152" y="4023360"/>
-            <a:ext cx="2825496" cy="1097280"/>
+          <p:cNvPr id="20" name="Text 18"/>
+          <p:cNvSpPr/>
+          <p:nvPr/>
+        </p:nvSpPr>
+        <p:spPr>
+          <a:xfrm>
+            <a:off x="7799832" y="5001768"/>
+            <a:ext cx="3145536" cy="502920"/>
           </a:xfrm>
           <a:prstGeom prst="rect">
             <a:avLst/>
@@ -4214,7 +4450,7 @@
                 <a:ea typeface="Aptos" pitchFamily="34" charset="-122"/>
                 <a:cs typeface="Aptos" pitchFamily="34" charset="-120"/>
               </a:rPr>
-              <a:t>Connect the concept to public health decisions, safeguards, documentation, or implementation work.</a:t>
+              <a:t>Connect the concept to public health purpose, responsible use, required safeguards, documentation, and the next action a department should take.</a:t>
             </a:r>
             <a:endParaRPr lang="en-US" sz="1550" dirty="0"/>
           </a:p>
@@ -4388,8 +4624,8 @@
         </p:nvSpPr>
         <p:spPr>
           <a:xfrm>
-            <a:off x="9966960" y="6537960"/>
-            <a:ext cx="1645920" cy="201168"/>
+            <a:off x="9646920" y="6537960"/>
+            <a:ext cx="1965960" cy="201168"/>
           </a:xfrm>
           <a:prstGeom prst="rect">
             <a:avLst/>
@@ -4413,7 +4649,7 @@
                 <a:ea typeface="Aptos" pitchFamily="34" charset="-122"/>
                 <a:cs typeface="Aptos" pitchFamily="34" charset="-120"/>
               </a:rPr>
-              <a:t>Â© Paula Soper</a:t>
+              <a:t>Copyright Paula Soper</a:t>
             </a:r>
             <a:endParaRPr lang="en-US" sz="800" dirty="0"/>
           </a:p>
@@ -4460,77 +4696,13 @@
       </p:sp>
       <p:sp>
         <p:nvSpPr>
-          <p:cNvPr id="8" name="Shape 6"/>
+          <p:cNvPr id="8" name="Text 6"/>
           <p:cNvSpPr/>
           <p:nvPr/>
         </p:nvSpPr>
         <p:spPr>
           <a:xfrm>
             <a:off x="640080" y="658368"/>
-            <a:ext cx="420624" cy="420624"/>
-          </a:xfrm>
-          <a:prstGeom prst="ellipse">
-            <a:avLst/>
-          </a:prstGeom>
-          <a:solidFill>
-            <a:srgbClr val="0068B7"/>
-          </a:solidFill>
-          <a:ln w="12700">
-            <a:solidFill>
-              <a:srgbClr val="0068B7"/>
-            </a:solidFill>
-            <a:prstDash val="solid"/>
-          </a:ln>
-        </p:spPr>
-      </p:sp>
-      <p:sp>
-        <p:nvSpPr>
-          <p:cNvPr id="9" name="Text 7"/>
-          <p:cNvSpPr/>
-          <p:nvPr/>
-        </p:nvSpPr>
-        <p:spPr>
-          <a:xfrm>
-            <a:off x="640080" y="731520"/>
-            <a:ext cx="420624" cy="164592"/>
-          </a:xfrm>
-          <a:prstGeom prst="rect">
-            <a:avLst/>
-          </a:prstGeom>
-          <a:noFill/>
-          <a:ln/>
-        </p:spPr>
-        <p:txBody>
-          <a:bodyPr wrap="square" lIns="0" tIns="0" rIns="0" bIns="0" rtlCol="0" anchor="ctr"/>
-          <a:lstStyle/>
-          <a:p>
-            <a:pPr algn="ctr" indent="0" marL="0">
-              <a:buNone/>
-            </a:pPr>
-            <a:r>
-              <a:rPr lang="en-US" sz="1100" b="1" dirty="0">
-                <a:solidFill>
-                  <a:srgbClr val="FFFFFF"/>
-                </a:solidFill>
-                <a:latin typeface="Aptos" pitchFamily="34" charset="0"/>
-                <a:ea typeface="Aptos" pitchFamily="34" charset="-122"/>
-                <a:cs typeface="Aptos" pitchFamily="34" charset="-120"/>
-              </a:rPr>
-              <a:t>6</a:t>
-            </a:r>
-            <a:endParaRPr lang="en-US" sz="1100" dirty="0"/>
-          </a:p>
-        </p:txBody>
-      </p:sp>
-      <p:sp>
-        <p:nvSpPr>
-          <p:cNvPr id="10" name="Text 8"/>
-          <p:cNvSpPr/>
-          <p:nvPr/>
-        </p:nvSpPr>
-        <p:spPr>
-          <a:xfrm>
-            <a:off x="640080" y="621792"/>
             <a:ext cx="10881360" cy="713232"/>
           </a:xfrm>
           <a:prstGeom prst="rect">
@@ -4565,14 +4737,14 @@
       </p:sp>
       <p:sp>
         <p:nvSpPr>
-          <p:cNvPr id="11" name="Text 9"/>
+          <p:cNvPr id="9" name="Text 7"/>
           <p:cNvSpPr/>
           <p:nvPr/>
         </p:nvSpPr>
         <p:spPr>
           <a:xfrm>
             <a:off x="868680" y="1508760"/>
-            <a:ext cx="6537960" cy="4160520"/>
+            <a:ext cx="6309360" cy="4160520"/>
           </a:xfrm>
           <a:prstGeom prst="rect">
             <a:avLst/>
@@ -4631,18 +4803,18 @@
       </p:sp>
       <p:sp>
         <p:nvSpPr>
-          <p:cNvPr id="12" name="Shape 10"/>
-          <p:cNvSpPr/>
-          <p:nvPr/>
-        </p:nvSpPr>
-        <p:spPr>
-          <a:xfrm>
-            <a:off x="7909560" y="1417320"/>
-            <a:ext cx="3154680" cy="1828800"/>
+          <p:cNvPr id="10" name="Shape 8"/>
+          <p:cNvSpPr/>
+          <p:nvPr/>
+        </p:nvSpPr>
+        <p:spPr>
+          <a:xfrm>
+            <a:off x="7635240" y="1325880"/>
+            <a:ext cx="3474720" cy="1325880"/>
           </a:xfrm>
           <a:prstGeom prst="roundRect">
             <a:avLst>
-              <a:gd name="adj" fmla="val 6000"/>
+              <a:gd name="adj" fmla="val 8276"/>
             </a:avLst>
           </a:prstGeom>
           <a:solidFill>
@@ -4658,14 +4830,14 @@
       </p:sp>
       <p:sp>
         <p:nvSpPr>
-          <p:cNvPr id="13" name="Text 11"/>
-          <p:cNvSpPr/>
-          <p:nvPr/>
-        </p:nvSpPr>
-        <p:spPr>
-          <a:xfrm>
-            <a:off x="8074152" y="1563624"/>
-            <a:ext cx="2825496" cy="256032"/>
+          <p:cNvPr id="11" name="Text 9"/>
+          <p:cNvSpPr/>
+          <p:nvPr/>
+        </p:nvSpPr>
+        <p:spPr>
+          <a:xfrm>
+            <a:off x="7799832" y="1472184"/>
+            <a:ext cx="3145536" cy="256032"/>
           </a:xfrm>
           <a:prstGeom prst="rect">
             <a:avLst/>
@@ -4689,7 +4861,7 @@
                 <a:ea typeface="Aptos" pitchFamily="34" charset="-122"/>
                 <a:cs typeface="Aptos" pitchFamily="34" charset="-120"/>
               </a:rPr>
-              <a:t>Key idea</a:t>
+              <a:t>Risk check</a:t>
             </a:r>
             <a:endParaRPr lang="en-US" sz="1300" dirty="0"/>
           </a:p>
@@ -4697,14 +4869,14 @@
       </p:sp>
       <p:sp>
         <p:nvSpPr>
-          <p:cNvPr id="14" name="Text 12"/>
-          <p:cNvSpPr/>
-          <p:nvPr/>
-        </p:nvSpPr>
-        <p:spPr>
-          <a:xfrm>
-            <a:off x="8074152" y="1920240"/>
-            <a:ext cx="2825496" cy="1188720"/>
+          <p:cNvPr id="12" name="Text 10"/>
+          <p:cNvSpPr/>
+          <p:nvPr/>
+        </p:nvSpPr>
+        <p:spPr>
+          <a:xfrm>
+            <a:off x="7799832" y="1828800"/>
+            <a:ext cx="3145536" cy="685800"/>
           </a:xfrm>
           <a:prstGeom prst="rect">
             <a:avLst/>
@@ -4738,18 +4910,171 @@
       </p:sp>
       <p:sp>
         <p:nvSpPr>
-          <p:cNvPr id="15" name="Shape 13"/>
-          <p:cNvSpPr/>
-          <p:nvPr/>
-        </p:nvSpPr>
-        <p:spPr>
-          <a:xfrm>
-            <a:off x="7909560" y="3520440"/>
-            <a:ext cx="3154680" cy="1737360"/>
+          <p:cNvPr id="13" name="Shape 11"/>
+          <p:cNvSpPr/>
+          <p:nvPr/>
+        </p:nvSpPr>
+        <p:spPr>
+          <a:xfrm>
+            <a:off x="7635240" y="2788920"/>
+            <a:ext cx="3474720" cy="1536192"/>
           </a:xfrm>
           <a:prstGeom prst="roundRect">
             <a:avLst>
-              <a:gd name="adj" fmla="val 6316"/>
+              <a:gd name="adj" fmla="val 7143"/>
+            </a:avLst>
+          </a:prstGeom>
+          <a:solidFill>
+            <a:srgbClr val="FFFFFF">
+              <a:alpha val="88000"/>
+            </a:srgbClr>
+          </a:solidFill>
+          <a:ln w="12700">
+            <a:solidFill>
+              <a:srgbClr val="D6E8F2"/>
+            </a:solidFill>
+            <a:prstDash val="solid"/>
+          </a:ln>
+        </p:spPr>
+      </p:sp>
+      <p:sp>
+        <p:nvSpPr>
+          <p:cNvPr id="14" name="Shape 12"/>
+          <p:cNvSpPr/>
+          <p:nvPr/>
+        </p:nvSpPr>
+        <p:spPr>
+          <a:xfrm>
+            <a:off x="8046720" y="3108960"/>
+            <a:ext cx="2651760" cy="896112"/>
+          </a:xfrm>
+          <a:prstGeom prst="arc">
+            <a:avLst/>
+          </a:prstGeom>
+          <a:noFill/>
+          <a:ln w="25400">
+            <a:solidFill>
+              <a:srgbClr val="0068B7"/>
+            </a:solidFill>
+            <a:prstDash val="solid"/>
+          </a:ln>
+        </p:spPr>
+      </p:sp>
+      <p:sp>
+        <p:nvSpPr>
+          <p:cNvPr id="15" name="Text 13"/>
+          <p:cNvSpPr/>
+          <p:nvPr/>
+        </p:nvSpPr>
+        <p:spPr>
+          <a:xfrm>
+            <a:off x="7909560" y="3099816"/>
+            <a:ext cx="2926080" cy="256032"/>
+          </a:xfrm>
+          <a:prstGeom prst="rect">
+            <a:avLst/>
+          </a:prstGeom>
+          <a:noFill/>
+          <a:ln/>
+        </p:spPr>
+        <p:txBody>
+          <a:bodyPr wrap="square" lIns="0" tIns="0" rIns="0" bIns="0" rtlCol="0" anchor="ctr"/>
+          <a:lstStyle/>
+          <a:p>
+            <a:pPr algn="ctr" indent="0" marL="0">
+              <a:buNone/>
+            </a:pPr>
+            <a:r>
+              <a:rPr lang="en-US" sz="1500" b="1" dirty="0">
+                <a:solidFill>
+                  <a:srgbClr val="003A63"/>
+                </a:solidFill>
+                <a:latin typeface="Aptos" pitchFamily="34" charset="0"/>
+                <a:ea typeface="Aptos" pitchFamily="34" charset="-122"/>
+                <a:cs typeface="Aptos" pitchFamily="34" charset="-120"/>
+              </a:rPr>
+              <a:t>Risk</a:t>
+            </a:r>
+            <a:endParaRPr lang="en-US" sz="1500" dirty="0"/>
+          </a:p>
+        </p:txBody>
+      </p:sp>
+      <p:sp>
+        <p:nvSpPr>
+          <p:cNvPr id="16" name="Shape 14"/>
+          <p:cNvSpPr/>
+          <p:nvPr/>
+        </p:nvSpPr>
+        <p:spPr>
+          <a:xfrm>
+            <a:off x="8366760" y="3639312"/>
+            <a:ext cx="2011680" cy="0"/>
+          </a:xfrm>
+          <a:prstGeom prst="line">
+            <a:avLst/>
+          </a:prstGeom>
+          <a:noFill/>
+          <a:ln w="63500">
+            <a:solidFill>
+              <a:srgbClr val="2F8A28"/>
+            </a:solidFill>
+            <a:prstDash val="solid"/>
+          </a:ln>
+        </p:spPr>
+      </p:sp>
+      <p:sp>
+        <p:nvSpPr>
+          <p:cNvPr id="17" name="Text 15"/>
+          <p:cNvSpPr/>
+          <p:nvPr/>
+        </p:nvSpPr>
+        <p:spPr>
+          <a:xfrm>
+            <a:off x="7909560" y="3849624"/>
+            <a:ext cx="2926080" cy="164592"/>
+          </a:xfrm>
+          <a:prstGeom prst="rect">
+            <a:avLst/>
+          </a:prstGeom>
+          <a:noFill/>
+          <a:ln/>
+        </p:spPr>
+        <p:txBody>
+          <a:bodyPr wrap="square" lIns="0" tIns="0" rIns="0" bIns="0" rtlCol="0" anchor="ctr"/>
+          <a:lstStyle/>
+          <a:p>
+            <a:pPr algn="ctr" indent="0" marL="0">
+              <a:buNone/>
+            </a:pPr>
+            <a:r>
+              <a:rPr lang="en-US" sz="900" dirty="0">
+                <a:solidFill>
+                  <a:srgbClr val="003A63"/>
+                </a:solidFill>
+                <a:latin typeface="Aptos" pitchFamily="34" charset="0"/>
+                <a:ea typeface="Aptos" pitchFamily="34" charset="-122"/>
+                <a:cs typeface="Aptos" pitchFamily="34" charset="-120"/>
+              </a:rPr>
+              <a:t>Human review</a:t>
+            </a:r>
+            <a:endParaRPr lang="en-US" sz="900" dirty="0"/>
+          </a:p>
+        </p:txBody>
+      </p:sp>
+      <p:sp>
+        <p:nvSpPr>
+          <p:cNvPr id="18" name="Shape 16"/>
+          <p:cNvSpPr/>
+          <p:nvPr/>
+        </p:nvSpPr>
+        <p:spPr>
+          <a:xfrm>
+            <a:off x="7635240" y="4498848"/>
+            <a:ext cx="3474720" cy="1143000"/>
+          </a:xfrm>
+          <a:prstGeom prst="roundRect">
+            <a:avLst>
+              <a:gd name="adj" fmla="val 9600"/>
             </a:avLst>
           </a:prstGeom>
           <a:solidFill>
@@ -4765,14 +5090,14 @@
       </p:sp>
       <p:sp>
         <p:nvSpPr>
-          <p:cNvPr id="16" name="Text 14"/>
-          <p:cNvSpPr/>
-          <p:nvPr/>
-        </p:nvSpPr>
-        <p:spPr>
-          <a:xfrm>
-            <a:off x="8074152" y="3666744"/>
-            <a:ext cx="2825496" cy="256032"/>
+          <p:cNvPr id="19" name="Text 17"/>
+          <p:cNvSpPr/>
+          <p:nvPr/>
+        </p:nvSpPr>
+        <p:spPr>
+          <a:xfrm>
+            <a:off x="7799832" y="4645152"/>
+            <a:ext cx="3145536" cy="256032"/>
           </a:xfrm>
           <a:prstGeom prst="rect">
             <a:avLst/>
@@ -4796,7 +5121,7 @@
                 <a:ea typeface="Aptos" pitchFamily="34" charset="-122"/>
                 <a:cs typeface="Aptos" pitchFamily="34" charset="-120"/>
               </a:rPr>
-              <a:t>Use this for</a:t>
+              <a:t>Safeguard to plan</a:t>
             </a:r>
             <a:endParaRPr lang="en-US" sz="1300" dirty="0"/>
           </a:p>
@@ -4804,14 +5129,14 @@
       </p:sp>
       <p:sp>
         <p:nvSpPr>
-          <p:cNvPr id="17" name="Text 15"/>
-          <p:cNvSpPr/>
-          <p:nvPr/>
-        </p:nvSpPr>
-        <p:spPr>
-          <a:xfrm>
-            <a:off x="8074152" y="4023360"/>
-            <a:ext cx="2825496" cy="1097280"/>
+          <p:cNvPr id="20" name="Text 18"/>
+          <p:cNvSpPr/>
+          <p:nvPr/>
+        </p:nvSpPr>
+        <p:spPr>
+          <a:xfrm>
+            <a:off x="7799832" y="5001768"/>
+            <a:ext cx="3145536" cy="502920"/>
           </a:xfrm>
           <a:prstGeom prst="rect">
             <a:avLst/>
@@ -4837,7 +5162,7 @@
                 <a:ea typeface="Aptos" pitchFamily="34" charset="-122"/>
                 <a:cs typeface="Aptos" pitchFamily="34" charset="-120"/>
               </a:rPr>
-              <a:t>Connect the concept to public health decisions, safeguards, documentation, or implementation work.</a:t>
+              <a:t>Identify what could go wrong, who could be affected, what safeguards are needed, and what evidence should be reviewed before use expands.</a:t>
             </a:r>
             <a:endParaRPr lang="en-US" sz="1550" dirty="0"/>
           </a:p>
@@ -5011,8 +5336,8 @@
         </p:nvSpPr>
         <p:spPr>
           <a:xfrm>
-            <a:off x="9966960" y="6537960"/>
-            <a:ext cx="1645920" cy="201168"/>
+            <a:off x="9646920" y="6537960"/>
+            <a:ext cx="1965960" cy="201168"/>
           </a:xfrm>
           <a:prstGeom prst="rect">
             <a:avLst/>
@@ -5036,7 +5361,7 @@
                 <a:ea typeface="Aptos" pitchFamily="34" charset="-122"/>
                 <a:cs typeface="Aptos" pitchFamily="34" charset="-120"/>
               </a:rPr>
-              <a:t>Â© Paula Soper</a:t>
+              <a:t>Copyright Paula Soper</a:t>
             </a:r>
             <a:endParaRPr lang="en-US" sz="800" dirty="0"/>
           </a:p>
@@ -5131,7 +5456,7 @@
         <p:spPr>
           <a:xfrm>
             <a:off x="868680" y="1508760"/>
-            <a:ext cx="6537960" cy="4160520"/>
+            <a:ext cx="6309360" cy="4160520"/>
           </a:xfrm>
           <a:prstGeom prst="rect">
             <a:avLst/>
@@ -5196,12 +5521,12 @@
         </p:nvSpPr>
         <p:spPr>
           <a:xfrm>
-            <a:off x="7909560" y="1417320"/>
-            <a:ext cx="3154680" cy="1828800"/>
+            <a:off x="7635240" y="1325880"/>
+            <a:ext cx="3474720" cy="1325880"/>
           </a:xfrm>
           <a:prstGeom prst="roundRect">
             <a:avLst>
-              <a:gd name="adj" fmla="val 6000"/>
+              <a:gd name="adj" fmla="val 8276"/>
             </a:avLst>
           </a:prstGeom>
           <a:solidFill>
@@ -5223,8 +5548,8 @@
         </p:nvSpPr>
         <p:spPr>
           <a:xfrm>
-            <a:off x="8074152" y="1563624"/>
-            <a:ext cx="2825496" cy="256032"/>
+            <a:off x="7799832" y="1472184"/>
+            <a:ext cx="3145536" cy="256032"/>
           </a:xfrm>
           <a:prstGeom prst="rect">
             <a:avLst/>
@@ -5248,7 +5573,7 @@
                 <a:ea typeface="Aptos" pitchFamily="34" charset="-122"/>
                 <a:cs typeface="Aptos" pitchFamily="34" charset="-120"/>
               </a:rPr>
-              <a:t>Key idea</a:t>
+              <a:t>Risk check</a:t>
             </a:r>
             <a:endParaRPr lang="en-US" sz="1300" dirty="0"/>
           </a:p>
@@ -5262,8 +5587,8 @@
         </p:nvSpPr>
         <p:spPr>
           <a:xfrm>
-            <a:off x="8074152" y="1920240"/>
-            <a:ext cx="2825496" cy="1188720"/>
+            <a:off x="7799832" y="1828800"/>
+            <a:ext cx="3145536" cy="685800"/>
           </a:xfrm>
           <a:prstGeom prst="rect">
             <a:avLst/>
@@ -5303,12 +5628,165 @@
         </p:nvSpPr>
         <p:spPr>
           <a:xfrm>
-            <a:off x="7909560" y="3520440"/>
-            <a:ext cx="3154680" cy="1737360"/>
+            <a:off x="7635240" y="2788920"/>
+            <a:ext cx="3474720" cy="1536192"/>
           </a:xfrm>
           <a:prstGeom prst="roundRect">
             <a:avLst>
-              <a:gd name="adj" fmla="val 6316"/>
+              <a:gd name="adj" fmla="val 7143"/>
+            </a:avLst>
+          </a:prstGeom>
+          <a:solidFill>
+            <a:srgbClr val="FFFFFF">
+              <a:alpha val="88000"/>
+            </a:srgbClr>
+          </a:solidFill>
+          <a:ln w="12700">
+            <a:solidFill>
+              <a:srgbClr val="D6E8F2"/>
+            </a:solidFill>
+            <a:prstDash val="solid"/>
+          </a:ln>
+        </p:spPr>
+      </p:sp>
+      <p:sp>
+        <p:nvSpPr>
+          <p:cNvPr id="14" name="Shape 12"/>
+          <p:cNvSpPr/>
+          <p:nvPr/>
+        </p:nvSpPr>
+        <p:spPr>
+          <a:xfrm>
+            <a:off x="8046720" y="3108960"/>
+            <a:ext cx="2651760" cy="896112"/>
+          </a:xfrm>
+          <a:prstGeom prst="arc">
+            <a:avLst/>
+          </a:prstGeom>
+          <a:noFill/>
+          <a:ln w="25400">
+            <a:solidFill>
+              <a:srgbClr val="0068B7"/>
+            </a:solidFill>
+            <a:prstDash val="solid"/>
+          </a:ln>
+        </p:spPr>
+      </p:sp>
+      <p:sp>
+        <p:nvSpPr>
+          <p:cNvPr id="15" name="Text 13"/>
+          <p:cNvSpPr/>
+          <p:nvPr/>
+        </p:nvSpPr>
+        <p:spPr>
+          <a:xfrm>
+            <a:off x="7909560" y="3099816"/>
+            <a:ext cx="2926080" cy="256032"/>
+          </a:xfrm>
+          <a:prstGeom prst="rect">
+            <a:avLst/>
+          </a:prstGeom>
+          <a:noFill/>
+          <a:ln/>
+        </p:spPr>
+        <p:txBody>
+          <a:bodyPr wrap="square" lIns="0" tIns="0" rIns="0" bIns="0" rtlCol="0" anchor="ctr"/>
+          <a:lstStyle/>
+          <a:p>
+            <a:pPr algn="ctr" indent="0" marL="0">
+              <a:buNone/>
+            </a:pPr>
+            <a:r>
+              <a:rPr lang="en-US" sz="1500" b="1" dirty="0">
+                <a:solidFill>
+                  <a:srgbClr val="003A63"/>
+                </a:solidFill>
+                <a:latin typeface="Aptos" pitchFamily="34" charset="0"/>
+                <a:ea typeface="Aptos" pitchFamily="34" charset="-122"/>
+                <a:cs typeface="Aptos" pitchFamily="34" charset="-120"/>
+              </a:rPr>
+              <a:t>Risk</a:t>
+            </a:r>
+            <a:endParaRPr lang="en-US" sz="1500" dirty="0"/>
+          </a:p>
+        </p:txBody>
+      </p:sp>
+      <p:sp>
+        <p:nvSpPr>
+          <p:cNvPr id="16" name="Shape 14"/>
+          <p:cNvSpPr/>
+          <p:nvPr/>
+        </p:nvSpPr>
+        <p:spPr>
+          <a:xfrm>
+            <a:off x="8366760" y="3639312"/>
+            <a:ext cx="2011680" cy="0"/>
+          </a:xfrm>
+          <a:prstGeom prst="line">
+            <a:avLst/>
+          </a:prstGeom>
+          <a:noFill/>
+          <a:ln w="63500">
+            <a:solidFill>
+              <a:srgbClr val="2F8A28"/>
+            </a:solidFill>
+            <a:prstDash val="solid"/>
+          </a:ln>
+        </p:spPr>
+      </p:sp>
+      <p:sp>
+        <p:nvSpPr>
+          <p:cNvPr id="17" name="Text 15"/>
+          <p:cNvSpPr/>
+          <p:nvPr/>
+        </p:nvSpPr>
+        <p:spPr>
+          <a:xfrm>
+            <a:off x="7909560" y="3849624"/>
+            <a:ext cx="2926080" cy="164592"/>
+          </a:xfrm>
+          <a:prstGeom prst="rect">
+            <a:avLst/>
+          </a:prstGeom>
+          <a:noFill/>
+          <a:ln/>
+        </p:spPr>
+        <p:txBody>
+          <a:bodyPr wrap="square" lIns="0" tIns="0" rIns="0" bIns="0" rtlCol="0" anchor="ctr"/>
+          <a:lstStyle/>
+          <a:p>
+            <a:pPr algn="ctr" indent="0" marL="0">
+              <a:buNone/>
+            </a:pPr>
+            <a:r>
+              <a:rPr lang="en-US" sz="900" dirty="0">
+                <a:solidFill>
+                  <a:srgbClr val="003A63"/>
+                </a:solidFill>
+                <a:latin typeface="Aptos" pitchFamily="34" charset="0"/>
+                <a:ea typeface="Aptos" pitchFamily="34" charset="-122"/>
+                <a:cs typeface="Aptos" pitchFamily="34" charset="-120"/>
+              </a:rPr>
+              <a:t>Human review</a:t>
+            </a:r>
+            <a:endParaRPr lang="en-US" sz="900" dirty="0"/>
+          </a:p>
+        </p:txBody>
+      </p:sp>
+      <p:sp>
+        <p:nvSpPr>
+          <p:cNvPr id="18" name="Shape 16"/>
+          <p:cNvSpPr/>
+          <p:nvPr/>
+        </p:nvSpPr>
+        <p:spPr>
+          <a:xfrm>
+            <a:off x="7635240" y="4498848"/>
+            <a:ext cx="3474720" cy="1143000"/>
+          </a:xfrm>
+          <a:prstGeom prst="roundRect">
+            <a:avLst>
+              <a:gd name="adj" fmla="val 9600"/>
             </a:avLst>
           </a:prstGeom>
           <a:solidFill>
@@ -5324,14 +5802,14 @@
       </p:sp>
       <p:sp>
         <p:nvSpPr>
-          <p:cNvPr id="14" name="Text 12"/>
-          <p:cNvSpPr/>
-          <p:nvPr/>
-        </p:nvSpPr>
-        <p:spPr>
-          <a:xfrm>
-            <a:off x="8074152" y="3666744"/>
-            <a:ext cx="2825496" cy="256032"/>
+          <p:cNvPr id="19" name="Text 17"/>
+          <p:cNvSpPr/>
+          <p:nvPr/>
+        </p:nvSpPr>
+        <p:spPr>
+          <a:xfrm>
+            <a:off x="7799832" y="4645152"/>
+            <a:ext cx="3145536" cy="256032"/>
           </a:xfrm>
           <a:prstGeom prst="rect">
             <a:avLst/>
@@ -5355,7 +5833,7 @@
                 <a:ea typeface="Aptos" pitchFamily="34" charset="-122"/>
                 <a:cs typeface="Aptos" pitchFamily="34" charset="-120"/>
               </a:rPr>
-              <a:t>Use this for</a:t>
+              <a:t>Safeguard to plan</a:t>
             </a:r>
             <a:endParaRPr lang="en-US" sz="1300" dirty="0"/>
           </a:p>
@@ -5363,14 +5841,14 @@
       </p:sp>
       <p:sp>
         <p:nvSpPr>
-          <p:cNvPr id="15" name="Text 13"/>
-          <p:cNvSpPr/>
-          <p:nvPr/>
-        </p:nvSpPr>
-        <p:spPr>
-          <a:xfrm>
-            <a:off x="8074152" y="4023360"/>
-            <a:ext cx="2825496" cy="1097280"/>
+          <p:cNvPr id="20" name="Text 18"/>
+          <p:cNvSpPr/>
+          <p:nvPr/>
+        </p:nvSpPr>
+        <p:spPr>
+          <a:xfrm>
+            <a:off x="7799832" y="5001768"/>
+            <a:ext cx="3145536" cy="502920"/>
           </a:xfrm>
           <a:prstGeom prst="rect">
             <a:avLst/>
@@ -5396,7 +5874,7 @@
                 <a:ea typeface="Aptos" pitchFamily="34" charset="-122"/>
                 <a:cs typeface="Aptos" pitchFamily="34" charset="-120"/>
               </a:rPr>
-              <a:t>Connect the concept to public health decisions, safeguards, documentation, or implementation work.</a:t>
+              <a:t>Identify what could go wrong, who could be affected, what safeguards are needed, and what evidence should be reviewed before use expands.</a:t>
             </a:r>
             <a:endParaRPr lang="en-US" sz="1550" dirty="0"/>
           </a:p>
@@ -5570,8 +6048,8 @@
         </p:nvSpPr>
         <p:spPr>
           <a:xfrm>
-            <a:off x="9966960" y="6537960"/>
-            <a:ext cx="1645920" cy="201168"/>
+            <a:off x="9646920" y="6537960"/>
+            <a:ext cx="1965960" cy="201168"/>
           </a:xfrm>
           <a:prstGeom prst="rect">
             <a:avLst/>
@@ -5595,7 +6073,7 @@
                 <a:ea typeface="Aptos" pitchFamily="34" charset="-122"/>
                 <a:cs typeface="Aptos" pitchFamily="34" charset="-120"/>
               </a:rPr>
-              <a:t>Â© Paula Soper</a:t>
+              <a:t>Copyright Paula Soper</a:t>
             </a:r>
             <a:endParaRPr lang="en-US" sz="800" dirty="0"/>
           </a:p>
@@ -5642,17 +6120,262 @@
       </p:sp>
       <p:sp>
         <p:nvSpPr>
-          <p:cNvPr id="8" name="Shape 6"/>
+          <p:cNvPr id="8" name="Text 6"/>
           <p:cNvSpPr/>
           <p:nvPr/>
         </p:nvSpPr>
         <p:spPr>
           <a:xfrm>
             <a:off x="640080" y="658368"/>
-            <a:ext cx="420624" cy="420624"/>
-          </a:xfrm>
-          <a:prstGeom prst="ellipse">
-            <a:avLst/>
+            <a:ext cx="10881360" cy="713232"/>
+          </a:xfrm>
+          <a:prstGeom prst="rect">
+            <a:avLst/>
+          </a:prstGeom>
+          <a:noFill/>
+          <a:ln/>
+        </p:spPr>
+        <p:txBody>
+          <a:bodyPr wrap="square" lIns="0" tIns="0" rIns="0" bIns="0" rtlCol="0" anchor="ctr">
+            <a:normAutofit/>
+          </a:bodyPr>
+          <a:lstStyle/>
+          <a:p>
+            <a:pPr indent="0" marL="0">
+              <a:buNone/>
+            </a:pPr>
+            <a:r>
+              <a:rPr lang="en-US" sz="3400" b="1" dirty="0">
+                <a:solidFill>
+                  <a:srgbClr val="003A63"/>
+                </a:solidFill>
+                <a:latin typeface="Aptos Display" pitchFamily="34" charset="0"/>
+                <a:ea typeface="Aptos Display" pitchFamily="34" charset="-122"/>
+                <a:cs typeface="Aptos Display" pitchFamily="34" charset="-120"/>
+              </a:rPr>
+              <a:t>Application to AI-Supported Workflows</a:t>
+            </a:r>
+            <a:endParaRPr lang="en-US" sz="3400" dirty="0"/>
+          </a:p>
+        </p:txBody>
+      </p:sp>
+      <p:sp>
+        <p:nvSpPr>
+          <p:cNvPr id="9" name="Text 7"/>
+          <p:cNvSpPr/>
+          <p:nvPr/>
+        </p:nvSpPr>
+        <p:spPr>
+          <a:xfrm>
+            <a:off x="868680" y="1508760"/>
+            <a:ext cx="6309360" cy="4160520"/>
+          </a:xfrm>
+          <a:prstGeom prst="rect">
+            <a:avLst/>
+          </a:prstGeom>
+          <a:noFill/>
+          <a:ln/>
+        </p:spPr>
+        <p:txBody>
+          <a:bodyPr wrap="square" lIns="635" tIns="635" rIns="635" bIns="635" rtlCol="0" anchor="t">
+            <a:normAutofit/>
+          </a:bodyPr>
+          <a:lstStyle/>
+          <a:p>
+            <a:r>
+              <a:rPr lang="en-US" sz="2100" dirty="0">
+                <a:solidFill>
+                  <a:srgbClr val="17364A"/>
+                </a:solidFill>
+                <a:latin typeface="Aptos" pitchFamily="34" charset="0"/>
+                <a:ea typeface="Aptos" pitchFamily="34" charset="-122"/>
+                <a:cs typeface="Aptos" pitchFamily="34" charset="-120"/>
+              </a:rPr>
+              <a:t>Machine learning may support generative AI, predictive analytics, NLP, anomaly detection, and agentic.</a:t>
+            </a:r>
+            <a:endParaRPr lang="en-US" sz="2100" dirty="0"/>
+          </a:p>
+          <a:p>
+            <a:r>
+              <a:rPr lang="en-US" sz="2100" dirty="0">
+                <a:solidFill>
+                  <a:srgbClr val="17364A"/>
+                </a:solidFill>
+                <a:latin typeface="Aptos" pitchFamily="34" charset="0"/>
+                <a:ea typeface="Aptos" pitchFamily="34" charset="-122"/>
+                <a:cs typeface="Aptos" pitchFamily="34" charset="-120"/>
+              </a:rPr>
+              <a:t>In generative AI systems, machine learning concepts help staff understand why outputs may be fluent but.</a:t>
+            </a:r>
+            <a:endParaRPr lang="en-US" sz="2100" dirty="0"/>
+          </a:p>
+          <a:p>
+            <a:r>
+              <a:rPr lang="en-US" sz="2100" dirty="0">
+                <a:solidFill>
+                  <a:srgbClr val="17364A"/>
+                </a:solidFill>
+                <a:latin typeface="Aptos" pitchFamily="34" charset="0"/>
+                <a:ea typeface="Aptos" pitchFamily="34" charset="-122"/>
+                <a:cs typeface="Aptos" pitchFamily="34" charset="-120"/>
+              </a:rPr>
+              <a:t>In predictive workflows, machine learning literacy helps staff evaluate risk scores, thresholds, and.</a:t>
+            </a:r>
+            <a:endParaRPr lang="en-US" sz="2100" dirty="0"/>
+          </a:p>
+        </p:txBody>
+      </p:sp>
+      <p:sp>
+        <p:nvSpPr>
+          <p:cNvPr id="10" name="Shape 8"/>
+          <p:cNvSpPr/>
+          <p:nvPr/>
+        </p:nvSpPr>
+        <p:spPr>
+          <a:xfrm>
+            <a:off x="7635240" y="1325880"/>
+            <a:ext cx="3474720" cy="1325880"/>
+          </a:xfrm>
+          <a:prstGeom prst="roundRect">
+            <a:avLst>
+              <a:gd name="adj" fmla="val 8276"/>
+            </a:avLst>
+          </a:prstGeom>
+          <a:solidFill>
+            <a:srgbClr val="EEF8ED"/>
+          </a:solidFill>
+          <a:ln w="12700">
+            <a:solidFill>
+              <a:srgbClr val="B9D7E6"/>
+            </a:solidFill>
+            <a:prstDash val="solid"/>
+          </a:ln>
+        </p:spPr>
+      </p:sp>
+      <p:sp>
+        <p:nvSpPr>
+          <p:cNvPr id="11" name="Text 9"/>
+          <p:cNvSpPr/>
+          <p:nvPr/>
+        </p:nvSpPr>
+        <p:spPr>
+          <a:xfrm>
+            <a:off x="7799832" y="1472184"/>
+            <a:ext cx="3145536" cy="256032"/>
+          </a:xfrm>
+          <a:prstGeom prst="rect">
+            <a:avLst/>
+          </a:prstGeom>
+          <a:noFill/>
+          <a:ln/>
+        </p:spPr>
+        <p:txBody>
+          <a:bodyPr wrap="square" lIns="0" tIns="0" rIns="0" bIns="0" rtlCol="0" anchor="ctr"/>
+          <a:lstStyle/>
+          <a:p>
+            <a:pPr indent="0" marL="0">
+              <a:buNone/>
+            </a:pPr>
+            <a:r>
+              <a:rPr lang="en-US" sz="1300" b="1" dirty="0">
+                <a:solidFill>
+                  <a:srgbClr val="0068B7"/>
+                </a:solidFill>
+                <a:latin typeface="Aptos" pitchFamily="34" charset="0"/>
+                <a:ea typeface="Aptos" pitchFamily="34" charset="-122"/>
+                <a:cs typeface="Aptos" pitchFamily="34" charset="-120"/>
+              </a:rPr>
+              <a:t>Implementation cue</a:t>
+            </a:r>
+            <a:endParaRPr lang="en-US" sz="1300" dirty="0"/>
+          </a:p>
+        </p:txBody>
+      </p:sp>
+      <p:sp>
+        <p:nvSpPr>
+          <p:cNvPr id="12" name="Text 10"/>
+          <p:cNvSpPr/>
+          <p:nvPr/>
+        </p:nvSpPr>
+        <p:spPr>
+          <a:xfrm>
+            <a:off x="7799832" y="1828800"/>
+            <a:ext cx="3145536" cy="685800"/>
+          </a:xfrm>
+          <a:prstGeom prst="rect">
+            <a:avLst/>
+          </a:prstGeom>
+          <a:noFill/>
+          <a:ln/>
+        </p:spPr>
+        <p:txBody>
+          <a:bodyPr wrap="square" lIns="0" tIns="0" rIns="0" bIns="0" rtlCol="0" anchor="t">
+            <a:normAutofit/>
+          </a:bodyPr>
+          <a:lstStyle/>
+          <a:p>
+            <a:pPr indent="0" marL="0">
+              <a:buNone/>
+            </a:pPr>
+            <a:r>
+              <a:rPr lang="en-US" sz="1550" dirty="0">
+                <a:solidFill>
+                  <a:srgbClr val="17364A"/>
+                </a:solidFill>
+                <a:latin typeface="Aptos" pitchFamily="34" charset="0"/>
+                <a:ea typeface="Aptos" pitchFamily="34" charset="-122"/>
+                <a:cs typeface="Aptos" pitchFamily="34" charset="-120"/>
+              </a:rPr>
+              <a:t>Machine learning may support generative AI, predictive analytics, NLP, anomaly detection, and agentic.</a:t>
+            </a:r>
+            <a:endParaRPr lang="en-US" sz="1550" dirty="0"/>
+          </a:p>
+        </p:txBody>
+      </p:sp>
+      <p:sp>
+        <p:nvSpPr>
+          <p:cNvPr id="13" name="Shape 11"/>
+          <p:cNvSpPr/>
+          <p:nvPr/>
+        </p:nvSpPr>
+        <p:spPr>
+          <a:xfrm>
+            <a:off x="7635240" y="2788920"/>
+            <a:ext cx="3474720" cy="1536192"/>
+          </a:xfrm>
+          <a:prstGeom prst="roundRect">
+            <a:avLst>
+              <a:gd name="adj" fmla="val 7143"/>
+            </a:avLst>
+          </a:prstGeom>
+          <a:solidFill>
+            <a:srgbClr val="FFFFFF">
+              <a:alpha val="88000"/>
+            </a:srgbClr>
+          </a:solidFill>
+          <a:ln w="12700">
+            <a:solidFill>
+              <a:srgbClr val="D6E8F2"/>
+            </a:solidFill>
+            <a:prstDash val="solid"/>
+          </a:ln>
+        </p:spPr>
+      </p:sp>
+      <p:sp>
+        <p:nvSpPr>
+          <p:cNvPr id="14" name="Shape 12"/>
+          <p:cNvSpPr/>
+          <p:nvPr/>
+        </p:nvSpPr>
+        <p:spPr>
+          <a:xfrm>
+            <a:off x="7927848" y="3319272"/>
+            <a:ext cx="792480" cy="749808"/>
+          </a:xfrm>
+          <a:prstGeom prst="roundRect">
+            <a:avLst>
+              <a:gd name="adj" fmla="val 14634"/>
+            </a:avLst>
           </a:prstGeom>
           <a:solidFill>
             <a:srgbClr val="0068B7"/>
@@ -5667,53 +6390,14 @@
       </p:sp>
       <p:sp>
         <p:nvSpPr>
-          <p:cNvPr id="9" name="Text 7"/>
-          <p:cNvSpPr/>
-          <p:nvPr/>
-        </p:nvSpPr>
-        <p:spPr>
-          <a:xfrm>
-            <a:off x="640080" y="731520"/>
-            <a:ext cx="420624" cy="164592"/>
-          </a:xfrm>
-          <a:prstGeom prst="rect">
-            <a:avLst/>
-          </a:prstGeom>
-          <a:noFill/>
-          <a:ln/>
-        </p:spPr>
-        <p:txBody>
-          <a:bodyPr wrap="square" lIns="0" tIns="0" rIns="0" bIns="0" rtlCol="0" anchor="ctr"/>
-          <a:lstStyle/>
-          <a:p>
-            <a:pPr algn="ctr" indent="0" marL="0">
-              <a:buNone/>
-            </a:pPr>
-            <a:r>
-              <a:rPr lang="en-US" sz="1100" b="1" dirty="0">
-                <a:solidFill>
-                  <a:srgbClr val="FFFFFF"/>
-                </a:solidFill>
-                <a:latin typeface="Aptos" pitchFamily="34" charset="0"/>
-                <a:ea typeface="Aptos" pitchFamily="34" charset="-122"/>
-                <a:cs typeface="Aptos" pitchFamily="34" charset="-120"/>
-              </a:rPr>
-              <a:t>7</a:t>
-            </a:r>
-            <a:endParaRPr lang="en-US" sz="1100" dirty="0"/>
-          </a:p>
-        </p:txBody>
-      </p:sp>
-      <p:sp>
-        <p:nvSpPr>
-          <p:cNvPr id="10" name="Text 8"/>
-          <p:cNvSpPr/>
-          <p:nvPr/>
-        </p:nvSpPr>
-        <p:spPr>
-          <a:xfrm>
-            <a:off x="640080" y="621792"/>
-            <a:ext cx="10881360" cy="713232"/>
+          <p:cNvPr id="15" name="Text 13"/>
+          <p:cNvSpPr/>
+          <p:nvPr/>
+        </p:nvSpPr>
+        <p:spPr>
+          <a:xfrm>
+            <a:off x="8001000" y="3511296"/>
+            <a:ext cx="646176" cy="310896"/>
           </a:xfrm>
           <a:prstGeom prst="rect">
             <a:avLst/>
@@ -5727,112 +6411,46 @@
           </a:bodyPr>
           <a:lstStyle/>
           <a:p>
-            <a:pPr indent="0" marL="0">
-              <a:buNone/>
-            </a:pPr>
-            <a:r>
-              <a:rPr lang="en-US" sz="3400" b="1" dirty="0">
-                <a:solidFill>
-                  <a:srgbClr val="003A63"/>
-                </a:solidFill>
-                <a:latin typeface="Aptos Display" pitchFamily="34" charset="0"/>
-                <a:ea typeface="Aptos Display" pitchFamily="34" charset="-122"/>
-                <a:cs typeface="Aptos Display" pitchFamily="34" charset="-120"/>
-              </a:rPr>
-              <a:t>Application to AI-Supported Workflows</a:t>
-            </a:r>
-            <a:endParaRPr lang="en-US" sz="3400" dirty="0"/>
-          </a:p>
-        </p:txBody>
-      </p:sp>
-      <p:sp>
-        <p:nvSpPr>
-          <p:cNvPr id="11" name="Text 9"/>
-          <p:cNvSpPr/>
-          <p:nvPr/>
-        </p:nvSpPr>
-        <p:spPr>
-          <a:xfrm>
-            <a:off x="868680" y="1508760"/>
-            <a:ext cx="6537960" cy="4160520"/>
-          </a:xfrm>
-          <a:prstGeom prst="rect">
-            <a:avLst/>
-          </a:prstGeom>
-          <a:noFill/>
-          <a:ln/>
-        </p:spPr>
-        <p:txBody>
-          <a:bodyPr wrap="square" lIns="635" tIns="635" rIns="635" bIns="635" rtlCol="0" anchor="t">
-            <a:normAutofit/>
-          </a:bodyPr>
-          <a:lstStyle/>
-          <a:p>
-            <a:r>
-              <a:rPr lang="en-US" sz="2100" dirty="0">
-                <a:solidFill>
-                  <a:srgbClr val="17364A"/>
-                </a:solidFill>
-                <a:latin typeface="Aptos" pitchFamily="34" charset="0"/>
-                <a:ea typeface="Aptos" pitchFamily="34" charset="-122"/>
-                <a:cs typeface="Aptos" pitchFamily="34" charset="-120"/>
-              </a:rPr>
-              <a:t>Machine learning may support generative AI, predictive analytics, NLP, anomaly detection, and agentic.</a:t>
-            </a:r>
-            <a:endParaRPr lang="en-US" sz="2100" dirty="0"/>
-          </a:p>
-          <a:p>
-            <a:r>
-              <a:rPr lang="en-US" sz="2100" dirty="0">
-                <a:solidFill>
-                  <a:srgbClr val="17364A"/>
-                </a:solidFill>
-                <a:latin typeface="Aptos" pitchFamily="34" charset="0"/>
-                <a:ea typeface="Aptos" pitchFamily="34" charset="-122"/>
-                <a:cs typeface="Aptos" pitchFamily="34" charset="-120"/>
-              </a:rPr>
-              <a:t>In generative AI systems, machine learning concepts help staff understand why outputs may be fluent but.</a:t>
-            </a:r>
-            <a:endParaRPr lang="en-US" sz="2100" dirty="0"/>
-          </a:p>
-          <a:p>
-            <a:r>
-              <a:rPr lang="en-US" sz="2100" dirty="0">
-                <a:solidFill>
-                  <a:srgbClr val="17364A"/>
-                </a:solidFill>
-                <a:latin typeface="Aptos" pitchFamily="34" charset="0"/>
-                <a:ea typeface="Aptos" pitchFamily="34" charset="-122"/>
-                <a:cs typeface="Aptos" pitchFamily="34" charset="-120"/>
-              </a:rPr>
-              <a:t>In predictive workflows, machine learning literacy helps staff evaluate risk scores, thresholds, and.</a:t>
-            </a:r>
-            <a:endParaRPr lang="en-US" sz="2100" dirty="0"/>
-          </a:p>
-        </p:txBody>
-      </p:sp>
-      <p:sp>
-        <p:nvSpPr>
-          <p:cNvPr id="12" name="Shape 10"/>
-          <p:cNvSpPr/>
-          <p:nvPr/>
-        </p:nvSpPr>
-        <p:spPr>
-          <a:xfrm>
-            <a:off x="7909560" y="1417320"/>
-            <a:ext cx="3154680" cy="1828800"/>
+            <a:pPr algn="ctr" indent="0" marL="0">
+              <a:buNone/>
+            </a:pPr>
+            <a:r>
+              <a:rPr lang="en-US" sz="1500" b="1" dirty="0">
+                <a:solidFill>
+                  <a:srgbClr val="FFFFFF"/>
+                </a:solidFill>
+                <a:latin typeface="Aptos" pitchFamily="34" charset="0"/>
+                <a:ea typeface="Aptos" pitchFamily="34" charset="-122"/>
+                <a:cs typeface="Aptos" pitchFamily="34" charset="-120"/>
+              </a:rPr>
+              <a:t>Plan</a:t>
+            </a:r>
+            <a:endParaRPr lang="en-US" sz="1500" dirty="0"/>
+          </a:p>
+        </p:txBody>
+      </p:sp>
+      <p:sp>
+        <p:nvSpPr>
+          <p:cNvPr id="16" name="Shape 14"/>
+          <p:cNvSpPr/>
+          <p:nvPr/>
+        </p:nvSpPr>
+        <p:spPr>
+          <a:xfrm>
+            <a:off x="8976360" y="3319272"/>
+            <a:ext cx="792480" cy="749808"/>
           </a:xfrm>
           <a:prstGeom prst="roundRect">
             <a:avLst>
-              <a:gd name="adj" fmla="val 6000"/>
+              <a:gd name="adj" fmla="val 14634"/>
             </a:avLst>
           </a:prstGeom>
           <a:solidFill>
-            <a:srgbClr val="EEF8ED"/>
+            <a:srgbClr val="2F8A28"/>
           </a:solidFill>
           <a:ln w="12700">
             <a:solidFill>
-              <a:srgbClr val="B9D7E6"/>
+              <a:srgbClr val="2F8A28"/>
             </a:solidFill>
             <a:prstDash val="solid"/>
           </a:ln>
@@ -5840,98 +6458,189 @@
       </p:sp>
       <p:sp>
         <p:nvSpPr>
-          <p:cNvPr id="13" name="Text 11"/>
-          <p:cNvSpPr/>
-          <p:nvPr/>
-        </p:nvSpPr>
-        <p:spPr>
-          <a:xfrm>
-            <a:off x="8074152" y="1563624"/>
-            <a:ext cx="2825496" cy="256032"/>
-          </a:xfrm>
-          <a:prstGeom prst="rect">
-            <a:avLst/>
-          </a:prstGeom>
-          <a:noFill/>
-          <a:ln/>
-        </p:spPr>
-        <p:txBody>
-          <a:bodyPr wrap="square" lIns="0" tIns="0" rIns="0" bIns="0" rtlCol="0" anchor="ctr"/>
-          <a:lstStyle/>
-          <a:p>
-            <a:pPr indent="0" marL="0">
-              <a:buNone/>
-            </a:pPr>
-            <a:r>
-              <a:rPr lang="en-US" sz="1300" b="1" dirty="0">
-                <a:solidFill>
-                  <a:srgbClr val="0068B7"/>
-                </a:solidFill>
-                <a:latin typeface="Aptos" pitchFamily="34" charset="0"/>
-                <a:ea typeface="Aptos" pitchFamily="34" charset="-122"/>
-                <a:cs typeface="Aptos" pitchFamily="34" charset="-120"/>
-              </a:rPr>
-              <a:t>Key idea</a:t>
-            </a:r>
-            <a:endParaRPr lang="en-US" sz="1300" dirty="0"/>
-          </a:p>
-        </p:txBody>
-      </p:sp>
-      <p:sp>
-        <p:nvSpPr>
-          <p:cNvPr id="14" name="Text 12"/>
-          <p:cNvSpPr/>
-          <p:nvPr/>
-        </p:nvSpPr>
-        <p:spPr>
-          <a:xfrm>
-            <a:off x="8074152" y="1920240"/>
-            <a:ext cx="2825496" cy="1188720"/>
-          </a:xfrm>
-          <a:prstGeom prst="rect">
-            <a:avLst/>
-          </a:prstGeom>
-          <a:noFill/>
-          <a:ln/>
-        </p:spPr>
-        <p:txBody>
-          <a:bodyPr wrap="square" lIns="0" tIns="0" rIns="0" bIns="0" rtlCol="0" anchor="t">
+          <p:cNvPr id="17" name="Text 15"/>
+          <p:cNvSpPr/>
+          <p:nvPr/>
+        </p:nvSpPr>
+        <p:spPr>
+          <a:xfrm>
+            <a:off x="9049512" y="3511296"/>
+            <a:ext cx="646176" cy="310896"/>
+          </a:xfrm>
+          <a:prstGeom prst="rect">
+            <a:avLst/>
+          </a:prstGeom>
+          <a:noFill/>
+          <a:ln/>
+        </p:spPr>
+        <p:txBody>
+          <a:bodyPr wrap="square" lIns="0" tIns="0" rIns="0" bIns="0" rtlCol="0" anchor="ctr">
             <a:normAutofit/>
           </a:bodyPr>
           <a:lstStyle/>
           <a:p>
-            <a:pPr indent="0" marL="0">
-              <a:buNone/>
-            </a:pPr>
-            <a:r>
-              <a:rPr lang="en-US" sz="1550" dirty="0">
-                <a:solidFill>
-                  <a:srgbClr val="17364A"/>
-                </a:solidFill>
-                <a:latin typeface="Aptos" pitchFamily="34" charset="0"/>
-                <a:ea typeface="Aptos" pitchFamily="34" charset="-122"/>
-                <a:cs typeface="Aptos" pitchFamily="34" charset="-120"/>
-              </a:rPr>
-              <a:t>Machine learning may support generative AI, predictive analytics, NLP, anomaly detection, and agentic.</a:t>
-            </a:r>
-            <a:endParaRPr lang="en-US" sz="1550" dirty="0"/>
-          </a:p>
-        </p:txBody>
-      </p:sp>
-      <p:sp>
-        <p:nvSpPr>
-          <p:cNvPr id="15" name="Shape 13"/>
-          <p:cNvSpPr/>
-          <p:nvPr/>
-        </p:nvSpPr>
-        <p:spPr>
-          <a:xfrm>
-            <a:off x="7909560" y="3520440"/>
-            <a:ext cx="3154680" cy="1737360"/>
+            <a:pPr algn="ctr" indent="0" marL="0">
+              <a:buNone/>
+            </a:pPr>
+            <a:r>
+              <a:rPr lang="en-US" sz="1500" b="1" dirty="0">
+                <a:solidFill>
+                  <a:srgbClr val="FFFFFF"/>
+                </a:solidFill>
+                <a:latin typeface="Aptos" pitchFamily="34" charset="0"/>
+                <a:ea typeface="Aptos" pitchFamily="34" charset="-122"/>
+                <a:cs typeface="Aptos" pitchFamily="34" charset="-120"/>
+              </a:rPr>
+              <a:t>Do</a:t>
+            </a:r>
+            <a:endParaRPr lang="en-US" sz="1500" dirty="0"/>
+          </a:p>
+        </p:txBody>
+      </p:sp>
+      <p:sp>
+        <p:nvSpPr>
+          <p:cNvPr id="18" name="Shape 16"/>
+          <p:cNvSpPr/>
+          <p:nvPr/>
+        </p:nvSpPr>
+        <p:spPr>
+          <a:xfrm>
+            <a:off x="10024872" y="3319272"/>
+            <a:ext cx="792480" cy="749808"/>
           </a:xfrm>
           <a:prstGeom prst="roundRect">
             <a:avLst>
-              <a:gd name="adj" fmla="val 6316"/>
+              <a:gd name="adj" fmla="val 14634"/>
+            </a:avLst>
+          </a:prstGeom>
+          <a:solidFill>
+            <a:srgbClr val="D69A2D"/>
+          </a:solidFill>
+          <a:ln w="12700">
+            <a:solidFill>
+              <a:srgbClr val="D69A2D"/>
+            </a:solidFill>
+            <a:prstDash val="solid"/>
+          </a:ln>
+        </p:spPr>
+      </p:sp>
+      <p:sp>
+        <p:nvSpPr>
+          <p:cNvPr id="19" name="Text 17"/>
+          <p:cNvSpPr/>
+          <p:nvPr/>
+        </p:nvSpPr>
+        <p:spPr>
+          <a:xfrm>
+            <a:off x="10098024" y="3511296"/>
+            <a:ext cx="646176" cy="310896"/>
+          </a:xfrm>
+          <a:prstGeom prst="rect">
+            <a:avLst/>
+          </a:prstGeom>
+          <a:noFill/>
+          <a:ln/>
+        </p:spPr>
+        <p:txBody>
+          <a:bodyPr wrap="square" lIns="0" tIns="0" rIns="0" bIns="0" rtlCol="0" anchor="ctr">
+            <a:normAutofit/>
+          </a:bodyPr>
+          <a:lstStyle/>
+          <a:p>
+            <a:pPr algn="ctr" indent="0" marL="0">
+              <a:buNone/>
+            </a:pPr>
+            <a:r>
+              <a:rPr lang="en-US" sz="1500" b="1" dirty="0">
+                <a:solidFill>
+                  <a:srgbClr val="FFFFFF"/>
+                </a:solidFill>
+                <a:latin typeface="Aptos" pitchFamily="34" charset="0"/>
+                <a:ea typeface="Aptos" pitchFamily="34" charset="-122"/>
+                <a:cs typeface="Aptos" pitchFamily="34" charset="-120"/>
+              </a:rPr>
+              <a:t>Review</a:t>
+            </a:r>
+            <a:endParaRPr lang="en-US" sz="1500" dirty="0"/>
+          </a:p>
+        </p:txBody>
+      </p:sp>
+      <p:sp>
+        <p:nvSpPr>
+          <p:cNvPr id="20" name="Shape 18"/>
+          <p:cNvSpPr/>
+          <p:nvPr/>
+        </p:nvSpPr>
+        <p:spPr>
+          <a:xfrm>
+            <a:off x="8293608" y="4389120"/>
+            <a:ext cx="2157984" cy="0"/>
+          </a:xfrm>
+          <a:prstGeom prst="line">
+            <a:avLst/>
+          </a:prstGeom>
+          <a:noFill/>
+          <a:ln w="25400">
+            <a:solidFill>
+              <a:srgbClr val="8ABBD8"/>
+            </a:solidFill>
+            <a:prstDash val="solid"/>
+          </a:ln>
+        </p:spPr>
+      </p:sp>
+      <p:sp>
+        <p:nvSpPr>
+          <p:cNvPr id="21" name="Text 19"/>
+          <p:cNvSpPr/>
+          <p:nvPr/>
+        </p:nvSpPr>
+        <p:spPr>
+          <a:xfrm>
+            <a:off x="7909560" y="3977640"/>
+            <a:ext cx="2926080" cy="182880"/>
+          </a:xfrm>
+          <a:prstGeom prst="rect">
+            <a:avLst/>
+          </a:prstGeom>
+          <a:noFill/>
+          <a:ln/>
+        </p:spPr>
+        <p:txBody>
+          <a:bodyPr wrap="square" lIns="0" tIns="0" rIns="0" bIns="0" rtlCol="0" anchor="ctr"/>
+          <a:lstStyle/>
+          <a:p>
+            <a:pPr algn="ctr" indent="0" marL="0">
+              <a:buNone/>
+            </a:pPr>
+            <a:r>
+              <a:rPr lang="en-US" sz="1000" dirty="0">
+                <a:solidFill>
+                  <a:srgbClr val="003A63"/>
+                </a:solidFill>
+                <a:latin typeface="Aptos" pitchFamily="34" charset="0"/>
+                <a:ea typeface="Aptos" pitchFamily="34" charset="-122"/>
+                <a:cs typeface="Aptos" pitchFamily="34" charset="-120"/>
+              </a:rPr>
+              <a:t>Dependencies visible</a:t>
+            </a:r>
+            <a:endParaRPr lang="en-US" sz="1000" dirty="0"/>
+          </a:p>
+        </p:txBody>
+      </p:sp>
+      <p:sp>
+        <p:nvSpPr>
+          <p:cNvPr id="22" name="Shape 20"/>
+          <p:cNvSpPr/>
+          <p:nvPr/>
+        </p:nvSpPr>
+        <p:spPr>
+          <a:xfrm>
+            <a:off x="7635240" y="4498848"/>
+            <a:ext cx="3474720" cy="1143000"/>
+          </a:xfrm>
+          <a:prstGeom prst="roundRect">
+            <a:avLst>
+              <a:gd name="adj" fmla="val 9600"/>
             </a:avLst>
           </a:prstGeom>
           <a:solidFill>
@@ -5947,14 +6656,14 @@
       </p:sp>
       <p:sp>
         <p:nvSpPr>
-          <p:cNvPr id="16" name="Text 14"/>
-          <p:cNvSpPr/>
-          <p:nvPr/>
-        </p:nvSpPr>
-        <p:spPr>
-          <a:xfrm>
-            <a:off x="8074152" y="3666744"/>
-            <a:ext cx="2825496" cy="256032"/>
+          <p:cNvPr id="23" name="Text 21"/>
+          <p:cNvSpPr/>
+          <p:nvPr/>
+        </p:nvSpPr>
+        <p:spPr>
+          <a:xfrm>
+            <a:off x="7799832" y="4645152"/>
+            <a:ext cx="3145536" cy="256032"/>
           </a:xfrm>
           <a:prstGeom prst="rect">
             <a:avLst/>
@@ -5978,7 +6687,7 @@
                 <a:ea typeface="Aptos" pitchFamily="34" charset="-122"/>
                 <a:cs typeface="Aptos" pitchFamily="34" charset="-120"/>
               </a:rPr>
-              <a:t>Use this for</a:t>
+              <a:t>Next action</a:t>
             </a:r>
             <a:endParaRPr lang="en-US" sz="1300" dirty="0"/>
           </a:p>
@@ -5986,14 +6695,14 @@
       </p:sp>
       <p:sp>
         <p:nvSpPr>
-          <p:cNvPr id="17" name="Text 15"/>
-          <p:cNvSpPr/>
-          <p:nvPr/>
-        </p:nvSpPr>
-        <p:spPr>
-          <a:xfrm>
-            <a:off x="8074152" y="4023360"/>
-            <a:ext cx="2825496" cy="1097280"/>
+          <p:cNvPr id="24" name="Text 22"/>
+          <p:cNvSpPr/>
+          <p:nvPr/>
+        </p:nvSpPr>
+        <p:spPr>
+          <a:xfrm>
+            <a:off x="7799832" y="5001768"/>
+            <a:ext cx="3145536" cy="502920"/>
           </a:xfrm>
           <a:prstGeom prst="rect">
             <a:avLst/>
@@ -6019,7 +6728,7 @@
                 <a:ea typeface="Aptos" pitchFamily="34" charset="-122"/>
                 <a:cs typeface="Aptos" pitchFamily="34" charset="-120"/>
               </a:rPr>
-              <a:t>Connect the concept to public health decisions, safeguards, documentation, or implementation work.</a:t>
+              <a:t>Use the concept to clarify workflow changes, dependencies, staffing, procurement requirements, training needs, and implementation checkpoints.</a:t>
             </a:r>
             <a:endParaRPr lang="en-US" sz="1550" dirty="0"/>
           </a:p>
@@ -6193,8 +6902,8 @@
         </p:nvSpPr>
         <p:spPr>
           <a:xfrm>
-            <a:off x="9966960" y="6537960"/>
-            <a:ext cx="1645920" cy="201168"/>
+            <a:off x="9646920" y="6537960"/>
+            <a:ext cx="1965960" cy="201168"/>
           </a:xfrm>
           <a:prstGeom prst="rect">
             <a:avLst/>
@@ -6218,7 +6927,7 @@
                 <a:ea typeface="Aptos" pitchFamily="34" charset="-122"/>
                 <a:cs typeface="Aptos" pitchFamily="34" charset="-120"/>
               </a:rPr>
-              <a:t>Â© Paula Soper</a:t>
+              <a:t>Copyright Paula Soper</a:t>
             </a:r>
             <a:endParaRPr lang="en-US" sz="800" dirty="0"/>
           </a:p>
@@ -6265,77 +6974,13 @@
       </p:sp>
       <p:sp>
         <p:nvSpPr>
-          <p:cNvPr id="8" name="Shape 6"/>
+          <p:cNvPr id="8" name="Text 6"/>
           <p:cNvSpPr/>
           <p:nvPr/>
         </p:nvSpPr>
         <p:spPr>
           <a:xfrm>
             <a:off x="640080" y="658368"/>
-            <a:ext cx="420624" cy="420624"/>
-          </a:xfrm>
-          <a:prstGeom prst="ellipse">
-            <a:avLst/>
-          </a:prstGeom>
-          <a:solidFill>
-            <a:srgbClr val="0068B7"/>
-          </a:solidFill>
-          <a:ln w="12700">
-            <a:solidFill>
-              <a:srgbClr val="0068B7"/>
-            </a:solidFill>
-            <a:prstDash val="solid"/>
-          </a:ln>
-        </p:spPr>
-      </p:sp>
-      <p:sp>
-        <p:nvSpPr>
-          <p:cNvPr id="9" name="Text 7"/>
-          <p:cNvSpPr/>
-          <p:nvPr/>
-        </p:nvSpPr>
-        <p:spPr>
-          <a:xfrm>
-            <a:off x="640080" y="731520"/>
-            <a:ext cx="420624" cy="164592"/>
-          </a:xfrm>
-          <a:prstGeom prst="rect">
-            <a:avLst/>
-          </a:prstGeom>
-          <a:noFill/>
-          <a:ln/>
-        </p:spPr>
-        <p:txBody>
-          <a:bodyPr wrap="square" lIns="0" tIns="0" rIns="0" bIns="0" rtlCol="0" anchor="ctr"/>
-          <a:lstStyle/>
-          <a:p>
-            <a:pPr algn="ctr" indent="0" marL="0">
-              <a:buNone/>
-            </a:pPr>
-            <a:r>
-              <a:rPr lang="en-US" sz="1100" b="1" dirty="0">
-                <a:solidFill>
-                  <a:srgbClr val="FFFFFF"/>
-                </a:solidFill>
-                <a:latin typeface="Aptos" pitchFamily="34" charset="0"/>
-                <a:ea typeface="Aptos" pitchFamily="34" charset="-122"/>
-                <a:cs typeface="Aptos" pitchFamily="34" charset="-120"/>
-              </a:rPr>
-              <a:t>8</a:t>
-            </a:r>
-            <a:endParaRPr lang="en-US" sz="1100" dirty="0"/>
-          </a:p>
-        </p:txBody>
-      </p:sp>
-      <p:sp>
-        <p:nvSpPr>
-          <p:cNvPr id="10" name="Text 8"/>
-          <p:cNvSpPr/>
-          <p:nvPr/>
-        </p:nvSpPr>
-        <p:spPr>
-          <a:xfrm>
-            <a:off x="640080" y="621792"/>
             <a:ext cx="10881360" cy="713232"/>
           </a:xfrm>
           <a:prstGeom prst="rect">
@@ -6370,14 +7015,14 @@
       </p:sp>
       <p:sp>
         <p:nvSpPr>
-          <p:cNvPr id="11" name="Text 9"/>
+          <p:cNvPr id="9" name="Text 7"/>
           <p:cNvSpPr/>
           <p:nvPr/>
         </p:nvSpPr>
         <p:spPr>
           <a:xfrm>
             <a:off x="868680" y="1508760"/>
-            <a:ext cx="6537960" cy="4160520"/>
+            <a:ext cx="6309360" cy="4160520"/>
           </a:xfrm>
           <a:prstGeom prst="rect">
             <a:avLst/>
@@ -6436,18 +7081,18 @@
       </p:sp>
       <p:sp>
         <p:nvSpPr>
-          <p:cNvPr id="12" name="Shape 10"/>
-          <p:cNvSpPr/>
-          <p:nvPr/>
-        </p:nvSpPr>
-        <p:spPr>
-          <a:xfrm>
-            <a:off x="7909560" y="1417320"/>
-            <a:ext cx="3154680" cy="1828800"/>
+          <p:cNvPr id="10" name="Shape 8"/>
+          <p:cNvSpPr/>
+          <p:nvPr/>
+        </p:nvSpPr>
+        <p:spPr>
+          <a:xfrm>
+            <a:off x="7635240" y="1325880"/>
+            <a:ext cx="3474720" cy="1325880"/>
           </a:xfrm>
           <a:prstGeom prst="roundRect">
             <a:avLst>
-              <a:gd name="adj" fmla="val 6000"/>
+              <a:gd name="adj" fmla="val 8276"/>
             </a:avLst>
           </a:prstGeom>
           <a:solidFill>
@@ -6463,14 +7108,14 @@
       </p:sp>
       <p:sp>
         <p:nvSpPr>
-          <p:cNvPr id="13" name="Text 11"/>
-          <p:cNvSpPr/>
-          <p:nvPr/>
-        </p:nvSpPr>
-        <p:spPr>
-          <a:xfrm>
-            <a:off x="8074152" y="1563624"/>
-            <a:ext cx="2825496" cy="256032"/>
+          <p:cNvPr id="11" name="Text 9"/>
+          <p:cNvSpPr/>
+          <p:nvPr/>
+        </p:nvSpPr>
+        <p:spPr>
+          <a:xfrm>
+            <a:off x="7799832" y="1472184"/>
+            <a:ext cx="3145536" cy="256032"/>
           </a:xfrm>
           <a:prstGeom prst="rect">
             <a:avLst/>
@@ -6494,7 +7139,7 @@
                 <a:ea typeface="Aptos" pitchFamily="34" charset="-122"/>
                 <a:cs typeface="Aptos" pitchFamily="34" charset="-120"/>
               </a:rPr>
-              <a:t>Key idea</a:t>
+              <a:t>Core concept</a:t>
             </a:r>
             <a:endParaRPr lang="en-US" sz="1300" dirty="0"/>
           </a:p>
@@ -6502,14 +7147,14 @@
       </p:sp>
       <p:sp>
         <p:nvSpPr>
-          <p:cNvPr id="14" name="Text 12"/>
-          <p:cNvSpPr/>
-          <p:nvPr/>
-        </p:nvSpPr>
-        <p:spPr>
-          <a:xfrm>
-            <a:off x="8074152" y="1920240"/>
-            <a:ext cx="2825496" cy="1188720"/>
+          <p:cNvPr id="12" name="Text 10"/>
+          <p:cNvSpPr/>
+          <p:nvPr/>
+        </p:nvSpPr>
+        <p:spPr>
+          <a:xfrm>
+            <a:off x="7799832" y="1828800"/>
+            <a:ext cx="3145536" cy="685800"/>
           </a:xfrm>
           <a:prstGeom prst="rect">
             <a:avLst/>
@@ -6543,18 +7188,159 @@
       </p:sp>
       <p:sp>
         <p:nvSpPr>
-          <p:cNvPr id="15" name="Shape 13"/>
-          <p:cNvSpPr/>
-          <p:nvPr/>
-        </p:nvSpPr>
-        <p:spPr>
-          <a:xfrm>
-            <a:off x="7909560" y="3520440"/>
-            <a:ext cx="3154680" cy="1737360"/>
+          <p:cNvPr id="13" name="Shape 11"/>
+          <p:cNvSpPr/>
+          <p:nvPr/>
+        </p:nvSpPr>
+        <p:spPr>
+          <a:xfrm>
+            <a:off x="7635240" y="2788920"/>
+            <a:ext cx="3474720" cy="1536192"/>
           </a:xfrm>
           <a:prstGeom prst="roundRect">
             <a:avLst>
-              <a:gd name="adj" fmla="val 6316"/>
+              <a:gd name="adj" fmla="val 7143"/>
+            </a:avLst>
+          </a:prstGeom>
+          <a:solidFill>
+            <a:srgbClr val="FFFFFF">
+              <a:alpha val="88000"/>
+            </a:srgbClr>
+          </a:solidFill>
+          <a:ln w="12700">
+            <a:solidFill>
+              <a:srgbClr val="D6E8F2"/>
+            </a:solidFill>
+            <a:prstDash val="solid"/>
+          </a:ln>
+        </p:spPr>
+      </p:sp>
+      <p:sp>
+        <p:nvSpPr>
+          <p:cNvPr id="14" name="Shape 12"/>
+          <p:cNvSpPr/>
+          <p:nvPr/>
+        </p:nvSpPr>
+        <p:spPr>
+          <a:xfrm>
+            <a:off x="8074152" y="3291840"/>
+            <a:ext cx="2596896" cy="749808"/>
+          </a:xfrm>
+          <a:prstGeom prst="rect">
+            <a:avLst/>
+          </a:prstGeom>
+          <a:solidFill>
+            <a:srgbClr val="EAF6F8"/>
+          </a:solidFill>
+          <a:ln w="12700">
+            <a:solidFill>
+              <a:srgbClr val="8ABBD8"/>
+            </a:solidFill>
+            <a:prstDash val="solid"/>
+          </a:ln>
+        </p:spPr>
+      </p:sp>
+      <p:sp>
+        <p:nvSpPr>
+          <p:cNvPr id="15" name="Shape 13"/>
+          <p:cNvSpPr/>
+          <p:nvPr/>
+        </p:nvSpPr>
+        <p:spPr>
+          <a:xfrm>
+            <a:off x="8202168" y="3721608"/>
+            <a:ext cx="2340864" cy="0"/>
+          </a:xfrm>
+          <a:prstGeom prst="line">
+            <a:avLst/>
+          </a:prstGeom>
+          <a:noFill/>
+          <a:ln w="19050">
+            <a:solidFill>
+              <a:srgbClr val="0068B7"/>
+            </a:solidFill>
+            <a:prstDash val="solid"/>
+          </a:ln>
+        </p:spPr>
+      </p:sp>
+      <p:sp>
+        <p:nvSpPr>
+          <p:cNvPr id="16" name="Shape 14"/>
+          <p:cNvSpPr/>
+          <p:nvPr/>
+        </p:nvSpPr>
+        <p:spPr>
+          <a:xfrm>
+            <a:off x="9198864" y="4206240"/>
+            <a:ext cx="347472" cy="347472"/>
+          </a:xfrm>
+          <a:prstGeom prst="ellipse">
+            <a:avLst/>
+          </a:prstGeom>
+          <a:solidFill>
+            <a:srgbClr val="2F8A28"/>
+          </a:solidFill>
+          <a:ln w="12700">
+            <a:solidFill>
+              <a:srgbClr val="2F8A28"/>
+            </a:solidFill>
+            <a:prstDash val="solid"/>
+          </a:ln>
+        </p:spPr>
+      </p:sp>
+      <p:sp>
+        <p:nvSpPr>
+          <p:cNvPr id="17" name="Text 15"/>
+          <p:cNvSpPr/>
+          <p:nvPr/>
+        </p:nvSpPr>
+        <p:spPr>
+          <a:xfrm>
+            <a:off x="7909560" y="3977640"/>
+            <a:ext cx="2926080" cy="182880"/>
+          </a:xfrm>
+          <a:prstGeom prst="rect">
+            <a:avLst/>
+          </a:prstGeom>
+          <a:noFill/>
+          <a:ln/>
+        </p:spPr>
+        <p:txBody>
+          <a:bodyPr wrap="square" lIns="0" tIns="0" rIns="0" bIns="0" rtlCol="0" anchor="ctr"/>
+          <a:lstStyle/>
+          <a:p>
+            <a:pPr algn="ctr" indent="0" marL="0">
+              <a:buNone/>
+            </a:pPr>
+            <a:r>
+              <a:rPr lang="en-US" sz="1000" dirty="0">
+                <a:solidFill>
+                  <a:srgbClr val="003A63"/>
+                </a:solidFill>
+                <a:latin typeface="Aptos" pitchFamily="34" charset="0"/>
+                <a:ea typeface="Aptos" pitchFamily="34" charset="-122"/>
+                <a:cs typeface="Aptos" pitchFamily="34" charset="-120"/>
+              </a:rPr>
+              <a:t>Concept to action</a:t>
+            </a:r>
+            <a:endParaRPr lang="en-US" sz="1000" dirty="0"/>
+          </a:p>
+        </p:txBody>
+      </p:sp>
+      <p:sp>
+        <p:nvSpPr>
+          <p:cNvPr id="18" name="Shape 16"/>
+          <p:cNvSpPr/>
+          <p:nvPr/>
+        </p:nvSpPr>
+        <p:spPr>
+          <a:xfrm>
+            <a:off x="7635240" y="4498848"/>
+            <a:ext cx="3474720" cy="1143000"/>
+          </a:xfrm>
+          <a:prstGeom prst="roundRect">
+            <a:avLst>
+              <a:gd name="adj" fmla="val 9600"/>
             </a:avLst>
           </a:prstGeom>
           <a:solidFill>
@@ -6570,14 +7356,14 @@
       </p:sp>
       <p:sp>
         <p:nvSpPr>
-          <p:cNvPr id="16" name="Text 14"/>
-          <p:cNvSpPr/>
-          <p:nvPr/>
-        </p:nvSpPr>
-        <p:spPr>
-          <a:xfrm>
-            <a:off x="8074152" y="3666744"/>
-            <a:ext cx="2825496" cy="256032"/>
+          <p:cNvPr id="19" name="Text 17"/>
+          <p:cNvSpPr/>
+          <p:nvPr/>
+        </p:nvSpPr>
+        <p:spPr>
+          <a:xfrm>
+            <a:off x="7799832" y="4645152"/>
+            <a:ext cx="3145536" cy="256032"/>
           </a:xfrm>
           <a:prstGeom prst="rect">
             <a:avLst/>
@@ -6601,7 +7387,7 @@
                 <a:ea typeface="Aptos" pitchFamily="34" charset="-122"/>
                 <a:cs typeface="Aptos" pitchFamily="34" charset="-120"/>
               </a:rPr>
-              <a:t>Use this for</a:t>
+              <a:t>Apply it</a:t>
             </a:r>
             <a:endParaRPr lang="en-US" sz="1300" dirty="0"/>
           </a:p>
@@ -6609,14 +7395,14 @@
       </p:sp>
       <p:sp>
         <p:nvSpPr>
-          <p:cNvPr id="17" name="Text 15"/>
-          <p:cNvSpPr/>
-          <p:nvPr/>
-        </p:nvSpPr>
-        <p:spPr>
-          <a:xfrm>
-            <a:off x="8074152" y="4023360"/>
-            <a:ext cx="2825496" cy="1097280"/>
+          <p:cNvPr id="20" name="Text 18"/>
+          <p:cNvSpPr/>
+          <p:nvPr/>
+        </p:nvSpPr>
+        <p:spPr>
+          <a:xfrm>
+            <a:off x="7799832" y="5001768"/>
+            <a:ext cx="3145536" cy="502920"/>
           </a:xfrm>
           <a:prstGeom prst="rect">
             <a:avLst/>
@@ -6642,7 +7428,7 @@
                 <a:ea typeface="Aptos" pitchFamily="34" charset="-122"/>
                 <a:cs typeface="Aptos" pitchFamily="34" charset="-120"/>
               </a:rPr>
-              <a:t>Connect the concept to public health decisions, safeguards, documentation, or implementation work.</a:t>
+              <a:t>Connect the concept to public health purpose, responsible use, required safeguards, documentation, and the next action a department should take.</a:t>
             </a:r>
             <a:endParaRPr lang="en-US" sz="1550" dirty="0"/>
           </a:p>
@@ -6816,8 +7602,8 @@
         </p:nvSpPr>
         <p:spPr>
           <a:xfrm>
-            <a:off x="9966960" y="6537960"/>
-            <a:ext cx="1645920" cy="201168"/>
+            <a:off x="9646920" y="6537960"/>
+            <a:ext cx="1965960" cy="201168"/>
           </a:xfrm>
           <a:prstGeom prst="rect">
             <a:avLst/>
@@ -6841,7 +7627,7 @@
                 <a:ea typeface="Aptos" pitchFamily="34" charset="-122"/>
                 <a:cs typeface="Aptos" pitchFamily="34" charset="-120"/>
               </a:rPr>
-              <a:t>Â© Paula Soper</a:t>
+              <a:t>Copyright Paula Soper</a:t>
             </a:r>
             <a:endParaRPr lang="en-US" sz="800" dirty="0"/>
           </a:p>
@@ -6936,7 +7722,7 @@
         <p:spPr>
           <a:xfrm>
             <a:off x="868680" y="1508760"/>
-            <a:ext cx="6537960" cy="4160520"/>
+            <a:ext cx="6309360" cy="4160520"/>
           </a:xfrm>
           <a:prstGeom prst="rect">
             <a:avLst/>
@@ -6987,12 +7773,12 @@
         </p:nvSpPr>
         <p:spPr>
           <a:xfrm>
-            <a:off x="7909560" y="1417320"/>
-            <a:ext cx="3154680" cy="1828800"/>
+            <a:off x="7635240" y="1325880"/>
+            <a:ext cx="3474720" cy="1325880"/>
           </a:xfrm>
           <a:prstGeom prst="roundRect">
             <a:avLst>
-              <a:gd name="adj" fmla="val 6000"/>
+              <a:gd name="adj" fmla="val 8276"/>
             </a:avLst>
           </a:prstGeom>
           <a:solidFill>
@@ -7014,8 +7800,8 @@
         </p:nvSpPr>
         <p:spPr>
           <a:xfrm>
-            <a:off x="8074152" y="1563624"/>
-            <a:ext cx="2825496" cy="256032"/>
+            <a:off x="7799832" y="1472184"/>
+            <a:ext cx="3145536" cy="256032"/>
           </a:xfrm>
           <a:prstGeom prst="rect">
             <a:avLst/>
@@ -7039,7 +7825,7 @@
                 <a:ea typeface="Aptos" pitchFamily="34" charset="-122"/>
                 <a:cs typeface="Aptos" pitchFamily="34" charset="-120"/>
               </a:rPr>
-              <a:t>Key idea</a:t>
+              <a:t>Core concept</a:t>
             </a:r>
             <a:endParaRPr lang="en-US" sz="1300" dirty="0"/>
           </a:p>
@@ -7053,8 +7839,8 @@
         </p:nvSpPr>
         <p:spPr>
           <a:xfrm>
-            <a:off x="8074152" y="1920240"/>
-            <a:ext cx="2825496" cy="1188720"/>
+            <a:off x="7799832" y="1828800"/>
+            <a:ext cx="3145536" cy="685800"/>
           </a:xfrm>
           <a:prstGeom prst="rect">
             <a:avLst/>
@@ -7094,12 +7880,153 @@
         </p:nvSpPr>
         <p:spPr>
           <a:xfrm>
-            <a:off x="7909560" y="3520440"/>
-            <a:ext cx="3154680" cy="1737360"/>
+            <a:off x="7635240" y="2788920"/>
+            <a:ext cx="3474720" cy="1536192"/>
           </a:xfrm>
           <a:prstGeom prst="roundRect">
             <a:avLst>
-              <a:gd name="adj" fmla="val 6316"/>
+              <a:gd name="adj" fmla="val 7143"/>
+            </a:avLst>
+          </a:prstGeom>
+          <a:solidFill>
+            <a:srgbClr val="FFFFFF">
+              <a:alpha val="88000"/>
+            </a:srgbClr>
+          </a:solidFill>
+          <a:ln w="12700">
+            <a:solidFill>
+              <a:srgbClr val="D6E8F2"/>
+            </a:solidFill>
+            <a:prstDash val="solid"/>
+          </a:ln>
+        </p:spPr>
+      </p:sp>
+      <p:sp>
+        <p:nvSpPr>
+          <p:cNvPr id="14" name="Shape 12"/>
+          <p:cNvSpPr/>
+          <p:nvPr/>
+        </p:nvSpPr>
+        <p:spPr>
+          <a:xfrm>
+            <a:off x="8074152" y="3291840"/>
+            <a:ext cx="2596896" cy="749808"/>
+          </a:xfrm>
+          <a:prstGeom prst="rect">
+            <a:avLst/>
+          </a:prstGeom>
+          <a:solidFill>
+            <a:srgbClr val="EAF6F8"/>
+          </a:solidFill>
+          <a:ln w="12700">
+            <a:solidFill>
+              <a:srgbClr val="8ABBD8"/>
+            </a:solidFill>
+            <a:prstDash val="solid"/>
+          </a:ln>
+        </p:spPr>
+      </p:sp>
+      <p:sp>
+        <p:nvSpPr>
+          <p:cNvPr id="15" name="Shape 13"/>
+          <p:cNvSpPr/>
+          <p:nvPr/>
+        </p:nvSpPr>
+        <p:spPr>
+          <a:xfrm>
+            <a:off x="8202168" y="3721608"/>
+            <a:ext cx="2340864" cy="0"/>
+          </a:xfrm>
+          <a:prstGeom prst="line">
+            <a:avLst/>
+          </a:prstGeom>
+          <a:noFill/>
+          <a:ln w="19050">
+            <a:solidFill>
+              <a:srgbClr val="0068B7"/>
+            </a:solidFill>
+            <a:prstDash val="solid"/>
+          </a:ln>
+        </p:spPr>
+      </p:sp>
+      <p:sp>
+        <p:nvSpPr>
+          <p:cNvPr id="16" name="Shape 14"/>
+          <p:cNvSpPr/>
+          <p:nvPr/>
+        </p:nvSpPr>
+        <p:spPr>
+          <a:xfrm>
+            <a:off x="9198864" y="4206240"/>
+            <a:ext cx="347472" cy="347472"/>
+          </a:xfrm>
+          <a:prstGeom prst="ellipse">
+            <a:avLst/>
+          </a:prstGeom>
+          <a:solidFill>
+            <a:srgbClr val="2F8A28"/>
+          </a:solidFill>
+          <a:ln w="12700">
+            <a:solidFill>
+              <a:srgbClr val="2F8A28"/>
+            </a:solidFill>
+            <a:prstDash val="solid"/>
+          </a:ln>
+        </p:spPr>
+      </p:sp>
+      <p:sp>
+        <p:nvSpPr>
+          <p:cNvPr id="17" name="Text 15"/>
+          <p:cNvSpPr/>
+          <p:nvPr/>
+        </p:nvSpPr>
+        <p:spPr>
+          <a:xfrm>
+            <a:off x="7909560" y="3977640"/>
+            <a:ext cx="2926080" cy="182880"/>
+          </a:xfrm>
+          <a:prstGeom prst="rect">
+            <a:avLst/>
+          </a:prstGeom>
+          <a:noFill/>
+          <a:ln/>
+        </p:spPr>
+        <p:txBody>
+          <a:bodyPr wrap="square" lIns="0" tIns="0" rIns="0" bIns="0" rtlCol="0" anchor="ctr"/>
+          <a:lstStyle/>
+          <a:p>
+            <a:pPr algn="ctr" indent="0" marL="0">
+              <a:buNone/>
+            </a:pPr>
+            <a:r>
+              <a:rPr lang="en-US" sz="1000" dirty="0">
+                <a:solidFill>
+                  <a:srgbClr val="003A63"/>
+                </a:solidFill>
+                <a:latin typeface="Aptos" pitchFamily="34" charset="0"/>
+                <a:ea typeface="Aptos" pitchFamily="34" charset="-122"/>
+                <a:cs typeface="Aptos" pitchFamily="34" charset="-120"/>
+              </a:rPr>
+              <a:t>Concept to action</a:t>
+            </a:r>
+            <a:endParaRPr lang="en-US" sz="1000" dirty="0"/>
+          </a:p>
+        </p:txBody>
+      </p:sp>
+      <p:sp>
+        <p:nvSpPr>
+          <p:cNvPr id="18" name="Shape 16"/>
+          <p:cNvSpPr/>
+          <p:nvPr/>
+        </p:nvSpPr>
+        <p:spPr>
+          <a:xfrm>
+            <a:off x="7635240" y="4498848"/>
+            <a:ext cx="3474720" cy="1143000"/>
+          </a:xfrm>
+          <a:prstGeom prst="roundRect">
+            <a:avLst>
+              <a:gd name="adj" fmla="val 9600"/>
             </a:avLst>
           </a:prstGeom>
           <a:solidFill>
@@ -7115,14 +8042,14 @@
       </p:sp>
       <p:sp>
         <p:nvSpPr>
-          <p:cNvPr id="14" name="Text 12"/>
-          <p:cNvSpPr/>
-          <p:nvPr/>
-        </p:nvSpPr>
-        <p:spPr>
-          <a:xfrm>
-            <a:off x="8074152" y="3666744"/>
-            <a:ext cx="2825496" cy="256032"/>
+          <p:cNvPr id="19" name="Text 17"/>
+          <p:cNvSpPr/>
+          <p:nvPr/>
+        </p:nvSpPr>
+        <p:spPr>
+          <a:xfrm>
+            <a:off x="7799832" y="4645152"/>
+            <a:ext cx="3145536" cy="256032"/>
           </a:xfrm>
           <a:prstGeom prst="rect">
             <a:avLst/>
@@ -7146,7 +8073,7 @@
                 <a:ea typeface="Aptos" pitchFamily="34" charset="-122"/>
                 <a:cs typeface="Aptos" pitchFamily="34" charset="-120"/>
               </a:rPr>
-              <a:t>Use this for</a:t>
+              <a:t>Apply it</a:t>
             </a:r>
             <a:endParaRPr lang="en-US" sz="1300" dirty="0"/>
           </a:p>
@@ -7154,14 +8081,14 @@
       </p:sp>
       <p:sp>
         <p:nvSpPr>
-          <p:cNvPr id="15" name="Text 13"/>
-          <p:cNvSpPr/>
-          <p:nvPr/>
-        </p:nvSpPr>
-        <p:spPr>
-          <a:xfrm>
-            <a:off x="8074152" y="4023360"/>
-            <a:ext cx="2825496" cy="1097280"/>
+          <p:cNvPr id="20" name="Text 18"/>
+          <p:cNvSpPr/>
+          <p:nvPr/>
+        </p:nvSpPr>
+        <p:spPr>
+          <a:xfrm>
+            <a:off x="7799832" y="5001768"/>
+            <a:ext cx="3145536" cy="502920"/>
           </a:xfrm>
           <a:prstGeom prst="rect">
             <a:avLst/>
@@ -7187,7 +8114,7 @@
                 <a:ea typeface="Aptos" pitchFamily="34" charset="-122"/>
                 <a:cs typeface="Aptos" pitchFamily="34" charset="-120"/>
               </a:rPr>
-              <a:t>Connect the concept to public health decisions, safeguards, documentation, or implementation work.</a:t>
+              <a:t>Connect the concept to public health purpose, responsible use, required safeguards, documentation, and the next action a department should take.</a:t>
             </a:r>
             <a:endParaRPr lang="en-US" sz="1550" dirty="0"/>
           </a:p>
@@ -7361,8 +8288,8 @@
         </p:nvSpPr>
         <p:spPr>
           <a:xfrm>
-            <a:off x="9966960" y="6537960"/>
-            <a:ext cx="1645920" cy="201168"/>
+            <a:off x="9646920" y="6537960"/>
+            <a:ext cx="1965960" cy="201168"/>
           </a:xfrm>
           <a:prstGeom prst="rect">
             <a:avLst/>
@@ -7386,7 +8313,7 @@
                 <a:ea typeface="Aptos" pitchFamily="34" charset="-122"/>
                 <a:cs typeface="Aptos" pitchFamily="34" charset="-120"/>
               </a:rPr>
-              <a:t>Â© Paula Soper</a:t>
+              <a:t>Copyright Paula Soper</a:t>
             </a:r>
             <a:endParaRPr lang="en-US" sz="800" dirty="0"/>
           </a:p>
@@ -7433,77 +8360,13 @@
       </p:sp>
       <p:sp>
         <p:nvSpPr>
-          <p:cNvPr id="8" name="Shape 6"/>
+          <p:cNvPr id="8" name="Text 6"/>
           <p:cNvSpPr/>
           <p:nvPr/>
         </p:nvSpPr>
         <p:spPr>
           <a:xfrm>
             <a:off x="640080" y="658368"/>
-            <a:ext cx="420624" cy="420624"/>
-          </a:xfrm>
-          <a:prstGeom prst="ellipse">
-            <a:avLst/>
-          </a:prstGeom>
-          <a:solidFill>
-            <a:srgbClr val="0068B7"/>
-          </a:solidFill>
-          <a:ln w="12700">
-            <a:solidFill>
-              <a:srgbClr val="0068B7"/>
-            </a:solidFill>
-            <a:prstDash val="solid"/>
-          </a:ln>
-        </p:spPr>
-      </p:sp>
-      <p:sp>
-        <p:nvSpPr>
-          <p:cNvPr id="9" name="Text 7"/>
-          <p:cNvSpPr/>
-          <p:nvPr/>
-        </p:nvSpPr>
-        <p:spPr>
-          <a:xfrm>
-            <a:off x="640080" y="731520"/>
-            <a:ext cx="420624" cy="164592"/>
-          </a:xfrm>
-          <a:prstGeom prst="rect">
-            <a:avLst/>
-          </a:prstGeom>
-          <a:noFill/>
-          <a:ln/>
-        </p:spPr>
-        <p:txBody>
-          <a:bodyPr wrap="square" lIns="0" tIns="0" rIns="0" bIns="0" rtlCol="0" anchor="ctr"/>
-          <a:lstStyle/>
-          <a:p>
-            <a:pPr algn="ctr" indent="0" marL="0">
-              <a:buNone/>
-            </a:pPr>
-            <a:r>
-              <a:rPr lang="en-US" sz="1100" b="1" dirty="0">
-                <a:solidFill>
-                  <a:srgbClr val="FFFFFF"/>
-                </a:solidFill>
-                <a:latin typeface="Aptos" pitchFamily="34" charset="0"/>
-                <a:ea typeface="Aptos" pitchFamily="34" charset="-122"/>
-                <a:cs typeface="Aptos" pitchFamily="34" charset="-120"/>
-              </a:rPr>
-              <a:t>9</a:t>
-            </a:r>
-            <a:endParaRPr lang="en-US" sz="1100" dirty="0"/>
-          </a:p>
-        </p:txBody>
-      </p:sp>
-      <p:sp>
-        <p:nvSpPr>
-          <p:cNvPr id="10" name="Text 8"/>
-          <p:cNvSpPr/>
-          <p:nvPr/>
-        </p:nvSpPr>
-        <p:spPr>
-          <a:xfrm>
-            <a:off x="640080" y="621792"/>
             <a:ext cx="10881360" cy="713232"/>
           </a:xfrm>
           <a:prstGeom prst="rect">
@@ -7538,14 +8401,14 @@
       </p:sp>
       <p:sp>
         <p:nvSpPr>
-          <p:cNvPr id="11" name="Text 9"/>
+          <p:cNvPr id="9" name="Text 7"/>
           <p:cNvSpPr/>
           <p:nvPr/>
         </p:nvSpPr>
         <p:spPr>
           <a:xfrm>
             <a:off x="868680" y="1508760"/>
-            <a:ext cx="6537960" cy="4160520"/>
+            <a:ext cx="6309360" cy="4160520"/>
           </a:xfrm>
           <a:prstGeom prst="rect">
             <a:avLst/>
@@ -7604,18 +8467,18 @@
       </p:sp>
       <p:sp>
         <p:nvSpPr>
-          <p:cNvPr id="12" name="Shape 10"/>
-          <p:cNvSpPr/>
-          <p:nvPr/>
-        </p:nvSpPr>
-        <p:spPr>
-          <a:xfrm>
-            <a:off x="7909560" y="1417320"/>
-            <a:ext cx="3154680" cy="1828800"/>
+          <p:cNvPr id="10" name="Shape 8"/>
+          <p:cNvSpPr/>
+          <p:nvPr/>
+        </p:nvSpPr>
+        <p:spPr>
+          <a:xfrm>
+            <a:off x="7635240" y="1325880"/>
+            <a:ext cx="3474720" cy="1325880"/>
           </a:xfrm>
           <a:prstGeom prst="roundRect">
             <a:avLst>
-              <a:gd name="adj" fmla="val 6000"/>
+              <a:gd name="adj" fmla="val 8276"/>
             </a:avLst>
           </a:prstGeom>
           <a:solidFill>
@@ -7631,14 +8494,14 @@
       </p:sp>
       <p:sp>
         <p:nvSpPr>
-          <p:cNvPr id="13" name="Text 11"/>
-          <p:cNvSpPr/>
-          <p:nvPr/>
-        </p:nvSpPr>
-        <p:spPr>
-          <a:xfrm>
-            <a:off x="8074152" y="1563624"/>
-            <a:ext cx="2825496" cy="256032"/>
+          <p:cNvPr id="11" name="Text 9"/>
+          <p:cNvSpPr/>
+          <p:nvPr/>
+        </p:nvSpPr>
+        <p:spPr>
+          <a:xfrm>
+            <a:off x="7799832" y="1472184"/>
+            <a:ext cx="3145536" cy="256032"/>
           </a:xfrm>
           <a:prstGeom prst="rect">
             <a:avLst/>
@@ -7662,7 +8525,7 @@
                 <a:ea typeface="Aptos" pitchFamily="34" charset="-122"/>
                 <a:cs typeface="Aptos" pitchFamily="34" charset="-120"/>
               </a:rPr>
-              <a:t>Key idea</a:t>
+              <a:t>Practice focus</a:t>
             </a:r>
             <a:endParaRPr lang="en-US" sz="1300" dirty="0"/>
           </a:p>
@@ -7670,14 +8533,14 @@
       </p:sp>
       <p:sp>
         <p:nvSpPr>
-          <p:cNvPr id="14" name="Text 12"/>
-          <p:cNvSpPr/>
-          <p:nvPr/>
-        </p:nvSpPr>
-        <p:spPr>
-          <a:xfrm>
-            <a:off x="8074152" y="1920240"/>
-            <a:ext cx="2825496" cy="1188720"/>
+          <p:cNvPr id="12" name="Text 10"/>
+          <p:cNvSpPr/>
+          <p:nvPr/>
+        </p:nvSpPr>
+        <p:spPr>
+          <a:xfrm>
+            <a:off x="7799832" y="1828800"/>
+            <a:ext cx="3145536" cy="685800"/>
           </a:xfrm>
           <a:prstGeom prst="rect">
             <a:avLst/>
@@ -7711,18 +8574,159 @@
       </p:sp>
       <p:sp>
         <p:nvSpPr>
-          <p:cNvPr id="15" name="Shape 13"/>
-          <p:cNvSpPr/>
-          <p:nvPr/>
-        </p:nvSpPr>
-        <p:spPr>
-          <a:xfrm>
-            <a:off x="7909560" y="3520440"/>
-            <a:ext cx="3154680" cy="1737360"/>
+          <p:cNvPr id="13" name="Shape 11"/>
+          <p:cNvSpPr/>
+          <p:nvPr/>
+        </p:nvSpPr>
+        <p:spPr>
+          <a:xfrm>
+            <a:off x="7635240" y="2788920"/>
+            <a:ext cx="3474720" cy="1536192"/>
           </a:xfrm>
           <a:prstGeom prst="roundRect">
             <a:avLst>
-              <a:gd name="adj" fmla="val 6316"/>
+              <a:gd name="adj" fmla="val 7143"/>
+            </a:avLst>
+          </a:prstGeom>
+          <a:solidFill>
+            <a:srgbClr val="FFFFFF">
+              <a:alpha val="88000"/>
+            </a:srgbClr>
+          </a:solidFill>
+          <a:ln w="12700">
+            <a:solidFill>
+              <a:srgbClr val="D6E8F2"/>
+            </a:solidFill>
+            <a:prstDash val="solid"/>
+          </a:ln>
+        </p:spPr>
+      </p:sp>
+      <p:sp>
+        <p:nvSpPr>
+          <p:cNvPr id="14" name="Shape 12"/>
+          <p:cNvSpPr/>
+          <p:nvPr/>
+        </p:nvSpPr>
+        <p:spPr>
+          <a:xfrm>
+            <a:off x="8074152" y="3291840"/>
+            <a:ext cx="2596896" cy="749808"/>
+          </a:xfrm>
+          <a:prstGeom prst="rect">
+            <a:avLst/>
+          </a:prstGeom>
+          <a:solidFill>
+            <a:srgbClr val="EAF6F8"/>
+          </a:solidFill>
+          <a:ln w="12700">
+            <a:solidFill>
+              <a:srgbClr val="8ABBD8"/>
+            </a:solidFill>
+            <a:prstDash val="solid"/>
+          </a:ln>
+        </p:spPr>
+      </p:sp>
+      <p:sp>
+        <p:nvSpPr>
+          <p:cNvPr id="15" name="Shape 13"/>
+          <p:cNvSpPr/>
+          <p:nvPr/>
+        </p:nvSpPr>
+        <p:spPr>
+          <a:xfrm>
+            <a:off x="8202168" y="3721608"/>
+            <a:ext cx="2340864" cy="0"/>
+          </a:xfrm>
+          <a:prstGeom prst="line">
+            <a:avLst/>
+          </a:prstGeom>
+          <a:noFill/>
+          <a:ln w="19050">
+            <a:solidFill>
+              <a:srgbClr val="0068B7"/>
+            </a:solidFill>
+            <a:prstDash val="solid"/>
+          </a:ln>
+        </p:spPr>
+      </p:sp>
+      <p:sp>
+        <p:nvSpPr>
+          <p:cNvPr id="16" name="Shape 14"/>
+          <p:cNvSpPr/>
+          <p:nvPr/>
+        </p:nvSpPr>
+        <p:spPr>
+          <a:xfrm>
+            <a:off x="9198864" y="4206240"/>
+            <a:ext cx="347472" cy="347472"/>
+          </a:xfrm>
+          <a:prstGeom prst="ellipse">
+            <a:avLst/>
+          </a:prstGeom>
+          <a:solidFill>
+            <a:srgbClr val="2F8A28"/>
+          </a:solidFill>
+          <a:ln w="12700">
+            <a:solidFill>
+              <a:srgbClr val="2F8A28"/>
+            </a:solidFill>
+            <a:prstDash val="solid"/>
+          </a:ln>
+        </p:spPr>
+      </p:sp>
+      <p:sp>
+        <p:nvSpPr>
+          <p:cNvPr id="17" name="Text 15"/>
+          <p:cNvSpPr/>
+          <p:nvPr/>
+        </p:nvSpPr>
+        <p:spPr>
+          <a:xfrm>
+            <a:off x="7909560" y="3977640"/>
+            <a:ext cx="2926080" cy="182880"/>
+          </a:xfrm>
+          <a:prstGeom prst="rect">
+            <a:avLst/>
+          </a:prstGeom>
+          <a:noFill/>
+          <a:ln/>
+        </p:spPr>
+        <p:txBody>
+          <a:bodyPr wrap="square" lIns="0" tIns="0" rIns="0" bIns="0" rtlCol="0" anchor="ctr"/>
+          <a:lstStyle/>
+          <a:p>
+            <a:pPr algn="ctr" indent="0" marL="0">
+              <a:buNone/>
+            </a:pPr>
+            <a:r>
+              <a:rPr lang="en-US" sz="1000" dirty="0">
+                <a:solidFill>
+                  <a:srgbClr val="003A63"/>
+                </a:solidFill>
+                <a:latin typeface="Aptos" pitchFamily="34" charset="0"/>
+                <a:ea typeface="Aptos" pitchFamily="34" charset="-122"/>
+                <a:cs typeface="Aptos" pitchFamily="34" charset="-120"/>
+              </a:rPr>
+              <a:t>Concept to action</a:t>
+            </a:r>
+            <a:endParaRPr lang="en-US" sz="1000" dirty="0"/>
+          </a:p>
+        </p:txBody>
+      </p:sp>
+      <p:sp>
+        <p:nvSpPr>
+          <p:cNvPr id="18" name="Shape 16"/>
+          <p:cNvSpPr/>
+          <p:nvPr/>
+        </p:nvSpPr>
+        <p:spPr>
+          <a:xfrm>
+            <a:off x="7635240" y="4498848"/>
+            <a:ext cx="3474720" cy="1143000"/>
+          </a:xfrm>
+          <a:prstGeom prst="roundRect">
+            <a:avLst>
+              <a:gd name="adj" fmla="val 9600"/>
             </a:avLst>
           </a:prstGeom>
           <a:solidFill>
@@ -7738,14 +8742,14 @@
       </p:sp>
       <p:sp>
         <p:nvSpPr>
-          <p:cNvPr id="16" name="Text 14"/>
-          <p:cNvSpPr/>
-          <p:nvPr/>
-        </p:nvSpPr>
-        <p:spPr>
-          <a:xfrm>
-            <a:off x="8074152" y="3666744"/>
-            <a:ext cx="2825496" cy="256032"/>
+          <p:cNvPr id="19" name="Text 17"/>
+          <p:cNvSpPr/>
+          <p:nvPr/>
+        </p:nvSpPr>
+        <p:spPr>
+          <a:xfrm>
+            <a:off x="7799832" y="4645152"/>
+            <a:ext cx="3145536" cy="256032"/>
           </a:xfrm>
           <a:prstGeom prst="rect">
             <a:avLst/>
@@ -7769,7 +8773,7 @@
                 <a:ea typeface="Aptos" pitchFamily="34" charset="-122"/>
                 <a:cs typeface="Aptos" pitchFamily="34" charset="-120"/>
               </a:rPr>
-              <a:t>Use this for</a:t>
+              <a:t>What to produce</a:t>
             </a:r>
             <a:endParaRPr lang="en-US" sz="1300" dirty="0"/>
           </a:p>
@@ -7777,14 +8781,14 @@
       </p:sp>
       <p:sp>
         <p:nvSpPr>
-          <p:cNvPr id="17" name="Text 15"/>
-          <p:cNvSpPr/>
-          <p:nvPr/>
-        </p:nvSpPr>
-        <p:spPr>
-          <a:xfrm>
-            <a:off x="8074152" y="4023360"/>
-            <a:ext cx="2825496" cy="1097280"/>
+          <p:cNvPr id="20" name="Text 18"/>
+          <p:cNvSpPr/>
+          <p:nvPr/>
+        </p:nvSpPr>
+        <p:spPr>
+          <a:xfrm>
+            <a:off x="7799832" y="5001768"/>
+            <a:ext cx="3145536" cy="502920"/>
           </a:xfrm>
           <a:prstGeom prst="rect">
             <a:avLst/>
@@ -7810,7 +8814,7 @@
                 <a:ea typeface="Aptos" pitchFamily="34" charset="-122"/>
                 <a:cs typeface="Aptos" pitchFamily="34" charset="-120"/>
               </a:rPr>
-              <a:t>Connect the concept to public health decisions, safeguards, documentation, or implementation work.</a:t>
+              <a:t>Use the assignment to test whether you can explain the concept, apply it to a realistic public health situation, and identify what would need review before the work moves forward.</a:t>
             </a:r>
             <a:endParaRPr lang="en-US" sz="1550" dirty="0"/>
           </a:p>
@@ -7984,8 +8988,8 @@
         </p:nvSpPr>
         <p:spPr>
           <a:xfrm>
-            <a:off x="9966960" y="6537960"/>
-            <a:ext cx="1645920" cy="201168"/>
+            <a:off x="9646920" y="6537960"/>
+            <a:ext cx="1965960" cy="201168"/>
           </a:xfrm>
           <a:prstGeom prst="rect">
             <a:avLst/>
@@ -8009,7 +9013,7 @@
                 <a:ea typeface="Aptos" pitchFamily="34" charset="-122"/>
                 <a:cs typeface="Aptos" pitchFamily="34" charset="-120"/>
               </a:rPr>
-              <a:t>Â© Paula Soper</a:t>
+              <a:t>Copyright Paula Soper</a:t>
             </a:r>
             <a:endParaRPr lang="en-US" sz="800" dirty="0"/>
           </a:p>
@@ -8056,77 +9060,13 @@
       </p:sp>
       <p:sp>
         <p:nvSpPr>
-          <p:cNvPr id="8" name="Shape 6"/>
+          <p:cNvPr id="8" name="Text 6"/>
           <p:cNvSpPr/>
           <p:nvPr/>
         </p:nvSpPr>
         <p:spPr>
           <a:xfrm>
             <a:off x="640080" y="658368"/>
-            <a:ext cx="420624" cy="420624"/>
-          </a:xfrm>
-          <a:prstGeom prst="ellipse">
-            <a:avLst/>
-          </a:prstGeom>
-          <a:solidFill>
-            <a:srgbClr val="0068B7"/>
-          </a:solidFill>
-          <a:ln w="12700">
-            <a:solidFill>
-              <a:srgbClr val="0068B7"/>
-            </a:solidFill>
-            <a:prstDash val="solid"/>
-          </a:ln>
-        </p:spPr>
-      </p:sp>
-      <p:sp>
-        <p:nvSpPr>
-          <p:cNvPr id="9" name="Text 7"/>
-          <p:cNvSpPr/>
-          <p:nvPr/>
-        </p:nvSpPr>
-        <p:spPr>
-          <a:xfrm>
-            <a:off x="640080" y="731520"/>
-            <a:ext cx="420624" cy="164592"/>
-          </a:xfrm>
-          <a:prstGeom prst="rect">
-            <a:avLst/>
-          </a:prstGeom>
-          <a:noFill/>
-          <a:ln/>
-        </p:spPr>
-        <p:txBody>
-          <a:bodyPr wrap="square" lIns="0" tIns="0" rIns="0" bIns="0" rtlCol="0" anchor="ctr"/>
-          <a:lstStyle/>
-          <a:p>
-            <a:pPr algn="ctr" indent="0" marL="0">
-              <a:buNone/>
-            </a:pPr>
-            <a:r>
-              <a:rPr lang="en-US" sz="1100" b="1" dirty="0">
-                <a:solidFill>
-                  <a:srgbClr val="FFFFFF"/>
-                </a:solidFill>
-                <a:latin typeface="Aptos" pitchFamily="34" charset="0"/>
-                <a:ea typeface="Aptos" pitchFamily="34" charset="-122"/>
-                <a:cs typeface="Aptos" pitchFamily="34" charset="-120"/>
-              </a:rPr>
-              <a:t>10</a:t>
-            </a:r>
-            <a:endParaRPr lang="en-US" sz="1100" dirty="0"/>
-          </a:p>
-        </p:txBody>
-      </p:sp>
-      <p:sp>
-        <p:nvSpPr>
-          <p:cNvPr id="10" name="Text 8"/>
-          <p:cNvSpPr/>
-          <p:nvPr/>
-        </p:nvSpPr>
-        <p:spPr>
-          <a:xfrm>
-            <a:off x="640080" y="621792"/>
             <a:ext cx="10881360" cy="713232"/>
           </a:xfrm>
           <a:prstGeom prst="rect">
@@ -8161,14 +9101,14 @@
       </p:sp>
       <p:sp>
         <p:nvSpPr>
-          <p:cNvPr id="11" name="Text 9"/>
+          <p:cNvPr id="9" name="Text 7"/>
           <p:cNvSpPr/>
           <p:nvPr/>
         </p:nvSpPr>
         <p:spPr>
           <a:xfrm>
             <a:off x="868680" y="1508760"/>
-            <a:ext cx="6537960" cy="4160520"/>
+            <a:ext cx="6309360" cy="4160520"/>
           </a:xfrm>
           <a:prstGeom prst="rect">
             <a:avLst/>
@@ -8227,18 +9167,18 @@
       </p:sp>
       <p:sp>
         <p:nvSpPr>
-          <p:cNvPr id="12" name="Shape 10"/>
-          <p:cNvSpPr/>
-          <p:nvPr/>
-        </p:nvSpPr>
-        <p:spPr>
-          <a:xfrm>
-            <a:off x="7909560" y="1417320"/>
-            <a:ext cx="3154680" cy="1828800"/>
+          <p:cNvPr id="10" name="Shape 8"/>
+          <p:cNvSpPr/>
+          <p:nvPr/>
+        </p:nvSpPr>
+        <p:spPr>
+          <a:xfrm>
+            <a:off x="7635240" y="1325880"/>
+            <a:ext cx="3474720" cy="1325880"/>
           </a:xfrm>
           <a:prstGeom prst="roundRect">
             <a:avLst>
-              <a:gd name="adj" fmla="val 6000"/>
+              <a:gd name="adj" fmla="val 8276"/>
             </a:avLst>
           </a:prstGeom>
           <a:solidFill>
@@ -8254,14 +9194,14 @@
       </p:sp>
       <p:sp>
         <p:nvSpPr>
-          <p:cNvPr id="13" name="Text 11"/>
-          <p:cNvSpPr/>
-          <p:nvPr/>
-        </p:nvSpPr>
-        <p:spPr>
-          <a:xfrm>
-            <a:off x="8074152" y="1563624"/>
-            <a:ext cx="2825496" cy="256032"/>
+          <p:cNvPr id="11" name="Text 9"/>
+          <p:cNvSpPr/>
+          <p:nvPr/>
+        </p:nvSpPr>
+        <p:spPr>
+          <a:xfrm>
+            <a:off x="7799832" y="1472184"/>
+            <a:ext cx="3145536" cy="256032"/>
           </a:xfrm>
           <a:prstGeom prst="rect">
             <a:avLst/>
@@ -8285,7 +9225,7 @@
                 <a:ea typeface="Aptos" pitchFamily="34" charset="-122"/>
                 <a:cs typeface="Aptos" pitchFamily="34" charset="-120"/>
               </a:rPr>
-              <a:t>Key idea</a:t>
+              <a:t>Core concept</a:t>
             </a:r>
             <a:endParaRPr lang="en-US" sz="1300" dirty="0"/>
           </a:p>
@@ -8293,14 +9233,14 @@
       </p:sp>
       <p:sp>
         <p:nvSpPr>
-          <p:cNvPr id="14" name="Text 12"/>
-          <p:cNvSpPr/>
-          <p:nvPr/>
-        </p:nvSpPr>
-        <p:spPr>
-          <a:xfrm>
-            <a:off x="8074152" y="1920240"/>
-            <a:ext cx="2825496" cy="1188720"/>
+          <p:cNvPr id="12" name="Text 10"/>
+          <p:cNvSpPr/>
+          <p:nvPr/>
+        </p:nvSpPr>
+        <p:spPr>
+          <a:xfrm>
+            <a:off x="7799832" y="1828800"/>
+            <a:ext cx="3145536" cy="685800"/>
           </a:xfrm>
           <a:prstGeom prst="rect">
             <a:avLst/>
@@ -8334,18 +9274,159 @@
       </p:sp>
       <p:sp>
         <p:nvSpPr>
-          <p:cNvPr id="15" name="Shape 13"/>
-          <p:cNvSpPr/>
-          <p:nvPr/>
-        </p:nvSpPr>
-        <p:spPr>
-          <a:xfrm>
-            <a:off x="7909560" y="3520440"/>
-            <a:ext cx="3154680" cy="1737360"/>
+          <p:cNvPr id="13" name="Shape 11"/>
+          <p:cNvSpPr/>
+          <p:nvPr/>
+        </p:nvSpPr>
+        <p:spPr>
+          <a:xfrm>
+            <a:off x="7635240" y="2788920"/>
+            <a:ext cx="3474720" cy="1536192"/>
           </a:xfrm>
           <a:prstGeom prst="roundRect">
             <a:avLst>
-              <a:gd name="adj" fmla="val 6316"/>
+              <a:gd name="adj" fmla="val 7143"/>
+            </a:avLst>
+          </a:prstGeom>
+          <a:solidFill>
+            <a:srgbClr val="FFFFFF">
+              <a:alpha val="88000"/>
+            </a:srgbClr>
+          </a:solidFill>
+          <a:ln w="12700">
+            <a:solidFill>
+              <a:srgbClr val="D6E8F2"/>
+            </a:solidFill>
+            <a:prstDash val="solid"/>
+          </a:ln>
+        </p:spPr>
+      </p:sp>
+      <p:sp>
+        <p:nvSpPr>
+          <p:cNvPr id="14" name="Shape 12"/>
+          <p:cNvSpPr/>
+          <p:nvPr/>
+        </p:nvSpPr>
+        <p:spPr>
+          <a:xfrm>
+            <a:off x="8074152" y="3291840"/>
+            <a:ext cx="2596896" cy="749808"/>
+          </a:xfrm>
+          <a:prstGeom prst="rect">
+            <a:avLst/>
+          </a:prstGeom>
+          <a:solidFill>
+            <a:srgbClr val="EAF6F8"/>
+          </a:solidFill>
+          <a:ln w="12700">
+            <a:solidFill>
+              <a:srgbClr val="8ABBD8"/>
+            </a:solidFill>
+            <a:prstDash val="solid"/>
+          </a:ln>
+        </p:spPr>
+      </p:sp>
+      <p:sp>
+        <p:nvSpPr>
+          <p:cNvPr id="15" name="Shape 13"/>
+          <p:cNvSpPr/>
+          <p:nvPr/>
+        </p:nvSpPr>
+        <p:spPr>
+          <a:xfrm>
+            <a:off x="8202168" y="3721608"/>
+            <a:ext cx="2340864" cy="0"/>
+          </a:xfrm>
+          <a:prstGeom prst="line">
+            <a:avLst/>
+          </a:prstGeom>
+          <a:noFill/>
+          <a:ln w="19050">
+            <a:solidFill>
+              <a:srgbClr val="0068B7"/>
+            </a:solidFill>
+            <a:prstDash val="solid"/>
+          </a:ln>
+        </p:spPr>
+      </p:sp>
+      <p:sp>
+        <p:nvSpPr>
+          <p:cNvPr id="16" name="Shape 14"/>
+          <p:cNvSpPr/>
+          <p:nvPr/>
+        </p:nvSpPr>
+        <p:spPr>
+          <a:xfrm>
+            <a:off x="9198864" y="4206240"/>
+            <a:ext cx="347472" cy="347472"/>
+          </a:xfrm>
+          <a:prstGeom prst="ellipse">
+            <a:avLst/>
+          </a:prstGeom>
+          <a:solidFill>
+            <a:srgbClr val="2F8A28"/>
+          </a:solidFill>
+          <a:ln w="12700">
+            <a:solidFill>
+              <a:srgbClr val="2F8A28"/>
+            </a:solidFill>
+            <a:prstDash val="solid"/>
+          </a:ln>
+        </p:spPr>
+      </p:sp>
+      <p:sp>
+        <p:nvSpPr>
+          <p:cNvPr id="17" name="Text 15"/>
+          <p:cNvSpPr/>
+          <p:nvPr/>
+        </p:nvSpPr>
+        <p:spPr>
+          <a:xfrm>
+            <a:off x="7909560" y="3977640"/>
+            <a:ext cx="2926080" cy="182880"/>
+          </a:xfrm>
+          <a:prstGeom prst="rect">
+            <a:avLst/>
+          </a:prstGeom>
+          <a:noFill/>
+          <a:ln/>
+        </p:spPr>
+        <p:txBody>
+          <a:bodyPr wrap="square" lIns="0" tIns="0" rIns="0" bIns="0" rtlCol="0" anchor="ctr"/>
+          <a:lstStyle/>
+          <a:p>
+            <a:pPr algn="ctr" indent="0" marL="0">
+              <a:buNone/>
+            </a:pPr>
+            <a:r>
+              <a:rPr lang="en-US" sz="1000" dirty="0">
+                <a:solidFill>
+                  <a:srgbClr val="003A63"/>
+                </a:solidFill>
+                <a:latin typeface="Aptos" pitchFamily="34" charset="0"/>
+                <a:ea typeface="Aptos" pitchFamily="34" charset="-122"/>
+                <a:cs typeface="Aptos" pitchFamily="34" charset="-120"/>
+              </a:rPr>
+              <a:t>Concept to action</a:t>
+            </a:r>
+            <a:endParaRPr lang="en-US" sz="1000" dirty="0"/>
+          </a:p>
+        </p:txBody>
+      </p:sp>
+      <p:sp>
+        <p:nvSpPr>
+          <p:cNvPr id="18" name="Shape 16"/>
+          <p:cNvSpPr/>
+          <p:nvPr/>
+        </p:nvSpPr>
+        <p:spPr>
+          <a:xfrm>
+            <a:off x="7635240" y="4498848"/>
+            <a:ext cx="3474720" cy="1143000"/>
+          </a:xfrm>
+          <a:prstGeom prst="roundRect">
+            <a:avLst>
+              <a:gd name="adj" fmla="val 9600"/>
             </a:avLst>
           </a:prstGeom>
           <a:solidFill>
@@ -8361,14 +9442,14 @@
       </p:sp>
       <p:sp>
         <p:nvSpPr>
-          <p:cNvPr id="16" name="Text 14"/>
-          <p:cNvSpPr/>
-          <p:nvPr/>
-        </p:nvSpPr>
-        <p:spPr>
-          <a:xfrm>
-            <a:off x="8074152" y="3666744"/>
-            <a:ext cx="2825496" cy="256032"/>
+          <p:cNvPr id="19" name="Text 17"/>
+          <p:cNvSpPr/>
+          <p:nvPr/>
+        </p:nvSpPr>
+        <p:spPr>
+          <a:xfrm>
+            <a:off x="7799832" y="4645152"/>
+            <a:ext cx="3145536" cy="256032"/>
           </a:xfrm>
           <a:prstGeom prst="rect">
             <a:avLst/>
@@ -8392,7 +9473,7 @@
                 <a:ea typeface="Aptos" pitchFamily="34" charset="-122"/>
                 <a:cs typeface="Aptos" pitchFamily="34" charset="-120"/>
               </a:rPr>
-              <a:t>Use this for</a:t>
+              <a:t>Apply it</a:t>
             </a:r>
             <a:endParaRPr lang="en-US" sz="1300" dirty="0"/>
           </a:p>
@@ -8400,14 +9481,14 @@
       </p:sp>
       <p:sp>
         <p:nvSpPr>
-          <p:cNvPr id="17" name="Text 15"/>
-          <p:cNvSpPr/>
-          <p:nvPr/>
-        </p:nvSpPr>
-        <p:spPr>
-          <a:xfrm>
-            <a:off x="8074152" y="4023360"/>
-            <a:ext cx="2825496" cy="1097280"/>
+          <p:cNvPr id="20" name="Text 18"/>
+          <p:cNvSpPr/>
+          <p:nvPr/>
+        </p:nvSpPr>
+        <p:spPr>
+          <a:xfrm>
+            <a:off x="7799832" y="5001768"/>
+            <a:ext cx="3145536" cy="502920"/>
           </a:xfrm>
           <a:prstGeom prst="rect">
             <a:avLst/>
@@ -8433,7 +9514,7 @@
                 <a:ea typeface="Aptos" pitchFamily="34" charset="-122"/>
                 <a:cs typeface="Aptos" pitchFamily="34" charset="-120"/>
               </a:rPr>
-              <a:t>Connect the concept to public health decisions, safeguards, documentation, or implementation work.</a:t>
+              <a:t>Connect the concept to public health purpose, responsible use, required safeguards, documentation, and the next action a department should take.</a:t>
             </a:r>
             <a:endParaRPr lang="en-US" sz="1550" dirty="0"/>
           </a:p>
@@ -8607,8 +9688,8 @@
         </p:nvSpPr>
         <p:spPr>
           <a:xfrm>
-            <a:off x="9966960" y="6537960"/>
-            <a:ext cx="1645920" cy="201168"/>
+            <a:off x="9646920" y="6537960"/>
+            <a:ext cx="1965960" cy="201168"/>
           </a:xfrm>
           <a:prstGeom prst="rect">
             <a:avLst/>
@@ -8632,7 +9713,7 @@
                 <a:ea typeface="Aptos" pitchFamily="34" charset="-122"/>
                 <a:cs typeface="Aptos" pitchFamily="34" charset="-120"/>
               </a:rPr>
-              <a:t>Â© Paula Soper</a:t>
+              <a:t>Copyright Paula Soper</a:t>
             </a:r>
             <a:endParaRPr lang="en-US" sz="800" dirty="0"/>
           </a:p>
@@ -8727,7 +9808,7 @@
         <p:spPr>
           <a:xfrm>
             <a:off x="868680" y="1508760"/>
-            <a:ext cx="6537960" cy="4160520"/>
+            <a:ext cx="6309360" cy="4160520"/>
           </a:xfrm>
           <a:prstGeom prst="rect">
             <a:avLst/>
@@ -8764,12 +9845,12 @@
         </p:nvSpPr>
         <p:spPr>
           <a:xfrm>
-            <a:off x="7909560" y="1417320"/>
-            <a:ext cx="3154680" cy="1828800"/>
+            <a:off x="7635240" y="1325880"/>
+            <a:ext cx="3474720" cy="1325880"/>
           </a:xfrm>
           <a:prstGeom prst="roundRect">
             <a:avLst>
-              <a:gd name="adj" fmla="val 6000"/>
+              <a:gd name="adj" fmla="val 8276"/>
             </a:avLst>
           </a:prstGeom>
           <a:solidFill>
@@ -8791,8 +9872,8 @@
         </p:nvSpPr>
         <p:spPr>
           <a:xfrm>
-            <a:off x="8074152" y="1563624"/>
-            <a:ext cx="2825496" cy="256032"/>
+            <a:off x="7799832" y="1472184"/>
+            <a:ext cx="3145536" cy="256032"/>
           </a:xfrm>
           <a:prstGeom prst="rect">
             <a:avLst/>
@@ -8816,7 +9897,7 @@
                 <a:ea typeface="Aptos" pitchFamily="34" charset="-122"/>
                 <a:cs typeface="Aptos" pitchFamily="34" charset="-120"/>
               </a:rPr>
-              <a:t>Key idea</a:t>
+              <a:t>Core concept</a:t>
             </a:r>
             <a:endParaRPr lang="en-US" sz="1300" dirty="0"/>
           </a:p>
@@ -8830,8 +9911,8 @@
         </p:nvSpPr>
         <p:spPr>
           <a:xfrm>
-            <a:off x="8074152" y="1920240"/>
-            <a:ext cx="2825496" cy="1188720"/>
+            <a:off x="7799832" y="1828800"/>
+            <a:ext cx="3145536" cy="685800"/>
           </a:xfrm>
           <a:prstGeom prst="rect">
             <a:avLst/>
@@ -8871,12 +9952,153 @@
         </p:nvSpPr>
         <p:spPr>
           <a:xfrm>
-            <a:off x="7909560" y="3520440"/>
-            <a:ext cx="3154680" cy="1737360"/>
+            <a:off x="7635240" y="2788920"/>
+            <a:ext cx="3474720" cy="1536192"/>
           </a:xfrm>
           <a:prstGeom prst="roundRect">
             <a:avLst>
-              <a:gd name="adj" fmla="val 6316"/>
+              <a:gd name="adj" fmla="val 7143"/>
+            </a:avLst>
+          </a:prstGeom>
+          <a:solidFill>
+            <a:srgbClr val="FFFFFF">
+              <a:alpha val="88000"/>
+            </a:srgbClr>
+          </a:solidFill>
+          <a:ln w="12700">
+            <a:solidFill>
+              <a:srgbClr val="D6E8F2"/>
+            </a:solidFill>
+            <a:prstDash val="solid"/>
+          </a:ln>
+        </p:spPr>
+      </p:sp>
+      <p:sp>
+        <p:nvSpPr>
+          <p:cNvPr id="14" name="Shape 12"/>
+          <p:cNvSpPr/>
+          <p:nvPr/>
+        </p:nvSpPr>
+        <p:spPr>
+          <a:xfrm>
+            <a:off x="8074152" y="3291840"/>
+            <a:ext cx="2596896" cy="749808"/>
+          </a:xfrm>
+          <a:prstGeom prst="rect">
+            <a:avLst/>
+          </a:prstGeom>
+          <a:solidFill>
+            <a:srgbClr val="EAF6F8"/>
+          </a:solidFill>
+          <a:ln w="12700">
+            <a:solidFill>
+              <a:srgbClr val="8ABBD8"/>
+            </a:solidFill>
+            <a:prstDash val="solid"/>
+          </a:ln>
+        </p:spPr>
+      </p:sp>
+      <p:sp>
+        <p:nvSpPr>
+          <p:cNvPr id="15" name="Shape 13"/>
+          <p:cNvSpPr/>
+          <p:nvPr/>
+        </p:nvSpPr>
+        <p:spPr>
+          <a:xfrm>
+            <a:off x="8202168" y="3721608"/>
+            <a:ext cx="2340864" cy="0"/>
+          </a:xfrm>
+          <a:prstGeom prst="line">
+            <a:avLst/>
+          </a:prstGeom>
+          <a:noFill/>
+          <a:ln w="19050">
+            <a:solidFill>
+              <a:srgbClr val="0068B7"/>
+            </a:solidFill>
+            <a:prstDash val="solid"/>
+          </a:ln>
+        </p:spPr>
+      </p:sp>
+      <p:sp>
+        <p:nvSpPr>
+          <p:cNvPr id="16" name="Shape 14"/>
+          <p:cNvSpPr/>
+          <p:nvPr/>
+        </p:nvSpPr>
+        <p:spPr>
+          <a:xfrm>
+            <a:off x="9198864" y="4206240"/>
+            <a:ext cx="347472" cy="347472"/>
+          </a:xfrm>
+          <a:prstGeom prst="ellipse">
+            <a:avLst/>
+          </a:prstGeom>
+          <a:solidFill>
+            <a:srgbClr val="2F8A28"/>
+          </a:solidFill>
+          <a:ln w="12700">
+            <a:solidFill>
+              <a:srgbClr val="2F8A28"/>
+            </a:solidFill>
+            <a:prstDash val="solid"/>
+          </a:ln>
+        </p:spPr>
+      </p:sp>
+      <p:sp>
+        <p:nvSpPr>
+          <p:cNvPr id="17" name="Text 15"/>
+          <p:cNvSpPr/>
+          <p:nvPr/>
+        </p:nvSpPr>
+        <p:spPr>
+          <a:xfrm>
+            <a:off x="7909560" y="3977640"/>
+            <a:ext cx="2926080" cy="182880"/>
+          </a:xfrm>
+          <a:prstGeom prst="rect">
+            <a:avLst/>
+          </a:prstGeom>
+          <a:noFill/>
+          <a:ln/>
+        </p:spPr>
+        <p:txBody>
+          <a:bodyPr wrap="square" lIns="0" tIns="0" rIns="0" bIns="0" rtlCol="0" anchor="ctr"/>
+          <a:lstStyle/>
+          <a:p>
+            <a:pPr algn="ctr" indent="0" marL="0">
+              <a:buNone/>
+            </a:pPr>
+            <a:r>
+              <a:rPr lang="en-US" sz="1000" dirty="0">
+                <a:solidFill>
+                  <a:srgbClr val="003A63"/>
+                </a:solidFill>
+                <a:latin typeface="Aptos" pitchFamily="34" charset="0"/>
+                <a:ea typeface="Aptos" pitchFamily="34" charset="-122"/>
+                <a:cs typeface="Aptos" pitchFamily="34" charset="-120"/>
+              </a:rPr>
+              <a:t>Concept to action</a:t>
+            </a:r>
+            <a:endParaRPr lang="en-US" sz="1000" dirty="0"/>
+          </a:p>
+        </p:txBody>
+      </p:sp>
+      <p:sp>
+        <p:nvSpPr>
+          <p:cNvPr id="18" name="Shape 16"/>
+          <p:cNvSpPr/>
+          <p:nvPr/>
+        </p:nvSpPr>
+        <p:spPr>
+          <a:xfrm>
+            <a:off x="7635240" y="4498848"/>
+            <a:ext cx="3474720" cy="1143000"/>
+          </a:xfrm>
+          <a:prstGeom prst="roundRect">
+            <a:avLst>
+              <a:gd name="adj" fmla="val 9600"/>
             </a:avLst>
           </a:prstGeom>
           <a:solidFill>
@@ -8892,14 +10114,14 @@
       </p:sp>
       <p:sp>
         <p:nvSpPr>
-          <p:cNvPr id="14" name="Text 12"/>
-          <p:cNvSpPr/>
-          <p:nvPr/>
-        </p:nvSpPr>
-        <p:spPr>
-          <a:xfrm>
-            <a:off x="8074152" y="3666744"/>
-            <a:ext cx="2825496" cy="256032"/>
+          <p:cNvPr id="19" name="Text 17"/>
+          <p:cNvSpPr/>
+          <p:nvPr/>
+        </p:nvSpPr>
+        <p:spPr>
+          <a:xfrm>
+            <a:off x="7799832" y="4645152"/>
+            <a:ext cx="3145536" cy="256032"/>
           </a:xfrm>
           <a:prstGeom prst="rect">
             <a:avLst/>
@@ -8923,7 +10145,7 @@
                 <a:ea typeface="Aptos" pitchFamily="34" charset="-122"/>
                 <a:cs typeface="Aptos" pitchFamily="34" charset="-120"/>
               </a:rPr>
-              <a:t>Use this for</a:t>
+              <a:t>Apply it</a:t>
             </a:r>
             <a:endParaRPr lang="en-US" sz="1300" dirty="0"/>
           </a:p>
@@ -8931,14 +10153,14 @@
       </p:sp>
       <p:sp>
         <p:nvSpPr>
-          <p:cNvPr id="15" name="Text 13"/>
-          <p:cNvSpPr/>
-          <p:nvPr/>
-        </p:nvSpPr>
-        <p:spPr>
-          <a:xfrm>
-            <a:off x="8074152" y="4023360"/>
-            <a:ext cx="2825496" cy="1097280"/>
+          <p:cNvPr id="20" name="Text 18"/>
+          <p:cNvSpPr/>
+          <p:nvPr/>
+        </p:nvSpPr>
+        <p:spPr>
+          <a:xfrm>
+            <a:off x="7799832" y="5001768"/>
+            <a:ext cx="3145536" cy="502920"/>
           </a:xfrm>
           <a:prstGeom prst="rect">
             <a:avLst/>
@@ -8964,7 +10186,7 @@
                 <a:ea typeface="Aptos" pitchFamily="34" charset="-122"/>
                 <a:cs typeface="Aptos" pitchFamily="34" charset="-120"/>
               </a:rPr>
-              <a:t>Connect the concept to public health decisions, safeguards, documentation, or implementation work.</a:t>
+              <a:t>Connect the concept to public health purpose, responsible use, required safeguards, documentation, and the next action a department should take.</a:t>
             </a:r>
             <a:endParaRPr lang="en-US" sz="1550" dirty="0"/>
           </a:p>
@@ -9138,8 +10360,8 @@
         </p:nvSpPr>
         <p:spPr>
           <a:xfrm>
-            <a:off x="9966960" y="6537960"/>
-            <a:ext cx="1645920" cy="201168"/>
+            <a:off x="9646920" y="6537960"/>
+            <a:ext cx="1965960" cy="201168"/>
           </a:xfrm>
           <a:prstGeom prst="rect">
             <a:avLst/>
@@ -9163,7 +10385,7 @@
                 <a:ea typeface="Aptos" pitchFamily="34" charset="-122"/>
                 <a:cs typeface="Aptos" pitchFamily="34" charset="-120"/>
               </a:rPr>
-              <a:t>Â© Paula Soper</a:t>
+              <a:t>Copyright Paula Soper</a:t>
             </a:r>
             <a:endParaRPr lang="en-US" sz="800" dirty="0"/>
           </a:p>
@@ -9526,46 +10748,7 @@
       </p:sp>
       <p:sp>
         <p:nvSpPr>
-          <p:cNvPr id="15" name="Text 13"/>
-          <p:cNvSpPr/>
-          <p:nvPr/>
-        </p:nvSpPr>
-        <p:spPr>
-          <a:xfrm>
-            <a:off x="8695944" y="3941064"/>
-            <a:ext cx="201168" cy="256032"/>
-          </a:xfrm>
-          <a:prstGeom prst="rect">
-            <a:avLst/>
-          </a:prstGeom>
-          <a:noFill/>
-          <a:ln/>
-        </p:spPr>
-        <p:txBody>
-          <a:bodyPr wrap="square" lIns="0" tIns="0" rIns="0" bIns="0" rtlCol="0" anchor="ctr"/>
-          <a:lstStyle/>
-          <a:p>
-            <a:pPr algn="ctr" indent="0" marL="0">
-              <a:buNone/>
-            </a:pPr>
-            <a:r>
-              <a:rPr lang="en-US" sz="1800" b="1" dirty="0">
-                <a:solidFill>
-                  <a:srgbClr val="0068B7"/>
-                </a:solidFill>
-                <a:latin typeface="Aptos" pitchFamily="34" charset="0"/>
-                <a:ea typeface="Aptos" pitchFamily="34" charset="-122"/>
-                <a:cs typeface="Aptos" pitchFamily="34" charset="-120"/>
-              </a:rPr>
-              <a:t>â†’</a:t>
-            </a:r>
-            <a:endParaRPr lang="en-US" sz="1800" dirty="0"/>
-          </a:p>
-        </p:txBody>
-      </p:sp>
-      <p:sp>
-        <p:nvSpPr>
-          <p:cNvPr id="16" name="Shape 14"/>
+          <p:cNvPr id="15" name="Shape 13"/>
           <p:cNvSpPr/>
           <p:nvPr/>
         </p:nvSpPr>
@@ -9592,7 +10775,7 @@
       </p:sp>
       <p:sp>
         <p:nvSpPr>
-          <p:cNvPr id="17" name="Text 15"/>
+          <p:cNvPr id="16" name="Text 14"/>
           <p:cNvSpPr/>
           <p:nvPr/>
         </p:nvSpPr>
@@ -9633,46 +10816,7 @@
       </p:sp>
       <p:sp>
         <p:nvSpPr>
-          <p:cNvPr id="18" name="Text 16"/>
-          <p:cNvSpPr/>
-          <p:nvPr/>
-        </p:nvSpPr>
-        <p:spPr>
-          <a:xfrm>
-            <a:off x="9985248" y="3941064"/>
-            <a:ext cx="201168" cy="256032"/>
-          </a:xfrm>
-          <a:prstGeom prst="rect">
-            <a:avLst/>
-          </a:prstGeom>
-          <a:noFill/>
-          <a:ln/>
-        </p:spPr>
-        <p:txBody>
-          <a:bodyPr wrap="square" lIns="0" tIns="0" rIns="0" bIns="0" rtlCol="0" anchor="ctr"/>
-          <a:lstStyle/>
-          <a:p>
-            <a:pPr algn="ctr" indent="0" marL="0">
-              <a:buNone/>
-            </a:pPr>
-            <a:r>
-              <a:rPr lang="en-US" sz="1800" b="1" dirty="0">
-                <a:solidFill>
-                  <a:srgbClr val="0068B7"/>
-                </a:solidFill>
-                <a:latin typeface="Aptos" pitchFamily="34" charset="0"/>
-                <a:ea typeface="Aptos" pitchFamily="34" charset="-122"/>
-                <a:cs typeface="Aptos" pitchFamily="34" charset="-120"/>
-              </a:rPr>
-              <a:t>â†’</a:t>
-            </a:r>
-            <a:endParaRPr lang="en-US" sz="1800" dirty="0"/>
-          </a:p>
-        </p:txBody>
-      </p:sp>
-      <p:sp>
-        <p:nvSpPr>
-          <p:cNvPr id="19" name="Shape 17"/>
+          <p:cNvPr id="17" name="Shape 15"/>
           <p:cNvSpPr/>
           <p:nvPr/>
         </p:nvSpPr>
@@ -9699,7 +10843,7 @@
       </p:sp>
       <p:sp>
         <p:nvSpPr>
-          <p:cNvPr id="20" name="Text 18"/>
+          <p:cNvPr id="18" name="Text 16"/>
           <p:cNvSpPr/>
           <p:nvPr/>
         </p:nvSpPr>
@@ -9906,8 +11050,8 @@
         </p:nvSpPr>
         <p:spPr>
           <a:xfrm>
-            <a:off x="9966960" y="6537960"/>
-            <a:ext cx="1645920" cy="201168"/>
+            <a:off x="9646920" y="6537960"/>
+            <a:ext cx="1965960" cy="201168"/>
           </a:xfrm>
           <a:prstGeom prst="rect">
             <a:avLst/>
@@ -9931,7 +11075,7 @@
                 <a:ea typeface="Aptos" pitchFamily="34" charset="-122"/>
                 <a:cs typeface="Aptos" pitchFamily="34" charset="-120"/>
               </a:rPr>
-              <a:t>Â© Paula Soper</a:t>
+              <a:t>Copyright Paula Soper</a:t>
             </a:r>
             <a:endParaRPr lang="en-US" sz="800" dirty="0"/>
           </a:p>
@@ -9978,77 +11122,13 @@
       </p:sp>
       <p:sp>
         <p:nvSpPr>
-          <p:cNvPr id="8" name="Shape 6"/>
+          <p:cNvPr id="8" name="Text 6"/>
           <p:cNvSpPr/>
           <p:nvPr/>
         </p:nvSpPr>
         <p:spPr>
           <a:xfrm>
             <a:off x="640080" y="658368"/>
-            <a:ext cx="420624" cy="420624"/>
-          </a:xfrm>
-          <a:prstGeom prst="ellipse">
-            <a:avLst/>
-          </a:prstGeom>
-          <a:solidFill>
-            <a:srgbClr val="0068B7"/>
-          </a:solidFill>
-          <a:ln w="12700">
-            <a:solidFill>
-              <a:srgbClr val="0068B7"/>
-            </a:solidFill>
-            <a:prstDash val="solid"/>
-          </a:ln>
-        </p:spPr>
-      </p:sp>
-      <p:sp>
-        <p:nvSpPr>
-          <p:cNvPr id="9" name="Text 7"/>
-          <p:cNvSpPr/>
-          <p:nvPr/>
-        </p:nvSpPr>
-        <p:spPr>
-          <a:xfrm>
-            <a:off x="640080" y="731520"/>
-            <a:ext cx="420624" cy="164592"/>
-          </a:xfrm>
-          <a:prstGeom prst="rect">
-            <a:avLst/>
-          </a:prstGeom>
-          <a:noFill/>
-          <a:ln/>
-        </p:spPr>
-        <p:txBody>
-          <a:bodyPr wrap="square" lIns="0" tIns="0" rIns="0" bIns="0" rtlCol="0" anchor="ctr"/>
-          <a:lstStyle/>
-          <a:p>
-            <a:pPr algn="ctr" indent="0" marL="0">
-              <a:buNone/>
-            </a:pPr>
-            <a:r>
-              <a:rPr lang="en-US" sz="1100" b="1" dirty="0">
-                <a:solidFill>
-                  <a:srgbClr val="FFFFFF"/>
-                </a:solidFill>
-                <a:latin typeface="Aptos" pitchFamily="34" charset="0"/>
-                <a:ea typeface="Aptos" pitchFamily="34" charset="-122"/>
-                <a:cs typeface="Aptos" pitchFamily="34" charset="-120"/>
-              </a:rPr>
-              <a:t>11</a:t>
-            </a:r>
-            <a:endParaRPr lang="en-US" sz="1100" dirty="0"/>
-          </a:p>
-        </p:txBody>
-      </p:sp>
-      <p:sp>
-        <p:nvSpPr>
-          <p:cNvPr id="10" name="Text 8"/>
-          <p:cNvSpPr/>
-          <p:nvPr/>
-        </p:nvSpPr>
-        <p:spPr>
-          <a:xfrm>
-            <a:off x="640080" y="621792"/>
             <a:ext cx="10881360" cy="713232"/>
           </a:xfrm>
           <a:prstGeom prst="rect">
@@ -10083,14 +11163,14 @@
       </p:sp>
       <p:sp>
         <p:nvSpPr>
-          <p:cNvPr id="11" name="Text 9"/>
+          <p:cNvPr id="9" name="Text 7"/>
           <p:cNvSpPr/>
           <p:nvPr/>
         </p:nvSpPr>
         <p:spPr>
           <a:xfrm>
             <a:off x="868680" y="1508760"/>
-            <a:ext cx="6537960" cy="4160520"/>
+            <a:ext cx="6309360" cy="4160520"/>
           </a:xfrm>
           <a:prstGeom prst="rect">
             <a:avLst/>
@@ -10149,18 +11229,18 @@
       </p:sp>
       <p:sp>
         <p:nvSpPr>
-          <p:cNvPr id="12" name="Shape 10"/>
-          <p:cNvSpPr/>
-          <p:nvPr/>
-        </p:nvSpPr>
-        <p:spPr>
-          <a:xfrm>
-            <a:off x="7909560" y="1417320"/>
-            <a:ext cx="3154680" cy="1828800"/>
+          <p:cNvPr id="10" name="Shape 8"/>
+          <p:cNvSpPr/>
+          <p:nvPr/>
+        </p:nvSpPr>
+        <p:spPr>
+          <a:xfrm>
+            <a:off x="7635240" y="1325880"/>
+            <a:ext cx="3474720" cy="1325880"/>
           </a:xfrm>
           <a:prstGeom prst="roundRect">
             <a:avLst>
-              <a:gd name="adj" fmla="val 6000"/>
+              <a:gd name="adj" fmla="val 8276"/>
             </a:avLst>
           </a:prstGeom>
           <a:solidFill>
@@ -10176,14 +11256,14 @@
       </p:sp>
       <p:sp>
         <p:nvSpPr>
-          <p:cNvPr id="13" name="Text 11"/>
-          <p:cNvSpPr/>
-          <p:nvPr/>
-        </p:nvSpPr>
-        <p:spPr>
-          <a:xfrm>
-            <a:off x="8074152" y="1563624"/>
-            <a:ext cx="2825496" cy="256032"/>
+          <p:cNvPr id="11" name="Text 9"/>
+          <p:cNvSpPr/>
+          <p:nvPr/>
+        </p:nvSpPr>
+        <p:spPr>
+          <a:xfrm>
+            <a:off x="7799832" y="1472184"/>
+            <a:ext cx="3145536" cy="256032"/>
           </a:xfrm>
           <a:prstGeom prst="rect">
             <a:avLst/>
@@ -10207,7 +11287,7 @@
                 <a:ea typeface="Aptos" pitchFamily="34" charset="-122"/>
                 <a:cs typeface="Aptos" pitchFamily="34" charset="-120"/>
               </a:rPr>
-              <a:t>Key idea</a:t>
+              <a:t>Practice focus</a:t>
             </a:r>
             <a:endParaRPr lang="en-US" sz="1300" dirty="0"/>
           </a:p>
@@ -10215,14 +11295,14 @@
       </p:sp>
       <p:sp>
         <p:nvSpPr>
-          <p:cNvPr id="14" name="Text 12"/>
-          <p:cNvSpPr/>
-          <p:nvPr/>
-        </p:nvSpPr>
-        <p:spPr>
-          <a:xfrm>
-            <a:off x="8074152" y="1920240"/>
-            <a:ext cx="2825496" cy="1188720"/>
+          <p:cNvPr id="12" name="Text 10"/>
+          <p:cNvSpPr/>
+          <p:nvPr/>
+        </p:nvSpPr>
+        <p:spPr>
+          <a:xfrm>
+            <a:off x="7799832" y="1828800"/>
+            <a:ext cx="3145536" cy="685800"/>
           </a:xfrm>
           <a:prstGeom prst="rect">
             <a:avLst/>
@@ -10256,18 +11336,159 @@
       </p:sp>
       <p:sp>
         <p:nvSpPr>
-          <p:cNvPr id="15" name="Shape 13"/>
-          <p:cNvSpPr/>
-          <p:nvPr/>
-        </p:nvSpPr>
-        <p:spPr>
-          <a:xfrm>
-            <a:off x="7909560" y="3520440"/>
-            <a:ext cx="3154680" cy="1737360"/>
+          <p:cNvPr id="13" name="Shape 11"/>
+          <p:cNvSpPr/>
+          <p:nvPr/>
+        </p:nvSpPr>
+        <p:spPr>
+          <a:xfrm>
+            <a:off x="7635240" y="2788920"/>
+            <a:ext cx="3474720" cy="1536192"/>
           </a:xfrm>
           <a:prstGeom prst="roundRect">
             <a:avLst>
-              <a:gd name="adj" fmla="val 6316"/>
+              <a:gd name="adj" fmla="val 7143"/>
+            </a:avLst>
+          </a:prstGeom>
+          <a:solidFill>
+            <a:srgbClr val="FFFFFF">
+              <a:alpha val="88000"/>
+            </a:srgbClr>
+          </a:solidFill>
+          <a:ln w="12700">
+            <a:solidFill>
+              <a:srgbClr val="D6E8F2"/>
+            </a:solidFill>
+            <a:prstDash val="solid"/>
+          </a:ln>
+        </p:spPr>
+      </p:sp>
+      <p:sp>
+        <p:nvSpPr>
+          <p:cNvPr id="14" name="Shape 12"/>
+          <p:cNvSpPr/>
+          <p:nvPr/>
+        </p:nvSpPr>
+        <p:spPr>
+          <a:xfrm>
+            <a:off x="8074152" y="3291840"/>
+            <a:ext cx="2596896" cy="749808"/>
+          </a:xfrm>
+          <a:prstGeom prst="rect">
+            <a:avLst/>
+          </a:prstGeom>
+          <a:solidFill>
+            <a:srgbClr val="EAF6F8"/>
+          </a:solidFill>
+          <a:ln w="12700">
+            <a:solidFill>
+              <a:srgbClr val="8ABBD8"/>
+            </a:solidFill>
+            <a:prstDash val="solid"/>
+          </a:ln>
+        </p:spPr>
+      </p:sp>
+      <p:sp>
+        <p:nvSpPr>
+          <p:cNvPr id="15" name="Shape 13"/>
+          <p:cNvSpPr/>
+          <p:nvPr/>
+        </p:nvSpPr>
+        <p:spPr>
+          <a:xfrm>
+            <a:off x="8202168" y="3721608"/>
+            <a:ext cx="2340864" cy="0"/>
+          </a:xfrm>
+          <a:prstGeom prst="line">
+            <a:avLst/>
+          </a:prstGeom>
+          <a:noFill/>
+          <a:ln w="19050">
+            <a:solidFill>
+              <a:srgbClr val="0068B7"/>
+            </a:solidFill>
+            <a:prstDash val="solid"/>
+          </a:ln>
+        </p:spPr>
+      </p:sp>
+      <p:sp>
+        <p:nvSpPr>
+          <p:cNvPr id="16" name="Shape 14"/>
+          <p:cNvSpPr/>
+          <p:nvPr/>
+        </p:nvSpPr>
+        <p:spPr>
+          <a:xfrm>
+            <a:off x="9198864" y="4206240"/>
+            <a:ext cx="347472" cy="347472"/>
+          </a:xfrm>
+          <a:prstGeom prst="ellipse">
+            <a:avLst/>
+          </a:prstGeom>
+          <a:solidFill>
+            <a:srgbClr val="2F8A28"/>
+          </a:solidFill>
+          <a:ln w="12700">
+            <a:solidFill>
+              <a:srgbClr val="2F8A28"/>
+            </a:solidFill>
+            <a:prstDash val="solid"/>
+          </a:ln>
+        </p:spPr>
+      </p:sp>
+      <p:sp>
+        <p:nvSpPr>
+          <p:cNvPr id="17" name="Text 15"/>
+          <p:cNvSpPr/>
+          <p:nvPr/>
+        </p:nvSpPr>
+        <p:spPr>
+          <a:xfrm>
+            <a:off x="7909560" y="3977640"/>
+            <a:ext cx="2926080" cy="182880"/>
+          </a:xfrm>
+          <a:prstGeom prst="rect">
+            <a:avLst/>
+          </a:prstGeom>
+          <a:noFill/>
+          <a:ln/>
+        </p:spPr>
+        <p:txBody>
+          <a:bodyPr wrap="square" lIns="0" tIns="0" rIns="0" bIns="0" rtlCol="0" anchor="ctr"/>
+          <a:lstStyle/>
+          <a:p>
+            <a:pPr algn="ctr" indent="0" marL="0">
+              <a:buNone/>
+            </a:pPr>
+            <a:r>
+              <a:rPr lang="en-US" sz="1000" dirty="0">
+                <a:solidFill>
+                  <a:srgbClr val="003A63"/>
+                </a:solidFill>
+                <a:latin typeface="Aptos" pitchFamily="34" charset="0"/>
+                <a:ea typeface="Aptos" pitchFamily="34" charset="-122"/>
+                <a:cs typeface="Aptos" pitchFamily="34" charset="-120"/>
+              </a:rPr>
+              <a:t>Concept to action</a:t>
+            </a:r>
+            <a:endParaRPr lang="en-US" sz="1000" dirty="0"/>
+          </a:p>
+        </p:txBody>
+      </p:sp>
+      <p:sp>
+        <p:nvSpPr>
+          <p:cNvPr id="18" name="Shape 16"/>
+          <p:cNvSpPr/>
+          <p:nvPr/>
+        </p:nvSpPr>
+        <p:spPr>
+          <a:xfrm>
+            <a:off x="7635240" y="4498848"/>
+            <a:ext cx="3474720" cy="1143000"/>
+          </a:xfrm>
+          <a:prstGeom prst="roundRect">
+            <a:avLst>
+              <a:gd name="adj" fmla="val 9600"/>
             </a:avLst>
           </a:prstGeom>
           <a:solidFill>
@@ -10283,14 +11504,14 @@
       </p:sp>
       <p:sp>
         <p:nvSpPr>
-          <p:cNvPr id="16" name="Text 14"/>
-          <p:cNvSpPr/>
-          <p:nvPr/>
-        </p:nvSpPr>
-        <p:spPr>
-          <a:xfrm>
-            <a:off x="8074152" y="3666744"/>
-            <a:ext cx="2825496" cy="256032"/>
+          <p:cNvPr id="19" name="Text 17"/>
+          <p:cNvSpPr/>
+          <p:nvPr/>
+        </p:nvSpPr>
+        <p:spPr>
+          <a:xfrm>
+            <a:off x="7799832" y="4645152"/>
+            <a:ext cx="3145536" cy="256032"/>
           </a:xfrm>
           <a:prstGeom prst="rect">
             <a:avLst/>
@@ -10314,7 +11535,7 @@
                 <a:ea typeface="Aptos" pitchFamily="34" charset="-122"/>
                 <a:cs typeface="Aptos" pitchFamily="34" charset="-120"/>
               </a:rPr>
-              <a:t>Use this for</a:t>
+              <a:t>What to produce</a:t>
             </a:r>
             <a:endParaRPr lang="en-US" sz="1300" dirty="0"/>
           </a:p>
@@ -10322,14 +11543,14 @@
       </p:sp>
       <p:sp>
         <p:nvSpPr>
-          <p:cNvPr id="17" name="Text 15"/>
-          <p:cNvSpPr/>
-          <p:nvPr/>
-        </p:nvSpPr>
-        <p:spPr>
-          <a:xfrm>
-            <a:off x="8074152" y="4023360"/>
-            <a:ext cx="2825496" cy="1097280"/>
+          <p:cNvPr id="20" name="Text 18"/>
+          <p:cNvSpPr/>
+          <p:nvPr/>
+        </p:nvSpPr>
+        <p:spPr>
+          <a:xfrm>
+            <a:off x="7799832" y="5001768"/>
+            <a:ext cx="3145536" cy="502920"/>
           </a:xfrm>
           <a:prstGeom prst="rect">
             <a:avLst/>
@@ -10355,7 +11576,7 @@
                 <a:ea typeface="Aptos" pitchFamily="34" charset="-122"/>
                 <a:cs typeface="Aptos" pitchFamily="34" charset="-120"/>
               </a:rPr>
-              <a:t>Connect the concept to public health decisions, safeguards, documentation, or implementation work.</a:t>
+              <a:t>Use the assignment to test whether you can explain the concept, apply it to a realistic public health situation, and identify what would need review before the work moves forward.</a:t>
             </a:r>
             <a:endParaRPr lang="en-US" sz="1550" dirty="0"/>
           </a:p>
@@ -10529,8 +11750,8 @@
         </p:nvSpPr>
         <p:spPr>
           <a:xfrm>
-            <a:off x="9966960" y="6537960"/>
-            <a:ext cx="1645920" cy="201168"/>
+            <a:off x="9646920" y="6537960"/>
+            <a:ext cx="1965960" cy="201168"/>
           </a:xfrm>
           <a:prstGeom prst="rect">
             <a:avLst/>
@@ -10554,7 +11775,7 @@
                 <a:ea typeface="Aptos" pitchFamily="34" charset="-122"/>
                 <a:cs typeface="Aptos" pitchFamily="34" charset="-120"/>
               </a:rPr>
-              <a:t>Â© Paula Soper</a:t>
+              <a:t>Copyright Paula Soper</a:t>
             </a:r>
             <a:endParaRPr lang="en-US" sz="800" dirty="0"/>
           </a:p>
@@ -10601,77 +11822,13 @@
       </p:sp>
       <p:sp>
         <p:nvSpPr>
-          <p:cNvPr id="8" name="Shape 6"/>
+          <p:cNvPr id="8" name="Text 6"/>
           <p:cNvSpPr/>
           <p:nvPr/>
         </p:nvSpPr>
         <p:spPr>
           <a:xfrm>
             <a:off x="640080" y="658368"/>
-            <a:ext cx="420624" cy="420624"/>
-          </a:xfrm>
-          <a:prstGeom prst="ellipse">
-            <a:avLst/>
-          </a:prstGeom>
-          <a:solidFill>
-            <a:srgbClr val="0068B7"/>
-          </a:solidFill>
-          <a:ln w="12700">
-            <a:solidFill>
-              <a:srgbClr val="0068B7"/>
-            </a:solidFill>
-            <a:prstDash val="solid"/>
-          </a:ln>
-        </p:spPr>
-      </p:sp>
-      <p:sp>
-        <p:nvSpPr>
-          <p:cNvPr id="9" name="Text 7"/>
-          <p:cNvSpPr/>
-          <p:nvPr/>
-        </p:nvSpPr>
-        <p:spPr>
-          <a:xfrm>
-            <a:off x="640080" y="731520"/>
-            <a:ext cx="420624" cy="164592"/>
-          </a:xfrm>
-          <a:prstGeom prst="rect">
-            <a:avLst/>
-          </a:prstGeom>
-          <a:noFill/>
-          <a:ln/>
-        </p:spPr>
-        <p:txBody>
-          <a:bodyPr wrap="square" lIns="0" tIns="0" rIns="0" bIns="0" rtlCol="0" anchor="ctr"/>
-          <a:lstStyle/>
-          <a:p>
-            <a:pPr algn="ctr" indent="0" marL="0">
-              <a:buNone/>
-            </a:pPr>
-            <a:r>
-              <a:rPr lang="en-US" sz="1100" b="1" dirty="0">
-                <a:solidFill>
-                  <a:srgbClr val="FFFFFF"/>
-                </a:solidFill>
-                <a:latin typeface="Aptos" pitchFamily="34" charset="0"/>
-                <a:ea typeface="Aptos" pitchFamily="34" charset="-122"/>
-                <a:cs typeface="Aptos" pitchFamily="34" charset="-120"/>
-              </a:rPr>
-              <a:t>12</a:t>
-            </a:r>
-            <a:endParaRPr lang="en-US" sz="1100" dirty="0"/>
-          </a:p>
-        </p:txBody>
-      </p:sp>
-      <p:sp>
-        <p:nvSpPr>
-          <p:cNvPr id="10" name="Text 8"/>
-          <p:cNvSpPr/>
-          <p:nvPr/>
-        </p:nvSpPr>
-        <p:spPr>
-          <a:xfrm>
-            <a:off x="640080" y="621792"/>
             <a:ext cx="10881360" cy="713232"/>
           </a:xfrm>
           <a:prstGeom prst="rect">
@@ -10706,14 +11863,14 @@
       </p:sp>
       <p:sp>
         <p:nvSpPr>
-          <p:cNvPr id="11" name="Text 9"/>
+          <p:cNvPr id="9" name="Text 7"/>
           <p:cNvSpPr/>
           <p:nvPr/>
         </p:nvSpPr>
         <p:spPr>
           <a:xfrm>
             <a:off x="868680" y="1508760"/>
-            <a:ext cx="6537960" cy="4160520"/>
+            <a:ext cx="6309360" cy="4160520"/>
           </a:xfrm>
           <a:prstGeom prst="rect">
             <a:avLst/>
@@ -10772,18 +11929,18 @@
       </p:sp>
       <p:sp>
         <p:nvSpPr>
-          <p:cNvPr id="12" name="Shape 10"/>
-          <p:cNvSpPr/>
-          <p:nvPr/>
-        </p:nvSpPr>
-        <p:spPr>
-          <a:xfrm>
-            <a:off x="7909560" y="1417320"/>
-            <a:ext cx="3154680" cy="1828800"/>
+          <p:cNvPr id="10" name="Shape 8"/>
+          <p:cNvSpPr/>
+          <p:nvPr/>
+        </p:nvSpPr>
+        <p:spPr>
+          <a:xfrm>
+            <a:off x="7635240" y="1325880"/>
+            <a:ext cx="3474720" cy="1325880"/>
           </a:xfrm>
           <a:prstGeom prst="roundRect">
             <a:avLst>
-              <a:gd name="adj" fmla="val 6000"/>
+              <a:gd name="adj" fmla="val 8276"/>
             </a:avLst>
           </a:prstGeom>
           <a:solidFill>
@@ -10799,14 +11956,14 @@
       </p:sp>
       <p:sp>
         <p:nvSpPr>
-          <p:cNvPr id="13" name="Text 11"/>
-          <p:cNvSpPr/>
-          <p:nvPr/>
-        </p:nvSpPr>
-        <p:spPr>
-          <a:xfrm>
-            <a:off x="8074152" y="1563624"/>
-            <a:ext cx="2825496" cy="256032"/>
+          <p:cNvPr id="11" name="Text 9"/>
+          <p:cNvSpPr/>
+          <p:nvPr/>
+        </p:nvSpPr>
+        <p:spPr>
+          <a:xfrm>
+            <a:off x="7799832" y="1472184"/>
+            <a:ext cx="3145536" cy="256032"/>
           </a:xfrm>
           <a:prstGeom prst="rect">
             <a:avLst/>
@@ -10830,7 +11987,7 @@
                 <a:ea typeface="Aptos" pitchFamily="34" charset="-122"/>
                 <a:cs typeface="Aptos" pitchFamily="34" charset="-120"/>
               </a:rPr>
-              <a:t>Key idea</a:t>
+              <a:t>Practice focus</a:t>
             </a:r>
             <a:endParaRPr lang="en-US" sz="1300" dirty="0"/>
           </a:p>
@@ -10838,14 +11995,14 @@
       </p:sp>
       <p:sp>
         <p:nvSpPr>
-          <p:cNvPr id="14" name="Text 12"/>
-          <p:cNvSpPr/>
-          <p:nvPr/>
-        </p:nvSpPr>
-        <p:spPr>
-          <a:xfrm>
-            <a:off x="8074152" y="1920240"/>
-            <a:ext cx="2825496" cy="1188720"/>
+          <p:cNvPr id="12" name="Text 10"/>
+          <p:cNvSpPr/>
+          <p:nvPr/>
+        </p:nvSpPr>
+        <p:spPr>
+          <a:xfrm>
+            <a:off x="7799832" y="1828800"/>
+            <a:ext cx="3145536" cy="685800"/>
           </a:xfrm>
           <a:prstGeom prst="rect">
             <a:avLst/>
@@ -10879,18 +12036,159 @@
       </p:sp>
       <p:sp>
         <p:nvSpPr>
-          <p:cNvPr id="15" name="Shape 13"/>
-          <p:cNvSpPr/>
-          <p:nvPr/>
-        </p:nvSpPr>
-        <p:spPr>
-          <a:xfrm>
-            <a:off x="7909560" y="3520440"/>
-            <a:ext cx="3154680" cy="1737360"/>
+          <p:cNvPr id="13" name="Shape 11"/>
+          <p:cNvSpPr/>
+          <p:nvPr/>
+        </p:nvSpPr>
+        <p:spPr>
+          <a:xfrm>
+            <a:off x="7635240" y="2788920"/>
+            <a:ext cx="3474720" cy="1536192"/>
           </a:xfrm>
           <a:prstGeom prst="roundRect">
             <a:avLst>
-              <a:gd name="adj" fmla="val 6316"/>
+              <a:gd name="adj" fmla="val 7143"/>
+            </a:avLst>
+          </a:prstGeom>
+          <a:solidFill>
+            <a:srgbClr val="FFFFFF">
+              <a:alpha val="88000"/>
+            </a:srgbClr>
+          </a:solidFill>
+          <a:ln w="12700">
+            <a:solidFill>
+              <a:srgbClr val="D6E8F2"/>
+            </a:solidFill>
+            <a:prstDash val="solid"/>
+          </a:ln>
+        </p:spPr>
+      </p:sp>
+      <p:sp>
+        <p:nvSpPr>
+          <p:cNvPr id="14" name="Shape 12"/>
+          <p:cNvSpPr/>
+          <p:nvPr/>
+        </p:nvSpPr>
+        <p:spPr>
+          <a:xfrm>
+            <a:off x="8074152" y="3291840"/>
+            <a:ext cx="2596896" cy="749808"/>
+          </a:xfrm>
+          <a:prstGeom prst="rect">
+            <a:avLst/>
+          </a:prstGeom>
+          <a:solidFill>
+            <a:srgbClr val="EAF6F8"/>
+          </a:solidFill>
+          <a:ln w="12700">
+            <a:solidFill>
+              <a:srgbClr val="8ABBD8"/>
+            </a:solidFill>
+            <a:prstDash val="solid"/>
+          </a:ln>
+        </p:spPr>
+      </p:sp>
+      <p:sp>
+        <p:nvSpPr>
+          <p:cNvPr id="15" name="Shape 13"/>
+          <p:cNvSpPr/>
+          <p:nvPr/>
+        </p:nvSpPr>
+        <p:spPr>
+          <a:xfrm>
+            <a:off x="8202168" y="3721608"/>
+            <a:ext cx="2340864" cy="0"/>
+          </a:xfrm>
+          <a:prstGeom prst="line">
+            <a:avLst/>
+          </a:prstGeom>
+          <a:noFill/>
+          <a:ln w="19050">
+            <a:solidFill>
+              <a:srgbClr val="0068B7"/>
+            </a:solidFill>
+            <a:prstDash val="solid"/>
+          </a:ln>
+        </p:spPr>
+      </p:sp>
+      <p:sp>
+        <p:nvSpPr>
+          <p:cNvPr id="16" name="Shape 14"/>
+          <p:cNvSpPr/>
+          <p:nvPr/>
+        </p:nvSpPr>
+        <p:spPr>
+          <a:xfrm>
+            <a:off x="9198864" y="4206240"/>
+            <a:ext cx="347472" cy="347472"/>
+          </a:xfrm>
+          <a:prstGeom prst="ellipse">
+            <a:avLst/>
+          </a:prstGeom>
+          <a:solidFill>
+            <a:srgbClr val="2F8A28"/>
+          </a:solidFill>
+          <a:ln w="12700">
+            <a:solidFill>
+              <a:srgbClr val="2F8A28"/>
+            </a:solidFill>
+            <a:prstDash val="solid"/>
+          </a:ln>
+        </p:spPr>
+      </p:sp>
+      <p:sp>
+        <p:nvSpPr>
+          <p:cNvPr id="17" name="Text 15"/>
+          <p:cNvSpPr/>
+          <p:nvPr/>
+        </p:nvSpPr>
+        <p:spPr>
+          <a:xfrm>
+            <a:off x="7909560" y="3977640"/>
+            <a:ext cx="2926080" cy="182880"/>
+          </a:xfrm>
+          <a:prstGeom prst="rect">
+            <a:avLst/>
+          </a:prstGeom>
+          <a:noFill/>
+          <a:ln/>
+        </p:spPr>
+        <p:txBody>
+          <a:bodyPr wrap="square" lIns="0" tIns="0" rIns="0" bIns="0" rtlCol="0" anchor="ctr"/>
+          <a:lstStyle/>
+          <a:p>
+            <a:pPr algn="ctr" indent="0" marL="0">
+              <a:buNone/>
+            </a:pPr>
+            <a:r>
+              <a:rPr lang="en-US" sz="1000" dirty="0">
+                <a:solidFill>
+                  <a:srgbClr val="003A63"/>
+                </a:solidFill>
+                <a:latin typeface="Aptos" pitchFamily="34" charset="0"/>
+                <a:ea typeface="Aptos" pitchFamily="34" charset="-122"/>
+                <a:cs typeface="Aptos" pitchFamily="34" charset="-120"/>
+              </a:rPr>
+              <a:t>Concept to action</a:t>
+            </a:r>
+            <a:endParaRPr lang="en-US" sz="1000" dirty="0"/>
+          </a:p>
+        </p:txBody>
+      </p:sp>
+      <p:sp>
+        <p:nvSpPr>
+          <p:cNvPr id="18" name="Shape 16"/>
+          <p:cNvSpPr/>
+          <p:nvPr/>
+        </p:nvSpPr>
+        <p:spPr>
+          <a:xfrm>
+            <a:off x="7635240" y="4498848"/>
+            <a:ext cx="3474720" cy="1143000"/>
+          </a:xfrm>
+          <a:prstGeom prst="roundRect">
+            <a:avLst>
+              <a:gd name="adj" fmla="val 9600"/>
             </a:avLst>
           </a:prstGeom>
           <a:solidFill>
@@ -10906,14 +12204,14 @@
       </p:sp>
       <p:sp>
         <p:nvSpPr>
-          <p:cNvPr id="16" name="Text 14"/>
-          <p:cNvSpPr/>
-          <p:nvPr/>
-        </p:nvSpPr>
-        <p:spPr>
-          <a:xfrm>
-            <a:off x="8074152" y="3666744"/>
-            <a:ext cx="2825496" cy="256032"/>
+          <p:cNvPr id="19" name="Text 17"/>
+          <p:cNvSpPr/>
+          <p:nvPr/>
+        </p:nvSpPr>
+        <p:spPr>
+          <a:xfrm>
+            <a:off x="7799832" y="4645152"/>
+            <a:ext cx="3145536" cy="256032"/>
           </a:xfrm>
           <a:prstGeom prst="rect">
             <a:avLst/>
@@ -10937,7 +12235,7 @@
                 <a:ea typeface="Aptos" pitchFamily="34" charset="-122"/>
                 <a:cs typeface="Aptos" pitchFamily="34" charset="-120"/>
               </a:rPr>
-              <a:t>Use this for</a:t>
+              <a:t>What to produce</a:t>
             </a:r>
             <a:endParaRPr lang="en-US" sz="1300" dirty="0"/>
           </a:p>
@@ -10945,14 +12243,14 @@
       </p:sp>
       <p:sp>
         <p:nvSpPr>
-          <p:cNvPr id="17" name="Text 15"/>
-          <p:cNvSpPr/>
-          <p:nvPr/>
-        </p:nvSpPr>
-        <p:spPr>
-          <a:xfrm>
-            <a:off x="8074152" y="4023360"/>
-            <a:ext cx="2825496" cy="1097280"/>
+          <p:cNvPr id="20" name="Text 18"/>
+          <p:cNvSpPr/>
+          <p:nvPr/>
+        </p:nvSpPr>
+        <p:spPr>
+          <a:xfrm>
+            <a:off x="7799832" y="5001768"/>
+            <a:ext cx="3145536" cy="502920"/>
           </a:xfrm>
           <a:prstGeom prst="rect">
             <a:avLst/>
@@ -10978,7 +12276,7 @@
                 <a:ea typeface="Aptos" pitchFamily="34" charset="-122"/>
                 <a:cs typeface="Aptos" pitchFamily="34" charset="-120"/>
               </a:rPr>
-              <a:t>Connect the concept to public health decisions, safeguards, documentation, or implementation work.</a:t>
+              <a:t>Use the assignment to test whether you can explain the concept, apply it to a realistic public health situation, and identify what would need review before the work moves forward.</a:t>
             </a:r>
             <a:endParaRPr lang="en-US" sz="1550" dirty="0"/>
           </a:p>
@@ -11152,8 +12450,8 @@
         </p:nvSpPr>
         <p:spPr>
           <a:xfrm>
-            <a:off x="9966960" y="6537960"/>
-            <a:ext cx="1645920" cy="201168"/>
+            <a:off x="9646920" y="6537960"/>
+            <a:ext cx="1965960" cy="201168"/>
           </a:xfrm>
           <a:prstGeom prst="rect">
             <a:avLst/>
@@ -11177,7 +12475,7 @@
                 <a:ea typeface="Aptos" pitchFamily="34" charset="-122"/>
                 <a:cs typeface="Aptos" pitchFamily="34" charset="-120"/>
               </a:rPr>
-              <a:t>Â© Paula Soper</a:t>
+              <a:t>Copyright Paula Soper</a:t>
             </a:r>
             <a:endParaRPr lang="en-US" sz="800" dirty="0"/>
           </a:p>
@@ -11224,77 +12522,13 @@
       </p:sp>
       <p:sp>
         <p:nvSpPr>
-          <p:cNvPr id="8" name="Shape 6"/>
+          <p:cNvPr id="8" name="Text 6"/>
           <p:cNvSpPr/>
           <p:nvPr/>
         </p:nvSpPr>
         <p:spPr>
           <a:xfrm>
             <a:off x="640080" y="658368"/>
-            <a:ext cx="420624" cy="420624"/>
-          </a:xfrm>
-          <a:prstGeom prst="ellipse">
-            <a:avLst/>
-          </a:prstGeom>
-          <a:solidFill>
-            <a:srgbClr val="0068B7"/>
-          </a:solidFill>
-          <a:ln w="12700">
-            <a:solidFill>
-              <a:srgbClr val="0068B7"/>
-            </a:solidFill>
-            <a:prstDash val="solid"/>
-          </a:ln>
-        </p:spPr>
-      </p:sp>
-      <p:sp>
-        <p:nvSpPr>
-          <p:cNvPr id="9" name="Text 7"/>
-          <p:cNvSpPr/>
-          <p:nvPr/>
-        </p:nvSpPr>
-        <p:spPr>
-          <a:xfrm>
-            <a:off x="640080" y="731520"/>
-            <a:ext cx="420624" cy="164592"/>
-          </a:xfrm>
-          <a:prstGeom prst="rect">
-            <a:avLst/>
-          </a:prstGeom>
-          <a:noFill/>
-          <a:ln/>
-        </p:spPr>
-        <p:txBody>
-          <a:bodyPr wrap="square" lIns="0" tIns="0" rIns="0" bIns="0" rtlCol="0" anchor="ctr"/>
-          <a:lstStyle/>
-          <a:p>
-            <a:pPr algn="ctr" indent="0" marL="0">
-              <a:buNone/>
-            </a:pPr>
-            <a:r>
-              <a:rPr lang="en-US" sz="1100" b="1" dirty="0">
-                <a:solidFill>
-                  <a:srgbClr val="FFFFFF"/>
-                </a:solidFill>
-                <a:latin typeface="Aptos" pitchFamily="34" charset="0"/>
-                <a:ea typeface="Aptos" pitchFamily="34" charset="-122"/>
-                <a:cs typeface="Aptos" pitchFamily="34" charset="-120"/>
-              </a:rPr>
-              <a:t>13</a:t>
-            </a:r>
-            <a:endParaRPr lang="en-US" sz="1100" dirty="0"/>
-          </a:p>
-        </p:txBody>
-      </p:sp>
-      <p:sp>
-        <p:nvSpPr>
-          <p:cNvPr id="10" name="Text 8"/>
-          <p:cNvSpPr/>
-          <p:nvPr/>
-        </p:nvSpPr>
-        <p:spPr>
-          <a:xfrm>
-            <a:off x="640080" y="621792"/>
             <a:ext cx="10881360" cy="713232"/>
           </a:xfrm>
           <a:prstGeom prst="rect">
@@ -11329,14 +12563,14 @@
       </p:sp>
       <p:sp>
         <p:nvSpPr>
-          <p:cNvPr id="11" name="Text 9"/>
+          <p:cNvPr id="9" name="Text 7"/>
           <p:cNvSpPr/>
           <p:nvPr/>
         </p:nvSpPr>
         <p:spPr>
           <a:xfrm>
             <a:off x="868680" y="1508760"/>
-            <a:ext cx="6537960" cy="4160520"/>
+            <a:ext cx="6309360" cy="4160520"/>
           </a:xfrm>
           <a:prstGeom prst="rect">
             <a:avLst/>
@@ -11395,18 +12629,18 @@
       </p:sp>
       <p:sp>
         <p:nvSpPr>
-          <p:cNvPr id="12" name="Shape 10"/>
-          <p:cNvSpPr/>
-          <p:nvPr/>
-        </p:nvSpPr>
-        <p:spPr>
-          <a:xfrm>
-            <a:off x="7909560" y="1417320"/>
-            <a:ext cx="3154680" cy="1828800"/>
+          <p:cNvPr id="10" name="Shape 8"/>
+          <p:cNvSpPr/>
+          <p:nvPr/>
+        </p:nvSpPr>
+        <p:spPr>
+          <a:xfrm>
+            <a:off x="7635240" y="1325880"/>
+            <a:ext cx="3474720" cy="1325880"/>
           </a:xfrm>
           <a:prstGeom prst="roundRect">
             <a:avLst>
-              <a:gd name="adj" fmla="val 6000"/>
+              <a:gd name="adj" fmla="val 8276"/>
             </a:avLst>
           </a:prstGeom>
           <a:solidFill>
@@ -11422,14 +12656,14 @@
       </p:sp>
       <p:sp>
         <p:nvSpPr>
-          <p:cNvPr id="13" name="Text 11"/>
-          <p:cNvSpPr/>
-          <p:nvPr/>
-        </p:nvSpPr>
-        <p:spPr>
-          <a:xfrm>
-            <a:off x="8074152" y="1563624"/>
-            <a:ext cx="2825496" cy="256032"/>
+          <p:cNvPr id="11" name="Text 9"/>
+          <p:cNvSpPr/>
+          <p:nvPr/>
+        </p:nvSpPr>
+        <p:spPr>
+          <a:xfrm>
+            <a:off x="7799832" y="1472184"/>
+            <a:ext cx="3145536" cy="256032"/>
           </a:xfrm>
           <a:prstGeom prst="rect">
             <a:avLst/>
@@ -11453,7 +12687,7 @@
                 <a:ea typeface="Aptos" pitchFamily="34" charset="-122"/>
                 <a:cs typeface="Aptos" pitchFamily="34" charset="-120"/>
               </a:rPr>
-              <a:t>Key idea</a:t>
+              <a:t>Core concept</a:t>
             </a:r>
             <a:endParaRPr lang="en-US" sz="1300" dirty="0"/>
           </a:p>
@@ -11461,14 +12695,14 @@
       </p:sp>
       <p:sp>
         <p:nvSpPr>
-          <p:cNvPr id="14" name="Text 12"/>
-          <p:cNvSpPr/>
-          <p:nvPr/>
-        </p:nvSpPr>
-        <p:spPr>
-          <a:xfrm>
-            <a:off x="8074152" y="1920240"/>
-            <a:ext cx="2825496" cy="1188720"/>
+          <p:cNvPr id="12" name="Text 10"/>
+          <p:cNvSpPr/>
+          <p:nvPr/>
+        </p:nvSpPr>
+        <p:spPr>
+          <a:xfrm>
+            <a:off x="7799832" y="1828800"/>
+            <a:ext cx="3145536" cy="685800"/>
           </a:xfrm>
           <a:prstGeom prst="rect">
             <a:avLst/>
@@ -11502,18 +12736,159 @@
       </p:sp>
       <p:sp>
         <p:nvSpPr>
-          <p:cNvPr id="15" name="Shape 13"/>
-          <p:cNvSpPr/>
-          <p:nvPr/>
-        </p:nvSpPr>
-        <p:spPr>
-          <a:xfrm>
-            <a:off x="7909560" y="3520440"/>
-            <a:ext cx="3154680" cy="1737360"/>
+          <p:cNvPr id="13" name="Shape 11"/>
+          <p:cNvSpPr/>
+          <p:nvPr/>
+        </p:nvSpPr>
+        <p:spPr>
+          <a:xfrm>
+            <a:off x="7635240" y="2788920"/>
+            <a:ext cx="3474720" cy="1536192"/>
           </a:xfrm>
           <a:prstGeom prst="roundRect">
             <a:avLst>
-              <a:gd name="adj" fmla="val 6316"/>
+              <a:gd name="adj" fmla="val 7143"/>
+            </a:avLst>
+          </a:prstGeom>
+          <a:solidFill>
+            <a:srgbClr val="FFFFFF">
+              <a:alpha val="88000"/>
+            </a:srgbClr>
+          </a:solidFill>
+          <a:ln w="12700">
+            <a:solidFill>
+              <a:srgbClr val="D6E8F2"/>
+            </a:solidFill>
+            <a:prstDash val="solid"/>
+          </a:ln>
+        </p:spPr>
+      </p:sp>
+      <p:sp>
+        <p:nvSpPr>
+          <p:cNvPr id="14" name="Shape 12"/>
+          <p:cNvSpPr/>
+          <p:nvPr/>
+        </p:nvSpPr>
+        <p:spPr>
+          <a:xfrm>
+            <a:off x="8074152" y="3291840"/>
+            <a:ext cx="2596896" cy="749808"/>
+          </a:xfrm>
+          <a:prstGeom prst="rect">
+            <a:avLst/>
+          </a:prstGeom>
+          <a:solidFill>
+            <a:srgbClr val="EAF6F8"/>
+          </a:solidFill>
+          <a:ln w="12700">
+            <a:solidFill>
+              <a:srgbClr val="8ABBD8"/>
+            </a:solidFill>
+            <a:prstDash val="solid"/>
+          </a:ln>
+        </p:spPr>
+      </p:sp>
+      <p:sp>
+        <p:nvSpPr>
+          <p:cNvPr id="15" name="Shape 13"/>
+          <p:cNvSpPr/>
+          <p:nvPr/>
+        </p:nvSpPr>
+        <p:spPr>
+          <a:xfrm>
+            <a:off x="8202168" y="3721608"/>
+            <a:ext cx="2340864" cy="0"/>
+          </a:xfrm>
+          <a:prstGeom prst="line">
+            <a:avLst/>
+          </a:prstGeom>
+          <a:noFill/>
+          <a:ln w="19050">
+            <a:solidFill>
+              <a:srgbClr val="0068B7"/>
+            </a:solidFill>
+            <a:prstDash val="solid"/>
+          </a:ln>
+        </p:spPr>
+      </p:sp>
+      <p:sp>
+        <p:nvSpPr>
+          <p:cNvPr id="16" name="Shape 14"/>
+          <p:cNvSpPr/>
+          <p:nvPr/>
+        </p:nvSpPr>
+        <p:spPr>
+          <a:xfrm>
+            <a:off x="9198864" y="4206240"/>
+            <a:ext cx="347472" cy="347472"/>
+          </a:xfrm>
+          <a:prstGeom prst="ellipse">
+            <a:avLst/>
+          </a:prstGeom>
+          <a:solidFill>
+            <a:srgbClr val="2F8A28"/>
+          </a:solidFill>
+          <a:ln w="12700">
+            <a:solidFill>
+              <a:srgbClr val="2F8A28"/>
+            </a:solidFill>
+            <a:prstDash val="solid"/>
+          </a:ln>
+        </p:spPr>
+      </p:sp>
+      <p:sp>
+        <p:nvSpPr>
+          <p:cNvPr id="17" name="Text 15"/>
+          <p:cNvSpPr/>
+          <p:nvPr/>
+        </p:nvSpPr>
+        <p:spPr>
+          <a:xfrm>
+            <a:off x="7909560" y="3977640"/>
+            <a:ext cx="2926080" cy="182880"/>
+          </a:xfrm>
+          <a:prstGeom prst="rect">
+            <a:avLst/>
+          </a:prstGeom>
+          <a:noFill/>
+          <a:ln/>
+        </p:spPr>
+        <p:txBody>
+          <a:bodyPr wrap="square" lIns="0" tIns="0" rIns="0" bIns="0" rtlCol="0" anchor="ctr"/>
+          <a:lstStyle/>
+          <a:p>
+            <a:pPr algn="ctr" indent="0" marL="0">
+              <a:buNone/>
+            </a:pPr>
+            <a:r>
+              <a:rPr lang="en-US" sz="1000" dirty="0">
+                <a:solidFill>
+                  <a:srgbClr val="003A63"/>
+                </a:solidFill>
+                <a:latin typeface="Aptos" pitchFamily="34" charset="0"/>
+                <a:ea typeface="Aptos" pitchFamily="34" charset="-122"/>
+                <a:cs typeface="Aptos" pitchFamily="34" charset="-120"/>
+              </a:rPr>
+              <a:t>Concept to action</a:t>
+            </a:r>
+            <a:endParaRPr lang="en-US" sz="1000" dirty="0"/>
+          </a:p>
+        </p:txBody>
+      </p:sp>
+      <p:sp>
+        <p:nvSpPr>
+          <p:cNvPr id="18" name="Shape 16"/>
+          <p:cNvSpPr/>
+          <p:nvPr/>
+        </p:nvSpPr>
+        <p:spPr>
+          <a:xfrm>
+            <a:off x="7635240" y="4498848"/>
+            <a:ext cx="3474720" cy="1143000"/>
+          </a:xfrm>
+          <a:prstGeom prst="roundRect">
+            <a:avLst>
+              <a:gd name="adj" fmla="val 9600"/>
             </a:avLst>
           </a:prstGeom>
           <a:solidFill>
@@ -11529,14 +12904,14 @@
       </p:sp>
       <p:sp>
         <p:nvSpPr>
-          <p:cNvPr id="16" name="Text 14"/>
-          <p:cNvSpPr/>
-          <p:nvPr/>
-        </p:nvSpPr>
-        <p:spPr>
-          <a:xfrm>
-            <a:off x="8074152" y="3666744"/>
-            <a:ext cx="2825496" cy="256032"/>
+          <p:cNvPr id="19" name="Text 17"/>
+          <p:cNvSpPr/>
+          <p:nvPr/>
+        </p:nvSpPr>
+        <p:spPr>
+          <a:xfrm>
+            <a:off x="7799832" y="4645152"/>
+            <a:ext cx="3145536" cy="256032"/>
           </a:xfrm>
           <a:prstGeom prst="rect">
             <a:avLst/>
@@ -11560,7 +12935,7 @@
                 <a:ea typeface="Aptos" pitchFamily="34" charset="-122"/>
                 <a:cs typeface="Aptos" pitchFamily="34" charset="-120"/>
               </a:rPr>
-              <a:t>Use this for</a:t>
+              <a:t>Apply it</a:t>
             </a:r>
             <a:endParaRPr lang="en-US" sz="1300" dirty="0"/>
           </a:p>
@@ -11568,14 +12943,14 @@
       </p:sp>
       <p:sp>
         <p:nvSpPr>
-          <p:cNvPr id="17" name="Text 15"/>
-          <p:cNvSpPr/>
-          <p:nvPr/>
-        </p:nvSpPr>
-        <p:spPr>
-          <a:xfrm>
-            <a:off x="8074152" y="4023360"/>
-            <a:ext cx="2825496" cy="1097280"/>
+          <p:cNvPr id="20" name="Text 18"/>
+          <p:cNvSpPr/>
+          <p:nvPr/>
+        </p:nvSpPr>
+        <p:spPr>
+          <a:xfrm>
+            <a:off x="7799832" y="5001768"/>
+            <a:ext cx="3145536" cy="502920"/>
           </a:xfrm>
           <a:prstGeom prst="rect">
             <a:avLst/>
@@ -11601,7 +12976,7 @@
                 <a:ea typeface="Aptos" pitchFamily="34" charset="-122"/>
                 <a:cs typeface="Aptos" pitchFamily="34" charset="-120"/>
               </a:rPr>
-              <a:t>Connect the concept to public health decisions, safeguards, documentation, or implementation work.</a:t>
+              <a:t>Connect the concept to public health purpose, responsible use, required safeguards, documentation, and the next action a department should take.</a:t>
             </a:r>
             <a:endParaRPr lang="en-US" sz="1550" dirty="0"/>
           </a:p>
@@ -11775,8 +13150,8 @@
         </p:nvSpPr>
         <p:spPr>
           <a:xfrm>
-            <a:off x="9966960" y="6537960"/>
-            <a:ext cx="1645920" cy="201168"/>
+            <a:off x="9646920" y="6537960"/>
+            <a:ext cx="1965960" cy="201168"/>
           </a:xfrm>
           <a:prstGeom prst="rect">
             <a:avLst/>
@@ -11800,7 +13175,7 @@
                 <a:ea typeface="Aptos" pitchFamily="34" charset="-122"/>
                 <a:cs typeface="Aptos" pitchFamily="34" charset="-120"/>
               </a:rPr>
-              <a:t>Â© Paula Soper</a:t>
+              <a:t>Copyright Paula Soper</a:t>
             </a:r>
             <a:endParaRPr lang="en-US" sz="800" dirty="0"/>
           </a:p>
@@ -12143,46 +13518,7 @@
       </p:sp>
       <p:sp>
         <p:nvSpPr>
-          <p:cNvPr id="15" name="Text 13"/>
-          <p:cNvSpPr/>
-          <p:nvPr/>
-        </p:nvSpPr>
-        <p:spPr>
-          <a:xfrm>
-            <a:off x="8817864" y="4187952"/>
-            <a:ext cx="201168" cy="256032"/>
-          </a:xfrm>
-          <a:prstGeom prst="rect">
-            <a:avLst/>
-          </a:prstGeom>
-          <a:noFill/>
-          <a:ln/>
-        </p:spPr>
-        <p:txBody>
-          <a:bodyPr wrap="square" lIns="0" tIns="0" rIns="0" bIns="0" rtlCol="0" anchor="ctr"/>
-          <a:lstStyle/>
-          <a:p>
-            <a:pPr algn="ctr" indent="0" marL="0">
-              <a:buNone/>
-            </a:pPr>
-            <a:r>
-              <a:rPr lang="en-US" sz="1800" b="1" dirty="0">
-                <a:solidFill>
-                  <a:srgbClr val="0068B7"/>
-                </a:solidFill>
-                <a:latin typeface="Aptos" pitchFamily="34" charset="0"/>
-                <a:ea typeface="Aptos" pitchFamily="34" charset="-122"/>
-                <a:cs typeface="Aptos" pitchFamily="34" charset="-120"/>
-              </a:rPr>
-              <a:t>â†’</a:t>
-            </a:r>
-            <a:endParaRPr lang="en-US" sz="1800" dirty="0"/>
-          </a:p>
-        </p:txBody>
-      </p:sp>
-      <p:sp>
-        <p:nvSpPr>
-          <p:cNvPr id="16" name="Shape 14"/>
+          <p:cNvPr id="15" name="Shape 13"/>
           <p:cNvSpPr/>
           <p:nvPr/>
         </p:nvSpPr>
@@ -12209,7 +13545,7 @@
       </p:sp>
       <p:sp>
         <p:nvSpPr>
-          <p:cNvPr id="17" name="Text 15"/>
+          <p:cNvPr id="16" name="Text 14"/>
           <p:cNvSpPr/>
           <p:nvPr/>
         </p:nvSpPr>
@@ -12250,46 +13586,7 @@
       </p:sp>
       <p:sp>
         <p:nvSpPr>
-          <p:cNvPr id="18" name="Text 16"/>
-          <p:cNvSpPr/>
-          <p:nvPr/>
-        </p:nvSpPr>
-        <p:spPr>
-          <a:xfrm>
-            <a:off x="10046208" y="4187952"/>
-            <a:ext cx="201168" cy="256032"/>
-          </a:xfrm>
-          <a:prstGeom prst="rect">
-            <a:avLst/>
-          </a:prstGeom>
-          <a:noFill/>
-          <a:ln/>
-        </p:spPr>
-        <p:txBody>
-          <a:bodyPr wrap="square" lIns="0" tIns="0" rIns="0" bIns="0" rtlCol="0" anchor="ctr"/>
-          <a:lstStyle/>
-          <a:p>
-            <a:pPr algn="ctr" indent="0" marL="0">
-              <a:buNone/>
-            </a:pPr>
-            <a:r>
-              <a:rPr lang="en-US" sz="1800" b="1" dirty="0">
-                <a:solidFill>
-                  <a:srgbClr val="0068B7"/>
-                </a:solidFill>
-                <a:latin typeface="Aptos" pitchFamily="34" charset="0"/>
-                <a:ea typeface="Aptos" pitchFamily="34" charset="-122"/>
-                <a:cs typeface="Aptos" pitchFamily="34" charset="-120"/>
-              </a:rPr>
-              <a:t>â†’</a:t>
-            </a:r>
-            <a:endParaRPr lang="en-US" sz="1800" dirty="0"/>
-          </a:p>
-        </p:txBody>
-      </p:sp>
-      <p:sp>
-        <p:nvSpPr>
-          <p:cNvPr id="19" name="Shape 17"/>
+          <p:cNvPr id="17" name="Shape 15"/>
           <p:cNvSpPr/>
           <p:nvPr/>
         </p:nvSpPr>
@@ -12316,7 +13613,7 @@
       </p:sp>
       <p:sp>
         <p:nvSpPr>
-          <p:cNvPr id="20" name="Text 18"/>
+          <p:cNvPr id="18" name="Text 16"/>
           <p:cNvSpPr/>
           <p:nvPr/>
         </p:nvSpPr>
@@ -12523,8 +13820,8 @@
         </p:nvSpPr>
         <p:spPr>
           <a:xfrm>
-            <a:off x="9966960" y="6537960"/>
-            <a:ext cx="1645920" cy="201168"/>
+            <a:off x="9646920" y="6537960"/>
+            <a:ext cx="1965960" cy="201168"/>
           </a:xfrm>
           <a:prstGeom prst="rect">
             <a:avLst/>
@@ -12548,7 +13845,7 @@
                 <a:ea typeface="Aptos" pitchFamily="34" charset="-122"/>
                 <a:cs typeface="Aptos" pitchFamily="34" charset="-120"/>
               </a:rPr>
-              <a:t>Â© Paula Soper</a:t>
+              <a:t>Copyright Paula Soper</a:t>
             </a:r>
             <a:endParaRPr lang="en-US" sz="800" dirty="0"/>
           </a:p>
@@ -12891,46 +14188,7 @@
       </p:sp>
       <p:sp>
         <p:nvSpPr>
-          <p:cNvPr id="15" name="Text 13"/>
-          <p:cNvSpPr/>
-          <p:nvPr/>
-        </p:nvSpPr>
-        <p:spPr>
-          <a:xfrm>
-            <a:off x="8817864" y="4187952"/>
-            <a:ext cx="201168" cy="256032"/>
-          </a:xfrm>
-          <a:prstGeom prst="rect">
-            <a:avLst/>
-          </a:prstGeom>
-          <a:noFill/>
-          <a:ln/>
-        </p:spPr>
-        <p:txBody>
-          <a:bodyPr wrap="square" lIns="0" tIns="0" rIns="0" bIns="0" rtlCol="0" anchor="ctr"/>
-          <a:lstStyle/>
-          <a:p>
-            <a:pPr algn="ctr" indent="0" marL="0">
-              <a:buNone/>
-            </a:pPr>
-            <a:r>
-              <a:rPr lang="en-US" sz="1800" b="1" dirty="0">
-                <a:solidFill>
-                  <a:srgbClr val="0068B7"/>
-                </a:solidFill>
-                <a:latin typeface="Aptos" pitchFamily="34" charset="0"/>
-                <a:ea typeface="Aptos" pitchFamily="34" charset="-122"/>
-                <a:cs typeface="Aptos" pitchFamily="34" charset="-120"/>
-              </a:rPr>
-              <a:t>â†’</a:t>
-            </a:r>
-            <a:endParaRPr lang="en-US" sz="1800" dirty="0"/>
-          </a:p>
-        </p:txBody>
-      </p:sp>
-      <p:sp>
-        <p:nvSpPr>
-          <p:cNvPr id="16" name="Shape 14"/>
+          <p:cNvPr id="15" name="Shape 13"/>
           <p:cNvSpPr/>
           <p:nvPr/>
         </p:nvSpPr>
@@ -12957,7 +14215,7 @@
       </p:sp>
       <p:sp>
         <p:nvSpPr>
-          <p:cNvPr id="17" name="Text 15"/>
+          <p:cNvPr id="16" name="Text 14"/>
           <p:cNvSpPr/>
           <p:nvPr/>
         </p:nvSpPr>
@@ -12998,46 +14256,7 @@
       </p:sp>
       <p:sp>
         <p:nvSpPr>
-          <p:cNvPr id="18" name="Text 16"/>
-          <p:cNvSpPr/>
-          <p:nvPr/>
-        </p:nvSpPr>
-        <p:spPr>
-          <a:xfrm>
-            <a:off x="10046208" y="4187952"/>
-            <a:ext cx="201168" cy="256032"/>
-          </a:xfrm>
-          <a:prstGeom prst="rect">
-            <a:avLst/>
-          </a:prstGeom>
-          <a:noFill/>
-          <a:ln/>
-        </p:spPr>
-        <p:txBody>
-          <a:bodyPr wrap="square" lIns="0" tIns="0" rIns="0" bIns="0" rtlCol="0" anchor="ctr"/>
-          <a:lstStyle/>
-          <a:p>
-            <a:pPr algn="ctr" indent="0" marL="0">
-              <a:buNone/>
-            </a:pPr>
-            <a:r>
-              <a:rPr lang="en-US" sz="1800" b="1" dirty="0">
-                <a:solidFill>
-                  <a:srgbClr val="0068B7"/>
-                </a:solidFill>
-                <a:latin typeface="Aptos" pitchFamily="34" charset="0"/>
-                <a:ea typeface="Aptos" pitchFamily="34" charset="-122"/>
-                <a:cs typeface="Aptos" pitchFamily="34" charset="-120"/>
-              </a:rPr>
-              <a:t>â†’</a:t>
-            </a:r>
-            <a:endParaRPr lang="en-US" sz="1800" dirty="0"/>
-          </a:p>
-        </p:txBody>
-      </p:sp>
-      <p:sp>
-        <p:nvSpPr>
-          <p:cNvPr id="19" name="Shape 17"/>
+          <p:cNvPr id="17" name="Shape 15"/>
           <p:cNvSpPr/>
           <p:nvPr/>
         </p:nvSpPr>
@@ -13064,7 +14283,7 @@
       </p:sp>
       <p:sp>
         <p:nvSpPr>
-          <p:cNvPr id="20" name="Text 18"/>
+          <p:cNvPr id="18" name="Text 16"/>
           <p:cNvSpPr/>
           <p:nvPr/>
         </p:nvSpPr>
@@ -13271,8 +14490,8 @@
         </p:nvSpPr>
         <p:spPr>
           <a:xfrm>
-            <a:off x="9966960" y="6537960"/>
-            <a:ext cx="1645920" cy="201168"/>
+            <a:off x="9646920" y="6537960"/>
+            <a:ext cx="1965960" cy="201168"/>
           </a:xfrm>
           <a:prstGeom prst="rect">
             <a:avLst/>
@@ -13296,7 +14515,7 @@
                 <a:ea typeface="Aptos" pitchFamily="34" charset="-122"/>
                 <a:cs typeface="Aptos" pitchFamily="34" charset="-120"/>
               </a:rPr>
-              <a:t>Â© Paula Soper</a:t>
+              <a:t>Copyright Paula Soper</a:t>
             </a:r>
             <a:endParaRPr lang="en-US" sz="800" dirty="0"/>
           </a:p>
@@ -13343,77 +14562,13 @@
       </p:sp>
       <p:sp>
         <p:nvSpPr>
-          <p:cNvPr id="8" name="Shape 6"/>
+          <p:cNvPr id="8" name="Text 6"/>
           <p:cNvSpPr/>
           <p:nvPr/>
         </p:nvSpPr>
         <p:spPr>
           <a:xfrm>
             <a:off x="640080" y="658368"/>
-            <a:ext cx="420624" cy="420624"/>
-          </a:xfrm>
-          <a:prstGeom prst="ellipse">
-            <a:avLst/>
-          </a:prstGeom>
-          <a:solidFill>
-            <a:srgbClr val="0068B7"/>
-          </a:solidFill>
-          <a:ln w="12700">
-            <a:solidFill>
-              <a:srgbClr val="0068B7"/>
-            </a:solidFill>
-            <a:prstDash val="solid"/>
-          </a:ln>
-        </p:spPr>
-      </p:sp>
-      <p:sp>
-        <p:nvSpPr>
-          <p:cNvPr id="9" name="Text 7"/>
-          <p:cNvSpPr/>
-          <p:nvPr/>
-        </p:nvSpPr>
-        <p:spPr>
-          <a:xfrm>
-            <a:off x="640080" y="731520"/>
-            <a:ext cx="420624" cy="164592"/>
-          </a:xfrm>
-          <a:prstGeom prst="rect">
-            <a:avLst/>
-          </a:prstGeom>
-          <a:noFill/>
-          <a:ln/>
-        </p:spPr>
-        <p:txBody>
-          <a:bodyPr wrap="square" lIns="0" tIns="0" rIns="0" bIns="0" rtlCol="0" anchor="ctr"/>
-          <a:lstStyle/>
-          <a:p>
-            <a:pPr algn="ctr" indent="0" marL="0">
-              <a:buNone/>
-            </a:pPr>
-            <a:r>
-              <a:rPr lang="en-US" sz="1100" b="1" dirty="0">
-                <a:solidFill>
-                  <a:srgbClr val="FFFFFF"/>
-                </a:solidFill>
-                <a:latin typeface="Aptos" pitchFamily="34" charset="0"/>
-                <a:ea typeface="Aptos" pitchFamily="34" charset="-122"/>
-                <a:cs typeface="Aptos" pitchFamily="34" charset="-120"/>
-              </a:rPr>
-              <a:t>1</a:t>
-            </a:r>
-            <a:endParaRPr lang="en-US" sz="1100" dirty="0"/>
-          </a:p>
-        </p:txBody>
-      </p:sp>
-      <p:sp>
-        <p:nvSpPr>
-          <p:cNvPr id="10" name="Text 8"/>
-          <p:cNvSpPr/>
-          <p:nvPr/>
-        </p:nvSpPr>
-        <p:spPr>
-          <a:xfrm>
-            <a:off x="640080" y="621792"/>
             <a:ext cx="10881360" cy="713232"/>
           </a:xfrm>
           <a:prstGeom prst="rect">
@@ -13448,14 +14603,14 @@
       </p:sp>
       <p:sp>
         <p:nvSpPr>
-          <p:cNvPr id="11" name="Text 9"/>
+          <p:cNvPr id="9" name="Text 7"/>
           <p:cNvSpPr/>
           <p:nvPr/>
         </p:nvSpPr>
         <p:spPr>
           <a:xfrm>
             <a:off x="868680" y="1508760"/>
-            <a:ext cx="6537960" cy="4160520"/>
+            <a:ext cx="6309360" cy="4160520"/>
           </a:xfrm>
           <a:prstGeom prst="rect">
             <a:avLst/>
@@ -13514,18 +14669,18 @@
       </p:sp>
       <p:sp>
         <p:nvSpPr>
-          <p:cNvPr id="12" name="Shape 10"/>
-          <p:cNvSpPr/>
-          <p:nvPr/>
-        </p:nvSpPr>
-        <p:spPr>
-          <a:xfrm>
-            <a:off x="7909560" y="1417320"/>
-            <a:ext cx="3154680" cy="1828800"/>
+          <p:cNvPr id="10" name="Shape 8"/>
+          <p:cNvSpPr/>
+          <p:nvPr/>
+        </p:nvSpPr>
+        <p:spPr>
+          <a:xfrm>
+            <a:off x="7635240" y="1325880"/>
+            <a:ext cx="3474720" cy="1325880"/>
           </a:xfrm>
           <a:prstGeom prst="roundRect">
             <a:avLst>
-              <a:gd name="adj" fmla="val 6000"/>
+              <a:gd name="adj" fmla="val 8276"/>
             </a:avLst>
           </a:prstGeom>
           <a:solidFill>
@@ -13541,14 +14696,14 @@
       </p:sp>
       <p:sp>
         <p:nvSpPr>
-          <p:cNvPr id="13" name="Text 11"/>
-          <p:cNvSpPr/>
-          <p:nvPr/>
-        </p:nvSpPr>
-        <p:spPr>
-          <a:xfrm>
-            <a:off x="8074152" y="1563624"/>
-            <a:ext cx="2825496" cy="256032"/>
+          <p:cNvPr id="11" name="Text 9"/>
+          <p:cNvSpPr/>
+          <p:nvPr/>
+        </p:nvSpPr>
+        <p:spPr>
+          <a:xfrm>
+            <a:off x="7799832" y="1472184"/>
+            <a:ext cx="3145536" cy="256032"/>
           </a:xfrm>
           <a:prstGeom prst="rect">
             <a:avLst/>
@@ -13572,7 +14727,7 @@
                 <a:ea typeface="Aptos" pitchFamily="34" charset="-122"/>
                 <a:cs typeface="Aptos" pitchFamily="34" charset="-120"/>
               </a:rPr>
-              <a:t>Key idea</a:t>
+              <a:t>Practice focus</a:t>
             </a:r>
             <a:endParaRPr lang="en-US" sz="1300" dirty="0"/>
           </a:p>
@@ -13580,14 +14735,14 @@
       </p:sp>
       <p:sp>
         <p:nvSpPr>
-          <p:cNvPr id="14" name="Text 12"/>
-          <p:cNvSpPr/>
-          <p:nvPr/>
-        </p:nvSpPr>
-        <p:spPr>
-          <a:xfrm>
-            <a:off x="8074152" y="1920240"/>
-            <a:ext cx="2825496" cy="1188720"/>
+          <p:cNvPr id="12" name="Text 10"/>
+          <p:cNvSpPr/>
+          <p:nvPr/>
+        </p:nvSpPr>
+        <p:spPr>
+          <a:xfrm>
+            <a:off x="7799832" y="1828800"/>
+            <a:ext cx="3145536" cy="685800"/>
           </a:xfrm>
           <a:prstGeom prst="rect">
             <a:avLst/>
@@ -13621,18 +14776,159 @@
       </p:sp>
       <p:sp>
         <p:nvSpPr>
-          <p:cNvPr id="15" name="Shape 13"/>
-          <p:cNvSpPr/>
-          <p:nvPr/>
-        </p:nvSpPr>
-        <p:spPr>
-          <a:xfrm>
-            <a:off x="7909560" y="3520440"/>
-            <a:ext cx="3154680" cy="1737360"/>
+          <p:cNvPr id="13" name="Shape 11"/>
+          <p:cNvSpPr/>
+          <p:nvPr/>
+        </p:nvSpPr>
+        <p:spPr>
+          <a:xfrm>
+            <a:off x="7635240" y="2788920"/>
+            <a:ext cx="3474720" cy="1536192"/>
           </a:xfrm>
           <a:prstGeom prst="roundRect">
             <a:avLst>
-              <a:gd name="adj" fmla="val 6316"/>
+              <a:gd name="adj" fmla="val 7143"/>
+            </a:avLst>
+          </a:prstGeom>
+          <a:solidFill>
+            <a:srgbClr val="FFFFFF">
+              <a:alpha val="88000"/>
+            </a:srgbClr>
+          </a:solidFill>
+          <a:ln w="12700">
+            <a:solidFill>
+              <a:srgbClr val="D6E8F2"/>
+            </a:solidFill>
+            <a:prstDash val="solid"/>
+          </a:ln>
+        </p:spPr>
+      </p:sp>
+      <p:sp>
+        <p:nvSpPr>
+          <p:cNvPr id="14" name="Shape 12"/>
+          <p:cNvSpPr/>
+          <p:nvPr/>
+        </p:nvSpPr>
+        <p:spPr>
+          <a:xfrm>
+            <a:off x="8074152" y="3291840"/>
+            <a:ext cx="2596896" cy="749808"/>
+          </a:xfrm>
+          <a:prstGeom prst="rect">
+            <a:avLst/>
+          </a:prstGeom>
+          <a:solidFill>
+            <a:srgbClr val="EAF6F8"/>
+          </a:solidFill>
+          <a:ln w="12700">
+            <a:solidFill>
+              <a:srgbClr val="8ABBD8"/>
+            </a:solidFill>
+            <a:prstDash val="solid"/>
+          </a:ln>
+        </p:spPr>
+      </p:sp>
+      <p:sp>
+        <p:nvSpPr>
+          <p:cNvPr id="15" name="Shape 13"/>
+          <p:cNvSpPr/>
+          <p:nvPr/>
+        </p:nvSpPr>
+        <p:spPr>
+          <a:xfrm>
+            <a:off x="8202168" y="3721608"/>
+            <a:ext cx="2340864" cy="0"/>
+          </a:xfrm>
+          <a:prstGeom prst="line">
+            <a:avLst/>
+          </a:prstGeom>
+          <a:noFill/>
+          <a:ln w="19050">
+            <a:solidFill>
+              <a:srgbClr val="0068B7"/>
+            </a:solidFill>
+            <a:prstDash val="solid"/>
+          </a:ln>
+        </p:spPr>
+      </p:sp>
+      <p:sp>
+        <p:nvSpPr>
+          <p:cNvPr id="16" name="Shape 14"/>
+          <p:cNvSpPr/>
+          <p:nvPr/>
+        </p:nvSpPr>
+        <p:spPr>
+          <a:xfrm>
+            <a:off x="9198864" y="4206240"/>
+            <a:ext cx="347472" cy="347472"/>
+          </a:xfrm>
+          <a:prstGeom prst="ellipse">
+            <a:avLst/>
+          </a:prstGeom>
+          <a:solidFill>
+            <a:srgbClr val="2F8A28"/>
+          </a:solidFill>
+          <a:ln w="12700">
+            <a:solidFill>
+              <a:srgbClr val="2F8A28"/>
+            </a:solidFill>
+            <a:prstDash val="solid"/>
+          </a:ln>
+        </p:spPr>
+      </p:sp>
+      <p:sp>
+        <p:nvSpPr>
+          <p:cNvPr id="17" name="Text 15"/>
+          <p:cNvSpPr/>
+          <p:nvPr/>
+        </p:nvSpPr>
+        <p:spPr>
+          <a:xfrm>
+            <a:off x="7909560" y="3977640"/>
+            <a:ext cx="2926080" cy="182880"/>
+          </a:xfrm>
+          <a:prstGeom prst="rect">
+            <a:avLst/>
+          </a:prstGeom>
+          <a:noFill/>
+          <a:ln/>
+        </p:spPr>
+        <p:txBody>
+          <a:bodyPr wrap="square" lIns="0" tIns="0" rIns="0" bIns="0" rtlCol="0" anchor="ctr"/>
+          <a:lstStyle/>
+          <a:p>
+            <a:pPr algn="ctr" indent="0" marL="0">
+              <a:buNone/>
+            </a:pPr>
+            <a:r>
+              <a:rPr lang="en-US" sz="1000" dirty="0">
+                <a:solidFill>
+                  <a:srgbClr val="003A63"/>
+                </a:solidFill>
+                <a:latin typeface="Aptos" pitchFamily="34" charset="0"/>
+                <a:ea typeface="Aptos" pitchFamily="34" charset="-122"/>
+                <a:cs typeface="Aptos" pitchFamily="34" charset="-120"/>
+              </a:rPr>
+              <a:t>Concept to action</a:t>
+            </a:r>
+            <a:endParaRPr lang="en-US" sz="1000" dirty="0"/>
+          </a:p>
+        </p:txBody>
+      </p:sp>
+      <p:sp>
+        <p:nvSpPr>
+          <p:cNvPr id="18" name="Shape 16"/>
+          <p:cNvSpPr/>
+          <p:nvPr/>
+        </p:nvSpPr>
+        <p:spPr>
+          <a:xfrm>
+            <a:off x="7635240" y="4498848"/>
+            <a:ext cx="3474720" cy="1143000"/>
+          </a:xfrm>
+          <a:prstGeom prst="roundRect">
+            <a:avLst>
+              <a:gd name="adj" fmla="val 9600"/>
             </a:avLst>
           </a:prstGeom>
           <a:solidFill>
@@ -13648,14 +14944,14 @@
       </p:sp>
       <p:sp>
         <p:nvSpPr>
-          <p:cNvPr id="16" name="Text 14"/>
-          <p:cNvSpPr/>
-          <p:nvPr/>
-        </p:nvSpPr>
-        <p:spPr>
-          <a:xfrm>
-            <a:off x="8074152" y="3666744"/>
-            <a:ext cx="2825496" cy="256032"/>
+          <p:cNvPr id="19" name="Text 17"/>
+          <p:cNvSpPr/>
+          <p:nvPr/>
+        </p:nvSpPr>
+        <p:spPr>
+          <a:xfrm>
+            <a:off x="7799832" y="4645152"/>
+            <a:ext cx="3145536" cy="256032"/>
           </a:xfrm>
           <a:prstGeom prst="rect">
             <a:avLst/>
@@ -13679,7 +14975,7 @@
                 <a:ea typeface="Aptos" pitchFamily="34" charset="-122"/>
                 <a:cs typeface="Aptos" pitchFamily="34" charset="-120"/>
               </a:rPr>
-              <a:t>Use this for</a:t>
+              <a:t>What to produce</a:t>
             </a:r>
             <a:endParaRPr lang="en-US" sz="1300" dirty="0"/>
           </a:p>
@@ -13687,14 +14983,14 @@
       </p:sp>
       <p:sp>
         <p:nvSpPr>
-          <p:cNvPr id="17" name="Text 15"/>
-          <p:cNvSpPr/>
-          <p:nvPr/>
-        </p:nvSpPr>
-        <p:spPr>
-          <a:xfrm>
-            <a:off x="8074152" y="4023360"/>
-            <a:ext cx="2825496" cy="1097280"/>
+          <p:cNvPr id="20" name="Text 18"/>
+          <p:cNvSpPr/>
+          <p:nvPr/>
+        </p:nvSpPr>
+        <p:spPr>
+          <a:xfrm>
+            <a:off x="7799832" y="5001768"/>
+            <a:ext cx="3145536" cy="502920"/>
           </a:xfrm>
           <a:prstGeom prst="rect">
             <a:avLst/>
@@ -13720,7 +15016,7 @@
                 <a:ea typeface="Aptos" pitchFamily="34" charset="-122"/>
                 <a:cs typeface="Aptos" pitchFamily="34" charset="-120"/>
               </a:rPr>
-              <a:t>Connect the concept to public health decisions, safeguards, documentation, or implementation work.</a:t>
+              <a:t>Use the assignment to test whether you can explain the concept, apply it to a realistic public health situation, and identify what would need review before the work moves forward.</a:t>
             </a:r>
             <a:endParaRPr lang="en-US" sz="1550" dirty="0"/>
           </a:p>
@@ -13894,8 +15190,8 @@
         </p:nvSpPr>
         <p:spPr>
           <a:xfrm>
-            <a:off x="9966960" y="6537960"/>
-            <a:ext cx="1645920" cy="201168"/>
+            <a:off x="9646920" y="6537960"/>
+            <a:ext cx="1965960" cy="201168"/>
           </a:xfrm>
           <a:prstGeom prst="rect">
             <a:avLst/>
@@ -13919,7 +15215,7 @@
                 <a:ea typeface="Aptos" pitchFamily="34" charset="-122"/>
                 <a:cs typeface="Aptos" pitchFamily="34" charset="-120"/>
               </a:rPr>
-              <a:t>Â© Paula Soper</a:t>
+              <a:t>Copyright Paula Soper</a:t>
             </a:r>
             <a:endParaRPr lang="en-US" sz="800" dirty="0"/>
           </a:p>
@@ -14014,7 +15310,7 @@
         <p:spPr>
           <a:xfrm>
             <a:off x="868680" y="1508760"/>
-            <a:ext cx="6537960" cy="4160520"/>
+            <a:ext cx="6309360" cy="4160520"/>
           </a:xfrm>
           <a:prstGeom prst="rect">
             <a:avLst/>
@@ -14051,12 +15347,12 @@
         </p:nvSpPr>
         <p:spPr>
           <a:xfrm>
-            <a:off x="7909560" y="1417320"/>
-            <a:ext cx="3154680" cy="1828800"/>
+            <a:off x="7635240" y="1325880"/>
+            <a:ext cx="3474720" cy="1325880"/>
           </a:xfrm>
           <a:prstGeom prst="roundRect">
             <a:avLst>
-              <a:gd name="adj" fmla="val 6000"/>
+              <a:gd name="adj" fmla="val 8276"/>
             </a:avLst>
           </a:prstGeom>
           <a:solidFill>
@@ -14078,8 +15374,8 @@
         </p:nvSpPr>
         <p:spPr>
           <a:xfrm>
-            <a:off x="8074152" y="1563624"/>
-            <a:ext cx="2825496" cy="256032"/>
+            <a:off x="7799832" y="1472184"/>
+            <a:ext cx="3145536" cy="256032"/>
           </a:xfrm>
           <a:prstGeom prst="rect">
             <a:avLst/>
@@ -14103,7 +15399,7 @@
                 <a:ea typeface="Aptos" pitchFamily="34" charset="-122"/>
                 <a:cs typeface="Aptos" pitchFamily="34" charset="-120"/>
               </a:rPr>
-              <a:t>Key idea</a:t>
+              <a:t>Practice focus</a:t>
             </a:r>
             <a:endParaRPr lang="en-US" sz="1300" dirty="0"/>
           </a:p>
@@ -14117,8 +15413,8 @@
         </p:nvSpPr>
         <p:spPr>
           <a:xfrm>
-            <a:off x="8074152" y="1920240"/>
-            <a:ext cx="2825496" cy="1188720"/>
+            <a:off x="7799832" y="1828800"/>
+            <a:ext cx="3145536" cy="685800"/>
           </a:xfrm>
           <a:prstGeom prst="rect">
             <a:avLst/>
@@ -14158,12 +15454,153 @@
         </p:nvSpPr>
         <p:spPr>
           <a:xfrm>
-            <a:off x="7909560" y="3520440"/>
-            <a:ext cx="3154680" cy="1737360"/>
+            <a:off x="7635240" y="2788920"/>
+            <a:ext cx="3474720" cy="1536192"/>
           </a:xfrm>
           <a:prstGeom prst="roundRect">
             <a:avLst>
-              <a:gd name="adj" fmla="val 6316"/>
+              <a:gd name="adj" fmla="val 7143"/>
+            </a:avLst>
+          </a:prstGeom>
+          <a:solidFill>
+            <a:srgbClr val="FFFFFF">
+              <a:alpha val="88000"/>
+            </a:srgbClr>
+          </a:solidFill>
+          <a:ln w="12700">
+            <a:solidFill>
+              <a:srgbClr val="D6E8F2"/>
+            </a:solidFill>
+            <a:prstDash val="solid"/>
+          </a:ln>
+        </p:spPr>
+      </p:sp>
+      <p:sp>
+        <p:nvSpPr>
+          <p:cNvPr id="14" name="Shape 12"/>
+          <p:cNvSpPr/>
+          <p:nvPr/>
+        </p:nvSpPr>
+        <p:spPr>
+          <a:xfrm>
+            <a:off x="8074152" y="3291840"/>
+            <a:ext cx="2596896" cy="749808"/>
+          </a:xfrm>
+          <a:prstGeom prst="rect">
+            <a:avLst/>
+          </a:prstGeom>
+          <a:solidFill>
+            <a:srgbClr val="EAF6F8"/>
+          </a:solidFill>
+          <a:ln w="12700">
+            <a:solidFill>
+              <a:srgbClr val="8ABBD8"/>
+            </a:solidFill>
+            <a:prstDash val="solid"/>
+          </a:ln>
+        </p:spPr>
+      </p:sp>
+      <p:sp>
+        <p:nvSpPr>
+          <p:cNvPr id="15" name="Shape 13"/>
+          <p:cNvSpPr/>
+          <p:nvPr/>
+        </p:nvSpPr>
+        <p:spPr>
+          <a:xfrm>
+            <a:off x="8202168" y="3721608"/>
+            <a:ext cx="2340864" cy="0"/>
+          </a:xfrm>
+          <a:prstGeom prst="line">
+            <a:avLst/>
+          </a:prstGeom>
+          <a:noFill/>
+          <a:ln w="19050">
+            <a:solidFill>
+              <a:srgbClr val="0068B7"/>
+            </a:solidFill>
+            <a:prstDash val="solid"/>
+          </a:ln>
+        </p:spPr>
+      </p:sp>
+      <p:sp>
+        <p:nvSpPr>
+          <p:cNvPr id="16" name="Shape 14"/>
+          <p:cNvSpPr/>
+          <p:nvPr/>
+        </p:nvSpPr>
+        <p:spPr>
+          <a:xfrm>
+            <a:off x="9198864" y="4206240"/>
+            <a:ext cx="347472" cy="347472"/>
+          </a:xfrm>
+          <a:prstGeom prst="ellipse">
+            <a:avLst/>
+          </a:prstGeom>
+          <a:solidFill>
+            <a:srgbClr val="2F8A28"/>
+          </a:solidFill>
+          <a:ln w="12700">
+            <a:solidFill>
+              <a:srgbClr val="2F8A28"/>
+            </a:solidFill>
+            <a:prstDash val="solid"/>
+          </a:ln>
+        </p:spPr>
+      </p:sp>
+      <p:sp>
+        <p:nvSpPr>
+          <p:cNvPr id="17" name="Text 15"/>
+          <p:cNvSpPr/>
+          <p:nvPr/>
+        </p:nvSpPr>
+        <p:spPr>
+          <a:xfrm>
+            <a:off x="7909560" y="3977640"/>
+            <a:ext cx="2926080" cy="182880"/>
+          </a:xfrm>
+          <a:prstGeom prst="rect">
+            <a:avLst/>
+          </a:prstGeom>
+          <a:noFill/>
+          <a:ln/>
+        </p:spPr>
+        <p:txBody>
+          <a:bodyPr wrap="square" lIns="0" tIns="0" rIns="0" bIns="0" rtlCol="0" anchor="ctr"/>
+          <a:lstStyle/>
+          <a:p>
+            <a:pPr algn="ctr" indent="0" marL="0">
+              <a:buNone/>
+            </a:pPr>
+            <a:r>
+              <a:rPr lang="en-US" sz="1000" dirty="0">
+                <a:solidFill>
+                  <a:srgbClr val="003A63"/>
+                </a:solidFill>
+                <a:latin typeface="Aptos" pitchFamily="34" charset="0"/>
+                <a:ea typeface="Aptos" pitchFamily="34" charset="-122"/>
+                <a:cs typeface="Aptos" pitchFamily="34" charset="-120"/>
+              </a:rPr>
+              <a:t>Concept to action</a:t>
+            </a:r>
+            <a:endParaRPr lang="en-US" sz="1000" dirty="0"/>
+          </a:p>
+        </p:txBody>
+      </p:sp>
+      <p:sp>
+        <p:nvSpPr>
+          <p:cNvPr id="18" name="Shape 16"/>
+          <p:cNvSpPr/>
+          <p:nvPr/>
+        </p:nvSpPr>
+        <p:spPr>
+          <a:xfrm>
+            <a:off x="7635240" y="4498848"/>
+            <a:ext cx="3474720" cy="1143000"/>
+          </a:xfrm>
+          <a:prstGeom prst="roundRect">
+            <a:avLst>
+              <a:gd name="adj" fmla="val 9600"/>
             </a:avLst>
           </a:prstGeom>
           <a:solidFill>
@@ -14179,14 +15616,14 @@
       </p:sp>
       <p:sp>
         <p:nvSpPr>
-          <p:cNvPr id="14" name="Text 12"/>
-          <p:cNvSpPr/>
-          <p:nvPr/>
-        </p:nvSpPr>
-        <p:spPr>
-          <a:xfrm>
-            <a:off x="8074152" y="3666744"/>
-            <a:ext cx="2825496" cy="256032"/>
+          <p:cNvPr id="19" name="Text 17"/>
+          <p:cNvSpPr/>
+          <p:nvPr/>
+        </p:nvSpPr>
+        <p:spPr>
+          <a:xfrm>
+            <a:off x="7799832" y="4645152"/>
+            <a:ext cx="3145536" cy="256032"/>
           </a:xfrm>
           <a:prstGeom prst="rect">
             <a:avLst/>
@@ -14210,7 +15647,7 @@
                 <a:ea typeface="Aptos" pitchFamily="34" charset="-122"/>
                 <a:cs typeface="Aptos" pitchFamily="34" charset="-120"/>
               </a:rPr>
-              <a:t>Use this for</a:t>
+              <a:t>What to produce</a:t>
             </a:r>
             <a:endParaRPr lang="en-US" sz="1300" dirty="0"/>
           </a:p>
@@ -14218,14 +15655,14 @@
       </p:sp>
       <p:sp>
         <p:nvSpPr>
-          <p:cNvPr id="15" name="Text 13"/>
-          <p:cNvSpPr/>
-          <p:nvPr/>
-        </p:nvSpPr>
-        <p:spPr>
-          <a:xfrm>
-            <a:off x="8074152" y="4023360"/>
-            <a:ext cx="2825496" cy="1097280"/>
+          <p:cNvPr id="20" name="Text 18"/>
+          <p:cNvSpPr/>
+          <p:nvPr/>
+        </p:nvSpPr>
+        <p:spPr>
+          <a:xfrm>
+            <a:off x="7799832" y="5001768"/>
+            <a:ext cx="3145536" cy="502920"/>
           </a:xfrm>
           <a:prstGeom prst="rect">
             <a:avLst/>
@@ -14251,7 +15688,7 @@
                 <a:ea typeface="Aptos" pitchFamily="34" charset="-122"/>
                 <a:cs typeface="Aptos" pitchFamily="34" charset="-120"/>
               </a:rPr>
-              <a:t>Connect the concept to public health decisions, safeguards, documentation, or implementation work.</a:t>
+              <a:t>Use the assignment to test whether you can explain the concept, apply it to a realistic public health situation, and identify what would need review before the work moves forward.</a:t>
             </a:r>
             <a:endParaRPr lang="en-US" sz="1550" dirty="0"/>
           </a:p>
@@ -14425,8 +15862,8 @@
         </p:nvSpPr>
         <p:spPr>
           <a:xfrm>
-            <a:off x="9966960" y="6537960"/>
-            <a:ext cx="1645920" cy="201168"/>
+            <a:off x="9646920" y="6537960"/>
+            <a:ext cx="1965960" cy="201168"/>
           </a:xfrm>
           <a:prstGeom prst="rect">
             <a:avLst/>
@@ -14450,7 +15887,7 @@
                 <a:ea typeface="Aptos" pitchFamily="34" charset="-122"/>
                 <a:cs typeface="Aptos" pitchFamily="34" charset="-120"/>
               </a:rPr>
-              <a:t>Â© Paula Soper</a:t>
+              <a:t>Copyright Paula Soper</a:t>
             </a:r>
             <a:endParaRPr lang="en-US" sz="800" dirty="0"/>
           </a:p>
@@ -14497,77 +15934,13 @@
       </p:sp>
       <p:sp>
         <p:nvSpPr>
-          <p:cNvPr id="8" name="Shape 6"/>
+          <p:cNvPr id="8" name="Text 6"/>
           <p:cNvSpPr/>
           <p:nvPr/>
         </p:nvSpPr>
         <p:spPr>
           <a:xfrm>
             <a:off x="640080" y="658368"/>
-            <a:ext cx="420624" cy="420624"/>
-          </a:xfrm>
-          <a:prstGeom prst="ellipse">
-            <a:avLst/>
-          </a:prstGeom>
-          <a:solidFill>
-            <a:srgbClr val="0068B7"/>
-          </a:solidFill>
-          <a:ln w="12700">
-            <a:solidFill>
-              <a:srgbClr val="0068B7"/>
-            </a:solidFill>
-            <a:prstDash val="solid"/>
-          </a:ln>
-        </p:spPr>
-      </p:sp>
-      <p:sp>
-        <p:nvSpPr>
-          <p:cNvPr id="9" name="Text 7"/>
-          <p:cNvSpPr/>
-          <p:nvPr/>
-        </p:nvSpPr>
-        <p:spPr>
-          <a:xfrm>
-            <a:off x="640080" y="731520"/>
-            <a:ext cx="420624" cy="164592"/>
-          </a:xfrm>
-          <a:prstGeom prst="rect">
-            <a:avLst/>
-          </a:prstGeom>
-          <a:noFill/>
-          <a:ln/>
-        </p:spPr>
-        <p:txBody>
-          <a:bodyPr wrap="square" lIns="0" tIns="0" rIns="0" bIns="0" rtlCol="0" anchor="ctr"/>
-          <a:lstStyle/>
-          <a:p>
-            <a:pPr algn="ctr" indent="0" marL="0">
-              <a:buNone/>
-            </a:pPr>
-            <a:r>
-              <a:rPr lang="en-US" sz="1100" b="1" dirty="0">
-                <a:solidFill>
-                  <a:srgbClr val="FFFFFF"/>
-                </a:solidFill>
-                <a:latin typeface="Aptos" pitchFamily="34" charset="0"/>
-                <a:ea typeface="Aptos" pitchFamily="34" charset="-122"/>
-                <a:cs typeface="Aptos" pitchFamily="34" charset="-120"/>
-              </a:rPr>
-              <a:t>2</a:t>
-            </a:r>
-            <a:endParaRPr lang="en-US" sz="1100" dirty="0"/>
-          </a:p>
-        </p:txBody>
-      </p:sp>
-      <p:sp>
-        <p:nvSpPr>
-          <p:cNvPr id="10" name="Text 8"/>
-          <p:cNvSpPr/>
-          <p:nvPr/>
-        </p:nvSpPr>
-        <p:spPr>
-          <a:xfrm>
-            <a:off x="640080" y="621792"/>
             <a:ext cx="10881360" cy="713232"/>
           </a:xfrm>
           <a:prstGeom prst="rect">
@@ -14602,14 +15975,14 @@
       </p:sp>
       <p:sp>
         <p:nvSpPr>
-          <p:cNvPr id="11" name="Text 9"/>
+          <p:cNvPr id="9" name="Text 7"/>
           <p:cNvSpPr/>
           <p:nvPr/>
         </p:nvSpPr>
         <p:spPr>
           <a:xfrm>
             <a:off x="868680" y="1508760"/>
-            <a:ext cx="6537960" cy="4160520"/>
+            <a:ext cx="6309360" cy="4160520"/>
           </a:xfrm>
           <a:prstGeom prst="rect">
             <a:avLst/>
@@ -14668,18 +16041,18 @@
       </p:sp>
       <p:sp>
         <p:nvSpPr>
-          <p:cNvPr id="12" name="Shape 10"/>
-          <p:cNvSpPr/>
-          <p:nvPr/>
-        </p:nvSpPr>
-        <p:spPr>
-          <a:xfrm>
-            <a:off x="7909560" y="1417320"/>
-            <a:ext cx="3154680" cy="1828800"/>
+          <p:cNvPr id="10" name="Shape 8"/>
+          <p:cNvSpPr/>
+          <p:nvPr/>
+        </p:nvSpPr>
+        <p:spPr>
+          <a:xfrm>
+            <a:off x="7635240" y="1325880"/>
+            <a:ext cx="3474720" cy="1325880"/>
           </a:xfrm>
           <a:prstGeom prst="roundRect">
             <a:avLst>
-              <a:gd name="adj" fmla="val 6000"/>
+              <a:gd name="adj" fmla="val 8276"/>
             </a:avLst>
           </a:prstGeom>
           <a:solidFill>
@@ -14695,14 +16068,14 @@
       </p:sp>
       <p:sp>
         <p:nvSpPr>
-          <p:cNvPr id="13" name="Text 11"/>
-          <p:cNvSpPr/>
-          <p:nvPr/>
-        </p:nvSpPr>
-        <p:spPr>
-          <a:xfrm>
-            <a:off x="8074152" y="1563624"/>
-            <a:ext cx="2825496" cy="256032"/>
+          <p:cNvPr id="11" name="Text 9"/>
+          <p:cNvSpPr/>
+          <p:nvPr/>
+        </p:nvSpPr>
+        <p:spPr>
+          <a:xfrm>
+            <a:off x="7799832" y="1472184"/>
+            <a:ext cx="3145536" cy="256032"/>
           </a:xfrm>
           <a:prstGeom prst="rect">
             <a:avLst/>
@@ -14726,7 +16099,7 @@
                 <a:ea typeface="Aptos" pitchFamily="34" charset="-122"/>
                 <a:cs typeface="Aptos" pitchFamily="34" charset="-120"/>
               </a:rPr>
-              <a:t>Key idea</a:t>
+              <a:t>Core concept</a:t>
             </a:r>
             <a:endParaRPr lang="en-US" sz="1300" dirty="0"/>
           </a:p>
@@ -14734,14 +16107,14 @@
       </p:sp>
       <p:sp>
         <p:nvSpPr>
-          <p:cNvPr id="14" name="Text 12"/>
-          <p:cNvSpPr/>
-          <p:nvPr/>
-        </p:nvSpPr>
-        <p:spPr>
-          <a:xfrm>
-            <a:off x="8074152" y="1920240"/>
-            <a:ext cx="2825496" cy="1188720"/>
+          <p:cNvPr id="12" name="Text 10"/>
+          <p:cNvSpPr/>
+          <p:nvPr/>
+        </p:nvSpPr>
+        <p:spPr>
+          <a:xfrm>
+            <a:off x="7799832" y="1828800"/>
+            <a:ext cx="3145536" cy="685800"/>
           </a:xfrm>
           <a:prstGeom prst="rect">
             <a:avLst/>
@@ -14775,18 +16148,159 @@
       </p:sp>
       <p:sp>
         <p:nvSpPr>
-          <p:cNvPr id="15" name="Shape 13"/>
-          <p:cNvSpPr/>
-          <p:nvPr/>
-        </p:nvSpPr>
-        <p:spPr>
-          <a:xfrm>
-            <a:off x="7909560" y="3520440"/>
-            <a:ext cx="3154680" cy="1737360"/>
+          <p:cNvPr id="13" name="Shape 11"/>
+          <p:cNvSpPr/>
+          <p:nvPr/>
+        </p:nvSpPr>
+        <p:spPr>
+          <a:xfrm>
+            <a:off x="7635240" y="2788920"/>
+            <a:ext cx="3474720" cy="1536192"/>
           </a:xfrm>
           <a:prstGeom prst="roundRect">
             <a:avLst>
-              <a:gd name="adj" fmla="val 6316"/>
+              <a:gd name="adj" fmla="val 7143"/>
+            </a:avLst>
+          </a:prstGeom>
+          <a:solidFill>
+            <a:srgbClr val="FFFFFF">
+              <a:alpha val="88000"/>
+            </a:srgbClr>
+          </a:solidFill>
+          <a:ln w="12700">
+            <a:solidFill>
+              <a:srgbClr val="D6E8F2"/>
+            </a:solidFill>
+            <a:prstDash val="solid"/>
+          </a:ln>
+        </p:spPr>
+      </p:sp>
+      <p:sp>
+        <p:nvSpPr>
+          <p:cNvPr id="14" name="Shape 12"/>
+          <p:cNvSpPr/>
+          <p:nvPr/>
+        </p:nvSpPr>
+        <p:spPr>
+          <a:xfrm>
+            <a:off x="8074152" y="3291840"/>
+            <a:ext cx="2596896" cy="749808"/>
+          </a:xfrm>
+          <a:prstGeom prst="rect">
+            <a:avLst/>
+          </a:prstGeom>
+          <a:solidFill>
+            <a:srgbClr val="EAF6F8"/>
+          </a:solidFill>
+          <a:ln w="12700">
+            <a:solidFill>
+              <a:srgbClr val="8ABBD8"/>
+            </a:solidFill>
+            <a:prstDash val="solid"/>
+          </a:ln>
+        </p:spPr>
+      </p:sp>
+      <p:sp>
+        <p:nvSpPr>
+          <p:cNvPr id="15" name="Shape 13"/>
+          <p:cNvSpPr/>
+          <p:nvPr/>
+        </p:nvSpPr>
+        <p:spPr>
+          <a:xfrm>
+            <a:off x="8202168" y="3721608"/>
+            <a:ext cx="2340864" cy="0"/>
+          </a:xfrm>
+          <a:prstGeom prst="line">
+            <a:avLst/>
+          </a:prstGeom>
+          <a:noFill/>
+          <a:ln w="19050">
+            <a:solidFill>
+              <a:srgbClr val="0068B7"/>
+            </a:solidFill>
+            <a:prstDash val="solid"/>
+          </a:ln>
+        </p:spPr>
+      </p:sp>
+      <p:sp>
+        <p:nvSpPr>
+          <p:cNvPr id="16" name="Shape 14"/>
+          <p:cNvSpPr/>
+          <p:nvPr/>
+        </p:nvSpPr>
+        <p:spPr>
+          <a:xfrm>
+            <a:off x="9198864" y="4206240"/>
+            <a:ext cx="347472" cy="347472"/>
+          </a:xfrm>
+          <a:prstGeom prst="ellipse">
+            <a:avLst/>
+          </a:prstGeom>
+          <a:solidFill>
+            <a:srgbClr val="2F8A28"/>
+          </a:solidFill>
+          <a:ln w="12700">
+            <a:solidFill>
+              <a:srgbClr val="2F8A28"/>
+            </a:solidFill>
+            <a:prstDash val="solid"/>
+          </a:ln>
+        </p:spPr>
+      </p:sp>
+      <p:sp>
+        <p:nvSpPr>
+          <p:cNvPr id="17" name="Text 15"/>
+          <p:cNvSpPr/>
+          <p:nvPr/>
+        </p:nvSpPr>
+        <p:spPr>
+          <a:xfrm>
+            <a:off x="7909560" y="3977640"/>
+            <a:ext cx="2926080" cy="182880"/>
+          </a:xfrm>
+          <a:prstGeom prst="rect">
+            <a:avLst/>
+          </a:prstGeom>
+          <a:noFill/>
+          <a:ln/>
+        </p:spPr>
+        <p:txBody>
+          <a:bodyPr wrap="square" lIns="0" tIns="0" rIns="0" bIns="0" rtlCol="0" anchor="ctr"/>
+          <a:lstStyle/>
+          <a:p>
+            <a:pPr algn="ctr" indent="0" marL="0">
+              <a:buNone/>
+            </a:pPr>
+            <a:r>
+              <a:rPr lang="en-US" sz="1000" dirty="0">
+                <a:solidFill>
+                  <a:srgbClr val="003A63"/>
+                </a:solidFill>
+                <a:latin typeface="Aptos" pitchFamily="34" charset="0"/>
+                <a:ea typeface="Aptos" pitchFamily="34" charset="-122"/>
+                <a:cs typeface="Aptos" pitchFamily="34" charset="-120"/>
+              </a:rPr>
+              <a:t>Concept to action</a:t>
+            </a:r>
+            <a:endParaRPr lang="en-US" sz="1000" dirty="0"/>
+          </a:p>
+        </p:txBody>
+      </p:sp>
+      <p:sp>
+        <p:nvSpPr>
+          <p:cNvPr id="18" name="Shape 16"/>
+          <p:cNvSpPr/>
+          <p:nvPr/>
+        </p:nvSpPr>
+        <p:spPr>
+          <a:xfrm>
+            <a:off x="7635240" y="4498848"/>
+            <a:ext cx="3474720" cy="1143000"/>
+          </a:xfrm>
+          <a:prstGeom prst="roundRect">
+            <a:avLst>
+              <a:gd name="adj" fmla="val 9600"/>
             </a:avLst>
           </a:prstGeom>
           <a:solidFill>
@@ -14802,14 +16316,14 @@
       </p:sp>
       <p:sp>
         <p:nvSpPr>
-          <p:cNvPr id="16" name="Text 14"/>
-          <p:cNvSpPr/>
-          <p:nvPr/>
-        </p:nvSpPr>
-        <p:spPr>
-          <a:xfrm>
-            <a:off x="8074152" y="3666744"/>
-            <a:ext cx="2825496" cy="256032"/>
+          <p:cNvPr id="19" name="Text 17"/>
+          <p:cNvSpPr/>
+          <p:nvPr/>
+        </p:nvSpPr>
+        <p:spPr>
+          <a:xfrm>
+            <a:off x="7799832" y="4645152"/>
+            <a:ext cx="3145536" cy="256032"/>
           </a:xfrm>
           <a:prstGeom prst="rect">
             <a:avLst/>
@@ -14833,7 +16347,7 @@
                 <a:ea typeface="Aptos" pitchFamily="34" charset="-122"/>
                 <a:cs typeface="Aptos" pitchFamily="34" charset="-120"/>
               </a:rPr>
-              <a:t>Use this for</a:t>
+              <a:t>Apply it</a:t>
             </a:r>
             <a:endParaRPr lang="en-US" sz="1300" dirty="0"/>
           </a:p>
@@ -14841,14 +16355,14 @@
       </p:sp>
       <p:sp>
         <p:nvSpPr>
-          <p:cNvPr id="17" name="Text 15"/>
-          <p:cNvSpPr/>
-          <p:nvPr/>
-        </p:nvSpPr>
-        <p:spPr>
-          <a:xfrm>
-            <a:off x="8074152" y="4023360"/>
-            <a:ext cx="2825496" cy="1097280"/>
+          <p:cNvPr id="20" name="Text 18"/>
+          <p:cNvSpPr/>
+          <p:nvPr/>
+        </p:nvSpPr>
+        <p:spPr>
+          <a:xfrm>
+            <a:off x="7799832" y="5001768"/>
+            <a:ext cx="3145536" cy="502920"/>
           </a:xfrm>
           <a:prstGeom prst="rect">
             <a:avLst/>
@@ -14874,7 +16388,7 @@
                 <a:ea typeface="Aptos" pitchFamily="34" charset="-122"/>
                 <a:cs typeface="Aptos" pitchFamily="34" charset="-120"/>
               </a:rPr>
-              <a:t>Connect the concept to public health decisions, safeguards, documentation, or implementation work.</a:t>
+              <a:t>Connect the concept to public health purpose, responsible use, required safeguards, documentation, and the next action a department should take.</a:t>
             </a:r>
             <a:endParaRPr lang="en-US" sz="1550" dirty="0"/>
           </a:p>
@@ -15048,8 +16562,8 @@
         </p:nvSpPr>
         <p:spPr>
           <a:xfrm>
-            <a:off x="9966960" y="6537960"/>
-            <a:ext cx="1645920" cy="201168"/>
+            <a:off x="9646920" y="6537960"/>
+            <a:ext cx="1965960" cy="201168"/>
           </a:xfrm>
           <a:prstGeom prst="rect">
             <a:avLst/>
@@ -15073,7 +16587,7 @@
                 <a:ea typeface="Aptos" pitchFamily="34" charset="-122"/>
                 <a:cs typeface="Aptos" pitchFamily="34" charset="-120"/>
               </a:rPr>
-              <a:t>Â© Paula Soper</a:t>
+              <a:t>Copyright Paula Soper</a:t>
             </a:r>
             <a:endParaRPr lang="en-US" sz="800" dirty="0"/>
           </a:p>
@@ -15120,77 +16634,13 @@
       </p:sp>
       <p:sp>
         <p:nvSpPr>
-          <p:cNvPr id="8" name="Shape 6"/>
+          <p:cNvPr id="8" name="Text 6"/>
           <p:cNvSpPr/>
           <p:nvPr/>
         </p:nvSpPr>
         <p:spPr>
           <a:xfrm>
             <a:off x="640080" y="658368"/>
-            <a:ext cx="420624" cy="420624"/>
-          </a:xfrm>
-          <a:prstGeom prst="ellipse">
-            <a:avLst/>
-          </a:prstGeom>
-          <a:solidFill>
-            <a:srgbClr val="0068B7"/>
-          </a:solidFill>
-          <a:ln w="12700">
-            <a:solidFill>
-              <a:srgbClr val="0068B7"/>
-            </a:solidFill>
-            <a:prstDash val="solid"/>
-          </a:ln>
-        </p:spPr>
-      </p:sp>
-      <p:sp>
-        <p:nvSpPr>
-          <p:cNvPr id="9" name="Text 7"/>
-          <p:cNvSpPr/>
-          <p:nvPr/>
-        </p:nvSpPr>
-        <p:spPr>
-          <a:xfrm>
-            <a:off x="640080" y="731520"/>
-            <a:ext cx="420624" cy="164592"/>
-          </a:xfrm>
-          <a:prstGeom prst="rect">
-            <a:avLst/>
-          </a:prstGeom>
-          <a:noFill/>
-          <a:ln/>
-        </p:spPr>
-        <p:txBody>
-          <a:bodyPr wrap="square" lIns="0" tIns="0" rIns="0" bIns="0" rtlCol="0" anchor="ctr"/>
-          <a:lstStyle/>
-          <a:p>
-            <a:pPr algn="ctr" indent="0" marL="0">
-              <a:buNone/>
-            </a:pPr>
-            <a:r>
-              <a:rPr lang="en-US" sz="1100" b="1" dirty="0">
-                <a:solidFill>
-                  <a:srgbClr val="FFFFFF"/>
-                </a:solidFill>
-                <a:latin typeface="Aptos" pitchFamily="34" charset="0"/>
-                <a:ea typeface="Aptos" pitchFamily="34" charset="-122"/>
-                <a:cs typeface="Aptos" pitchFamily="34" charset="-120"/>
-              </a:rPr>
-              <a:t>3</a:t>
-            </a:r>
-            <a:endParaRPr lang="en-US" sz="1100" dirty="0"/>
-          </a:p>
-        </p:txBody>
-      </p:sp>
-      <p:sp>
-        <p:nvSpPr>
-          <p:cNvPr id="10" name="Text 8"/>
-          <p:cNvSpPr/>
-          <p:nvPr/>
-        </p:nvSpPr>
-        <p:spPr>
-          <a:xfrm>
-            <a:off x="640080" y="621792"/>
             <a:ext cx="10881360" cy="713232"/>
           </a:xfrm>
           <a:prstGeom prst="rect">
@@ -15225,14 +16675,14 @@
       </p:sp>
       <p:sp>
         <p:nvSpPr>
-          <p:cNvPr id="11" name="Text 9"/>
+          <p:cNvPr id="9" name="Text 7"/>
           <p:cNvSpPr/>
           <p:nvPr/>
         </p:nvSpPr>
         <p:spPr>
           <a:xfrm>
             <a:off x="868680" y="1508760"/>
-            <a:ext cx="6537960" cy="4160520"/>
+            <a:ext cx="6309360" cy="4160520"/>
           </a:xfrm>
           <a:prstGeom prst="rect">
             <a:avLst/>
@@ -15291,18 +16741,18 @@
       </p:sp>
       <p:sp>
         <p:nvSpPr>
-          <p:cNvPr id="12" name="Shape 10"/>
-          <p:cNvSpPr/>
-          <p:nvPr/>
-        </p:nvSpPr>
-        <p:spPr>
-          <a:xfrm>
-            <a:off x="7909560" y="1417320"/>
-            <a:ext cx="3154680" cy="1828800"/>
+          <p:cNvPr id="10" name="Shape 8"/>
+          <p:cNvSpPr/>
+          <p:nvPr/>
+        </p:nvSpPr>
+        <p:spPr>
+          <a:xfrm>
+            <a:off x="7635240" y="1325880"/>
+            <a:ext cx="3474720" cy="1325880"/>
           </a:xfrm>
           <a:prstGeom prst="roundRect">
             <a:avLst>
-              <a:gd name="adj" fmla="val 6000"/>
+              <a:gd name="adj" fmla="val 8276"/>
             </a:avLst>
           </a:prstGeom>
           <a:solidFill>
@@ -15318,14 +16768,14 @@
       </p:sp>
       <p:sp>
         <p:nvSpPr>
-          <p:cNvPr id="13" name="Text 11"/>
-          <p:cNvSpPr/>
-          <p:nvPr/>
-        </p:nvSpPr>
-        <p:spPr>
-          <a:xfrm>
-            <a:off x="8074152" y="1563624"/>
-            <a:ext cx="2825496" cy="256032"/>
+          <p:cNvPr id="11" name="Text 9"/>
+          <p:cNvSpPr/>
+          <p:nvPr/>
+        </p:nvSpPr>
+        <p:spPr>
+          <a:xfrm>
+            <a:off x="7799832" y="1472184"/>
+            <a:ext cx="3145536" cy="256032"/>
           </a:xfrm>
           <a:prstGeom prst="rect">
             <a:avLst/>
@@ -15349,7 +16799,7 @@
                 <a:ea typeface="Aptos" pitchFamily="34" charset="-122"/>
                 <a:cs typeface="Aptos" pitchFamily="34" charset="-120"/>
               </a:rPr>
-              <a:t>Key idea</a:t>
+              <a:t>Core concept</a:t>
             </a:r>
             <a:endParaRPr lang="en-US" sz="1300" dirty="0"/>
           </a:p>
@@ -15357,14 +16807,14 @@
       </p:sp>
       <p:sp>
         <p:nvSpPr>
-          <p:cNvPr id="14" name="Text 12"/>
-          <p:cNvSpPr/>
-          <p:nvPr/>
-        </p:nvSpPr>
-        <p:spPr>
-          <a:xfrm>
-            <a:off x="8074152" y="1920240"/>
-            <a:ext cx="2825496" cy="1188720"/>
+          <p:cNvPr id="12" name="Text 10"/>
+          <p:cNvSpPr/>
+          <p:nvPr/>
+        </p:nvSpPr>
+        <p:spPr>
+          <a:xfrm>
+            <a:off x="7799832" y="1828800"/>
+            <a:ext cx="3145536" cy="685800"/>
           </a:xfrm>
           <a:prstGeom prst="rect">
             <a:avLst/>
@@ -15398,18 +16848,159 @@
       </p:sp>
       <p:sp>
         <p:nvSpPr>
-          <p:cNvPr id="15" name="Shape 13"/>
-          <p:cNvSpPr/>
-          <p:nvPr/>
-        </p:nvSpPr>
-        <p:spPr>
-          <a:xfrm>
-            <a:off x="7909560" y="3520440"/>
-            <a:ext cx="3154680" cy="1737360"/>
+          <p:cNvPr id="13" name="Shape 11"/>
+          <p:cNvSpPr/>
+          <p:nvPr/>
+        </p:nvSpPr>
+        <p:spPr>
+          <a:xfrm>
+            <a:off x="7635240" y="2788920"/>
+            <a:ext cx="3474720" cy="1536192"/>
           </a:xfrm>
           <a:prstGeom prst="roundRect">
             <a:avLst>
-              <a:gd name="adj" fmla="val 6316"/>
+              <a:gd name="adj" fmla="val 7143"/>
+            </a:avLst>
+          </a:prstGeom>
+          <a:solidFill>
+            <a:srgbClr val="FFFFFF">
+              <a:alpha val="88000"/>
+            </a:srgbClr>
+          </a:solidFill>
+          <a:ln w="12700">
+            <a:solidFill>
+              <a:srgbClr val="D6E8F2"/>
+            </a:solidFill>
+            <a:prstDash val="solid"/>
+          </a:ln>
+        </p:spPr>
+      </p:sp>
+      <p:sp>
+        <p:nvSpPr>
+          <p:cNvPr id="14" name="Shape 12"/>
+          <p:cNvSpPr/>
+          <p:nvPr/>
+        </p:nvSpPr>
+        <p:spPr>
+          <a:xfrm>
+            <a:off x="8074152" y="3291840"/>
+            <a:ext cx="2596896" cy="749808"/>
+          </a:xfrm>
+          <a:prstGeom prst="rect">
+            <a:avLst/>
+          </a:prstGeom>
+          <a:solidFill>
+            <a:srgbClr val="EAF6F8"/>
+          </a:solidFill>
+          <a:ln w="12700">
+            <a:solidFill>
+              <a:srgbClr val="8ABBD8"/>
+            </a:solidFill>
+            <a:prstDash val="solid"/>
+          </a:ln>
+        </p:spPr>
+      </p:sp>
+      <p:sp>
+        <p:nvSpPr>
+          <p:cNvPr id="15" name="Shape 13"/>
+          <p:cNvSpPr/>
+          <p:nvPr/>
+        </p:nvSpPr>
+        <p:spPr>
+          <a:xfrm>
+            <a:off x="8202168" y="3721608"/>
+            <a:ext cx="2340864" cy="0"/>
+          </a:xfrm>
+          <a:prstGeom prst="line">
+            <a:avLst/>
+          </a:prstGeom>
+          <a:noFill/>
+          <a:ln w="19050">
+            <a:solidFill>
+              <a:srgbClr val="0068B7"/>
+            </a:solidFill>
+            <a:prstDash val="solid"/>
+          </a:ln>
+        </p:spPr>
+      </p:sp>
+      <p:sp>
+        <p:nvSpPr>
+          <p:cNvPr id="16" name="Shape 14"/>
+          <p:cNvSpPr/>
+          <p:nvPr/>
+        </p:nvSpPr>
+        <p:spPr>
+          <a:xfrm>
+            <a:off x="9198864" y="4206240"/>
+            <a:ext cx="347472" cy="347472"/>
+          </a:xfrm>
+          <a:prstGeom prst="ellipse">
+            <a:avLst/>
+          </a:prstGeom>
+          <a:solidFill>
+            <a:srgbClr val="2F8A28"/>
+          </a:solidFill>
+          <a:ln w="12700">
+            <a:solidFill>
+              <a:srgbClr val="2F8A28"/>
+            </a:solidFill>
+            <a:prstDash val="solid"/>
+          </a:ln>
+        </p:spPr>
+      </p:sp>
+      <p:sp>
+        <p:nvSpPr>
+          <p:cNvPr id="17" name="Text 15"/>
+          <p:cNvSpPr/>
+          <p:nvPr/>
+        </p:nvSpPr>
+        <p:spPr>
+          <a:xfrm>
+            <a:off x="7909560" y="3977640"/>
+            <a:ext cx="2926080" cy="182880"/>
+          </a:xfrm>
+          <a:prstGeom prst="rect">
+            <a:avLst/>
+          </a:prstGeom>
+          <a:noFill/>
+          <a:ln/>
+        </p:spPr>
+        <p:txBody>
+          <a:bodyPr wrap="square" lIns="0" tIns="0" rIns="0" bIns="0" rtlCol="0" anchor="ctr"/>
+          <a:lstStyle/>
+          <a:p>
+            <a:pPr algn="ctr" indent="0" marL="0">
+              <a:buNone/>
+            </a:pPr>
+            <a:r>
+              <a:rPr lang="en-US" sz="1000" dirty="0">
+                <a:solidFill>
+                  <a:srgbClr val="003A63"/>
+                </a:solidFill>
+                <a:latin typeface="Aptos" pitchFamily="34" charset="0"/>
+                <a:ea typeface="Aptos" pitchFamily="34" charset="-122"/>
+                <a:cs typeface="Aptos" pitchFamily="34" charset="-120"/>
+              </a:rPr>
+              <a:t>Concept to action</a:t>
+            </a:r>
+            <a:endParaRPr lang="en-US" sz="1000" dirty="0"/>
+          </a:p>
+        </p:txBody>
+      </p:sp>
+      <p:sp>
+        <p:nvSpPr>
+          <p:cNvPr id="18" name="Shape 16"/>
+          <p:cNvSpPr/>
+          <p:nvPr/>
+        </p:nvSpPr>
+        <p:spPr>
+          <a:xfrm>
+            <a:off x="7635240" y="4498848"/>
+            <a:ext cx="3474720" cy="1143000"/>
+          </a:xfrm>
+          <a:prstGeom prst="roundRect">
+            <a:avLst>
+              <a:gd name="adj" fmla="val 9600"/>
             </a:avLst>
           </a:prstGeom>
           <a:solidFill>
@@ -15425,14 +17016,14 @@
       </p:sp>
       <p:sp>
         <p:nvSpPr>
-          <p:cNvPr id="16" name="Text 14"/>
-          <p:cNvSpPr/>
-          <p:nvPr/>
-        </p:nvSpPr>
-        <p:spPr>
-          <a:xfrm>
-            <a:off x="8074152" y="3666744"/>
-            <a:ext cx="2825496" cy="256032"/>
+          <p:cNvPr id="19" name="Text 17"/>
+          <p:cNvSpPr/>
+          <p:nvPr/>
+        </p:nvSpPr>
+        <p:spPr>
+          <a:xfrm>
+            <a:off x="7799832" y="4645152"/>
+            <a:ext cx="3145536" cy="256032"/>
           </a:xfrm>
           <a:prstGeom prst="rect">
             <a:avLst/>
@@ -15456,7 +17047,7 @@
                 <a:ea typeface="Aptos" pitchFamily="34" charset="-122"/>
                 <a:cs typeface="Aptos" pitchFamily="34" charset="-120"/>
               </a:rPr>
-              <a:t>Use this for</a:t>
+              <a:t>Apply it</a:t>
             </a:r>
             <a:endParaRPr lang="en-US" sz="1300" dirty="0"/>
           </a:p>
@@ -15464,14 +17055,14 @@
       </p:sp>
       <p:sp>
         <p:nvSpPr>
-          <p:cNvPr id="17" name="Text 15"/>
-          <p:cNvSpPr/>
-          <p:nvPr/>
-        </p:nvSpPr>
-        <p:spPr>
-          <a:xfrm>
-            <a:off x="8074152" y="4023360"/>
-            <a:ext cx="2825496" cy="1097280"/>
+          <p:cNvPr id="20" name="Text 18"/>
+          <p:cNvSpPr/>
+          <p:nvPr/>
+        </p:nvSpPr>
+        <p:spPr>
+          <a:xfrm>
+            <a:off x="7799832" y="5001768"/>
+            <a:ext cx="3145536" cy="502920"/>
           </a:xfrm>
           <a:prstGeom prst="rect">
             <a:avLst/>
@@ -15497,7 +17088,7 @@
                 <a:ea typeface="Aptos" pitchFamily="34" charset="-122"/>
                 <a:cs typeface="Aptos" pitchFamily="34" charset="-120"/>
               </a:rPr>
-              <a:t>Connect the concept to public health decisions, safeguards, documentation, or implementation work.</a:t>
+              <a:t>Connect the concept to public health purpose, responsible use, required safeguards, documentation, and the next action a department should take.</a:t>
             </a:r>
             <a:endParaRPr lang="en-US" sz="1550" dirty="0"/>
           </a:p>
@@ -15671,8 +17262,8 @@
         </p:nvSpPr>
         <p:spPr>
           <a:xfrm>
-            <a:off x="9966960" y="6537960"/>
-            <a:ext cx="1645920" cy="201168"/>
+            <a:off x="9646920" y="6537960"/>
+            <a:ext cx="1965960" cy="201168"/>
           </a:xfrm>
           <a:prstGeom prst="rect">
             <a:avLst/>
@@ -15696,7 +17287,7 @@
                 <a:ea typeface="Aptos" pitchFamily="34" charset="-122"/>
                 <a:cs typeface="Aptos" pitchFamily="34" charset="-120"/>
               </a:rPr>
-              <a:t>Â© Paula Soper</a:t>
+              <a:t>Copyright Paula Soper</a:t>
             </a:r>
             <a:endParaRPr lang="en-US" sz="800" dirty="0"/>
           </a:p>
@@ -15743,77 +17334,13 @@
       </p:sp>
       <p:sp>
         <p:nvSpPr>
-          <p:cNvPr id="8" name="Shape 6"/>
+          <p:cNvPr id="8" name="Text 6"/>
           <p:cNvSpPr/>
           <p:nvPr/>
         </p:nvSpPr>
         <p:spPr>
           <a:xfrm>
             <a:off x="640080" y="658368"/>
-            <a:ext cx="420624" cy="420624"/>
-          </a:xfrm>
-          <a:prstGeom prst="ellipse">
-            <a:avLst/>
-          </a:prstGeom>
-          <a:solidFill>
-            <a:srgbClr val="0068B7"/>
-          </a:solidFill>
-          <a:ln w="12700">
-            <a:solidFill>
-              <a:srgbClr val="0068B7"/>
-            </a:solidFill>
-            <a:prstDash val="solid"/>
-          </a:ln>
-        </p:spPr>
-      </p:sp>
-      <p:sp>
-        <p:nvSpPr>
-          <p:cNvPr id="9" name="Text 7"/>
-          <p:cNvSpPr/>
-          <p:nvPr/>
-        </p:nvSpPr>
-        <p:spPr>
-          <a:xfrm>
-            <a:off x="640080" y="731520"/>
-            <a:ext cx="420624" cy="164592"/>
-          </a:xfrm>
-          <a:prstGeom prst="rect">
-            <a:avLst/>
-          </a:prstGeom>
-          <a:noFill/>
-          <a:ln/>
-        </p:spPr>
-        <p:txBody>
-          <a:bodyPr wrap="square" lIns="0" tIns="0" rIns="0" bIns="0" rtlCol="0" anchor="ctr"/>
-          <a:lstStyle/>
-          <a:p>
-            <a:pPr algn="ctr" indent="0" marL="0">
-              <a:buNone/>
-            </a:pPr>
-            <a:r>
-              <a:rPr lang="en-US" sz="1100" b="1" dirty="0">
-                <a:solidFill>
-                  <a:srgbClr val="FFFFFF"/>
-                </a:solidFill>
-                <a:latin typeface="Aptos" pitchFamily="34" charset="0"/>
-                <a:ea typeface="Aptos" pitchFamily="34" charset="-122"/>
-                <a:cs typeface="Aptos" pitchFamily="34" charset="-120"/>
-              </a:rPr>
-              <a:t>4</a:t>
-            </a:r>
-            <a:endParaRPr lang="en-US" sz="1100" dirty="0"/>
-          </a:p>
-        </p:txBody>
-      </p:sp>
-      <p:sp>
-        <p:nvSpPr>
-          <p:cNvPr id="10" name="Text 8"/>
-          <p:cNvSpPr/>
-          <p:nvPr/>
-        </p:nvSpPr>
-        <p:spPr>
-          <a:xfrm>
-            <a:off x="640080" y="621792"/>
             <a:ext cx="10881360" cy="713232"/>
           </a:xfrm>
           <a:prstGeom prst="rect">
@@ -15848,14 +17375,14 @@
       </p:sp>
       <p:sp>
         <p:nvSpPr>
-          <p:cNvPr id="11" name="Text 9"/>
+          <p:cNvPr id="9" name="Text 7"/>
           <p:cNvSpPr/>
           <p:nvPr/>
         </p:nvSpPr>
         <p:spPr>
           <a:xfrm>
             <a:off x="868680" y="1508760"/>
-            <a:ext cx="6537960" cy="4160520"/>
+            <a:ext cx="6309360" cy="4160520"/>
           </a:xfrm>
           <a:prstGeom prst="rect">
             <a:avLst/>
@@ -15914,18 +17441,18 @@
       </p:sp>
       <p:sp>
         <p:nvSpPr>
-          <p:cNvPr id="12" name="Shape 10"/>
-          <p:cNvSpPr/>
-          <p:nvPr/>
-        </p:nvSpPr>
-        <p:spPr>
-          <a:xfrm>
-            <a:off x="7909560" y="1417320"/>
-            <a:ext cx="3154680" cy="1828800"/>
+          <p:cNvPr id="10" name="Shape 8"/>
+          <p:cNvSpPr/>
+          <p:nvPr/>
+        </p:nvSpPr>
+        <p:spPr>
+          <a:xfrm>
+            <a:off x="7635240" y="1325880"/>
+            <a:ext cx="3474720" cy="1325880"/>
           </a:xfrm>
           <a:prstGeom prst="roundRect">
             <a:avLst>
-              <a:gd name="adj" fmla="val 6000"/>
+              <a:gd name="adj" fmla="val 8276"/>
             </a:avLst>
           </a:prstGeom>
           <a:solidFill>
@@ -15941,14 +17468,14 @@
       </p:sp>
       <p:sp>
         <p:nvSpPr>
-          <p:cNvPr id="13" name="Text 11"/>
-          <p:cNvSpPr/>
-          <p:nvPr/>
-        </p:nvSpPr>
-        <p:spPr>
-          <a:xfrm>
-            <a:off x="8074152" y="1563624"/>
-            <a:ext cx="2825496" cy="256032"/>
+          <p:cNvPr id="11" name="Text 9"/>
+          <p:cNvSpPr/>
+          <p:nvPr/>
+        </p:nvSpPr>
+        <p:spPr>
+          <a:xfrm>
+            <a:off x="7799832" y="1472184"/>
+            <a:ext cx="3145536" cy="256032"/>
           </a:xfrm>
           <a:prstGeom prst="rect">
             <a:avLst/>
@@ -15972,7 +17499,7 @@
                 <a:ea typeface="Aptos" pitchFamily="34" charset="-122"/>
                 <a:cs typeface="Aptos" pitchFamily="34" charset="-120"/>
               </a:rPr>
-              <a:t>Key idea</a:t>
+              <a:t>Core concept</a:t>
             </a:r>
             <a:endParaRPr lang="en-US" sz="1300" dirty="0"/>
           </a:p>
@@ -15980,14 +17507,14 @@
       </p:sp>
       <p:sp>
         <p:nvSpPr>
-          <p:cNvPr id="14" name="Text 12"/>
-          <p:cNvSpPr/>
-          <p:nvPr/>
-        </p:nvSpPr>
-        <p:spPr>
-          <a:xfrm>
-            <a:off x="8074152" y="1920240"/>
-            <a:ext cx="2825496" cy="1188720"/>
+          <p:cNvPr id="12" name="Text 10"/>
+          <p:cNvSpPr/>
+          <p:nvPr/>
+        </p:nvSpPr>
+        <p:spPr>
+          <a:xfrm>
+            <a:off x="7799832" y="1828800"/>
+            <a:ext cx="3145536" cy="685800"/>
           </a:xfrm>
           <a:prstGeom prst="rect">
             <a:avLst/>
@@ -16021,18 +17548,159 @@
       </p:sp>
       <p:sp>
         <p:nvSpPr>
-          <p:cNvPr id="15" name="Shape 13"/>
-          <p:cNvSpPr/>
-          <p:nvPr/>
-        </p:nvSpPr>
-        <p:spPr>
-          <a:xfrm>
-            <a:off x="7909560" y="3520440"/>
-            <a:ext cx="3154680" cy="1737360"/>
+          <p:cNvPr id="13" name="Shape 11"/>
+          <p:cNvSpPr/>
+          <p:nvPr/>
+        </p:nvSpPr>
+        <p:spPr>
+          <a:xfrm>
+            <a:off x="7635240" y="2788920"/>
+            <a:ext cx="3474720" cy="1536192"/>
           </a:xfrm>
           <a:prstGeom prst="roundRect">
             <a:avLst>
-              <a:gd name="adj" fmla="val 6316"/>
+              <a:gd name="adj" fmla="val 7143"/>
+            </a:avLst>
+          </a:prstGeom>
+          <a:solidFill>
+            <a:srgbClr val="FFFFFF">
+              <a:alpha val="88000"/>
+            </a:srgbClr>
+          </a:solidFill>
+          <a:ln w="12700">
+            <a:solidFill>
+              <a:srgbClr val="D6E8F2"/>
+            </a:solidFill>
+            <a:prstDash val="solid"/>
+          </a:ln>
+        </p:spPr>
+      </p:sp>
+      <p:sp>
+        <p:nvSpPr>
+          <p:cNvPr id="14" name="Shape 12"/>
+          <p:cNvSpPr/>
+          <p:nvPr/>
+        </p:nvSpPr>
+        <p:spPr>
+          <a:xfrm>
+            <a:off x="8074152" y="3291840"/>
+            <a:ext cx="2596896" cy="749808"/>
+          </a:xfrm>
+          <a:prstGeom prst="rect">
+            <a:avLst/>
+          </a:prstGeom>
+          <a:solidFill>
+            <a:srgbClr val="EAF6F8"/>
+          </a:solidFill>
+          <a:ln w="12700">
+            <a:solidFill>
+              <a:srgbClr val="8ABBD8"/>
+            </a:solidFill>
+            <a:prstDash val="solid"/>
+          </a:ln>
+        </p:spPr>
+      </p:sp>
+      <p:sp>
+        <p:nvSpPr>
+          <p:cNvPr id="15" name="Shape 13"/>
+          <p:cNvSpPr/>
+          <p:nvPr/>
+        </p:nvSpPr>
+        <p:spPr>
+          <a:xfrm>
+            <a:off x="8202168" y="3721608"/>
+            <a:ext cx="2340864" cy="0"/>
+          </a:xfrm>
+          <a:prstGeom prst="line">
+            <a:avLst/>
+          </a:prstGeom>
+          <a:noFill/>
+          <a:ln w="19050">
+            <a:solidFill>
+              <a:srgbClr val="0068B7"/>
+            </a:solidFill>
+            <a:prstDash val="solid"/>
+          </a:ln>
+        </p:spPr>
+      </p:sp>
+      <p:sp>
+        <p:nvSpPr>
+          <p:cNvPr id="16" name="Shape 14"/>
+          <p:cNvSpPr/>
+          <p:nvPr/>
+        </p:nvSpPr>
+        <p:spPr>
+          <a:xfrm>
+            <a:off x="9198864" y="4206240"/>
+            <a:ext cx="347472" cy="347472"/>
+          </a:xfrm>
+          <a:prstGeom prst="ellipse">
+            <a:avLst/>
+          </a:prstGeom>
+          <a:solidFill>
+            <a:srgbClr val="2F8A28"/>
+          </a:solidFill>
+          <a:ln w="12700">
+            <a:solidFill>
+              <a:srgbClr val="2F8A28"/>
+            </a:solidFill>
+            <a:prstDash val="solid"/>
+          </a:ln>
+        </p:spPr>
+      </p:sp>
+      <p:sp>
+        <p:nvSpPr>
+          <p:cNvPr id="17" name="Text 15"/>
+          <p:cNvSpPr/>
+          <p:nvPr/>
+        </p:nvSpPr>
+        <p:spPr>
+          <a:xfrm>
+            <a:off x="7909560" y="3977640"/>
+            <a:ext cx="2926080" cy="182880"/>
+          </a:xfrm>
+          <a:prstGeom prst="rect">
+            <a:avLst/>
+          </a:prstGeom>
+          <a:noFill/>
+          <a:ln/>
+        </p:spPr>
+        <p:txBody>
+          <a:bodyPr wrap="square" lIns="0" tIns="0" rIns="0" bIns="0" rtlCol="0" anchor="ctr"/>
+          <a:lstStyle/>
+          <a:p>
+            <a:pPr algn="ctr" indent="0" marL="0">
+              <a:buNone/>
+            </a:pPr>
+            <a:r>
+              <a:rPr lang="en-US" sz="1000" dirty="0">
+                <a:solidFill>
+                  <a:srgbClr val="003A63"/>
+                </a:solidFill>
+                <a:latin typeface="Aptos" pitchFamily="34" charset="0"/>
+                <a:ea typeface="Aptos" pitchFamily="34" charset="-122"/>
+                <a:cs typeface="Aptos" pitchFamily="34" charset="-120"/>
+              </a:rPr>
+              <a:t>Concept to action</a:t>
+            </a:r>
+            <a:endParaRPr lang="en-US" sz="1000" dirty="0"/>
+          </a:p>
+        </p:txBody>
+      </p:sp>
+      <p:sp>
+        <p:nvSpPr>
+          <p:cNvPr id="18" name="Shape 16"/>
+          <p:cNvSpPr/>
+          <p:nvPr/>
+        </p:nvSpPr>
+        <p:spPr>
+          <a:xfrm>
+            <a:off x="7635240" y="4498848"/>
+            <a:ext cx="3474720" cy="1143000"/>
+          </a:xfrm>
+          <a:prstGeom prst="roundRect">
+            <a:avLst>
+              <a:gd name="adj" fmla="val 9600"/>
             </a:avLst>
           </a:prstGeom>
           <a:solidFill>
@@ -16048,14 +17716,14 @@
       </p:sp>
       <p:sp>
         <p:nvSpPr>
-          <p:cNvPr id="16" name="Text 14"/>
-          <p:cNvSpPr/>
-          <p:nvPr/>
-        </p:nvSpPr>
-        <p:spPr>
-          <a:xfrm>
-            <a:off x="8074152" y="3666744"/>
-            <a:ext cx="2825496" cy="256032"/>
+          <p:cNvPr id="19" name="Text 17"/>
+          <p:cNvSpPr/>
+          <p:nvPr/>
+        </p:nvSpPr>
+        <p:spPr>
+          <a:xfrm>
+            <a:off x="7799832" y="4645152"/>
+            <a:ext cx="3145536" cy="256032"/>
           </a:xfrm>
           <a:prstGeom prst="rect">
             <a:avLst/>
@@ -16079,7 +17747,7 @@
                 <a:ea typeface="Aptos" pitchFamily="34" charset="-122"/>
                 <a:cs typeface="Aptos" pitchFamily="34" charset="-120"/>
               </a:rPr>
-              <a:t>Use this for</a:t>
+              <a:t>Apply it</a:t>
             </a:r>
             <a:endParaRPr lang="en-US" sz="1300" dirty="0"/>
           </a:p>
@@ -16087,14 +17755,14 @@
       </p:sp>
       <p:sp>
         <p:nvSpPr>
-          <p:cNvPr id="17" name="Text 15"/>
-          <p:cNvSpPr/>
-          <p:nvPr/>
-        </p:nvSpPr>
-        <p:spPr>
-          <a:xfrm>
-            <a:off x="8074152" y="4023360"/>
-            <a:ext cx="2825496" cy="1097280"/>
+          <p:cNvPr id="20" name="Text 18"/>
+          <p:cNvSpPr/>
+          <p:nvPr/>
+        </p:nvSpPr>
+        <p:spPr>
+          <a:xfrm>
+            <a:off x="7799832" y="5001768"/>
+            <a:ext cx="3145536" cy="502920"/>
           </a:xfrm>
           <a:prstGeom prst="rect">
             <a:avLst/>
@@ -16120,7 +17788,7 @@
                 <a:ea typeface="Aptos" pitchFamily="34" charset="-122"/>
                 <a:cs typeface="Aptos" pitchFamily="34" charset="-120"/>
               </a:rPr>
-              <a:t>Connect the concept to public health decisions, safeguards, documentation, or implementation work.</a:t>
+              <a:t>Connect the concept to public health purpose, responsible use, required safeguards, documentation, and the next action a department should take.</a:t>
             </a:r>
             <a:endParaRPr lang="en-US" sz="1550" dirty="0"/>
           </a:p>

--- a/downloads/presentations/modules/anl-210.pptx
+++ b/downloads/presentations/modules/anl-210.pptx
@@ -3525,13 +3525,11 @@
             </a:avLst>
           </a:prstGeom>
           <a:solidFill>
-            <a:srgbClr val="FFFFFF">
-              <a:alpha val="88000"/>
-            </a:srgbClr>
+            <a:srgbClr val="FFFFFF"/>
           </a:solidFill>
           <a:ln w="12700">
             <a:solidFill>
-              <a:srgbClr val="D6E8F2"/>
+              <a:srgbClr val="B9D7E6"/>
             </a:solidFill>
             <a:prstDash val="solid"/>
           </a:ln>
@@ -3539,119 +3537,112 @@
       </p:sp>
       <p:sp>
         <p:nvSpPr>
-          <p:cNvPr id="14" name="Shape 12"/>
-          <p:cNvSpPr/>
-          <p:nvPr/>
-        </p:nvSpPr>
-        <p:spPr>
-          <a:xfrm>
-            <a:off x="8074152" y="3291840"/>
-            <a:ext cx="2596896" cy="749808"/>
-          </a:xfrm>
-          <a:prstGeom prst="rect">
-            <a:avLst/>
-          </a:prstGeom>
-          <a:solidFill>
-            <a:srgbClr val="EAF6F8"/>
-          </a:solidFill>
-          <a:ln w="12700">
-            <a:solidFill>
-              <a:srgbClr val="8ABBD8"/>
-            </a:solidFill>
-            <a:prstDash val="solid"/>
-          </a:ln>
-        </p:spPr>
-      </p:sp>
-      <p:sp>
-        <p:nvSpPr>
-          <p:cNvPr id="15" name="Shape 13"/>
-          <p:cNvSpPr/>
-          <p:nvPr/>
-        </p:nvSpPr>
-        <p:spPr>
-          <a:xfrm>
-            <a:off x="8202168" y="3721608"/>
-            <a:ext cx="2340864" cy="0"/>
-          </a:xfrm>
-          <a:prstGeom prst="line">
-            <a:avLst/>
-          </a:prstGeom>
-          <a:noFill/>
-          <a:ln w="19050">
-            <a:solidFill>
-              <a:srgbClr val="0068B7"/>
-            </a:solidFill>
-            <a:prstDash val="solid"/>
-          </a:ln>
-        </p:spPr>
+          <p:cNvPr id="14" name="Text 12"/>
+          <p:cNvSpPr/>
+          <p:nvPr/>
+        </p:nvSpPr>
+        <p:spPr>
+          <a:xfrm>
+            <a:off x="7799832" y="2935224"/>
+            <a:ext cx="3145536" cy="256032"/>
+          </a:xfrm>
+          <a:prstGeom prst="rect">
+            <a:avLst/>
+          </a:prstGeom>
+          <a:noFill/>
+          <a:ln/>
+        </p:spPr>
+        <p:txBody>
+          <a:bodyPr wrap="square" lIns="0" tIns="0" rIns="0" bIns="0" rtlCol="0" anchor="ctr"/>
+          <a:lstStyle/>
+          <a:p>
+            <a:pPr indent="0" marL="0">
+              <a:buNone/>
+            </a:pPr>
+            <a:r>
+              <a:rPr lang="en-US" sz="1300" b="1" dirty="0">
+                <a:solidFill>
+                  <a:srgbClr val="0068B7"/>
+                </a:solidFill>
+                <a:latin typeface="Aptos" pitchFamily="34" charset="0"/>
+                <a:ea typeface="Aptos" pitchFamily="34" charset="-122"/>
+                <a:cs typeface="Aptos" pitchFamily="34" charset="-120"/>
+              </a:rPr>
+              <a:t>Concept checkpoints</a:t>
+            </a:r>
+            <a:endParaRPr lang="en-US" sz="1300" dirty="0"/>
+          </a:p>
+        </p:txBody>
+      </p:sp>
+      <p:sp>
+        <p:nvSpPr>
+          <p:cNvPr id="15" name="Text 13"/>
+          <p:cNvSpPr/>
+          <p:nvPr/>
+        </p:nvSpPr>
+        <p:spPr>
+          <a:xfrm>
+            <a:off x="7818120" y="3300984"/>
+            <a:ext cx="3090672" cy="877824"/>
+          </a:xfrm>
+          <a:prstGeom prst="rect">
+            <a:avLst/>
+          </a:prstGeom>
+          <a:noFill/>
+          <a:ln/>
+        </p:spPr>
+        <p:txBody>
+          <a:bodyPr wrap="square" lIns="254" tIns="254" rIns="254" bIns="254" rtlCol="0" anchor="t">
+            <a:normAutofit/>
+          </a:bodyPr>
+          <a:lstStyle/>
+          <a:p>
+            <a:r>
+              <a:rPr lang="en-US" sz="1380" dirty="0">
+                <a:solidFill>
+                  <a:srgbClr val="17364A"/>
+                </a:solidFill>
+                <a:latin typeface="Aptos" pitchFamily="34" charset="0"/>
+                <a:ea typeface="Aptos" pitchFamily="34" charset="-122"/>
+                <a:cs typeface="Aptos" pitchFamily="34" charset="-120"/>
+              </a:rPr>
+              <a:t>The task should be specific enough to test. “Use AI to improve surveillance” is too vague..</a:t>
+            </a:r>
+            <a:endParaRPr lang="en-US" sz="1380" dirty="0"/>
+          </a:p>
+          <a:p>
+            <a:r>
+              <a:rPr lang="en-US" sz="1380" dirty="0">
+                <a:solidFill>
+                  <a:srgbClr val="17364A"/>
+                </a:solidFill>
+                <a:latin typeface="Aptos" pitchFamily="34" charset="0"/>
+                <a:ea typeface="Aptos" pitchFamily="34" charset="-122"/>
+                <a:cs typeface="Aptos" pitchFamily="34" charset="-120"/>
+              </a:rPr>
+              <a:t>A clear task allows staff to define the target label, required features, acceptance.</a:t>
+            </a:r>
+            <a:endParaRPr lang="en-US" sz="1380" dirty="0"/>
+          </a:p>
+          <a:p>
+            <a:r>
+              <a:rPr lang="en-US" sz="1380" dirty="0">
+                <a:solidFill>
+                  <a:srgbClr val="17364A"/>
+                </a:solidFill>
+                <a:latin typeface="Aptos" pitchFamily="34" charset="0"/>
+                <a:ea typeface="Aptos" pitchFamily="34" charset="-122"/>
+                <a:cs typeface="Aptos" pitchFamily="34" charset="-120"/>
+              </a:rPr>
+              <a:t>Data preparation is often the most important and time-consuming step.</a:t>
+            </a:r>
+            <a:endParaRPr lang="en-US" sz="1380" dirty="0"/>
+          </a:p>
+        </p:txBody>
       </p:sp>
       <p:sp>
         <p:nvSpPr>
           <p:cNvPr id="16" name="Shape 14"/>
-          <p:cNvSpPr/>
-          <p:nvPr/>
-        </p:nvSpPr>
-        <p:spPr>
-          <a:xfrm>
-            <a:off x="9198864" y="4206240"/>
-            <a:ext cx="347472" cy="347472"/>
-          </a:xfrm>
-          <a:prstGeom prst="ellipse">
-            <a:avLst/>
-          </a:prstGeom>
-          <a:solidFill>
-            <a:srgbClr val="2F8A28"/>
-          </a:solidFill>
-          <a:ln w="12700">
-            <a:solidFill>
-              <a:srgbClr val="2F8A28"/>
-            </a:solidFill>
-            <a:prstDash val="solid"/>
-          </a:ln>
-        </p:spPr>
-      </p:sp>
-      <p:sp>
-        <p:nvSpPr>
-          <p:cNvPr id="17" name="Text 15"/>
-          <p:cNvSpPr/>
-          <p:nvPr/>
-        </p:nvSpPr>
-        <p:spPr>
-          <a:xfrm>
-            <a:off x="7909560" y="3977640"/>
-            <a:ext cx="2926080" cy="182880"/>
-          </a:xfrm>
-          <a:prstGeom prst="rect">
-            <a:avLst/>
-          </a:prstGeom>
-          <a:noFill/>
-          <a:ln/>
-        </p:spPr>
-        <p:txBody>
-          <a:bodyPr wrap="square" lIns="0" tIns="0" rIns="0" bIns="0" rtlCol="0" anchor="ctr"/>
-          <a:lstStyle/>
-          <a:p>
-            <a:pPr algn="ctr" indent="0" marL="0">
-              <a:buNone/>
-            </a:pPr>
-            <a:r>
-              <a:rPr lang="en-US" sz="1000" dirty="0">
-                <a:solidFill>
-                  <a:srgbClr val="003A63"/>
-                </a:solidFill>
-                <a:latin typeface="Aptos" pitchFamily="34" charset="0"/>
-                <a:ea typeface="Aptos" pitchFamily="34" charset="-122"/>
-                <a:cs typeface="Aptos" pitchFamily="34" charset="-120"/>
-              </a:rPr>
-              <a:t>Concept to action</a:t>
-            </a:r>
-            <a:endParaRPr lang="en-US" sz="1000" dirty="0"/>
-          </a:p>
-        </p:txBody>
-      </p:sp>
-      <p:sp>
-        <p:nvSpPr>
-          <p:cNvPr id="18" name="Shape 16"/>
           <p:cNvSpPr/>
           <p:nvPr/>
         </p:nvSpPr>
@@ -3678,7 +3669,7 @@
       </p:sp>
       <p:sp>
         <p:nvSpPr>
-          <p:cNvPr id="19" name="Text 17"/>
+          <p:cNvPr id="17" name="Text 15"/>
           <p:cNvSpPr/>
           <p:nvPr/>
         </p:nvSpPr>
@@ -3717,7 +3708,7 @@
       </p:sp>
       <p:sp>
         <p:nvSpPr>
-          <p:cNvPr id="20" name="Text 18"/>
+          <p:cNvPr id="18" name="Text 16"/>
           <p:cNvSpPr/>
           <p:nvPr/>
         </p:nvSpPr>
@@ -4225,13 +4216,11 @@
             </a:avLst>
           </a:prstGeom>
           <a:solidFill>
-            <a:srgbClr val="FFFFFF">
-              <a:alpha val="88000"/>
-            </a:srgbClr>
+            <a:srgbClr val="FFFFFF"/>
           </a:solidFill>
           <a:ln w="12700">
             <a:solidFill>
-              <a:srgbClr val="D6E8F2"/>
+              <a:srgbClr val="B9D7E6"/>
             </a:solidFill>
             <a:prstDash val="solid"/>
           </a:ln>
@@ -4239,119 +4228,112 @@
       </p:sp>
       <p:sp>
         <p:nvSpPr>
-          <p:cNvPr id="14" name="Shape 12"/>
-          <p:cNvSpPr/>
-          <p:nvPr/>
-        </p:nvSpPr>
-        <p:spPr>
-          <a:xfrm>
-            <a:off x="8074152" y="3291840"/>
-            <a:ext cx="2596896" cy="749808"/>
-          </a:xfrm>
-          <a:prstGeom prst="rect">
-            <a:avLst/>
-          </a:prstGeom>
-          <a:solidFill>
-            <a:srgbClr val="EAF6F8"/>
-          </a:solidFill>
-          <a:ln w="12700">
-            <a:solidFill>
-              <a:srgbClr val="8ABBD8"/>
-            </a:solidFill>
-            <a:prstDash val="solid"/>
-          </a:ln>
-        </p:spPr>
-      </p:sp>
-      <p:sp>
-        <p:nvSpPr>
-          <p:cNvPr id="15" name="Shape 13"/>
-          <p:cNvSpPr/>
-          <p:nvPr/>
-        </p:nvSpPr>
-        <p:spPr>
-          <a:xfrm>
-            <a:off x="8202168" y="3721608"/>
-            <a:ext cx="2340864" cy="0"/>
-          </a:xfrm>
-          <a:prstGeom prst="line">
-            <a:avLst/>
-          </a:prstGeom>
-          <a:noFill/>
-          <a:ln w="19050">
-            <a:solidFill>
-              <a:srgbClr val="0068B7"/>
-            </a:solidFill>
-            <a:prstDash val="solid"/>
-          </a:ln>
-        </p:spPr>
+          <p:cNvPr id="14" name="Text 12"/>
+          <p:cNvSpPr/>
+          <p:nvPr/>
+        </p:nvSpPr>
+        <p:spPr>
+          <a:xfrm>
+            <a:off x="7799832" y="2935224"/>
+            <a:ext cx="3145536" cy="256032"/>
+          </a:xfrm>
+          <a:prstGeom prst="rect">
+            <a:avLst/>
+          </a:prstGeom>
+          <a:noFill/>
+          <a:ln/>
+        </p:spPr>
+        <p:txBody>
+          <a:bodyPr wrap="square" lIns="0" tIns="0" rIns="0" bIns="0" rtlCol="0" anchor="ctr"/>
+          <a:lstStyle/>
+          <a:p>
+            <a:pPr indent="0" marL="0">
+              <a:buNone/>
+            </a:pPr>
+            <a:r>
+              <a:rPr lang="en-US" sz="1300" b="1" dirty="0">
+                <a:solidFill>
+                  <a:srgbClr val="0068B7"/>
+                </a:solidFill>
+                <a:latin typeface="Aptos" pitchFamily="34" charset="0"/>
+                <a:ea typeface="Aptos" pitchFamily="34" charset="-122"/>
+                <a:cs typeface="Aptos" pitchFamily="34" charset="-120"/>
+              </a:rPr>
+              <a:t>Concept checkpoints</a:t>
+            </a:r>
+            <a:endParaRPr lang="en-US" sz="1300" dirty="0"/>
+          </a:p>
+        </p:txBody>
+      </p:sp>
+      <p:sp>
+        <p:nvSpPr>
+          <p:cNvPr id="15" name="Text 13"/>
+          <p:cNvSpPr/>
+          <p:nvPr/>
+        </p:nvSpPr>
+        <p:spPr>
+          <a:xfrm>
+            <a:off x="7818120" y="3300984"/>
+            <a:ext cx="3090672" cy="877824"/>
+          </a:xfrm>
+          <a:prstGeom prst="rect">
+            <a:avLst/>
+          </a:prstGeom>
+          <a:noFill/>
+          <a:ln/>
+        </p:spPr>
+        <p:txBody>
+          <a:bodyPr wrap="square" lIns="254" tIns="254" rIns="254" bIns="254" rtlCol="0" anchor="t">
+            <a:normAutofit/>
+          </a:bodyPr>
+          <a:lstStyle/>
+          <a:p>
+            <a:r>
+              <a:rPr lang="en-US" sz="1380" dirty="0">
+                <a:solidFill>
+                  <a:srgbClr val="17364A"/>
+                </a:solidFill>
+                <a:latin typeface="Aptos" pitchFamily="34" charset="0"/>
+                <a:ea typeface="Aptos" pitchFamily="34" charset="-122"/>
+                <a:cs typeface="Aptos" pitchFamily="34" charset="-120"/>
+              </a:rPr>
+              <a:t>A model with many false negatives may miss cases, outbreaks, or communities needing support.</a:t>
+            </a:r>
+            <a:endParaRPr lang="en-US" sz="1380" dirty="0"/>
+          </a:p>
+          <a:p>
+            <a:r>
+              <a:rPr lang="en-US" sz="1380" dirty="0">
+                <a:solidFill>
+                  <a:srgbClr val="17364A"/>
+                </a:solidFill>
+                <a:latin typeface="Aptos" pitchFamily="34" charset="0"/>
+                <a:ea typeface="Aptos" pitchFamily="34" charset="-122"/>
+                <a:cs typeface="Aptos" pitchFamily="34" charset="-120"/>
+              </a:rPr>
+              <a:t>Thresholds should be selected based on public health consequences, not only technical.</a:t>
+            </a:r>
+            <a:endParaRPr lang="en-US" sz="1380" dirty="0"/>
+          </a:p>
+          <a:p>
+            <a:r>
+              <a:rPr lang="en-US" sz="1380" dirty="0">
+                <a:solidFill>
+                  <a:srgbClr val="17364A"/>
+                </a:solidFill>
+                <a:latin typeface="Aptos" pitchFamily="34" charset="0"/>
+                <a:ea typeface="Aptos" pitchFamily="34" charset="-122"/>
+                <a:cs typeface="Aptos" pitchFamily="34" charset="-120"/>
+              </a:rPr>
+              <a:t>Human review should be designed into the workflow before deployment.</a:t>
+            </a:r>
+            <a:endParaRPr lang="en-US" sz="1380" dirty="0"/>
+          </a:p>
+        </p:txBody>
       </p:sp>
       <p:sp>
         <p:nvSpPr>
           <p:cNvPr id="16" name="Shape 14"/>
-          <p:cNvSpPr/>
-          <p:nvPr/>
-        </p:nvSpPr>
-        <p:spPr>
-          <a:xfrm>
-            <a:off x="9198864" y="4206240"/>
-            <a:ext cx="347472" cy="347472"/>
-          </a:xfrm>
-          <a:prstGeom prst="ellipse">
-            <a:avLst/>
-          </a:prstGeom>
-          <a:solidFill>
-            <a:srgbClr val="2F8A28"/>
-          </a:solidFill>
-          <a:ln w="12700">
-            <a:solidFill>
-              <a:srgbClr val="2F8A28"/>
-            </a:solidFill>
-            <a:prstDash val="solid"/>
-          </a:ln>
-        </p:spPr>
-      </p:sp>
-      <p:sp>
-        <p:nvSpPr>
-          <p:cNvPr id="17" name="Text 15"/>
-          <p:cNvSpPr/>
-          <p:nvPr/>
-        </p:nvSpPr>
-        <p:spPr>
-          <a:xfrm>
-            <a:off x="7909560" y="3977640"/>
-            <a:ext cx="2926080" cy="182880"/>
-          </a:xfrm>
-          <a:prstGeom prst="rect">
-            <a:avLst/>
-          </a:prstGeom>
-          <a:noFill/>
-          <a:ln/>
-        </p:spPr>
-        <p:txBody>
-          <a:bodyPr wrap="square" lIns="0" tIns="0" rIns="0" bIns="0" rtlCol="0" anchor="ctr"/>
-          <a:lstStyle/>
-          <a:p>
-            <a:pPr algn="ctr" indent="0" marL="0">
-              <a:buNone/>
-            </a:pPr>
-            <a:r>
-              <a:rPr lang="en-US" sz="1000" dirty="0">
-                <a:solidFill>
-                  <a:srgbClr val="003A63"/>
-                </a:solidFill>
-                <a:latin typeface="Aptos" pitchFamily="34" charset="0"/>
-                <a:ea typeface="Aptos" pitchFamily="34" charset="-122"/>
-                <a:cs typeface="Aptos" pitchFamily="34" charset="-120"/>
-              </a:rPr>
-              <a:t>Concept to action</a:t>
-            </a:r>
-            <a:endParaRPr lang="en-US" sz="1000" dirty="0"/>
-          </a:p>
-        </p:txBody>
-      </p:sp>
-      <p:sp>
-        <p:nvSpPr>
-          <p:cNvPr id="18" name="Shape 16"/>
           <p:cNvSpPr/>
           <p:nvPr/>
         </p:nvSpPr>
@@ -4378,7 +4360,7 @@
       </p:sp>
       <p:sp>
         <p:nvSpPr>
-          <p:cNvPr id="19" name="Text 17"/>
+          <p:cNvPr id="17" name="Text 15"/>
           <p:cNvSpPr/>
           <p:nvPr/>
         </p:nvSpPr>
@@ -4417,7 +4399,7 @@
       </p:sp>
       <p:sp>
         <p:nvSpPr>
-          <p:cNvPr id="20" name="Text 18"/>
+          <p:cNvPr id="18" name="Text 16"/>
           <p:cNvSpPr/>
           <p:nvPr/>
         </p:nvSpPr>
@@ -4925,13 +4907,11 @@
             </a:avLst>
           </a:prstGeom>
           <a:solidFill>
-            <a:srgbClr val="FFFFFF">
-              <a:alpha val="88000"/>
-            </a:srgbClr>
+            <a:srgbClr val="FFFFFF"/>
           </a:solidFill>
           <a:ln w="12700">
             <a:solidFill>
-              <a:srgbClr val="D6E8F2"/>
+              <a:srgbClr val="B9D7E6"/>
             </a:solidFill>
             <a:prstDash val="solid"/>
           </a:ln>
@@ -4939,26 +4919,42 @@
       </p:sp>
       <p:sp>
         <p:nvSpPr>
-          <p:cNvPr id="14" name="Shape 12"/>
-          <p:cNvSpPr/>
-          <p:nvPr/>
-        </p:nvSpPr>
-        <p:spPr>
-          <a:xfrm>
-            <a:off x="8046720" y="3108960"/>
-            <a:ext cx="2651760" cy="896112"/>
-          </a:xfrm>
-          <a:prstGeom prst="arc">
-            <a:avLst/>
-          </a:prstGeom>
-          <a:noFill/>
-          <a:ln w="25400">
-            <a:solidFill>
-              <a:srgbClr val="0068B7"/>
-            </a:solidFill>
-            <a:prstDash val="solid"/>
-          </a:ln>
-        </p:spPr>
+          <p:cNvPr id="14" name="Text 12"/>
+          <p:cNvSpPr/>
+          <p:nvPr/>
+        </p:nvSpPr>
+        <p:spPr>
+          <a:xfrm>
+            <a:off x="7799832" y="2935224"/>
+            <a:ext cx="3145536" cy="256032"/>
+          </a:xfrm>
+          <a:prstGeom prst="rect">
+            <a:avLst/>
+          </a:prstGeom>
+          <a:noFill/>
+          <a:ln/>
+        </p:spPr>
+        <p:txBody>
+          <a:bodyPr wrap="square" lIns="0" tIns="0" rIns="0" bIns="0" rtlCol="0" anchor="ctr"/>
+          <a:lstStyle/>
+          <a:p>
+            <a:pPr indent="0" marL="0">
+              <a:buNone/>
+            </a:pPr>
+            <a:r>
+              <a:rPr lang="en-US" sz="1300" b="1" dirty="0">
+                <a:solidFill>
+                  <a:srgbClr val="0068B7"/>
+                </a:solidFill>
+                <a:latin typeface="Aptos" pitchFamily="34" charset="0"/>
+                <a:ea typeface="Aptos" pitchFamily="34" charset="-122"/>
+                <a:cs typeface="Aptos" pitchFamily="34" charset="-120"/>
+              </a:rPr>
+              <a:t>Concept checkpoints</a:t>
+            </a:r>
+            <a:endParaRPr lang="en-US" sz="1300" dirty="0"/>
+          </a:p>
+        </p:txBody>
       </p:sp>
       <p:sp>
         <p:nvSpPr>
@@ -4968,102 +4964,67 @@
         </p:nvSpPr>
         <p:spPr>
           <a:xfrm>
-            <a:off x="7909560" y="3099816"/>
-            <a:ext cx="2926080" cy="256032"/>
-          </a:xfrm>
-          <a:prstGeom prst="rect">
-            <a:avLst/>
-          </a:prstGeom>
-          <a:noFill/>
-          <a:ln/>
-        </p:spPr>
-        <p:txBody>
-          <a:bodyPr wrap="square" lIns="0" tIns="0" rIns="0" bIns="0" rtlCol="0" anchor="ctr"/>
-          <a:lstStyle/>
-          <a:p>
-            <a:pPr algn="ctr" indent="0" marL="0">
-              <a:buNone/>
-            </a:pPr>
-            <a:r>
-              <a:rPr lang="en-US" sz="1500" b="1" dirty="0">
-                <a:solidFill>
-                  <a:srgbClr val="003A63"/>
-                </a:solidFill>
-                <a:latin typeface="Aptos" pitchFamily="34" charset="0"/>
-                <a:ea typeface="Aptos" pitchFamily="34" charset="-122"/>
-                <a:cs typeface="Aptos" pitchFamily="34" charset="-120"/>
-              </a:rPr>
-              <a:t>Risk</a:t>
-            </a:r>
-            <a:endParaRPr lang="en-US" sz="1500" dirty="0"/>
+            <a:off x="7818120" y="3300984"/>
+            <a:ext cx="3090672" cy="877824"/>
+          </a:xfrm>
+          <a:prstGeom prst="rect">
+            <a:avLst/>
+          </a:prstGeom>
+          <a:noFill/>
+          <a:ln/>
+        </p:spPr>
+        <p:txBody>
+          <a:bodyPr wrap="square" lIns="254" tIns="254" rIns="254" bIns="254" rtlCol="0" anchor="t">
+            <a:normAutofit/>
+          </a:bodyPr>
+          <a:lstStyle/>
+          <a:p>
+            <a:r>
+              <a:rPr lang="en-US" sz="1380" dirty="0">
+                <a:solidFill>
+                  <a:srgbClr val="17364A"/>
+                </a:solidFill>
+                <a:latin typeface="Aptos" pitchFamily="34" charset="0"/>
+                <a:ea typeface="Aptos" pitchFamily="34" charset="-122"/>
+                <a:cs typeface="Aptos" pitchFamily="34" charset="-120"/>
+              </a:rPr>
+              <a:t>If historical labels reflect unequal detection, inconsistent review, or limited resources,.</a:t>
+            </a:r>
+            <a:endParaRPr lang="en-US" sz="1380" dirty="0"/>
+          </a:p>
+          <a:p>
+            <a:r>
+              <a:rPr lang="en-US" sz="1380" dirty="0">
+                <a:solidFill>
+                  <a:srgbClr val="17364A"/>
+                </a:solidFill>
+                <a:latin typeface="Aptos" pitchFamily="34" charset="0"/>
+                <a:ea typeface="Aptos" pitchFamily="34" charset="-122"/>
+                <a:cs typeface="Aptos" pitchFamily="34" charset="-120"/>
+              </a:rPr>
+              <a:t>Guardrails include label audits, expert review, subgroup analysis, and documentation of.</a:t>
+            </a:r>
+            <a:endParaRPr lang="en-US" sz="1380" dirty="0"/>
+          </a:p>
+          <a:p>
+            <a:r>
+              <a:rPr lang="en-US" sz="1380" dirty="0">
+                <a:solidFill>
+                  <a:srgbClr val="17364A"/>
+                </a:solidFill>
+                <a:latin typeface="Aptos" pitchFamily="34" charset="0"/>
+                <a:ea typeface="Aptos" pitchFamily="34" charset="-122"/>
+                <a:cs typeface="Aptos" pitchFamily="34" charset="-120"/>
+              </a:rPr>
+              <a:t>Data leakage.</a:t>
+            </a:r>
+            <a:endParaRPr lang="en-US" sz="1380" dirty="0"/>
           </a:p>
         </p:txBody>
       </p:sp>
       <p:sp>
         <p:nvSpPr>
           <p:cNvPr id="16" name="Shape 14"/>
-          <p:cNvSpPr/>
-          <p:nvPr/>
-        </p:nvSpPr>
-        <p:spPr>
-          <a:xfrm>
-            <a:off x="8366760" y="3639312"/>
-            <a:ext cx="2011680" cy="0"/>
-          </a:xfrm>
-          <a:prstGeom prst="line">
-            <a:avLst/>
-          </a:prstGeom>
-          <a:noFill/>
-          <a:ln w="63500">
-            <a:solidFill>
-              <a:srgbClr val="2F8A28"/>
-            </a:solidFill>
-            <a:prstDash val="solid"/>
-          </a:ln>
-        </p:spPr>
-      </p:sp>
-      <p:sp>
-        <p:nvSpPr>
-          <p:cNvPr id="17" name="Text 15"/>
-          <p:cNvSpPr/>
-          <p:nvPr/>
-        </p:nvSpPr>
-        <p:spPr>
-          <a:xfrm>
-            <a:off x="7909560" y="3849624"/>
-            <a:ext cx="2926080" cy="164592"/>
-          </a:xfrm>
-          <a:prstGeom prst="rect">
-            <a:avLst/>
-          </a:prstGeom>
-          <a:noFill/>
-          <a:ln/>
-        </p:spPr>
-        <p:txBody>
-          <a:bodyPr wrap="square" lIns="0" tIns="0" rIns="0" bIns="0" rtlCol="0" anchor="ctr"/>
-          <a:lstStyle/>
-          <a:p>
-            <a:pPr algn="ctr" indent="0" marL="0">
-              <a:buNone/>
-            </a:pPr>
-            <a:r>
-              <a:rPr lang="en-US" sz="900" dirty="0">
-                <a:solidFill>
-                  <a:srgbClr val="003A63"/>
-                </a:solidFill>
-                <a:latin typeface="Aptos" pitchFamily="34" charset="0"/>
-                <a:ea typeface="Aptos" pitchFamily="34" charset="-122"/>
-                <a:cs typeface="Aptos" pitchFamily="34" charset="-120"/>
-              </a:rPr>
-              <a:t>Human review</a:t>
-            </a:r>
-            <a:endParaRPr lang="en-US" sz="900" dirty="0"/>
-          </a:p>
-        </p:txBody>
-      </p:sp>
-      <p:sp>
-        <p:nvSpPr>
-          <p:cNvPr id="18" name="Shape 16"/>
           <p:cNvSpPr/>
           <p:nvPr/>
         </p:nvSpPr>
@@ -5090,7 +5051,7 @@
       </p:sp>
       <p:sp>
         <p:nvSpPr>
-          <p:cNvPr id="19" name="Text 17"/>
+          <p:cNvPr id="17" name="Text 15"/>
           <p:cNvSpPr/>
           <p:nvPr/>
         </p:nvSpPr>
@@ -5129,7 +5090,7 @@
       </p:sp>
       <p:sp>
         <p:nvSpPr>
-          <p:cNvPr id="20" name="Text 18"/>
+          <p:cNvPr id="18" name="Text 16"/>
           <p:cNvSpPr/>
           <p:nvPr/>
         </p:nvSpPr>
@@ -5637,13 +5598,11 @@
             </a:avLst>
           </a:prstGeom>
           <a:solidFill>
-            <a:srgbClr val="FFFFFF">
-              <a:alpha val="88000"/>
-            </a:srgbClr>
+            <a:srgbClr val="FFFFFF"/>
           </a:solidFill>
           <a:ln w="12700">
             <a:solidFill>
-              <a:srgbClr val="D6E8F2"/>
+              <a:srgbClr val="B9D7E6"/>
             </a:solidFill>
             <a:prstDash val="solid"/>
           </a:ln>
@@ -5651,26 +5610,42 @@
       </p:sp>
       <p:sp>
         <p:nvSpPr>
-          <p:cNvPr id="14" name="Shape 12"/>
-          <p:cNvSpPr/>
-          <p:nvPr/>
-        </p:nvSpPr>
-        <p:spPr>
-          <a:xfrm>
-            <a:off x="8046720" y="3108960"/>
-            <a:ext cx="2651760" cy="896112"/>
-          </a:xfrm>
-          <a:prstGeom prst="arc">
-            <a:avLst/>
-          </a:prstGeom>
-          <a:noFill/>
-          <a:ln w="25400">
-            <a:solidFill>
-              <a:srgbClr val="0068B7"/>
-            </a:solidFill>
-            <a:prstDash val="solid"/>
-          </a:ln>
-        </p:spPr>
+          <p:cNvPr id="14" name="Text 12"/>
+          <p:cNvSpPr/>
+          <p:nvPr/>
+        </p:nvSpPr>
+        <p:spPr>
+          <a:xfrm>
+            <a:off x="7799832" y="2935224"/>
+            <a:ext cx="3145536" cy="256032"/>
+          </a:xfrm>
+          <a:prstGeom prst="rect">
+            <a:avLst/>
+          </a:prstGeom>
+          <a:noFill/>
+          <a:ln/>
+        </p:spPr>
+        <p:txBody>
+          <a:bodyPr wrap="square" lIns="0" tIns="0" rIns="0" bIns="0" rtlCol="0" anchor="ctr"/>
+          <a:lstStyle/>
+          <a:p>
+            <a:pPr indent="0" marL="0">
+              <a:buNone/>
+            </a:pPr>
+            <a:r>
+              <a:rPr lang="en-US" sz="1300" b="1" dirty="0">
+                <a:solidFill>
+                  <a:srgbClr val="0068B7"/>
+                </a:solidFill>
+                <a:latin typeface="Aptos" pitchFamily="34" charset="0"/>
+                <a:ea typeface="Aptos" pitchFamily="34" charset="-122"/>
+                <a:cs typeface="Aptos" pitchFamily="34" charset="-120"/>
+              </a:rPr>
+              <a:t>Concept checkpoints</a:t>
+            </a:r>
+            <a:endParaRPr lang="en-US" sz="1300" dirty="0"/>
+          </a:p>
+        </p:txBody>
       </p:sp>
       <p:sp>
         <p:nvSpPr>
@@ -5680,102 +5655,67 @@
         </p:nvSpPr>
         <p:spPr>
           <a:xfrm>
-            <a:off x="7909560" y="3099816"/>
-            <a:ext cx="2926080" cy="256032"/>
-          </a:xfrm>
-          <a:prstGeom prst="rect">
-            <a:avLst/>
-          </a:prstGeom>
-          <a:noFill/>
-          <a:ln/>
-        </p:spPr>
-        <p:txBody>
-          <a:bodyPr wrap="square" lIns="0" tIns="0" rIns="0" bIns="0" rtlCol="0" anchor="ctr"/>
-          <a:lstStyle/>
-          <a:p>
-            <a:pPr algn="ctr" indent="0" marL="0">
-              <a:buNone/>
-            </a:pPr>
-            <a:r>
-              <a:rPr lang="en-US" sz="1500" b="1" dirty="0">
-                <a:solidFill>
-                  <a:srgbClr val="003A63"/>
-                </a:solidFill>
-                <a:latin typeface="Aptos" pitchFamily="34" charset="0"/>
-                <a:ea typeface="Aptos" pitchFamily="34" charset="-122"/>
-                <a:cs typeface="Aptos" pitchFamily="34" charset="-120"/>
-              </a:rPr>
-              <a:t>Risk</a:t>
-            </a:r>
-            <a:endParaRPr lang="en-US" sz="1500" dirty="0"/>
+            <a:off x="7818120" y="3300984"/>
+            <a:ext cx="3090672" cy="877824"/>
+          </a:xfrm>
+          <a:prstGeom prst="rect">
+            <a:avLst/>
+          </a:prstGeom>
+          <a:noFill/>
+          <a:ln/>
+        </p:spPr>
+        <p:txBody>
+          <a:bodyPr wrap="square" lIns="254" tIns="254" rIns="254" bIns="254" rtlCol="0" anchor="t">
+            <a:normAutofit/>
+          </a:bodyPr>
+          <a:lstStyle/>
+          <a:p>
+            <a:r>
+              <a:rPr lang="en-US" sz="1380" dirty="0">
+                <a:solidFill>
+                  <a:srgbClr val="17364A"/>
+                </a:solidFill>
+                <a:latin typeface="Aptos" pitchFamily="34" charset="0"/>
+                <a:ea typeface="Aptos" pitchFamily="34" charset="-122"/>
+                <a:cs typeface="Aptos" pitchFamily="34" charset="-120"/>
+              </a:rPr>
+              <a:t>Misuse of prediction as explanation.</a:t>
+            </a:r>
+            <a:endParaRPr lang="en-US" sz="1380" dirty="0"/>
+          </a:p>
+          <a:p>
+            <a:r>
+              <a:rPr lang="en-US" sz="1380" dirty="0">
+                <a:solidFill>
+                  <a:srgbClr val="17364A"/>
+                </a:solidFill>
+                <a:latin typeface="Aptos" pitchFamily="34" charset="0"/>
+                <a:ea typeface="Aptos" pitchFamily="34" charset="-122"/>
+                <a:cs typeface="Aptos" pitchFamily="34" charset="-120"/>
+              </a:rPr>
+              <a:t>A model can predict risk without explaining cause.</a:t>
+            </a:r>
+            <a:endParaRPr lang="en-US" sz="1380" dirty="0"/>
+          </a:p>
+          <a:p>
+            <a:r>
+              <a:rPr lang="en-US" sz="1380" dirty="0">
+                <a:solidFill>
+                  <a:srgbClr val="17364A"/>
+                </a:solidFill>
+                <a:latin typeface="Aptos" pitchFamily="34" charset="0"/>
+                <a:ea typeface="Aptos" pitchFamily="34" charset="-122"/>
+                <a:cs typeface="Aptos" pitchFamily="34" charset="-120"/>
+              </a:rPr>
+              <a:t>Guardrails include clear communication, training, and restrictions against causal claims.</a:t>
+            </a:r>
+            <a:endParaRPr lang="en-US" sz="1380" dirty="0"/>
           </a:p>
         </p:txBody>
       </p:sp>
       <p:sp>
         <p:nvSpPr>
           <p:cNvPr id="16" name="Shape 14"/>
-          <p:cNvSpPr/>
-          <p:nvPr/>
-        </p:nvSpPr>
-        <p:spPr>
-          <a:xfrm>
-            <a:off x="8366760" y="3639312"/>
-            <a:ext cx="2011680" cy="0"/>
-          </a:xfrm>
-          <a:prstGeom prst="line">
-            <a:avLst/>
-          </a:prstGeom>
-          <a:noFill/>
-          <a:ln w="63500">
-            <a:solidFill>
-              <a:srgbClr val="2F8A28"/>
-            </a:solidFill>
-            <a:prstDash val="solid"/>
-          </a:ln>
-        </p:spPr>
-      </p:sp>
-      <p:sp>
-        <p:nvSpPr>
-          <p:cNvPr id="17" name="Text 15"/>
-          <p:cNvSpPr/>
-          <p:nvPr/>
-        </p:nvSpPr>
-        <p:spPr>
-          <a:xfrm>
-            <a:off x="7909560" y="3849624"/>
-            <a:ext cx="2926080" cy="164592"/>
-          </a:xfrm>
-          <a:prstGeom prst="rect">
-            <a:avLst/>
-          </a:prstGeom>
-          <a:noFill/>
-          <a:ln/>
-        </p:spPr>
-        <p:txBody>
-          <a:bodyPr wrap="square" lIns="0" tIns="0" rIns="0" bIns="0" rtlCol="0" anchor="ctr"/>
-          <a:lstStyle/>
-          <a:p>
-            <a:pPr algn="ctr" indent="0" marL="0">
-              <a:buNone/>
-            </a:pPr>
-            <a:r>
-              <a:rPr lang="en-US" sz="900" dirty="0">
-                <a:solidFill>
-                  <a:srgbClr val="003A63"/>
-                </a:solidFill>
-                <a:latin typeface="Aptos" pitchFamily="34" charset="0"/>
-                <a:ea typeface="Aptos" pitchFamily="34" charset="-122"/>
-                <a:cs typeface="Aptos" pitchFamily="34" charset="-120"/>
-              </a:rPr>
-              <a:t>Human review</a:t>
-            </a:r>
-            <a:endParaRPr lang="en-US" sz="900" dirty="0"/>
-          </a:p>
-        </p:txBody>
-      </p:sp>
-      <p:sp>
-        <p:nvSpPr>
-          <p:cNvPr id="18" name="Shape 16"/>
           <p:cNvSpPr/>
           <p:nvPr/>
         </p:nvSpPr>
@@ -5802,7 +5742,7 @@
       </p:sp>
       <p:sp>
         <p:nvSpPr>
-          <p:cNvPr id="19" name="Text 17"/>
+          <p:cNvPr id="17" name="Text 15"/>
           <p:cNvSpPr/>
           <p:nvPr/>
         </p:nvSpPr>
@@ -5841,7 +5781,7 @@
       </p:sp>
       <p:sp>
         <p:nvSpPr>
-          <p:cNvPr id="20" name="Text 18"/>
+          <p:cNvPr id="18" name="Text 16"/>
           <p:cNvSpPr/>
           <p:nvPr/>
         </p:nvSpPr>
@@ -6349,13 +6289,11 @@
             </a:avLst>
           </a:prstGeom>
           <a:solidFill>
-            <a:srgbClr val="FFFFFF">
-              <a:alpha val="88000"/>
-            </a:srgbClr>
+            <a:srgbClr val="FFFFFF"/>
           </a:solidFill>
           <a:ln w="12700">
             <a:solidFill>
-              <a:srgbClr val="D6E8F2"/>
+              <a:srgbClr val="B9D7E6"/>
             </a:solidFill>
             <a:prstDash val="solid"/>
           </a:ln>
@@ -6363,30 +6301,42 @@
       </p:sp>
       <p:sp>
         <p:nvSpPr>
-          <p:cNvPr id="14" name="Shape 12"/>
-          <p:cNvSpPr/>
-          <p:nvPr/>
-        </p:nvSpPr>
-        <p:spPr>
-          <a:xfrm>
-            <a:off x="7927848" y="3319272"/>
-            <a:ext cx="792480" cy="749808"/>
-          </a:xfrm>
-          <a:prstGeom prst="roundRect">
-            <a:avLst>
-              <a:gd name="adj" fmla="val 14634"/>
-            </a:avLst>
-          </a:prstGeom>
-          <a:solidFill>
-            <a:srgbClr val="0068B7"/>
-          </a:solidFill>
-          <a:ln w="12700">
-            <a:solidFill>
-              <a:srgbClr val="0068B7"/>
-            </a:solidFill>
-            <a:prstDash val="solid"/>
-          </a:ln>
-        </p:spPr>
+          <p:cNvPr id="14" name="Text 12"/>
+          <p:cNvSpPr/>
+          <p:nvPr/>
+        </p:nvSpPr>
+        <p:spPr>
+          <a:xfrm>
+            <a:off x="7799832" y="2935224"/>
+            <a:ext cx="3145536" cy="256032"/>
+          </a:xfrm>
+          <a:prstGeom prst="rect">
+            <a:avLst/>
+          </a:prstGeom>
+          <a:noFill/>
+          <a:ln/>
+        </p:spPr>
+        <p:txBody>
+          <a:bodyPr wrap="square" lIns="0" tIns="0" rIns="0" bIns="0" rtlCol="0" anchor="ctr"/>
+          <a:lstStyle/>
+          <a:p>
+            <a:pPr indent="0" marL="0">
+              <a:buNone/>
+            </a:pPr>
+            <a:r>
+              <a:rPr lang="en-US" sz="1300" b="1" dirty="0">
+                <a:solidFill>
+                  <a:srgbClr val="0068B7"/>
+                </a:solidFill>
+                <a:latin typeface="Aptos" pitchFamily="34" charset="0"/>
+                <a:ea typeface="Aptos" pitchFamily="34" charset="-122"/>
+                <a:cs typeface="Aptos" pitchFamily="34" charset="-120"/>
+              </a:rPr>
+              <a:t>Concept checkpoints</a:t>
+            </a:r>
+            <a:endParaRPr lang="en-US" sz="1300" dirty="0"/>
+          </a:p>
+        </p:txBody>
       </p:sp>
       <p:sp>
         <p:nvSpPr>
@@ -6396,240 +6346,67 @@
         </p:nvSpPr>
         <p:spPr>
           <a:xfrm>
-            <a:off x="8001000" y="3511296"/>
-            <a:ext cx="646176" cy="310896"/>
-          </a:xfrm>
-          <a:prstGeom prst="rect">
-            <a:avLst/>
-          </a:prstGeom>
-          <a:noFill/>
-          <a:ln/>
-        </p:spPr>
-        <p:txBody>
-          <a:bodyPr wrap="square" lIns="0" tIns="0" rIns="0" bIns="0" rtlCol="0" anchor="ctr">
+            <a:off x="7818120" y="3300984"/>
+            <a:ext cx="3090672" cy="877824"/>
+          </a:xfrm>
+          <a:prstGeom prst="rect">
+            <a:avLst/>
+          </a:prstGeom>
+          <a:noFill/>
+          <a:ln/>
+        </p:spPr>
+        <p:txBody>
+          <a:bodyPr wrap="square" lIns="254" tIns="254" rIns="254" bIns="254" rtlCol="0" anchor="t">
             <a:normAutofit/>
           </a:bodyPr>
           <a:lstStyle/>
           <a:p>
-            <a:pPr algn="ctr" indent="0" marL="0">
-              <a:buNone/>
-            </a:pPr>
-            <a:r>
-              <a:rPr lang="en-US" sz="1500" b="1" dirty="0">
-                <a:solidFill>
-                  <a:srgbClr val="FFFFFF"/>
-                </a:solidFill>
-                <a:latin typeface="Aptos" pitchFamily="34" charset="0"/>
-                <a:ea typeface="Aptos" pitchFamily="34" charset="-122"/>
-                <a:cs typeface="Aptos" pitchFamily="34" charset="-120"/>
-              </a:rPr>
-              <a:t>Plan</a:t>
-            </a:r>
-            <a:endParaRPr lang="en-US" sz="1500" dirty="0"/>
+            <a:r>
+              <a:rPr lang="en-US" sz="1380" dirty="0">
+                <a:solidFill>
+                  <a:srgbClr val="17364A"/>
+                </a:solidFill>
+                <a:latin typeface="Aptos" pitchFamily="34" charset="0"/>
+                <a:ea typeface="Aptos" pitchFamily="34" charset="-122"/>
+                <a:cs typeface="Aptos" pitchFamily="34" charset="-120"/>
+              </a:rPr>
+              <a:t>Machine learning may support generative AI, predictive analytics, NLP, anomaly detection,.</a:t>
+            </a:r>
+            <a:endParaRPr lang="en-US" sz="1380" dirty="0"/>
+          </a:p>
+          <a:p>
+            <a:r>
+              <a:rPr lang="en-US" sz="1380" dirty="0">
+                <a:solidFill>
+                  <a:srgbClr val="17364A"/>
+                </a:solidFill>
+                <a:latin typeface="Aptos" pitchFamily="34" charset="0"/>
+                <a:ea typeface="Aptos" pitchFamily="34" charset="-122"/>
+                <a:cs typeface="Aptos" pitchFamily="34" charset="-120"/>
+              </a:rPr>
+              <a:t>In generative AI systems, machine learning concepts help staff understand why outputs may.</a:t>
+            </a:r>
+            <a:endParaRPr lang="en-US" sz="1380" dirty="0"/>
+          </a:p>
+          <a:p>
+            <a:r>
+              <a:rPr lang="en-US" sz="1380" dirty="0">
+                <a:solidFill>
+                  <a:srgbClr val="17364A"/>
+                </a:solidFill>
+                <a:latin typeface="Aptos" pitchFamily="34" charset="0"/>
+                <a:ea typeface="Aptos" pitchFamily="34" charset="-122"/>
+                <a:cs typeface="Aptos" pitchFamily="34" charset="-120"/>
+              </a:rPr>
+              <a:t>In predictive workflows, machine learning literacy helps staff evaluate risk scores,.</a:t>
+            </a:r>
+            <a:endParaRPr lang="en-US" sz="1380" dirty="0"/>
           </a:p>
         </p:txBody>
       </p:sp>
       <p:sp>
         <p:nvSpPr>
           <p:cNvPr id="16" name="Shape 14"/>
-          <p:cNvSpPr/>
-          <p:nvPr/>
-        </p:nvSpPr>
-        <p:spPr>
-          <a:xfrm>
-            <a:off x="8976360" y="3319272"/>
-            <a:ext cx="792480" cy="749808"/>
-          </a:xfrm>
-          <a:prstGeom prst="roundRect">
-            <a:avLst>
-              <a:gd name="adj" fmla="val 14634"/>
-            </a:avLst>
-          </a:prstGeom>
-          <a:solidFill>
-            <a:srgbClr val="2F8A28"/>
-          </a:solidFill>
-          <a:ln w="12700">
-            <a:solidFill>
-              <a:srgbClr val="2F8A28"/>
-            </a:solidFill>
-            <a:prstDash val="solid"/>
-          </a:ln>
-        </p:spPr>
-      </p:sp>
-      <p:sp>
-        <p:nvSpPr>
-          <p:cNvPr id="17" name="Text 15"/>
-          <p:cNvSpPr/>
-          <p:nvPr/>
-        </p:nvSpPr>
-        <p:spPr>
-          <a:xfrm>
-            <a:off x="9049512" y="3511296"/>
-            <a:ext cx="646176" cy="310896"/>
-          </a:xfrm>
-          <a:prstGeom prst="rect">
-            <a:avLst/>
-          </a:prstGeom>
-          <a:noFill/>
-          <a:ln/>
-        </p:spPr>
-        <p:txBody>
-          <a:bodyPr wrap="square" lIns="0" tIns="0" rIns="0" bIns="0" rtlCol="0" anchor="ctr">
-            <a:normAutofit/>
-          </a:bodyPr>
-          <a:lstStyle/>
-          <a:p>
-            <a:pPr algn="ctr" indent="0" marL="0">
-              <a:buNone/>
-            </a:pPr>
-            <a:r>
-              <a:rPr lang="en-US" sz="1500" b="1" dirty="0">
-                <a:solidFill>
-                  <a:srgbClr val="FFFFFF"/>
-                </a:solidFill>
-                <a:latin typeface="Aptos" pitchFamily="34" charset="0"/>
-                <a:ea typeface="Aptos" pitchFamily="34" charset="-122"/>
-                <a:cs typeface="Aptos" pitchFamily="34" charset="-120"/>
-              </a:rPr>
-              <a:t>Do</a:t>
-            </a:r>
-            <a:endParaRPr lang="en-US" sz="1500" dirty="0"/>
-          </a:p>
-        </p:txBody>
-      </p:sp>
-      <p:sp>
-        <p:nvSpPr>
-          <p:cNvPr id="18" name="Shape 16"/>
-          <p:cNvSpPr/>
-          <p:nvPr/>
-        </p:nvSpPr>
-        <p:spPr>
-          <a:xfrm>
-            <a:off x="10024872" y="3319272"/>
-            <a:ext cx="792480" cy="749808"/>
-          </a:xfrm>
-          <a:prstGeom prst="roundRect">
-            <a:avLst>
-              <a:gd name="adj" fmla="val 14634"/>
-            </a:avLst>
-          </a:prstGeom>
-          <a:solidFill>
-            <a:srgbClr val="D69A2D"/>
-          </a:solidFill>
-          <a:ln w="12700">
-            <a:solidFill>
-              <a:srgbClr val="D69A2D"/>
-            </a:solidFill>
-            <a:prstDash val="solid"/>
-          </a:ln>
-        </p:spPr>
-      </p:sp>
-      <p:sp>
-        <p:nvSpPr>
-          <p:cNvPr id="19" name="Text 17"/>
-          <p:cNvSpPr/>
-          <p:nvPr/>
-        </p:nvSpPr>
-        <p:spPr>
-          <a:xfrm>
-            <a:off x="10098024" y="3511296"/>
-            <a:ext cx="646176" cy="310896"/>
-          </a:xfrm>
-          <a:prstGeom prst="rect">
-            <a:avLst/>
-          </a:prstGeom>
-          <a:noFill/>
-          <a:ln/>
-        </p:spPr>
-        <p:txBody>
-          <a:bodyPr wrap="square" lIns="0" tIns="0" rIns="0" bIns="0" rtlCol="0" anchor="ctr">
-            <a:normAutofit/>
-          </a:bodyPr>
-          <a:lstStyle/>
-          <a:p>
-            <a:pPr algn="ctr" indent="0" marL="0">
-              <a:buNone/>
-            </a:pPr>
-            <a:r>
-              <a:rPr lang="en-US" sz="1500" b="1" dirty="0">
-                <a:solidFill>
-                  <a:srgbClr val="FFFFFF"/>
-                </a:solidFill>
-                <a:latin typeface="Aptos" pitchFamily="34" charset="0"/>
-                <a:ea typeface="Aptos" pitchFamily="34" charset="-122"/>
-                <a:cs typeface="Aptos" pitchFamily="34" charset="-120"/>
-              </a:rPr>
-              <a:t>Review</a:t>
-            </a:r>
-            <a:endParaRPr lang="en-US" sz="1500" dirty="0"/>
-          </a:p>
-        </p:txBody>
-      </p:sp>
-      <p:sp>
-        <p:nvSpPr>
-          <p:cNvPr id="20" name="Shape 18"/>
-          <p:cNvSpPr/>
-          <p:nvPr/>
-        </p:nvSpPr>
-        <p:spPr>
-          <a:xfrm>
-            <a:off x="8293608" y="4389120"/>
-            <a:ext cx="2157984" cy="0"/>
-          </a:xfrm>
-          <a:prstGeom prst="line">
-            <a:avLst/>
-          </a:prstGeom>
-          <a:noFill/>
-          <a:ln w="25400">
-            <a:solidFill>
-              <a:srgbClr val="8ABBD8"/>
-            </a:solidFill>
-            <a:prstDash val="solid"/>
-          </a:ln>
-        </p:spPr>
-      </p:sp>
-      <p:sp>
-        <p:nvSpPr>
-          <p:cNvPr id="21" name="Text 19"/>
-          <p:cNvSpPr/>
-          <p:nvPr/>
-        </p:nvSpPr>
-        <p:spPr>
-          <a:xfrm>
-            <a:off x="7909560" y="3977640"/>
-            <a:ext cx="2926080" cy="182880"/>
-          </a:xfrm>
-          <a:prstGeom prst="rect">
-            <a:avLst/>
-          </a:prstGeom>
-          <a:noFill/>
-          <a:ln/>
-        </p:spPr>
-        <p:txBody>
-          <a:bodyPr wrap="square" lIns="0" tIns="0" rIns="0" bIns="0" rtlCol="0" anchor="ctr"/>
-          <a:lstStyle/>
-          <a:p>
-            <a:pPr algn="ctr" indent="0" marL="0">
-              <a:buNone/>
-            </a:pPr>
-            <a:r>
-              <a:rPr lang="en-US" sz="1000" dirty="0">
-                <a:solidFill>
-                  <a:srgbClr val="003A63"/>
-                </a:solidFill>
-                <a:latin typeface="Aptos" pitchFamily="34" charset="0"/>
-                <a:ea typeface="Aptos" pitchFamily="34" charset="-122"/>
-                <a:cs typeface="Aptos" pitchFamily="34" charset="-120"/>
-              </a:rPr>
-              <a:t>Dependencies visible</a:t>
-            </a:r>
-            <a:endParaRPr lang="en-US" sz="1000" dirty="0"/>
-          </a:p>
-        </p:txBody>
-      </p:sp>
-      <p:sp>
-        <p:nvSpPr>
-          <p:cNvPr id="22" name="Shape 20"/>
           <p:cNvSpPr/>
           <p:nvPr/>
         </p:nvSpPr>
@@ -6656,7 +6433,7 @@
       </p:sp>
       <p:sp>
         <p:nvSpPr>
-          <p:cNvPr id="23" name="Text 21"/>
+          <p:cNvPr id="17" name="Text 15"/>
           <p:cNvSpPr/>
           <p:nvPr/>
         </p:nvSpPr>
@@ -6695,7 +6472,7 @@
       </p:sp>
       <p:sp>
         <p:nvSpPr>
-          <p:cNvPr id="24" name="Text 22"/>
+          <p:cNvPr id="18" name="Text 16"/>
           <p:cNvSpPr/>
           <p:nvPr/>
         </p:nvSpPr>
@@ -7203,13 +6980,11 @@
             </a:avLst>
           </a:prstGeom>
           <a:solidFill>
-            <a:srgbClr val="FFFFFF">
-              <a:alpha val="88000"/>
-            </a:srgbClr>
+            <a:srgbClr val="FFFFFF"/>
           </a:solidFill>
           <a:ln w="12700">
             <a:solidFill>
-              <a:srgbClr val="D6E8F2"/>
+              <a:srgbClr val="B9D7E6"/>
             </a:solidFill>
             <a:prstDash val="solid"/>
           </a:ln>
@@ -7217,119 +6992,112 @@
       </p:sp>
       <p:sp>
         <p:nvSpPr>
-          <p:cNvPr id="14" name="Shape 12"/>
-          <p:cNvSpPr/>
-          <p:nvPr/>
-        </p:nvSpPr>
-        <p:spPr>
-          <a:xfrm>
-            <a:off x="8074152" y="3291840"/>
-            <a:ext cx="2596896" cy="749808"/>
-          </a:xfrm>
-          <a:prstGeom prst="rect">
-            <a:avLst/>
-          </a:prstGeom>
-          <a:solidFill>
-            <a:srgbClr val="EAF6F8"/>
-          </a:solidFill>
-          <a:ln w="12700">
-            <a:solidFill>
-              <a:srgbClr val="8ABBD8"/>
-            </a:solidFill>
-            <a:prstDash val="solid"/>
-          </a:ln>
-        </p:spPr>
-      </p:sp>
-      <p:sp>
-        <p:nvSpPr>
-          <p:cNvPr id="15" name="Shape 13"/>
-          <p:cNvSpPr/>
-          <p:nvPr/>
-        </p:nvSpPr>
-        <p:spPr>
-          <a:xfrm>
-            <a:off x="8202168" y="3721608"/>
-            <a:ext cx="2340864" cy="0"/>
-          </a:xfrm>
-          <a:prstGeom prst="line">
-            <a:avLst/>
-          </a:prstGeom>
-          <a:noFill/>
-          <a:ln w="19050">
-            <a:solidFill>
-              <a:srgbClr val="0068B7"/>
-            </a:solidFill>
-            <a:prstDash val="solid"/>
-          </a:ln>
-        </p:spPr>
+          <p:cNvPr id="14" name="Text 12"/>
+          <p:cNvSpPr/>
+          <p:nvPr/>
+        </p:nvSpPr>
+        <p:spPr>
+          <a:xfrm>
+            <a:off x="7799832" y="2935224"/>
+            <a:ext cx="3145536" cy="256032"/>
+          </a:xfrm>
+          <a:prstGeom prst="rect">
+            <a:avLst/>
+          </a:prstGeom>
+          <a:noFill/>
+          <a:ln/>
+        </p:spPr>
+        <p:txBody>
+          <a:bodyPr wrap="square" lIns="0" tIns="0" rIns="0" bIns="0" rtlCol="0" anchor="ctr"/>
+          <a:lstStyle/>
+          <a:p>
+            <a:pPr indent="0" marL="0">
+              <a:buNone/>
+            </a:pPr>
+            <a:r>
+              <a:rPr lang="en-US" sz="1300" b="1" dirty="0">
+                <a:solidFill>
+                  <a:srgbClr val="0068B7"/>
+                </a:solidFill>
+                <a:latin typeface="Aptos" pitchFamily="34" charset="0"/>
+                <a:ea typeface="Aptos" pitchFamily="34" charset="-122"/>
+                <a:cs typeface="Aptos" pitchFamily="34" charset="-120"/>
+              </a:rPr>
+              <a:t>Concept checkpoints</a:t>
+            </a:r>
+            <a:endParaRPr lang="en-US" sz="1300" dirty="0"/>
+          </a:p>
+        </p:txBody>
+      </p:sp>
+      <p:sp>
+        <p:nvSpPr>
+          <p:cNvPr id="15" name="Text 13"/>
+          <p:cNvSpPr/>
+          <p:nvPr/>
+        </p:nvSpPr>
+        <p:spPr>
+          <a:xfrm>
+            <a:off x="7818120" y="3300984"/>
+            <a:ext cx="3090672" cy="877824"/>
+          </a:xfrm>
+          <a:prstGeom prst="rect">
+            <a:avLst/>
+          </a:prstGeom>
+          <a:noFill/>
+          <a:ln/>
+        </p:spPr>
+        <p:txBody>
+          <a:bodyPr wrap="square" lIns="254" tIns="254" rIns="254" bIns="254" rtlCol="0" anchor="t">
+            <a:normAutofit/>
+          </a:bodyPr>
+          <a:lstStyle/>
+          <a:p>
+            <a:r>
+              <a:rPr lang="en-US" sz="1380" dirty="0">
+                <a:solidFill>
+                  <a:srgbClr val="17364A"/>
+                </a:solidFill>
+                <a:latin typeface="Aptos" pitchFamily="34" charset="0"/>
+                <a:ea typeface="Aptos" pitchFamily="34" charset="-122"/>
+                <a:cs typeface="Aptos" pitchFamily="34" charset="-120"/>
+              </a:rPr>
+              <a:t>What public health task would the model support: classification, prediction, ranking,.</a:t>
+            </a:r>
+            <a:endParaRPr lang="en-US" sz="1380" dirty="0"/>
+          </a:p>
+          <a:p>
+            <a:r>
+              <a:rPr lang="en-US" sz="1380" dirty="0">
+                <a:solidFill>
+                  <a:srgbClr val="17364A"/>
+                </a:solidFill>
+                <a:latin typeface="Aptos" pitchFamily="34" charset="0"/>
+                <a:ea typeface="Aptos" pitchFamily="34" charset="-122"/>
+                <a:cs typeface="Aptos" pitchFamily="34" charset="-120"/>
+              </a:rPr>
+              <a:t>What label would be used, and how reliable or equitable is that label?</a:t>
+            </a:r>
+            <a:endParaRPr lang="en-US" sz="1380" dirty="0"/>
+          </a:p>
+          <a:p>
+            <a:r>
+              <a:rPr lang="en-US" sz="1380" dirty="0">
+                <a:solidFill>
+                  <a:srgbClr val="17364A"/>
+                </a:solidFill>
+                <a:latin typeface="Aptos" pitchFamily="34" charset="0"/>
+                <a:ea typeface="Aptos" pitchFamily="34" charset="-122"/>
+                <a:cs typeface="Aptos" pitchFamily="34" charset="-120"/>
+              </a:rPr>
+              <a:t>Which features might reflect access, documentation, or reporting bias rather than true risk?</a:t>
+            </a:r>
+            <a:endParaRPr lang="en-US" sz="1380" dirty="0"/>
+          </a:p>
+        </p:txBody>
       </p:sp>
       <p:sp>
         <p:nvSpPr>
           <p:cNvPr id="16" name="Shape 14"/>
-          <p:cNvSpPr/>
-          <p:nvPr/>
-        </p:nvSpPr>
-        <p:spPr>
-          <a:xfrm>
-            <a:off x="9198864" y="4206240"/>
-            <a:ext cx="347472" cy="347472"/>
-          </a:xfrm>
-          <a:prstGeom prst="ellipse">
-            <a:avLst/>
-          </a:prstGeom>
-          <a:solidFill>
-            <a:srgbClr val="2F8A28"/>
-          </a:solidFill>
-          <a:ln w="12700">
-            <a:solidFill>
-              <a:srgbClr val="2F8A28"/>
-            </a:solidFill>
-            <a:prstDash val="solid"/>
-          </a:ln>
-        </p:spPr>
-      </p:sp>
-      <p:sp>
-        <p:nvSpPr>
-          <p:cNvPr id="17" name="Text 15"/>
-          <p:cNvSpPr/>
-          <p:nvPr/>
-        </p:nvSpPr>
-        <p:spPr>
-          <a:xfrm>
-            <a:off x="7909560" y="3977640"/>
-            <a:ext cx="2926080" cy="182880"/>
-          </a:xfrm>
-          <a:prstGeom prst="rect">
-            <a:avLst/>
-          </a:prstGeom>
-          <a:noFill/>
-          <a:ln/>
-        </p:spPr>
-        <p:txBody>
-          <a:bodyPr wrap="square" lIns="0" tIns="0" rIns="0" bIns="0" rtlCol="0" anchor="ctr"/>
-          <a:lstStyle/>
-          <a:p>
-            <a:pPr algn="ctr" indent="0" marL="0">
-              <a:buNone/>
-            </a:pPr>
-            <a:r>
-              <a:rPr lang="en-US" sz="1000" dirty="0">
-                <a:solidFill>
-                  <a:srgbClr val="003A63"/>
-                </a:solidFill>
-                <a:latin typeface="Aptos" pitchFamily="34" charset="0"/>
-                <a:ea typeface="Aptos" pitchFamily="34" charset="-122"/>
-                <a:cs typeface="Aptos" pitchFamily="34" charset="-120"/>
-              </a:rPr>
-              <a:t>Concept to action</a:t>
-            </a:r>
-            <a:endParaRPr lang="en-US" sz="1000" dirty="0"/>
-          </a:p>
-        </p:txBody>
-      </p:sp>
-      <p:sp>
-        <p:nvSpPr>
-          <p:cNvPr id="18" name="Shape 16"/>
           <p:cNvSpPr/>
           <p:nvPr/>
         </p:nvSpPr>
@@ -7356,7 +7124,7 @@
       </p:sp>
       <p:sp>
         <p:nvSpPr>
-          <p:cNvPr id="19" name="Text 17"/>
+          <p:cNvPr id="17" name="Text 15"/>
           <p:cNvSpPr/>
           <p:nvPr/>
         </p:nvSpPr>
@@ -7395,7 +7163,7 @@
       </p:sp>
       <p:sp>
         <p:nvSpPr>
-          <p:cNvPr id="20" name="Text 18"/>
+          <p:cNvPr id="18" name="Text 16"/>
           <p:cNvSpPr/>
           <p:nvPr/>
         </p:nvSpPr>
@@ -7889,13 +7657,11 @@
             </a:avLst>
           </a:prstGeom>
           <a:solidFill>
-            <a:srgbClr val="FFFFFF">
-              <a:alpha val="88000"/>
-            </a:srgbClr>
+            <a:srgbClr val="FFFFFF"/>
           </a:solidFill>
           <a:ln w="12700">
             <a:solidFill>
-              <a:srgbClr val="D6E8F2"/>
+              <a:srgbClr val="B9D7E6"/>
             </a:solidFill>
             <a:prstDash val="solid"/>
           </a:ln>
@@ -7903,119 +7669,98 @@
       </p:sp>
       <p:sp>
         <p:nvSpPr>
-          <p:cNvPr id="14" name="Shape 12"/>
-          <p:cNvSpPr/>
-          <p:nvPr/>
-        </p:nvSpPr>
-        <p:spPr>
-          <a:xfrm>
-            <a:off x="8074152" y="3291840"/>
-            <a:ext cx="2596896" cy="749808"/>
-          </a:xfrm>
-          <a:prstGeom prst="rect">
-            <a:avLst/>
-          </a:prstGeom>
-          <a:solidFill>
-            <a:srgbClr val="EAF6F8"/>
-          </a:solidFill>
-          <a:ln w="12700">
-            <a:solidFill>
-              <a:srgbClr val="8ABBD8"/>
-            </a:solidFill>
-            <a:prstDash val="solid"/>
-          </a:ln>
-        </p:spPr>
-      </p:sp>
-      <p:sp>
-        <p:nvSpPr>
-          <p:cNvPr id="15" name="Shape 13"/>
-          <p:cNvSpPr/>
-          <p:nvPr/>
-        </p:nvSpPr>
-        <p:spPr>
-          <a:xfrm>
-            <a:off x="8202168" y="3721608"/>
-            <a:ext cx="2340864" cy="0"/>
-          </a:xfrm>
-          <a:prstGeom prst="line">
-            <a:avLst/>
-          </a:prstGeom>
-          <a:noFill/>
-          <a:ln w="19050">
-            <a:solidFill>
-              <a:srgbClr val="0068B7"/>
-            </a:solidFill>
-            <a:prstDash val="solid"/>
-          </a:ln>
-        </p:spPr>
+          <p:cNvPr id="14" name="Text 12"/>
+          <p:cNvSpPr/>
+          <p:nvPr/>
+        </p:nvSpPr>
+        <p:spPr>
+          <a:xfrm>
+            <a:off x="7799832" y="2935224"/>
+            <a:ext cx="3145536" cy="256032"/>
+          </a:xfrm>
+          <a:prstGeom prst="rect">
+            <a:avLst/>
+          </a:prstGeom>
+          <a:noFill/>
+          <a:ln/>
+        </p:spPr>
+        <p:txBody>
+          <a:bodyPr wrap="square" lIns="0" tIns="0" rIns="0" bIns="0" rtlCol="0" anchor="ctr"/>
+          <a:lstStyle/>
+          <a:p>
+            <a:pPr indent="0" marL="0">
+              <a:buNone/>
+            </a:pPr>
+            <a:r>
+              <a:rPr lang="en-US" sz="1300" b="1" dirty="0">
+                <a:solidFill>
+                  <a:srgbClr val="0068B7"/>
+                </a:solidFill>
+                <a:latin typeface="Aptos" pitchFamily="34" charset="0"/>
+                <a:ea typeface="Aptos" pitchFamily="34" charset="-122"/>
+                <a:cs typeface="Aptos" pitchFamily="34" charset="-120"/>
+              </a:rPr>
+              <a:t>Concept checkpoints</a:t>
+            </a:r>
+            <a:endParaRPr lang="en-US" sz="1300" dirty="0"/>
+          </a:p>
+        </p:txBody>
+      </p:sp>
+      <p:sp>
+        <p:nvSpPr>
+          <p:cNvPr id="15" name="Text 13"/>
+          <p:cNvSpPr/>
+          <p:nvPr/>
+        </p:nvSpPr>
+        <p:spPr>
+          <a:xfrm>
+            <a:off x="7818120" y="3300984"/>
+            <a:ext cx="3090672" cy="877824"/>
+          </a:xfrm>
+          <a:prstGeom prst="rect">
+            <a:avLst/>
+          </a:prstGeom>
+          <a:noFill/>
+          <a:ln/>
+        </p:spPr>
+        <p:txBody>
+          <a:bodyPr wrap="square" lIns="254" tIns="254" rIns="254" bIns="254" rtlCol="0" anchor="t">
+            <a:normAutofit/>
+          </a:bodyPr>
+          <a:lstStyle/>
+          <a:p>
+            <a:r>
+              <a:rPr lang="en-US" sz="1380" dirty="0">
+                <a:solidFill>
+                  <a:srgbClr val="17364A"/>
+                </a:solidFill>
+                <a:latin typeface="Aptos" pitchFamily="34" charset="0"/>
+                <a:ea typeface="Aptos" pitchFamily="34" charset="-122"/>
+                <a:cs typeface="Aptos" pitchFamily="34" charset="-120"/>
+              </a:rPr>
+              <a:t>What errors would be most harmful in this workflow?</a:t>
+            </a:r>
+            <a:endParaRPr lang="en-US" sz="1380" dirty="0"/>
+          </a:p>
+          <a:p>
+            <a:r>
+              <a:rPr lang="en-US" sz="1380" dirty="0">
+                <a:solidFill>
+                  <a:srgbClr val="17364A"/>
+                </a:solidFill>
+                <a:latin typeface="Aptos" pitchFamily="34" charset="0"/>
+                <a:ea typeface="Aptos" pitchFamily="34" charset="-122"/>
+                <a:cs typeface="Aptos" pitchFamily="34" charset="-120"/>
+              </a:rPr>
+              <a:t>Who would review model outputs, override them, and document concerns?</a:t>
+            </a:r>
+            <a:endParaRPr lang="en-US" sz="1380" dirty="0"/>
+          </a:p>
+        </p:txBody>
       </p:sp>
       <p:sp>
         <p:nvSpPr>
           <p:cNvPr id="16" name="Shape 14"/>
-          <p:cNvSpPr/>
-          <p:nvPr/>
-        </p:nvSpPr>
-        <p:spPr>
-          <a:xfrm>
-            <a:off x="9198864" y="4206240"/>
-            <a:ext cx="347472" cy="347472"/>
-          </a:xfrm>
-          <a:prstGeom prst="ellipse">
-            <a:avLst/>
-          </a:prstGeom>
-          <a:solidFill>
-            <a:srgbClr val="2F8A28"/>
-          </a:solidFill>
-          <a:ln w="12700">
-            <a:solidFill>
-              <a:srgbClr val="2F8A28"/>
-            </a:solidFill>
-            <a:prstDash val="solid"/>
-          </a:ln>
-        </p:spPr>
-      </p:sp>
-      <p:sp>
-        <p:nvSpPr>
-          <p:cNvPr id="17" name="Text 15"/>
-          <p:cNvSpPr/>
-          <p:nvPr/>
-        </p:nvSpPr>
-        <p:spPr>
-          <a:xfrm>
-            <a:off x="7909560" y="3977640"/>
-            <a:ext cx="2926080" cy="182880"/>
-          </a:xfrm>
-          <a:prstGeom prst="rect">
-            <a:avLst/>
-          </a:prstGeom>
-          <a:noFill/>
-          <a:ln/>
-        </p:spPr>
-        <p:txBody>
-          <a:bodyPr wrap="square" lIns="0" tIns="0" rIns="0" bIns="0" rtlCol="0" anchor="ctr"/>
-          <a:lstStyle/>
-          <a:p>
-            <a:pPr algn="ctr" indent="0" marL="0">
-              <a:buNone/>
-            </a:pPr>
-            <a:r>
-              <a:rPr lang="en-US" sz="1000" dirty="0">
-                <a:solidFill>
-                  <a:srgbClr val="003A63"/>
-                </a:solidFill>
-                <a:latin typeface="Aptos" pitchFamily="34" charset="0"/>
-                <a:ea typeface="Aptos" pitchFamily="34" charset="-122"/>
-                <a:cs typeface="Aptos" pitchFamily="34" charset="-120"/>
-              </a:rPr>
-              <a:t>Concept to action</a:t>
-            </a:r>
-            <a:endParaRPr lang="en-US" sz="1000" dirty="0"/>
-          </a:p>
-        </p:txBody>
-      </p:sp>
-      <p:sp>
-        <p:nvSpPr>
-          <p:cNvPr id="18" name="Shape 16"/>
           <p:cNvSpPr/>
           <p:nvPr/>
         </p:nvSpPr>
@@ -8042,7 +7787,7 @@
       </p:sp>
       <p:sp>
         <p:nvSpPr>
-          <p:cNvPr id="19" name="Text 17"/>
+          <p:cNvPr id="17" name="Text 15"/>
           <p:cNvSpPr/>
           <p:nvPr/>
         </p:nvSpPr>
@@ -8081,7 +7826,7 @@
       </p:sp>
       <p:sp>
         <p:nvSpPr>
-          <p:cNvPr id="20" name="Text 18"/>
+          <p:cNvPr id="18" name="Text 16"/>
           <p:cNvSpPr/>
           <p:nvPr/>
         </p:nvSpPr>
@@ -8589,13 +8334,11 @@
             </a:avLst>
           </a:prstGeom>
           <a:solidFill>
-            <a:srgbClr val="FFFFFF">
-              <a:alpha val="88000"/>
-            </a:srgbClr>
+            <a:srgbClr val="FFFFFF"/>
           </a:solidFill>
           <a:ln w="12700">
             <a:solidFill>
-              <a:srgbClr val="D6E8F2"/>
+              <a:srgbClr val="B9D7E6"/>
             </a:solidFill>
             <a:prstDash val="solid"/>
           </a:ln>
@@ -8603,119 +8346,98 @@
       </p:sp>
       <p:sp>
         <p:nvSpPr>
-          <p:cNvPr id="14" name="Shape 12"/>
-          <p:cNvSpPr/>
-          <p:nvPr/>
-        </p:nvSpPr>
-        <p:spPr>
-          <a:xfrm>
-            <a:off x="8074152" y="3291840"/>
-            <a:ext cx="2596896" cy="749808"/>
-          </a:xfrm>
-          <a:prstGeom prst="rect">
-            <a:avLst/>
-          </a:prstGeom>
-          <a:solidFill>
-            <a:srgbClr val="EAF6F8"/>
-          </a:solidFill>
-          <a:ln w="12700">
-            <a:solidFill>
-              <a:srgbClr val="8ABBD8"/>
-            </a:solidFill>
-            <a:prstDash val="solid"/>
-          </a:ln>
-        </p:spPr>
-      </p:sp>
-      <p:sp>
-        <p:nvSpPr>
-          <p:cNvPr id="15" name="Shape 13"/>
-          <p:cNvSpPr/>
-          <p:nvPr/>
-        </p:nvSpPr>
-        <p:spPr>
-          <a:xfrm>
-            <a:off x="8202168" y="3721608"/>
-            <a:ext cx="2340864" cy="0"/>
-          </a:xfrm>
-          <a:prstGeom prst="line">
-            <a:avLst/>
-          </a:prstGeom>
-          <a:noFill/>
-          <a:ln w="19050">
-            <a:solidFill>
-              <a:srgbClr val="0068B7"/>
-            </a:solidFill>
-            <a:prstDash val="solid"/>
-          </a:ln>
-        </p:spPr>
+          <p:cNvPr id="14" name="Text 12"/>
+          <p:cNvSpPr/>
+          <p:nvPr/>
+        </p:nvSpPr>
+        <p:spPr>
+          <a:xfrm>
+            <a:off x="7799832" y="2935224"/>
+            <a:ext cx="3145536" cy="256032"/>
+          </a:xfrm>
+          <a:prstGeom prst="rect">
+            <a:avLst/>
+          </a:prstGeom>
+          <a:noFill/>
+          <a:ln/>
+        </p:spPr>
+        <p:txBody>
+          <a:bodyPr wrap="square" lIns="0" tIns="0" rIns="0" bIns="0" rtlCol="0" anchor="ctr"/>
+          <a:lstStyle/>
+          <a:p>
+            <a:pPr indent="0" marL="0">
+              <a:buNone/>
+            </a:pPr>
+            <a:r>
+              <a:rPr lang="en-US" sz="1300" b="1" dirty="0">
+                <a:solidFill>
+                  <a:srgbClr val="0068B7"/>
+                </a:solidFill>
+                <a:latin typeface="Aptos" pitchFamily="34" charset="0"/>
+                <a:ea typeface="Aptos" pitchFamily="34" charset="-122"/>
+                <a:cs typeface="Aptos" pitchFamily="34" charset="-120"/>
+              </a:rPr>
+              <a:t>Concept checkpoints</a:t>
+            </a:r>
+            <a:endParaRPr lang="en-US" sz="1300" dirty="0"/>
+          </a:p>
+        </p:txBody>
+      </p:sp>
+      <p:sp>
+        <p:nvSpPr>
+          <p:cNvPr id="15" name="Text 13"/>
+          <p:cNvSpPr/>
+          <p:nvPr/>
+        </p:nvSpPr>
+        <p:spPr>
+          <a:xfrm>
+            <a:off x="7818120" y="3300984"/>
+            <a:ext cx="3090672" cy="877824"/>
+          </a:xfrm>
+          <a:prstGeom prst="rect">
+            <a:avLst/>
+          </a:prstGeom>
+          <a:noFill/>
+          <a:ln/>
+        </p:spPr>
+        <p:txBody>
+          <a:bodyPr wrap="square" lIns="254" tIns="254" rIns="254" bIns="254" rtlCol="0" anchor="t">
+            <a:normAutofit/>
+          </a:bodyPr>
+          <a:lstStyle/>
+          <a:p>
+            <a:r>
+              <a:rPr lang="en-US" sz="1380" dirty="0">
+                <a:solidFill>
+                  <a:srgbClr val="17364A"/>
+                </a:solidFill>
+                <a:latin typeface="Aptos" pitchFamily="34" charset="0"/>
+                <a:ea typeface="Aptos" pitchFamily="34" charset="-122"/>
+                <a:cs typeface="Aptos" pitchFamily="34" charset="-120"/>
+              </a:rPr>
+              <a:t>The worksheet should describe the public health task, intended use, data sources,.</a:t>
+            </a:r>
+            <a:endParaRPr lang="en-US" sz="1380" dirty="0"/>
+          </a:p>
+          <a:p>
+            <a:r>
+              <a:rPr lang="en-US" sz="1380" dirty="0">
+                <a:solidFill>
+                  <a:srgbClr val="17364A"/>
+                </a:solidFill>
+                <a:latin typeface="Aptos" pitchFamily="34" charset="0"/>
+                <a:ea typeface="Aptos" pitchFamily="34" charset="-122"/>
+                <a:cs typeface="Aptos" pitchFamily="34" charset="-120"/>
+              </a:rPr>
+              <a:t>Learners should identify at least three reasons the model might fail and at least three.</a:t>
+            </a:r>
+            <a:endParaRPr lang="en-US" sz="1380" dirty="0"/>
+          </a:p>
+        </p:txBody>
       </p:sp>
       <p:sp>
         <p:nvSpPr>
           <p:cNvPr id="16" name="Shape 14"/>
-          <p:cNvSpPr/>
-          <p:nvPr/>
-        </p:nvSpPr>
-        <p:spPr>
-          <a:xfrm>
-            <a:off x="9198864" y="4206240"/>
-            <a:ext cx="347472" cy="347472"/>
-          </a:xfrm>
-          <a:prstGeom prst="ellipse">
-            <a:avLst/>
-          </a:prstGeom>
-          <a:solidFill>
-            <a:srgbClr val="2F8A28"/>
-          </a:solidFill>
-          <a:ln w="12700">
-            <a:solidFill>
-              <a:srgbClr val="2F8A28"/>
-            </a:solidFill>
-            <a:prstDash val="solid"/>
-          </a:ln>
-        </p:spPr>
-      </p:sp>
-      <p:sp>
-        <p:nvSpPr>
-          <p:cNvPr id="17" name="Text 15"/>
-          <p:cNvSpPr/>
-          <p:nvPr/>
-        </p:nvSpPr>
-        <p:spPr>
-          <a:xfrm>
-            <a:off x="7909560" y="3977640"/>
-            <a:ext cx="2926080" cy="182880"/>
-          </a:xfrm>
-          <a:prstGeom prst="rect">
-            <a:avLst/>
-          </a:prstGeom>
-          <a:noFill/>
-          <a:ln/>
-        </p:spPr>
-        <p:txBody>
-          <a:bodyPr wrap="square" lIns="0" tIns="0" rIns="0" bIns="0" rtlCol="0" anchor="ctr"/>
-          <a:lstStyle/>
-          <a:p>
-            <a:pPr algn="ctr" indent="0" marL="0">
-              <a:buNone/>
-            </a:pPr>
-            <a:r>
-              <a:rPr lang="en-US" sz="1000" dirty="0">
-                <a:solidFill>
-                  <a:srgbClr val="003A63"/>
-                </a:solidFill>
-                <a:latin typeface="Aptos" pitchFamily="34" charset="0"/>
-                <a:ea typeface="Aptos" pitchFamily="34" charset="-122"/>
-                <a:cs typeface="Aptos" pitchFamily="34" charset="-120"/>
-              </a:rPr>
-              <a:t>Concept to action</a:t>
-            </a:r>
-            <a:endParaRPr lang="en-US" sz="1000" dirty="0"/>
-          </a:p>
-        </p:txBody>
-      </p:sp>
-      <p:sp>
-        <p:nvSpPr>
-          <p:cNvPr id="18" name="Shape 16"/>
           <p:cNvSpPr/>
           <p:nvPr/>
         </p:nvSpPr>
@@ -8742,7 +8464,7 @@
       </p:sp>
       <p:sp>
         <p:nvSpPr>
-          <p:cNvPr id="19" name="Text 17"/>
+          <p:cNvPr id="17" name="Text 15"/>
           <p:cNvSpPr/>
           <p:nvPr/>
         </p:nvSpPr>
@@ -8781,7 +8503,7 @@
       </p:sp>
       <p:sp>
         <p:nvSpPr>
-          <p:cNvPr id="20" name="Text 18"/>
+          <p:cNvPr id="18" name="Text 16"/>
           <p:cNvSpPr/>
           <p:nvPr/>
         </p:nvSpPr>
@@ -9289,13 +9011,11 @@
             </a:avLst>
           </a:prstGeom>
           <a:solidFill>
-            <a:srgbClr val="FFFFFF">
-              <a:alpha val="88000"/>
-            </a:srgbClr>
+            <a:srgbClr val="FFFFFF"/>
           </a:solidFill>
           <a:ln w="12700">
             <a:solidFill>
-              <a:srgbClr val="D6E8F2"/>
+              <a:srgbClr val="B9D7E6"/>
             </a:solidFill>
             <a:prstDash val="solid"/>
           </a:ln>
@@ -9303,119 +9023,112 @@
       </p:sp>
       <p:sp>
         <p:nvSpPr>
-          <p:cNvPr id="14" name="Shape 12"/>
-          <p:cNvSpPr/>
-          <p:nvPr/>
-        </p:nvSpPr>
-        <p:spPr>
-          <a:xfrm>
-            <a:off x="8074152" y="3291840"/>
-            <a:ext cx="2596896" cy="749808"/>
-          </a:xfrm>
-          <a:prstGeom prst="rect">
-            <a:avLst/>
-          </a:prstGeom>
-          <a:solidFill>
-            <a:srgbClr val="EAF6F8"/>
-          </a:solidFill>
-          <a:ln w="12700">
-            <a:solidFill>
-              <a:srgbClr val="8ABBD8"/>
-            </a:solidFill>
-            <a:prstDash val="solid"/>
-          </a:ln>
-        </p:spPr>
-      </p:sp>
-      <p:sp>
-        <p:nvSpPr>
-          <p:cNvPr id="15" name="Shape 13"/>
-          <p:cNvSpPr/>
-          <p:nvPr/>
-        </p:nvSpPr>
-        <p:spPr>
-          <a:xfrm>
-            <a:off x="8202168" y="3721608"/>
-            <a:ext cx="2340864" cy="0"/>
-          </a:xfrm>
-          <a:prstGeom prst="line">
-            <a:avLst/>
-          </a:prstGeom>
-          <a:noFill/>
-          <a:ln w="19050">
-            <a:solidFill>
-              <a:srgbClr val="0068B7"/>
-            </a:solidFill>
-            <a:prstDash val="solid"/>
-          </a:ln>
-        </p:spPr>
+          <p:cNvPr id="14" name="Text 12"/>
+          <p:cNvSpPr/>
+          <p:nvPr/>
+        </p:nvSpPr>
+        <p:spPr>
+          <a:xfrm>
+            <a:off x="7799832" y="2935224"/>
+            <a:ext cx="3145536" cy="256032"/>
+          </a:xfrm>
+          <a:prstGeom prst="rect">
+            <a:avLst/>
+          </a:prstGeom>
+          <a:noFill/>
+          <a:ln/>
+        </p:spPr>
+        <p:txBody>
+          <a:bodyPr wrap="square" lIns="0" tIns="0" rIns="0" bIns="0" rtlCol="0" anchor="ctr"/>
+          <a:lstStyle/>
+          <a:p>
+            <a:pPr indent="0" marL="0">
+              <a:buNone/>
+            </a:pPr>
+            <a:r>
+              <a:rPr lang="en-US" sz="1300" b="1" dirty="0">
+                <a:solidFill>
+                  <a:srgbClr val="0068B7"/>
+                </a:solidFill>
+                <a:latin typeface="Aptos" pitchFamily="34" charset="0"/>
+                <a:ea typeface="Aptos" pitchFamily="34" charset="-122"/>
+                <a:cs typeface="Aptos" pitchFamily="34" charset="-120"/>
+              </a:rPr>
+              <a:t>Concept checkpoints</a:t>
+            </a:r>
+            <a:endParaRPr lang="en-US" sz="1300" dirty="0"/>
+          </a:p>
+        </p:txBody>
+      </p:sp>
+      <p:sp>
+        <p:nvSpPr>
+          <p:cNvPr id="15" name="Text 13"/>
+          <p:cNvSpPr/>
+          <p:nvPr/>
+        </p:nvSpPr>
+        <p:spPr>
+          <a:xfrm>
+            <a:off x="7818120" y="3300984"/>
+            <a:ext cx="3090672" cy="877824"/>
+          </a:xfrm>
+          <a:prstGeom prst="rect">
+            <a:avLst/>
+          </a:prstGeom>
+          <a:noFill/>
+          <a:ln/>
+        </p:spPr>
+        <p:txBody>
+          <a:bodyPr wrap="square" lIns="254" tIns="254" rIns="254" bIns="254" rtlCol="0" anchor="t">
+            <a:normAutofit/>
+          </a:bodyPr>
+          <a:lstStyle/>
+          <a:p>
+            <a:r>
+              <a:rPr lang="en-US" sz="1380" dirty="0">
+                <a:solidFill>
+                  <a:srgbClr val="17364A"/>
+                </a:solidFill>
+                <a:latin typeface="Aptos" pitchFamily="34" charset="0"/>
+                <a:ea typeface="Aptos" pitchFamily="34" charset="-122"/>
+                <a:cs typeface="Aptos" pitchFamily="34" charset="-120"/>
+              </a:rPr>
+              <a:t>Machine learning use case review worksheet</a:t>
+            </a:r>
+            <a:endParaRPr lang="en-US" sz="1380" dirty="0"/>
+          </a:p>
+          <a:p>
+            <a:r>
+              <a:rPr lang="en-US" sz="1380" dirty="0">
+                <a:solidFill>
+                  <a:srgbClr val="17364A"/>
+                </a:solidFill>
+                <a:latin typeface="Aptos" pitchFamily="34" charset="0"/>
+                <a:ea typeface="Aptos" pitchFamily="34" charset="-122"/>
+                <a:cs typeface="Aptos" pitchFamily="34" charset="-120"/>
+              </a:rPr>
+              <a:t>Feature and label inventory</a:t>
+            </a:r>
+            <a:endParaRPr lang="en-US" sz="1380" dirty="0"/>
+          </a:p>
+          <a:p>
+            <a:r>
+              <a:rPr lang="en-US" sz="1380" dirty="0">
+                <a:solidFill>
+                  <a:srgbClr val="17364A"/>
+                </a:solidFill>
+                <a:latin typeface="Aptos" pitchFamily="34" charset="0"/>
+                <a:ea typeface="Aptos" pitchFamily="34" charset="-122"/>
+                <a:cs typeface="Aptos" pitchFamily="34" charset="-120"/>
+              </a:rPr>
+              <a:t>Initial model risk and safeguard list</a:t>
+            </a:r>
+            <a:endParaRPr lang="en-US" sz="1380" dirty="0"/>
+          </a:p>
+        </p:txBody>
       </p:sp>
       <p:sp>
         <p:nvSpPr>
           <p:cNvPr id="16" name="Shape 14"/>
-          <p:cNvSpPr/>
-          <p:nvPr/>
-        </p:nvSpPr>
-        <p:spPr>
-          <a:xfrm>
-            <a:off x="9198864" y="4206240"/>
-            <a:ext cx="347472" cy="347472"/>
-          </a:xfrm>
-          <a:prstGeom prst="ellipse">
-            <a:avLst/>
-          </a:prstGeom>
-          <a:solidFill>
-            <a:srgbClr val="2F8A28"/>
-          </a:solidFill>
-          <a:ln w="12700">
-            <a:solidFill>
-              <a:srgbClr val="2F8A28"/>
-            </a:solidFill>
-            <a:prstDash val="solid"/>
-          </a:ln>
-        </p:spPr>
-      </p:sp>
-      <p:sp>
-        <p:nvSpPr>
-          <p:cNvPr id="17" name="Text 15"/>
-          <p:cNvSpPr/>
-          <p:nvPr/>
-        </p:nvSpPr>
-        <p:spPr>
-          <a:xfrm>
-            <a:off x="7909560" y="3977640"/>
-            <a:ext cx="2926080" cy="182880"/>
-          </a:xfrm>
-          <a:prstGeom prst="rect">
-            <a:avLst/>
-          </a:prstGeom>
-          <a:noFill/>
-          <a:ln/>
-        </p:spPr>
-        <p:txBody>
-          <a:bodyPr wrap="square" lIns="0" tIns="0" rIns="0" bIns="0" rtlCol="0" anchor="ctr"/>
-          <a:lstStyle/>
-          <a:p>
-            <a:pPr algn="ctr" indent="0" marL="0">
-              <a:buNone/>
-            </a:pPr>
-            <a:r>
-              <a:rPr lang="en-US" sz="1000" dirty="0">
-                <a:solidFill>
-                  <a:srgbClr val="003A63"/>
-                </a:solidFill>
-                <a:latin typeface="Aptos" pitchFamily="34" charset="0"/>
-                <a:ea typeface="Aptos" pitchFamily="34" charset="-122"/>
-                <a:cs typeface="Aptos" pitchFamily="34" charset="-120"/>
-              </a:rPr>
-              <a:t>Concept to action</a:t>
-            </a:r>
-            <a:endParaRPr lang="en-US" sz="1000" dirty="0"/>
-          </a:p>
-        </p:txBody>
-      </p:sp>
-      <p:sp>
-        <p:nvSpPr>
-          <p:cNvPr id="18" name="Shape 16"/>
           <p:cNvSpPr/>
           <p:nvPr/>
         </p:nvSpPr>
@@ -9442,7 +9155,7 @@
       </p:sp>
       <p:sp>
         <p:nvSpPr>
-          <p:cNvPr id="19" name="Text 17"/>
+          <p:cNvPr id="17" name="Text 15"/>
           <p:cNvSpPr/>
           <p:nvPr/>
         </p:nvSpPr>
@@ -9481,7 +9194,7 @@
       </p:sp>
       <p:sp>
         <p:nvSpPr>
-          <p:cNvPr id="20" name="Text 18"/>
+          <p:cNvPr id="18" name="Text 16"/>
           <p:cNvSpPr/>
           <p:nvPr/>
         </p:nvSpPr>
@@ -9961,13 +9674,11 @@
             </a:avLst>
           </a:prstGeom>
           <a:solidFill>
-            <a:srgbClr val="FFFFFF">
-              <a:alpha val="88000"/>
-            </a:srgbClr>
+            <a:srgbClr val="FFFFFF"/>
           </a:solidFill>
           <a:ln w="12700">
             <a:solidFill>
-              <a:srgbClr val="D6E8F2"/>
+              <a:srgbClr val="B9D7E6"/>
             </a:solidFill>
             <a:prstDash val="solid"/>
           </a:ln>
@@ -9975,119 +9686,84 @@
       </p:sp>
       <p:sp>
         <p:nvSpPr>
-          <p:cNvPr id="14" name="Shape 12"/>
-          <p:cNvSpPr/>
-          <p:nvPr/>
-        </p:nvSpPr>
-        <p:spPr>
-          <a:xfrm>
-            <a:off x="8074152" y="3291840"/>
-            <a:ext cx="2596896" cy="749808"/>
-          </a:xfrm>
-          <a:prstGeom prst="rect">
-            <a:avLst/>
-          </a:prstGeom>
-          <a:solidFill>
-            <a:srgbClr val="EAF6F8"/>
-          </a:solidFill>
-          <a:ln w="12700">
-            <a:solidFill>
-              <a:srgbClr val="8ABBD8"/>
-            </a:solidFill>
-            <a:prstDash val="solid"/>
-          </a:ln>
-        </p:spPr>
-      </p:sp>
-      <p:sp>
-        <p:nvSpPr>
-          <p:cNvPr id="15" name="Shape 13"/>
-          <p:cNvSpPr/>
-          <p:nvPr/>
-        </p:nvSpPr>
-        <p:spPr>
-          <a:xfrm>
-            <a:off x="8202168" y="3721608"/>
-            <a:ext cx="2340864" cy="0"/>
-          </a:xfrm>
-          <a:prstGeom prst="line">
-            <a:avLst/>
-          </a:prstGeom>
-          <a:noFill/>
-          <a:ln w="19050">
-            <a:solidFill>
-              <a:srgbClr val="0068B7"/>
-            </a:solidFill>
-            <a:prstDash val="solid"/>
-          </a:ln>
-        </p:spPr>
+          <p:cNvPr id="14" name="Text 12"/>
+          <p:cNvSpPr/>
+          <p:nvPr/>
+        </p:nvSpPr>
+        <p:spPr>
+          <a:xfrm>
+            <a:off x="7799832" y="2935224"/>
+            <a:ext cx="3145536" cy="256032"/>
+          </a:xfrm>
+          <a:prstGeom prst="rect">
+            <a:avLst/>
+          </a:prstGeom>
+          <a:noFill/>
+          <a:ln/>
+        </p:spPr>
+        <p:txBody>
+          <a:bodyPr wrap="square" lIns="0" tIns="0" rIns="0" bIns="0" rtlCol="0" anchor="ctr"/>
+          <a:lstStyle/>
+          <a:p>
+            <a:pPr indent="0" marL="0">
+              <a:buNone/>
+            </a:pPr>
+            <a:r>
+              <a:rPr lang="en-US" sz="1300" b="1" dirty="0">
+                <a:solidFill>
+                  <a:srgbClr val="0068B7"/>
+                </a:solidFill>
+                <a:latin typeface="Aptos" pitchFamily="34" charset="0"/>
+                <a:ea typeface="Aptos" pitchFamily="34" charset="-122"/>
+                <a:cs typeface="Aptos" pitchFamily="34" charset="-120"/>
+              </a:rPr>
+              <a:t>Concept checkpoints</a:t>
+            </a:r>
+            <a:endParaRPr lang="en-US" sz="1300" dirty="0"/>
+          </a:p>
+        </p:txBody>
+      </p:sp>
+      <p:sp>
+        <p:nvSpPr>
+          <p:cNvPr id="15" name="Text 13"/>
+          <p:cNvSpPr/>
+          <p:nvPr/>
+        </p:nvSpPr>
+        <p:spPr>
+          <a:xfrm>
+            <a:off x="7818120" y="3300984"/>
+            <a:ext cx="3090672" cy="877824"/>
+          </a:xfrm>
+          <a:prstGeom prst="rect">
+            <a:avLst/>
+          </a:prstGeom>
+          <a:noFill/>
+          <a:ln/>
+        </p:spPr>
+        <p:txBody>
+          <a:bodyPr wrap="square" lIns="254" tIns="254" rIns="254" bIns="254" rtlCol="0" anchor="t">
+            <a:normAutofit/>
+          </a:bodyPr>
+          <a:lstStyle/>
+          <a:p>
+            <a:r>
+              <a:rPr lang="en-US" sz="1380" dirty="0">
+                <a:solidFill>
+                  <a:srgbClr val="17364A"/>
+                </a:solidFill>
+                <a:latin typeface="Aptos" pitchFamily="34" charset="0"/>
+                <a:ea typeface="Aptos" pitchFamily="34" charset="-122"/>
+                <a:cs typeface="Aptos" pitchFamily="34" charset="-120"/>
+              </a:rPr>
+              <a:t>Human review and monitoring notes</a:t>
+            </a:r>
+            <a:endParaRPr lang="en-US" sz="1380" dirty="0"/>
+          </a:p>
+        </p:txBody>
       </p:sp>
       <p:sp>
         <p:nvSpPr>
           <p:cNvPr id="16" name="Shape 14"/>
-          <p:cNvSpPr/>
-          <p:nvPr/>
-        </p:nvSpPr>
-        <p:spPr>
-          <a:xfrm>
-            <a:off x="9198864" y="4206240"/>
-            <a:ext cx="347472" cy="347472"/>
-          </a:xfrm>
-          <a:prstGeom prst="ellipse">
-            <a:avLst/>
-          </a:prstGeom>
-          <a:solidFill>
-            <a:srgbClr val="2F8A28"/>
-          </a:solidFill>
-          <a:ln w="12700">
-            <a:solidFill>
-              <a:srgbClr val="2F8A28"/>
-            </a:solidFill>
-            <a:prstDash val="solid"/>
-          </a:ln>
-        </p:spPr>
-      </p:sp>
-      <p:sp>
-        <p:nvSpPr>
-          <p:cNvPr id="17" name="Text 15"/>
-          <p:cNvSpPr/>
-          <p:nvPr/>
-        </p:nvSpPr>
-        <p:spPr>
-          <a:xfrm>
-            <a:off x="7909560" y="3977640"/>
-            <a:ext cx="2926080" cy="182880"/>
-          </a:xfrm>
-          <a:prstGeom prst="rect">
-            <a:avLst/>
-          </a:prstGeom>
-          <a:noFill/>
-          <a:ln/>
-        </p:spPr>
-        <p:txBody>
-          <a:bodyPr wrap="square" lIns="0" tIns="0" rIns="0" bIns="0" rtlCol="0" anchor="ctr"/>
-          <a:lstStyle/>
-          <a:p>
-            <a:pPr algn="ctr" indent="0" marL="0">
-              <a:buNone/>
-            </a:pPr>
-            <a:r>
-              <a:rPr lang="en-US" sz="1000" dirty="0">
-                <a:solidFill>
-                  <a:srgbClr val="003A63"/>
-                </a:solidFill>
-                <a:latin typeface="Aptos" pitchFamily="34" charset="0"/>
-                <a:ea typeface="Aptos" pitchFamily="34" charset="-122"/>
-                <a:cs typeface="Aptos" pitchFamily="34" charset="-120"/>
-              </a:rPr>
-              <a:t>Concept to action</a:t>
-            </a:r>
-            <a:endParaRPr lang="en-US" sz="1000" dirty="0"/>
-          </a:p>
-        </p:txBody>
-      </p:sp>
-      <p:sp>
-        <p:nvSpPr>
-          <p:cNvPr id="18" name="Shape 16"/>
           <p:cNvSpPr/>
           <p:nvPr/>
         </p:nvSpPr>
@@ -10114,7 +9790,7 @@
       </p:sp>
       <p:sp>
         <p:nvSpPr>
-          <p:cNvPr id="19" name="Text 17"/>
+          <p:cNvPr id="17" name="Text 15"/>
           <p:cNvSpPr/>
           <p:nvPr/>
         </p:nvSpPr>
@@ -10153,7 +9829,7 @@
       </p:sp>
       <p:sp>
         <p:nvSpPr>
-          <p:cNvPr id="20" name="Text 18"/>
+          <p:cNvPr id="18" name="Text 16"/>
           <p:cNvSpPr/>
           <p:nvPr/>
         </p:nvSpPr>
@@ -10686,20 +10362,20 @@
         </p:nvSpPr>
         <p:spPr>
           <a:xfrm>
-            <a:off x="7635240" y="3730752"/>
-            <a:ext cx="1033272" cy="749808"/>
+            <a:off x="7909560" y="3675888"/>
+            <a:ext cx="3154680" cy="1691640"/>
           </a:xfrm>
           <a:prstGeom prst="roundRect">
             <a:avLst>
-              <a:gd name="adj" fmla="val 14634"/>
+              <a:gd name="adj" fmla="val 6486"/>
             </a:avLst>
           </a:prstGeom>
           <a:solidFill>
-            <a:srgbClr val="0068B7"/>
+            <a:srgbClr val="FFFFFF"/>
           </a:solidFill>
           <a:ln w="12700">
             <a:solidFill>
-              <a:srgbClr val="0068B7"/>
+              <a:srgbClr val="B9D7E6"/>
             </a:solidFill>
             <a:prstDash val="solid"/>
           </a:ln>
@@ -10713,172 +10389,100 @@
         </p:nvSpPr>
         <p:spPr>
           <a:xfrm>
-            <a:off x="7708392" y="3922776"/>
-            <a:ext cx="886968" cy="310896"/>
-          </a:xfrm>
-          <a:prstGeom prst="rect">
-            <a:avLst/>
-          </a:prstGeom>
-          <a:noFill/>
-          <a:ln/>
-        </p:spPr>
-        <p:txBody>
-          <a:bodyPr wrap="square" lIns="0" tIns="0" rIns="0" bIns="0" rtlCol="0" anchor="ctr">
+            <a:off x="8074152" y="3822192"/>
+            <a:ext cx="2825496" cy="256032"/>
+          </a:xfrm>
+          <a:prstGeom prst="rect">
+            <a:avLst/>
+          </a:prstGeom>
+          <a:noFill/>
+          <a:ln/>
+        </p:spPr>
+        <p:txBody>
+          <a:bodyPr wrap="square" lIns="0" tIns="0" rIns="0" bIns="0" rtlCol="0" anchor="ctr"/>
+          <a:lstStyle/>
+          <a:p>
+            <a:pPr indent="0" marL="0">
+              <a:buNone/>
+            </a:pPr>
+            <a:r>
+              <a:rPr lang="en-US" sz="1300" b="1" dirty="0">
+                <a:solidFill>
+                  <a:srgbClr val="0068B7"/>
+                </a:solidFill>
+                <a:latin typeface="Aptos" pitchFamily="34" charset="0"/>
+                <a:ea typeface="Aptos" pitchFamily="34" charset="-122"/>
+                <a:cs typeface="Aptos" pitchFamily="34" charset="-120"/>
+              </a:rPr>
+              <a:t>Learning sequence</a:t>
+            </a:r>
+            <a:endParaRPr lang="en-US" sz="1300" dirty="0"/>
+          </a:p>
+        </p:txBody>
+      </p:sp>
+      <p:sp>
+        <p:nvSpPr>
+          <p:cNvPr id="15" name="Text 13"/>
+          <p:cNvSpPr/>
+          <p:nvPr/>
+        </p:nvSpPr>
+        <p:spPr>
+          <a:xfrm>
+            <a:off x="8092440" y="4187952"/>
+            <a:ext cx="2770632" cy="1033272"/>
+          </a:xfrm>
+          <a:prstGeom prst="rect">
+            <a:avLst/>
+          </a:prstGeom>
+          <a:noFill/>
+          <a:ln/>
+        </p:spPr>
+        <p:txBody>
+          <a:bodyPr wrap="square" lIns="254" tIns="254" rIns="254" bIns="254" rtlCol="0" anchor="t">
             <a:normAutofit/>
           </a:bodyPr>
           <a:lstStyle/>
           <a:p>
-            <a:pPr algn="ctr" indent="0" marL="0">
-              <a:buNone/>
-            </a:pPr>
-            <a:r>
-              <a:rPr lang="en-US" sz="1500" b="1" dirty="0">
-                <a:solidFill>
-                  <a:srgbClr val="FFFFFF"/>
-                </a:solidFill>
-                <a:latin typeface="Aptos" pitchFamily="34" charset="0"/>
-                <a:ea typeface="Aptos" pitchFamily="34" charset="-122"/>
-                <a:cs typeface="Aptos" pitchFamily="34" charset="-120"/>
-              </a:rPr>
-              <a:t>Learn</a:t>
-            </a:r>
-            <a:endParaRPr lang="en-US" sz="1500" dirty="0"/>
-          </a:p>
-        </p:txBody>
-      </p:sp>
-      <p:sp>
-        <p:nvSpPr>
-          <p:cNvPr id="15" name="Shape 13"/>
-          <p:cNvSpPr/>
-          <p:nvPr/>
-        </p:nvSpPr>
-        <p:spPr>
-          <a:xfrm>
-            <a:off x="8924544" y="3730752"/>
-            <a:ext cx="1033272" cy="749808"/>
-          </a:xfrm>
-          <a:prstGeom prst="roundRect">
-            <a:avLst>
-              <a:gd name="adj" fmla="val 14634"/>
-            </a:avLst>
-          </a:prstGeom>
-          <a:solidFill>
-            <a:srgbClr val="2F8A28"/>
-          </a:solidFill>
-          <a:ln w="12700">
-            <a:solidFill>
-              <a:srgbClr val="2F8A28"/>
-            </a:solidFill>
-            <a:prstDash val="solid"/>
-          </a:ln>
-        </p:spPr>
-      </p:sp>
-      <p:sp>
-        <p:nvSpPr>
-          <p:cNvPr id="16" name="Text 14"/>
-          <p:cNvSpPr/>
-          <p:nvPr/>
-        </p:nvSpPr>
-        <p:spPr>
-          <a:xfrm>
-            <a:off x="8997696" y="3922776"/>
-            <a:ext cx="886968" cy="310896"/>
-          </a:xfrm>
-          <a:prstGeom prst="rect">
-            <a:avLst/>
-          </a:prstGeom>
-          <a:noFill/>
-          <a:ln/>
-        </p:spPr>
-        <p:txBody>
-          <a:bodyPr wrap="square" lIns="0" tIns="0" rIns="0" bIns="0" rtlCol="0" anchor="ctr">
-            <a:normAutofit/>
-          </a:bodyPr>
-          <a:lstStyle/>
-          <a:p>
-            <a:pPr algn="ctr" indent="0" marL="0">
-              <a:buNone/>
-            </a:pPr>
-            <a:r>
-              <a:rPr lang="en-US" sz="1500" b="1" dirty="0">
-                <a:solidFill>
-                  <a:srgbClr val="FFFFFF"/>
-                </a:solidFill>
-                <a:latin typeface="Aptos" pitchFamily="34" charset="0"/>
-                <a:ea typeface="Aptos" pitchFamily="34" charset="-122"/>
-                <a:cs typeface="Aptos" pitchFamily="34" charset="-120"/>
-              </a:rPr>
-              <a:t>Apply</a:t>
-            </a:r>
-            <a:endParaRPr lang="en-US" sz="1500" dirty="0"/>
-          </a:p>
-        </p:txBody>
-      </p:sp>
-      <p:sp>
-        <p:nvSpPr>
-          <p:cNvPr id="17" name="Shape 15"/>
-          <p:cNvSpPr/>
-          <p:nvPr/>
-        </p:nvSpPr>
-        <p:spPr>
-          <a:xfrm>
-            <a:off x="10213848" y="3730752"/>
-            <a:ext cx="1033272" cy="749808"/>
-          </a:xfrm>
-          <a:prstGeom prst="roundRect">
-            <a:avLst>
-              <a:gd name="adj" fmla="val 14634"/>
-            </a:avLst>
-          </a:prstGeom>
-          <a:solidFill>
-            <a:srgbClr val="6A4CA3"/>
-          </a:solidFill>
-          <a:ln w="12700">
-            <a:solidFill>
-              <a:srgbClr val="6A4CA3"/>
-            </a:solidFill>
-            <a:prstDash val="solid"/>
-          </a:ln>
-        </p:spPr>
-      </p:sp>
-      <p:sp>
-        <p:nvSpPr>
-          <p:cNvPr id="18" name="Text 16"/>
-          <p:cNvSpPr/>
-          <p:nvPr/>
-        </p:nvSpPr>
-        <p:spPr>
-          <a:xfrm>
-            <a:off x="10287000" y="3922776"/>
-            <a:ext cx="886968" cy="310896"/>
-          </a:xfrm>
-          <a:prstGeom prst="rect">
-            <a:avLst/>
-          </a:prstGeom>
-          <a:noFill/>
-          <a:ln/>
-        </p:spPr>
-        <p:txBody>
-          <a:bodyPr wrap="square" lIns="0" tIns="0" rIns="0" bIns="0" rtlCol="0" anchor="ctr">
-            <a:normAutofit/>
-          </a:bodyPr>
-          <a:lstStyle/>
-          <a:p>
-            <a:pPr algn="ctr" indent="0" marL="0">
-              <a:buNone/>
-            </a:pPr>
-            <a:r>
-              <a:rPr lang="en-US" sz="1500" b="1" dirty="0">
-                <a:solidFill>
-                  <a:srgbClr val="FFFFFF"/>
-                </a:solidFill>
-                <a:latin typeface="Aptos" pitchFamily="34" charset="0"/>
-                <a:ea typeface="Aptos" pitchFamily="34" charset="-122"/>
-                <a:cs typeface="Aptos" pitchFamily="34" charset="-120"/>
-              </a:rPr>
-              <a:t>Document</a:t>
-            </a:r>
-            <a:endParaRPr lang="en-US" sz="1500" dirty="0"/>
+            <a:r>
+              <a:rPr lang="en-US" sz="1380" dirty="0">
+                <a:solidFill>
+                  <a:srgbClr val="17364A"/>
+                </a:solidFill>
+                <a:latin typeface="Aptos" pitchFamily="34" charset="0"/>
+                <a:ea typeface="Aptos" pitchFamily="34" charset="-122"/>
+                <a:cs typeface="Aptos" pitchFamily="34" charset="-120"/>
+              </a:rPr>
+              <a:t>Read the module for shared vocabulary and context.</a:t>
+            </a:r>
+            <a:endParaRPr lang="en-US" sz="1380" dirty="0"/>
+          </a:p>
+          <a:p>
+            <a:r>
+              <a:rPr lang="en-US" sz="1380" dirty="0">
+                <a:solidFill>
+                  <a:srgbClr val="17364A"/>
+                </a:solidFill>
+                <a:latin typeface="Aptos" pitchFamily="34" charset="0"/>
+                <a:ea typeface="Aptos" pitchFamily="34" charset="-122"/>
+                <a:cs typeface="Aptos" pitchFamily="34" charset="-120"/>
+              </a:rPr>
+              <a:t>Complete the practical exercise to apply the concept.</a:t>
+            </a:r>
+            <a:endParaRPr lang="en-US" sz="1380" dirty="0"/>
+          </a:p>
+          <a:p>
+            <a:r>
+              <a:rPr lang="en-US" sz="1380" dirty="0">
+                <a:solidFill>
+                  <a:srgbClr val="17364A"/>
+                </a:solidFill>
+                <a:latin typeface="Aptos" pitchFamily="34" charset="0"/>
+                <a:ea typeface="Aptos" pitchFamily="34" charset="-122"/>
+                <a:cs typeface="Aptos" pitchFamily="34" charset="-120"/>
+              </a:rPr>
+              <a:t>Use the notes and references for deeper review.</a:t>
+            </a:r>
+            <a:endParaRPr lang="en-US" sz="1380" dirty="0"/>
           </a:p>
         </p:txBody>
       </p:sp>
@@ -11351,13 +10955,11 @@
             </a:avLst>
           </a:prstGeom>
           <a:solidFill>
-            <a:srgbClr val="FFFFFF">
-              <a:alpha val="88000"/>
-            </a:srgbClr>
+            <a:srgbClr val="FFFFFF"/>
           </a:solidFill>
           <a:ln w="12700">
             <a:solidFill>
-              <a:srgbClr val="D6E8F2"/>
+              <a:srgbClr val="B9D7E6"/>
             </a:solidFill>
             <a:prstDash val="solid"/>
           </a:ln>
@@ -11365,119 +10967,112 @@
       </p:sp>
       <p:sp>
         <p:nvSpPr>
-          <p:cNvPr id="14" name="Shape 12"/>
-          <p:cNvSpPr/>
-          <p:nvPr/>
-        </p:nvSpPr>
-        <p:spPr>
-          <a:xfrm>
-            <a:off x="8074152" y="3291840"/>
-            <a:ext cx="2596896" cy="749808"/>
-          </a:xfrm>
-          <a:prstGeom prst="rect">
-            <a:avLst/>
-          </a:prstGeom>
-          <a:solidFill>
-            <a:srgbClr val="EAF6F8"/>
-          </a:solidFill>
-          <a:ln w="12700">
-            <a:solidFill>
-              <a:srgbClr val="8ABBD8"/>
-            </a:solidFill>
-            <a:prstDash val="solid"/>
-          </a:ln>
-        </p:spPr>
-      </p:sp>
-      <p:sp>
-        <p:nvSpPr>
-          <p:cNvPr id="15" name="Shape 13"/>
-          <p:cNvSpPr/>
-          <p:nvPr/>
-        </p:nvSpPr>
-        <p:spPr>
-          <a:xfrm>
-            <a:off x="8202168" y="3721608"/>
-            <a:ext cx="2340864" cy="0"/>
-          </a:xfrm>
-          <a:prstGeom prst="line">
-            <a:avLst/>
-          </a:prstGeom>
-          <a:noFill/>
-          <a:ln w="19050">
-            <a:solidFill>
-              <a:srgbClr val="0068B7"/>
-            </a:solidFill>
-            <a:prstDash val="solid"/>
-          </a:ln>
-        </p:spPr>
+          <p:cNvPr id="14" name="Text 12"/>
+          <p:cNvSpPr/>
+          <p:nvPr/>
+        </p:nvSpPr>
+        <p:spPr>
+          <a:xfrm>
+            <a:off x="7799832" y="2935224"/>
+            <a:ext cx="3145536" cy="256032"/>
+          </a:xfrm>
+          <a:prstGeom prst="rect">
+            <a:avLst/>
+          </a:prstGeom>
+          <a:noFill/>
+          <a:ln/>
+        </p:spPr>
+        <p:txBody>
+          <a:bodyPr wrap="square" lIns="0" tIns="0" rIns="0" bIns="0" rtlCol="0" anchor="ctr"/>
+          <a:lstStyle/>
+          <a:p>
+            <a:pPr indent="0" marL="0">
+              <a:buNone/>
+            </a:pPr>
+            <a:r>
+              <a:rPr lang="en-US" sz="1300" b="1" dirty="0">
+                <a:solidFill>
+                  <a:srgbClr val="0068B7"/>
+                </a:solidFill>
+                <a:latin typeface="Aptos" pitchFamily="34" charset="0"/>
+                <a:ea typeface="Aptos" pitchFamily="34" charset="-122"/>
+                <a:cs typeface="Aptos" pitchFamily="34" charset="-120"/>
+              </a:rPr>
+              <a:t>Concept checkpoints</a:t>
+            </a:r>
+            <a:endParaRPr lang="en-US" sz="1300" dirty="0"/>
+          </a:p>
+        </p:txBody>
+      </p:sp>
+      <p:sp>
+        <p:nvSpPr>
+          <p:cNvPr id="15" name="Text 13"/>
+          <p:cNvSpPr/>
+          <p:nvPr/>
+        </p:nvSpPr>
+        <p:spPr>
+          <a:xfrm>
+            <a:off x="7818120" y="3300984"/>
+            <a:ext cx="3090672" cy="877824"/>
+          </a:xfrm>
+          <a:prstGeom prst="rect">
+            <a:avLst/>
+          </a:prstGeom>
+          <a:noFill/>
+          <a:ln/>
+        </p:spPr>
+        <p:txBody>
+          <a:bodyPr wrap="square" lIns="254" tIns="254" rIns="254" bIns="254" rtlCol="0" anchor="t">
+            <a:normAutofit/>
+          </a:bodyPr>
+          <a:lstStyle/>
+          <a:p>
+            <a:r>
+              <a:rPr lang="en-US" sz="1380" dirty="0">
+                <a:solidFill>
+                  <a:srgbClr val="17364A"/>
+                </a:solidFill>
+                <a:latin typeface="Aptos" pitchFamily="34" charset="0"/>
+                <a:ea typeface="Aptos" pitchFamily="34" charset="-122"/>
+                <a:cs typeface="Aptos" pitchFamily="34" charset="-120"/>
+              </a:rPr>
+              <a:t>Machine learning use case review worksheet</a:t>
+            </a:r>
+            <a:endParaRPr lang="en-US" sz="1380" dirty="0"/>
+          </a:p>
+          <a:p>
+            <a:r>
+              <a:rPr lang="en-US" sz="1380" dirty="0">
+                <a:solidFill>
+                  <a:srgbClr val="17364A"/>
+                </a:solidFill>
+                <a:latin typeface="Aptos" pitchFamily="34" charset="0"/>
+                <a:ea typeface="Aptos" pitchFamily="34" charset="-122"/>
+                <a:cs typeface="Aptos" pitchFamily="34" charset="-120"/>
+              </a:rPr>
+              <a:t>Feature and label inventory</a:t>
+            </a:r>
+            <a:endParaRPr lang="en-US" sz="1380" dirty="0"/>
+          </a:p>
+          <a:p>
+            <a:r>
+              <a:rPr lang="en-US" sz="1380" dirty="0">
+                <a:solidFill>
+                  <a:srgbClr val="17364A"/>
+                </a:solidFill>
+                <a:latin typeface="Aptos" pitchFamily="34" charset="0"/>
+                <a:ea typeface="Aptos" pitchFamily="34" charset="-122"/>
+                <a:cs typeface="Aptos" pitchFamily="34" charset="-120"/>
+              </a:rPr>
+              <a:t>Initial model risk and safeguard list</a:t>
+            </a:r>
+            <a:endParaRPr lang="en-US" sz="1380" dirty="0"/>
+          </a:p>
+        </p:txBody>
       </p:sp>
       <p:sp>
         <p:nvSpPr>
           <p:cNvPr id="16" name="Shape 14"/>
-          <p:cNvSpPr/>
-          <p:nvPr/>
-        </p:nvSpPr>
-        <p:spPr>
-          <a:xfrm>
-            <a:off x="9198864" y="4206240"/>
-            <a:ext cx="347472" cy="347472"/>
-          </a:xfrm>
-          <a:prstGeom prst="ellipse">
-            <a:avLst/>
-          </a:prstGeom>
-          <a:solidFill>
-            <a:srgbClr val="2F8A28"/>
-          </a:solidFill>
-          <a:ln w="12700">
-            <a:solidFill>
-              <a:srgbClr val="2F8A28"/>
-            </a:solidFill>
-            <a:prstDash val="solid"/>
-          </a:ln>
-        </p:spPr>
-      </p:sp>
-      <p:sp>
-        <p:nvSpPr>
-          <p:cNvPr id="17" name="Text 15"/>
-          <p:cNvSpPr/>
-          <p:nvPr/>
-        </p:nvSpPr>
-        <p:spPr>
-          <a:xfrm>
-            <a:off x="7909560" y="3977640"/>
-            <a:ext cx="2926080" cy="182880"/>
-          </a:xfrm>
-          <a:prstGeom prst="rect">
-            <a:avLst/>
-          </a:prstGeom>
-          <a:noFill/>
-          <a:ln/>
-        </p:spPr>
-        <p:txBody>
-          <a:bodyPr wrap="square" lIns="0" tIns="0" rIns="0" bIns="0" rtlCol="0" anchor="ctr"/>
-          <a:lstStyle/>
-          <a:p>
-            <a:pPr algn="ctr" indent="0" marL="0">
-              <a:buNone/>
-            </a:pPr>
-            <a:r>
-              <a:rPr lang="en-US" sz="1000" dirty="0">
-                <a:solidFill>
-                  <a:srgbClr val="003A63"/>
-                </a:solidFill>
-                <a:latin typeface="Aptos" pitchFamily="34" charset="0"/>
-                <a:ea typeface="Aptos" pitchFamily="34" charset="-122"/>
-                <a:cs typeface="Aptos" pitchFamily="34" charset="-120"/>
-              </a:rPr>
-              <a:t>Concept to action</a:t>
-            </a:r>
-            <a:endParaRPr lang="en-US" sz="1000" dirty="0"/>
-          </a:p>
-        </p:txBody>
-      </p:sp>
-      <p:sp>
-        <p:nvSpPr>
-          <p:cNvPr id="18" name="Shape 16"/>
           <p:cNvSpPr/>
           <p:nvPr/>
         </p:nvSpPr>
@@ -11504,7 +11099,7 @@
       </p:sp>
       <p:sp>
         <p:nvSpPr>
-          <p:cNvPr id="19" name="Text 17"/>
+          <p:cNvPr id="17" name="Text 15"/>
           <p:cNvSpPr/>
           <p:nvPr/>
         </p:nvSpPr>
@@ -11543,7 +11138,7 @@
       </p:sp>
       <p:sp>
         <p:nvSpPr>
-          <p:cNvPr id="20" name="Text 18"/>
+          <p:cNvPr id="18" name="Text 16"/>
           <p:cNvSpPr/>
           <p:nvPr/>
         </p:nvSpPr>
@@ -12051,13 +11646,11 @@
             </a:avLst>
           </a:prstGeom>
           <a:solidFill>
-            <a:srgbClr val="FFFFFF">
-              <a:alpha val="88000"/>
-            </a:srgbClr>
+            <a:srgbClr val="FFFFFF"/>
           </a:solidFill>
           <a:ln w="12700">
             <a:solidFill>
-              <a:srgbClr val="D6E8F2"/>
+              <a:srgbClr val="B9D7E6"/>
             </a:solidFill>
             <a:prstDash val="solid"/>
           </a:ln>
@@ -12065,119 +11658,112 @@
       </p:sp>
       <p:sp>
         <p:nvSpPr>
-          <p:cNvPr id="14" name="Shape 12"/>
-          <p:cNvSpPr/>
-          <p:nvPr/>
-        </p:nvSpPr>
-        <p:spPr>
-          <a:xfrm>
-            <a:off x="8074152" y="3291840"/>
-            <a:ext cx="2596896" cy="749808"/>
-          </a:xfrm>
-          <a:prstGeom prst="rect">
-            <a:avLst/>
-          </a:prstGeom>
-          <a:solidFill>
-            <a:srgbClr val="EAF6F8"/>
-          </a:solidFill>
-          <a:ln w="12700">
-            <a:solidFill>
-              <a:srgbClr val="8ABBD8"/>
-            </a:solidFill>
-            <a:prstDash val="solid"/>
-          </a:ln>
-        </p:spPr>
-      </p:sp>
-      <p:sp>
-        <p:nvSpPr>
-          <p:cNvPr id="15" name="Shape 13"/>
-          <p:cNvSpPr/>
-          <p:nvPr/>
-        </p:nvSpPr>
-        <p:spPr>
-          <a:xfrm>
-            <a:off x="8202168" y="3721608"/>
-            <a:ext cx="2340864" cy="0"/>
-          </a:xfrm>
-          <a:prstGeom prst="line">
-            <a:avLst/>
-          </a:prstGeom>
-          <a:noFill/>
-          <a:ln w="19050">
-            <a:solidFill>
-              <a:srgbClr val="0068B7"/>
-            </a:solidFill>
-            <a:prstDash val="solid"/>
-          </a:ln>
-        </p:spPr>
+          <p:cNvPr id="14" name="Text 12"/>
+          <p:cNvSpPr/>
+          <p:nvPr/>
+        </p:nvSpPr>
+        <p:spPr>
+          <a:xfrm>
+            <a:off x="7799832" y="2935224"/>
+            <a:ext cx="3145536" cy="256032"/>
+          </a:xfrm>
+          <a:prstGeom prst="rect">
+            <a:avLst/>
+          </a:prstGeom>
+          <a:noFill/>
+          <a:ln/>
+        </p:spPr>
+        <p:txBody>
+          <a:bodyPr wrap="square" lIns="0" tIns="0" rIns="0" bIns="0" rtlCol="0" anchor="ctr"/>
+          <a:lstStyle/>
+          <a:p>
+            <a:pPr indent="0" marL="0">
+              <a:buNone/>
+            </a:pPr>
+            <a:r>
+              <a:rPr lang="en-US" sz="1300" b="1" dirty="0">
+                <a:solidFill>
+                  <a:srgbClr val="0068B7"/>
+                </a:solidFill>
+                <a:latin typeface="Aptos" pitchFamily="34" charset="0"/>
+                <a:ea typeface="Aptos" pitchFamily="34" charset="-122"/>
+                <a:cs typeface="Aptos" pitchFamily="34" charset="-120"/>
+              </a:rPr>
+              <a:t>Concept checkpoints</a:t>
+            </a:r>
+            <a:endParaRPr lang="en-US" sz="1300" dirty="0"/>
+          </a:p>
+        </p:txBody>
+      </p:sp>
+      <p:sp>
+        <p:nvSpPr>
+          <p:cNvPr id="15" name="Text 13"/>
+          <p:cNvSpPr/>
+          <p:nvPr/>
+        </p:nvSpPr>
+        <p:spPr>
+          <a:xfrm>
+            <a:off x="7818120" y="3300984"/>
+            <a:ext cx="3090672" cy="877824"/>
+          </a:xfrm>
+          <a:prstGeom prst="rect">
+            <a:avLst/>
+          </a:prstGeom>
+          <a:noFill/>
+          <a:ln/>
+        </p:spPr>
+        <p:txBody>
+          <a:bodyPr wrap="square" lIns="254" tIns="254" rIns="254" bIns="254" rtlCol="0" anchor="t">
+            <a:normAutofit/>
+          </a:bodyPr>
+          <a:lstStyle/>
+          <a:p>
+            <a:r>
+              <a:rPr lang="en-US" sz="1380" dirty="0">
+                <a:solidFill>
+                  <a:srgbClr val="17364A"/>
+                </a:solidFill>
+                <a:latin typeface="Aptos" pitchFamily="34" charset="0"/>
+                <a:ea typeface="Aptos" pitchFamily="34" charset="-122"/>
+                <a:cs typeface="Aptos" pitchFamily="34" charset="-120"/>
+              </a:rPr>
+              <a:t>1.</a:t>
+            </a:r>
+            <a:endParaRPr lang="en-US" sz="1380" dirty="0"/>
+          </a:p>
+          <a:p>
+            <a:r>
+              <a:rPr lang="en-US" sz="1380" dirty="0">
+                <a:solidFill>
+                  <a:srgbClr val="17364A"/>
+                </a:solidFill>
+                <a:latin typeface="Aptos" pitchFamily="34" charset="0"/>
+                <a:ea typeface="Aptos" pitchFamily="34" charset="-122"/>
+                <a:cs typeface="Aptos" pitchFamily="34" charset="-120"/>
+              </a:rPr>
+              <a:t>Which statement best describes supervised learning?</a:t>
+            </a:r>
+            <a:endParaRPr lang="en-US" sz="1380" dirty="0"/>
+          </a:p>
+          <a:p>
+            <a:r>
+              <a:rPr lang="en-US" sz="1380" dirty="0">
+                <a:solidFill>
+                  <a:srgbClr val="17364A"/>
+                </a:solidFill>
+                <a:latin typeface="Aptos" pitchFamily="34" charset="0"/>
+                <a:ea typeface="Aptos" pitchFamily="34" charset="-122"/>
+                <a:cs typeface="Aptos" pitchFamily="34" charset="-120"/>
+              </a:rPr>
+              <a:t>2.</a:t>
+            </a:r>
+            <a:endParaRPr lang="en-US" sz="1380" dirty="0"/>
+          </a:p>
+        </p:txBody>
       </p:sp>
       <p:sp>
         <p:nvSpPr>
           <p:cNvPr id="16" name="Shape 14"/>
-          <p:cNvSpPr/>
-          <p:nvPr/>
-        </p:nvSpPr>
-        <p:spPr>
-          <a:xfrm>
-            <a:off x="9198864" y="4206240"/>
-            <a:ext cx="347472" cy="347472"/>
-          </a:xfrm>
-          <a:prstGeom prst="ellipse">
-            <a:avLst/>
-          </a:prstGeom>
-          <a:solidFill>
-            <a:srgbClr val="2F8A28"/>
-          </a:solidFill>
-          <a:ln w="12700">
-            <a:solidFill>
-              <a:srgbClr val="2F8A28"/>
-            </a:solidFill>
-            <a:prstDash val="solid"/>
-          </a:ln>
-        </p:spPr>
-      </p:sp>
-      <p:sp>
-        <p:nvSpPr>
-          <p:cNvPr id="17" name="Text 15"/>
-          <p:cNvSpPr/>
-          <p:nvPr/>
-        </p:nvSpPr>
-        <p:spPr>
-          <a:xfrm>
-            <a:off x="7909560" y="3977640"/>
-            <a:ext cx="2926080" cy="182880"/>
-          </a:xfrm>
-          <a:prstGeom prst="rect">
-            <a:avLst/>
-          </a:prstGeom>
-          <a:noFill/>
-          <a:ln/>
-        </p:spPr>
-        <p:txBody>
-          <a:bodyPr wrap="square" lIns="0" tIns="0" rIns="0" bIns="0" rtlCol="0" anchor="ctr"/>
-          <a:lstStyle/>
-          <a:p>
-            <a:pPr algn="ctr" indent="0" marL="0">
-              <a:buNone/>
-            </a:pPr>
-            <a:r>
-              <a:rPr lang="en-US" sz="1000" dirty="0">
-                <a:solidFill>
-                  <a:srgbClr val="003A63"/>
-                </a:solidFill>
-                <a:latin typeface="Aptos" pitchFamily="34" charset="0"/>
-                <a:ea typeface="Aptos" pitchFamily="34" charset="-122"/>
-                <a:cs typeface="Aptos" pitchFamily="34" charset="-120"/>
-              </a:rPr>
-              <a:t>Concept to action</a:t>
-            </a:r>
-            <a:endParaRPr lang="en-US" sz="1000" dirty="0"/>
-          </a:p>
-        </p:txBody>
-      </p:sp>
-      <p:sp>
-        <p:nvSpPr>
-          <p:cNvPr id="18" name="Shape 16"/>
           <p:cNvSpPr/>
           <p:nvPr/>
         </p:nvSpPr>
@@ -12204,7 +11790,7 @@
       </p:sp>
       <p:sp>
         <p:nvSpPr>
-          <p:cNvPr id="19" name="Text 17"/>
+          <p:cNvPr id="17" name="Text 15"/>
           <p:cNvSpPr/>
           <p:nvPr/>
         </p:nvSpPr>
@@ -12243,7 +11829,7 @@
       </p:sp>
       <p:sp>
         <p:nvSpPr>
-          <p:cNvPr id="20" name="Text 18"/>
+          <p:cNvPr id="18" name="Text 16"/>
           <p:cNvSpPr/>
           <p:nvPr/>
         </p:nvSpPr>
@@ -12751,13 +12337,11 @@
             </a:avLst>
           </a:prstGeom>
           <a:solidFill>
-            <a:srgbClr val="FFFFFF">
-              <a:alpha val="88000"/>
-            </a:srgbClr>
+            <a:srgbClr val="FFFFFF"/>
           </a:solidFill>
           <a:ln w="12700">
             <a:solidFill>
-              <a:srgbClr val="D6E8F2"/>
+              <a:srgbClr val="B9D7E6"/>
             </a:solidFill>
             <a:prstDash val="solid"/>
           </a:ln>
@@ -12765,119 +12349,98 @@
       </p:sp>
       <p:sp>
         <p:nvSpPr>
-          <p:cNvPr id="14" name="Shape 12"/>
-          <p:cNvSpPr/>
-          <p:nvPr/>
-        </p:nvSpPr>
-        <p:spPr>
-          <a:xfrm>
-            <a:off x="8074152" y="3291840"/>
-            <a:ext cx="2596896" cy="749808"/>
-          </a:xfrm>
-          <a:prstGeom prst="rect">
-            <a:avLst/>
-          </a:prstGeom>
-          <a:solidFill>
-            <a:srgbClr val="EAF6F8"/>
-          </a:solidFill>
-          <a:ln w="12700">
-            <a:solidFill>
-              <a:srgbClr val="8ABBD8"/>
-            </a:solidFill>
-            <a:prstDash val="solid"/>
-          </a:ln>
-        </p:spPr>
-      </p:sp>
-      <p:sp>
-        <p:nvSpPr>
-          <p:cNvPr id="15" name="Shape 13"/>
-          <p:cNvSpPr/>
-          <p:nvPr/>
-        </p:nvSpPr>
-        <p:spPr>
-          <a:xfrm>
-            <a:off x="8202168" y="3721608"/>
-            <a:ext cx="2340864" cy="0"/>
-          </a:xfrm>
-          <a:prstGeom prst="line">
-            <a:avLst/>
-          </a:prstGeom>
-          <a:noFill/>
-          <a:ln w="19050">
-            <a:solidFill>
-              <a:srgbClr val="0068B7"/>
-            </a:solidFill>
-            <a:prstDash val="solid"/>
-          </a:ln>
-        </p:spPr>
+          <p:cNvPr id="14" name="Text 12"/>
+          <p:cNvSpPr/>
+          <p:nvPr/>
+        </p:nvSpPr>
+        <p:spPr>
+          <a:xfrm>
+            <a:off x="7799832" y="2935224"/>
+            <a:ext cx="3145536" cy="256032"/>
+          </a:xfrm>
+          <a:prstGeom prst="rect">
+            <a:avLst/>
+          </a:prstGeom>
+          <a:noFill/>
+          <a:ln/>
+        </p:spPr>
+        <p:txBody>
+          <a:bodyPr wrap="square" lIns="0" tIns="0" rIns="0" bIns="0" rtlCol="0" anchor="ctr"/>
+          <a:lstStyle/>
+          <a:p>
+            <a:pPr indent="0" marL="0">
+              <a:buNone/>
+            </a:pPr>
+            <a:r>
+              <a:rPr lang="en-US" sz="1300" b="1" dirty="0">
+                <a:solidFill>
+                  <a:srgbClr val="0068B7"/>
+                </a:solidFill>
+                <a:latin typeface="Aptos" pitchFamily="34" charset="0"/>
+                <a:ea typeface="Aptos" pitchFamily="34" charset="-122"/>
+                <a:cs typeface="Aptos" pitchFamily="34" charset="-120"/>
+              </a:rPr>
+              <a:t>Concept checkpoints</a:t>
+            </a:r>
+            <a:endParaRPr lang="en-US" sz="1300" dirty="0"/>
+          </a:p>
+        </p:txBody>
+      </p:sp>
+      <p:sp>
+        <p:nvSpPr>
+          <p:cNvPr id="15" name="Text 13"/>
+          <p:cNvSpPr/>
+          <p:nvPr/>
+        </p:nvSpPr>
+        <p:spPr>
+          <a:xfrm>
+            <a:off x="7818120" y="3300984"/>
+            <a:ext cx="3090672" cy="877824"/>
+          </a:xfrm>
+          <a:prstGeom prst="rect">
+            <a:avLst/>
+          </a:prstGeom>
+          <a:noFill/>
+          <a:ln/>
+        </p:spPr>
+        <p:txBody>
+          <a:bodyPr wrap="square" lIns="254" tIns="254" rIns="254" bIns="254" rtlCol="0" anchor="t">
+            <a:normAutofit/>
+          </a:bodyPr>
+          <a:lstStyle/>
+          <a:p>
+            <a:r>
+              <a:rPr lang="en-US" sz="1380" dirty="0">
+                <a:solidFill>
+                  <a:srgbClr val="17364A"/>
+                </a:solidFill>
+                <a:latin typeface="Aptos" pitchFamily="34" charset="0"/>
+                <a:ea typeface="Aptos" pitchFamily="34" charset="-122"/>
+                <a:cs typeface="Aptos" pitchFamily="34" charset="-120"/>
+              </a:rPr>
+              <a:t>NIST Artificial Intelligence Risk Management Framework:.</a:t>
+            </a:r>
+            <a:endParaRPr lang="en-US" sz="1380" dirty="0"/>
+          </a:p>
+          <a:p>
+            <a:r>
+              <a:rPr lang="en-US" sz="1380" dirty="0">
+                <a:solidFill>
+                  <a:srgbClr val="17364A"/>
+                </a:solidFill>
+                <a:latin typeface="Aptos" pitchFamily="34" charset="0"/>
+                <a:ea typeface="Aptos" pitchFamily="34" charset="-122"/>
+                <a:cs typeface="Aptos" pitchFamily="34" charset="-120"/>
+              </a:rPr>
+              <a:t>CDC Public Health Data Strategy:.</a:t>
+            </a:r>
+            <a:endParaRPr lang="en-US" sz="1380" dirty="0"/>
+          </a:p>
+        </p:txBody>
       </p:sp>
       <p:sp>
         <p:nvSpPr>
           <p:cNvPr id="16" name="Shape 14"/>
-          <p:cNvSpPr/>
-          <p:nvPr/>
-        </p:nvSpPr>
-        <p:spPr>
-          <a:xfrm>
-            <a:off x="9198864" y="4206240"/>
-            <a:ext cx="347472" cy="347472"/>
-          </a:xfrm>
-          <a:prstGeom prst="ellipse">
-            <a:avLst/>
-          </a:prstGeom>
-          <a:solidFill>
-            <a:srgbClr val="2F8A28"/>
-          </a:solidFill>
-          <a:ln w="12700">
-            <a:solidFill>
-              <a:srgbClr val="2F8A28"/>
-            </a:solidFill>
-            <a:prstDash val="solid"/>
-          </a:ln>
-        </p:spPr>
-      </p:sp>
-      <p:sp>
-        <p:nvSpPr>
-          <p:cNvPr id="17" name="Text 15"/>
-          <p:cNvSpPr/>
-          <p:nvPr/>
-        </p:nvSpPr>
-        <p:spPr>
-          <a:xfrm>
-            <a:off x="7909560" y="3977640"/>
-            <a:ext cx="2926080" cy="182880"/>
-          </a:xfrm>
-          <a:prstGeom prst="rect">
-            <a:avLst/>
-          </a:prstGeom>
-          <a:noFill/>
-          <a:ln/>
-        </p:spPr>
-        <p:txBody>
-          <a:bodyPr wrap="square" lIns="0" tIns="0" rIns="0" bIns="0" rtlCol="0" anchor="ctr"/>
-          <a:lstStyle/>
-          <a:p>
-            <a:pPr algn="ctr" indent="0" marL="0">
-              <a:buNone/>
-            </a:pPr>
-            <a:r>
-              <a:rPr lang="en-US" sz="1000" dirty="0">
-                <a:solidFill>
-                  <a:srgbClr val="003A63"/>
-                </a:solidFill>
-                <a:latin typeface="Aptos" pitchFamily="34" charset="0"/>
-                <a:ea typeface="Aptos" pitchFamily="34" charset="-122"/>
-                <a:cs typeface="Aptos" pitchFamily="34" charset="-120"/>
-              </a:rPr>
-              <a:t>Concept to action</a:t>
-            </a:r>
-            <a:endParaRPr lang="en-US" sz="1000" dirty="0"/>
-          </a:p>
-        </p:txBody>
-      </p:sp>
-      <p:sp>
-        <p:nvSpPr>
-          <p:cNvPr id="18" name="Shape 16"/>
           <p:cNvSpPr/>
           <p:nvPr/>
         </p:nvSpPr>
@@ -12904,7 +12467,7 @@
       </p:sp>
       <p:sp>
         <p:nvSpPr>
-          <p:cNvPr id="19" name="Text 17"/>
+          <p:cNvPr id="17" name="Text 15"/>
           <p:cNvSpPr/>
           <p:nvPr/>
         </p:nvSpPr>
@@ -12943,7 +12506,7 @@
       </p:sp>
       <p:sp>
         <p:nvSpPr>
-          <p:cNvPr id="20" name="Text 18"/>
+          <p:cNvPr id="18" name="Text 16"/>
           <p:cNvSpPr/>
           <p:nvPr/>
         </p:nvSpPr>
@@ -13456,20 +13019,20 @@
         </p:nvSpPr>
         <p:spPr>
           <a:xfrm>
-            <a:off x="7818120" y="3977640"/>
-            <a:ext cx="972312" cy="749808"/>
+            <a:off x="8046720" y="3794760"/>
+            <a:ext cx="3063240" cy="1600200"/>
           </a:xfrm>
           <a:prstGeom prst="roundRect">
             <a:avLst>
-              <a:gd name="adj" fmla="val 14634"/>
+              <a:gd name="adj" fmla="val 6857"/>
             </a:avLst>
           </a:prstGeom>
           <a:solidFill>
-            <a:srgbClr val="0068B7"/>
+            <a:srgbClr val="FFFFFF"/>
           </a:solidFill>
           <a:ln w="12700">
             <a:solidFill>
-              <a:srgbClr val="0068B7"/>
+              <a:srgbClr val="B9D7E6"/>
             </a:solidFill>
             <a:prstDash val="solid"/>
           </a:ln>
@@ -13483,172 +13046,100 @@
         </p:nvSpPr>
         <p:spPr>
           <a:xfrm>
-            <a:off x="7891272" y="4169664"/>
-            <a:ext cx="826008" cy="310896"/>
-          </a:xfrm>
-          <a:prstGeom prst="rect">
-            <a:avLst/>
-          </a:prstGeom>
-          <a:noFill/>
-          <a:ln/>
-        </p:spPr>
-        <p:txBody>
-          <a:bodyPr wrap="square" lIns="0" tIns="0" rIns="0" bIns="0" rtlCol="0" anchor="ctr">
+            <a:off x="8211312" y="3941064"/>
+            <a:ext cx="2734056" cy="256032"/>
+          </a:xfrm>
+          <a:prstGeom prst="rect">
+            <a:avLst/>
+          </a:prstGeom>
+          <a:noFill/>
+          <a:ln/>
+        </p:spPr>
+        <p:txBody>
+          <a:bodyPr wrap="square" lIns="0" tIns="0" rIns="0" bIns="0" rtlCol="0" anchor="ctr"/>
+          <a:lstStyle/>
+          <a:p>
+            <a:pPr indent="0" marL="0">
+              <a:buNone/>
+            </a:pPr>
+            <a:r>
+              <a:rPr lang="en-US" sz="1300" b="1" dirty="0">
+                <a:solidFill>
+                  <a:srgbClr val="0068B7"/>
+                </a:solidFill>
+                <a:latin typeface="Aptos" pitchFamily="34" charset="0"/>
+                <a:ea typeface="Aptos" pitchFamily="34" charset="-122"/>
+                <a:cs typeface="Aptos" pitchFamily="34" charset="-120"/>
+              </a:rPr>
+              <a:t>Use the play links to</a:t>
+            </a:r>
+            <a:endParaRPr lang="en-US" sz="1300" dirty="0"/>
+          </a:p>
+        </p:txBody>
+      </p:sp>
+      <p:sp>
+        <p:nvSpPr>
+          <p:cNvPr id="15" name="Text 13"/>
+          <p:cNvSpPr/>
+          <p:nvPr/>
+        </p:nvSpPr>
+        <p:spPr>
+          <a:xfrm>
+            <a:off x="8229600" y="4306824"/>
+            <a:ext cx="2679192" cy="941832"/>
+          </a:xfrm>
+          <a:prstGeom prst="rect">
+            <a:avLst/>
+          </a:prstGeom>
+          <a:noFill/>
+          <a:ln/>
+        </p:spPr>
+        <p:txBody>
+          <a:bodyPr wrap="square" lIns="254" tIns="254" rIns="254" bIns="254" rtlCol="0" anchor="t">
             <a:normAutofit/>
           </a:bodyPr>
           <a:lstStyle/>
           <a:p>
-            <a:pPr algn="ctr" indent="0" marL="0">
-              <a:buNone/>
-            </a:pPr>
-            <a:r>
-              <a:rPr lang="en-US" sz="1500" b="1" dirty="0">
-                <a:solidFill>
-                  <a:srgbClr val="FFFFFF"/>
-                </a:solidFill>
-                <a:latin typeface="Aptos" pitchFamily="34" charset="0"/>
-                <a:ea typeface="Aptos" pitchFamily="34" charset="-122"/>
-                <a:cs typeface="Aptos" pitchFamily="34" charset="-120"/>
-              </a:rPr>
-              <a:t>Lesson</a:t>
-            </a:r>
-            <a:endParaRPr lang="en-US" sz="1500" dirty="0"/>
-          </a:p>
-        </p:txBody>
-      </p:sp>
-      <p:sp>
-        <p:nvSpPr>
-          <p:cNvPr id="15" name="Shape 13"/>
-          <p:cNvSpPr/>
-          <p:nvPr/>
-        </p:nvSpPr>
-        <p:spPr>
-          <a:xfrm>
-            <a:off x="9046464" y="3977640"/>
-            <a:ext cx="972312" cy="749808"/>
-          </a:xfrm>
-          <a:prstGeom prst="roundRect">
-            <a:avLst>
-              <a:gd name="adj" fmla="val 14634"/>
-            </a:avLst>
-          </a:prstGeom>
-          <a:solidFill>
-            <a:srgbClr val="2F8A28"/>
-          </a:solidFill>
-          <a:ln w="12700">
-            <a:solidFill>
-              <a:srgbClr val="2F8A28"/>
-            </a:solidFill>
-            <a:prstDash val="solid"/>
-          </a:ln>
-        </p:spPr>
-      </p:sp>
-      <p:sp>
-        <p:nvSpPr>
-          <p:cNvPr id="16" name="Text 14"/>
-          <p:cNvSpPr/>
-          <p:nvPr/>
-        </p:nvSpPr>
-        <p:spPr>
-          <a:xfrm>
-            <a:off x="9119616" y="4169664"/>
-            <a:ext cx="826008" cy="310896"/>
-          </a:xfrm>
-          <a:prstGeom prst="rect">
-            <a:avLst/>
-          </a:prstGeom>
-          <a:noFill/>
-          <a:ln/>
-        </p:spPr>
-        <p:txBody>
-          <a:bodyPr wrap="square" lIns="0" tIns="0" rIns="0" bIns="0" rtlCol="0" anchor="ctr">
-            <a:normAutofit/>
-          </a:bodyPr>
-          <a:lstStyle/>
-          <a:p>
-            <a:pPr algn="ctr" indent="0" marL="0">
-              <a:buNone/>
-            </a:pPr>
-            <a:r>
-              <a:rPr lang="en-US" sz="1500" b="1" dirty="0">
-                <a:solidFill>
-                  <a:srgbClr val="FFFFFF"/>
-                </a:solidFill>
-                <a:latin typeface="Aptos" pitchFamily="34" charset="0"/>
-                <a:ea typeface="Aptos" pitchFamily="34" charset="-122"/>
-                <a:cs typeface="Aptos" pitchFamily="34" charset="-120"/>
-              </a:rPr>
-              <a:t>Plays</a:t>
-            </a:r>
-            <a:endParaRPr lang="en-US" sz="1500" dirty="0"/>
-          </a:p>
-        </p:txBody>
-      </p:sp>
-      <p:sp>
-        <p:nvSpPr>
-          <p:cNvPr id="17" name="Shape 15"/>
-          <p:cNvSpPr/>
-          <p:nvPr/>
-        </p:nvSpPr>
-        <p:spPr>
-          <a:xfrm>
-            <a:off x="10274808" y="3977640"/>
-            <a:ext cx="972312" cy="749808"/>
-          </a:xfrm>
-          <a:prstGeom prst="roundRect">
-            <a:avLst>
-              <a:gd name="adj" fmla="val 14634"/>
-            </a:avLst>
-          </a:prstGeom>
-          <a:solidFill>
-            <a:srgbClr val="6A4CA3"/>
-          </a:solidFill>
-          <a:ln w="12700">
-            <a:solidFill>
-              <a:srgbClr val="6A4CA3"/>
-            </a:solidFill>
-            <a:prstDash val="solid"/>
-          </a:ln>
-        </p:spPr>
-      </p:sp>
-      <p:sp>
-        <p:nvSpPr>
-          <p:cNvPr id="18" name="Text 16"/>
-          <p:cNvSpPr/>
-          <p:nvPr/>
-        </p:nvSpPr>
-        <p:spPr>
-          <a:xfrm>
-            <a:off x="10347960" y="4169664"/>
-            <a:ext cx="826008" cy="310896"/>
-          </a:xfrm>
-          <a:prstGeom prst="rect">
-            <a:avLst/>
-          </a:prstGeom>
-          <a:noFill/>
-          <a:ln/>
-        </p:spPr>
-        <p:txBody>
-          <a:bodyPr wrap="square" lIns="0" tIns="0" rIns="0" bIns="0" rtlCol="0" anchor="ctr">
-            <a:normAutofit/>
-          </a:bodyPr>
-          <a:lstStyle/>
-          <a:p>
-            <a:pPr algn="ctr" indent="0" marL="0">
-              <a:buNone/>
-            </a:pPr>
-            <a:r>
-              <a:rPr lang="en-US" sz="1500" b="1" dirty="0">
-                <a:solidFill>
-                  <a:srgbClr val="FFFFFF"/>
-                </a:solidFill>
-                <a:latin typeface="Aptos" pitchFamily="34" charset="0"/>
-                <a:ea typeface="Aptos" pitchFamily="34" charset="-122"/>
-                <a:cs typeface="Aptos" pitchFamily="34" charset="-120"/>
-              </a:rPr>
-              <a:t>Action</a:t>
-            </a:r>
-            <a:endParaRPr lang="en-US" sz="1500" dirty="0"/>
+            <a:r>
+              <a:rPr lang="en-US" sz="1380" dirty="0">
+                <a:solidFill>
+                  <a:srgbClr val="17364A"/>
+                </a:solidFill>
+                <a:latin typeface="Aptos" pitchFamily="34" charset="0"/>
+                <a:ea typeface="Aptos" pitchFamily="34" charset="-122"/>
+                <a:cs typeface="Aptos" pitchFamily="34" charset="-120"/>
+              </a:rPr>
+              <a:t>Locate the decision point in the playbook sequence.</a:t>
+            </a:r>
+            <a:endParaRPr lang="en-US" sz="1380" dirty="0"/>
+          </a:p>
+          <a:p>
+            <a:r>
+              <a:rPr lang="en-US" sz="1380" dirty="0">
+                <a:solidFill>
+                  <a:srgbClr val="17364A"/>
+                </a:solidFill>
+                <a:latin typeface="Aptos" pitchFamily="34" charset="0"/>
+                <a:ea typeface="Aptos" pitchFamily="34" charset="-122"/>
+                <a:cs typeface="Aptos" pitchFamily="34" charset="-120"/>
+              </a:rPr>
+              <a:t>Identify who should participate in the work.</a:t>
+            </a:r>
+            <a:endParaRPr lang="en-US" sz="1380" dirty="0"/>
+          </a:p>
+          <a:p>
+            <a:r>
+              <a:rPr lang="en-US" sz="1380" dirty="0">
+                <a:solidFill>
+                  <a:srgbClr val="17364A"/>
+                </a:solidFill>
+                <a:latin typeface="Aptos" pitchFamily="34" charset="0"/>
+                <a:ea typeface="Aptos" pitchFamily="34" charset="-122"/>
+                <a:cs typeface="Aptos" pitchFamily="34" charset="-120"/>
+              </a:rPr>
+              <a:t>Document the review, approval, or implementation step.</a:t>
+            </a:r>
+            <a:endParaRPr lang="en-US" sz="1380" dirty="0"/>
           </a:p>
         </p:txBody>
       </p:sp>
@@ -14126,20 +13617,20 @@
         </p:nvSpPr>
         <p:spPr>
           <a:xfrm>
-            <a:off x="7818120" y="3977640"/>
-            <a:ext cx="972312" cy="749808"/>
+            <a:off x="8046720" y="3794760"/>
+            <a:ext cx="3063240" cy="1600200"/>
           </a:xfrm>
           <a:prstGeom prst="roundRect">
             <a:avLst>
-              <a:gd name="adj" fmla="val 14634"/>
+              <a:gd name="adj" fmla="val 6857"/>
             </a:avLst>
           </a:prstGeom>
           <a:solidFill>
-            <a:srgbClr val="0068B7"/>
+            <a:srgbClr val="FFFFFF"/>
           </a:solidFill>
           <a:ln w="12700">
             <a:solidFill>
-              <a:srgbClr val="0068B7"/>
+              <a:srgbClr val="B9D7E6"/>
             </a:solidFill>
             <a:prstDash val="solid"/>
           </a:ln>
@@ -14153,172 +13644,100 @@
         </p:nvSpPr>
         <p:spPr>
           <a:xfrm>
-            <a:off x="7891272" y="4169664"/>
-            <a:ext cx="826008" cy="310896"/>
-          </a:xfrm>
-          <a:prstGeom prst="rect">
-            <a:avLst/>
-          </a:prstGeom>
-          <a:noFill/>
-          <a:ln/>
-        </p:spPr>
-        <p:txBody>
-          <a:bodyPr wrap="square" lIns="0" tIns="0" rIns="0" bIns="0" rtlCol="0" anchor="ctr">
+            <a:off x="8211312" y="3941064"/>
+            <a:ext cx="2734056" cy="256032"/>
+          </a:xfrm>
+          <a:prstGeom prst="rect">
+            <a:avLst/>
+          </a:prstGeom>
+          <a:noFill/>
+          <a:ln/>
+        </p:spPr>
+        <p:txBody>
+          <a:bodyPr wrap="square" lIns="0" tIns="0" rIns="0" bIns="0" rtlCol="0" anchor="ctr"/>
+          <a:lstStyle/>
+          <a:p>
+            <a:pPr indent="0" marL="0">
+              <a:buNone/>
+            </a:pPr>
+            <a:r>
+              <a:rPr lang="en-US" sz="1300" b="1" dirty="0">
+                <a:solidFill>
+                  <a:srgbClr val="0068B7"/>
+                </a:solidFill>
+                <a:latin typeface="Aptos" pitchFamily="34" charset="0"/>
+                <a:ea typeface="Aptos" pitchFamily="34" charset="-122"/>
+                <a:cs typeface="Aptos" pitchFamily="34" charset="-120"/>
+              </a:rPr>
+              <a:t>Tool selection cues</a:t>
+            </a:r>
+            <a:endParaRPr lang="en-US" sz="1300" dirty="0"/>
+          </a:p>
+        </p:txBody>
+      </p:sp>
+      <p:sp>
+        <p:nvSpPr>
+          <p:cNvPr id="15" name="Text 13"/>
+          <p:cNvSpPr/>
+          <p:nvPr/>
+        </p:nvSpPr>
+        <p:spPr>
+          <a:xfrm>
+            <a:off x="8229600" y="4306824"/>
+            <a:ext cx="2679192" cy="941832"/>
+          </a:xfrm>
+          <a:prstGeom prst="rect">
+            <a:avLst/>
+          </a:prstGeom>
+          <a:noFill/>
+          <a:ln/>
+        </p:spPr>
+        <p:txBody>
+          <a:bodyPr wrap="square" lIns="254" tIns="254" rIns="254" bIns="254" rtlCol="0" anchor="t">
             <a:normAutofit/>
           </a:bodyPr>
           <a:lstStyle/>
           <a:p>
-            <a:pPr algn="ctr" indent="0" marL="0">
-              <a:buNone/>
-            </a:pPr>
-            <a:r>
-              <a:rPr lang="en-US" sz="1500" b="1" dirty="0">
-                <a:solidFill>
-                  <a:srgbClr val="FFFFFF"/>
-                </a:solidFill>
-                <a:latin typeface="Aptos" pitchFamily="34" charset="0"/>
-                <a:ea typeface="Aptos" pitchFamily="34" charset="-122"/>
-                <a:cs typeface="Aptos" pitchFamily="34" charset="-120"/>
-              </a:rPr>
-              <a:t>Concept</a:t>
-            </a:r>
-            <a:endParaRPr lang="en-US" sz="1500" dirty="0"/>
-          </a:p>
-        </p:txBody>
-      </p:sp>
-      <p:sp>
-        <p:nvSpPr>
-          <p:cNvPr id="15" name="Shape 13"/>
-          <p:cNvSpPr/>
-          <p:nvPr/>
-        </p:nvSpPr>
-        <p:spPr>
-          <a:xfrm>
-            <a:off x="9046464" y="3977640"/>
-            <a:ext cx="972312" cy="749808"/>
-          </a:xfrm>
-          <a:prstGeom prst="roundRect">
-            <a:avLst>
-              <a:gd name="adj" fmla="val 14634"/>
-            </a:avLst>
-          </a:prstGeom>
-          <a:solidFill>
-            <a:srgbClr val="2F8A28"/>
-          </a:solidFill>
-          <a:ln w="12700">
-            <a:solidFill>
-              <a:srgbClr val="2F8A28"/>
-            </a:solidFill>
-            <a:prstDash val="solid"/>
-          </a:ln>
-        </p:spPr>
-      </p:sp>
-      <p:sp>
-        <p:nvSpPr>
-          <p:cNvPr id="16" name="Text 14"/>
-          <p:cNvSpPr/>
-          <p:nvPr/>
-        </p:nvSpPr>
-        <p:spPr>
-          <a:xfrm>
-            <a:off x="9119616" y="4169664"/>
-            <a:ext cx="826008" cy="310896"/>
-          </a:xfrm>
-          <a:prstGeom prst="rect">
-            <a:avLst/>
-          </a:prstGeom>
-          <a:noFill/>
-          <a:ln/>
-        </p:spPr>
-        <p:txBody>
-          <a:bodyPr wrap="square" lIns="0" tIns="0" rIns="0" bIns="0" rtlCol="0" anchor="ctr">
-            <a:normAutofit/>
-          </a:bodyPr>
-          <a:lstStyle/>
-          <a:p>
-            <a:pPr algn="ctr" indent="0" marL="0">
-              <a:buNone/>
-            </a:pPr>
-            <a:r>
-              <a:rPr lang="en-US" sz="1500" b="1" dirty="0">
-                <a:solidFill>
-                  <a:srgbClr val="FFFFFF"/>
-                </a:solidFill>
-                <a:latin typeface="Aptos" pitchFamily="34" charset="0"/>
-                <a:ea typeface="Aptos" pitchFamily="34" charset="-122"/>
-                <a:cs typeface="Aptos" pitchFamily="34" charset="-120"/>
-              </a:rPr>
-              <a:t>Tool</a:t>
-            </a:r>
-            <a:endParaRPr lang="en-US" sz="1500" dirty="0"/>
-          </a:p>
-        </p:txBody>
-      </p:sp>
-      <p:sp>
-        <p:nvSpPr>
-          <p:cNvPr id="17" name="Shape 15"/>
-          <p:cNvSpPr/>
-          <p:nvPr/>
-        </p:nvSpPr>
-        <p:spPr>
-          <a:xfrm>
-            <a:off x="10274808" y="3977640"/>
-            <a:ext cx="972312" cy="749808"/>
-          </a:xfrm>
-          <a:prstGeom prst="roundRect">
-            <a:avLst>
-              <a:gd name="adj" fmla="val 14634"/>
-            </a:avLst>
-          </a:prstGeom>
-          <a:solidFill>
-            <a:srgbClr val="D69A2D"/>
-          </a:solidFill>
-          <a:ln w="12700">
-            <a:solidFill>
-              <a:srgbClr val="D69A2D"/>
-            </a:solidFill>
-            <a:prstDash val="solid"/>
-          </a:ln>
-        </p:spPr>
-      </p:sp>
-      <p:sp>
-        <p:nvSpPr>
-          <p:cNvPr id="18" name="Text 16"/>
-          <p:cNvSpPr/>
-          <p:nvPr/>
-        </p:nvSpPr>
-        <p:spPr>
-          <a:xfrm>
-            <a:off x="10347960" y="4169664"/>
-            <a:ext cx="826008" cy="310896"/>
-          </a:xfrm>
-          <a:prstGeom prst="rect">
-            <a:avLst/>
-          </a:prstGeom>
-          <a:noFill/>
-          <a:ln/>
-        </p:spPr>
-        <p:txBody>
-          <a:bodyPr wrap="square" lIns="0" tIns="0" rIns="0" bIns="0" rtlCol="0" anchor="ctr">
-            <a:normAutofit/>
-          </a:bodyPr>
-          <a:lstStyle/>
-          <a:p>
-            <a:pPr algn="ctr" indent="0" marL="0">
-              <a:buNone/>
-            </a:pPr>
-            <a:r>
-              <a:rPr lang="en-US" sz="1500" b="1" dirty="0">
-                <a:solidFill>
-                  <a:srgbClr val="FFFFFF"/>
-                </a:solidFill>
-                <a:latin typeface="Aptos" pitchFamily="34" charset="0"/>
-                <a:ea typeface="Aptos" pitchFamily="34" charset="-122"/>
-                <a:cs typeface="Aptos" pitchFamily="34" charset="-120"/>
-              </a:rPr>
-              <a:t>Artifact</a:t>
-            </a:r>
-            <a:endParaRPr lang="en-US" sz="1500" dirty="0"/>
+            <a:r>
+              <a:rPr lang="en-US" sz="1380" dirty="0">
+                <a:solidFill>
+                  <a:srgbClr val="17364A"/>
+                </a:solidFill>
+                <a:latin typeface="Aptos" pitchFamily="34" charset="0"/>
+                <a:ea typeface="Aptos" pitchFamily="34" charset="-122"/>
+                <a:cs typeface="Aptos" pitchFamily="34" charset="-120"/>
+              </a:rPr>
+              <a:t>Use a tool when no comparable local process exists.</a:t>
+            </a:r>
+            <a:endParaRPr lang="en-US" sz="1380" dirty="0"/>
+          </a:p>
+          <a:p>
+            <a:r>
+              <a:rPr lang="en-US" sz="1380" dirty="0">
+                <a:solidFill>
+                  <a:srgbClr val="17364A"/>
+                </a:solidFill>
+                <a:latin typeface="Aptos" pitchFamily="34" charset="0"/>
+                <a:ea typeface="Aptos" pitchFamily="34" charset="-122"/>
+                <a:cs typeface="Aptos" pitchFamily="34" charset="-120"/>
+              </a:rPr>
+              <a:t>Adapt existing department templates when they already fit the purpose.</a:t>
+            </a:r>
+            <a:endParaRPr lang="en-US" sz="1380" dirty="0"/>
+          </a:p>
+          <a:p>
+            <a:r>
+              <a:rPr lang="en-US" sz="1380" dirty="0">
+                <a:solidFill>
+                  <a:srgbClr val="17364A"/>
+                </a:solidFill>
+                <a:latin typeface="Aptos" pitchFamily="34" charset="0"/>
+                <a:ea typeface="Aptos" pitchFamily="34" charset="-122"/>
+                <a:cs typeface="Aptos" pitchFamily="34" charset="-120"/>
+              </a:rPr>
+              <a:t>Save the completed artifact as evidence of the decision.</a:t>
+            </a:r>
+            <a:endParaRPr lang="en-US" sz="1380" dirty="0"/>
           </a:p>
         </p:txBody>
       </p:sp>
@@ -14791,13 +14210,11 @@
             </a:avLst>
           </a:prstGeom>
           <a:solidFill>
-            <a:srgbClr val="FFFFFF">
-              <a:alpha val="88000"/>
-            </a:srgbClr>
+            <a:srgbClr val="FFFFFF"/>
           </a:solidFill>
           <a:ln w="12700">
             <a:solidFill>
-              <a:srgbClr val="D6E8F2"/>
+              <a:srgbClr val="B9D7E6"/>
             </a:solidFill>
             <a:prstDash val="solid"/>
           </a:ln>
@@ -14805,119 +14222,112 @@
       </p:sp>
       <p:sp>
         <p:nvSpPr>
-          <p:cNvPr id="14" name="Shape 12"/>
-          <p:cNvSpPr/>
-          <p:nvPr/>
-        </p:nvSpPr>
-        <p:spPr>
-          <a:xfrm>
-            <a:off x="8074152" y="3291840"/>
-            <a:ext cx="2596896" cy="749808"/>
-          </a:xfrm>
-          <a:prstGeom prst="rect">
-            <a:avLst/>
-          </a:prstGeom>
-          <a:solidFill>
-            <a:srgbClr val="EAF6F8"/>
-          </a:solidFill>
-          <a:ln w="12700">
-            <a:solidFill>
-              <a:srgbClr val="8ABBD8"/>
-            </a:solidFill>
-            <a:prstDash val="solid"/>
-          </a:ln>
-        </p:spPr>
-      </p:sp>
-      <p:sp>
-        <p:nvSpPr>
-          <p:cNvPr id="15" name="Shape 13"/>
-          <p:cNvSpPr/>
-          <p:nvPr/>
-        </p:nvSpPr>
-        <p:spPr>
-          <a:xfrm>
-            <a:off x="8202168" y="3721608"/>
-            <a:ext cx="2340864" cy="0"/>
-          </a:xfrm>
-          <a:prstGeom prst="line">
-            <a:avLst/>
-          </a:prstGeom>
-          <a:noFill/>
-          <a:ln w="19050">
-            <a:solidFill>
-              <a:srgbClr val="0068B7"/>
-            </a:solidFill>
-            <a:prstDash val="solid"/>
-          </a:ln>
-        </p:spPr>
+          <p:cNvPr id="14" name="Text 12"/>
+          <p:cNvSpPr/>
+          <p:nvPr/>
+        </p:nvSpPr>
+        <p:spPr>
+          <a:xfrm>
+            <a:off x="7799832" y="2935224"/>
+            <a:ext cx="3145536" cy="256032"/>
+          </a:xfrm>
+          <a:prstGeom prst="rect">
+            <a:avLst/>
+          </a:prstGeom>
+          <a:noFill/>
+          <a:ln/>
+        </p:spPr>
+        <p:txBody>
+          <a:bodyPr wrap="square" lIns="0" tIns="0" rIns="0" bIns="0" rtlCol="0" anchor="ctr"/>
+          <a:lstStyle/>
+          <a:p>
+            <a:pPr indent="0" marL="0">
+              <a:buNone/>
+            </a:pPr>
+            <a:r>
+              <a:rPr lang="en-US" sz="1300" b="1" dirty="0">
+                <a:solidFill>
+                  <a:srgbClr val="0068B7"/>
+                </a:solidFill>
+                <a:latin typeface="Aptos" pitchFamily="34" charset="0"/>
+                <a:ea typeface="Aptos" pitchFamily="34" charset="-122"/>
+                <a:cs typeface="Aptos" pitchFamily="34" charset="-120"/>
+              </a:rPr>
+              <a:t>Concept checkpoints</a:t>
+            </a:r>
+            <a:endParaRPr lang="en-US" sz="1300" dirty="0"/>
+          </a:p>
+        </p:txBody>
+      </p:sp>
+      <p:sp>
+        <p:nvSpPr>
+          <p:cNvPr id="15" name="Text 13"/>
+          <p:cNvSpPr/>
+          <p:nvPr/>
+        </p:nvSpPr>
+        <p:spPr>
+          <a:xfrm>
+            <a:off x="7818120" y="3300984"/>
+            <a:ext cx="3090672" cy="877824"/>
+          </a:xfrm>
+          <a:prstGeom prst="rect">
+            <a:avLst/>
+          </a:prstGeom>
+          <a:noFill/>
+          <a:ln/>
+        </p:spPr>
+        <p:txBody>
+          <a:bodyPr wrap="square" lIns="254" tIns="254" rIns="254" bIns="254" rtlCol="0" anchor="t">
+            <a:normAutofit/>
+          </a:bodyPr>
+          <a:lstStyle/>
+          <a:p>
+            <a:r>
+              <a:rPr lang="en-US" sz="1380" dirty="0">
+                <a:solidFill>
+                  <a:srgbClr val="17364A"/>
+                </a:solidFill>
+                <a:latin typeface="Aptos" pitchFamily="34" charset="0"/>
+                <a:ea typeface="Aptos" pitchFamily="34" charset="-122"/>
+                <a:cs typeface="Aptos" pitchFamily="34" charset="-120"/>
+              </a:rPr>
+              <a:t>Explain the difference between supervised, unsupervised, and semi-supervised learning in.</a:t>
+            </a:r>
+            <a:endParaRPr lang="en-US" sz="1380" dirty="0"/>
+          </a:p>
+          <a:p>
+            <a:r>
+              <a:rPr lang="en-US" sz="1380" dirty="0">
+                <a:solidFill>
+                  <a:srgbClr val="17364A"/>
+                </a:solidFill>
+                <a:latin typeface="Aptos" pitchFamily="34" charset="0"/>
+                <a:ea typeface="Aptos" pitchFamily="34" charset="-122"/>
+                <a:cs typeface="Aptos" pitchFamily="34" charset="-120"/>
+              </a:rPr>
+              <a:t>Identify when a machine learning approach may be appropriate for a public health workflow.</a:t>
+            </a:r>
+            <a:endParaRPr lang="en-US" sz="1380" dirty="0"/>
+          </a:p>
+          <a:p>
+            <a:r>
+              <a:rPr lang="en-US" sz="1380" dirty="0">
+                <a:solidFill>
+                  <a:srgbClr val="17364A"/>
+                </a:solidFill>
+                <a:latin typeface="Aptos" pitchFamily="34" charset="0"/>
+                <a:ea typeface="Aptos" pitchFamily="34" charset="-122"/>
+                <a:cs typeface="Aptos" pitchFamily="34" charset="-120"/>
+              </a:rPr>
+              <a:t>Recognize common machine learning risks, including overfitting, biased labels, data.</a:t>
+            </a:r>
+            <a:endParaRPr lang="en-US" sz="1380" dirty="0"/>
+          </a:p>
+        </p:txBody>
       </p:sp>
       <p:sp>
         <p:nvSpPr>
           <p:cNvPr id="16" name="Shape 14"/>
-          <p:cNvSpPr/>
-          <p:nvPr/>
-        </p:nvSpPr>
-        <p:spPr>
-          <a:xfrm>
-            <a:off x="9198864" y="4206240"/>
-            <a:ext cx="347472" cy="347472"/>
-          </a:xfrm>
-          <a:prstGeom prst="ellipse">
-            <a:avLst/>
-          </a:prstGeom>
-          <a:solidFill>
-            <a:srgbClr val="2F8A28"/>
-          </a:solidFill>
-          <a:ln w="12700">
-            <a:solidFill>
-              <a:srgbClr val="2F8A28"/>
-            </a:solidFill>
-            <a:prstDash val="solid"/>
-          </a:ln>
-        </p:spPr>
-      </p:sp>
-      <p:sp>
-        <p:nvSpPr>
-          <p:cNvPr id="17" name="Text 15"/>
-          <p:cNvSpPr/>
-          <p:nvPr/>
-        </p:nvSpPr>
-        <p:spPr>
-          <a:xfrm>
-            <a:off x="7909560" y="3977640"/>
-            <a:ext cx="2926080" cy="182880"/>
-          </a:xfrm>
-          <a:prstGeom prst="rect">
-            <a:avLst/>
-          </a:prstGeom>
-          <a:noFill/>
-          <a:ln/>
-        </p:spPr>
-        <p:txBody>
-          <a:bodyPr wrap="square" lIns="0" tIns="0" rIns="0" bIns="0" rtlCol="0" anchor="ctr"/>
-          <a:lstStyle/>
-          <a:p>
-            <a:pPr algn="ctr" indent="0" marL="0">
-              <a:buNone/>
-            </a:pPr>
-            <a:r>
-              <a:rPr lang="en-US" sz="1000" dirty="0">
-                <a:solidFill>
-                  <a:srgbClr val="003A63"/>
-                </a:solidFill>
-                <a:latin typeface="Aptos" pitchFamily="34" charset="0"/>
-                <a:ea typeface="Aptos" pitchFamily="34" charset="-122"/>
-                <a:cs typeface="Aptos" pitchFamily="34" charset="-120"/>
-              </a:rPr>
-              <a:t>Concept to action</a:t>
-            </a:r>
-            <a:endParaRPr lang="en-US" sz="1000" dirty="0"/>
-          </a:p>
-        </p:txBody>
-      </p:sp>
-      <p:sp>
-        <p:nvSpPr>
-          <p:cNvPr id="18" name="Shape 16"/>
           <p:cNvSpPr/>
           <p:nvPr/>
         </p:nvSpPr>
@@ -14944,7 +14354,7 @@
       </p:sp>
       <p:sp>
         <p:nvSpPr>
-          <p:cNvPr id="19" name="Text 17"/>
+          <p:cNvPr id="17" name="Text 15"/>
           <p:cNvSpPr/>
           <p:nvPr/>
         </p:nvSpPr>
@@ -14983,7 +14393,7 @@
       </p:sp>
       <p:sp>
         <p:nvSpPr>
-          <p:cNvPr id="20" name="Text 18"/>
+          <p:cNvPr id="18" name="Text 16"/>
           <p:cNvSpPr/>
           <p:nvPr/>
         </p:nvSpPr>
@@ -15463,13 +14873,11 @@
             </a:avLst>
           </a:prstGeom>
           <a:solidFill>
-            <a:srgbClr val="FFFFFF">
-              <a:alpha val="88000"/>
-            </a:srgbClr>
+            <a:srgbClr val="FFFFFF"/>
           </a:solidFill>
           <a:ln w="12700">
             <a:solidFill>
-              <a:srgbClr val="D6E8F2"/>
+              <a:srgbClr val="B9D7E6"/>
             </a:solidFill>
             <a:prstDash val="solid"/>
           </a:ln>
@@ -15477,119 +14885,84 @@
       </p:sp>
       <p:sp>
         <p:nvSpPr>
-          <p:cNvPr id="14" name="Shape 12"/>
-          <p:cNvSpPr/>
-          <p:nvPr/>
-        </p:nvSpPr>
-        <p:spPr>
-          <a:xfrm>
-            <a:off x="8074152" y="3291840"/>
-            <a:ext cx="2596896" cy="749808"/>
-          </a:xfrm>
-          <a:prstGeom prst="rect">
-            <a:avLst/>
-          </a:prstGeom>
-          <a:solidFill>
-            <a:srgbClr val="EAF6F8"/>
-          </a:solidFill>
-          <a:ln w="12700">
-            <a:solidFill>
-              <a:srgbClr val="8ABBD8"/>
-            </a:solidFill>
-            <a:prstDash val="solid"/>
-          </a:ln>
-        </p:spPr>
-      </p:sp>
-      <p:sp>
-        <p:nvSpPr>
-          <p:cNvPr id="15" name="Shape 13"/>
-          <p:cNvSpPr/>
-          <p:nvPr/>
-        </p:nvSpPr>
-        <p:spPr>
-          <a:xfrm>
-            <a:off x="8202168" y="3721608"/>
-            <a:ext cx="2340864" cy="0"/>
-          </a:xfrm>
-          <a:prstGeom prst="line">
-            <a:avLst/>
-          </a:prstGeom>
-          <a:noFill/>
-          <a:ln w="19050">
-            <a:solidFill>
-              <a:srgbClr val="0068B7"/>
-            </a:solidFill>
-            <a:prstDash val="solid"/>
-          </a:ln>
-        </p:spPr>
+          <p:cNvPr id="14" name="Text 12"/>
+          <p:cNvSpPr/>
+          <p:nvPr/>
+        </p:nvSpPr>
+        <p:spPr>
+          <a:xfrm>
+            <a:off x="7799832" y="2935224"/>
+            <a:ext cx="3145536" cy="256032"/>
+          </a:xfrm>
+          <a:prstGeom prst="rect">
+            <a:avLst/>
+          </a:prstGeom>
+          <a:noFill/>
+          <a:ln/>
+        </p:spPr>
+        <p:txBody>
+          <a:bodyPr wrap="square" lIns="0" tIns="0" rIns="0" bIns="0" rtlCol="0" anchor="ctr"/>
+          <a:lstStyle/>
+          <a:p>
+            <a:pPr indent="0" marL="0">
+              <a:buNone/>
+            </a:pPr>
+            <a:r>
+              <a:rPr lang="en-US" sz="1300" b="1" dirty="0">
+                <a:solidFill>
+                  <a:srgbClr val="0068B7"/>
+                </a:solidFill>
+                <a:latin typeface="Aptos" pitchFamily="34" charset="0"/>
+                <a:ea typeface="Aptos" pitchFamily="34" charset="-122"/>
+                <a:cs typeface="Aptos" pitchFamily="34" charset="-120"/>
+              </a:rPr>
+              <a:t>Concept checkpoints</a:t>
+            </a:r>
+            <a:endParaRPr lang="en-US" sz="1300" dirty="0"/>
+          </a:p>
+        </p:txBody>
+      </p:sp>
+      <p:sp>
+        <p:nvSpPr>
+          <p:cNvPr id="15" name="Text 13"/>
+          <p:cNvSpPr/>
+          <p:nvPr/>
+        </p:nvSpPr>
+        <p:spPr>
+          <a:xfrm>
+            <a:off x="7818120" y="3300984"/>
+            <a:ext cx="3090672" cy="877824"/>
+          </a:xfrm>
+          <a:prstGeom prst="rect">
+            <a:avLst/>
+          </a:prstGeom>
+          <a:noFill/>
+          <a:ln/>
+        </p:spPr>
+        <p:txBody>
+          <a:bodyPr wrap="square" lIns="254" tIns="254" rIns="254" bIns="254" rtlCol="0" anchor="t">
+            <a:normAutofit/>
+          </a:bodyPr>
+          <a:lstStyle/>
+          <a:p>
+            <a:r>
+              <a:rPr lang="en-US" sz="1380" dirty="0">
+                <a:solidFill>
+                  <a:srgbClr val="17364A"/>
+                </a:solidFill>
+                <a:latin typeface="Aptos" pitchFamily="34" charset="0"/>
+                <a:ea typeface="Aptos" pitchFamily="34" charset="-122"/>
+                <a:cs typeface="Aptos" pitchFamily="34" charset="-120"/>
+              </a:rPr>
+              <a:t>Produce a machine learning use case review worksheet for a real or realistic public health.</a:t>
+            </a:r>
+            <a:endParaRPr lang="en-US" sz="1380" dirty="0"/>
+          </a:p>
+        </p:txBody>
       </p:sp>
       <p:sp>
         <p:nvSpPr>
           <p:cNvPr id="16" name="Shape 14"/>
-          <p:cNvSpPr/>
-          <p:nvPr/>
-        </p:nvSpPr>
-        <p:spPr>
-          <a:xfrm>
-            <a:off x="9198864" y="4206240"/>
-            <a:ext cx="347472" cy="347472"/>
-          </a:xfrm>
-          <a:prstGeom prst="ellipse">
-            <a:avLst/>
-          </a:prstGeom>
-          <a:solidFill>
-            <a:srgbClr val="2F8A28"/>
-          </a:solidFill>
-          <a:ln w="12700">
-            <a:solidFill>
-              <a:srgbClr val="2F8A28"/>
-            </a:solidFill>
-            <a:prstDash val="solid"/>
-          </a:ln>
-        </p:spPr>
-      </p:sp>
-      <p:sp>
-        <p:nvSpPr>
-          <p:cNvPr id="17" name="Text 15"/>
-          <p:cNvSpPr/>
-          <p:nvPr/>
-        </p:nvSpPr>
-        <p:spPr>
-          <a:xfrm>
-            <a:off x="7909560" y="3977640"/>
-            <a:ext cx="2926080" cy="182880"/>
-          </a:xfrm>
-          <a:prstGeom prst="rect">
-            <a:avLst/>
-          </a:prstGeom>
-          <a:noFill/>
-          <a:ln/>
-        </p:spPr>
-        <p:txBody>
-          <a:bodyPr wrap="square" lIns="0" tIns="0" rIns="0" bIns="0" rtlCol="0" anchor="ctr"/>
-          <a:lstStyle/>
-          <a:p>
-            <a:pPr algn="ctr" indent="0" marL="0">
-              <a:buNone/>
-            </a:pPr>
-            <a:r>
-              <a:rPr lang="en-US" sz="1000" dirty="0">
-                <a:solidFill>
-                  <a:srgbClr val="003A63"/>
-                </a:solidFill>
-                <a:latin typeface="Aptos" pitchFamily="34" charset="0"/>
-                <a:ea typeface="Aptos" pitchFamily="34" charset="-122"/>
-                <a:cs typeface="Aptos" pitchFamily="34" charset="-120"/>
-              </a:rPr>
-              <a:t>Concept to action</a:t>
-            </a:r>
-            <a:endParaRPr lang="en-US" sz="1000" dirty="0"/>
-          </a:p>
-        </p:txBody>
-      </p:sp>
-      <p:sp>
-        <p:nvSpPr>
-          <p:cNvPr id="18" name="Shape 16"/>
           <p:cNvSpPr/>
           <p:nvPr/>
         </p:nvSpPr>
@@ -15616,7 +14989,7 @@
       </p:sp>
       <p:sp>
         <p:nvSpPr>
-          <p:cNvPr id="19" name="Text 17"/>
+          <p:cNvPr id="17" name="Text 15"/>
           <p:cNvSpPr/>
           <p:nvPr/>
         </p:nvSpPr>
@@ -15655,7 +15028,7 @@
       </p:sp>
       <p:sp>
         <p:nvSpPr>
-          <p:cNvPr id="20" name="Text 18"/>
+          <p:cNvPr id="18" name="Text 16"/>
           <p:cNvSpPr/>
           <p:nvPr/>
         </p:nvSpPr>
@@ -16163,13 +15536,11 @@
             </a:avLst>
           </a:prstGeom>
           <a:solidFill>
-            <a:srgbClr val="FFFFFF">
-              <a:alpha val="88000"/>
-            </a:srgbClr>
+            <a:srgbClr val="FFFFFF"/>
           </a:solidFill>
           <a:ln w="12700">
             <a:solidFill>
-              <a:srgbClr val="D6E8F2"/>
+              <a:srgbClr val="B9D7E6"/>
             </a:solidFill>
             <a:prstDash val="solid"/>
           </a:ln>
@@ -16177,119 +15548,112 @@
       </p:sp>
       <p:sp>
         <p:nvSpPr>
-          <p:cNvPr id="14" name="Shape 12"/>
-          <p:cNvSpPr/>
-          <p:nvPr/>
-        </p:nvSpPr>
-        <p:spPr>
-          <a:xfrm>
-            <a:off x="8074152" y="3291840"/>
-            <a:ext cx="2596896" cy="749808"/>
-          </a:xfrm>
-          <a:prstGeom prst="rect">
-            <a:avLst/>
-          </a:prstGeom>
-          <a:solidFill>
-            <a:srgbClr val="EAF6F8"/>
-          </a:solidFill>
-          <a:ln w="12700">
-            <a:solidFill>
-              <a:srgbClr val="8ABBD8"/>
-            </a:solidFill>
-            <a:prstDash val="solid"/>
-          </a:ln>
-        </p:spPr>
-      </p:sp>
-      <p:sp>
-        <p:nvSpPr>
-          <p:cNvPr id="15" name="Shape 13"/>
-          <p:cNvSpPr/>
-          <p:nvPr/>
-        </p:nvSpPr>
-        <p:spPr>
-          <a:xfrm>
-            <a:off x="8202168" y="3721608"/>
-            <a:ext cx="2340864" cy="0"/>
-          </a:xfrm>
-          <a:prstGeom prst="line">
-            <a:avLst/>
-          </a:prstGeom>
-          <a:noFill/>
-          <a:ln w="19050">
-            <a:solidFill>
-              <a:srgbClr val="0068B7"/>
-            </a:solidFill>
-            <a:prstDash val="solid"/>
-          </a:ln>
-        </p:spPr>
+          <p:cNvPr id="14" name="Text 12"/>
+          <p:cNvSpPr/>
+          <p:nvPr/>
+        </p:nvSpPr>
+        <p:spPr>
+          <a:xfrm>
+            <a:off x="7799832" y="2935224"/>
+            <a:ext cx="3145536" cy="256032"/>
+          </a:xfrm>
+          <a:prstGeom prst="rect">
+            <a:avLst/>
+          </a:prstGeom>
+          <a:noFill/>
+          <a:ln/>
+        </p:spPr>
+        <p:txBody>
+          <a:bodyPr wrap="square" lIns="0" tIns="0" rIns="0" bIns="0" rtlCol="0" anchor="ctr"/>
+          <a:lstStyle/>
+          <a:p>
+            <a:pPr indent="0" marL="0">
+              <a:buNone/>
+            </a:pPr>
+            <a:r>
+              <a:rPr lang="en-US" sz="1300" b="1" dirty="0">
+                <a:solidFill>
+                  <a:srgbClr val="0068B7"/>
+                </a:solidFill>
+                <a:latin typeface="Aptos" pitchFamily="34" charset="0"/>
+                <a:ea typeface="Aptos" pitchFamily="34" charset="-122"/>
+                <a:cs typeface="Aptos" pitchFamily="34" charset="-120"/>
+              </a:rPr>
+              <a:t>Concept checkpoints</a:t>
+            </a:r>
+            <a:endParaRPr lang="en-US" sz="1300" dirty="0"/>
+          </a:p>
+        </p:txBody>
+      </p:sp>
+      <p:sp>
+        <p:nvSpPr>
+          <p:cNvPr id="15" name="Text 13"/>
+          <p:cNvSpPr/>
+          <p:nvPr/>
+        </p:nvSpPr>
+        <p:spPr>
+          <a:xfrm>
+            <a:off x="7818120" y="3300984"/>
+            <a:ext cx="3090672" cy="877824"/>
+          </a:xfrm>
+          <a:prstGeom prst="rect">
+            <a:avLst/>
+          </a:prstGeom>
+          <a:noFill/>
+          <a:ln/>
+        </p:spPr>
+        <p:txBody>
+          <a:bodyPr wrap="square" lIns="254" tIns="254" rIns="254" bIns="254" rtlCol="0" anchor="t">
+            <a:normAutofit/>
+          </a:bodyPr>
+          <a:lstStyle/>
+          <a:p>
+            <a:r>
+              <a:rPr lang="en-US" sz="1380" dirty="0">
+                <a:solidFill>
+                  <a:srgbClr val="17364A"/>
+                </a:solidFill>
+                <a:latin typeface="Aptos" pitchFamily="34" charset="0"/>
+                <a:ea typeface="Aptos" pitchFamily="34" charset="-122"/>
+                <a:cs typeface="Aptos" pitchFamily="34" charset="-120"/>
+              </a:rPr>
+              <a:t>Machine learning is a set of methods that allow computer systems to identify patterns in.</a:t>
+            </a:r>
+            <a:endParaRPr lang="en-US" sz="1380" dirty="0"/>
+          </a:p>
+          <a:p>
+            <a:r>
+              <a:rPr lang="en-US" sz="1380" dirty="0">
+                <a:solidFill>
+                  <a:srgbClr val="17364A"/>
+                </a:solidFill>
+                <a:latin typeface="Aptos" pitchFamily="34" charset="0"/>
+                <a:ea typeface="Aptos" pitchFamily="34" charset="-122"/>
+                <a:cs typeface="Aptos" pitchFamily="34" charset="-120"/>
+              </a:rPr>
+              <a:t>In public health, machine learning may support surveillance triage, outbreak signal.</a:t>
+            </a:r>
+            <a:endParaRPr lang="en-US" sz="1380" dirty="0"/>
+          </a:p>
+          <a:p>
+            <a:r>
+              <a:rPr lang="en-US" sz="1380" dirty="0">
+                <a:solidFill>
+                  <a:srgbClr val="17364A"/>
+                </a:solidFill>
+                <a:latin typeface="Aptos" pitchFamily="34" charset="0"/>
+                <a:ea typeface="Aptos" pitchFamily="34" charset="-122"/>
+                <a:cs typeface="Aptos" pitchFamily="34" charset="-120"/>
+              </a:rPr>
+              <a:t>The purpose is to help public health informaticians, epidemiologists, and technologists.</a:t>
+            </a:r>
+            <a:endParaRPr lang="en-US" sz="1380" dirty="0"/>
+          </a:p>
+        </p:txBody>
       </p:sp>
       <p:sp>
         <p:nvSpPr>
           <p:cNvPr id="16" name="Shape 14"/>
-          <p:cNvSpPr/>
-          <p:nvPr/>
-        </p:nvSpPr>
-        <p:spPr>
-          <a:xfrm>
-            <a:off x="9198864" y="4206240"/>
-            <a:ext cx="347472" cy="347472"/>
-          </a:xfrm>
-          <a:prstGeom prst="ellipse">
-            <a:avLst/>
-          </a:prstGeom>
-          <a:solidFill>
-            <a:srgbClr val="2F8A28"/>
-          </a:solidFill>
-          <a:ln w="12700">
-            <a:solidFill>
-              <a:srgbClr val="2F8A28"/>
-            </a:solidFill>
-            <a:prstDash val="solid"/>
-          </a:ln>
-        </p:spPr>
-      </p:sp>
-      <p:sp>
-        <p:nvSpPr>
-          <p:cNvPr id="17" name="Text 15"/>
-          <p:cNvSpPr/>
-          <p:nvPr/>
-        </p:nvSpPr>
-        <p:spPr>
-          <a:xfrm>
-            <a:off x="7909560" y="3977640"/>
-            <a:ext cx="2926080" cy="182880"/>
-          </a:xfrm>
-          <a:prstGeom prst="rect">
-            <a:avLst/>
-          </a:prstGeom>
-          <a:noFill/>
-          <a:ln/>
-        </p:spPr>
-        <p:txBody>
-          <a:bodyPr wrap="square" lIns="0" tIns="0" rIns="0" bIns="0" rtlCol="0" anchor="ctr"/>
-          <a:lstStyle/>
-          <a:p>
-            <a:pPr algn="ctr" indent="0" marL="0">
-              <a:buNone/>
-            </a:pPr>
-            <a:r>
-              <a:rPr lang="en-US" sz="1000" dirty="0">
-                <a:solidFill>
-                  <a:srgbClr val="003A63"/>
-                </a:solidFill>
-                <a:latin typeface="Aptos" pitchFamily="34" charset="0"/>
-                <a:ea typeface="Aptos" pitchFamily="34" charset="-122"/>
-                <a:cs typeface="Aptos" pitchFamily="34" charset="-120"/>
-              </a:rPr>
-              <a:t>Concept to action</a:t>
-            </a:r>
-            <a:endParaRPr lang="en-US" sz="1000" dirty="0"/>
-          </a:p>
-        </p:txBody>
-      </p:sp>
-      <p:sp>
-        <p:nvSpPr>
-          <p:cNvPr id="18" name="Shape 16"/>
           <p:cNvSpPr/>
           <p:nvPr/>
         </p:nvSpPr>
@@ -16316,7 +15680,7 @@
       </p:sp>
       <p:sp>
         <p:nvSpPr>
-          <p:cNvPr id="19" name="Text 17"/>
+          <p:cNvPr id="17" name="Text 15"/>
           <p:cNvSpPr/>
           <p:nvPr/>
         </p:nvSpPr>
@@ -16355,7 +15719,7 @@
       </p:sp>
       <p:sp>
         <p:nvSpPr>
-          <p:cNvPr id="20" name="Text 18"/>
+          <p:cNvPr id="18" name="Text 16"/>
           <p:cNvSpPr/>
           <p:nvPr/>
         </p:nvSpPr>
@@ -16863,13 +16227,11 @@
             </a:avLst>
           </a:prstGeom>
           <a:solidFill>
-            <a:srgbClr val="FFFFFF">
-              <a:alpha val="88000"/>
-            </a:srgbClr>
+            <a:srgbClr val="FFFFFF"/>
           </a:solidFill>
           <a:ln w="12700">
             <a:solidFill>
-              <a:srgbClr val="D6E8F2"/>
+              <a:srgbClr val="B9D7E6"/>
             </a:solidFill>
             <a:prstDash val="solid"/>
           </a:ln>
@@ -16877,119 +16239,112 @@
       </p:sp>
       <p:sp>
         <p:nvSpPr>
-          <p:cNvPr id="14" name="Shape 12"/>
-          <p:cNvSpPr/>
-          <p:nvPr/>
-        </p:nvSpPr>
-        <p:spPr>
-          <a:xfrm>
-            <a:off x="8074152" y="3291840"/>
-            <a:ext cx="2596896" cy="749808"/>
-          </a:xfrm>
-          <a:prstGeom prst="rect">
-            <a:avLst/>
-          </a:prstGeom>
-          <a:solidFill>
-            <a:srgbClr val="EAF6F8"/>
-          </a:solidFill>
-          <a:ln w="12700">
-            <a:solidFill>
-              <a:srgbClr val="8ABBD8"/>
-            </a:solidFill>
-            <a:prstDash val="solid"/>
-          </a:ln>
-        </p:spPr>
-      </p:sp>
-      <p:sp>
-        <p:nvSpPr>
-          <p:cNvPr id="15" name="Shape 13"/>
-          <p:cNvSpPr/>
-          <p:nvPr/>
-        </p:nvSpPr>
-        <p:spPr>
-          <a:xfrm>
-            <a:off x="8202168" y="3721608"/>
-            <a:ext cx="2340864" cy="0"/>
-          </a:xfrm>
-          <a:prstGeom prst="line">
-            <a:avLst/>
-          </a:prstGeom>
-          <a:noFill/>
-          <a:ln w="19050">
-            <a:solidFill>
-              <a:srgbClr val="0068B7"/>
-            </a:solidFill>
-            <a:prstDash val="solid"/>
-          </a:ln>
-        </p:spPr>
+          <p:cNvPr id="14" name="Text 12"/>
+          <p:cNvSpPr/>
+          <p:nvPr/>
+        </p:nvSpPr>
+        <p:spPr>
+          <a:xfrm>
+            <a:off x="7799832" y="2935224"/>
+            <a:ext cx="3145536" cy="256032"/>
+          </a:xfrm>
+          <a:prstGeom prst="rect">
+            <a:avLst/>
+          </a:prstGeom>
+          <a:noFill/>
+          <a:ln/>
+        </p:spPr>
+        <p:txBody>
+          <a:bodyPr wrap="square" lIns="0" tIns="0" rIns="0" bIns="0" rtlCol="0" anchor="ctr"/>
+          <a:lstStyle/>
+          <a:p>
+            <a:pPr indent="0" marL="0">
+              <a:buNone/>
+            </a:pPr>
+            <a:r>
+              <a:rPr lang="en-US" sz="1300" b="1" dirty="0">
+                <a:solidFill>
+                  <a:srgbClr val="0068B7"/>
+                </a:solidFill>
+                <a:latin typeface="Aptos" pitchFamily="34" charset="0"/>
+                <a:ea typeface="Aptos" pitchFamily="34" charset="-122"/>
+                <a:cs typeface="Aptos" pitchFamily="34" charset="-120"/>
+              </a:rPr>
+              <a:t>Concept checkpoints</a:t>
+            </a:r>
+            <a:endParaRPr lang="en-US" sz="1300" dirty="0"/>
+          </a:p>
+        </p:txBody>
+      </p:sp>
+      <p:sp>
+        <p:nvSpPr>
+          <p:cNvPr id="15" name="Text 13"/>
+          <p:cNvSpPr/>
+          <p:nvPr/>
+        </p:nvSpPr>
+        <p:spPr>
+          <a:xfrm>
+            <a:off x="7818120" y="3300984"/>
+            <a:ext cx="3090672" cy="877824"/>
+          </a:xfrm>
+          <a:prstGeom prst="rect">
+            <a:avLst/>
+          </a:prstGeom>
+          <a:noFill/>
+          <a:ln/>
+        </p:spPr>
+        <p:txBody>
+          <a:bodyPr wrap="square" lIns="254" tIns="254" rIns="254" bIns="254" rtlCol="0" anchor="t">
+            <a:normAutofit/>
+          </a:bodyPr>
+          <a:lstStyle/>
+          <a:p>
+            <a:r>
+              <a:rPr lang="en-US" sz="1380" dirty="0">
+                <a:solidFill>
+                  <a:srgbClr val="17364A"/>
+                </a:solidFill>
+                <a:latin typeface="Aptos" pitchFamily="34" charset="0"/>
+                <a:ea typeface="Aptos" pitchFamily="34" charset="-122"/>
+                <a:cs typeface="Aptos" pitchFamily="34" charset="-120"/>
+              </a:rPr>
+              <a:t>Machine learning matters for public health AI because many proposed tools rely on.</a:t>
+            </a:r>
+            <a:endParaRPr lang="en-US" sz="1380" dirty="0"/>
+          </a:p>
+          <a:p>
+            <a:r>
+              <a:rPr lang="en-US" sz="1380" dirty="0">
+                <a:solidFill>
+                  <a:srgbClr val="17364A"/>
+                </a:solidFill>
+                <a:latin typeface="Aptos" pitchFamily="34" charset="0"/>
+                <a:ea typeface="Aptos" pitchFamily="34" charset="-122"/>
+                <a:cs typeface="Aptos" pitchFamily="34" charset="-120"/>
+              </a:rPr>
+              <a:t>A program may want to prioritize outreach based on predicted risk.</a:t>
+            </a:r>
+            <a:endParaRPr lang="en-US" sz="1380" dirty="0"/>
+          </a:p>
+          <a:p>
+            <a:r>
+              <a:rPr lang="en-US" sz="1380" dirty="0">
+                <a:solidFill>
+                  <a:srgbClr val="17364A"/>
+                </a:solidFill>
+                <a:latin typeface="Aptos" pitchFamily="34" charset="0"/>
+                <a:ea typeface="Aptos" pitchFamily="34" charset="-122"/>
+                <a:cs typeface="Aptos" pitchFamily="34" charset="-120"/>
+              </a:rPr>
+              <a:t>Each of these uses can affect who receives attention, services, investigation, or resources.</a:t>
+            </a:r>
+            <a:endParaRPr lang="en-US" sz="1380" dirty="0"/>
+          </a:p>
+        </p:txBody>
       </p:sp>
       <p:sp>
         <p:nvSpPr>
           <p:cNvPr id="16" name="Shape 14"/>
-          <p:cNvSpPr/>
-          <p:nvPr/>
-        </p:nvSpPr>
-        <p:spPr>
-          <a:xfrm>
-            <a:off x="9198864" y="4206240"/>
-            <a:ext cx="347472" cy="347472"/>
-          </a:xfrm>
-          <a:prstGeom prst="ellipse">
-            <a:avLst/>
-          </a:prstGeom>
-          <a:solidFill>
-            <a:srgbClr val="2F8A28"/>
-          </a:solidFill>
-          <a:ln w="12700">
-            <a:solidFill>
-              <a:srgbClr val="2F8A28"/>
-            </a:solidFill>
-            <a:prstDash val="solid"/>
-          </a:ln>
-        </p:spPr>
-      </p:sp>
-      <p:sp>
-        <p:nvSpPr>
-          <p:cNvPr id="17" name="Text 15"/>
-          <p:cNvSpPr/>
-          <p:nvPr/>
-        </p:nvSpPr>
-        <p:spPr>
-          <a:xfrm>
-            <a:off x="7909560" y="3977640"/>
-            <a:ext cx="2926080" cy="182880"/>
-          </a:xfrm>
-          <a:prstGeom prst="rect">
-            <a:avLst/>
-          </a:prstGeom>
-          <a:noFill/>
-          <a:ln/>
-        </p:spPr>
-        <p:txBody>
-          <a:bodyPr wrap="square" lIns="0" tIns="0" rIns="0" bIns="0" rtlCol="0" anchor="ctr"/>
-          <a:lstStyle/>
-          <a:p>
-            <a:pPr algn="ctr" indent="0" marL="0">
-              <a:buNone/>
-            </a:pPr>
-            <a:r>
-              <a:rPr lang="en-US" sz="1000" dirty="0">
-                <a:solidFill>
-                  <a:srgbClr val="003A63"/>
-                </a:solidFill>
-                <a:latin typeface="Aptos" pitchFamily="34" charset="0"/>
-                <a:ea typeface="Aptos" pitchFamily="34" charset="-122"/>
-                <a:cs typeface="Aptos" pitchFamily="34" charset="-120"/>
-              </a:rPr>
-              <a:t>Concept to action</a:t>
-            </a:r>
-            <a:endParaRPr lang="en-US" sz="1000" dirty="0"/>
-          </a:p>
-        </p:txBody>
-      </p:sp>
-      <p:sp>
-        <p:nvSpPr>
-          <p:cNvPr id="18" name="Shape 16"/>
           <p:cNvSpPr/>
           <p:nvPr/>
         </p:nvSpPr>
@@ -17016,7 +16371,7 @@
       </p:sp>
       <p:sp>
         <p:nvSpPr>
-          <p:cNvPr id="19" name="Text 17"/>
+          <p:cNvPr id="17" name="Text 15"/>
           <p:cNvSpPr/>
           <p:nvPr/>
         </p:nvSpPr>
@@ -17055,7 +16410,7 @@
       </p:sp>
       <p:sp>
         <p:nvSpPr>
-          <p:cNvPr id="20" name="Text 18"/>
+          <p:cNvPr id="18" name="Text 16"/>
           <p:cNvSpPr/>
           <p:nvPr/>
         </p:nvSpPr>
@@ -17563,13 +16918,11 @@
             </a:avLst>
           </a:prstGeom>
           <a:solidFill>
-            <a:srgbClr val="FFFFFF">
-              <a:alpha val="88000"/>
-            </a:srgbClr>
+            <a:srgbClr val="FFFFFF"/>
           </a:solidFill>
           <a:ln w="12700">
             <a:solidFill>
-              <a:srgbClr val="D6E8F2"/>
+              <a:srgbClr val="B9D7E6"/>
             </a:solidFill>
             <a:prstDash val="solid"/>
           </a:ln>
@@ -17577,119 +16930,112 @@
       </p:sp>
       <p:sp>
         <p:nvSpPr>
-          <p:cNvPr id="14" name="Shape 12"/>
-          <p:cNvSpPr/>
-          <p:nvPr/>
-        </p:nvSpPr>
-        <p:spPr>
-          <a:xfrm>
-            <a:off x="8074152" y="3291840"/>
-            <a:ext cx="2596896" cy="749808"/>
-          </a:xfrm>
-          <a:prstGeom prst="rect">
-            <a:avLst/>
-          </a:prstGeom>
-          <a:solidFill>
-            <a:srgbClr val="EAF6F8"/>
-          </a:solidFill>
-          <a:ln w="12700">
-            <a:solidFill>
-              <a:srgbClr val="8ABBD8"/>
-            </a:solidFill>
-            <a:prstDash val="solid"/>
-          </a:ln>
-        </p:spPr>
-      </p:sp>
-      <p:sp>
-        <p:nvSpPr>
-          <p:cNvPr id="15" name="Shape 13"/>
-          <p:cNvSpPr/>
-          <p:nvPr/>
-        </p:nvSpPr>
-        <p:spPr>
-          <a:xfrm>
-            <a:off x="8202168" y="3721608"/>
-            <a:ext cx="2340864" cy="0"/>
-          </a:xfrm>
-          <a:prstGeom prst="line">
-            <a:avLst/>
-          </a:prstGeom>
-          <a:noFill/>
-          <a:ln w="19050">
-            <a:solidFill>
-              <a:srgbClr val="0068B7"/>
-            </a:solidFill>
-            <a:prstDash val="solid"/>
-          </a:ln>
-        </p:spPr>
+          <p:cNvPr id="14" name="Text 12"/>
+          <p:cNvSpPr/>
+          <p:nvPr/>
+        </p:nvSpPr>
+        <p:spPr>
+          <a:xfrm>
+            <a:off x="7799832" y="2935224"/>
+            <a:ext cx="3145536" cy="256032"/>
+          </a:xfrm>
+          <a:prstGeom prst="rect">
+            <a:avLst/>
+          </a:prstGeom>
+          <a:noFill/>
+          <a:ln/>
+        </p:spPr>
+        <p:txBody>
+          <a:bodyPr wrap="square" lIns="0" tIns="0" rIns="0" bIns="0" rtlCol="0" anchor="ctr"/>
+          <a:lstStyle/>
+          <a:p>
+            <a:pPr indent="0" marL="0">
+              <a:buNone/>
+            </a:pPr>
+            <a:r>
+              <a:rPr lang="en-US" sz="1300" b="1" dirty="0">
+                <a:solidFill>
+                  <a:srgbClr val="0068B7"/>
+                </a:solidFill>
+                <a:latin typeface="Aptos" pitchFamily="34" charset="0"/>
+                <a:ea typeface="Aptos" pitchFamily="34" charset="-122"/>
+                <a:cs typeface="Aptos" pitchFamily="34" charset="-120"/>
+              </a:rPr>
+              <a:t>Concept checkpoints</a:t>
+            </a:r>
+            <a:endParaRPr lang="en-US" sz="1300" dirty="0"/>
+          </a:p>
+        </p:txBody>
+      </p:sp>
+      <p:sp>
+        <p:nvSpPr>
+          <p:cNvPr id="15" name="Text 13"/>
+          <p:cNvSpPr/>
+          <p:nvPr/>
+        </p:nvSpPr>
+        <p:spPr>
+          <a:xfrm>
+            <a:off x="7818120" y="3300984"/>
+            <a:ext cx="3090672" cy="877824"/>
+          </a:xfrm>
+          <a:prstGeom prst="rect">
+            <a:avLst/>
+          </a:prstGeom>
+          <a:noFill/>
+          <a:ln/>
+        </p:spPr>
+        <p:txBody>
+          <a:bodyPr wrap="square" lIns="254" tIns="254" rIns="254" bIns="254" rtlCol="0" anchor="t">
+            <a:normAutofit/>
+          </a:bodyPr>
+          <a:lstStyle/>
+          <a:p>
+            <a:r>
+              <a:rPr lang="en-US" sz="1380" dirty="0">
+                <a:solidFill>
+                  <a:srgbClr val="17364A"/>
+                </a:solidFill>
+                <a:latin typeface="Aptos" pitchFamily="34" charset="0"/>
+                <a:ea typeface="Aptos" pitchFamily="34" charset="-122"/>
+                <a:cs typeface="Aptos" pitchFamily="34" charset="-120"/>
+              </a:rPr>
+              <a:t>A health department may consider a machine learning model to classify environmental health.</a:t>
+            </a:r>
+            <a:endParaRPr lang="en-US" sz="1380" dirty="0"/>
+          </a:p>
+          <a:p>
+            <a:r>
+              <a:rPr lang="en-US" sz="1380" dirty="0">
+                <a:solidFill>
+                  <a:srgbClr val="17364A"/>
+                </a:solidFill>
+                <a:latin typeface="Aptos" pitchFamily="34" charset="0"/>
+                <a:ea typeface="Aptos" pitchFamily="34" charset="-122"/>
+                <a:cs typeface="Aptos" pitchFamily="34" charset="-120"/>
+              </a:rPr>
+              <a:t>Historical complaint text, location, facility type, prior violations, and resolution.</a:t>
+            </a:r>
+            <a:endParaRPr lang="en-US" sz="1380" dirty="0"/>
+          </a:p>
+          <a:p>
+            <a:r>
+              <a:rPr lang="en-US" sz="1380" dirty="0">
+                <a:solidFill>
+                  <a:srgbClr val="17364A"/>
+                </a:solidFill>
+                <a:latin typeface="Aptos" pitchFamily="34" charset="0"/>
+                <a:ea typeface="Aptos" pitchFamily="34" charset="-122"/>
+                <a:cs typeface="Aptos" pitchFamily="34" charset="-120"/>
+              </a:rPr>
+              <a:t>This sounds useful, but the label may reflect staffing capacity or historical.</a:t>
+            </a:r>
+            <a:endParaRPr lang="en-US" sz="1380" dirty="0"/>
+          </a:p>
+        </p:txBody>
       </p:sp>
       <p:sp>
         <p:nvSpPr>
           <p:cNvPr id="16" name="Shape 14"/>
-          <p:cNvSpPr/>
-          <p:nvPr/>
-        </p:nvSpPr>
-        <p:spPr>
-          <a:xfrm>
-            <a:off x="9198864" y="4206240"/>
-            <a:ext cx="347472" cy="347472"/>
-          </a:xfrm>
-          <a:prstGeom prst="ellipse">
-            <a:avLst/>
-          </a:prstGeom>
-          <a:solidFill>
-            <a:srgbClr val="2F8A28"/>
-          </a:solidFill>
-          <a:ln w="12700">
-            <a:solidFill>
-              <a:srgbClr val="2F8A28"/>
-            </a:solidFill>
-            <a:prstDash val="solid"/>
-          </a:ln>
-        </p:spPr>
-      </p:sp>
-      <p:sp>
-        <p:nvSpPr>
-          <p:cNvPr id="17" name="Text 15"/>
-          <p:cNvSpPr/>
-          <p:nvPr/>
-        </p:nvSpPr>
-        <p:spPr>
-          <a:xfrm>
-            <a:off x="7909560" y="3977640"/>
-            <a:ext cx="2926080" cy="182880"/>
-          </a:xfrm>
-          <a:prstGeom prst="rect">
-            <a:avLst/>
-          </a:prstGeom>
-          <a:noFill/>
-          <a:ln/>
-        </p:spPr>
-        <p:txBody>
-          <a:bodyPr wrap="square" lIns="0" tIns="0" rIns="0" bIns="0" rtlCol="0" anchor="ctr"/>
-          <a:lstStyle/>
-          <a:p>
-            <a:pPr algn="ctr" indent="0" marL="0">
-              <a:buNone/>
-            </a:pPr>
-            <a:r>
-              <a:rPr lang="en-US" sz="1000" dirty="0">
-                <a:solidFill>
-                  <a:srgbClr val="003A63"/>
-                </a:solidFill>
-                <a:latin typeface="Aptos" pitchFamily="34" charset="0"/>
-                <a:ea typeface="Aptos" pitchFamily="34" charset="-122"/>
-                <a:cs typeface="Aptos" pitchFamily="34" charset="-120"/>
-              </a:rPr>
-              <a:t>Concept to action</a:t>
-            </a:r>
-            <a:endParaRPr lang="en-US" sz="1000" dirty="0"/>
-          </a:p>
-        </p:txBody>
-      </p:sp>
-      <p:sp>
-        <p:nvSpPr>
-          <p:cNvPr id="18" name="Shape 16"/>
           <p:cNvSpPr/>
           <p:nvPr/>
         </p:nvSpPr>
@@ -17716,7 +17062,7 @@
       </p:sp>
       <p:sp>
         <p:nvSpPr>
-          <p:cNvPr id="19" name="Text 17"/>
+          <p:cNvPr id="17" name="Text 15"/>
           <p:cNvSpPr/>
           <p:nvPr/>
         </p:nvSpPr>
@@ -17755,7 +17101,7 @@
       </p:sp>
       <p:sp>
         <p:nvSpPr>
-          <p:cNvPr id="20" name="Text 18"/>
+          <p:cNvPr id="18" name="Text 16"/>
           <p:cNvSpPr/>
           <p:nvPr/>
         </p:nvSpPr>

--- a/downloads/presentations/modules/anl-210.pptx
+++ b/downloads/presentations/modules/anl-210.pptx
@@ -3353,49 +3353,58 @@
           <a:ln/>
         </p:spPr>
         <p:txBody>
-          <a:bodyPr wrap="square" lIns="635" tIns="635" rIns="635" bIns="635" rtlCol="0" anchor="t">
+          <a:bodyPr wrap="square" lIns="1016" tIns="1016" rIns="1016" bIns="1016" rtlCol="0" anchor="t">
             <a:normAutofit/>
           </a:bodyPr>
           <a:lstStyle/>
           <a:p>
+            <a:pPr indent="0" marL="0">
+              <a:buNone/>
+            </a:pPr>
             <a:r>
               <a:rPr lang="en-US" sz="2100" dirty="0">
                 <a:solidFill>
-                  <a:srgbClr val="17364A"/>
-                </a:solidFill>
-                <a:latin typeface="Aptos" pitchFamily="34" charset="0"/>
-                <a:ea typeface="Aptos" pitchFamily="34" charset="-122"/>
-                <a:cs typeface="Aptos" pitchFamily="34" charset="-120"/>
-              </a:rPr>
-              <a:t>Machine learning development typically begins with a defined prediction or classification task.</a:t>
+                  <a:srgbClr val="003A63"/>
+                </a:solidFill>
+                <a:latin typeface="Aptos" pitchFamily="34" charset="0"/>
+                <a:ea typeface="Aptos" pitchFamily="34" charset="-122"/>
+                <a:cs typeface="Aptos" pitchFamily="34" charset="-120"/>
+              </a:rPr>
+              <a:t>• Machine learning development typically begins with a defined prediction or classification task.</a:t>
             </a:r>
             <a:endParaRPr lang="en-US" sz="2100" dirty="0"/>
           </a:p>
           <a:p>
+            <a:pPr indent="0" marL="0">
+              <a:buNone/>
+            </a:pPr>
             <a:r>
               <a:rPr lang="en-US" sz="2100" dirty="0">
                 <a:solidFill>
-                  <a:srgbClr val="17364A"/>
-                </a:solidFill>
-                <a:latin typeface="Aptos" pitchFamily="34" charset="0"/>
-                <a:ea typeface="Aptos" pitchFamily="34" charset="-122"/>
-                <a:cs typeface="Aptos" pitchFamily="34" charset="-120"/>
-              </a:rPr>
-              <a:t>The task should be specific enough to test. “Use AI to improve surveillance” is too vague. “Classify.</a:t>
+                  <a:srgbClr val="003A63"/>
+                </a:solidFill>
+                <a:latin typeface="Aptos" pitchFamily="34" charset="0"/>
+                <a:ea typeface="Aptos" pitchFamily="34" charset="-122"/>
+                <a:cs typeface="Aptos" pitchFamily="34" charset="-120"/>
+              </a:rPr>
+              <a:t>• The task should be specific enough to test. “Use AI to improve surveillance” is too vague..</a:t>
             </a:r>
             <a:endParaRPr lang="en-US" sz="2100" dirty="0"/>
           </a:p>
           <a:p>
+            <a:pPr indent="0" marL="0">
+              <a:buNone/>
+            </a:pPr>
             <a:r>
               <a:rPr lang="en-US" sz="2100" dirty="0">
                 <a:solidFill>
-                  <a:srgbClr val="17364A"/>
-                </a:solidFill>
-                <a:latin typeface="Aptos" pitchFamily="34" charset="0"/>
-                <a:ea typeface="Aptos" pitchFamily="34" charset="-122"/>
-                <a:cs typeface="Aptos" pitchFamily="34" charset="-120"/>
-              </a:rPr>
-              <a:t>A clear task allows staff to define the target label, required features, acceptance criteria, and human.</a:t>
+                  <a:srgbClr val="003A63"/>
+                </a:solidFill>
+                <a:latin typeface="Aptos" pitchFamily="34" charset="0"/>
+                <a:ea typeface="Aptos" pitchFamily="34" charset="-122"/>
+                <a:cs typeface="Aptos" pitchFamily="34" charset="-120"/>
+              </a:rPr>
+              <a:t>• A clear task allows staff to define the target label, required features, acceptance criteria,.</a:t>
             </a:r>
             <a:endParaRPr lang="en-US" sz="2100" dirty="0"/>
           </a:p>
@@ -3475,17 +3484,17 @@
         </p:nvSpPr>
         <p:spPr>
           <a:xfrm>
-            <a:off x="7799832" y="1828800"/>
-            <a:ext cx="3145536" cy="685800"/>
-          </a:xfrm>
-          <a:prstGeom prst="rect">
-            <a:avLst/>
-          </a:prstGeom>
-          <a:noFill/>
-          <a:ln/>
-        </p:spPr>
-        <p:txBody>
-          <a:bodyPr wrap="square" lIns="0" tIns="0" rIns="0" bIns="0" rtlCol="0" anchor="t">
+            <a:off x="7799832" y="1801368"/>
+            <a:ext cx="3145536" cy="758952"/>
+          </a:xfrm>
+          <a:prstGeom prst="rect">
+            <a:avLst/>
+          </a:prstGeom>
+          <a:noFill/>
+          <a:ln/>
+        </p:spPr>
+        <p:txBody>
+          <a:bodyPr wrap="square" lIns="254" tIns="254" rIns="254" bIns="254" rtlCol="0" anchor="t">
             <a:normAutofit/>
           </a:bodyPr>
           <a:lstStyle/>
@@ -3494,7 +3503,7 @@
               <a:buNone/>
             </a:pPr>
             <a:r>
-              <a:rPr lang="en-US" sz="1550" dirty="0">
+              <a:rPr lang="en-US" sz="1320" dirty="0">
                 <a:solidFill>
                   <a:srgbClr val="17364A"/>
                 </a:solidFill>
@@ -3504,7 +3513,7 @@
               </a:rPr>
               <a:t>Machine learning development typically begins with a defined prediction or classification task.</a:t>
             </a:r>
-            <a:endParaRPr lang="en-US" sz="1550" dirty="0"/>
+            <a:endParaRPr lang="en-US" sz="1320" dirty="0"/>
           </a:p>
         </p:txBody>
       </p:sp>
@@ -3592,13 +3601,16 @@
           <a:ln/>
         </p:spPr>
         <p:txBody>
-          <a:bodyPr wrap="square" lIns="254" tIns="254" rIns="254" bIns="254" rtlCol="0" anchor="t">
+          <a:bodyPr wrap="square" lIns="508" tIns="508" rIns="508" bIns="508" rtlCol="0" anchor="t">
             <a:normAutofit/>
           </a:bodyPr>
           <a:lstStyle/>
           <a:p>
-            <a:r>
-              <a:rPr lang="en-US" sz="1380" dirty="0">
+            <a:pPr indent="0" marL="0">
+              <a:buNone/>
+            </a:pPr>
+            <a:r>
+              <a:rPr lang="en-US" sz="1220" dirty="0">
                 <a:solidFill>
                   <a:srgbClr val="17364A"/>
                 </a:solidFill>
@@ -3606,13 +3618,16 @@
                 <a:ea typeface="Aptos" pitchFamily="34" charset="-122"/>
                 <a:cs typeface="Aptos" pitchFamily="34" charset="-120"/>
               </a:rPr>
-              <a:t>The task should be specific enough to test. “Use AI to improve surveillance” is too vague..</a:t>
-            </a:r>
-            <a:endParaRPr lang="en-US" sz="1380" dirty="0"/>
-          </a:p>
-          <a:p>
-            <a:r>
-              <a:rPr lang="en-US" sz="1380" dirty="0">
+              <a:t>The task should be specific enough to test. “Use AI to improve.</a:t>
+            </a:r>
+            <a:endParaRPr lang="en-US" sz="1220" dirty="0"/>
+          </a:p>
+          <a:p>
+            <a:pPr indent="0" marL="0">
+              <a:buNone/>
+            </a:pPr>
+            <a:r>
+              <a:rPr lang="en-US" sz="1220" dirty="0">
                 <a:solidFill>
                   <a:srgbClr val="17364A"/>
                 </a:solidFill>
@@ -3620,13 +3635,16 @@
                 <a:ea typeface="Aptos" pitchFamily="34" charset="-122"/>
                 <a:cs typeface="Aptos" pitchFamily="34" charset="-120"/>
               </a:rPr>
-              <a:t>A clear task allows staff to define the target label, required features, acceptance.</a:t>
-            </a:r>
-            <a:endParaRPr lang="en-US" sz="1380" dirty="0"/>
-          </a:p>
-          <a:p>
-            <a:r>
-              <a:rPr lang="en-US" sz="1380" dirty="0">
+              <a:t>A clear task allows staff to define the target label, required.</a:t>
+            </a:r>
+            <a:endParaRPr lang="en-US" sz="1220" dirty="0"/>
+          </a:p>
+          <a:p>
+            <a:pPr indent="0" marL="0">
+              <a:buNone/>
+            </a:pPr>
+            <a:r>
+              <a:rPr lang="en-US" sz="1220" dirty="0">
                 <a:solidFill>
                   <a:srgbClr val="17364A"/>
                 </a:solidFill>
@@ -3634,9 +3652,9 @@
                 <a:ea typeface="Aptos" pitchFamily="34" charset="-122"/>
                 <a:cs typeface="Aptos" pitchFamily="34" charset="-120"/>
               </a:rPr>
-              <a:t>Data preparation is often the most important and time-consuming step.</a:t>
-            </a:r>
-            <a:endParaRPr lang="en-US" sz="1380" dirty="0"/>
+              <a:t>Data preparation is often the most important and time-consuming.</a:t>
+            </a:r>
+            <a:endParaRPr lang="en-US" sz="1220" dirty="0"/>
           </a:p>
         </p:txBody>
       </p:sp>
@@ -3714,17 +3732,17 @@
         </p:nvSpPr>
         <p:spPr>
           <a:xfrm>
-            <a:off x="7799832" y="5001768"/>
-            <a:ext cx="3145536" cy="502920"/>
-          </a:xfrm>
-          <a:prstGeom prst="rect">
-            <a:avLst/>
-          </a:prstGeom>
-          <a:noFill/>
-          <a:ln/>
-        </p:spPr>
-        <p:txBody>
-          <a:bodyPr wrap="square" lIns="0" tIns="0" rIns="0" bIns="0" rtlCol="0" anchor="t">
+            <a:off x="7799832" y="4974336"/>
+            <a:ext cx="3145536" cy="576072"/>
+          </a:xfrm>
+          <a:prstGeom prst="rect">
+            <a:avLst/>
+          </a:prstGeom>
+          <a:noFill/>
+          <a:ln/>
+        </p:spPr>
+        <p:txBody>
+          <a:bodyPr wrap="square" lIns="254" tIns="254" rIns="254" bIns="254" rtlCol="0" anchor="t">
             <a:normAutofit/>
           </a:bodyPr>
           <a:lstStyle/>
@@ -3733,7 +3751,7 @@
               <a:buNone/>
             </a:pPr>
             <a:r>
-              <a:rPr lang="en-US" sz="1550" dirty="0">
+              <a:rPr lang="en-US" sz="1320" dirty="0">
                 <a:solidFill>
                   <a:srgbClr val="17364A"/>
                 </a:solidFill>
@@ -3741,9 +3759,9 @@
                 <a:ea typeface="Aptos" pitchFamily="34" charset="-122"/>
                 <a:cs typeface="Aptos" pitchFamily="34" charset="-120"/>
               </a:rPr>
-              <a:t>Connect the concept to public health purpose, responsible use, required safeguards, documentation, and the next action a department should take.</a:t>
-            </a:r>
-            <a:endParaRPr lang="en-US" sz="1550" dirty="0"/>
+              <a:t>Connect the concept to public health purpose, responsible use, required safeguards, documentation, and the next action a.</a:t>
+            </a:r>
+            <a:endParaRPr lang="en-US" sz="1320" dirty="0"/>
           </a:p>
         </p:txBody>
       </p:sp>
@@ -4044,49 +4062,58 @@
           <a:ln/>
         </p:spPr>
         <p:txBody>
-          <a:bodyPr wrap="square" lIns="635" tIns="635" rIns="635" bIns="635" rtlCol="0" anchor="t">
+          <a:bodyPr wrap="square" lIns="1016" tIns="1016" rIns="1016" bIns="1016" rtlCol="0" anchor="t">
             <a:normAutofit/>
           </a:bodyPr>
           <a:lstStyle/>
           <a:p>
+            <a:pPr indent="0" marL="0">
+              <a:buNone/>
+            </a:pPr>
             <a:r>
               <a:rPr lang="en-US" sz="2100" dirty="0">
                 <a:solidFill>
-                  <a:srgbClr val="17364A"/>
-                </a:solidFill>
-                <a:latin typeface="Aptos" pitchFamily="34" charset="0"/>
-                <a:ea typeface="Aptos" pitchFamily="34" charset="-122"/>
-                <a:cs typeface="Aptos" pitchFamily="34" charset="-120"/>
-              </a:rPr>
-              <a:t>Model performance should be interpreted in relation to the workflow.</a:t>
+                  <a:srgbClr val="003A63"/>
+                </a:solidFill>
+                <a:latin typeface="Aptos" pitchFamily="34" charset="0"/>
+                <a:ea typeface="Aptos" pitchFamily="34" charset="-122"/>
+                <a:cs typeface="Aptos" pitchFamily="34" charset="-120"/>
+              </a:rPr>
+              <a:t>• Model performance should be interpreted in relation to the workflow.</a:t>
             </a:r>
             <a:endParaRPr lang="en-US" sz="2100" dirty="0"/>
           </a:p>
           <a:p>
+            <a:pPr indent="0" marL="0">
+              <a:buNone/>
+            </a:pPr>
             <a:r>
               <a:rPr lang="en-US" sz="2100" dirty="0">
                 <a:solidFill>
-                  <a:srgbClr val="17364A"/>
-                </a:solidFill>
-                <a:latin typeface="Aptos" pitchFamily="34" charset="0"/>
-                <a:ea typeface="Aptos" pitchFamily="34" charset="-122"/>
-                <a:cs typeface="Aptos" pitchFamily="34" charset="-120"/>
-              </a:rPr>
-              <a:t>A model with high overall accuracy may still miss rare but important events.</a:t>
+                  <a:srgbClr val="003A63"/>
+                </a:solidFill>
+                <a:latin typeface="Aptos" pitchFamily="34" charset="0"/>
+                <a:ea typeface="Aptos" pitchFamily="34" charset="-122"/>
+                <a:cs typeface="Aptos" pitchFamily="34" charset="-120"/>
+              </a:rPr>
+              <a:t>• A model with high overall accuracy may still miss rare but important events.</a:t>
             </a:r>
             <a:endParaRPr lang="en-US" sz="2100" dirty="0"/>
           </a:p>
           <a:p>
+            <a:pPr indent="0" marL="0">
+              <a:buNone/>
+            </a:pPr>
             <a:r>
               <a:rPr lang="en-US" sz="2100" dirty="0">
                 <a:solidFill>
-                  <a:srgbClr val="17364A"/>
-                </a:solidFill>
-                <a:latin typeface="Aptos" pitchFamily="34" charset="0"/>
-                <a:ea typeface="Aptos" pitchFamily="34" charset="-122"/>
-                <a:cs typeface="Aptos" pitchFamily="34" charset="-120"/>
-              </a:rPr>
-              <a:t>A model with many false positives may burden staff and create alert fatigue.</a:t>
+                  <a:srgbClr val="003A63"/>
+                </a:solidFill>
+                <a:latin typeface="Aptos" pitchFamily="34" charset="0"/>
+                <a:ea typeface="Aptos" pitchFamily="34" charset="-122"/>
+                <a:cs typeface="Aptos" pitchFamily="34" charset="-120"/>
+              </a:rPr>
+              <a:t>• A model with many false positives may burden staff and create alert fatigue.</a:t>
             </a:r>
             <a:endParaRPr lang="en-US" sz="2100" dirty="0"/>
           </a:p>
@@ -4166,17 +4193,17 @@
         </p:nvSpPr>
         <p:spPr>
           <a:xfrm>
-            <a:off x="7799832" y="1828800"/>
-            <a:ext cx="3145536" cy="685800"/>
-          </a:xfrm>
-          <a:prstGeom prst="rect">
-            <a:avLst/>
-          </a:prstGeom>
-          <a:noFill/>
-          <a:ln/>
-        </p:spPr>
-        <p:txBody>
-          <a:bodyPr wrap="square" lIns="0" tIns="0" rIns="0" bIns="0" rtlCol="0" anchor="t">
+            <a:off x="7799832" y="1801368"/>
+            <a:ext cx="3145536" cy="758952"/>
+          </a:xfrm>
+          <a:prstGeom prst="rect">
+            <a:avLst/>
+          </a:prstGeom>
+          <a:noFill/>
+          <a:ln/>
+        </p:spPr>
+        <p:txBody>
+          <a:bodyPr wrap="square" lIns="254" tIns="254" rIns="254" bIns="254" rtlCol="0" anchor="t">
             <a:normAutofit/>
           </a:bodyPr>
           <a:lstStyle/>
@@ -4185,7 +4212,7 @@
               <a:buNone/>
             </a:pPr>
             <a:r>
-              <a:rPr lang="en-US" sz="1550" dirty="0">
+              <a:rPr lang="en-US" sz="1320" dirty="0">
                 <a:solidFill>
                   <a:srgbClr val="17364A"/>
                 </a:solidFill>
@@ -4195,7 +4222,7 @@
               </a:rPr>
               <a:t>Model performance should be interpreted in relation to the workflow.</a:t>
             </a:r>
-            <a:endParaRPr lang="en-US" sz="1550" dirty="0"/>
+            <a:endParaRPr lang="en-US" sz="1320" dirty="0"/>
           </a:p>
         </p:txBody>
       </p:sp>
@@ -4283,13 +4310,16 @@
           <a:ln/>
         </p:spPr>
         <p:txBody>
-          <a:bodyPr wrap="square" lIns="254" tIns="254" rIns="254" bIns="254" rtlCol="0" anchor="t">
+          <a:bodyPr wrap="square" lIns="508" tIns="508" rIns="508" bIns="508" rtlCol="0" anchor="t">
             <a:normAutofit/>
           </a:bodyPr>
           <a:lstStyle/>
           <a:p>
-            <a:r>
-              <a:rPr lang="en-US" sz="1380" dirty="0">
+            <a:pPr indent="0" marL="0">
+              <a:buNone/>
+            </a:pPr>
+            <a:r>
+              <a:rPr lang="en-US" sz="1220" dirty="0">
                 <a:solidFill>
                   <a:srgbClr val="17364A"/>
                 </a:solidFill>
@@ -4297,13 +4327,16 @@
                 <a:ea typeface="Aptos" pitchFamily="34" charset="-122"/>
                 <a:cs typeface="Aptos" pitchFamily="34" charset="-120"/>
               </a:rPr>
-              <a:t>A model with many false negatives may miss cases, outbreaks, or communities needing support.</a:t>
-            </a:r>
-            <a:endParaRPr lang="en-US" sz="1380" dirty="0"/>
-          </a:p>
-          <a:p>
-            <a:r>
-              <a:rPr lang="en-US" sz="1380" dirty="0">
+              <a:t>A model with many false negatives may miss cases, outbreaks, or.</a:t>
+            </a:r>
+            <a:endParaRPr lang="en-US" sz="1220" dirty="0"/>
+          </a:p>
+          <a:p>
+            <a:pPr indent="0" marL="0">
+              <a:buNone/>
+            </a:pPr>
+            <a:r>
+              <a:rPr lang="en-US" sz="1220" dirty="0">
                 <a:solidFill>
                   <a:srgbClr val="17364A"/>
                 </a:solidFill>
@@ -4311,13 +4344,16 @@
                 <a:ea typeface="Aptos" pitchFamily="34" charset="-122"/>
                 <a:cs typeface="Aptos" pitchFamily="34" charset="-120"/>
               </a:rPr>
-              <a:t>Thresholds should be selected based on public health consequences, not only technical.</a:t>
-            </a:r>
-            <a:endParaRPr lang="en-US" sz="1380" dirty="0"/>
-          </a:p>
-          <a:p>
-            <a:r>
-              <a:rPr lang="en-US" sz="1380" dirty="0">
+              <a:t>Thresholds should be selected based on public health consequences,.</a:t>
+            </a:r>
+            <a:endParaRPr lang="en-US" sz="1220" dirty="0"/>
+          </a:p>
+          <a:p>
+            <a:pPr indent="0" marL="0">
+              <a:buNone/>
+            </a:pPr>
+            <a:r>
+              <a:rPr lang="en-US" sz="1220" dirty="0">
                 <a:solidFill>
                   <a:srgbClr val="17364A"/>
                 </a:solidFill>
@@ -4327,7 +4363,7 @@
               </a:rPr>
               <a:t>Human review should be designed into the workflow before deployment.</a:t>
             </a:r>
-            <a:endParaRPr lang="en-US" sz="1380" dirty="0"/>
+            <a:endParaRPr lang="en-US" sz="1220" dirty="0"/>
           </a:p>
         </p:txBody>
       </p:sp>
@@ -4405,17 +4441,17 @@
         </p:nvSpPr>
         <p:spPr>
           <a:xfrm>
-            <a:off x="7799832" y="5001768"/>
-            <a:ext cx="3145536" cy="502920"/>
-          </a:xfrm>
-          <a:prstGeom prst="rect">
-            <a:avLst/>
-          </a:prstGeom>
-          <a:noFill/>
-          <a:ln/>
-        </p:spPr>
-        <p:txBody>
-          <a:bodyPr wrap="square" lIns="0" tIns="0" rIns="0" bIns="0" rtlCol="0" anchor="t">
+            <a:off x="7799832" y="4974336"/>
+            <a:ext cx="3145536" cy="576072"/>
+          </a:xfrm>
+          <a:prstGeom prst="rect">
+            <a:avLst/>
+          </a:prstGeom>
+          <a:noFill/>
+          <a:ln/>
+        </p:spPr>
+        <p:txBody>
+          <a:bodyPr wrap="square" lIns="254" tIns="254" rIns="254" bIns="254" rtlCol="0" anchor="t">
             <a:normAutofit/>
           </a:bodyPr>
           <a:lstStyle/>
@@ -4424,7 +4460,7 @@
               <a:buNone/>
             </a:pPr>
             <a:r>
-              <a:rPr lang="en-US" sz="1550" dirty="0">
+              <a:rPr lang="en-US" sz="1320" dirty="0">
                 <a:solidFill>
                   <a:srgbClr val="17364A"/>
                 </a:solidFill>
@@ -4432,9 +4468,9 @@
                 <a:ea typeface="Aptos" pitchFamily="34" charset="-122"/>
                 <a:cs typeface="Aptos" pitchFamily="34" charset="-120"/>
               </a:rPr>
-              <a:t>Connect the concept to public health purpose, responsible use, required safeguards, documentation, and the next action a department should take.</a:t>
-            </a:r>
-            <a:endParaRPr lang="en-US" sz="1550" dirty="0"/>
+              <a:t>Connect the concept to public health purpose, responsible use, required safeguards, documentation, and the next action a.</a:t>
+            </a:r>
+            <a:endParaRPr lang="en-US" sz="1320" dirty="0"/>
           </a:p>
         </p:txBody>
       </p:sp>
@@ -4735,49 +4771,58 @@
           <a:ln/>
         </p:spPr>
         <p:txBody>
-          <a:bodyPr wrap="square" lIns="635" tIns="635" rIns="635" bIns="635" rtlCol="0" anchor="t">
+          <a:bodyPr wrap="square" lIns="1016" tIns="1016" rIns="1016" bIns="1016" rtlCol="0" anchor="t">
             <a:normAutofit/>
           </a:bodyPr>
           <a:lstStyle/>
           <a:p>
+            <a:pPr indent="0" marL="0">
+              <a:buNone/>
+            </a:pPr>
             <a:r>
               <a:rPr lang="en-US" sz="2100" dirty="0">
                 <a:solidFill>
-                  <a:srgbClr val="17364A"/>
-                </a:solidFill>
-                <a:latin typeface="Aptos" pitchFamily="34" charset="0"/>
-                <a:ea typeface="Aptos" pitchFamily="34" charset="-122"/>
-                <a:cs typeface="Aptos" pitchFamily="34" charset="-120"/>
-              </a:rPr>
-              <a:t>Biased or inconsistent labels.</a:t>
+                  <a:srgbClr val="003A63"/>
+                </a:solidFill>
+                <a:latin typeface="Aptos" pitchFamily="34" charset="0"/>
+                <a:ea typeface="Aptos" pitchFamily="34" charset="-122"/>
+                <a:cs typeface="Aptos" pitchFamily="34" charset="-120"/>
+              </a:rPr>
+              <a:t>• Biased or inconsistent labels.</a:t>
             </a:r>
             <a:endParaRPr lang="en-US" sz="2100" dirty="0"/>
           </a:p>
           <a:p>
+            <a:pPr indent="0" marL="0">
+              <a:buNone/>
+            </a:pPr>
             <a:r>
               <a:rPr lang="en-US" sz="2100" dirty="0">
                 <a:solidFill>
-                  <a:srgbClr val="17364A"/>
-                </a:solidFill>
-                <a:latin typeface="Aptos" pitchFamily="34" charset="0"/>
-                <a:ea typeface="Aptos" pitchFamily="34" charset="-122"/>
-                <a:cs typeface="Aptos" pitchFamily="34" charset="-120"/>
-              </a:rPr>
-              <a:t>If historical labels reflect unequal detection, inconsistent review, or limited resources, the model.</a:t>
+                  <a:srgbClr val="003A63"/>
+                </a:solidFill>
+                <a:latin typeface="Aptos" pitchFamily="34" charset="0"/>
+                <a:ea typeface="Aptos" pitchFamily="34" charset="-122"/>
+                <a:cs typeface="Aptos" pitchFamily="34" charset="-120"/>
+              </a:rPr>
+              <a:t>• If historical labels reflect unequal detection, inconsistent review, or limited resources, the.</a:t>
             </a:r>
             <a:endParaRPr lang="en-US" sz="2100" dirty="0"/>
           </a:p>
           <a:p>
+            <a:pPr indent="0" marL="0">
+              <a:buNone/>
+            </a:pPr>
             <a:r>
               <a:rPr lang="en-US" sz="2100" dirty="0">
                 <a:solidFill>
-                  <a:srgbClr val="17364A"/>
-                </a:solidFill>
-                <a:latin typeface="Aptos" pitchFamily="34" charset="0"/>
-                <a:ea typeface="Aptos" pitchFamily="34" charset="-122"/>
-                <a:cs typeface="Aptos" pitchFamily="34" charset="-120"/>
-              </a:rPr>
-              <a:t>Guardrails include label audits, expert review, subgroup analysis, and documentation of label.</a:t>
+                  <a:srgbClr val="003A63"/>
+                </a:solidFill>
+                <a:latin typeface="Aptos" pitchFamily="34" charset="0"/>
+                <a:ea typeface="Aptos" pitchFamily="34" charset="-122"/>
+                <a:cs typeface="Aptos" pitchFamily="34" charset="-120"/>
+              </a:rPr>
+              <a:t>• Guardrails include label audits, expert review, subgroup analysis, and documentation of label.</a:t>
             </a:r>
             <a:endParaRPr lang="en-US" sz="2100" dirty="0"/>
           </a:p>
@@ -4857,17 +4902,17 @@
         </p:nvSpPr>
         <p:spPr>
           <a:xfrm>
-            <a:off x="7799832" y="1828800"/>
-            <a:ext cx="3145536" cy="685800"/>
-          </a:xfrm>
-          <a:prstGeom prst="rect">
-            <a:avLst/>
-          </a:prstGeom>
-          <a:noFill/>
-          <a:ln/>
-        </p:spPr>
-        <p:txBody>
-          <a:bodyPr wrap="square" lIns="0" tIns="0" rIns="0" bIns="0" rtlCol="0" anchor="t">
+            <a:off x="7799832" y="1801368"/>
+            <a:ext cx="3145536" cy="758952"/>
+          </a:xfrm>
+          <a:prstGeom prst="rect">
+            <a:avLst/>
+          </a:prstGeom>
+          <a:noFill/>
+          <a:ln/>
+        </p:spPr>
+        <p:txBody>
+          <a:bodyPr wrap="square" lIns="254" tIns="254" rIns="254" bIns="254" rtlCol="0" anchor="t">
             <a:normAutofit/>
           </a:bodyPr>
           <a:lstStyle/>
@@ -4876,7 +4921,7 @@
               <a:buNone/>
             </a:pPr>
             <a:r>
-              <a:rPr lang="en-US" sz="1550" dirty="0">
+              <a:rPr lang="en-US" sz="1320" dirty="0">
                 <a:solidFill>
                   <a:srgbClr val="17364A"/>
                 </a:solidFill>
@@ -4886,7 +4931,7 @@
               </a:rPr>
               <a:t>Biased or inconsistent labels.</a:t>
             </a:r>
-            <a:endParaRPr lang="en-US" sz="1550" dirty="0"/>
+            <a:endParaRPr lang="en-US" sz="1320" dirty="0"/>
           </a:p>
         </p:txBody>
       </p:sp>
@@ -4974,13 +5019,16 @@
           <a:ln/>
         </p:spPr>
         <p:txBody>
-          <a:bodyPr wrap="square" lIns="254" tIns="254" rIns="254" bIns="254" rtlCol="0" anchor="t">
+          <a:bodyPr wrap="square" lIns="508" tIns="508" rIns="508" bIns="508" rtlCol="0" anchor="t">
             <a:normAutofit/>
           </a:bodyPr>
           <a:lstStyle/>
           <a:p>
-            <a:r>
-              <a:rPr lang="en-US" sz="1380" dirty="0">
+            <a:pPr indent="0" marL="0">
+              <a:buNone/>
+            </a:pPr>
+            <a:r>
+              <a:rPr lang="en-US" sz="1220" dirty="0">
                 <a:solidFill>
                   <a:srgbClr val="17364A"/>
                 </a:solidFill>
@@ -4988,13 +5036,16 @@
                 <a:ea typeface="Aptos" pitchFamily="34" charset="-122"/>
                 <a:cs typeface="Aptos" pitchFamily="34" charset="-120"/>
               </a:rPr>
-              <a:t>If historical labels reflect unequal detection, inconsistent review, or limited resources,.</a:t>
-            </a:r>
-            <a:endParaRPr lang="en-US" sz="1380" dirty="0"/>
-          </a:p>
-          <a:p>
-            <a:r>
-              <a:rPr lang="en-US" sz="1380" dirty="0">
+              <a:t>If historical labels reflect unequal detection, inconsistent.</a:t>
+            </a:r>
+            <a:endParaRPr lang="en-US" sz="1220" dirty="0"/>
+          </a:p>
+          <a:p>
+            <a:pPr indent="0" marL="0">
+              <a:buNone/>
+            </a:pPr>
+            <a:r>
+              <a:rPr lang="en-US" sz="1220" dirty="0">
                 <a:solidFill>
                   <a:srgbClr val="17364A"/>
                 </a:solidFill>
@@ -5002,13 +5053,16 @@
                 <a:ea typeface="Aptos" pitchFamily="34" charset="-122"/>
                 <a:cs typeface="Aptos" pitchFamily="34" charset="-120"/>
               </a:rPr>
-              <a:t>Guardrails include label audits, expert review, subgroup analysis, and documentation of.</a:t>
-            </a:r>
-            <a:endParaRPr lang="en-US" sz="1380" dirty="0"/>
-          </a:p>
-          <a:p>
-            <a:r>
-              <a:rPr lang="en-US" sz="1380" dirty="0">
+              <a:t>Guardrails include label audits, expert review, subgroup analysis,.</a:t>
+            </a:r>
+            <a:endParaRPr lang="en-US" sz="1220" dirty="0"/>
+          </a:p>
+          <a:p>
+            <a:pPr indent="0" marL="0">
+              <a:buNone/>
+            </a:pPr>
+            <a:r>
+              <a:rPr lang="en-US" sz="1220" dirty="0">
                 <a:solidFill>
                   <a:srgbClr val="17364A"/>
                 </a:solidFill>
@@ -5018,7 +5072,7 @@
               </a:rPr>
               <a:t>Data leakage.</a:t>
             </a:r>
-            <a:endParaRPr lang="en-US" sz="1380" dirty="0"/>
+            <a:endParaRPr lang="en-US" sz="1220" dirty="0"/>
           </a:p>
         </p:txBody>
       </p:sp>
@@ -5096,17 +5150,17 @@
         </p:nvSpPr>
         <p:spPr>
           <a:xfrm>
-            <a:off x="7799832" y="5001768"/>
-            <a:ext cx="3145536" cy="502920"/>
-          </a:xfrm>
-          <a:prstGeom prst="rect">
-            <a:avLst/>
-          </a:prstGeom>
-          <a:noFill/>
-          <a:ln/>
-        </p:spPr>
-        <p:txBody>
-          <a:bodyPr wrap="square" lIns="0" tIns="0" rIns="0" bIns="0" rtlCol="0" anchor="t">
+            <a:off x="7799832" y="4974336"/>
+            <a:ext cx="3145536" cy="576072"/>
+          </a:xfrm>
+          <a:prstGeom prst="rect">
+            <a:avLst/>
+          </a:prstGeom>
+          <a:noFill/>
+          <a:ln/>
+        </p:spPr>
+        <p:txBody>
+          <a:bodyPr wrap="square" lIns="254" tIns="254" rIns="254" bIns="254" rtlCol="0" anchor="t">
             <a:normAutofit/>
           </a:bodyPr>
           <a:lstStyle/>
@@ -5115,7 +5169,7 @@
               <a:buNone/>
             </a:pPr>
             <a:r>
-              <a:rPr lang="en-US" sz="1550" dirty="0">
+              <a:rPr lang="en-US" sz="1320" dirty="0">
                 <a:solidFill>
                   <a:srgbClr val="17364A"/>
                 </a:solidFill>
@@ -5123,9 +5177,9 @@
                 <a:ea typeface="Aptos" pitchFamily="34" charset="-122"/>
                 <a:cs typeface="Aptos" pitchFamily="34" charset="-120"/>
               </a:rPr>
-              <a:t>Identify what could go wrong, who could be affected, what safeguards are needed, and what evidence should be reviewed before use expands.</a:t>
-            </a:r>
-            <a:endParaRPr lang="en-US" sz="1550" dirty="0"/>
+              <a:t>Identify what could go wrong, who could be affected, what safeguards are needed, and what evidence should be reviewed.</a:t>
+            </a:r>
+            <a:endParaRPr lang="en-US" sz="1320" dirty="0"/>
           </a:p>
         </p:txBody>
       </p:sp>
@@ -5426,49 +5480,58 @@
           <a:ln/>
         </p:spPr>
         <p:txBody>
-          <a:bodyPr wrap="square" lIns="635" tIns="635" rIns="635" bIns="635" rtlCol="0" anchor="t">
+          <a:bodyPr wrap="square" lIns="1016" tIns="1016" rIns="1016" bIns="1016" rtlCol="0" anchor="t">
             <a:normAutofit/>
           </a:bodyPr>
           <a:lstStyle/>
           <a:p>
+            <a:pPr indent="0" marL="0">
+              <a:buNone/>
+            </a:pPr>
             <a:r>
               <a:rPr lang="en-US" sz="2100" dirty="0">
                 <a:solidFill>
-                  <a:srgbClr val="17364A"/>
-                </a:solidFill>
-                <a:latin typeface="Aptos" pitchFamily="34" charset="0"/>
-                <a:ea typeface="Aptos" pitchFamily="34" charset="-122"/>
-                <a:cs typeface="Aptos" pitchFamily="34" charset="-120"/>
-              </a:rPr>
-              <a:t>Misuse of prediction as explanation.</a:t>
+                  <a:srgbClr val="003A63"/>
+                </a:solidFill>
+                <a:latin typeface="Aptos" pitchFamily="34" charset="0"/>
+                <a:ea typeface="Aptos" pitchFamily="34" charset="-122"/>
+                <a:cs typeface="Aptos" pitchFamily="34" charset="-120"/>
+              </a:rPr>
+              <a:t>• Misuse of prediction as explanation.</a:t>
             </a:r>
             <a:endParaRPr lang="en-US" sz="2100" dirty="0"/>
           </a:p>
           <a:p>
+            <a:pPr indent="0" marL="0">
+              <a:buNone/>
+            </a:pPr>
             <a:r>
               <a:rPr lang="en-US" sz="2100" dirty="0">
                 <a:solidFill>
-                  <a:srgbClr val="17364A"/>
-                </a:solidFill>
-                <a:latin typeface="Aptos" pitchFamily="34" charset="0"/>
-                <a:ea typeface="Aptos" pitchFamily="34" charset="-122"/>
-                <a:cs typeface="Aptos" pitchFamily="34" charset="-120"/>
-              </a:rPr>
-              <a:t>A model can predict risk without explaining cause.</a:t>
+                  <a:srgbClr val="003A63"/>
+                </a:solidFill>
+                <a:latin typeface="Aptos" pitchFamily="34" charset="0"/>
+                <a:ea typeface="Aptos" pitchFamily="34" charset="-122"/>
+                <a:cs typeface="Aptos" pitchFamily="34" charset="-120"/>
+              </a:rPr>
+              <a:t>• A model can predict risk without explaining cause.</a:t>
             </a:r>
             <a:endParaRPr lang="en-US" sz="2100" dirty="0"/>
           </a:p>
           <a:p>
+            <a:pPr indent="0" marL="0">
+              <a:buNone/>
+            </a:pPr>
             <a:r>
               <a:rPr lang="en-US" sz="2100" dirty="0">
                 <a:solidFill>
-                  <a:srgbClr val="17364A"/>
-                </a:solidFill>
-                <a:latin typeface="Aptos" pitchFamily="34" charset="0"/>
-                <a:ea typeface="Aptos" pitchFamily="34" charset="-122"/>
-                <a:cs typeface="Aptos" pitchFamily="34" charset="-120"/>
-              </a:rPr>
-              <a:t>Guardrails include clear communication, training, and restrictions against causal claims unless.</a:t>
+                  <a:srgbClr val="003A63"/>
+                </a:solidFill>
+                <a:latin typeface="Aptos" pitchFamily="34" charset="0"/>
+                <a:ea typeface="Aptos" pitchFamily="34" charset="-122"/>
+                <a:cs typeface="Aptos" pitchFamily="34" charset="-120"/>
+              </a:rPr>
+              <a:t>• Guardrails include clear communication, training, and restrictions against causal claims unless.</a:t>
             </a:r>
             <a:endParaRPr lang="en-US" sz="2100" dirty="0"/>
           </a:p>
@@ -5548,17 +5611,17 @@
         </p:nvSpPr>
         <p:spPr>
           <a:xfrm>
-            <a:off x="7799832" y="1828800"/>
-            <a:ext cx="3145536" cy="685800"/>
-          </a:xfrm>
-          <a:prstGeom prst="rect">
-            <a:avLst/>
-          </a:prstGeom>
-          <a:noFill/>
-          <a:ln/>
-        </p:spPr>
-        <p:txBody>
-          <a:bodyPr wrap="square" lIns="0" tIns="0" rIns="0" bIns="0" rtlCol="0" anchor="t">
+            <a:off x="7799832" y="1801368"/>
+            <a:ext cx="3145536" cy="758952"/>
+          </a:xfrm>
+          <a:prstGeom prst="rect">
+            <a:avLst/>
+          </a:prstGeom>
+          <a:noFill/>
+          <a:ln/>
+        </p:spPr>
+        <p:txBody>
+          <a:bodyPr wrap="square" lIns="254" tIns="254" rIns="254" bIns="254" rtlCol="0" anchor="t">
             <a:normAutofit/>
           </a:bodyPr>
           <a:lstStyle/>
@@ -5567,7 +5630,7 @@
               <a:buNone/>
             </a:pPr>
             <a:r>
-              <a:rPr lang="en-US" sz="1550" dirty="0">
+              <a:rPr lang="en-US" sz="1320" dirty="0">
                 <a:solidFill>
                   <a:srgbClr val="17364A"/>
                 </a:solidFill>
@@ -5577,7 +5640,7 @@
               </a:rPr>
               <a:t>Misuse of prediction as explanation.</a:t>
             </a:r>
-            <a:endParaRPr lang="en-US" sz="1550" dirty="0"/>
+            <a:endParaRPr lang="en-US" sz="1320" dirty="0"/>
           </a:p>
         </p:txBody>
       </p:sp>
@@ -5665,13 +5728,16 @@
           <a:ln/>
         </p:spPr>
         <p:txBody>
-          <a:bodyPr wrap="square" lIns="254" tIns="254" rIns="254" bIns="254" rtlCol="0" anchor="t">
+          <a:bodyPr wrap="square" lIns="508" tIns="508" rIns="508" bIns="508" rtlCol="0" anchor="t">
             <a:normAutofit/>
           </a:bodyPr>
           <a:lstStyle/>
           <a:p>
-            <a:r>
-              <a:rPr lang="en-US" sz="1380" dirty="0">
+            <a:pPr indent="0" marL="0">
+              <a:buNone/>
+            </a:pPr>
+            <a:r>
+              <a:rPr lang="en-US" sz="1220" dirty="0">
                 <a:solidFill>
                   <a:srgbClr val="17364A"/>
                 </a:solidFill>
@@ -5681,11 +5747,14 @@
               </a:rPr>
               <a:t>Misuse of prediction as explanation.</a:t>
             </a:r>
-            <a:endParaRPr lang="en-US" sz="1380" dirty="0"/>
-          </a:p>
-          <a:p>
-            <a:r>
-              <a:rPr lang="en-US" sz="1380" dirty="0">
+            <a:endParaRPr lang="en-US" sz="1220" dirty="0"/>
+          </a:p>
+          <a:p>
+            <a:pPr indent="0" marL="0">
+              <a:buNone/>
+            </a:pPr>
+            <a:r>
+              <a:rPr lang="en-US" sz="1220" dirty="0">
                 <a:solidFill>
                   <a:srgbClr val="17364A"/>
                 </a:solidFill>
@@ -5695,11 +5764,14 @@
               </a:rPr>
               <a:t>A model can predict risk without explaining cause.</a:t>
             </a:r>
-            <a:endParaRPr lang="en-US" sz="1380" dirty="0"/>
-          </a:p>
-          <a:p>
-            <a:r>
-              <a:rPr lang="en-US" sz="1380" dirty="0">
+            <a:endParaRPr lang="en-US" sz="1220" dirty="0"/>
+          </a:p>
+          <a:p>
+            <a:pPr indent="0" marL="0">
+              <a:buNone/>
+            </a:pPr>
+            <a:r>
+              <a:rPr lang="en-US" sz="1220" dirty="0">
                 <a:solidFill>
                   <a:srgbClr val="17364A"/>
                 </a:solidFill>
@@ -5707,9 +5779,9 @@
                 <a:ea typeface="Aptos" pitchFamily="34" charset="-122"/>
                 <a:cs typeface="Aptos" pitchFamily="34" charset="-120"/>
               </a:rPr>
-              <a:t>Guardrails include clear communication, training, and restrictions against causal claims.</a:t>
-            </a:r>
-            <a:endParaRPr lang="en-US" sz="1380" dirty="0"/>
+              <a:t>Guardrails include clear communication, training, and restrictions.</a:t>
+            </a:r>
+            <a:endParaRPr lang="en-US" sz="1220" dirty="0"/>
           </a:p>
         </p:txBody>
       </p:sp>
@@ -5787,17 +5859,17 @@
         </p:nvSpPr>
         <p:spPr>
           <a:xfrm>
-            <a:off x="7799832" y="5001768"/>
-            <a:ext cx="3145536" cy="502920"/>
-          </a:xfrm>
-          <a:prstGeom prst="rect">
-            <a:avLst/>
-          </a:prstGeom>
-          <a:noFill/>
-          <a:ln/>
-        </p:spPr>
-        <p:txBody>
-          <a:bodyPr wrap="square" lIns="0" tIns="0" rIns="0" bIns="0" rtlCol="0" anchor="t">
+            <a:off x="7799832" y="4974336"/>
+            <a:ext cx="3145536" cy="576072"/>
+          </a:xfrm>
+          <a:prstGeom prst="rect">
+            <a:avLst/>
+          </a:prstGeom>
+          <a:noFill/>
+          <a:ln/>
+        </p:spPr>
+        <p:txBody>
+          <a:bodyPr wrap="square" lIns="254" tIns="254" rIns="254" bIns="254" rtlCol="0" anchor="t">
             <a:normAutofit/>
           </a:bodyPr>
           <a:lstStyle/>
@@ -5806,7 +5878,7 @@
               <a:buNone/>
             </a:pPr>
             <a:r>
-              <a:rPr lang="en-US" sz="1550" dirty="0">
+              <a:rPr lang="en-US" sz="1320" dirty="0">
                 <a:solidFill>
                   <a:srgbClr val="17364A"/>
                 </a:solidFill>
@@ -5814,9 +5886,9 @@
                 <a:ea typeface="Aptos" pitchFamily="34" charset="-122"/>
                 <a:cs typeface="Aptos" pitchFamily="34" charset="-120"/>
               </a:rPr>
-              <a:t>Identify what could go wrong, who could be affected, what safeguards are needed, and what evidence should be reviewed before use expands.</a:t>
-            </a:r>
-            <a:endParaRPr lang="en-US" sz="1550" dirty="0"/>
+              <a:t>Identify what could go wrong, who could be affected, what safeguards are needed, and what evidence should be reviewed.</a:t>
+            </a:r>
+            <a:endParaRPr lang="en-US" sz="1320" dirty="0"/>
           </a:p>
         </p:txBody>
       </p:sp>
@@ -6117,49 +6189,58 @@
           <a:ln/>
         </p:spPr>
         <p:txBody>
-          <a:bodyPr wrap="square" lIns="635" tIns="635" rIns="635" bIns="635" rtlCol="0" anchor="t">
+          <a:bodyPr wrap="square" lIns="1016" tIns="1016" rIns="1016" bIns="1016" rtlCol="0" anchor="t">
             <a:normAutofit/>
           </a:bodyPr>
           <a:lstStyle/>
           <a:p>
+            <a:pPr indent="0" marL="0">
+              <a:buNone/>
+            </a:pPr>
             <a:r>
               <a:rPr lang="en-US" sz="2100" dirty="0">
                 <a:solidFill>
-                  <a:srgbClr val="17364A"/>
-                </a:solidFill>
-                <a:latin typeface="Aptos" pitchFamily="34" charset="0"/>
-                <a:ea typeface="Aptos" pitchFamily="34" charset="-122"/>
-                <a:cs typeface="Aptos" pitchFamily="34" charset="-120"/>
-              </a:rPr>
-              <a:t>Machine learning may support generative AI, predictive analytics, NLP, anomaly detection, and agentic.</a:t>
+                  <a:srgbClr val="003A63"/>
+                </a:solidFill>
+                <a:latin typeface="Aptos" pitchFamily="34" charset="0"/>
+                <a:ea typeface="Aptos" pitchFamily="34" charset="-122"/>
+                <a:cs typeface="Aptos" pitchFamily="34" charset="-120"/>
+              </a:rPr>
+              <a:t>• Machine learning may support generative AI, predictive analytics, NLP, anomaly detection, and.</a:t>
             </a:r>
             <a:endParaRPr lang="en-US" sz="2100" dirty="0"/>
           </a:p>
           <a:p>
+            <a:pPr indent="0" marL="0">
+              <a:buNone/>
+            </a:pPr>
             <a:r>
               <a:rPr lang="en-US" sz="2100" dirty="0">
                 <a:solidFill>
-                  <a:srgbClr val="17364A"/>
-                </a:solidFill>
-                <a:latin typeface="Aptos" pitchFamily="34" charset="0"/>
-                <a:ea typeface="Aptos" pitchFamily="34" charset="-122"/>
-                <a:cs typeface="Aptos" pitchFamily="34" charset="-120"/>
-              </a:rPr>
-              <a:t>In generative AI systems, machine learning concepts help staff understand why outputs may be fluent but.</a:t>
+                  <a:srgbClr val="003A63"/>
+                </a:solidFill>
+                <a:latin typeface="Aptos" pitchFamily="34" charset="0"/>
+                <a:ea typeface="Aptos" pitchFamily="34" charset="-122"/>
+                <a:cs typeface="Aptos" pitchFamily="34" charset="-120"/>
+              </a:rPr>
+              <a:t>• In generative AI systems, machine learning concepts help staff understand why outputs may be.</a:t>
             </a:r>
             <a:endParaRPr lang="en-US" sz="2100" dirty="0"/>
           </a:p>
           <a:p>
+            <a:pPr indent="0" marL="0">
+              <a:buNone/>
+            </a:pPr>
             <a:r>
               <a:rPr lang="en-US" sz="2100" dirty="0">
                 <a:solidFill>
-                  <a:srgbClr val="17364A"/>
-                </a:solidFill>
-                <a:latin typeface="Aptos" pitchFamily="34" charset="0"/>
-                <a:ea typeface="Aptos" pitchFamily="34" charset="-122"/>
-                <a:cs typeface="Aptos" pitchFamily="34" charset="-120"/>
-              </a:rPr>
-              <a:t>In predictive workflows, machine learning literacy helps staff evaluate risk scores, thresholds, and.</a:t>
+                  <a:srgbClr val="003A63"/>
+                </a:solidFill>
+                <a:latin typeface="Aptos" pitchFamily="34" charset="0"/>
+                <a:ea typeface="Aptos" pitchFamily="34" charset="-122"/>
+                <a:cs typeface="Aptos" pitchFamily="34" charset="-120"/>
+              </a:rPr>
+              <a:t>• In predictive workflows, machine learning literacy helps staff evaluate risk scores,.</a:t>
             </a:r>
             <a:endParaRPr lang="en-US" sz="2100" dirty="0"/>
           </a:p>
@@ -6239,17 +6320,17 @@
         </p:nvSpPr>
         <p:spPr>
           <a:xfrm>
-            <a:off x="7799832" y="1828800"/>
-            <a:ext cx="3145536" cy="685800"/>
-          </a:xfrm>
-          <a:prstGeom prst="rect">
-            <a:avLst/>
-          </a:prstGeom>
-          <a:noFill/>
-          <a:ln/>
-        </p:spPr>
-        <p:txBody>
-          <a:bodyPr wrap="square" lIns="0" tIns="0" rIns="0" bIns="0" rtlCol="0" anchor="t">
+            <a:off x="7799832" y="1801368"/>
+            <a:ext cx="3145536" cy="758952"/>
+          </a:xfrm>
+          <a:prstGeom prst="rect">
+            <a:avLst/>
+          </a:prstGeom>
+          <a:noFill/>
+          <a:ln/>
+        </p:spPr>
+        <p:txBody>
+          <a:bodyPr wrap="square" lIns="254" tIns="254" rIns="254" bIns="254" rtlCol="0" anchor="t">
             <a:normAutofit/>
           </a:bodyPr>
           <a:lstStyle/>
@@ -6258,7 +6339,7 @@
               <a:buNone/>
             </a:pPr>
             <a:r>
-              <a:rPr lang="en-US" sz="1550" dirty="0">
+              <a:rPr lang="en-US" sz="1320" dirty="0">
                 <a:solidFill>
                   <a:srgbClr val="17364A"/>
                 </a:solidFill>
@@ -6268,7 +6349,7 @@
               </a:rPr>
               <a:t>Machine learning may support generative AI, predictive analytics, NLP, anomaly detection, and agentic.</a:t>
             </a:r>
-            <a:endParaRPr lang="en-US" sz="1550" dirty="0"/>
+            <a:endParaRPr lang="en-US" sz="1320" dirty="0"/>
           </a:p>
         </p:txBody>
       </p:sp>
@@ -6356,13 +6437,16 @@
           <a:ln/>
         </p:spPr>
         <p:txBody>
-          <a:bodyPr wrap="square" lIns="254" tIns="254" rIns="254" bIns="254" rtlCol="0" anchor="t">
+          <a:bodyPr wrap="square" lIns="508" tIns="508" rIns="508" bIns="508" rtlCol="0" anchor="t">
             <a:normAutofit/>
           </a:bodyPr>
           <a:lstStyle/>
           <a:p>
-            <a:r>
-              <a:rPr lang="en-US" sz="1380" dirty="0">
+            <a:pPr indent="0" marL="0">
+              <a:buNone/>
+            </a:pPr>
+            <a:r>
+              <a:rPr lang="en-US" sz="1220" dirty="0">
                 <a:solidFill>
                   <a:srgbClr val="17364A"/>
                 </a:solidFill>
@@ -6370,13 +6454,16 @@
                 <a:ea typeface="Aptos" pitchFamily="34" charset="-122"/>
                 <a:cs typeface="Aptos" pitchFamily="34" charset="-120"/>
               </a:rPr>
-              <a:t>Machine learning may support generative AI, predictive analytics, NLP, anomaly detection,.</a:t>
-            </a:r>
-            <a:endParaRPr lang="en-US" sz="1380" dirty="0"/>
-          </a:p>
-          <a:p>
-            <a:r>
-              <a:rPr lang="en-US" sz="1380" dirty="0">
+              <a:t>Machine learning may support generative AI, predictive analytics,.</a:t>
+            </a:r>
+            <a:endParaRPr lang="en-US" sz="1220" dirty="0"/>
+          </a:p>
+          <a:p>
+            <a:pPr indent="0" marL="0">
+              <a:buNone/>
+            </a:pPr>
+            <a:r>
+              <a:rPr lang="en-US" sz="1220" dirty="0">
                 <a:solidFill>
                   <a:srgbClr val="17364A"/>
                 </a:solidFill>
@@ -6384,13 +6471,16 @@
                 <a:ea typeface="Aptos" pitchFamily="34" charset="-122"/>
                 <a:cs typeface="Aptos" pitchFamily="34" charset="-120"/>
               </a:rPr>
-              <a:t>In generative AI systems, machine learning concepts help staff understand why outputs may.</a:t>
-            </a:r>
-            <a:endParaRPr lang="en-US" sz="1380" dirty="0"/>
-          </a:p>
-          <a:p>
-            <a:r>
-              <a:rPr lang="en-US" sz="1380" dirty="0">
+              <a:t>In generative AI systems, machine learning concepts help staff.</a:t>
+            </a:r>
+            <a:endParaRPr lang="en-US" sz="1220" dirty="0"/>
+          </a:p>
+          <a:p>
+            <a:pPr indent="0" marL="0">
+              <a:buNone/>
+            </a:pPr>
+            <a:r>
+              <a:rPr lang="en-US" sz="1220" dirty="0">
                 <a:solidFill>
                   <a:srgbClr val="17364A"/>
                 </a:solidFill>
@@ -6398,9 +6488,9 @@
                 <a:ea typeface="Aptos" pitchFamily="34" charset="-122"/>
                 <a:cs typeface="Aptos" pitchFamily="34" charset="-120"/>
               </a:rPr>
-              <a:t>In predictive workflows, machine learning literacy helps staff evaluate risk scores,.</a:t>
-            </a:r>
-            <a:endParaRPr lang="en-US" sz="1380" dirty="0"/>
+              <a:t>In predictive workflows, machine learning literacy helps staff.</a:t>
+            </a:r>
+            <a:endParaRPr lang="en-US" sz="1220" dirty="0"/>
           </a:p>
         </p:txBody>
       </p:sp>
@@ -6478,17 +6568,17 @@
         </p:nvSpPr>
         <p:spPr>
           <a:xfrm>
-            <a:off x="7799832" y="5001768"/>
-            <a:ext cx="3145536" cy="502920"/>
-          </a:xfrm>
-          <a:prstGeom prst="rect">
-            <a:avLst/>
-          </a:prstGeom>
-          <a:noFill/>
-          <a:ln/>
-        </p:spPr>
-        <p:txBody>
-          <a:bodyPr wrap="square" lIns="0" tIns="0" rIns="0" bIns="0" rtlCol="0" anchor="t">
+            <a:off x="7799832" y="4974336"/>
+            <a:ext cx="3145536" cy="576072"/>
+          </a:xfrm>
+          <a:prstGeom prst="rect">
+            <a:avLst/>
+          </a:prstGeom>
+          <a:noFill/>
+          <a:ln/>
+        </p:spPr>
+        <p:txBody>
+          <a:bodyPr wrap="square" lIns="254" tIns="254" rIns="254" bIns="254" rtlCol="0" anchor="t">
             <a:normAutofit/>
           </a:bodyPr>
           <a:lstStyle/>
@@ -6497,7 +6587,7 @@
               <a:buNone/>
             </a:pPr>
             <a:r>
-              <a:rPr lang="en-US" sz="1550" dirty="0">
+              <a:rPr lang="en-US" sz="1320" dirty="0">
                 <a:solidFill>
                   <a:srgbClr val="17364A"/>
                 </a:solidFill>
@@ -6505,9 +6595,9 @@
                 <a:ea typeface="Aptos" pitchFamily="34" charset="-122"/>
                 <a:cs typeface="Aptos" pitchFamily="34" charset="-120"/>
               </a:rPr>
-              <a:t>Use the concept to clarify workflow changes, dependencies, staffing, procurement requirements, training needs, and implementation checkpoints.</a:t>
-            </a:r>
-            <a:endParaRPr lang="en-US" sz="1550" dirty="0"/>
+              <a:t>Use the concept to clarify workflow changes, dependencies, staffing, procurement requirements, training needs, and.</a:t>
+            </a:r>
+            <a:endParaRPr lang="en-US" sz="1320" dirty="0"/>
           </a:p>
         </p:txBody>
       </p:sp>
@@ -6808,49 +6898,58 @@
           <a:ln/>
         </p:spPr>
         <p:txBody>
-          <a:bodyPr wrap="square" lIns="635" tIns="635" rIns="635" bIns="635" rtlCol="0" anchor="t">
+          <a:bodyPr wrap="square" lIns="1016" tIns="1016" rIns="1016" bIns="1016" rtlCol="0" anchor="t">
             <a:normAutofit/>
           </a:bodyPr>
           <a:lstStyle/>
           <a:p>
+            <a:pPr indent="0" marL="0">
+              <a:buNone/>
+            </a:pPr>
             <a:r>
               <a:rPr lang="en-US" sz="2100" dirty="0">
                 <a:solidFill>
-                  <a:srgbClr val="17364A"/>
-                </a:solidFill>
-                <a:latin typeface="Aptos" pitchFamily="34" charset="0"/>
-                <a:ea typeface="Aptos" pitchFamily="34" charset="-122"/>
-                <a:cs typeface="Aptos" pitchFamily="34" charset="-120"/>
-              </a:rPr>
-              <a:t>What public health task would the model support: classification, prediction, ranking, clustering, or.</a:t>
+                  <a:srgbClr val="003A63"/>
+                </a:solidFill>
+                <a:latin typeface="Aptos" pitchFamily="34" charset="0"/>
+                <a:ea typeface="Aptos" pitchFamily="34" charset="-122"/>
+                <a:cs typeface="Aptos" pitchFamily="34" charset="-120"/>
+              </a:rPr>
+              <a:t>• What public health task would the model support: classification, prediction, ranking,.</a:t>
             </a:r>
             <a:endParaRPr lang="en-US" sz="2100" dirty="0"/>
           </a:p>
           <a:p>
+            <a:pPr indent="0" marL="0">
+              <a:buNone/>
+            </a:pPr>
             <a:r>
               <a:rPr lang="en-US" sz="2100" dirty="0">
                 <a:solidFill>
-                  <a:srgbClr val="17364A"/>
-                </a:solidFill>
-                <a:latin typeface="Aptos" pitchFamily="34" charset="0"/>
-                <a:ea typeface="Aptos" pitchFamily="34" charset="-122"/>
-                <a:cs typeface="Aptos" pitchFamily="34" charset="-120"/>
-              </a:rPr>
-              <a:t>What label would be used, and how reliable or equitable is that label?</a:t>
+                  <a:srgbClr val="003A63"/>
+                </a:solidFill>
+                <a:latin typeface="Aptos" pitchFamily="34" charset="0"/>
+                <a:ea typeface="Aptos" pitchFamily="34" charset="-122"/>
+                <a:cs typeface="Aptos" pitchFamily="34" charset="-120"/>
+              </a:rPr>
+              <a:t>• What label would be used, and how reliable or equitable is that label?</a:t>
             </a:r>
             <a:endParaRPr lang="en-US" sz="2100" dirty="0"/>
           </a:p>
           <a:p>
+            <a:pPr indent="0" marL="0">
+              <a:buNone/>
+            </a:pPr>
             <a:r>
               <a:rPr lang="en-US" sz="2100" dirty="0">
                 <a:solidFill>
-                  <a:srgbClr val="17364A"/>
-                </a:solidFill>
-                <a:latin typeface="Aptos" pitchFamily="34" charset="0"/>
-                <a:ea typeface="Aptos" pitchFamily="34" charset="-122"/>
-                <a:cs typeface="Aptos" pitchFamily="34" charset="-120"/>
-              </a:rPr>
-              <a:t>Which features might reflect access, documentation, or reporting bias rather than true risk?</a:t>
+                  <a:srgbClr val="003A63"/>
+                </a:solidFill>
+                <a:latin typeface="Aptos" pitchFamily="34" charset="0"/>
+                <a:ea typeface="Aptos" pitchFamily="34" charset="-122"/>
+                <a:cs typeface="Aptos" pitchFamily="34" charset="-120"/>
+              </a:rPr>
+              <a:t>• Which features might reflect access, documentation, or reporting bias rather than true risk?</a:t>
             </a:r>
             <a:endParaRPr lang="en-US" sz="2100" dirty="0"/>
           </a:p>
@@ -6930,17 +7029,17 @@
         </p:nvSpPr>
         <p:spPr>
           <a:xfrm>
-            <a:off x="7799832" y="1828800"/>
-            <a:ext cx="3145536" cy="685800"/>
-          </a:xfrm>
-          <a:prstGeom prst="rect">
-            <a:avLst/>
-          </a:prstGeom>
-          <a:noFill/>
-          <a:ln/>
-        </p:spPr>
-        <p:txBody>
-          <a:bodyPr wrap="square" lIns="0" tIns="0" rIns="0" bIns="0" rtlCol="0" anchor="t">
+            <a:off x="7799832" y="1801368"/>
+            <a:ext cx="3145536" cy="758952"/>
+          </a:xfrm>
+          <a:prstGeom prst="rect">
+            <a:avLst/>
+          </a:prstGeom>
+          <a:noFill/>
+          <a:ln/>
+        </p:spPr>
+        <p:txBody>
+          <a:bodyPr wrap="square" lIns="254" tIns="254" rIns="254" bIns="254" rtlCol="0" anchor="t">
             <a:normAutofit/>
           </a:bodyPr>
           <a:lstStyle/>
@@ -6949,7 +7048,7 @@
               <a:buNone/>
             </a:pPr>
             <a:r>
-              <a:rPr lang="en-US" sz="1550" dirty="0">
+              <a:rPr lang="en-US" sz="1320" dirty="0">
                 <a:solidFill>
                   <a:srgbClr val="17364A"/>
                 </a:solidFill>
@@ -6959,7 +7058,7 @@
               </a:rPr>
               <a:t>What public health task would the model support: classification, prediction, ranking, clustering, or.</a:t>
             </a:r>
-            <a:endParaRPr lang="en-US" sz="1550" dirty="0"/>
+            <a:endParaRPr lang="en-US" sz="1320" dirty="0"/>
           </a:p>
         </p:txBody>
       </p:sp>
@@ -7047,13 +7146,16 @@
           <a:ln/>
         </p:spPr>
         <p:txBody>
-          <a:bodyPr wrap="square" lIns="254" tIns="254" rIns="254" bIns="254" rtlCol="0" anchor="t">
+          <a:bodyPr wrap="square" lIns="508" tIns="508" rIns="508" bIns="508" rtlCol="0" anchor="t">
             <a:normAutofit/>
           </a:bodyPr>
           <a:lstStyle/>
           <a:p>
-            <a:r>
-              <a:rPr lang="en-US" sz="1380" dirty="0">
+            <a:pPr indent="0" marL="0">
+              <a:buNone/>
+            </a:pPr>
+            <a:r>
+              <a:rPr lang="en-US" sz="1220" dirty="0">
                 <a:solidFill>
                   <a:srgbClr val="17364A"/>
                 </a:solidFill>
@@ -7061,13 +7163,16 @@
                 <a:ea typeface="Aptos" pitchFamily="34" charset="-122"/>
                 <a:cs typeface="Aptos" pitchFamily="34" charset="-120"/>
               </a:rPr>
-              <a:t>What public health task would the model support: classification, prediction, ranking,.</a:t>
-            </a:r>
-            <a:endParaRPr lang="en-US" sz="1380" dirty="0"/>
-          </a:p>
-          <a:p>
-            <a:r>
-              <a:rPr lang="en-US" sz="1380" dirty="0">
+              <a:t>What public health task would the model support: classification,.</a:t>
+            </a:r>
+            <a:endParaRPr lang="en-US" sz="1220" dirty="0"/>
+          </a:p>
+          <a:p>
+            <a:pPr indent="0" marL="0">
+              <a:buNone/>
+            </a:pPr>
+            <a:r>
+              <a:rPr lang="en-US" sz="1220" dirty="0">
                 <a:solidFill>
                   <a:srgbClr val="17364A"/>
                 </a:solidFill>
@@ -7075,13 +7180,16 @@
                 <a:ea typeface="Aptos" pitchFamily="34" charset="-122"/>
                 <a:cs typeface="Aptos" pitchFamily="34" charset="-120"/>
               </a:rPr>
-              <a:t>What label would be used, and how reliable or equitable is that label?</a:t>
-            </a:r>
-            <a:endParaRPr lang="en-US" sz="1380" dirty="0"/>
-          </a:p>
-          <a:p>
-            <a:r>
-              <a:rPr lang="en-US" sz="1380" dirty="0">
+              <a:t>What label would be used, and how reliable or equitable is that.</a:t>
+            </a:r>
+            <a:endParaRPr lang="en-US" sz="1220" dirty="0"/>
+          </a:p>
+          <a:p>
+            <a:pPr indent="0" marL="0">
+              <a:buNone/>
+            </a:pPr>
+            <a:r>
+              <a:rPr lang="en-US" sz="1220" dirty="0">
                 <a:solidFill>
                   <a:srgbClr val="17364A"/>
                 </a:solidFill>
@@ -7089,9 +7197,9 @@
                 <a:ea typeface="Aptos" pitchFamily="34" charset="-122"/>
                 <a:cs typeface="Aptos" pitchFamily="34" charset="-120"/>
               </a:rPr>
-              <a:t>Which features might reflect access, documentation, or reporting bias rather than true risk?</a:t>
-            </a:r>
-            <a:endParaRPr lang="en-US" sz="1380" dirty="0"/>
+              <a:t>Which features might reflect access, documentation, or reporting.</a:t>
+            </a:r>
+            <a:endParaRPr lang="en-US" sz="1220" dirty="0"/>
           </a:p>
         </p:txBody>
       </p:sp>
@@ -7169,17 +7277,17 @@
         </p:nvSpPr>
         <p:spPr>
           <a:xfrm>
-            <a:off x="7799832" y="5001768"/>
-            <a:ext cx="3145536" cy="502920"/>
-          </a:xfrm>
-          <a:prstGeom prst="rect">
-            <a:avLst/>
-          </a:prstGeom>
-          <a:noFill/>
-          <a:ln/>
-        </p:spPr>
-        <p:txBody>
-          <a:bodyPr wrap="square" lIns="0" tIns="0" rIns="0" bIns="0" rtlCol="0" anchor="t">
+            <a:off x="7799832" y="4974336"/>
+            <a:ext cx="3145536" cy="576072"/>
+          </a:xfrm>
+          <a:prstGeom prst="rect">
+            <a:avLst/>
+          </a:prstGeom>
+          <a:noFill/>
+          <a:ln/>
+        </p:spPr>
+        <p:txBody>
+          <a:bodyPr wrap="square" lIns="254" tIns="254" rIns="254" bIns="254" rtlCol="0" anchor="t">
             <a:normAutofit/>
           </a:bodyPr>
           <a:lstStyle/>
@@ -7188,7 +7296,7 @@
               <a:buNone/>
             </a:pPr>
             <a:r>
-              <a:rPr lang="en-US" sz="1550" dirty="0">
+              <a:rPr lang="en-US" sz="1320" dirty="0">
                 <a:solidFill>
                   <a:srgbClr val="17364A"/>
                 </a:solidFill>
@@ -7196,9 +7304,9 @@
                 <a:ea typeface="Aptos" pitchFamily="34" charset="-122"/>
                 <a:cs typeface="Aptos" pitchFamily="34" charset="-120"/>
               </a:rPr>
-              <a:t>Connect the concept to public health purpose, responsible use, required safeguards, documentation, and the next action a department should take.</a:t>
-            </a:r>
-            <a:endParaRPr lang="en-US" sz="1550" dirty="0"/>
+              <a:t>Connect the concept to public health purpose, responsible use, required safeguards, documentation, and the next action a.</a:t>
+            </a:r>
+            <a:endParaRPr lang="en-US" sz="1320" dirty="0"/>
           </a:p>
         </p:txBody>
       </p:sp>
@@ -7499,35 +7607,41 @@
           <a:ln/>
         </p:spPr>
         <p:txBody>
-          <a:bodyPr wrap="square" lIns="635" tIns="635" rIns="635" bIns="635" rtlCol="0" anchor="t">
+          <a:bodyPr wrap="square" lIns="1016" tIns="1016" rIns="1016" bIns="1016" rtlCol="0" anchor="t">
             <a:normAutofit/>
           </a:bodyPr>
           <a:lstStyle/>
           <a:p>
+            <a:pPr indent="0" marL="0">
+              <a:buNone/>
+            </a:pPr>
             <a:r>
               <a:rPr lang="en-US" sz="2100" dirty="0">
                 <a:solidFill>
-                  <a:srgbClr val="17364A"/>
-                </a:solidFill>
-                <a:latin typeface="Aptos" pitchFamily="34" charset="0"/>
-                <a:ea typeface="Aptos" pitchFamily="34" charset="-122"/>
-                <a:cs typeface="Aptos" pitchFamily="34" charset="-120"/>
-              </a:rPr>
-              <a:t>What errors would be most harmful in this workflow?</a:t>
+                  <a:srgbClr val="003A63"/>
+                </a:solidFill>
+                <a:latin typeface="Aptos" pitchFamily="34" charset="0"/>
+                <a:ea typeface="Aptos" pitchFamily="34" charset="-122"/>
+                <a:cs typeface="Aptos" pitchFamily="34" charset="-120"/>
+              </a:rPr>
+              <a:t>• What errors would be most harmful in this workflow?</a:t>
             </a:r>
             <a:endParaRPr lang="en-US" sz="2100" dirty="0"/>
           </a:p>
           <a:p>
+            <a:pPr indent="0" marL="0">
+              <a:buNone/>
+            </a:pPr>
             <a:r>
               <a:rPr lang="en-US" sz="2100" dirty="0">
                 <a:solidFill>
-                  <a:srgbClr val="17364A"/>
-                </a:solidFill>
-                <a:latin typeface="Aptos" pitchFamily="34" charset="0"/>
-                <a:ea typeface="Aptos" pitchFamily="34" charset="-122"/>
-                <a:cs typeface="Aptos" pitchFamily="34" charset="-120"/>
-              </a:rPr>
-              <a:t>Who would review model outputs, override them, and document concerns?</a:t>
+                  <a:srgbClr val="003A63"/>
+                </a:solidFill>
+                <a:latin typeface="Aptos" pitchFamily="34" charset="0"/>
+                <a:ea typeface="Aptos" pitchFamily="34" charset="-122"/>
+                <a:cs typeface="Aptos" pitchFamily="34" charset="-120"/>
+              </a:rPr>
+              <a:t>• Who would review model outputs, override them, and document concerns?</a:t>
             </a:r>
             <a:endParaRPr lang="en-US" sz="2100" dirty="0"/>
           </a:p>
@@ -7607,17 +7721,17 @@
         </p:nvSpPr>
         <p:spPr>
           <a:xfrm>
-            <a:off x="7799832" y="1828800"/>
-            <a:ext cx="3145536" cy="685800"/>
-          </a:xfrm>
-          <a:prstGeom prst="rect">
-            <a:avLst/>
-          </a:prstGeom>
-          <a:noFill/>
-          <a:ln/>
-        </p:spPr>
-        <p:txBody>
-          <a:bodyPr wrap="square" lIns="0" tIns="0" rIns="0" bIns="0" rtlCol="0" anchor="t">
+            <a:off x="7799832" y="1801368"/>
+            <a:ext cx="3145536" cy="758952"/>
+          </a:xfrm>
+          <a:prstGeom prst="rect">
+            <a:avLst/>
+          </a:prstGeom>
+          <a:noFill/>
+          <a:ln/>
+        </p:spPr>
+        <p:txBody>
+          <a:bodyPr wrap="square" lIns="254" tIns="254" rIns="254" bIns="254" rtlCol="0" anchor="t">
             <a:normAutofit/>
           </a:bodyPr>
           <a:lstStyle/>
@@ -7626,7 +7740,7 @@
               <a:buNone/>
             </a:pPr>
             <a:r>
-              <a:rPr lang="en-US" sz="1550" dirty="0">
+              <a:rPr lang="en-US" sz="1320" dirty="0">
                 <a:solidFill>
                   <a:srgbClr val="17364A"/>
                 </a:solidFill>
@@ -7636,7 +7750,7 @@
               </a:rPr>
               <a:t>What errors would be most harmful in this workflow?</a:t>
             </a:r>
-            <a:endParaRPr lang="en-US" sz="1550" dirty="0"/>
+            <a:endParaRPr lang="en-US" sz="1320" dirty="0"/>
           </a:p>
         </p:txBody>
       </p:sp>
@@ -7724,13 +7838,16 @@
           <a:ln/>
         </p:spPr>
         <p:txBody>
-          <a:bodyPr wrap="square" lIns="254" tIns="254" rIns="254" bIns="254" rtlCol="0" anchor="t">
+          <a:bodyPr wrap="square" lIns="508" tIns="508" rIns="508" bIns="508" rtlCol="0" anchor="t">
             <a:normAutofit/>
           </a:bodyPr>
           <a:lstStyle/>
           <a:p>
-            <a:r>
-              <a:rPr lang="en-US" sz="1380" dirty="0">
+            <a:pPr indent="0" marL="0">
+              <a:buNone/>
+            </a:pPr>
+            <a:r>
+              <a:rPr lang="en-US" sz="1220" dirty="0">
                 <a:solidFill>
                   <a:srgbClr val="17364A"/>
                 </a:solidFill>
@@ -7740,11 +7857,14 @@
               </a:rPr>
               <a:t>What errors would be most harmful in this workflow?</a:t>
             </a:r>
-            <a:endParaRPr lang="en-US" sz="1380" dirty="0"/>
-          </a:p>
-          <a:p>
-            <a:r>
-              <a:rPr lang="en-US" sz="1380" dirty="0">
+            <a:endParaRPr lang="en-US" sz="1220" dirty="0"/>
+          </a:p>
+          <a:p>
+            <a:pPr indent="0" marL="0">
+              <a:buNone/>
+            </a:pPr>
+            <a:r>
+              <a:rPr lang="en-US" sz="1220" dirty="0">
                 <a:solidFill>
                   <a:srgbClr val="17364A"/>
                 </a:solidFill>
@@ -7752,9 +7872,9 @@
                 <a:ea typeface="Aptos" pitchFamily="34" charset="-122"/>
                 <a:cs typeface="Aptos" pitchFamily="34" charset="-120"/>
               </a:rPr>
-              <a:t>Who would review model outputs, override them, and document concerns?</a:t>
-            </a:r>
-            <a:endParaRPr lang="en-US" sz="1380" dirty="0"/>
+              <a:t>Who would review model outputs, override them, and document.</a:t>
+            </a:r>
+            <a:endParaRPr lang="en-US" sz="1220" dirty="0"/>
           </a:p>
         </p:txBody>
       </p:sp>
@@ -7832,17 +7952,17 @@
         </p:nvSpPr>
         <p:spPr>
           <a:xfrm>
-            <a:off x="7799832" y="5001768"/>
-            <a:ext cx="3145536" cy="502920"/>
-          </a:xfrm>
-          <a:prstGeom prst="rect">
-            <a:avLst/>
-          </a:prstGeom>
-          <a:noFill/>
-          <a:ln/>
-        </p:spPr>
-        <p:txBody>
-          <a:bodyPr wrap="square" lIns="0" tIns="0" rIns="0" bIns="0" rtlCol="0" anchor="t">
+            <a:off x="7799832" y="4974336"/>
+            <a:ext cx="3145536" cy="576072"/>
+          </a:xfrm>
+          <a:prstGeom prst="rect">
+            <a:avLst/>
+          </a:prstGeom>
+          <a:noFill/>
+          <a:ln/>
+        </p:spPr>
+        <p:txBody>
+          <a:bodyPr wrap="square" lIns="254" tIns="254" rIns="254" bIns="254" rtlCol="0" anchor="t">
             <a:normAutofit/>
           </a:bodyPr>
           <a:lstStyle/>
@@ -7851,7 +7971,7 @@
               <a:buNone/>
             </a:pPr>
             <a:r>
-              <a:rPr lang="en-US" sz="1550" dirty="0">
+              <a:rPr lang="en-US" sz="1320" dirty="0">
                 <a:solidFill>
                   <a:srgbClr val="17364A"/>
                 </a:solidFill>
@@ -7859,9 +7979,9 @@
                 <a:ea typeface="Aptos" pitchFamily="34" charset="-122"/>
                 <a:cs typeface="Aptos" pitchFamily="34" charset="-120"/>
               </a:rPr>
-              <a:t>Connect the concept to public health purpose, responsible use, required safeguards, documentation, and the next action a department should take.</a:t>
-            </a:r>
-            <a:endParaRPr lang="en-US" sz="1550" dirty="0"/>
+              <a:t>Connect the concept to public health purpose, responsible use, required safeguards, documentation, and the next action a.</a:t>
+            </a:r>
+            <a:endParaRPr lang="en-US" sz="1320" dirty="0"/>
           </a:p>
         </p:txBody>
       </p:sp>
@@ -8162,49 +8282,58 @@
           <a:ln/>
         </p:spPr>
         <p:txBody>
-          <a:bodyPr wrap="square" lIns="635" tIns="635" rIns="635" bIns="635" rtlCol="0" anchor="t">
+          <a:bodyPr wrap="square" lIns="1016" tIns="1016" rIns="1016" bIns="1016" rtlCol="0" anchor="t">
             <a:normAutofit/>
           </a:bodyPr>
           <a:lstStyle/>
           <a:p>
+            <a:pPr indent="0" marL="0">
+              <a:buNone/>
+            </a:pPr>
             <a:r>
               <a:rPr lang="en-US" sz="2100" dirty="0">
                 <a:solidFill>
-                  <a:srgbClr val="17364A"/>
-                </a:solidFill>
-                <a:latin typeface="Aptos" pitchFamily="34" charset="0"/>
-                <a:ea typeface="Aptos" pitchFamily="34" charset="-122"/>
-                <a:cs typeface="Aptos" pitchFamily="34" charset="-120"/>
-              </a:rPr>
-              <a:t>Create a machine learning use case review worksheet for one public health workflow.</a:t>
+                  <a:srgbClr val="003A63"/>
+                </a:solidFill>
+                <a:latin typeface="Aptos" pitchFamily="34" charset="0"/>
+                <a:ea typeface="Aptos" pitchFamily="34" charset="-122"/>
+                <a:cs typeface="Aptos" pitchFamily="34" charset="-120"/>
+              </a:rPr>
+              <a:t>• Create a machine learning use case review worksheet for one public health workflow.</a:t>
             </a:r>
             <a:endParaRPr lang="en-US" sz="2100" dirty="0"/>
           </a:p>
           <a:p>
+            <a:pPr indent="0" marL="0">
+              <a:buNone/>
+            </a:pPr>
             <a:r>
               <a:rPr lang="en-US" sz="2100" dirty="0">
                 <a:solidFill>
-                  <a:srgbClr val="17364A"/>
-                </a:solidFill>
-                <a:latin typeface="Aptos" pitchFamily="34" charset="0"/>
-                <a:ea typeface="Aptos" pitchFamily="34" charset="-122"/>
-                <a:cs typeface="Aptos" pitchFamily="34" charset="-120"/>
-              </a:rPr>
-              <a:t>The worksheet should describe the public health task, intended use, data sources, candidate features,.</a:t>
+                  <a:srgbClr val="003A63"/>
+                </a:solidFill>
+                <a:latin typeface="Aptos" pitchFamily="34" charset="0"/>
+                <a:ea typeface="Aptos" pitchFamily="34" charset="-122"/>
+                <a:cs typeface="Aptos" pitchFamily="34" charset="-120"/>
+              </a:rPr>
+              <a:t>• The worksheet should describe the public health task, intended use, data sources, candidate.</a:t>
             </a:r>
             <a:endParaRPr lang="en-US" sz="2100" dirty="0"/>
           </a:p>
           <a:p>
+            <a:pPr indent="0" marL="0">
+              <a:buNone/>
+            </a:pPr>
             <a:r>
               <a:rPr lang="en-US" sz="2100" dirty="0">
                 <a:solidFill>
-                  <a:srgbClr val="17364A"/>
-                </a:solidFill>
-                <a:latin typeface="Aptos" pitchFamily="34" charset="0"/>
-                <a:ea typeface="Aptos" pitchFamily="34" charset="-122"/>
-                <a:cs typeface="Aptos" pitchFamily="34" charset="-120"/>
-              </a:rPr>
-              <a:t>This exercise should produce a governance-ready artifact.</a:t>
+                  <a:srgbClr val="003A63"/>
+                </a:solidFill>
+                <a:latin typeface="Aptos" pitchFamily="34" charset="0"/>
+                <a:ea typeface="Aptos" pitchFamily="34" charset="-122"/>
+                <a:cs typeface="Aptos" pitchFamily="34" charset="-120"/>
+              </a:rPr>
+              <a:t>• This exercise should produce a governance-ready artifact.</a:t>
             </a:r>
             <a:endParaRPr lang="en-US" sz="2100" dirty="0"/>
           </a:p>
@@ -8284,17 +8413,17 @@
         </p:nvSpPr>
         <p:spPr>
           <a:xfrm>
-            <a:off x="7799832" y="1828800"/>
-            <a:ext cx="3145536" cy="685800"/>
-          </a:xfrm>
-          <a:prstGeom prst="rect">
-            <a:avLst/>
-          </a:prstGeom>
-          <a:noFill/>
-          <a:ln/>
-        </p:spPr>
-        <p:txBody>
-          <a:bodyPr wrap="square" lIns="0" tIns="0" rIns="0" bIns="0" rtlCol="0" anchor="t">
+            <a:off x="7799832" y="1801368"/>
+            <a:ext cx="3145536" cy="758952"/>
+          </a:xfrm>
+          <a:prstGeom prst="rect">
+            <a:avLst/>
+          </a:prstGeom>
+          <a:noFill/>
+          <a:ln/>
+        </p:spPr>
+        <p:txBody>
+          <a:bodyPr wrap="square" lIns="254" tIns="254" rIns="254" bIns="254" rtlCol="0" anchor="t">
             <a:normAutofit/>
           </a:bodyPr>
           <a:lstStyle/>
@@ -8303,7 +8432,7 @@
               <a:buNone/>
             </a:pPr>
             <a:r>
-              <a:rPr lang="en-US" sz="1550" dirty="0">
+              <a:rPr lang="en-US" sz="1320" dirty="0">
                 <a:solidFill>
                   <a:srgbClr val="17364A"/>
                 </a:solidFill>
@@ -8313,7 +8442,7 @@
               </a:rPr>
               <a:t>Create a machine learning use case review worksheet for one public health workflow.</a:t>
             </a:r>
-            <a:endParaRPr lang="en-US" sz="1550" dirty="0"/>
+            <a:endParaRPr lang="en-US" sz="1320" dirty="0"/>
           </a:p>
         </p:txBody>
       </p:sp>
@@ -8401,13 +8530,16 @@
           <a:ln/>
         </p:spPr>
         <p:txBody>
-          <a:bodyPr wrap="square" lIns="254" tIns="254" rIns="254" bIns="254" rtlCol="0" anchor="t">
+          <a:bodyPr wrap="square" lIns="508" tIns="508" rIns="508" bIns="508" rtlCol="0" anchor="t">
             <a:normAutofit/>
           </a:bodyPr>
           <a:lstStyle/>
           <a:p>
-            <a:r>
-              <a:rPr lang="en-US" sz="1380" dirty="0">
+            <a:pPr indent="0" marL="0">
+              <a:buNone/>
+            </a:pPr>
+            <a:r>
+              <a:rPr lang="en-US" sz="1220" dirty="0">
                 <a:solidFill>
                   <a:srgbClr val="17364A"/>
                 </a:solidFill>
@@ -8415,13 +8547,16 @@
                 <a:ea typeface="Aptos" pitchFamily="34" charset="-122"/>
                 <a:cs typeface="Aptos" pitchFamily="34" charset="-120"/>
               </a:rPr>
-              <a:t>The worksheet should describe the public health task, intended use, data sources,.</a:t>
-            </a:r>
-            <a:endParaRPr lang="en-US" sz="1380" dirty="0"/>
-          </a:p>
-          <a:p>
-            <a:r>
-              <a:rPr lang="en-US" sz="1380" dirty="0">
+              <a:t>The worksheet should describe the public health task, intended.</a:t>
+            </a:r>
+            <a:endParaRPr lang="en-US" sz="1220" dirty="0"/>
+          </a:p>
+          <a:p>
+            <a:pPr indent="0" marL="0">
+              <a:buNone/>
+            </a:pPr>
+            <a:r>
+              <a:rPr lang="en-US" sz="1220" dirty="0">
                 <a:solidFill>
                   <a:srgbClr val="17364A"/>
                 </a:solidFill>
@@ -8429,9 +8564,9 @@
                 <a:ea typeface="Aptos" pitchFamily="34" charset="-122"/>
                 <a:cs typeface="Aptos" pitchFamily="34" charset="-120"/>
               </a:rPr>
-              <a:t>Learners should identify at least three reasons the model might fail and at least three.</a:t>
-            </a:r>
-            <a:endParaRPr lang="en-US" sz="1380" dirty="0"/>
+              <a:t>Learners should identify at least three reasons the model might.</a:t>
+            </a:r>
+            <a:endParaRPr lang="en-US" sz="1220" dirty="0"/>
           </a:p>
         </p:txBody>
       </p:sp>
@@ -8509,17 +8644,17 @@
         </p:nvSpPr>
         <p:spPr>
           <a:xfrm>
-            <a:off x="7799832" y="5001768"/>
-            <a:ext cx="3145536" cy="502920"/>
-          </a:xfrm>
-          <a:prstGeom prst="rect">
-            <a:avLst/>
-          </a:prstGeom>
-          <a:noFill/>
-          <a:ln/>
-        </p:spPr>
-        <p:txBody>
-          <a:bodyPr wrap="square" lIns="0" tIns="0" rIns="0" bIns="0" rtlCol="0" anchor="t">
+            <a:off x="7799832" y="4974336"/>
+            <a:ext cx="3145536" cy="576072"/>
+          </a:xfrm>
+          <a:prstGeom prst="rect">
+            <a:avLst/>
+          </a:prstGeom>
+          <a:noFill/>
+          <a:ln/>
+        </p:spPr>
+        <p:txBody>
+          <a:bodyPr wrap="square" lIns="254" tIns="254" rIns="254" bIns="254" rtlCol="0" anchor="t">
             <a:normAutofit/>
           </a:bodyPr>
           <a:lstStyle/>
@@ -8528,7 +8663,7 @@
               <a:buNone/>
             </a:pPr>
             <a:r>
-              <a:rPr lang="en-US" sz="1550" dirty="0">
+              <a:rPr lang="en-US" sz="1320" dirty="0">
                 <a:solidFill>
                   <a:srgbClr val="17364A"/>
                 </a:solidFill>
@@ -8536,9 +8671,9 @@
                 <a:ea typeface="Aptos" pitchFamily="34" charset="-122"/>
                 <a:cs typeface="Aptos" pitchFamily="34" charset="-120"/>
               </a:rPr>
-              <a:t>Use the assignment to test whether you can explain the concept, apply it to a realistic public health situation, and identify what would need review before the work moves forward.</a:t>
-            </a:r>
-            <a:endParaRPr lang="en-US" sz="1550" dirty="0"/>
+              <a:t>Use the assignment to test whether you can explain the concept, apply it to a realistic public health situation, and.</a:t>
+            </a:r>
+            <a:endParaRPr lang="en-US" sz="1320" dirty="0"/>
           </a:p>
         </p:txBody>
       </p:sp>
@@ -8839,49 +8974,58 @@
           <a:ln/>
         </p:spPr>
         <p:txBody>
-          <a:bodyPr wrap="square" lIns="635" tIns="635" rIns="635" bIns="635" rtlCol="0" anchor="t">
+          <a:bodyPr wrap="square" lIns="1016" tIns="1016" rIns="1016" bIns="1016" rtlCol="0" anchor="t">
             <a:normAutofit/>
           </a:bodyPr>
           <a:lstStyle/>
           <a:p>
+            <a:pPr indent="0" marL="0">
+              <a:buNone/>
+            </a:pPr>
             <a:r>
               <a:rPr lang="en-US" sz="2100" dirty="0">
                 <a:solidFill>
-                  <a:srgbClr val="17364A"/>
-                </a:solidFill>
-                <a:latin typeface="Aptos" pitchFamily="34" charset="0"/>
-                <a:ea typeface="Aptos" pitchFamily="34" charset="-122"/>
-                <a:cs typeface="Aptos" pitchFamily="34" charset="-120"/>
-              </a:rPr>
-              <a:t>Machine learning use case review worksheet</a:t>
+                  <a:srgbClr val="003A63"/>
+                </a:solidFill>
+                <a:latin typeface="Aptos" pitchFamily="34" charset="0"/>
+                <a:ea typeface="Aptos" pitchFamily="34" charset="-122"/>
+                <a:cs typeface="Aptos" pitchFamily="34" charset="-120"/>
+              </a:rPr>
+              <a:t>• Machine learning use case review worksheet</a:t>
             </a:r>
             <a:endParaRPr lang="en-US" sz="2100" dirty="0"/>
           </a:p>
           <a:p>
+            <a:pPr indent="0" marL="0">
+              <a:buNone/>
+            </a:pPr>
             <a:r>
               <a:rPr lang="en-US" sz="2100" dirty="0">
                 <a:solidFill>
-                  <a:srgbClr val="17364A"/>
-                </a:solidFill>
-                <a:latin typeface="Aptos" pitchFamily="34" charset="0"/>
-                <a:ea typeface="Aptos" pitchFamily="34" charset="-122"/>
-                <a:cs typeface="Aptos" pitchFamily="34" charset="-120"/>
-              </a:rPr>
-              <a:t>Feature and label inventory</a:t>
+                  <a:srgbClr val="003A63"/>
+                </a:solidFill>
+                <a:latin typeface="Aptos" pitchFamily="34" charset="0"/>
+                <a:ea typeface="Aptos" pitchFamily="34" charset="-122"/>
+                <a:cs typeface="Aptos" pitchFamily="34" charset="-120"/>
+              </a:rPr>
+              <a:t>• Feature and label inventory</a:t>
             </a:r>
             <a:endParaRPr lang="en-US" sz="2100" dirty="0"/>
           </a:p>
           <a:p>
+            <a:pPr indent="0" marL="0">
+              <a:buNone/>
+            </a:pPr>
             <a:r>
               <a:rPr lang="en-US" sz="2100" dirty="0">
                 <a:solidFill>
-                  <a:srgbClr val="17364A"/>
-                </a:solidFill>
-                <a:latin typeface="Aptos" pitchFamily="34" charset="0"/>
-                <a:ea typeface="Aptos" pitchFamily="34" charset="-122"/>
-                <a:cs typeface="Aptos" pitchFamily="34" charset="-120"/>
-              </a:rPr>
-              <a:t>Initial model risk and safeguard list</a:t>
+                  <a:srgbClr val="003A63"/>
+                </a:solidFill>
+                <a:latin typeface="Aptos" pitchFamily="34" charset="0"/>
+                <a:ea typeface="Aptos" pitchFamily="34" charset="-122"/>
+                <a:cs typeface="Aptos" pitchFamily="34" charset="-120"/>
+              </a:rPr>
+              <a:t>• Initial model risk and safeguard list</a:t>
             </a:r>
             <a:endParaRPr lang="en-US" sz="2100" dirty="0"/>
           </a:p>
@@ -8961,17 +9105,17 @@
         </p:nvSpPr>
         <p:spPr>
           <a:xfrm>
-            <a:off x="7799832" y="1828800"/>
-            <a:ext cx="3145536" cy="685800"/>
-          </a:xfrm>
-          <a:prstGeom prst="rect">
-            <a:avLst/>
-          </a:prstGeom>
-          <a:noFill/>
-          <a:ln/>
-        </p:spPr>
-        <p:txBody>
-          <a:bodyPr wrap="square" lIns="0" tIns="0" rIns="0" bIns="0" rtlCol="0" anchor="t">
+            <a:off x="7799832" y="1801368"/>
+            <a:ext cx="3145536" cy="758952"/>
+          </a:xfrm>
+          <a:prstGeom prst="rect">
+            <a:avLst/>
+          </a:prstGeom>
+          <a:noFill/>
+          <a:ln/>
+        </p:spPr>
+        <p:txBody>
+          <a:bodyPr wrap="square" lIns="254" tIns="254" rIns="254" bIns="254" rtlCol="0" anchor="t">
             <a:normAutofit/>
           </a:bodyPr>
           <a:lstStyle/>
@@ -8980,7 +9124,7 @@
               <a:buNone/>
             </a:pPr>
             <a:r>
-              <a:rPr lang="en-US" sz="1550" dirty="0">
+              <a:rPr lang="en-US" sz="1320" dirty="0">
                 <a:solidFill>
                   <a:srgbClr val="17364A"/>
                 </a:solidFill>
@@ -8990,7 +9134,7 @@
               </a:rPr>
               <a:t>Machine learning use case review worksheet</a:t>
             </a:r>
-            <a:endParaRPr lang="en-US" sz="1550" dirty="0"/>
+            <a:endParaRPr lang="en-US" sz="1320" dirty="0"/>
           </a:p>
         </p:txBody>
       </p:sp>
@@ -9078,13 +9222,16 @@
           <a:ln/>
         </p:spPr>
         <p:txBody>
-          <a:bodyPr wrap="square" lIns="254" tIns="254" rIns="254" bIns="254" rtlCol="0" anchor="t">
+          <a:bodyPr wrap="square" lIns="508" tIns="508" rIns="508" bIns="508" rtlCol="0" anchor="t">
             <a:normAutofit/>
           </a:bodyPr>
           <a:lstStyle/>
           <a:p>
-            <a:r>
-              <a:rPr lang="en-US" sz="1380" dirty="0">
+            <a:pPr indent="0" marL="0">
+              <a:buNone/>
+            </a:pPr>
+            <a:r>
+              <a:rPr lang="en-US" sz="1220" dirty="0">
                 <a:solidFill>
                   <a:srgbClr val="17364A"/>
                 </a:solidFill>
@@ -9094,11 +9241,14 @@
               </a:rPr>
               <a:t>Machine learning use case review worksheet</a:t>
             </a:r>
-            <a:endParaRPr lang="en-US" sz="1380" dirty="0"/>
-          </a:p>
-          <a:p>
-            <a:r>
-              <a:rPr lang="en-US" sz="1380" dirty="0">
+            <a:endParaRPr lang="en-US" sz="1220" dirty="0"/>
+          </a:p>
+          <a:p>
+            <a:pPr indent="0" marL="0">
+              <a:buNone/>
+            </a:pPr>
+            <a:r>
+              <a:rPr lang="en-US" sz="1220" dirty="0">
                 <a:solidFill>
                   <a:srgbClr val="17364A"/>
                 </a:solidFill>
@@ -9108,11 +9258,14 @@
               </a:rPr>
               <a:t>Feature and label inventory</a:t>
             </a:r>
-            <a:endParaRPr lang="en-US" sz="1380" dirty="0"/>
-          </a:p>
-          <a:p>
-            <a:r>
-              <a:rPr lang="en-US" sz="1380" dirty="0">
+            <a:endParaRPr lang="en-US" sz="1220" dirty="0"/>
+          </a:p>
+          <a:p>
+            <a:pPr indent="0" marL="0">
+              <a:buNone/>
+            </a:pPr>
+            <a:r>
+              <a:rPr lang="en-US" sz="1220" dirty="0">
                 <a:solidFill>
                   <a:srgbClr val="17364A"/>
                 </a:solidFill>
@@ -9122,7 +9275,7 @@
               </a:rPr>
               <a:t>Initial model risk and safeguard list</a:t>
             </a:r>
-            <a:endParaRPr lang="en-US" sz="1380" dirty="0"/>
+            <a:endParaRPr lang="en-US" sz="1220" dirty="0"/>
           </a:p>
         </p:txBody>
       </p:sp>
@@ -9200,17 +9353,17 @@
         </p:nvSpPr>
         <p:spPr>
           <a:xfrm>
-            <a:off x="7799832" y="5001768"/>
-            <a:ext cx="3145536" cy="502920"/>
-          </a:xfrm>
-          <a:prstGeom prst="rect">
-            <a:avLst/>
-          </a:prstGeom>
-          <a:noFill/>
-          <a:ln/>
-        </p:spPr>
-        <p:txBody>
-          <a:bodyPr wrap="square" lIns="0" tIns="0" rIns="0" bIns="0" rtlCol="0" anchor="t">
+            <a:off x="7799832" y="4974336"/>
+            <a:ext cx="3145536" cy="576072"/>
+          </a:xfrm>
+          <a:prstGeom prst="rect">
+            <a:avLst/>
+          </a:prstGeom>
+          <a:noFill/>
+          <a:ln/>
+        </p:spPr>
+        <p:txBody>
+          <a:bodyPr wrap="square" lIns="254" tIns="254" rIns="254" bIns="254" rtlCol="0" anchor="t">
             <a:normAutofit/>
           </a:bodyPr>
           <a:lstStyle/>
@@ -9219,7 +9372,7 @@
               <a:buNone/>
             </a:pPr>
             <a:r>
-              <a:rPr lang="en-US" sz="1550" dirty="0">
+              <a:rPr lang="en-US" sz="1320" dirty="0">
                 <a:solidFill>
                   <a:srgbClr val="17364A"/>
                 </a:solidFill>
@@ -9227,9 +9380,9 @@
                 <a:ea typeface="Aptos" pitchFamily="34" charset="-122"/>
                 <a:cs typeface="Aptos" pitchFamily="34" charset="-120"/>
               </a:rPr>
-              <a:t>Connect the concept to public health purpose, responsible use, required safeguards, documentation, and the next action a department should take.</a:t>
-            </a:r>
-            <a:endParaRPr lang="en-US" sz="1550" dirty="0"/>
+              <a:t>Connect the concept to public health purpose, responsible use, required safeguards, documentation, and the next action a.</a:t>
+            </a:r>
+            <a:endParaRPr lang="en-US" sz="1320" dirty="0"/>
           </a:p>
         </p:txBody>
       </p:sp>
@@ -9530,21 +9683,24 @@
           <a:ln/>
         </p:spPr>
         <p:txBody>
-          <a:bodyPr wrap="square" lIns="635" tIns="635" rIns="635" bIns="635" rtlCol="0" anchor="t">
+          <a:bodyPr wrap="square" lIns="1016" tIns="1016" rIns="1016" bIns="1016" rtlCol="0" anchor="t">
             <a:normAutofit/>
           </a:bodyPr>
           <a:lstStyle/>
           <a:p>
+            <a:pPr indent="0" marL="0">
+              <a:buNone/>
+            </a:pPr>
             <a:r>
               <a:rPr lang="en-US" sz="2100" dirty="0">
                 <a:solidFill>
-                  <a:srgbClr val="17364A"/>
-                </a:solidFill>
-                <a:latin typeface="Aptos" pitchFamily="34" charset="0"/>
-                <a:ea typeface="Aptos" pitchFamily="34" charset="-122"/>
-                <a:cs typeface="Aptos" pitchFamily="34" charset="-120"/>
-              </a:rPr>
-              <a:t>Human review and monitoring notes</a:t>
+                  <a:srgbClr val="003A63"/>
+                </a:solidFill>
+                <a:latin typeface="Aptos" pitchFamily="34" charset="0"/>
+                <a:ea typeface="Aptos" pitchFamily="34" charset="-122"/>
+                <a:cs typeface="Aptos" pitchFamily="34" charset="-120"/>
+              </a:rPr>
+              <a:t>• Human review and monitoring notes</a:t>
             </a:r>
             <a:endParaRPr lang="en-US" sz="2100" dirty="0"/>
           </a:p>
@@ -9624,17 +9780,17 @@
         </p:nvSpPr>
         <p:spPr>
           <a:xfrm>
-            <a:off x="7799832" y="1828800"/>
-            <a:ext cx="3145536" cy="685800"/>
-          </a:xfrm>
-          <a:prstGeom prst="rect">
-            <a:avLst/>
-          </a:prstGeom>
-          <a:noFill/>
-          <a:ln/>
-        </p:spPr>
-        <p:txBody>
-          <a:bodyPr wrap="square" lIns="0" tIns="0" rIns="0" bIns="0" rtlCol="0" anchor="t">
+            <a:off x="7799832" y="1801368"/>
+            <a:ext cx="3145536" cy="758952"/>
+          </a:xfrm>
+          <a:prstGeom prst="rect">
+            <a:avLst/>
+          </a:prstGeom>
+          <a:noFill/>
+          <a:ln/>
+        </p:spPr>
+        <p:txBody>
+          <a:bodyPr wrap="square" lIns="254" tIns="254" rIns="254" bIns="254" rtlCol="0" anchor="t">
             <a:normAutofit/>
           </a:bodyPr>
           <a:lstStyle/>
@@ -9643,7 +9799,7 @@
               <a:buNone/>
             </a:pPr>
             <a:r>
-              <a:rPr lang="en-US" sz="1550" dirty="0">
+              <a:rPr lang="en-US" sz="1320" dirty="0">
                 <a:solidFill>
                   <a:srgbClr val="17364A"/>
                 </a:solidFill>
@@ -9653,7 +9809,7 @@
               </a:rPr>
               <a:t>Human review and monitoring notes</a:t>
             </a:r>
-            <a:endParaRPr lang="en-US" sz="1550" dirty="0"/>
+            <a:endParaRPr lang="en-US" sz="1320" dirty="0"/>
           </a:p>
         </p:txBody>
       </p:sp>
@@ -9741,13 +9897,16 @@
           <a:ln/>
         </p:spPr>
         <p:txBody>
-          <a:bodyPr wrap="square" lIns="254" tIns="254" rIns="254" bIns="254" rtlCol="0" anchor="t">
+          <a:bodyPr wrap="square" lIns="508" tIns="508" rIns="508" bIns="508" rtlCol="0" anchor="t">
             <a:normAutofit/>
           </a:bodyPr>
           <a:lstStyle/>
           <a:p>
-            <a:r>
-              <a:rPr lang="en-US" sz="1380" dirty="0">
+            <a:pPr indent="0" marL="0">
+              <a:buNone/>
+            </a:pPr>
+            <a:r>
+              <a:rPr lang="en-US" sz="1220" dirty="0">
                 <a:solidFill>
                   <a:srgbClr val="17364A"/>
                 </a:solidFill>
@@ -9757,7 +9916,7 @@
               </a:rPr>
               <a:t>Human review and monitoring notes</a:t>
             </a:r>
-            <a:endParaRPr lang="en-US" sz="1380" dirty="0"/>
+            <a:endParaRPr lang="en-US" sz="1220" dirty="0"/>
           </a:p>
         </p:txBody>
       </p:sp>
@@ -9835,17 +9994,17 @@
         </p:nvSpPr>
         <p:spPr>
           <a:xfrm>
-            <a:off x="7799832" y="5001768"/>
-            <a:ext cx="3145536" cy="502920"/>
-          </a:xfrm>
-          <a:prstGeom prst="rect">
-            <a:avLst/>
-          </a:prstGeom>
-          <a:noFill/>
-          <a:ln/>
-        </p:spPr>
-        <p:txBody>
-          <a:bodyPr wrap="square" lIns="0" tIns="0" rIns="0" bIns="0" rtlCol="0" anchor="t">
+            <a:off x="7799832" y="4974336"/>
+            <a:ext cx="3145536" cy="576072"/>
+          </a:xfrm>
+          <a:prstGeom prst="rect">
+            <a:avLst/>
+          </a:prstGeom>
+          <a:noFill/>
+          <a:ln/>
+        </p:spPr>
+        <p:txBody>
+          <a:bodyPr wrap="square" lIns="254" tIns="254" rIns="254" bIns="254" rtlCol="0" anchor="t">
             <a:normAutofit/>
           </a:bodyPr>
           <a:lstStyle/>
@@ -9854,7 +10013,7 @@
               <a:buNone/>
             </a:pPr>
             <a:r>
-              <a:rPr lang="en-US" sz="1550" dirty="0">
+              <a:rPr lang="en-US" sz="1320" dirty="0">
                 <a:solidFill>
                   <a:srgbClr val="17364A"/>
                 </a:solidFill>
@@ -9862,9 +10021,9 @@
                 <a:ea typeface="Aptos" pitchFamily="34" charset="-122"/>
                 <a:cs typeface="Aptos" pitchFamily="34" charset="-120"/>
               </a:rPr>
-              <a:t>Connect the concept to public health purpose, responsible use, required safeguards, documentation, and the next action a department should take.</a:t>
-            </a:r>
-            <a:endParaRPr lang="en-US" sz="1550" dirty="0"/>
+              <a:t>Connect the concept to public health purpose, responsible use, required safeguards, documentation, and the next action a.</a:t>
+            </a:r>
+            <a:endParaRPr lang="en-US" sz="1320" dirty="0"/>
           </a:p>
         </p:txBody>
       </p:sp>
@@ -10165,49 +10324,58 @@
           <a:ln/>
         </p:spPr>
         <p:txBody>
-          <a:bodyPr wrap="square" lIns="635" tIns="635" rIns="635" bIns="635" rtlCol="0" anchor="t">
+          <a:bodyPr wrap="square" lIns="1016" tIns="1016" rIns="1016" bIns="1016" rtlCol="0" anchor="t">
             <a:normAutofit/>
           </a:bodyPr>
           <a:lstStyle/>
           <a:p>
+            <a:pPr indent="0" marL="0">
+              <a:buNone/>
+            </a:pPr>
             <a:r>
               <a:rPr lang="en-US" sz="2100" dirty="0">
                 <a:solidFill>
-                  <a:srgbClr val="17364A"/>
-                </a:solidFill>
-                <a:latin typeface="Aptos" pitchFamily="34" charset="0"/>
-                <a:ea typeface="Aptos" pitchFamily="34" charset="-122"/>
-                <a:cs typeface="Aptos" pitchFamily="34" charset="-120"/>
-              </a:rPr>
-              <a:t>Machine learning is a set of methods that allow computer systems to identify patterns in data and use those.</a:t>
+                  <a:srgbClr val="003A63"/>
+                </a:solidFill>
+                <a:latin typeface="Aptos" pitchFamily="34" charset="0"/>
+                <a:ea typeface="Aptos" pitchFamily="34" charset="-122"/>
+                <a:cs typeface="Aptos" pitchFamily="34" charset="-120"/>
+              </a:rPr>
+              <a:t>• Machine learning is a set of methods that allow computer systems to identify patterns in data.</a:t>
             </a:r>
             <a:endParaRPr lang="en-US" sz="2100" dirty="0"/>
           </a:p>
           <a:p>
+            <a:pPr indent="0" marL="0">
+              <a:buNone/>
+            </a:pPr>
             <a:r>
               <a:rPr lang="en-US" sz="2100" dirty="0">
                 <a:solidFill>
-                  <a:srgbClr val="17364A"/>
-                </a:solidFill>
-                <a:latin typeface="Aptos" pitchFamily="34" charset="0"/>
-                <a:ea typeface="Aptos" pitchFamily="34" charset="-122"/>
-                <a:cs typeface="Aptos" pitchFamily="34" charset="-120"/>
-              </a:rPr>
-              <a:t>In public health, machine learning may support surveillance triage, outbreak signal review, risk stratification,.</a:t>
+                  <a:srgbClr val="003A63"/>
+                </a:solidFill>
+                <a:latin typeface="Aptos" pitchFamily="34" charset="0"/>
+                <a:ea typeface="Aptos" pitchFamily="34" charset="-122"/>
+                <a:cs typeface="Aptos" pitchFamily="34" charset="-120"/>
+              </a:rPr>
+              <a:t>• In public health, machine learning may support surveillance triage, outbreak signal review,.</a:t>
             </a:r>
             <a:endParaRPr lang="en-US" sz="2100" dirty="0"/>
           </a:p>
           <a:p>
+            <a:pPr indent="0" marL="0">
+              <a:buNone/>
+            </a:pPr>
             <a:r>
               <a:rPr lang="en-US" sz="2100" dirty="0">
                 <a:solidFill>
-                  <a:srgbClr val="17364A"/>
-                </a:solidFill>
-                <a:latin typeface="Aptos" pitchFamily="34" charset="0"/>
-                <a:ea typeface="Aptos" pitchFamily="34" charset="-122"/>
-                <a:cs typeface="Aptos" pitchFamily="34" charset="-120"/>
-              </a:rPr>
-              <a:t>The purpose of this module is not to turn every learner into a data scientist.</a:t>
+                  <a:srgbClr val="003A63"/>
+                </a:solidFill>
+                <a:latin typeface="Aptos" pitchFamily="34" charset="0"/>
+                <a:ea typeface="Aptos" pitchFamily="34" charset="-122"/>
+                <a:cs typeface="Aptos" pitchFamily="34" charset="-120"/>
+              </a:rPr>
+              <a:t>• The purpose of this module is not to turn every learner into a data scientist.</a:t>
             </a:r>
             <a:endParaRPr lang="en-US" sz="2100" dirty="0"/>
           </a:p>
@@ -10287,17 +10455,17 @@
         </p:nvSpPr>
         <p:spPr>
           <a:xfrm>
-            <a:off x="8074152" y="1920240"/>
-            <a:ext cx="2825496" cy="1280160"/>
-          </a:xfrm>
-          <a:prstGeom prst="rect">
-            <a:avLst/>
-          </a:prstGeom>
-          <a:noFill/>
-          <a:ln/>
-        </p:spPr>
-        <p:txBody>
-          <a:bodyPr wrap="square" lIns="0" tIns="0" rIns="0" bIns="0" rtlCol="0" anchor="t">
+            <a:off x="8074152" y="1892808"/>
+            <a:ext cx="2825496" cy="1353312"/>
+          </a:xfrm>
+          <a:prstGeom prst="rect">
+            <a:avLst/>
+          </a:prstGeom>
+          <a:noFill/>
+          <a:ln/>
+        </p:spPr>
+        <p:txBody>
+          <a:bodyPr wrap="square" lIns="254" tIns="254" rIns="254" bIns="254" rtlCol="0" anchor="t">
             <a:normAutofit/>
           </a:bodyPr>
           <a:lstStyle/>
@@ -10306,7 +10474,7 @@
               <a:buNone/>
             </a:pPr>
             <a:r>
-              <a:rPr lang="en-US" sz="1550" dirty="0">
+              <a:rPr lang="en-US" sz="1320" dirty="0">
                 <a:solidFill>
                   <a:srgbClr val="17364A"/>
                 </a:solidFill>
@@ -10314,43 +10482,9 @@
                 <a:ea typeface="Aptos" pitchFamily="34" charset="-122"/>
                 <a:cs typeface="Aptos" pitchFamily="34" charset="-120"/>
               </a:rPr>
-              <a:t>Level: applied/foundational</a:t>
-            </a:r>
-            <a:endParaRPr lang="en-US" sz="1550" dirty="0"/>
-          </a:p>
-          <a:p>
-            <a:pPr indent="0" marL="0">
-              <a:buNone/>
-            </a:pPr>
-            <a:r>
-              <a:rPr lang="en-US" sz="1550" dirty="0">
-                <a:solidFill>
-                  <a:srgbClr val="17364A"/>
-                </a:solidFill>
-                <a:latin typeface="Aptos" pitchFamily="34" charset="0"/>
-                <a:ea typeface="Aptos" pitchFamily="34" charset="-122"/>
-                <a:cs typeface="Aptos" pitchFamily="34" charset="-120"/>
-              </a:rPr>
-              <a:t>Primary track: Analytics and Modeling Track</a:t>
-            </a:r>
-            <a:endParaRPr lang="en-US" sz="1550" dirty="0"/>
-          </a:p>
-          <a:p>
-            <a:pPr indent="0" marL="0">
-              <a:buNone/>
-            </a:pPr>
-            <a:r>
-              <a:rPr lang="en-US" sz="1550" dirty="0">
-                <a:solidFill>
-                  <a:srgbClr val="17364A"/>
-                </a:solidFill>
-                <a:latin typeface="Aptos" pitchFamily="34" charset="0"/>
-                <a:ea typeface="Aptos" pitchFamily="34" charset="-122"/>
-                <a:cs typeface="Aptos" pitchFamily="34" charset="-120"/>
-              </a:rPr>
-              <a:t>Appears in tracks: analytics-modeling</a:t>
-            </a:r>
-            <a:endParaRPr lang="en-US" sz="1550" dirty="0"/>
+              <a:t>Level: applied/foundational Primary track: Analytics and Modeling Track Appears in tracks: analytics-modeling</a:t>
+            </a:r>
+            <a:endParaRPr lang="en-US" sz="1320" dirty="0"/>
           </a:p>
         </p:txBody>
       </p:sp>
@@ -10438,13 +10572,16 @@
           <a:ln/>
         </p:spPr>
         <p:txBody>
-          <a:bodyPr wrap="square" lIns="254" tIns="254" rIns="254" bIns="254" rtlCol="0" anchor="t">
+          <a:bodyPr wrap="square" lIns="508" tIns="508" rIns="508" bIns="508" rtlCol="0" anchor="t">
             <a:normAutofit/>
           </a:bodyPr>
           <a:lstStyle/>
           <a:p>
-            <a:r>
-              <a:rPr lang="en-US" sz="1380" dirty="0">
+            <a:pPr indent="0" marL="0">
+              <a:buNone/>
+            </a:pPr>
+            <a:r>
+              <a:rPr lang="en-US" sz="1220" dirty="0">
                 <a:solidFill>
                   <a:srgbClr val="17364A"/>
                 </a:solidFill>
@@ -10454,11 +10591,14 @@
               </a:rPr>
               <a:t>Read the module for shared vocabulary and context.</a:t>
             </a:r>
-            <a:endParaRPr lang="en-US" sz="1380" dirty="0"/>
-          </a:p>
-          <a:p>
-            <a:r>
-              <a:rPr lang="en-US" sz="1380" dirty="0">
+            <a:endParaRPr lang="en-US" sz="1220" dirty="0"/>
+          </a:p>
+          <a:p>
+            <a:pPr indent="0" marL="0">
+              <a:buNone/>
+            </a:pPr>
+            <a:r>
+              <a:rPr lang="en-US" sz="1220" dirty="0">
                 <a:solidFill>
                   <a:srgbClr val="17364A"/>
                 </a:solidFill>
@@ -10468,11 +10608,14 @@
               </a:rPr>
               <a:t>Complete the practical exercise to apply the concept.</a:t>
             </a:r>
-            <a:endParaRPr lang="en-US" sz="1380" dirty="0"/>
-          </a:p>
-          <a:p>
-            <a:r>
-              <a:rPr lang="en-US" sz="1380" dirty="0">
+            <a:endParaRPr lang="en-US" sz="1220" dirty="0"/>
+          </a:p>
+          <a:p>
+            <a:pPr indent="0" marL="0">
+              <a:buNone/>
+            </a:pPr>
+            <a:r>
+              <a:rPr lang="en-US" sz="1220" dirty="0">
                 <a:solidFill>
                   <a:srgbClr val="17364A"/>
                 </a:solidFill>
@@ -10482,7 +10625,7 @@
               </a:rPr>
               <a:t>Use the notes and references for deeper review.</a:t>
             </a:r>
-            <a:endParaRPr lang="en-US" sz="1380" dirty="0"/>
+            <a:endParaRPr lang="en-US" sz="1220" dirty="0"/>
           </a:p>
         </p:txBody>
       </p:sp>
@@ -10783,49 +10926,58 @@
           <a:ln/>
         </p:spPr>
         <p:txBody>
-          <a:bodyPr wrap="square" lIns="635" tIns="635" rIns="635" bIns="635" rtlCol="0" anchor="t">
+          <a:bodyPr wrap="square" lIns="1016" tIns="1016" rIns="1016" bIns="1016" rtlCol="0" anchor="t">
             <a:normAutofit/>
           </a:bodyPr>
           <a:lstStyle/>
           <a:p>
+            <a:pPr indent="0" marL="0">
+              <a:buNone/>
+            </a:pPr>
             <a:r>
               <a:rPr lang="en-US" sz="2100" dirty="0">
                 <a:solidFill>
-                  <a:srgbClr val="17364A"/>
-                </a:solidFill>
-                <a:latin typeface="Aptos" pitchFamily="34" charset="0"/>
-                <a:ea typeface="Aptos" pitchFamily="34" charset="-122"/>
-                <a:cs typeface="Aptos" pitchFamily="34" charset="-120"/>
-              </a:rPr>
-              <a:t>Machine learning use case review worksheet</a:t>
+                  <a:srgbClr val="003A63"/>
+                </a:solidFill>
+                <a:latin typeface="Aptos" pitchFamily="34" charset="0"/>
+                <a:ea typeface="Aptos" pitchFamily="34" charset="-122"/>
+                <a:cs typeface="Aptos" pitchFamily="34" charset="-120"/>
+              </a:rPr>
+              <a:t>• Machine learning use case review worksheet</a:t>
             </a:r>
             <a:endParaRPr lang="en-US" sz="2100" dirty="0"/>
           </a:p>
           <a:p>
+            <a:pPr indent="0" marL="0">
+              <a:buNone/>
+            </a:pPr>
             <a:r>
               <a:rPr lang="en-US" sz="2100" dirty="0">
                 <a:solidFill>
-                  <a:srgbClr val="17364A"/>
-                </a:solidFill>
-                <a:latin typeface="Aptos" pitchFamily="34" charset="0"/>
-                <a:ea typeface="Aptos" pitchFamily="34" charset="-122"/>
-                <a:cs typeface="Aptos" pitchFamily="34" charset="-120"/>
-              </a:rPr>
-              <a:t>Feature and label inventory</a:t>
+                  <a:srgbClr val="003A63"/>
+                </a:solidFill>
+                <a:latin typeface="Aptos" pitchFamily="34" charset="0"/>
+                <a:ea typeface="Aptos" pitchFamily="34" charset="-122"/>
+                <a:cs typeface="Aptos" pitchFamily="34" charset="-120"/>
+              </a:rPr>
+              <a:t>• Feature and label inventory</a:t>
             </a:r>
             <a:endParaRPr lang="en-US" sz="2100" dirty="0"/>
           </a:p>
           <a:p>
+            <a:pPr indent="0" marL="0">
+              <a:buNone/>
+            </a:pPr>
             <a:r>
               <a:rPr lang="en-US" sz="2100" dirty="0">
                 <a:solidFill>
-                  <a:srgbClr val="17364A"/>
-                </a:solidFill>
-                <a:latin typeface="Aptos" pitchFamily="34" charset="0"/>
-                <a:ea typeface="Aptos" pitchFamily="34" charset="-122"/>
-                <a:cs typeface="Aptos" pitchFamily="34" charset="-120"/>
-              </a:rPr>
-              <a:t>Initial model risk and safeguard list</a:t>
+                  <a:srgbClr val="003A63"/>
+                </a:solidFill>
+                <a:latin typeface="Aptos" pitchFamily="34" charset="0"/>
+                <a:ea typeface="Aptos" pitchFamily="34" charset="-122"/>
+                <a:cs typeface="Aptos" pitchFamily="34" charset="-120"/>
+              </a:rPr>
+              <a:t>• Initial model risk and safeguard list</a:t>
             </a:r>
             <a:endParaRPr lang="en-US" sz="2100" dirty="0"/>
           </a:p>
@@ -10905,17 +11057,17 @@
         </p:nvSpPr>
         <p:spPr>
           <a:xfrm>
-            <a:off x="7799832" y="1828800"/>
-            <a:ext cx="3145536" cy="685800"/>
-          </a:xfrm>
-          <a:prstGeom prst="rect">
-            <a:avLst/>
-          </a:prstGeom>
-          <a:noFill/>
-          <a:ln/>
-        </p:spPr>
-        <p:txBody>
-          <a:bodyPr wrap="square" lIns="0" tIns="0" rIns="0" bIns="0" rtlCol="0" anchor="t">
+            <a:off x="7799832" y="1801368"/>
+            <a:ext cx="3145536" cy="758952"/>
+          </a:xfrm>
+          <a:prstGeom prst="rect">
+            <a:avLst/>
+          </a:prstGeom>
+          <a:noFill/>
+          <a:ln/>
+        </p:spPr>
+        <p:txBody>
+          <a:bodyPr wrap="square" lIns="254" tIns="254" rIns="254" bIns="254" rtlCol="0" anchor="t">
             <a:normAutofit/>
           </a:bodyPr>
           <a:lstStyle/>
@@ -10924,7 +11076,7 @@
               <a:buNone/>
             </a:pPr>
             <a:r>
-              <a:rPr lang="en-US" sz="1550" dirty="0">
+              <a:rPr lang="en-US" sz="1320" dirty="0">
                 <a:solidFill>
                   <a:srgbClr val="17364A"/>
                 </a:solidFill>
@@ -10934,7 +11086,7 @@
               </a:rPr>
               <a:t>Machine learning use case review worksheet</a:t>
             </a:r>
-            <a:endParaRPr lang="en-US" sz="1550" dirty="0"/>
+            <a:endParaRPr lang="en-US" sz="1320" dirty="0"/>
           </a:p>
         </p:txBody>
       </p:sp>
@@ -11022,13 +11174,16 @@
           <a:ln/>
         </p:spPr>
         <p:txBody>
-          <a:bodyPr wrap="square" lIns="254" tIns="254" rIns="254" bIns="254" rtlCol="0" anchor="t">
+          <a:bodyPr wrap="square" lIns="508" tIns="508" rIns="508" bIns="508" rtlCol="0" anchor="t">
             <a:normAutofit/>
           </a:bodyPr>
           <a:lstStyle/>
           <a:p>
-            <a:r>
-              <a:rPr lang="en-US" sz="1380" dirty="0">
+            <a:pPr indent="0" marL="0">
+              <a:buNone/>
+            </a:pPr>
+            <a:r>
+              <a:rPr lang="en-US" sz="1220" dirty="0">
                 <a:solidFill>
                   <a:srgbClr val="17364A"/>
                 </a:solidFill>
@@ -11038,11 +11193,14 @@
               </a:rPr>
               <a:t>Machine learning use case review worksheet</a:t>
             </a:r>
-            <a:endParaRPr lang="en-US" sz="1380" dirty="0"/>
-          </a:p>
-          <a:p>
-            <a:r>
-              <a:rPr lang="en-US" sz="1380" dirty="0">
+            <a:endParaRPr lang="en-US" sz="1220" dirty="0"/>
+          </a:p>
+          <a:p>
+            <a:pPr indent="0" marL="0">
+              <a:buNone/>
+            </a:pPr>
+            <a:r>
+              <a:rPr lang="en-US" sz="1220" dirty="0">
                 <a:solidFill>
                   <a:srgbClr val="17364A"/>
                 </a:solidFill>
@@ -11052,11 +11210,14 @@
               </a:rPr>
               <a:t>Feature and label inventory</a:t>
             </a:r>
-            <a:endParaRPr lang="en-US" sz="1380" dirty="0"/>
-          </a:p>
-          <a:p>
-            <a:r>
-              <a:rPr lang="en-US" sz="1380" dirty="0">
+            <a:endParaRPr lang="en-US" sz="1220" dirty="0"/>
+          </a:p>
+          <a:p>
+            <a:pPr indent="0" marL="0">
+              <a:buNone/>
+            </a:pPr>
+            <a:r>
+              <a:rPr lang="en-US" sz="1220" dirty="0">
                 <a:solidFill>
                   <a:srgbClr val="17364A"/>
                 </a:solidFill>
@@ -11066,7 +11227,7 @@
               </a:rPr>
               <a:t>Initial model risk and safeguard list</a:t>
             </a:r>
-            <a:endParaRPr lang="en-US" sz="1380" dirty="0"/>
+            <a:endParaRPr lang="en-US" sz="1220" dirty="0"/>
           </a:p>
         </p:txBody>
       </p:sp>
@@ -11144,17 +11305,17 @@
         </p:nvSpPr>
         <p:spPr>
           <a:xfrm>
-            <a:off x="7799832" y="5001768"/>
-            <a:ext cx="3145536" cy="502920"/>
-          </a:xfrm>
-          <a:prstGeom prst="rect">
-            <a:avLst/>
-          </a:prstGeom>
-          <a:noFill/>
-          <a:ln/>
-        </p:spPr>
-        <p:txBody>
-          <a:bodyPr wrap="square" lIns="0" tIns="0" rIns="0" bIns="0" rtlCol="0" anchor="t">
+            <a:off x="7799832" y="4974336"/>
+            <a:ext cx="3145536" cy="576072"/>
+          </a:xfrm>
+          <a:prstGeom prst="rect">
+            <a:avLst/>
+          </a:prstGeom>
+          <a:noFill/>
+          <a:ln/>
+        </p:spPr>
+        <p:txBody>
+          <a:bodyPr wrap="square" lIns="254" tIns="254" rIns="254" bIns="254" rtlCol="0" anchor="t">
             <a:normAutofit/>
           </a:bodyPr>
           <a:lstStyle/>
@@ -11163,7 +11324,7 @@
               <a:buNone/>
             </a:pPr>
             <a:r>
-              <a:rPr lang="en-US" sz="1550" dirty="0">
+              <a:rPr lang="en-US" sz="1320" dirty="0">
                 <a:solidFill>
                   <a:srgbClr val="17364A"/>
                 </a:solidFill>
@@ -11171,9 +11332,9 @@
                 <a:ea typeface="Aptos" pitchFamily="34" charset="-122"/>
                 <a:cs typeface="Aptos" pitchFamily="34" charset="-120"/>
               </a:rPr>
-              <a:t>Use the assignment to test whether you can explain the concept, apply it to a realistic public health situation, and identify what would need review before the work moves forward.</a:t>
-            </a:r>
-            <a:endParaRPr lang="en-US" sz="1550" dirty="0"/>
+              <a:t>Use the assignment to test whether you can explain the concept, apply it to a realistic public health situation, and.</a:t>
+            </a:r>
+            <a:endParaRPr lang="en-US" sz="1320" dirty="0"/>
           </a:p>
         </p:txBody>
       </p:sp>
@@ -11474,49 +11635,58 @@
           <a:ln/>
         </p:spPr>
         <p:txBody>
-          <a:bodyPr wrap="square" lIns="635" tIns="635" rIns="635" bIns="635" rtlCol="0" anchor="t">
+          <a:bodyPr wrap="square" lIns="1016" tIns="1016" rIns="1016" bIns="1016" rtlCol="0" anchor="t">
             <a:normAutofit/>
           </a:bodyPr>
           <a:lstStyle/>
           <a:p>
+            <a:pPr indent="0" marL="0">
+              <a:buNone/>
+            </a:pPr>
             <a:r>
               <a:rPr lang="en-US" sz="2100" dirty="0">
                 <a:solidFill>
-                  <a:srgbClr val="17364A"/>
-                </a:solidFill>
-                <a:latin typeface="Aptos" pitchFamily="34" charset="0"/>
-                <a:ea typeface="Aptos" pitchFamily="34" charset="-122"/>
-                <a:cs typeface="Aptos" pitchFamily="34" charset="-120"/>
-              </a:rPr>
-              <a:t>1. Which statement best describes supervised learning?</a:t>
+                  <a:srgbClr val="003A63"/>
+                </a:solidFill>
+                <a:latin typeface="Aptos" pitchFamily="34" charset="0"/>
+                <a:ea typeface="Aptos" pitchFamily="34" charset="-122"/>
+                <a:cs typeface="Aptos" pitchFamily="34" charset="-120"/>
+              </a:rPr>
+              <a:t>• 1. Which statement best describes supervised learning?</a:t>
             </a:r>
             <a:endParaRPr lang="en-US" sz="2100" dirty="0"/>
           </a:p>
           <a:p>
+            <a:pPr indent="0" marL="0">
+              <a:buNone/>
+            </a:pPr>
             <a:r>
               <a:rPr lang="en-US" sz="2100" dirty="0">
                 <a:solidFill>
-                  <a:srgbClr val="17364A"/>
-                </a:solidFill>
-                <a:latin typeface="Aptos" pitchFamily="34" charset="0"/>
-                <a:ea typeface="Aptos" pitchFamily="34" charset="-122"/>
-                <a:cs typeface="Aptos" pitchFamily="34" charset="-120"/>
-              </a:rPr>
-              <a:t>2. Why can historical labels create risk?</a:t>
+                  <a:srgbClr val="003A63"/>
+                </a:solidFill>
+                <a:latin typeface="Aptos" pitchFamily="34" charset="0"/>
+                <a:ea typeface="Aptos" pitchFamily="34" charset="-122"/>
+                <a:cs typeface="Aptos" pitchFamily="34" charset="-120"/>
+              </a:rPr>
+              <a:t>• 2. Why can historical labels create risk?</a:t>
             </a:r>
             <a:endParaRPr lang="en-US" sz="2100" dirty="0"/>
           </a:p>
           <a:p>
+            <a:pPr indent="0" marL="0">
+              <a:buNone/>
+            </a:pPr>
             <a:r>
               <a:rPr lang="en-US" sz="2100" dirty="0">
                 <a:solidFill>
-                  <a:srgbClr val="17364A"/>
-                </a:solidFill>
-                <a:latin typeface="Aptos" pitchFamily="34" charset="0"/>
-                <a:ea typeface="Aptos" pitchFamily="34" charset="-122"/>
-                <a:cs typeface="Aptos" pitchFamily="34" charset="-120"/>
-              </a:rPr>
-              <a:t>3. What is overfitting?</a:t>
+                  <a:srgbClr val="003A63"/>
+                </a:solidFill>
+                <a:latin typeface="Aptos" pitchFamily="34" charset="0"/>
+                <a:ea typeface="Aptos" pitchFamily="34" charset="-122"/>
+                <a:cs typeface="Aptos" pitchFamily="34" charset="-120"/>
+              </a:rPr>
+              <a:t>• 3. What is overfitting?</a:t>
             </a:r>
             <a:endParaRPr lang="en-US" sz="2100" dirty="0"/>
           </a:p>
@@ -11596,17 +11766,17 @@
         </p:nvSpPr>
         <p:spPr>
           <a:xfrm>
-            <a:off x="7799832" y="1828800"/>
-            <a:ext cx="3145536" cy="685800"/>
-          </a:xfrm>
-          <a:prstGeom prst="rect">
-            <a:avLst/>
-          </a:prstGeom>
-          <a:noFill/>
-          <a:ln/>
-        </p:spPr>
-        <p:txBody>
-          <a:bodyPr wrap="square" lIns="0" tIns="0" rIns="0" bIns="0" rtlCol="0" anchor="t">
+            <a:off x="7799832" y="1801368"/>
+            <a:ext cx="3145536" cy="758952"/>
+          </a:xfrm>
+          <a:prstGeom prst="rect">
+            <a:avLst/>
+          </a:prstGeom>
+          <a:noFill/>
+          <a:ln/>
+        </p:spPr>
+        <p:txBody>
+          <a:bodyPr wrap="square" lIns="254" tIns="254" rIns="254" bIns="254" rtlCol="0" anchor="t">
             <a:normAutofit/>
           </a:bodyPr>
           <a:lstStyle/>
@@ -11615,7 +11785,7 @@
               <a:buNone/>
             </a:pPr>
             <a:r>
-              <a:rPr lang="en-US" sz="1550" dirty="0">
+              <a:rPr lang="en-US" sz="1320" dirty="0">
                 <a:solidFill>
                   <a:srgbClr val="17364A"/>
                 </a:solidFill>
@@ -11625,7 +11795,7 @@
               </a:rPr>
               <a:t>1. Which statement best describes supervised learning?</a:t>
             </a:r>
-            <a:endParaRPr lang="en-US" sz="1550" dirty="0"/>
+            <a:endParaRPr lang="en-US" sz="1320" dirty="0"/>
           </a:p>
         </p:txBody>
       </p:sp>
@@ -11713,13 +11883,16 @@
           <a:ln/>
         </p:spPr>
         <p:txBody>
-          <a:bodyPr wrap="square" lIns="254" tIns="254" rIns="254" bIns="254" rtlCol="0" anchor="t">
+          <a:bodyPr wrap="square" lIns="508" tIns="508" rIns="508" bIns="508" rtlCol="0" anchor="t">
             <a:normAutofit/>
           </a:bodyPr>
           <a:lstStyle/>
           <a:p>
-            <a:r>
-              <a:rPr lang="en-US" sz="1380" dirty="0">
+            <a:pPr indent="0" marL="0">
+              <a:buNone/>
+            </a:pPr>
+            <a:r>
+              <a:rPr lang="en-US" sz="1220" dirty="0">
                 <a:solidFill>
                   <a:srgbClr val="17364A"/>
                 </a:solidFill>
@@ -11729,11 +11902,14 @@
               </a:rPr>
               <a:t>1.</a:t>
             </a:r>
-            <a:endParaRPr lang="en-US" sz="1380" dirty="0"/>
-          </a:p>
-          <a:p>
-            <a:r>
-              <a:rPr lang="en-US" sz="1380" dirty="0">
+            <a:endParaRPr lang="en-US" sz="1220" dirty="0"/>
+          </a:p>
+          <a:p>
+            <a:pPr indent="0" marL="0">
+              <a:buNone/>
+            </a:pPr>
+            <a:r>
+              <a:rPr lang="en-US" sz="1220" dirty="0">
                 <a:solidFill>
                   <a:srgbClr val="17364A"/>
                 </a:solidFill>
@@ -11743,11 +11919,14 @@
               </a:rPr>
               <a:t>Which statement best describes supervised learning?</a:t>
             </a:r>
-            <a:endParaRPr lang="en-US" sz="1380" dirty="0"/>
-          </a:p>
-          <a:p>
-            <a:r>
-              <a:rPr lang="en-US" sz="1380" dirty="0">
+            <a:endParaRPr lang="en-US" sz="1220" dirty="0"/>
+          </a:p>
+          <a:p>
+            <a:pPr indent="0" marL="0">
+              <a:buNone/>
+            </a:pPr>
+            <a:r>
+              <a:rPr lang="en-US" sz="1220" dirty="0">
                 <a:solidFill>
                   <a:srgbClr val="17364A"/>
                 </a:solidFill>
@@ -11757,7 +11936,7 @@
               </a:rPr>
               <a:t>2.</a:t>
             </a:r>
-            <a:endParaRPr lang="en-US" sz="1380" dirty="0"/>
+            <a:endParaRPr lang="en-US" sz="1220" dirty="0"/>
           </a:p>
         </p:txBody>
       </p:sp>
@@ -11835,17 +12014,17 @@
         </p:nvSpPr>
         <p:spPr>
           <a:xfrm>
-            <a:off x="7799832" y="5001768"/>
-            <a:ext cx="3145536" cy="502920"/>
-          </a:xfrm>
-          <a:prstGeom prst="rect">
-            <a:avLst/>
-          </a:prstGeom>
-          <a:noFill/>
-          <a:ln/>
-        </p:spPr>
-        <p:txBody>
-          <a:bodyPr wrap="square" lIns="0" tIns="0" rIns="0" bIns="0" rtlCol="0" anchor="t">
+            <a:off x="7799832" y="4974336"/>
+            <a:ext cx="3145536" cy="576072"/>
+          </a:xfrm>
+          <a:prstGeom prst="rect">
+            <a:avLst/>
+          </a:prstGeom>
+          <a:noFill/>
+          <a:ln/>
+        </p:spPr>
+        <p:txBody>
+          <a:bodyPr wrap="square" lIns="254" tIns="254" rIns="254" bIns="254" rtlCol="0" anchor="t">
             <a:normAutofit/>
           </a:bodyPr>
           <a:lstStyle/>
@@ -11854,7 +12033,7 @@
               <a:buNone/>
             </a:pPr>
             <a:r>
-              <a:rPr lang="en-US" sz="1550" dirty="0">
+              <a:rPr lang="en-US" sz="1320" dirty="0">
                 <a:solidFill>
                   <a:srgbClr val="17364A"/>
                 </a:solidFill>
@@ -11862,9 +12041,9 @@
                 <a:ea typeface="Aptos" pitchFamily="34" charset="-122"/>
                 <a:cs typeface="Aptos" pitchFamily="34" charset="-120"/>
               </a:rPr>
-              <a:t>Use the assignment to test whether you can explain the concept, apply it to a realistic public health situation, and identify what would need review before the work moves forward.</a:t>
-            </a:r>
-            <a:endParaRPr lang="en-US" sz="1550" dirty="0"/>
+              <a:t>Use the assignment to test whether you can explain the concept, apply it to a realistic public health situation, and.</a:t>
+            </a:r>
+            <a:endParaRPr lang="en-US" sz="1320" dirty="0"/>
           </a:p>
         </p:txBody>
       </p:sp>
@@ -12165,49 +12344,58 @@
           <a:ln/>
         </p:spPr>
         <p:txBody>
-          <a:bodyPr wrap="square" lIns="635" tIns="635" rIns="635" bIns="635" rtlCol="0" anchor="t">
+          <a:bodyPr wrap="square" lIns="1016" tIns="1016" rIns="1016" bIns="1016" rtlCol="0" anchor="t">
             <a:normAutofit/>
           </a:bodyPr>
           <a:lstStyle/>
           <a:p>
+            <a:pPr indent="0" marL="0">
+              <a:buNone/>
+            </a:pPr>
             <a:r>
               <a:rPr lang="en-US" sz="2100" dirty="0">
                 <a:solidFill>
-                  <a:srgbClr val="17364A"/>
-                </a:solidFill>
-                <a:latin typeface="Aptos" pitchFamily="34" charset="0"/>
-                <a:ea typeface="Aptos" pitchFamily="34" charset="-122"/>
-                <a:cs typeface="Aptos" pitchFamily="34" charset="-120"/>
-              </a:rPr>
-              <a:t>CDC Evaluation Framework: https://www.cdc.gov/evaluation/</a:t>
+                  <a:srgbClr val="003A63"/>
+                </a:solidFill>
+                <a:latin typeface="Aptos" pitchFamily="34" charset="0"/>
+                <a:ea typeface="Aptos" pitchFamily="34" charset="-122"/>
+                <a:cs typeface="Aptos" pitchFamily="34" charset="-120"/>
+              </a:rPr>
+              <a:t>• CDC Evaluation Framework: https://www.cdc.gov/evaluation/</a:t>
             </a:r>
             <a:endParaRPr lang="en-US" sz="2100" dirty="0"/>
           </a:p>
           <a:p>
+            <a:pPr indent="0" marL="0">
+              <a:buNone/>
+            </a:pPr>
             <a:r>
               <a:rPr lang="en-US" sz="2100" dirty="0">
                 <a:solidFill>
-                  <a:srgbClr val="17364A"/>
-                </a:solidFill>
-                <a:latin typeface="Aptos" pitchFamily="34" charset="0"/>
-                <a:ea typeface="Aptos" pitchFamily="34" charset="-122"/>
-                <a:cs typeface="Aptos" pitchFamily="34" charset="-120"/>
-              </a:rPr>
-              <a:t>NIST Artificial Intelligence Risk Management Framework:.</a:t>
+                  <a:srgbClr val="003A63"/>
+                </a:solidFill>
+                <a:latin typeface="Aptos" pitchFamily="34" charset="0"/>
+                <a:ea typeface="Aptos" pitchFamily="34" charset="-122"/>
+                <a:cs typeface="Aptos" pitchFamily="34" charset="-120"/>
+              </a:rPr>
+              <a:t>• NIST Artificial Intelligence Risk Management Framework:.</a:t>
             </a:r>
             <a:endParaRPr lang="en-US" sz="2100" dirty="0"/>
           </a:p>
           <a:p>
+            <a:pPr indent="0" marL="0">
+              <a:buNone/>
+            </a:pPr>
             <a:r>
               <a:rPr lang="en-US" sz="2100" dirty="0">
                 <a:solidFill>
-                  <a:srgbClr val="17364A"/>
-                </a:solidFill>
-                <a:latin typeface="Aptos" pitchFamily="34" charset="0"/>
-                <a:ea typeface="Aptos" pitchFamily="34" charset="-122"/>
-                <a:cs typeface="Aptos" pitchFamily="34" charset="-120"/>
-              </a:rPr>
-              <a:t>NIST AI RMF Generative AI Profile:.</a:t>
+                  <a:srgbClr val="003A63"/>
+                </a:solidFill>
+                <a:latin typeface="Aptos" pitchFamily="34" charset="0"/>
+                <a:ea typeface="Aptos" pitchFamily="34" charset="-122"/>
+                <a:cs typeface="Aptos" pitchFamily="34" charset="-120"/>
+              </a:rPr>
+              <a:t>• NIST AI RMF Generative AI Profile:.</a:t>
             </a:r>
             <a:endParaRPr lang="en-US" sz="2100" dirty="0"/>
           </a:p>
@@ -12287,17 +12475,17 @@
         </p:nvSpPr>
         <p:spPr>
           <a:xfrm>
-            <a:off x="7799832" y="1828800"/>
-            <a:ext cx="3145536" cy="685800"/>
-          </a:xfrm>
-          <a:prstGeom prst="rect">
-            <a:avLst/>
-          </a:prstGeom>
-          <a:noFill/>
-          <a:ln/>
-        </p:spPr>
-        <p:txBody>
-          <a:bodyPr wrap="square" lIns="0" tIns="0" rIns="0" bIns="0" rtlCol="0" anchor="t">
+            <a:off x="7799832" y="1801368"/>
+            <a:ext cx="3145536" cy="758952"/>
+          </a:xfrm>
+          <a:prstGeom prst="rect">
+            <a:avLst/>
+          </a:prstGeom>
+          <a:noFill/>
+          <a:ln/>
+        </p:spPr>
+        <p:txBody>
+          <a:bodyPr wrap="square" lIns="254" tIns="254" rIns="254" bIns="254" rtlCol="0" anchor="t">
             <a:normAutofit/>
           </a:bodyPr>
           <a:lstStyle/>
@@ -12306,7 +12494,7 @@
               <a:buNone/>
             </a:pPr>
             <a:r>
-              <a:rPr lang="en-US" sz="1550" dirty="0">
+              <a:rPr lang="en-US" sz="1320" dirty="0">
                 <a:solidFill>
                   <a:srgbClr val="17364A"/>
                 </a:solidFill>
@@ -12316,7 +12504,7 @@
               </a:rPr>
               <a:t>CDC Evaluation Framework: https://www.cdc.gov/evaluation/</a:t>
             </a:r>
-            <a:endParaRPr lang="en-US" sz="1550" dirty="0"/>
+            <a:endParaRPr lang="en-US" sz="1320" dirty="0"/>
           </a:p>
         </p:txBody>
       </p:sp>
@@ -12404,13 +12592,16 @@
           <a:ln/>
         </p:spPr>
         <p:txBody>
-          <a:bodyPr wrap="square" lIns="254" tIns="254" rIns="254" bIns="254" rtlCol="0" anchor="t">
+          <a:bodyPr wrap="square" lIns="508" tIns="508" rIns="508" bIns="508" rtlCol="0" anchor="t">
             <a:normAutofit/>
           </a:bodyPr>
           <a:lstStyle/>
           <a:p>
-            <a:r>
-              <a:rPr lang="en-US" sz="1380" dirty="0">
+            <a:pPr indent="0" marL="0">
+              <a:buNone/>
+            </a:pPr>
+            <a:r>
+              <a:rPr lang="en-US" sz="1220" dirty="0">
                 <a:solidFill>
                   <a:srgbClr val="17364A"/>
                 </a:solidFill>
@@ -12420,11 +12611,14 @@
               </a:rPr>
               <a:t>NIST Artificial Intelligence Risk Management Framework:.</a:t>
             </a:r>
-            <a:endParaRPr lang="en-US" sz="1380" dirty="0"/>
-          </a:p>
-          <a:p>
-            <a:r>
-              <a:rPr lang="en-US" sz="1380" dirty="0">
+            <a:endParaRPr lang="en-US" sz="1220" dirty="0"/>
+          </a:p>
+          <a:p>
+            <a:pPr indent="0" marL="0">
+              <a:buNone/>
+            </a:pPr>
+            <a:r>
+              <a:rPr lang="en-US" sz="1220" dirty="0">
                 <a:solidFill>
                   <a:srgbClr val="17364A"/>
                 </a:solidFill>
@@ -12434,7 +12628,7 @@
               </a:rPr>
               <a:t>CDC Public Health Data Strategy:.</a:t>
             </a:r>
-            <a:endParaRPr lang="en-US" sz="1380" dirty="0"/>
+            <a:endParaRPr lang="en-US" sz="1220" dirty="0"/>
           </a:p>
         </p:txBody>
       </p:sp>
@@ -12512,17 +12706,17 @@
         </p:nvSpPr>
         <p:spPr>
           <a:xfrm>
-            <a:off x="7799832" y="5001768"/>
-            <a:ext cx="3145536" cy="502920"/>
-          </a:xfrm>
-          <a:prstGeom prst="rect">
-            <a:avLst/>
-          </a:prstGeom>
-          <a:noFill/>
-          <a:ln/>
-        </p:spPr>
-        <p:txBody>
-          <a:bodyPr wrap="square" lIns="0" tIns="0" rIns="0" bIns="0" rtlCol="0" anchor="t">
+            <a:off x="7799832" y="4974336"/>
+            <a:ext cx="3145536" cy="576072"/>
+          </a:xfrm>
+          <a:prstGeom prst="rect">
+            <a:avLst/>
+          </a:prstGeom>
+          <a:noFill/>
+          <a:ln/>
+        </p:spPr>
+        <p:txBody>
+          <a:bodyPr wrap="square" lIns="254" tIns="254" rIns="254" bIns="254" rtlCol="0" anchor="t">
             <a:normAutofit/>
           </a:bodyPr>
           <a:lstStyle/>
@@ -12531,7 +12725,7 @@
               <a:buNone/>
             </a:pPr>
             <a:r>
-              <a:rPr lang="en-US" sz="1550" dirty="0">
+              <a:rPr lang="en-US" sz="1320" dirty="0">
                 <a:solidFill>
                   <a:srgbClr val="17364A"/>
                 </a:solidFill>
@@ -12539,9 +12733,9 @@
                 <a:ea typeface="Aptos" pitchFamily="34" charset="-122"/>
                 <a:cs typeface="Aptos" pitchFamily="34" charset="-120"/>
               </a:rPr>
-              <a:t>Connect the concept to public health purpose, responsible use, required safeguards, documentation, and the next action a department should take.</a:t>
-            </a:r>
-            <a:endParaRPr lang="en-US" sz="1550" dirty="0"/>
+              <a:t>Connect the concept to public health purpose, responsible use, required safeguards, documentation, and the next action a.</a:t>
+            </a:r>
+            <a:endParaRPr lang="en-US" sz="1320" dirty="0"/>
           </a:p>
         </p:txBody>
       </p:sp>
@@ -12842,63 +13036,75 @@
           <a:ln/>
         </p:spPr>
         <p:txBody>
-          <a:bodyPr wrap="square" lIns="635" tIns="635" rIns="635" bIns="635" rtlCol="0" anchor="t">
+          <a:bodyPr wrap="square" lIns="1016" tIns="1016" rIns="1016" bIns="1016" rtlCol="0" anchor="t">
             <a:normAutofit/>
           </a:bodyPr>
           <a:lstStyle/>
           <a:p>
+            <a:pPr indent="0" marL="0">
+              <a:buNone/>
+            </a:pPr>
             <a:r>
               <a:rPr lang="en-US" sz="1900" dirty="0">
                 <a:solidFill>
-                  <a:srgbClr val="17364A"/>
-                </a:solidFill>
-                <a:latin typeface="Aptos" pitchFamily="34" charset="0"/>
-                <a:ea typeface="Aptos" pitchFamily="34" charset="-122"/>
-                <a:cs typeface="Aptos" pitchFamily="34" charset="-120"/>
-              </a:rPr>
-              <a:t>Play 13: Monitor and Evaluate AI Systems - This lesson informs Play 13 by helping learners connect the.</a:t>
+                  <a:srgbClr val="003A63"/>
+                </a:solidFill>
+                <a:latin typeface="Aptos" pitchFamily="34" charset="0"/>
+                <a:ea typeface="Aptos" pitchFamily="34" charset="-122"/>
+                <a:cs typeface="Aptos" pitchFamily="34" charset="-120"/>
+              </a:rPr>
+              <a:t>• Play 13: Monitor and Evaluate AI Systems - This lesson informs Play 13 by helping learners.</a:t>
             </a:r>
             <a:endParaRPr lang="en-US" sz="1900" dirty="0"/>
           </a:p>
           <a:p>
+            <a:pPr indent="0" marL="0">
+              <a:buNone/>
+            </a:pPr>
             <a:r>
               <a:rPr lang="en-US" sz="1900" dirty="0">
                 <a:solidFill>
-                  <a:srgbClr val="17364A"/>
-                </a:solidFill>
-                <a:latin typeface="Aptos" pitchFamily="34" charset="0"/>
-                <a:ea typeface="Aptos" pitchFamily="34" charset="-122"/>
-                <a:cs typeface="Aptos" pitchFamily="34" charset="-120"/>
-              </a:rPr>
-              <a:t>Play 11: Build and Deploy AI Solutions - This lesson informs Play 11 by helping learners connect the lesson.</a:t>
+                  <a:srgbClr val="003A63"/>
+                </a:solidFill>
+                <a:latin typeface="Aptos" pitchFamily="34" charset="0"/>
+                <a:ea typeface="Aptos" pitchFamily="34" charset="-122"/>
+                <a:cs typeface="Aptos" pitchFamily="34" charset="-120"/>
+              </a:rPr>
+              <a:t>• Play 11: Build and Deploy AI Solutions - This lesson informs Play 11 by helping learners.</a:t>
             </a:r>
             <a:endParaRPr lang="en-US" sz="1900" dirty="0"/>
           </a:p>
           <a:p>
+            <a:pPr indent="0" marL="0">
+              <a:buNone/>
+            </a:pPr>
             <a:r>
               <a:rPr lang="en-US" sz="1900" dirty="0">
                 <a:solidFill>
-                  <a:srgbClr val="17364A"/>
-                </a:solidFill>
-                <a:latin typeface="Aptos" pitchFamily="34" charset="0"/>
-                <a:ea typeface="Aptos" pitchFamily="34" charset="-122"/>
-                <a:cs typeface="Aptos" pitchFamily="34" charset="-120"/>
-              </a:rPr>
-              <a:t>Play 1: Vision &amp; Guardrails - This lesson informs Play 1 by helping learners connect the lesson topic to.</a:t>
+                  <a:srgbClr val="003A63"/>
+                </a:solidFill>
+                <a:latin typeface="Aptos" pitchFamily="34" charset="0"/>
+                <a:ea typeface="Aptos" pitchFamily="34" charset="-122"/>
+                <a:cs typeface="Aptos" pitchFamily="34" charset="-120"/>
+              </a:rPr>
+              <a:t>• Play 1: Vision &amp; Guardrails - This lesson informs Play 1 by helping learners connect the.</a:t>
             </a:r>
             <a:endParaRPr lang="en-US" sz="1900" dirty="0"/>
           </a:p>
           <a:p>
+            <a:pPr indent="0" marL="0">
+              <a:buNone/>
+            </a:pPr>
             <a:r>
               <a:rPr lang="en-US" sz="1900" dirty="0">
                 <a:solidFill>
-                  <a:srgbClr val="17364A"/>
-                </a:solidFill>
-                <a:latin typeface="Aptos" pitchFamily="34" charset="0"/>
-                <a:ea typeface="Aptos" pitchFamily="34" charset="-122"/>
-                <a:cs typeface="Aptos" pitchFamily="34" charset="-120"/>
-              </a:rPr>
-              <a:t>Play 7: Prioritize Use Cases - This lesson informs Play 7 by helping learners connect the lesson topic to.</a:t>
+                  <a:srgbClr val="003A63"/>
+                </a:solidFill>
+                <a:latin typeface="Aptos" pitchFamily="34" charset="0"/>
+                <a:ea typeface="Aptos" pitchFamily="34" charset="-122"/>
+                <a:cs typeface="Aptos" pitchFamily="34" charset="-120"/>
+              </a:rPr>
+              <a:t>• Play 7: Prioritize Use Cases - This lesson informs Play 7 by helping learners connect the.</a:t>
             </a:r>
             <a:endParaRPr lang="en-US" sz="1900" dirty="0"/>
           </a:p>
@@ -12978,17 +13184,17 @@
         </p:nvSpPr>
         <p:spPr>
           <a:xfrm>
-            <a:off x="8211312" y="1920240"/>
-            <a:ext cx="2734056" cy="1463040"/>
-          </a:xfrm>
-          <a:prstGeom prst="rect">
-            <a:avLst/>
-          </a:prstGeom>
-          <a:noFill/>
-          <a:ln/>
-        </p:spPr>
-        <p:txBody>
-          <a:bodyPr wrap="square" lIns="0" tIns="0" rIns="0" bIns="0" rtlCol="0" anchor="t">
+            <a:off x="8211312" y="1892808"/>
+            <a:ext cx="2734056" cy="1536192"/>
+          </a:xfrm>
+          <a:prstGeom prst="rect">
+            <a:avLst/>
+          </a:prstGeom>
+          <a:noFill/>
+          <a:ln/>
+        </p:spPr>
+        <p:txBody>
+          <a:bodyPr wrap="square" lIns="254" tIns="254" rIns="254" bIns="254" rtlCol="0" anchor="t">
             <a:normAutofit/>
           </a:bodyPr>
           <a:lstStyle/>
@@ -12997,7 +13203,7 @@
               <a:buNone/>
             </a:pPr>
             <a:r>
-              <a:rPr lang="en-US" sz="1550" dirty="0">
+              <a:rPr lang="en-US" sz="1320" dirty="0">
                 <a:solidFill>
                   <a:srgbClr val="17364A"/>
                 </a:solidFill>
@@ -13005,9 +13211,9 @@
                 <a:ea typeface="Aptos" pitchFamily="34" charset="-122"/>
                 <a:cs typeface="Aptos" pitchFamily="34" charset="-120"/>
               </a:rPr>
-              <a:t>Use the related plays to identify decisions, participants, timing, approvals, and documentation needed for responsible implementation.</a:t>
-            </a:r>
-            <a:endParaRPr lang="en-US" sz="1550" dirty="0"/>
+              <a:t>Use the related plays to identify decisions, participants, timing, approvals, and documentation needed for responsible.</a:t>
+            </a:r>
+            <a:endParaRPr lang="en-US" sz="1320" dirty="0"/>
           </a:p>
         </p:txBody>
       </p:sp>
@@ -13095,13 +13301,16 @@
           <a:ln/>
         </p:spPr>
         <p:txBody>
-          <a:bodyPr wrap="square" lIns="254" tIns="254" rIns="254" bIns="254" rtlCol="0" anchor="t">
+          <a:bodyPr wrap="square" lIns="508" tIns="508" rIns="508" bIns="508" rtlCol="0" anchor="t">
             <a:normAutofit/>
           </a:bodyPr>
           <a:lstStyle/>
           <a:p>
-            <a:r>
-              <a:rPr lang="en-US" sz="1380" dirty="0">
+            <a:pPr indent="0" marL="0">
+              <a:buNone/>
+            </a:pPr>
+            <a:r>
+              <a:rPr lang="en-US" sz="1220" dirty="0">
                 <a:solidFill>
                   <a:srgbClr val="17364A"/>
                 </a:solidFill>
@@ -13111,11 +13320,14 @@
               </a:rPr>
               <a:t>Locate the decision point in the playbook sequence.</a:t>
             </a:r>
-            <a:endParaRPr lang="en-US" sz="1380" dirty="0"/>
-          </a:p>
-          <a:p>
-            <a:r>
-              <a:rPr lang="en-US" sz="1380" dirty="0">
+            <a:endParaRPr lang="en-US" sz="1220" dirty="0"/>
+          </a:p>
+          <a:p>
+            <a:pPr indent="0" marL="0">
+              <a:buNone/>
+            </a:pPr>
+            <a:r>
+              <a:rPr lang="en-US" sz="1220" dirty="0">
                 <a:solidFill>
                   <a:srgbClr val="17364A"/>
                 </a:solidFill>
@@ -13125,11 +13337,14 @@
               </a:rPr>
               <a:t>Identify who should participate in the work.</a:t>
             </a:r>
-            <a:endParaRPr lang="en-US" sz="1380" dirty="0"/>
-          </a:p>
-          <a:p>
-            <a:r>
-              <a:rPr lang="en-US" sz="1380" dirty="0">
+            <a:endParaRPr lang="en-US" sz="1220" dirty="0"/>
+          </a:p>
+          <a:p>
+            <a:pPr indent="0" marL="0">
+              <a:buNone/>
+            </a:pPr>
+            <a:r>
+              <a:rPr lang="en-US" sz="1220" dirty="0">
                 <a:solidFill>
                   <a:srgbClr val="17364A"/>
                 </a:solidFill>
@@ -13139,7 +13354,7 @@
               </a:rPr>
               <a:t>Document the review, approval, or implementation step.</a:t>
             </a:r>
-            <a:endParaRPr lang="en-US" sz="1380" dirty="0"/>
+            <a:endParaRPr lang="en-US" sz="1220" dirty="0"/>
           </a:p>
         </p:txBody>
       </p:sp>
@@ -13440,63 +13655,75 @@
           <a:ln/>
         </p:spPr>
         <p:txBody>
-          <a:bodyPr wrap="square" lIns="635" tIns="635" rIns="635" bIns="635" rtlCol="0" anchor="t">
+          <a:bodyPr wrap="square" lIns="1016" tIns="1016" rIns="1016" bIns="1016" rtlCol="0" anchor="t">
             <a:normAutofit/>
           </a:bodyPr>
           <a:lstStyle/>
           <a:p>
+            <a:pPr indent="0" marL="0">
+              <a:buNone/>
+            </a:pPr>
             <a:r>
               <a:rPr lang="en-US" sz="1850" dirty="0">
                 <a:solidFill>
-                  <a:srgbClr val="17364A"/>
-                </a:solidFill>
-                <a:latin typeface="Aptos" pitchFamily="34" charset="0"/>
-                <a:ea typeface="Aptos" pitchFamily="34" charset="-122"/>
-                <a:cs typeface="Aptos" pitchFamily="34" charset="-120"/>
-              </a:rPr>
-              <a:t>Tool 44: Performance Monitoring Dashboard (Dashboard) - Use this tool to complete or strengthen the.</a:t>
+                  <a:srgbClr val="003A63"/>
+                </a:solidFill>
+                <a:latin typeface="Aptos" pitchFamily="34" charset="0"/>
+                <a:ea typeface="Aptos" pitchFamily="34" charset="-122"/>
+                <a:cs typeface="Aptos" pitchFamily="34" charset="-120"/>
+              </a:rPr>
+              <a:t>• Tool 44: Performance Monitoring Dashboard (Dashboard) - Use this tool to complete or.</a:t>
             </a:r>
             <a:endParaRPr lang="en-US" sz="1850" dirty="0"/>
           </a:p>
           <a:p>
+            <a:pPr indent="0" marL="0">
+              <a:buNone/>
+            </a:pPr>
             <a:r>
               <a:rPr lang="en-US" sz="1850" dirty="0">
                 <a:solidFill>
-                  <a:srgbClr val="17364A"/>
-                </a:solidFill>
-                <a:latin typeface="Aptos" pitchFamily="34" charset="0"/>
-                <a:ea typeface="Aptos" pitchFamily="34" charset="-122"/>
-                <a:cs typeface="Aptos" pitchFamily="34" charset="-120"/>
-              </a:rPr>
-              <a:t>Tool 45: Continuous Improvement Log (Log) - Use this tool to complete or strengthen the practical exercise.</a:t>
+                  <a:srgbClr val="003A63"/>
+                </a:solidFill>
+                <a:latin typeface="Aptos" pitchFamily="34" charset="0"/>
+                <a:ea typeface="Aptos" pitchFamily="34" charset="-122"/>
+                <a:cs typeface="Aptos" pitchFamily="34" charset="-120"/>
+              </a:rPr>
+              <a:t>• Tool 45: Continuous Improvement Log (Log) - Use this tool to complete or strengthen the.</a:t>
             </a:r>
             <a:endParaRPr lang="en-US" sz="1850" dirty="0"/>
           </a:p>
           <a:p>
+            <a:pPr indent="0" marL="0">
+              <a:buNone/>
+            </a:pPr>
             <a:r>
               <a:rPr lang="en-US" sz="1850" dirty="0">
                 <a:solidFill>
-                  <a:srgbClr val="17364A"/>
-                </a:solidFill>
-                <a:latin typeface="Aptos" pitchFamily="34" charset="0"/>
-                <a:ea typeface="Aptos" pitchFamily="34" charset="-122"/>
-                <a:cs typeface="Aptos" pitchFamily="34" charset="-120"/>
-              </a:rPr>
-              <a:t>Tool 48: AI Evaluation &amp; Outcomes Reporting (Template) - Use this tool to complete or strengthen the.</a:t>
+                  <a:srgbClr val="003A63"/>
+                </a:solidFill>
+                <a:latin typeface="Aptos" pitchFamily="34" charset="0"/>
+                <a:ea typeface="Aptos" pitchFamily="34" charset="-122"/>
+                <a:cs typeface="Aptos" pitchFamily="34" charset="-120"/>
+              </a:rPr>
+              <a:t>• Tool 48: AI Evaluation &amp; Outcomes Reporting (Template) - Use this tool to complete or.</a:t>
             </a:r>
             <a:endParaRPr lang="en-US" sz="1850" dirty="0"/>
           </a:p>
           <a:p>
+            <a:pPr indent="0" marL="0">
+              <a:buNone/>
+            </a:pPr>
             <a:r>
               <a:rPr lang="en-US" sz="1850" dirty="0">
                 <a:solidFill>
-                  <a:srgbClr val="17364A"/>
-                </a:solidFill>
-                <a:latin typeface="Aptos" pitchFamily="34" charset="0"/>
-                <a:ea typeface="Aptos" pitchFamily="34" charset="-122"/>
-                <a:cs typeface="Aptos" pitchFamily="34" charset="-120"/>
-              </a:rPr>
-              <a:t>Tool 1: AI Vision &amp; Principles Workshop (Workshop) - Use AI Vision &amp; Principles Workshop to translate this.</a:t>
+                  <a:srgbClr val="003A63"/>
+                </a:solidFill>
+                <a:latin typeface="Aptos" pitchFamily="34" charset="0"/>
+                <a:ea typeface="Aptos" pitchFamily="34" charset="-122"/>
+                <a:cs typeface="Aptos" pitchFamily="34" charset="-120"/>
+              </a:rPr>
+              <a:t>• Tool 1: AI Vision &amp; Principles Workshop (Workshop) - Use AI Vision &amp; Principles Workshop to.</a:t>
             </a:r>
             <a:endParaRPr lang="en-US" sz="1850" dirty="0"/>
           </a:p>
@@ -13576,17 +13803,17 @@
         </p:nvSpPr>
         <p:spPr>
           <a:xfrm>
-            <a:off x="8211312" y="1920240"/>
-            <a:ext cx="2734056" cy="1463040"/>
-          </a:xfrm>
-          <a:prstGeom prst="rect">
-            <a:avLst/>
-          </a:prstGeom>
-          <a:noFill/>
-          <a:ln/>
-        </p:spPr>
-        <p:txBody>
-          <a:bodyPr wrap="square" lIns="0" tIns="0" rIns="0" bIns="0" rtlCol="0" anchor="t">
+            <a:off x="8211312" y="1892808"/>
+            <a:ext cx="2734056" cy="1536192"/>
+          </a:xfrm>
+          <a:prstGeom prst="rect">
+            <a:avLst/>
+          </a:prstGeom>
+          <a:noFill/>
+          <a:ln/>
+        </p:spPr>
+        <p:txBody>
+          <a:bodyPr wrap="square" lIns="254" tIns="254" rIns="254" bIns="254" rtlCol="0" anchor="t">
             <a:normAutofit/>
           </a:bodyPr>
           <a:lstStyle/>
@@ -13595,7 +13822,7 @@
               <a:buNone/>
             </a:pPr>
             <a:r>
-              <a:rPr lang="en-US" sz="1550" dirty="0">
+              <a:rPr lang="en-US" sz="1320" dirty="0">
                 <a:solidFill>
                   <a:srgbClr val="17364A"/>
                 </a:solidFill>
@@ -13603,9 +13830,9 @@
                 <a:ea typeface="Aptos" pitchFamily="34" charset="-122"/>
                 <a:cs typeface="Aptos" pitchFamily="34" charset="-120"/>
               </a:rPr>
-              <a:t>Use linked tools when your department needs a structured worksheet, template, checklist, review process, or documentation artifact.</a:t>
-            </a:r>
-            <a:endParaRPr lang="en-US" sz="1550" dirty="0"/>
+              <a:t>Use linked tools when your department needs a structured worksheet, template, checklist, review process, or.</a:t>
+            </a:r>
+            <a:endParaRPr lang="en-US" sz="1320" dirty="0"/>
           </a:p>
         </p:txBody>
       </p:sp>
@@ -13693,13 +13920,16 @@
           <a:ln/>
         </p:spPr>
         <p:txBody>
-          <a:bodyPr wrap="square" lIns="254" tIns="254" rIns="254" bIns="254" rtlCol="0" anchor="t">
+          <a:bodyPr wrap="square" lIns="508" tIns="508" rIns="508" bIns="508" rtlCol="0" anchor="t">
             <a:normAutofit/>
           </a:bodyPr>
           <a:lstStyle/>
           <a:p>
-            <a:r>
-              <a:rPr lang="en-US" sz="1380" dirty="0">
+            <a:pPr indent="0" marL="0">
+              <a:buNone/>
+            </a:pPr>
+            <a:r>
+              <a:rPr lang="en-US" sz="1220" dirty="0">
                 <a:solidFill>
                   <a:srgbClr val="17364A"/>
                 </a:solidFill>
@@ -13709,11 +13939,14 @@
               </a:rPr>
               <a:t>Use a tool when no comparable local process exists.</a:t>
             </a:r>
-            <a:endParaRPr lang="en-US" sz="1380" dirty="0"/>
-          </a:p>
-          <a:p>
-            <a:r>
-              <a:rPr lang="en-US" sz="1380" dirty="0">
+            <a:endParaRPr lang="en-US" sz="1220" dirty="0"/>
+          </a:p>
+          <a:p>
+            <a:pPr indent="0" marL="0">
+              <a:buNone/>
+            </a:pPr>
+            <a:r>
+              <a:rPr lang="en-US" sz="1220" dirty="0">
                 <a:solidFill>
                   <a:srgbClr val="17364A"/>
                 </a:solidFill>
@@ -13721,13 +13954,16 @@
                 <a:ea typeface="Aptos" pitchFamily="34" charset="-122"/>
                 <a:cs typeface="Aptos" pitchFamily="34" charset="-120"/>
               </a:rPr>
-              <a:t>Adapt existing department templates when they already fit the purpose.</a:t>
-            </a:r>
-            <a:endParaRPr lang="en-US" sz="1380" dirty="0"/>
-          </a:p>
-          <a:p>
-            <a:r>
-              <a:rPr lang="en-US" sz="1380" dirty="0">
+              <a:t>Adapt existing department templates when they already fit the.</a:t>
+            </a:r>
+            <a:endParaRPr lang="en-US" sz="1220" dirty="0"/>
+          </a:p>
+          <a:p>
+            <a:pPr indent="0" marL="0">
+              <a:buNone/>
+            </a:pPr>
+            <a:r>
+              <a:rPr lang="en-US" sz="1220" dirty="0">
                 <a:solidFill>
                   <a:srgbClr val="17364A"/>
                 </a:solidFill>
@@ -13737,7 +13973,7 @@
               </a:rPr>
               <a:t>Save the completed artifact as evidence of the decision.</a:t>
             </a:r>
-            <a:endParaRPr lang="en-US" sz="1380" dirty="0"/>
+            <a:endParaRPr lang="en-US" sz="1220" dirty="0"/>
           </a:p>
         </p:txBody>
       </p:sp>
@@ -14038,49 +14274,58 @@
           <a:ln/>
         </p:spPr>
         <p:txBody>
-          <a:bodyPr wrap="square" lIns="635" tIns="635" rIns="635" bIns="635" rtlCol="0" anchor="t">
+          <a:bodyPr wrap="square" lIns="1016" tIns="1016" rIns="1016" bIns="1016" rtlCol="0" anchor="t">
             <a:normAutofit/>
           </a:bodyPr>
           <a:lstStyle/>
           <a:p>
+            <a:pPr indent="0" marL="0">
+              <a:buNone/>
+            </a:pPr>
             <a:r>
               <a:rPr lang="en-US" sz="2100" dirty="0">
                 <a:solidFill>
-                  <a:srgbClr val="17364A"/>
-                </a:solidFill>
-                <a:latin typeface="Aptos" pitchFamily="34" charset="0"/>
-                <a:ea typeface="Aptos" pitchFamily="34" charset="-122"/>
-                <a:cs typeface="Aptos" pitchFamily="34" charset="-120"/>
-              </a:rPr>
-              <a:t>Explain the difference between supervised, unsupervised, and semi-supervised learning in public health.</a:t>
+                  <a:srgbClr val="003A63"/>
+                </a:solidFill>
+                <a:latin typeface="Aptos" pitchFamily="34" charset="0"/>
+                <a:ea typeface="Aptos" pitchFamily="34" charset="-122"/>
+                <a:cs typeface="Aptos" pitchFamily="34" charset="-120"/>
+              </a:rPr>
+              <a:t>• Explain the difference between supervised, unsupervised, and semi-supervised learning in.</a:t>
             </a:r>
             <a:endParaRPr lang="en-US" sz="2100" dirty="0"/>
           </a:p>
           <a:p>
+            <a:pPr indent="0" marL="0">
+              <a:buNone/>
+            </a:pPr>
             <a:r>
               <a:rPr lang="en-US" sz="2100" dirty="0">
                 <a:solidFill>
-                  <a:srgbClr val="17364A"/>
-                </a:solidFill>
-                <a:latin typeface="Aptos" pitchFamily="34" charset="0"/>
-                <a:ea typeface="Aptos" pitchFamily="34" charset="-122"/>
-                <a:cs typeface="Aptos" pitchFamily="34" charset="-120"/>
-              </a:rPr>
-              <a:t>Describe features, labels, training data, validation data, and test data.</a:t>
+                  <a:srgbClr val="003A63"/>
+                </a:solidFill>
+                <a:latin typeface="Aptos" pitchFamily="34" charset="0"/>
+                <a:ea typeface="Aptos" pitchFamily="34" charset="-122"/>
+                <a:cs typeface="Aptos" pitchFamily="34" charset="-120"/>
+              </a:rPr>
+              <a:t>• Describe features, labels, training data, validation data, and test data.</a:t>
             </a:r>
             <a:endParaRPr lang="en-US" sz="2100" dirty="0"/>
           </a:p>
           <a:p>
+            <a:pPr indent="0" marL="0">
+              <a:buNone/>
+            </a:pPr>
             <a:r>
               <a:rPr lang="en-US" sz="2100" dirty="0">
                 <a:solidFill>
-                  <a:srgbClr val="17364A"/>
-                </a:solidFill>
-                <a:latin typeface="Aptos" pitchFamily="34" charset="0"/>
-                <a:ea typeface="Aptos" pitchFamily="34" charset="-122"/>
-                <a:cs typeface="Aptos" pitchFamily="34" charset="-120"/>
-              </a:rPr>
-              <a:t>Identify when a machine learning approach may be appropriate for a public health workflow and when a.</a:t>
+                  <a:srgbClr val="003A63"/>
+                </a:solidFill>
+                <a:latin typeface="Aptos" pitchFamily="34" charset="0"/>
+                <a:ea typeface="Aptos" pitchFamily="34" charset="-122"/>
+                <a:cs typeface="Aptos" pitchFamily="34" charset="-120"/>
+              </a:rPr>
+              <a:t>• Identify when a machine learning approach may be appropriate for a public health workflow and.</a:t>
             </a:r>
             <a:endParaRPr lang="en-US" sz="2100" dirty="0"/>
           </a:p>
@@ -14160,17 +14405,17 @@
         </p:nvSpPr>
         <p:spPr>
           <a:xfrm>
-            <a:off x="7799832" y="1828800"/>
-            <a:ext cx="3145536" cy="685800"/>
-          </a:xfrm>
-          <a:prstGeom prst="rect">
-            <a:avLst/>
-          </a:prstGeom>
-          <a:noFill/>
-          <a:ln/>
-        </p:spPr>
-        <p:txBody>
-          <a:bodyPr wrap="square" lIns="0" tIns="0" rIns="0" bIns="0" rtlCol="0" anchor="t">
+            <a:off x="7799832" y="1801368"/>
+            <a:ext cx="3145536" cy="758952"/>
+          </a:xfrm>
+          <a:prstGeom prst="rect">
+            <a:avLst/>
+          </a:prstGeom>
+          <a:noFill/>
+          <a:ln/>
+        </p:spPr>
+        <p:txBody>
+          <a:bodyPr wrap="square" lIns="254" tIns="254" rIns="254" bIns="254" rtlCol="0" anchor="t">
             <a:normAutofit/>
           </a:bodyPr>
           <a:lstStyle/>
@@ -14179,7 +14424,7 @@
               <a:buNone/>
             </a:pPr>
             <a:r>
-              <a:rPr lang="en-US" sz="1550" dirty="0">
+              <a:rPr lang="en-US" sz="1320" dirty="0">
                 <a:solidFill>
                   <a:srgbClr val="17364A"/>
                 </a:solidFill>
@@ -14189,7 +14434,7 @@
               </a:rPr>
               <a:t>Explain the difference between supervised, unsupervised, and semi-supervised learning in public health.</a:t>
             </a:r>
-            <a:endParaRPr lang="en-US" sz="1550" dirty="0"/>
+            <a:endParaRPr lang="en-US" sz="1320" dirty="0"/>
           </a:p>
         </p:txBody>
       </p:sp>
@@ -14277,13 +14522,16 @@
           <a:ln/>
         </p:spPr>
         <p:txBody>
-          <a:bodyPr wrap="square" lIns="254" tIns="254" rIns="254" bIns="254" rtlCol="0" anchor="t">
+          <a:bodyPr wrap="square" lIns="508" tIns="508" rIns="508" bIns="508" rtlCol="0" anchor="t">
             <a:normAutofit/>
           </a:bodyPr>
           <a:lstStyle/>
           <a:p>
-            <a:r>
-              <a:rPr lang="en-US" sz="1380" dirty="0">
+            <a:pPr indent="0" marL="0">
+              <a:buNone/>
+            </a:pPr>
+            <a:r>
+              <a:rPr lang="en-US" sz="1220" dirty="0">
                 <a:solidFill>
                   <a:srgbClr val="17364A"/>
                 </a:solidFill>
@@ -14291,13 +14539,16 @@
                 <a:ea typeface="Aptos" pitchFamily="34" charset="-122"/>
                 <a:cs typeface="Aptos" pitchFamily="34" charset="-120"/>
               </a:rPr>
-              <a:t>Explain the difference between supervised, unsupervised, and semi-supervised learning in.</a:t>
-            </a:r>
-            <a:endParaRPr lang="en-US" sz="1380" dirty="0"/>
-          </a:p>
-          <a:p>
-            <a:r>
-              <a:rPr lang="en-US" sz="1380" dirty="0">
+              <a:t>Explain the difference between supervised, unsupervised, and.</a:t>
+            </a:r>
+            <a:endParaRPr lang="en-US" sz="1220" dirty="0"/>
+          </a:p>
+          <a:p>
+            <a:pPr indent="0" marL="0">
+              <a:buNone/>
+            </a:pPr>
+            <a:r>
+              <a:rPr lang="en-US" sz="1220" dirty="0">
                 <a:solidFill>
                   <a:srgbClr val="17364A"/>
                 </a:solidFill>
@@ -14305,13 +14556,16 @@
                 <a:ea typeface="Aptos" pitchFamily="34" charset="-122"/>
                 <a:cs typeface="Aptos" pitchFamily="34" charset="-120"/>
               </a:rPr>
-              <a:t>Identify when a machine learning approach may be appropriate for a public health workflow.</a:t>
-            </a:r>
-            <a:endParaRPr lang="en-US" sz="1380" dirty="0"/>
-          </a:p>
-          <a:p>
-            <a:r>
-              <a:rPr lang="en-US" sz="1380" dirty="0">
+              <a:t>Identify when a machine learning approach may be appropriate for a.</a:t>
+            </a:r>
+            <a:endParaRPr lang="en-US" sz="1220" dirty="0"/>
+          </a:p>
+          <a:p>
+            <a:pPr indent="0" marL="0">
+              <a:buNone/>
+            </a:pPr>
+            <a:r>
+              <a:rPr lang="en-US" sz="1220" dirty="0">
                 <a:solidFill>
                   <a:srgbClr val="17364A"/>
                 </a:solidFill>
@@ -14319,9 +14573,9 @@
                 <a:ea typeface="Aptos" pitchFamily="34" charset="-122"/>
                 <a:cs typeface="Aptos" pitchFamily="34" charset="-120"/>
               </a:rPr>
-              <a:t>Recognize common machine learning risks, including overfitting, biased labels, data.</a:t>
-            </a:r>
-            <a:endParaRPr lang="en-US" sz="1380" dirty="0"/>
+              <a:t>Recognize common machine learning risks, including overfitting,.</a:t>
+            </a:r>
+            <a:endParaRPr lang="en-US" sz="1220" dirty="0"/>
           </a:p>
         </p:txBody>
       </p:sp>
@@ -14399,17 +14653,17 @@
         </p:nvSpPr>
         <p:spPr>
           <a:xfrm>
-            <a:off x="7799832" y="5001768"/>
-            <a:ext cx="3145536" cy="502920"/>
-          </a:xfrm>
-          <a:prstGeom prst="rect">
-            <a:avLst/>
-          </a:prstGeom>
-          <a:noFill/>
-          <a:ln/>
-        </p:spPr>
-        <p:txBody>
-          <a:bodyPr wrap="square" lIns="0" tIns="0" rIns="0" bIns="0" rtlCol="0" anchor="t">
+            <a:off x="7799832" y="4974336"/>
+            <a:ext cx="3145536" cy="576072"/>
+          </a:xfrm>
+          <a:prstGeom prst="rect">
+            <a:avLst/>
+          </a:prstGeom>
+          <a:noFill/>
+          <a:ln/>
+        </p:spPr>
+        <p:txBody>
+          <a:bodyPr wrap="square" lIns="254" tIns="254" rIns="254" bIns="254" rtlCol="0" anchor="t">
             <a:normAutofit/>
           </a:bodyPr>
           <a:lstStyle/>
@@ -14418,7 +14672,7 @@
               <a:buNone/>
             </a:pPr>
             <a:r>
-              <a:rPr lang="en-US" sz="1550" dirty="0">
+              <a:rPr lang="en-US" sz="1320" dirty="0">
                 <a:solidFill>
                   <a:srgbClr val="17364A"/>
                 </a:solidFill>
@@ -14426,9 +14680,9 @@
                 <a:ea typeface="Aptos" pitchFamily="34" charset="-122"/>
                 <a:cs typeface="Aptos" pitchFamily="34" charset="-120"/>
               </a:rPr>
-              <a:t>Use the assignment to test whether you can explain the concept, apply it to a realistic public health situation, and identify what would need review before the work moves forward.</a:t>
-            </a:r>
-            <a:endParaRPr lang="en-US" sz="1550" dirty="0"/>
+              <a:t>Use the assignment to test whether you can explain the concept, apply it to a realistic public health situation, and.</a:t>
+            </a:r>
+            <a:endParaRPr lang="en-US" sz="1320" dirty="0"/>
           </a:p>
         </p:txBody>
       </p:sp>
@@ -14729,21 +14983,24 @@
           <a:ln/>
         </p:spPr>
         <p:txBody>
-          <a:bodyPr wrap="square" lIns="635" tIns="635" rIns="635" bIns="635" rtlCol="0" anchor="t">
+          <a:bodyPr wrap="square" lIns="1016" tIns="1016" rIns="1016" bIns="1016" rtlCol="0" anchor="t">
             <a:normAutofit/>
           </a:bodyPr>
           <a:lstStyle/>
           <a:p>
+            <a:pPr indent="0" marL="0">
+              <a:buNone/>
+            </a:pPr>
             <a:r>
               <a:rPr lang="en-US" sz="2100" dirty="0">
                 <a:solidFill>
-                  <a:srgbClr val="17364A"/>
-                </a:solidFill>
-                <a:latin typeface="Aptos" pitchFamily="34" charset="0"/>
-                <a:ea typeface="Aptos" pitchFamily="34" charset="-122"/>
-                <a:cs typeface="Aptos" pitchFamily="34" charset="-120"/>
-              </a:rPr>
-              <a:t>Produce a machine learning use case review worksheet for a real or realistic public health workflow.</a:t>
+                  <a:srgbClr val="003A63"/>
+                </a:solidFill>
+                <a:latin typeface="Aptos" pitchFamily="34" charset="0"/>
+                <a:ea typeface="Aptos" pitchFamily="34" charset="-122"/>
+                <a:cs typeface="Aptos" pitchFamily="34" charset="-120"/>
+              </a:rPr>
+              <a:t>• Produce a machine learning use case review worksheet for a real or realistic public health.</a:t>
             </a:r>
             <a:endParaRPr lang="en-US" sz="2100" dirty="0"/>
           </a:p>
@@ -14823,17 +15080,17 @@
         </p:nvSpPr>
         <p:spPr>
           <a:xfrm>
-            <a:off x="7799832" y="1828800"/>
-            <a:ext cx="3145536" cy="685800"/>
-          </a:xfrm>
-          <a:prstGeom prst="rect">
-            <a:avLst/>
-          </a:prstGeom>
-          <a:noFill/>
-          <a:ln/>
-        </p:spPr>
-        <p:txBody>
-          <a:bodyPr wrap="square" lIns="0" tIns="0" rIns="0" bIns="0" rtlCol="0" anchor="t">
+            <a:off x="7799832" y="1801368"/>
+            <a:ext cx="3145536" cy="758952"/>
+          </a:xfrm>
+          <a:prstGeom prst="rect">
+            <a:avLst/>
+          </a:prstGeom>
+          <a:noFill/>
+          <a:ln/>
+        </p:spPr>
+        <p:txBody>
+          <a:bodyPr wrap="square" lIns="254" tIns="254" rIns="254" bIns="254" rtlCol="0" anchor="t">
             <a:normAutofit/>
           </a:bodyPr>
           <a:lstStyle/>
@@ -14842,7 +15099,7 @@
               <a:buNone/>
             </a:pPr>
             <a:r>
-              <a:rPr lang="en-US" sz="1550" dirty="0">
+              <a:rPr lang="en-US" sz="1320" dirty="0">
                 <a:solidFill>
                   <a:srgbClr val="17364A"/>
                 </a:solidFill>
@@ -14852,7 +15109,7 @@
               </a:rPr>
               <a:t>Produce a machine learning use case review worksheet for a real or realistic public health workflow.</a:t>
             </a:r>
-            <a:endParaRPr lang="en-US" sz="1550" dirty="0"/>
+            <a:endParaRPr lang="en-US" sz="1320" dirty="0"/>
           </a:p>
         </p:txBody>
       </p:sp>
@@ -14940,13 +15197,16 @@
           <a:ln/>
         </p:spPr>
         <p:txBody>
-          <a:bodyPr wrap="square" lIns="254" tIns="254" rIns="254" bIns="254" rtlCol="0" anchor="t">
+          <a:bodyPr wrap="square" lIns="508" tIns="508" rIns="508" bIns="508" rtlCol="0" anchor="t">
             <a:normAutofit/>
           </a:bodyPr>
           <a:lstStyle/>
           <a:p>
-            <a:r>
-              <a:rPr lang="en-US" sz="1380" dirty="0">
+            <a:pPr indent="0" marL="0">
+              <a:buNone/>
+            </a:pPr>
+            <a:r>
+              <a:rPr lang="en-US" sz="1220" dirty="0">
                 <a:solidFill>
                   <a:srgbClr val="17364A"/>
                 </a:solidFill>
@@ -14954,9 +15214,9 @@
                 <a:ea typeface="Aptos" pitchFamily="34" charset="-122"/>
                 <a:cs typeface="Aptos" pitchFamily="34" charset="-120"/>
               </a:rPr>
-              <a:t>Produce a machine learning use case review worksheet for a real or realistic public health.</a:t>
-            </a:r>
-            <a:endParaRPr lang="en-US" sz="1380" dirty="0"/>
+              <a:t>Produce a machine learning use case review worksheet for a real or.</a:t>
+            </a:r>
+            <a:endParaRPr lang="en-US" sz="1220" dirty="0"/>
           </a:p>
         </p:txBody>
       </p:sp>
@@ -15034,17 +15294,17 @@
         </p:nvSpPr>
         <p:spPr>
           <a:xfrm>
-            <a:off x="7799832" y="5001768"/>
-            <a:ext cx="3145536" cy="502920"/>
-          </a:xfrm>
-          <a:prstGeom prst="rect">
-            <a:avLst/>
-          </a:prstGeom>
-          <a:noFill/>
-          <a:ln/>
-        </p:spPr>
-        <p:txBody>
-          <a:bodyPr wrap="square" lIns="0" tIns="0" rIns="0" bIns="0" rtlCol="0" anchor="t">
+            <a:off x="7799832" y="4974336"/>
+            <a:ext cx="3145536" cy="576072"/>
+          </a:xfrm>
+          <a:prstGeom prst="rect">
+            <a:avLst/>
+          </a:prstGeom>
+          <a:noFill/>
+          <a:ln/>
+        </p:spPr>
+        <p:txBody>
+          <a:bodyPr wrap="square" lIns="254" tIns="254" rIns="254" bIns="254" rtlCol="0" anchor="t">
             <a:normAutofit/>
           </a:bodyPr>
           <a:lstStyle/>
@@ -15053,7 +15313,7 @@
               <a:buNone/>
             </a:pPr>
             <a:r>
-              <a:rPr lang="en-US" sz="1550" dirty="0">
+              <a:rPr lang="en-US" sz="1320" dirty="0">
                 <a:solidFill>
                   <a:srgbClr val="17364A"/>
                 </a:solidFill>
@@ -15061,9 +15321,9 @@
                 <a:ea typeface="Aptos" pitchFamily="34" charset="-122"/>
                 <a:cs typeface="Aptos" pitchFamily="34" charset="-120"/>
               </a:rPr>
-              <a:t>Use the assignment to test whether you can explain the concept, apply it to a realistic public health situation, and identify what would need review before the work moves forward.</a:t>
-            </a:r>
-            <a:endParaRPr lang="en-US" sz="1550" dirty="0"/>
+              <a:t>Use the assignment to test whether you can explain the concept, apply it to a realistic public health situation, and.</a:t>
+            </a:r>
+            <a:endParaRPr lang="en-US" sz="1320" dirty="0"/>
           </a:p>
         </p:txBody>
       </p:sp>
@@ -15364,49 +15624,58 @@
           <a:ln/>
         </p:spPr>
         <p:txBody>
-          <a:bodyPr wrap="square" lIns="635" tIns="635" rIns="635" bIns="635" rtlCol="0" anchor="t">
+          <a:bodyPr wrap="square" lIns="1016" tIns="1016" rIns="1016" bIns="1016" rtlCol="0" anchor="t">
             <a:normAutofit/>
           </a:bodyPr>
           <a:lstStyle/>
           <a:p>
+            <a:pPr indent="0" marL="0">
+              <a:buNone/>
+            </a:pPr>
             <a:r>
               <a:rPr lang="en-US" sz="2100" dirty="0">
                 <a:solidFill>
-                  <a:srgbClr val="17364A"/>
-                </a:solidFill>
-                <a:latin typeface="Aptos" pitchFamily="34" charset="0"/>
-                <a:ea typeface="Aptos" pitchFamily="34" charset="-122"/>
-                <a:cs typeface="Aptos" pitchFamily="34" charset="-120"/>
-              </a:rPr>
-              <a:t>Machine learning is a set of methods that allow computer systems to identify patterns in data and use.</a:t>
+                  <a:srgbClr val="003A63"/>
+                </a:solidFill>
+                <a:latin typeface="Aptos" pitchFamily="34" charset="0"/>
+                <a:ea typeface="Aptos" pitchFamily="34" charset="-122"/>
+                <a:cs typeface="Aptos" pitchFamily="34" charset="-120"/>
+              </a:rPr>
+              <a:t>• Machine learning is a set of methods that allow computer systems to identify patterns in data.</a:t>
             </a:r>
             <a:endParaRPr lang="en-US" sz="2100" dirty="0"/>
           </a:p>
           <a:p>
+            <a:pPr indent="0" marL="0">
+              <a:buNone/>
+            </a:pPr>
             <a:r>
               <a:rPr lang="en-US" sz="2100" dirty="0">
                 <a:solidFill>
-                  <a:srgbClr val="17364A"/>
-                </a:solidFill>
-                <a:latin typeface="Aptos" pitchFamily="34" charset="0"/>
-                <a:ea typeface="Aptos" pitchFamily="34" charset="-122"/>
-                <a:cs typeface="Aptos" pitchFamily="34" charset="-120"/>
-              </a:rPr>
-              <a:t>In public health, machine learning may support surveillance triage, outbreak signal review, risk.</a:t>
+                  <a:srgbClr val="003A63"/>
+                </a:solidFill>
+                <a:latin typeface="Aptos" pitchFamily="34" charset="0"/>
+                <a:ea typeface="Aptos" pitchFamily="34" charset="-122"/>
+                <a:cs typeface="Aptos" pitchFamily="34" charset="-120"/>
+              </a:rPr>
+              <a:t>• In public health, machine learning may support surveillance triage, outbreak signal review,.</a:t>
             </a:r>
             <a:endParaRPr lang="en-US" sz="2100" dirty="0"/>
           </a:p>
           <a:p>
+            <a:pPr indent="0" marL="0">
+              <a:buNone/>
+            </a:pPr>
             <a:r>
               <a:rPr lang="en-US" sz="2100" dirty="0">
                 <a:solidFill>
-                  <a:srgbClr val="17364A"/>
-                </a:solidFill>
-                <a:latin typeface="Aptos" pitchFamily="34" charset="0"/>
-                <a:ea typeface="Aptos" pitchFamily="34" charset="-122"/>
-                <a:cs typeface="Aptos" pitchFamily="34" charset="-120"/>
-              </a:rPr>
-              <a:t>The purpose of this module is not to turn every learner into a data scientist.</a:t>
+                  <a:srgbClr val="003A63"/>
+                </a:solidFill>
+                <a:latin typeface="Aptos" pitchFamily="34" charset="0"/>
+                <a:ea typeface="Aptos" pitchFamily="34" charset="-122"/>
+                <a:cs typeface="Aptos" pitchFamily="34" charset="-120"/>
+              </a:rPr>
+              <a:t>• The purpose of this module is not to turn every learner into a data scientist.</a:t>
             </a:r>
             <a:endParaRPr lang="en-US" sz="2100" dirty="0"/>
           </a:p>
@@ -15486,17 +15755,17 @@
         </p:nvSpPr>
         <p:spPr>
           <a:xfrm>
-            <a:off x="7799832" y="1828800"/>
-            <a:ext cx="3145536" cy="685800"/>
-          </a:xfrm>
-          <a:prstGeom prst="rect">
-            <a:avLst/>
-          </a:prstGeom>
-          <a:noFill/>
-          <a:ln/>
-        </p:spPr>
-        <p:txBody>
-          <a:bodyPr wrap="square" lIns="0" tIns="0" rIns="0" bIns="0" rtlCol="0" anchor="t">
+            <a:off x="7799832" y="1801368"/>
+            <a:ext cx="3145536" cy="758952"/>
+          </a:xfrm>
+          <a:prstGeom prst="rect">
+            <a:avLst/>
+          </a:prstGeom>
+          <a:noFill/>
+          <a:ln/>
+        </p:spPr>
+        <p:txBody>
+          <a:bodyPr wrap="square" lIns="254" tIns="254" rIns="254" bIns="254" rtlCol="0" anchor="t">
             <a:normAutofit/>
           </a:bodyPr>
           <a:lstStyle/>
@@ -15505,7 +15774,7 @@
               <a:buNone/>
             </a:pPr>
             <a:r>
-              <a:rPr lang="en-US" sz="1550" dirty="0">
+              <a:rPr lang="en-US" sz="1320" dirty="0">
                 <a:solidFill>
                   <a:srgbClr val="17364A"/>
                 </a:solidFill>
@@ -15515,7 +15784,7 @@
               </a:rPr>
               <a:t>Machine learning is a set of methods that allow computer systems to identify patterns in data and use.</a:t>
             </a:r>
-            <a:endParaRPr lang="en-US" sz="1550" dirty="0"/>
+            <a:endParaRPr lang="en-US" sz="1320" dirty="0"/>
           </a:p>
         </p:txBody>
       </p:sp>
@@ -15603,13 +15872,16 @@
           <a:ln/>
         </p:spPr>
         <p:txBody>
-          <a:bodyPr wrap="square" lIns="254" tIns="254" rIns="254" bIns="254" rtlCol="0" anchor="t">
+          <a:bodyPr wrap="square" lIns="508" tIns="508" rIns="508" bIns="508" rtlCol="0" anchor="t">
             <a:normAutofit/>
           </a:bodyPr>
           <a:lstStyle/>
           <a:p>
-            <a:r>
-              <a:rPr lang="en-US" sz="1380" dirty="0">
+            <a:pPr indent="0" marL="0">
+              <a:buNone/>
+            </a:pPr>
+            <a:r>
+              <a:rPr lang="en-US" sz="1220" dirty="0">
                 <a:solidFill>
                   <a:srgbClr val="17364A"/>
                 </a:solidFill>
@@ -15617,13 +15889,16 @@
                 <a:ea typeface="Aptos" pitchFamily="34" charset="-122"/>
                 <a:cs typeface="Aptos" pitchFamily="34" charset="-120"/>
               </a:rPr>
-              <a:t>Machine learning is a set of methods that allow computer systems to identify patterns in.</a:t>
-            </a:r>
-            <a:endParaRPr lang="en-US" sz="1380" dirty="0"/>
-          </a:p>
-          <a:p>
-            <a:r>
-              <a:rPr lang="en-US" sz="1380" dirty="0">
+              <a:t>Machine learning is a set of methods that allow computer systems.</a:t>
+            </a:r>
+            <a:endParaRPr lang="en-US" sz="1220" dirty="0"/>
+          </a:p>
+          <a:p>
+            <a:pPr indent="0" marL="0">
+              <a:buNone/>
+            </a:pPr>
+            <a:r>
+              <a:rPr lang="en-US" sz="1220" dirty="0">
                 <a:solidFill>
                   <a:srgbClr val="17364A"/>
                 </a:solidFill>
@@ -15631,13 +15906,16 @@
                 <a:ea typeface="Aptos" pitchFamily="34" charset="-122"/>
                 <a:cs typeface="Aptos" pitchFamily="34" charset="-120"/>
               </a:rPr>
-              <a:t>In public health, machine learning may support surveillance triage, outbreak signal.</a:t>
-            </a:r>
-            <a:endParaRPr lang="en-US" sz="1380" dirty="0"/>
-          </a:p>
-          <a:p>
-            <a:r>
-              <a:rPr lang="en-US" sz="1380" dirty="0">
+              <a:t>In public health, machine learning may support surveillance.</a:t>
+            </a:r>
+            <a:endParaRPr lang="en-US" sz="1220" dirty="0"/>
+          </a:p>
+          <a:p>
+            <a:pPr indent="0" marL="0">
+              <a:buNone/>
+            </a:pPr>
+            <a:r>
+              <a:rPr lang="en-US" sz="1220" dirty="0">
                 <a:solidFill>
                   <a:srgbClr val="17364A"/>
                 </a:solidFill>
@@ -15645,9 +15923,9 @@
                 <a:ea typeface="Aptos" pitchFamily="34" charset="-122"/>
                 <a:cs typeface="Aptos" pitchFamily="34" charset="-120"/>
               </a:rPr>
-              <a:t>The purpose is to help public health informaticians, epidemiologists, and technologists.</a:t>
-            </a:r>
-            <a:endParaRPr lang="en-US" sz="1380" dirty="0"/>
+              <a:t>The purpose is to help public health informaticians,.</a:t>
+            </a:r>
+            <a:endParaRPr lang="en-US" sz="1220" dirty="0"/>
           </a:p>
         </p:txBody>
       </p:sp>
@@ -15725,17 +16003,17 @@
         </p:nvSpPr>
         <p:spPr>
           <a:xfrm>
-            <a:off x="7799832" y="5001768"/>
-            <a:ext cx="3145536" cy="502920"/>
-          </a:xfrm>
-          <a:prstGeom prst="rect">
-            <a:avLst/>
-          </a:prstGeom>
-          <a:noFill/>
-          <a:ln/>
-        </p:spPr>
-        <p:txBody>
-          <a:bodyPr wrap="square" lIns="0" tIns="0" rIns="0" bIns="0" rtlCol="0" anchor="t">
+            <a:off x="7799832" y="4974336"/>
+            <a:ext cx="3145536" cy="576072"/>
+          </a:xfrm>
+          <a:prstGeom prst="rect">
+            <a:avLst/>
+          </a:prstGeom>
+          <a:noFill/>
+          <a:ln/>
+        </p:spPr>
+        <p:txBody>
+          <a:bodyPr wrap="square" lIns="254" tIns="254" rIns="254" bIns="254" rtlCol="0" anchor="t">
             <a:normAutofit/>
           </a:bodyPr>
           <a:lstStyle/>
@@ -15744,7 +16022,7 @@
               <a:buNone/>
             </a:pPr>
             <a:r>
-              <a:rPr lang="en-US" sz="1550" dirty="0">
+              <a:rPr lang="en-US" sz="1320" dirty="0">
                 <a:solidFill>
                   <a:srgbClr val="17364A"/>
                 </a:solidFill>
@@ -15752,9 +16030,9 @@
                 <a:ea typeface="Aptos" pitchFamily="34" charset="-122"/>
                 <a:cs typeface="Aptos" pitchFamily="34" charset="-120"/>
               </a:rPr>
-              <a:t>Connect the concept to public health purpose, responsible use, required safeguards, documentation, and the next action a department should take.</a:t>
-            </a:r>
-            <a:endParaRPr lang="en-US" sz="1550" dirty="0"/>
+              <a:t>Connect the concept to public health purpose, responsible use, required safeguards, documentation, and the next action a.</a:t>
+            </a:r>
+            <a:endParaRPr lang="en-US" sz="1320" dirty="0"/>
           </a:p>
         </p:txBody>
       </p:sp>
@@ -16055,49 +16333,58 @@
           <a:ln/>
         </p:spPr>
         <p:txBody>
-          <a:bodyPr wrap="square" lIns="635" tIns="635" rIns="635" bIns="635" rtlCol="0" anchor="t">
+          <a:bodyPr wrap="square" lIns="1016" tIns="1016" rIns="1016" bIns="1016" rtlCol="0" anchor="t">
             <a:normAutofit/>
           </a:bodyPr>
           <a:lstStyle/>
           <a:p>
+            <a:pPr indent="0" marL="0">
+              <a:buNone/>
+            </a:pPr>
             <a:r>
               <a:rPr lang="en-US" sz="2100" dirty="0">
                 <a:solidFill>
-                  <a:srgbClr val="17364A"/>
-                </a:solidFill>
-                <a:latin typeface="Aptos" pitchFamily="34" charset="0"/>
-                <a:ea typeface="Aptos" pitchFamily="34" charset="-122"/>
-                <a:cs typeface="Aptos" pitchFamily="34" charset="-120"/>
-              </a:rPr>
-              <a:t>Machine learning matters for public health AI because many proposed tools rely on classification,.</a:t>
+                  <a:srgbClr val="003A63"/>
+                </a:solidFill>
+                <a:latin typeface="Aptos" pitchFamily="34" charset="0"/>
+                <a:ea typeface="Aptos" pitchFamily="34" charset="-122"/>
+                <a:cs typeface="Aptos" pitchFamily="34" charset="-120"/>
+              </a:rPr>
+              <a:t>• Machine learning matters for public health AI because many proposed tools rely on.</a:t>
             </a:r>
             <a:endParaRPr lang="en-US" sz="2100" dirty="0"/>
           </a:p>
           <a:p>
+            <a:pPr indent="0" marL="0">
+              <a:buNone/>
+            </a:pPr>
             <a:r>
               <a:rPr lang="en-US" sz="2100" dirty="0">
                 <a:solidFill>
-                  <a:srgbClr val="17364A"/>
-                </a:solidFill>
-                <a:latin typeface="Aptos" pitchFamily="34" charset="0"/>
-                <a:ea typeface="Aptos" pitchFamily="34" charset="-122"/>
-                <a:cs typeface="Aptos" pitchFamily="34" charset="-120"/>
-              </a:rPr>
-              <a:t>A surveillance team may want to classify incoming reports by urgency.</a:t>
+                  <a:srgbClr val="003A63"/>
+                </a:solidFill>
+                <a:latin typeface="Aptos" pitchFamily="34" charset="0"/>
+                <a:ea typeface="Aptos" pitchFamily="34" charset="-122"/>
+                <a:cs typeface="Aptos" pitchFamily="34" charset="-120"/>
+              </a:rPr>
+              <a:t>• A surveillance team may want to classify incoming reports by urgency.</a:t>
             </a:r>
             <a:endParaRPr lang="en-US" sz="2100" dirty="0"/>
           </a:p>
           <a:p>
+            <a:pPr indent="0" marL="0">
+              <a:buNone/>
+            </a:pPr>
             <a:r>
               <a:rPr lang="en-US" sz="2100" dirty="0">
                 <a:solidFill>
-                  <a:srgbClr val="17364A"/>
-                </a:solidFill>
-                <a:latin typeface="Aptos" pitchFamily="34" charset="0"/>
-                <a:ea typeface="Aptos" pitchFamily="34" charset="-122"/>
-                <a:cs typeface="Aptos" pitchFamily="34" charset="-120"/>
-              </a:rPr>
-              <a:t>An epidemiology team may want to detect unusual disease patterns.</a:t>
+                  <a:srgbClr val="003A63"/>
+                </a:solidFill>
+                <a:latin typeface="Aptos" pitchFamily="34" charset="0"/>
+                <a:ea typeface="Aptos" pitchFamily="34" charset="-122"/>
+                <a:cs typeface="Aptos" pitchFamily="34" charset="-120"/>
+              </a:rPr>
+              <a:t>• An epidemiology team may want to detect unusual disease patterns.</a:t>
             </a:r>
             <a:endParaRPr lang="en-US" sz="2100" dirty="0"/>
           </a:p>
@@ -16177,17 +16464,17 @@
         </p:nvSpPr>
         <p:spPr>
           <a:xfrm>
-            <a:off x="7799832" y="1828800"/>
-            <a:ext cx="3145536" cy="685800"/>
-          </a:xfrm>
-          <a:prstGeom prst="rect">
-            <a:avLst/>
-          </a:prstGeom>
-          <a:noFill/>
-          <a:ln/>
-        </p:spPr>
-        <p:txBody>
-          <a:bodyPr wrap="square" lIns="0" tIns="0" rIns="0" bIns="0" rtlCol="0" anchor="t">
+            <a:off x="7799832" y="1801368"/>
+            <a:ext cx="3145536" cy="758952"/>
+          </a:xfrm>
+          <a:prstGeom prst="rect">
+            <a:avLst/>
+          </a:prstGeom>
+          <a:noFill/>
+          <a:ln/>
+        </p:spPr>
+        <p:txBody>
+          <a:bodyPr wrap="square" lIns="254" tIns="254" rIns="254" bIns="254" rtlCol="0" anchor="t">
             <a:normAutofit/>
           </a:bodyPr>
           <a:lstStyle/>
@@ -16196,7 +16483,7 @@
               <a:buNone/>
             </a:pPr>
             <a:r>
-              <a:rPr lang="en-US" sz="1550" dirty="0">
+              <a:rPr lang="en-US" sz="1320" dirty="0">
                 <a:solidFill>
                   <a:srgbClr val="17364A"/>
                 </a:solidFill>
@@ -16206,7 +16493,7 @@
               </a:rPr>
               <a:t>Machine learning matters for public health AI because many proposed tools rely on classification,.</a:t>
             </a:r>
-            <a:endParaRPr lang="en-US" sz="1550" dirty="0"/>
+            <a:endParaRPr lang="en-US" sz="1320" dirty="0"/>
           </a:p>
         </p:txBody>
       </p:sp>
@@ -16294,13 +16581,16 @@
           <a:ln/>
         </p:spPr>
         <p:txBody>
-          <a:bodyPr wrap="square" lIns="254" tIns="254" rIns="254" bIns="254" rtlCol="0" anchor="t">
+          <a:bodyPr wrap="square" lIns="508" tIns="508" rIns="508" bIns="508" rtlCol="0" anchor="t">
             <a:normAutofit/>
           </a:bodyPr>
           <a:lstStyle/>
           <a:p>
-            <a:r>
-              <a:rPr lang="en-US" sz="1380" dirty="0">
+            <a:pPr indent="0" marL="0">
+              <a:buNone/>
+            </a:pPr>
+            <a:r>
+              <a:rPr lang="en-US" sz="1220" dirty="0">
                 <a:solidFill>
                   <a:srgbClr val="17364A"/>
                 </a:solidFill>
@@ -16308,13 +16598,16 @@
                 <a:ea typeface="Aptos" pitchFamily="34" charset="-122"/>
                 <a:cs typeface="Aptos" pitchFamily="34" charset="-120"/>
               </a:rPr>
-              <a:t>Machine learning matters for public health AI because many proposed tools rely on.</a:t>
-            </a:r>
-            <a:endParaRPr lang="en-US" sz="1380" dirty="0"/>
-          </a:p>
-          <a:p>
-            <a:r>
-              <a:rPr lang="en-US" sz="1380" dirty="0">
+              <a:t>Machine learning matters for public health AI because many.</a:t>
+            </a:r>
+            <a:endParaRPr lang="en-US" sz="1220" dirty="0"/>
+          </a:p>
+          <a:p>
+            <a:pPr indent="0" marL="0">
+              <a:buNone/>
+            </a:pPr>
+            <a:r>
+              <a:rPr lang="en-US" sz="1220" dirty="0">
                 <a:solidFill>
                   <a:srgbClr val="17364A"/>
                 </a:solidFill>
@@ -16324,11 +16617,14 @@
               </a:rPr>
               <a:t>A program may want to prioritize outreach based on predicted risk.</a:t>
             </a:r>
-            <a:endParaRPr lang="en-US" sz="1380" dirty="0"/>
-          </a:p>
-          <a:p>
-            <a:r>
-              <a:rPr lang="en-US" sz="1380" dirty="0">
+            <a:endParaRPr lang="en-US" sz="1220" dirty="0"/>
+          </a:p>
+          <a:p>
+            <a:pPr indent="0" marL="0">
+              <a:buNone/>
+            </a:pPr>
+            <a:r>
+              <a:rPr lang="en-US" sz="1220" dirty="0">
                 <a:solidFill>
                   <a:srgbClr val="17364A"/>
                 </a:solidFill>
@@ -16336,9 +16632,9 @@
                 <a:ea typeface="Aptos" pitchFamily="34" charset="-122"/>
                 <a:cs typeface="Aptos" pitchFamily="34" charset="-120"/>
               </a:rPr>
-              <a:t>Each of these uses can affect who receives attention, services, investigation, or resources.</a:t>
-            </a:r>
-            <a:endParaRPr lang="en-US" sz="1380" dirty="0"/>
+              <a:t>Each of these uses can affect who receives attention, services,.</a:t>
+            </a:r>
+            <a:endParaRPr lang="en-US" sz="1220" dirty="0"/>
           </a:p>
         </p:txBody>
       </p:sp>
@@ -16416,17 +16712,17 @@
         </p:nvSpPr>
         <p:spPr>
           <a:xfrm>
-            <a:off x="7799832" y="5001768"/>
-            <a:ext cx="3145536" cy="502920"/>
-          </a:xfrm>
-          <a:prstGeom prst="rect">
-            <a:avLst/>
-          </a:prstGeom>
-          <a:noFill/>
-          <a:ln/>
-        </p:spPr>
-        <p:txBody>
-          <a:bodyPr wrap="square" lIns="0" tIns="0" rIns="0" bIns="0" rtlCol="0" anchor="t">
+            <a:off x="7799832" y="4974336"/>
+            <a:ext cx="3145536" cy="576072"/>
+          </a:xfrm>
+          <a:prstGeom prst="rect">
+            <a:avLst/>
+          </a:prstGeom>
+          <a:noFill/>
+          <a:ln/>
+        </p:spPr>
+        <p:txBody>
+          <a:bodyPr wrap="square" lIns="254" tIns="254" rIns="254" bIns="254" rtlCol="0" anchor="t">
             <a:normAutofit/>
           </a:bodyPr>
           <a:lstStyle/>
@@ -16435,7 +16731,7 @@
               <a:buNone/>
             </a:pPr>
             <a:r>
-              <a:rPr lang="en-US" sz="1550" dirty="0">
+              <a:rPr lang="en-US" sz="1320" dirty="0">
                 <a:solidFill>
                   <a:srgbClr val="17364A"/>
                 </a:solidFill>
@@ -16443,9 +16739,9 @@
                 <a:ea typeface="Aptos" pitchFamily="34" charset="-122"/>
                 <a:cs typeface="Aptos" pitchFamily="34" charset="-120"/>
               </a:rPr>
-              <a:t>Connect the concept to public health purpose, responsible use, required safeguards, documentation, and the next action a department should take.</a:t>
-            </a:r>
-            <a:endParaRPr lang="en-US" sz="1550" dirty="0"/>
+              <a:t>Connect the concept to public health purpose, responsible use, required safeguards, documentation, and the next action a.</a:t>
+            </a:r>
+            <a:endParaRPr lang="en-US" sz="1320" dirty="0"/>
           </a:p>
         </p:txBody>
       </p:sp>
@@ -16746,49 +17042,58 @@
           <a:ln/>
         </p:spPr>
         <p:txBody>
-          <a:bodyPr wrap="square" lIns="635" tIns="635" rIns="635" bIns="635" rtlCol="0" anchor="t">
+          <a:bodyPr wrap="square" lIns="1016" tIns="1016" rIns="1016" bIns="1016" rtlCol="0" anchor="t">
             <a:normAutofit/>
           </a:bodyPr>
           <a:lstStyle/>
           <a:p>
+            <a:pPr indent="0" marL="0">
+              <a:buNone/>
+            </a:pPr>
             <a:r>
               <a:rPr lang="en-US" sz="2100" dirty="0">
                 <a:solidFill>
-                  <a:srgbClr val="17364A"/>
-                </a:solidFill>
-                <a:latin typeface="Aptos" pitchFamily="34" charset="0"/>
-                <a:ea typeface="Aptos" pitchFamily="34" charset="-122"/>
-                <a:cs typeface="Aptos" pitchFamily="34" charset="-120"/>
-              </a:rPr>
-              <a:t>A health department may consider a machine learning model to classify environmental health complaints.</a:t>
+                  <a:srgbClr val="003A63"/>
+                </a:solidFill>
+                <a:latin typeface="Aptos" pitchFamily="34" charset="0"/>
+                <a:ea typeface="Aptos" pitchFamily="34" charset="-122"/>
+                <a:cs typeface="Aptos" pitchFamily="34" charset="-120"/>
+              </a:rPr>
+              <a:t>• A health department may consider a machine learning model to classify environmental health.</a:t>
             </a:r>
             <a:endParaRPr lang="en-US" sz="2100" dirty="0"/>
           </a:p>
           <a:p>
+            <a:pPr indent="0" marL="0">
+              <a:buNone/>
+            </a:pPr>
             <a:r>
               <a:rPr lang="en-US" sz="2100" dirty="0">
                 <a:solidFill>
-                  <a:srgbClr val="17364A"/>
-                </a:solidFill>
-                <a:latin typeface="Aptos" pitchFamily="34" charset="0"/>
-                <a:ea typeface="Aptos" pitchFamily="34" charset="-122"/>
-                <a:cs typeface="Aptos" pitchFamily="34" charset="-120"/>
-              </a:rPr>
-              <a:t>Historical complaint text, location, facility type, prior violations, and resolution outcomes may be.</a:t>
+                  <a:srgbClr val="003A63"/>
+                </a:solidFill>
+                <a:latin typeface="Aptos" pitchFamily="34" charset="0"/>
+                <a:ea typeface="Aptos" pitchFamily="34" charset="-122"/>
+                <a:cs typeface="Aptos" pitchFamily="34" charset="-120"/>
+              </a:rPr>
+              <a:t>• Historical complaint text, location, facility type, prior violations, and resolution outcomes.</a:t>
             </a:r>
             <a:endParaRPr lang="en-US" sz="2100" dirty="0"/>
           </a:p>
           <a:p>
+            <a:pPr indent="0" marL="0">
+              <a:buNone/>
+            </a:pPr>
             <a:r>
               <a:rPr lang="en-US" sz="2100" dirty="0">
                 <a:solidFill>
-                  <a:srgbClr val="17364A"/>
-                </a:solidFill>
-                <a:latin typeface="Aptos" pitchFamily="34" charset="0"/>
-                <a:ea typeface="Aptos" pitchFamily="34" charset="-122"/>
-                <a:cs typeface="Aptos" pitchFamily="34" charset="-120"/>
-              </a:rPr>
-              <a:t>The label might be whether the complaint was ultimately assigned high priority by trained staff.</a:t>
+                  <a:srgbClr val="003A63"/>
+                </a:solidFill>
+                <a:latin typeface="Aptos" pitchFamily="34" charset="0"/>
+                <a:ea typeface="Aptos" pitchFamily="34" charset="-122"/>
+                <a:cs typeface="Aptos" pitchFamily="34" charset="-120"/>
+              </a:rPr>
+              <a:t>• The label might be whether the complaint was ultimately assigned high priority by trained staff.</a:t>
             </a:r>
             <a:endParaRPr lang="en-US" sz="2100" dirty="0"/>
           </a:p>
@@ -16868,17 +17173,17 @@
         </p:nvSpPr>
         <p:spPr>
           <a:xfrm>
-            <a:off x="7799832" y="1828800"/>
-            <a:ext cx="3145536" cy="685800"/>
-          </a:xfrm>
-          <a:prstGeom prst="rect">
-            <a:avLst/>
-          </a:prstGeom>
-          <a:noFill/>
-          <a:ln/>
-        </p:spPr>
-        <p:txBody>
-          <a:bodyPr wrap="square" lIns="0" tIns="0" rIns="0" bIns="0" rtlCol="0" anchor="t">
+            <a:off x="7799832" y="1801368"/>
+            <a:ext cx="3145536" cy="758952"/>
+          </a:xfrm>
+          <a:prstGeom prst="rect">
+            <a:avLst/>
+          </a:prstGeom>
+          <a:noFill/>
+          <a:ln/>
+        </p:spPr>
+        <p:txBody>
+          <a:bodyPr wrap="square" lIns="254" tIns="254" rIns="254" bIns="254" rtlCol="0" anchor="t">
             <a:normAutofit/>
           </a:bodyPr>
           <a:lstStyle/>
@@ -16887,7 +17192,7 @@
               <a:buNone/>
             </a:pPr>
             <a:r>
-              <a:rPr lang="en-US" sz="1550" dirty="0">
+              <a:rPr lang="en-US" sz="1320" dirty="0">
                 <a:solidFill>
                   <a:srgbClr val="17364A"/>
                 </a:solidFill>
@@ -16897,7 +17202,7 @@
               </a:rPr>
               <a:t>A health department may consider a machine learning model to classify environmental health complaints.</a:t>
             </a:r>
-            <a:endParaRPr lang="en-US" sz="1550" dirty="0"/>
+            <a:endParaRPr lang="en-US" sz="1320" dirty="0"/>
           </a:p>
         </p:txBody>
       </p:sp>
@@ -16985,13 +17290,16 @@
           <a:ln/>
         </p:spPr>
         <p:txBody>
-          <a:bodyPr wrap="square" lIns="254" tIns="254" rIns="254" bIns="254" rtlCol="0" anchor="t">
+          <a:bodyPr wrap="square" lIns="508" tIns="508" rIns="508" bIns="508" rtlCol="0" anchor="t">
             <a:normAutofit/>
           </a:bodyPr>
           <a:lstStyle/>
           <a:p>
-            <a:r>
-              <a:rPr lang="en-US" sz="1380" dirty="0">
+            <a:pPr indent="0" marL="0">
+              <a:buNone/>
+            </a:pPr>
+            <a:r>
+              <a:rPr lang="en-US" sz="1220" dirty="0">
                 <a:solidFill>
                   <a:srgbClr val="17364A"/>
                 </a:solidFill>
@@ -16999,13 +17307,16 @@
                 <a:ea typeface="Aptos" pitchFamily="34" charset="-122"/>
                 <a:cs typeface="Aptos" pitchFamily="34" charset="-120"/>
               </a:rPr>
-              <a:t>A health department may consider a machine learning model to classify environmental health.</a:t>
-            </a:r>
-            <a:endParaRPr lang="en-US" sz="1380" dirty="0"/>
-          </a:p>
-          <a:p>
-            <a:r>
-              <a:rPr lang="en-US" sz="1380" dirty="0">
+              <a:t>A health department may consider a machine learning model to.</a:t>
+            </a:r>
+            <a:endParaRPr lang="en-US" sz="1220" dirty="0"/>
+          </a:p>
+          <a:p>
+            <a:pPr indent="0" marL="0">
+              <a:buNone/>
+            </a:pPr>
+            <a:r>
+              <a:rPr lang="en-US" sz="1220" dirty="0">
                 <a:solidFill>
                   <a:srgbClr val="17364A"/>
                 </a:solidFill>
@@ -17013,13 +17324,16 @@
                 <a:ea typeface="Aptos" pitchFamily="34" charset="-122"/>
                 <a:cs typeface="Aptos" pitchFamily="34" charset="-120"/>
               </a:rPr>
-              <a:t>Historical complaint text, location, facility type, prior violations, and resolution.</a:t>
-            </a:r>
-            <a:endParaRPr lang="en-US" sz="1380" dirty="0"/>
-          </a:p>
-          <a:p>
-            <a:r>
-              <a:rPr lang="en-US" sz="1380" dirty="0">
+              <a:t>Historical complaint text, location, facility type, prior.</a:t>
+            </a:r>
+            <a:endParaRPr lang="en-US" sz="1220" dirty="0"/>
+          </a:p>
+          <a:p>
+            <a:pPr indent="0" marL="0">
+              <a:buNone/>
+            </a:pPr>
+            <a:r>
+              <a:rPr lang="en-US" sz="1220" dirty="0">
                 <a:solidFill>
                   <a:srgbClr val="17364A"/>
                 </a:solidFill>
@@ -17027,9 +17341,9 @@
                 <a:ea typeface="Aptos" pitchFamily="34" charset="-122"/>
                 <a:cs typeface="Aptos" pitchFamily="34" charset="-120"/>
               </a:rPr>
-              <a:t>This sounds useful, but the label may reflect staffing capacity or historical.</a:t>
-            </a:r>
-            <a:endParaRPr lang="en-US" sz="1380" dirty="0"/>
+              <a:t>This sounds useful, but the label may reflect staffing capacity or.</a:t>
+            </a:r>
+            <a:endParaRPr lang="en-US" sz="1220" dirty="0"/>
           </a:p>
         </p:txBody>
       </p:sp>
@@ -17107,17 +17421,17 @@
         </p:nvSpPr>
         <p:spPr>
           <a:xfrm>
-            <a:off x="7799832" y="5001768"/>
-            <a:ext cx="3145536" cy="502920"/>
-          </a:xfrm>
-          <a:prstGeom prst="rect">
-            <a:avLst/>
-          </a:prstGeom>
-          <a:noFill/>
-          <a:ln/>
-        </p:spPr>
-        <p:txBody>
-          <a:bodyPr wrap="square" lIns="0" tIns="0" rIns="0" bIns="0" rtlCol="0" anchor="t">
+            <a:off x="7799832" y="4974336"/>
+            <a:ext cx="3145536" cy="576072"/>
+          </a:xfrm>
+          <a:prstGeom prst="rect">
+            <a:avLst/>
+          </a:prstGeom>
+          <a:noFill/>
+          <a:ln/>
+        </p:spPr>
+        <p:txBody>
+          <a:bodyPr wrap="square" lIns="254" tIns="254" rIns="254" bIns="254" rtlCol="0" anchor="t">
             <a:normAutofit/>
           </a:bodyPr>
           <a:lstStyle/>
@@ -17126,7 +17440,7 @@
               <a:buNone/>
             </a:pPr>
             <a:r>
-              <a:rPr lang="en-US" sz="1550" dirty="0">
+              <a:rPr lang="en-US" sz="1320" dirty="0">
                 <a:solidFill>
                   <a:srgbClr val="17364A"/>
                 </a:solidFill>
@@ -17134,9 +17448,9 @@
                 <a:ea typeface="Aptos" pitchFamily="34" charset="-122"/>
                 <a:cs typeface="Aptos" pitchFamily="34" charset="-120"/>
               </a:rPr>
-              <a:t>Connect the concept to public health purpose, responsible use, required safeguards, documentation, and the next action a department should take.</a:t>
-            </a:r>
-            <a:endParaRPr lang="en-US" sz="1550" dirty="0"/>
+              <a:t>Connect the concept to public health purpose, responsible use, required safeguards, documentation, and the next action a.</a:t>
+            </a:r>
+            <a:endParaRPr lang="en-US" sz="1320" dirty="0"/>
           </a:p>
         </p:txBody>
       </p:sp>

--- a/downloads/presentations/modules/anl-210.pptx
+++ b/downloads/presentations/modules/anl-210.pptx
@@ -3419,11 +3419,11 @@
         <p:spPr>
           <a:xfrm>
             <a:off x="7635240" y="1325880"/>
-            <a:ext cx="3474720" cy="1325880"/>
+            <a:ext cx="3474720" cy="1255471"/>
           </a:xfrm>
           <a:prstGeom prst="roundRect">
             <a:avLst>
-              <a:gd name="adj" fmla="val 8276"/>
+              <a:gd name="adj" fmla="val 8740"/>
             </a:avLst>
           </a:prstGeom>
           <a:solidFill>
@@ -3485,7 +3485,7 @@
         <p:spPr>
           <a:xfrm>
             <a:off x="7799832" y="1801368"/>
-            <a:ext cx="3145536" cy="758952"/>
+            <a:ext cx="3145536" cy="688543"/>
           </a:xfrm>
           <a:prstGeom prst="rect">
             <a:avLst/>
@@ -3525,12 +3525,12 @@
         </p:nvSpPr>
         <p:spPr>
           <a:xfrm>
-            <a:off x="7635240" y="2788920"/>
-            <a:ext cx="3474720" cy="1536192"/>
+            <a:off x="7635240" y="2718511"/>
+            <a:ext cx="3474720" cy="1328623"/>
           </a:xfrm>
           <a:prstGeom prst="roundRect">
             <a:avLst>
-              <a:gd name="adj" fmla="val 7143"/>
+              <a:gd name="adj" fmla="val 8259"/>
             </a:avLst>
           </a:prstGeom>
           <a:solidFill>
@@ -3552,8 +3552,8 @@
         </p:nvSpPr>
         <p:spPr>
           <a:xfrm>
-            <a:off x="7799832" y="2935224"/>
-            <a:ext cx="3145536" cy="256032"/>
+            <a:off x="7799832" y="2846527"/>
+            <a:ext cx="3145536" cy="237744"/>
           </a:xfrm>
           <a:prstGeom prst="rect">
             <a:avLst/>
@@ -3569,7 +3569,7 @@
               <a:buNone/>
             </a:pPr>
             <a:r>
-              <a:rPr lang="en-US" sz="1300" b="1" dirty="0">
+              <a:rPr lang="en-US" sz="1250" b="1" dirty="0">
                 <a:solidFill>
                   <a:srgbClr val="0068B7"/>
                 </a:solidFill>
@@ -3577,101 +3577,317 @@
                 <a:ea typeface="Aptos" pitchFamily="34" charset="-122"/>
                 <a:cs typeface="Aptos" pitchFamily="34" charset="-120"/>
               </a:rPr>
-              <a:t>Concept checkpoints</a:t>
-            </a:r>
-            <a:endParaRPr lang="en-US" sz="1300" dirty="0"/>
-          </a:p>
-        </p:txBody>
-      </p:sp>
-      <p:sp>
-        <p:nvSpPr>
-          <p:cNvPr id="15" name="Text 13"/>
-          <p:cNvSpPr/>
-          <p:nvPr/>
-        </p:nvSpPr>
-        <p:spPr>
-          <a:xfrm>
-            <a:off x="7818120" y="3300984"/>
-            <a:ext cx="3090672" cy="877824"/>
-          </a:xfrm>
-          <a:prstGeom prst="rect">
-            <a:avLst/>
-          </a:prstGeom>
-          <a:noFill/>
-          <a:ln/>
-        </p:spPr>
-        <p:txBody>
-          <a:bodyPr wrap="square" lIns="508" tIns="508" rIns="508" bIns="508" rtlCol="0" anchor="t">
+              <a:t>Data-to-decision flow</a:t>
+            </a:r>
+            <a:endParaRPr lang="en-US" sz="1250" dirty="0"/>
+          </a:p>
+        </p:txBody>
+      </p:sp>
+      <p:sp>
+        <p:nvSpPr>
+          <p:cNvPr id="15" name="Shape 13"/>
+          <p:cNvSpPr/>
+          <p:nvPr/>
+        </p:nvSpPr>
+        <p:spPr>
+          <a:xfrm>
+            <a:off x="8763000" y="3399739"/>
+            <a:ext cx="164592" cy="0"/>
+          </a:xfrm>
+          <a:prstGeom prst="line">
+            <a:avLst/>
+          </a:prstGeom>
+          <a:noFill/>
+          <a:ln w="15240">
+            <a:solidFill>
+              <a:srgbClr val="8ABBD8"/>
+            </a:solidFill>
+            <a:prstDash val="solid"/>
+          </a:ln>
+        </p:spPr>
+      </p:sp>
+      <p:sp>
+        <p:nvSpPr>
+          <p:cNvPr id="16" name="Shape 14"/>
+          <p:cNvSpPr/>
+          <p:nvPr/>
+        </p:nvSpPr>
+        <p:spPr>
+          <a:xfrm>
+            <a:off x="7872984" y="3248863"/>
+            <a:ext cx="890016" cy="301752"/>
+          </a:xfrm>
+          <a:prstGeom prst="roundRect">
+            <a:avLst>
+              <a:gd name="adj" fmla="val 24242"/>
+            </a:avLst>
+          </a:prstGeom>
+          <a:solidFill>
+            <a:srgbClr val="0068B7"/>
+          </a:solidFill>
+          <a:ln w="12700">
+            <a:solidFill>
+              <a:srgbClr val="0068B7"/>
+            </a:solidFill>
+            <a:prstDash val="solid"/>
+          </a:ln>
+        </p:spPr>
+      </p:sp>
+      <p:sp>
+        <p:nvSpPr>
+          <p:cNvPr id="17" name="Text 15"/>
+          <p:cNvSpPr/>
+          <p:nvPr/>
+        </p:nvSpPr>
+        <p:spPr>
+          <a:xfrm>
+            <a:off x="7909560" y="3322015"/>
+            <a:ext cx="816864" cy="146304"/>
+          </a:xfrm>
+          <a:prstGeom prst="rect">
+            <a:avLst/>
+          </a:prstGeom>
+          <a:noFill/>
+          <a:ln/>
+        </p:spPr>
+        <p:txBody>
+          <a:bodyPr wrap="square" lIns="0" tIns="0" rIns="0" bIns="0" rtlCol="0" anchor="ctr">
             <a:normAutofit/>
           </a:bodyPr>
           <a:lstStyle/>
           <a:p>
-            <a:pPr indent="0" marL="0">
-              <a:buNone/>
-            </a:pPr>
-            <a:r>
-              <a:rPr lang="en-US" sz="1220" dirty="0">
-                <a:solidFill>
-                  <a:srgbClr val="17364A"/>
-                </a:solidFill>
-                <a:latin typeface="Aptos" pitchFamily="34" charset="0"/>
-                <a:ea typeface="Aptos" pitchFamily="34" charset="-122"/>
-                <a:cs typeface="Aptos" pitchFamily="34" charset="-120"/>
-              </a:rPr>
-              <a:t>The task should be specific enough to test. “Use AI to improve.</a:t>
-            </a:r>
-            <a:endParaRPr lang="en-US" sz="1220" dirty="0"/>
-          </a:p>
-          <a:p>
-            <a:pPr indent="0" marL="0">
-              <a:buNone/>
-            </a:pPr>
-            <a:r>
-              <a:rPr lang="en-US" sz="1220" dirty="0">
-                <a:solidFill>
-                  <a:srgbClr val="17364A"/>
-                </a:solidFill>
-                <a:latin typeface="Aptos" pitchFamily="34" charset="0"/>
-                <a:ea typeface="Aptos" pitchFamily="34" charset="-122"/>
-                <a:cs typeface="Aptos" pitchFamily="34" charset="-120"/>
-              </a:rPr>
-              <a:t>A clear task allows staff to define the target label, required.</a:t>
-            </a:r>
-            <a:endParaRPr lang="en-US" sz="1220" dirty="0"/>
-          </a:p>
-          <a:p>
-            <a:pPr indent="0" marL="0">
-              <a:buNone/>
-            </a:pPr>
-            <a:r>
-              <a:rPr lang="en-US" sz="1220" dirty="0">
-                <a:solidFill>
-                  <a:srgbClr val="17364A"/>
-                </a:solidFill>
-                <a:latin typeface="Aptos" pitchFamily="34" charset="0"/>
-                <a:ea typeface="Aptos" pitchFamily="34" charset="-122"/>
-                <a:cs typeface="Aptos" pitchFamily="34" charset="-120"/>
-              </a:rPr>
-              <a:t>Data preparation is often the most important and time-consuming.</a:t>
-            </a:r>
-            <a:endParaRPr lang="en-US" sz="1220" dirty="0"/>
-          </a:p>
-        </p:txBody>
-      </p:sp>
-      <p:sp>
-        <p:nvSpPr>
-          <p:cNvPr id="16" name="Shape 14"/>
-          <p:cNvSpPr/>
-          <p:nvPr/>
-        </p:nvSpPr>
-        <p:spPr>
-          <a:xfrm>
-            <a:off x="7635240" y="4498848"/>
-            <a:ext cx="3474720" cy="1143000"/>
+            <a:pPr algn="ctr" indent="0" marL="0">
+              <a:buNone/>
+            </a:pPr>
+            <a:r>
+              <a:rPr lang="en-US" sz="880" b="1" dirty="0">
+                <a:solidFill>
+                  <a:srgbClr val="FFFFFF"/>
+                </a:solidFill>
+                <a:latin typeface="Aptos" pitchFamily="34" charset="0"/>
+                <a:ea typeface="Aptos" pitchFamily="34" charset="-122"/>
+                <a:cs typeface="Aptos" pitchFamily="34" charset="-120"/>
+              </a:rPr>
+              <a:t>Data</a:t>
+            </a:r>
+            <a:endParaRPr lang="en-US" sz="880" dirty="0"/>
+          </a:p>
+        </p:txBody>
+      </p:sp>
+      <p:sp>
+        <p:nvSpPr>
+          <p:cNvPr id="18" name="Shape 16"/>
+          <p:cNvSpPr/>
+          <p:nvPr/>
+        </p:nvSpPr>
+        <p:spPr>
+          <a:xfrm>
+            <a:off x="9817608" y="3399739"/>
+            <a:ext cx="164592" cy="0"/>
+          </a:xfrm>
+          <a:prstGeom prst="line">
+            <a:avLst/>
+          </a:prstGeom>
+          <a:noFill/>
+          <a:ln w="15240">
+            <a:solidFill>
+              <a:srgbClr val="8ABBD8"/>
+            </a:solidFill>
+            <a:prstDash val="solid"/>
+          </a:ln>
+        </p:spPr>
+      </p:sp>
+      <p:sp>
+        <p:nvSpPr>
+          <p:cNvPr id="19" name="Shape 17"/>
+          <p:cNvSpPr/>
+          <p:nvPr/>
+        </p:nvSpPr>
+        <p:spPr>
+          <a:xfrm>
+            <a:off x="8927592" y="3248863"/>
+            <a:ext cx="890016" cy="301752"/>
           </a:xfrm>
           <a:prstGeom prst="roundRect">
             <a:avLst>
-              <a:gd name="adj" fmla="val 9600"/>
+              <a:gd name="adj" fmla="val 24242"/>
+            </a:avLst>
+          </a:prstGeom>
+          <a:solidFill>
+            <a:srgbClr val="2F8A28"/>
+          </a:solidFill>
+          <a:ln w="12700">
+            <a:solidFill>
+              <a:srgbClr val="2F8A28"/>
+            </a:solidFill>
+            <a:prstDash val="solid"/>
+          </a:ln>
+        </p:spPr>
+      </p:sp>
+      <p:sp>
+        <p:nvSpPr>
+          <p:cNvPr id="20" name="Text 18"/>
+          <p:cNvSpPr/>
+          <p:nvPr/>
+        </p:nvSpPr>
+        <p:spPr>
+          <a:xfrm>
+            <a:off x="8964168" y="3322015"/>
+            <a:ext cx="816864" cy="146304"/>
+          </a:xfrm>
+          <a:prstGeom prst="rect">
+            <a:avLst/>
+          </a:prstGeom>
+          <a:noFill/>
+          <a:ln/>
+        </p:spPr>
+        <p:txBody>
+          <a:bodyPr wrap="square" lIns="0" tIns="0" rIns="0" bIns="0" rtlCol="0" anchor="ctr">
+            <a:normAutofit/>
+          </a:bodyPr>
+          <a:lstStyle/>
+          <a:p>
+            <a:pPr algn="ctr" indent="0" marL="0">
+              <a:buNone/>
+            </a:pPr>
+            <a:r>
+              <a:rPr lang="en-US" sz="880" b="1" dirty="0">
+                <a:solidFill>
+                  <a:srgbClr val="FFFFFF"/>
+                </a:solidFill>
+                <a:latin typeface="Aptos" pitchFamily="34" charset="0"/>
+                <a:ea typeface="Aptos" pitchFamily="34" charset="-122"/>
+                <a:cs typeface="Aptos" pitchFamily="34" charset="-120"/>
+              </a:rPr>
+              <a:t>Analysis</a:t>
+            </a:r>
+            <a:endParaRPr lang="en-US" sz="880" dirty="0"/>
+          </a:p>
+        </p:txBody>
+      </p:sp>
+      <p:sp>
+        <p:nvSpPr>
+          <p:cNvPr id="21" name="Shape 19"/>
+          <p:cNvSpPr/>
+          <p:nvPr/>
+        </p:nvSpPr>
+        <p:spPr>
+          <a:xfrm>
+            <a:off x="9982200" y="3248863"/>
+            <a:ext cx="890016" cy="301752"/>
+          </a:xfrm>
+          <a:prstGeom prst="roundRect">
+            <a:avLst>
+              <a:gd name="adj" fmla="val 24242"/>
+            </a:avLst>
+          </a:prstGeom>
+          <a:solidFill>
+            <a:srgbClr val="6A4CA3"/>
+          </a:solidFill>
+          <a:ln w="12700">
+            <a:solidFill>
+              <a:srgbClr val="6A4CA3"/>
+            </a:solidFill>
+            <a:prstDash val="solid"/>
+          </a:ln>
+        </p:spPr>
+      </p:sp>
+      <p:sp>
+        <p:nvSpPr>
+          <p:cNvPr id="22" name="Text 20"/>
+          <p:cNvSpPr/>
+          <p:nvPr/>
+        </p:nvSpPr>
+        <p:spPr>
+          <a:xfrm>
+            <a:off x="10018776" y="3322015"/>
+            <a:ext cx="816864" cy="146304"/>
+          </a:xfrm>
+          <a:prstGeom prst="rect">
+            <a:avLst/>
+          </a:prstGeom>
+          <a:noFill/>
+          <a:ln/>
+        </p:spPr>
+        <p:txBody>
+          <a:bodyPr wrap="square" lIns="0" tIns="0" rIns="0" bIns="0" rtlCol="0" anchor="ctr">
+            <a:normAutofit/>
+          </a:bodyPr>
+          <a:lstStyle/>
+          <a:p>
+            <a:pPr algn="ctr" indent="0" marL="0">
+              <a:buNone/>
+            </a:pPr>
+            <a:r>
+              <a:rPr lang="en-US" sz="880" b="1" dirty="0">
+                <a:solidFill>
+                  <a:srgbClr val="FFFFFF"/>
+                </a:solidFill>
+                <a:latin typeface="Aptos" pitchFamily="34" charset="0"/>
+                <a:ea typeface="Aptos" pitchFamily="34" charset="-122"/>
+                <a:cs typeface="Aptos" pitchFamily="34" charset="-120"/>
+              </a:rPr>
+              <a:t>Review</a:t>
+            </a:r>
+            <a:endParaRPr lang="en-US" sz="880" dirty="0"/>
+          </a:p>
+        </p:txBody>
+      </p:sp>
+      <p:sp>
+        <p:nvSpPr>
+          <p:cNvPr id="23" name="Text 21"/>
+          <p:cNvSpPr/>
+          <p:nvPr/>
+        </p:nvSpPr>
+        <p:spPr>
+          <a:xfrm>
+            <a:off x="7854696" y="3742639"/>
+            <a:ext cx="3035808" cy="158191"/>
+          </a:xfrm>
+          <a:prstGeom prst="rect">
+            <a:avLst/>
+          </a:prstGeom>
+          <a:noFill/>
+          <a:ln/>
+        </p:spPr>
+        <p:txBody>
+          <a:bodyPr wrap="square" lIns="254" tIns="254" rIns="254" bIns="254" rtlCol="0" anchor="t">
+            <a:normAutofit/>
+          </a:bodyPr>
+          <a:lstStyle/>
+          <a:p>
+            <a:pPr indent="0" marL="0">
+              <a:buNone/>
+            </a:pPr>
+            <a:r>
+              <a:rPr lang="en-US" sz="1120" dirty="0">
+                <a:solidFill>
+                  <a:srgbClr val="17364A"/>
+                </a:solidFill>
+                <a:latin typeface="Aptos" pitchFamily="34" charset="0"/>
+                <a:ea typeface="Aptos" pitchFamily="34" charset="-122"/>
+                <a:cs typeface="Aptos" pitchFamily="34" charset="-120"/>
+              </a:rPr>
+              <a:t>The important handoff is not from data to AI; it is from analysis to accountable human review.</a:t>
+            </a:r>
+            <a:endParaRPr lang="en-US" sz="1120" dirty="0"/>
+          </a:p>
+        </p:txBody>
+      </p:sp>
+      <p:sp>
+        <p:nvSpPr>
+          <p:cNvPr id="24" name="Shape 22"/>
+          <p:cNvSpPr/>
+          <p:nvPr/>
+        </p:nvSpPr>
+        <p:spPr>
+          <a:xfrm>
+            <a:off x="7635240" y="4184294"/>
+            <a:ext cx="3474720" cy="1466698"/>
+          </a:xfrm>
+          <a:prstGeom prst="roundRect">
+            <a:avLst>
+              <a:gd name="adj" fmla="val 7481"/>
             </a:avLst>
           </a:prstGeom>
           <a:solidFill>
@@ -3687,13 +3903,13 @@
       </p:sp>
       <p:sp>
         <p:nvSpPr>
-          <p:cNvPr id="17" name="Text 15"/>
-          <p:cNvSpPr/>
-          <p:nvPr/>
-        </p:nvSpPr>
-        <p:spPr>
-          <a:xfrm>
-            <a:off x="7799832" y="4645152"/>
+          <p:cNvPr id="25" name="Text 23"/>
+          <p:cNvSpPr/>
+          <p:nvPr/>
+        </p:nvSpPr>
+        <p:spPr>
+          <a:xfrm>
+            <a:off x="7799832" y="4330598"/>
             <a:ext cx="3145536" cy="256032"/>
           </a:xfrm>
           <a:prstGeom prst="rect">
@@ -3726,14 +3942,14 @@
       </p:sp>
       <p:sp>
         <p:nvSpPr>
-          <p:cNvPr id="18" name="Text 16"/>
-          <p:cNvSpPr/>
-          <p:nvPr/>
-        </p:nvSpPr>
-        <p:spPr>
-          <a:xfrm>
-            <a:off x="7799832" y="4974336"/>
-            <a:ext cx="3145536" cy="576072"/>
+          <p:cNvPr id="26" name="Text 24"/>
+          <p:cNvSpPr/>
+          <p:nvPr/>
+        </p:nvSpPr>
+        <p:spPr>
+          <a:xfrm>
+            <a:off x="7799832" y="4659782"/>
+            <a:ext cx="3145536" cy="899770"/>
           </a:xfrm>
           <a:prstGeom prst="rect">
             <a:avLst/>
@@ -3759,7 +3975,7 @@
                 <a:ea typeface="Aptos" pitchFamily="34" charset="-122"/>
                 <a:cs typeface="Aptos" pitchFamily="34" charset="-120"/>
               </a:rPr>
-              <a:t>Connect the concept to public health purpose, responsible use, required safeguards, documentation, and the next action a.</a:t>
+              <a:t>Connect the concept to public health purpose, responsible use, required safeguards, documentation, and the next action a department should take.</a:t>
             </a:r>
             <a:endParaRPr lang="en-US" sz="1320" dirty="0"/>
           </a:p>
@@ -4128,11 +4344,11 @@
         <p:spPr>
           <a:xfrm>
             <a:off x="7635240" y="1325880"/>
-            <a:ext cx="3474720" cy="1325880"/>
+            <a:ext cx="3474720" cy="1207008"/>
           </a:xfrm>
           <a:prstGeom prst="roundRect">
             <a:avLst>
-              <a:gd name="adj" fmla="val 8276"/>
+              <a:gd name="adj" fmla="val 9091"/>
             </a:avLst>
           </a:prstGeom>
           <a:solidFill>
@@ -4194,7 +4410,7 @@
         <p:spPr>
           <a:xfrm>
             <a:off x="7799832" y="1801368"/>
-            <a:ext cx="3145536" cy="758952"/>
+            <a:ext cx="3145536" cy="640080"/>
           </a:xfrm>
           <a:prstGeom prst="rect">
             <a:avLst/>
@@ -4234,12 +4450,12 @@
         </p:nvSpPr>
         <p:spPr>
           <a:xfrm>
-            <a:off x="7635240" y="2788920"/>
-            <a:ext cx="3474720" cy="1536192"/>
+            <a:off x="7635240" y="2670048"/>
+            <a:ext cx="3474720" cy="1377086"/>
           </a:xfrm>
           <a:prstGeom prst="roundRect">
             <a:avLst>
-              <a:gd name="adj" fmla="val 7143"/>
+              <a:gd name="adj" fmla="val 7968"/>
             </a:avLst>
           </a:prstGeom>
           <a:solidFill>
@@ -4261,7 +4477,7 @@
         </p:nvSpPr>
         <p:spPr>
           <a:xfrm>
-            <a:off x="7799832" y="2935224"/>
+            <a:off x="7799832" y="2816352"/>
             <a:ext cx="3145536" cy="256032"/>
           </a:xfrm>
           <a:prstGeom prst="rect">
@@ -4300,8 +4516,8 @@
         </p:nvSpPr>
         <p:spPr>
           <a:xfrm>
-            <a:off x="7818120" y="3300984"/>
-            <a:ext cx="3090672" cy="877824"/>
+            <a:off x="7818120" y="3182112"/>
+            <a:ext cx="3090672" cy="718718"/>
           </a:xfrm>
           <a:prstGeom prst="rect">
             <a:avLst/>
@@ -4375,12 +4591,12 @@
         </p:nvSpPr>
         <p:spPr>
           <a:xfrm>
-            <a:off x="7635240" y="4498848"/>
-            <a:ext cx="3474720" cy="1143000"/>
+            <a:off x="7635240" y="4184294"/>
+            <a:ext cx="3474720" cy="1466698"/>
           </a:xfrm>
           <a:prstGeom prst="roundRect">
             <a:avLst>
-              <a:gd name="adj" fmla="val 9600"/>
+              <a:gd name="adj" fmla="val 7481"/>
             </a:avLst>
           </a:prstGeom>
           <a:solidFill>
@@ -4402,7 +4618,7 @@
         </p:nvSpPr>
         <p:spPr>
           <a:xfrm>
-            <a:off x="7799832" y="4645152"/>
+            <a:off x="7799832" y="4330598"/>
             <a:ext cx="3145536" cy="256032"/>
           </a:xfrm>
           <a:prstGeom prst="rect">
@@ -4441,8 +4657,8 @@
         </p:nvSpPr>
         <p:spPr>
           <a:xfrm>
-            <a:off x="7799832" y="4974336"/>
-            <a:ext cx="3145536" cy="576072"/>
+            <a:off x="7799832" y="4659782"/>
+            <a:ext cx="3145536" cy="899770"/>
           </a:xfrm>
           <a:prstGeom prst="rect">
             <a:avLst/>
@@ -4468,7 +4684,7 @@
                 <a:ea typeface="Aptos" pitchFamily="34" charset="-122"/>
                 <a:cs typeface="Aptos" pitchFamily="34" charset="-120"/>
               </a:rPr>
-              <a:t>Connect the concept to public health purpose, responsible use, required safeguards, documentation, and the next action a.</a:t>
+              <a:t>Connect the concept to public health purpose, responsible use, required safeguards, documentation, and the next action a department should take.</a:t>
             </a:r>
             <a:endParaRPr lang="en-US" sz="1320" dirty="0"/>
           </a:p>
@@ -4837,11 +5053,11 @@
         <p:spPr>
           <a:xfrm>
             <a:off x="7635240" y="1325880"/>
-            <a:ext cx="3474720" cy="1325880"/>
+            <a:ext cx="3474720" cy="1207008"/>
           </a:xfrm>
           <a:prstGeom prst="roundRect">
             <a:avLst>
-              <a:gd name="adj" fmla="val 8276"/>
+              <a:gd name="adj" fmla="val 9091"/>
             </a:avLst>
           </a:prstGeom>
           <a:solidFill>
@@ -4903,7 +5119,7 @@
         <p:spPr>
           <a:xfrm>
             <a:off x="7799832" y="1801368"/>
-            <a:ext cx="3145536" cy="758952"/>
+            <a:ext cx="3145536" cy="640080"/>
           </a:xfrm>
           <a:prstGeom prst="rect">
             <a:avLst/>
@@ -4943,7 +5159,7 @@
         </p:nvSpPr>
         <p:spPr>
           <a:xfrm>
-            <a:off x="7635240" y="2788920"/>
+            <a:off x="7635240" y="2670048"/>
             <a:ext cx="3474720" cy="1536192"/>
           </a:xfrm>
           <a:prstGeom prst="roundRect">
@@ -4970,7 +5186,7 @@
         </p:nvSpPr>
         <p:spPr>
           <a:xfrm>
-            <a:off x="7799832" y="2935224"/>
+            <a:off x="7799832" y="2816352"/>
             <a:ext cx="3145536" cy="256032"/>
           </a:xfrm>
           <a:prstGeom prst="rect">
@@ -5009,7 +5225,7 @@
         </p:nvSpPr>
         <p:spPr>
           <a:xfrm>
-            <a:off x="7818120" y="3300984"/>
+            <a:off x="7818120" y="3182112"/>
             <a:ext cx="3090672" cy="877824"/>
           </a:xfrm>
           <a:prstGeom prst="rect">
@@ -5084,12 +5300,12 @@
         </p:nvSpPr>
         <p:spPr>
           <a:xfrm>
-            <a:off x="7635240" y="4498848"/>
-            <a:ext cx="3474720" cy="1143000"/>
+            <a:off x="7635240" y="4343400"/>
+            <a:ext cx="3474720" cy="1255471"/>
           </a:xfrm>
           <a:prstGeom prst="roundRect">
             <a:avLst>
-              <a:gd name="adj" fmla="val 9600"/>
+              <a:gd name="adj" fmla="val 8740"/>
             </a:avLst>
           </a:prstGeom>
           <a:solidFill>
@@ -5111,7 +5327,7 @@
         </p:nvSpPr>
         <p:spPr>
           <a:xfrm>
-            <a:off x="7799832" y="4645152"/>
+            <a:off x="7799832" y="4489704"/>
             <a:ext cx="3145536" cy="256032"/>
           </a:xfrm>
           <a:prstGeom prst="rect">
@@ -5150,8 +5366,8 @@
         </p:nvSpPr>
         <p:spPr>
           <a:xfrm>
-            <a:off x="7799832" y="4974336"/>
-            <a:ext cx="3145536" cy="576072"/>
+            <a:off x="7799832" y="4818888"/>
+            <a:ext cx="3145536" cy="688543"/>
           </a:xfrm>
           <a:prstGeom prst="rect">
             <a:avLst/>
@@ -5177,7 +5393,7 @@
                 <a:ea typeface="Aptos" pitchFamily="34" charset="-122"/>
                 <a:cs typeface="Aptos" pitchFamily="34" charset="-120"/>
               </a:rPr>
-              <a:t>Identify what could go wrong, who could be affected, what safeguards are needed, and what evidence should be reviewed.</a:t>
+              <a:t>Identify what could go wrong, who could be affected, what safeguards are needed, and what evidence should be reviewed before use.</a:t>
             </a:r>
             <a:endParaRPr lang="en-US" sz="1320" dirty="0"/>
           </a:p>
@@ -5546,11 +5762,11 @@
         <p:spPr>
           <a:xfrm>
             <a:off x="7635240" y="1325880"/>
-            <a:ext cx="3474720" cy="1325880"/>
+            <a:ext cx="3474720" cy="1207008"/>
           </a:xfrm>
           <a:prstGeom prst="roundRect">
             <a:avLst>
-              <a:gd name="adj" fmla="val 8276"/>
+              <a:gd name="adj" fmla="val 9091"/>
             </a:avLst>
           </a:prstGeom>
           <a:solidFill>
@@ -5612,7 +5828,7 @@
         <p:spPr>
           <a:xfrm>
             <a:off x="7799832" y="1801368"/>
-            <a:ext cx="3145536" cy="758952"/>
+            <a:ext cx="3145536" cy="640080"/>
           </a:xfrm>
           <a:prstGeom prst="rect">
             <a:avLst/>
@@ -5652,7 +5868,7 @@
         </p:nvSpPr>
         <p:spPr>
           <a:xfrm>
-            <a:off x="7635240" y="2788920"/>
+            <a:off x="7635240" y="2670048"/>
             <a:ext cx="3474720" cy="1536192"/>
           </a:xfrm>
           <a:prstGeom prst="roundRect">
@@ -5679,7 +5895,7 @@
         </p:nvSpPr>
         <p:spPr>
           <a:xfrm>
-            <a:off x="7799832" y="2935224"/>
+            <a:off x="7799832" y="2816352"/>
             <a:ext cx="3145536" cy="256032"/>
           </a:xfrm>
           <a:prstGeom prst="rect">
@@ -5718,7 +5934,7 @@
         </p:nvSpPr>
         <p:spPr>
           <a:xfrm>
-            <a:off x="7818120" y="3300984"/>
+            <a:off x="7818120" y="3182112"/>
             <a:ext cx="3090672" cy="877824"/>
           </a:xfrm>
           <a:prstGeom prst="rect">
@@ -5793,12 +6009,12 @@
         </p:nvSpPr>
         <p:spPr>
           <a:xfrm>
-            <a:off x="7635240" y="4498848"/>
-            <a:ext cx="3474720" cy="1143000"/>
+            <a:off x="7635240" y="4343400"/>
+            <a:ext cx="3474720" cy="1255471"/>
           </a:xfrm>
           <a:prstGeom prst="roundRect">
             <a:avLst>
-              <a:gd name="adj" fmla="val 9600"/>
+              <a:gd name="adj" fmla="val 8740"/>
             </a:avLst>
           </a:prstGeom>
           <a:solidFill>
@@ -5820,7 +6036,7 @@
         </p:nvSpPr>
         <p:spPr>
           <a:xfrm>
-            <a:off x="7799832" y="4645152"/>
+            <a:off x="7799832" y="4489704"/>
             <a:ext cx="3145536" cy="256032"/>
           </a:xfrm>
           <a:prstGeom prst="rect">
@@ -5859,8 +6075,8 @@
         </p:nvSpPr>
         <p:spPr>
           <a:xfrm>
-            <a:off x="7799832" y="4974336"/>
-            <a:ext cx="3145536" cy="576072"/>
+            <a:off x="7799832" y="4818888"/>
+            <a:ext cx="3145536" cy="688543"/>
           </a:xfrm>
           <a:prstGeom prst="rect">
             <a:avLst/>
@@ -5886,7 +6102,7 @@
                 <a:ea typeface="Aptos" pitchFamily="34" charset="-122"/>
                 <a:cs typeface="Aptos" pitchFamily="34" charset="-120"/>
               </a:rPr>
-              <a:t>Identify what could go wrong, who could be affected, what safeguards are needed, and what evidence should be reviewed.</a:t>
+              <a:t>Identify what could go wrong, who could be affected, what safeguards are needed, and what evidence should be reviewed before use.</a:t>
             </a:r>
             <a:endParaRPr lang="en-US" sz="1320" dirty="0"/>
           </a:p>
@@ -6255,11 +6471,11 @@
         <p:spPr>
           <a:xfrm>
             <a:off x="7635240" y="1325880"/>
-            <a:ext cx="3474720" cy="1325880"/>
+            <a:ext cx="3474720" cy="1255471"/>
           </a:xfrm>
           <a:prstGeom prst="roundRect">
             <a:avLst>
-              <a:gd name="adj" fmla="val 8276"/>
+              <a:gd name="adj" fmla="val 8740"/>
             </a:avLst>
           </a:prstGeom>
           <a:solidFill>
@@ -6321,7 +6537,7 @@
         <p:spPr>
           <a:xfrm>
             <a:off x="7799832" y="1801368"/>
-            <a:ext cx="3145536" cy="758952"/>
+            <a:ext cx="3145536" cy="688543"/>
           </a:xfrm>
           <a:prstGeom prst="rect">
             <a:avLst/>
@@ -6361,12 +6577,12 @@
         </p:nvSpPr>
         <p:spPr>
           <a:xfrm>
-            <a:off x="7635240" y="2788920"/>
-            <a:ext cx="3474720" cy="1536192"/>
+            <a:off x="7635240" y="2718511"/>
+            <a:ext cx="3474720" cy="1328623"/>
           </a:xfrm>
           <a:prstGeom prst="roundRect">
             <a:avLst>
-              <a:gd name="adj" fmla="val 7143"/>
+              <a:gd name="adj" fmla="val 8259"/>
             </a:avLst>
           </a:prstGeom>
           <a:solidFill>
@@ -6388,7 +6604,7 @@
         </p:nvSpPr>
         <p:spPr>
           <a:xfrm>
-            <a:off x="7799832" y="2935224"/>
+            <a:off x="7799832" y="2864815"/>
             <a:ext cx="3145536" cy="256032"/>
           </a:xfrm>
           <a:prstGeom prst="rect">
@@ -6427,8 +6643,8 @@
         </p:nvSpPr>
         <p:spPr>
           <a:xfrm>
-            <a:off x="7818120" y="3300984"/>
-            <a:ext cx="3090672" cy="877824"/>
+            <a:off x="7818120" y="3230575"/>
+            <a:ext cx="3090672" cy="670255"/>
           </a:xfrm>
           <a:prstGeom prst="rect">
             <a:avLst/>
@@ -6502,12 +6718,12 @@
         </p:nvSpPr>
         <p:spPr>
           <a:xfrm>
-            <a:off x="7635240" y="4498848"/>
-            <a:ext cx="3474720" cy="1143000"/>
+            <a:off x="7635240" y="4184294"/>
+            <a:ext cx="3474720" cy="1466698"/>
           </a:xfrm>
           <a:prstGeom prst="roundRect">
             <a:avLst>
-              <a:gd name="adj" fmla="val 9600"/>
+              <a:gd name="adj" fmla="val 7481"/>
             </a:avLst>
           </a:prstGeom>
           <a:solidFill>
@@ -6529,7 +6745,7 @@
         </p:nvSpPr>
         <p:spPr>
           <a:xfrm>
-            <a:off x="7799832" y="4645152"/>
+            <a:off x="7799832" y="4330598"/>
             <a:ext cx="3145536" cy="256032"/>
           </a:xfrm>
           <a:prstGeom prst="rect">
@@ -6568,8 +6784,8 @@
         </p:nvSpPr>
         <p:spPr>
           <a:xfrm>
-            <a:off x="7799832" y="4974336"/>
-            <a:ext cx="3145536" cy="576072"/>
+            <a:off x="7799832" y="4659782"/>
+            <a:ext cx="3145536" cy="899770"/>
           </a:xfrm>
           <a:prstGeom prst="rect">
             <a:avLst/>
@@ -6595,7 +6811,7 @@
                 <a:ea typeface="Aptos" pitchFamily="34" charset="-122"/>
                 <a:cs typeface="Aptos" pitchFamily="34" charset="-120"/>
               </a:rPr>
-              <a:t>Use the concept to clarify workflow changes, dependencies, staffing, procurement requirements, training needs, and.</a:t>
+              <a:t>Use the concept to clarify workflow changes, dependencies, staffing, procurement requirements, training needs, and implementation checkpoints.</a:t>
             </a:r>
             <a:endParaRPr lang="en-US" sz="1320" dirty="0"/>
           </a:p>
@@ -6964,11 +7180,11 @@
         <p:spPr>
           <a:xfrm>
             <a:off x="7635240" y="1325880"/>
-            <a:ext cx="3474720" cy="1325880"/>
+            <a:ext cx="3474720" cy="1255471"/>
           </a:xfrm>
           <a:prstGeom prst="roundRect">
             <a:avLst>
-              <a:gd name="adj" fmla="val 8276"/>
+              <a:gd name="adj" fmla="val 8740"/>
             </a:avLst>
           </a:prstGeom>
           <a:solidFill>
@@ -7030,7 +7246,7 @@
         <p:spPr>
           <a:xfrm>
             <a:off x="7799832" y="1801368"/>
-            <a:ext cx="3145536" cy="758952"/>
+            <a:ext cx="3145536" cy="688543"/>
           </a:xfrm>
           <a:prstGeom prst="rect">
             <a:avLst/>
@@ -7070,12 +7286,12 @@
         </p:nvSpPr>
         <p:spPr>
           <a:xfrm>
-            <a:off x="7635240" y="2788920"/>
-            <a:ext cx="3474720" cy="1536192"/>
+            <a:off x="7635240" y="2718511"/>
+            <a:ext cx="3474720" cy="1328623"/>
           </a:xfrm>
           <a:prstGeom prst="roundRect">
             <a:avLst>
-              <a:gd name="adj" fmla="val 7143"/>
+              <a:gd name="adj" fmla="val 8259"/>
             </a:avLst>
           </a:prstGeom>
           <a:solidFill>
@@ -7097,7 +7313,7 @@
         </p:nvSpPr>
         <p:spPr>
           <a:xfrm>
-            <a:off x="7799832" y="2935224"/>
+            <a:off x="7799832" y="2864815"/>
             <a:ext cx="3145536" cy="256032"/>
           </a:xfrm>
           <a:prstGeom prst="rect">
@@ -7136,8 +7352,8 @@
         </p:nvSpPr>
         <p:spPr>
           <a:xfrm>
-            <a:off x="7818120" y="3300984"/>
-            <a:ext cx="3090672" cy="877824"/>
+            <a:off x="7818120" y="3230575"/>
+            <a:ext cx="3090672" cy="670255"/>
           </a:xfrm>
           <a:prstGeom prst="rect">
             <a:avLst/>
@@ -7211,12 +7427,12 @@
         </p:nvSpPr>
         <p:spPr>
           <a:xfrm>
-            <a:off x="7635240" y="4498848"/>
-            <a:ext cx="3474720" cy="1143000"/>
+            <a:off x="7635240" y="4184294"/>
+            <a:ext cx="3474720" cy="1466698"/>
           </a:xfrm>
           <a:prstGeom prst="roundRect">
             <a:avLst>
-              <a:gd name="adj" fmla="val 9600"/>
+              <a:gd name="adj" fmla="val 7481"/>
             </a:avLst>
           </a:prstGeom>
           <a:solidFill>
@@ -7238,7 +7454,7 @@
         </p:nvSpPr>
         <p:spPr>
           <a:xfrm>
-            <a:off x="7799832" y="4645152"/>
+            <a:off x="7799832" y="4330598"/>
             <a:ext cx="3145536" cy="256032"/>
           </a:xfrm>
           <a:prstGeom prst="rect">
@@ -7277,8 +7493,8 @@
         </p:nvSpPr>
         <p:spPr>
           <a:xfrm>
-            <a:off x="7799832" y="4974336"/>
-            <a:ext cx="3145536" cy="576072"/>
+            <a:off x="7799832" y="4659782"/>
+            <a:ext cx="3145536" cy="899770"/>
           </a:xfrm>
           <a:prstGeom prst="rect">
             <a:avLst/>
@@ -7304,7 +7520,7 @@
                 <a:ea typeface="Aptos" pitchFamily="34" charset="-122"/>
                 <a:cs typeface="Aptos" pitchFamily="34" charset="-120"/>
               </a:rPr>
-              <a:t>Connect the concept to public health purpose, responsible use, required safeguards, documentation, and the next action a.</a:t>
+              <a:t>Connect the concept to public health purpose, responsible use, required safeguards, documentation, and the next action a department should take.</a:t>
             </a:r>
             <a:endParaRPr lang="en-US" sz="1320" dirty="0"/>
           </a:p>
@@ -7656,11 +7872,11 @@
         <p:spPr>
           <a:xfrm>
             <a:off x="7635240" y="1325880"/>
-            <a:ext cx="3474720" cy="1325880"/>
+            <a:ext cx="3474720" cy="1207008"/>
           </a:xfrm>
           <a:prstGeom prst="roundRect">
             <a:avLst>
-              <a:gd name="adj" fmla="val 8276"/>
+              <a:gd name="adj" fmla="val 9091"/>
             </a:avLst>
           </a:prstGeom>
           <a:solidFill>
@@ -7722,7 +7938,7 @@
         <p:spPr>
           <a:xfrm>
             <a:off x="7799832" y="1801368"/>
-            <a:ext cx="3145536" cy="758952"/>
+            <a:ext cx="3145536" cy="640080"/>
           </a:xfrm>
           <a:prstGeom prst="rect">
             <a:avLst/>
@@ -7762,12 +7978,12 @@
         </p:nvSpPr>
         <p:spPr>
           <a:xfrm>
-            <a:off x="7635240" y="2788920"/>
-            <a:ext cx="3474720" cy="1536192"/>
+            <a:off x="7635240" y="2670048"/>
+            <a:ext cx="3474720" cy="1377086"/>
           </a:xfrm>
           <a:prstGeom prst="roundRect">
             <a:avLst>
-              <a:gd name="adj" fmla="val 7143"/>
+              <a:gd name="adj" fmla="val 7968"/>
             </a:avLst>
           </a:prstGeom>
           <a:solidFill>
@@ -7789,7 +8005,7 @@
         </p:nvSpPr>
         <p:spPr>
           <a:xfrm>
-            <a:off x="7799832" y="2935224"/>
+            <a:off x="7799832" y="2816352"/>
             <a:ext cx="3145536" cy="256032"/>
           </a:xfrm>
           <a:prstGeom prst="rect">
@@ -7828,8 +8044,8 @@
         </p:nvSpPr>
         <p:spPr>
           <a:xfrm>
-            <a:off x="7818120" y="3300984"/>
-            <a:ext cx="3090672" cy="877824"/>
+            <a:off x="7818120" y="3182112"/>
+            <a:ext cx="3090672" cy="718718"/>
           </a:xfrm>
           <a:prstGeom prst="rect">
             <a:avLst/>
@@ -7886,12 +8102,12 @@
         </p:nvSpPr>
         <p:spPr>
           <a:xfrm>
-            <a:off x="7635240" y="4498848"/>
-            <a:ext cx="3474720" cy="1143000"/>
+            <a:off x="7635240" y="4184294"/>
+            <a:ext cx="3474720" cy="1466698"/>
           </a:xfrm>
           <a:prstGeom prst="roundRect">
             <a:avLst>
-              <a:gd name="adj" fmla="val 9600"/>
+              <a:gd name="adj" fmla="val 7481"/>
             </a:avLst>
           </a:prstGeom>
           <a:solidFill>
@@ -7913,7 +8129,7 @@
         </p:nvSpPr>
         <p:spPr>
           <a:xfrm>
-            <a:off x="7799832" y="4645152"/>
+            <a:off x="7799832" y="4330598"/>
             <a:ext cx="3145536" cy="256032"/>
           </a:xfrm>
           <a:prstGeom prst="rect">
@@ -7952,8 +8168,8 @@
         </p:nvSpPr>
         <p:spPr>
           <a:xfrm>
-            <a:off x="7799832" y="4974336"/>
-            <a:ext cx="3145536" cy="576072"/>
+            <a:off x="7799832" y="4659782"/>
+            <a:ext cx="3145536" cy="899770"/>
           </a:xfrm>
           <a:prstGeom prst="rect">
             <a:avLst/>
@@ -7979,7 +8195,7 @@
                 <a:ea typeface="Aptos" pitchFamily="34" charset="-122"/>
                 <a:cs typeface="Aptos" pitchFamily="34" charset="-120"/>
               </a:rPr>
-              <a:t>Connect the concept to public health purpose, responsible use, required safeguards, documentation, and the next action a.</a:t>
+              <a:t>Connect the concept to public health purpose, responsible use, required safeguards, documentation, and the next action a department should take.</a:t>
             </a:r>
             <a:endParaRPr lang="en-US" sz="1320" dirty="0"/>
           </a:p>
@@ -8348,11 +8564,11 @@
         <p:spPr>
           <a:xfrm>
             <a:off x="7635240" y="1325880"/>
-            <a:ext cx="3474720" cy="1325880"/>
+            <a:ext cx="3474720" cy="1207008"/>
           </a:xfrm>
           <a:prstGeom prst="roundRect">
             <a:avLst>
-              <a:gd name="adj" fmla="val 8276"/>
+              <a:gd name="adj" fmla="val 9091"/>
             </a:avLst>
           </a:prstGeom>
           <a:solidFill>
@@ -8414,7 +8630,7 @@
         <p:spPr>
           <a:xfrm>
             <a:off x="7799832" y="1801368"/>
-            <a:ext cx="3145536" cy="758952"/>
+            <a:ext cx="3145536" cy="640080"/>
           </a:xfrm>
           <a:prstGeom prst="rect">
             <a:avLst/>
@@ -8454,12 +8670,12 @@
         </p:nvSpPr>
         <p:spPr>
           <a:xfrm>
-            <a:off x="7635240" y="2788920"/>
-            <a:ext cx="3474720" cy="1536192"/>
+            <a:off x="7635240" y="2670048"/>
+            <a:ext cx="3474720" cy="1377086"/>
           </a:xfrm>
           <a:prstGeom prst="roundRect">
             <a:avLst>
-              <a:gd name="adj" fmla="val 7143"/>
+              <a:gd name="adj" fmla="val 7968"/>
             </a:avLst>
           </a:prstGeom>
           <a:solidFill>
@@ -8481,7 +8697,7 @@
         </p:nvSpPr>
         <p:spPr>
           <a:xfrm>
-            <a:off x="7799832" y="2935224"/>
+            <a:off x="7799832" y="2816352"/>
             <a:ext cx="3145536" cy="256032"/>
           </a:xfrm>
           <a:prstGeom prst="rect">
@@ -8520,8 +8736,8 @@
         </p:nvSpPr>
         <p:spPr>
           <a:xfrm>
-            <a:off x="7818120" y="3300984"/>
-            <a:ext cx="3090672" cy="877824"/>
+            <a:off x="7818120" y="3182112"/>
+            <a:ext cx="3090672" cy="718718"/>
           </a:xfrm>
           <a:prstGeom prst="rect">
             <a:avLst/>
@@ -8578,12 +8794,12 @@
         </p:nvSpPr>
         <p:spPr>
           <a:xfrm>
-            <a:off x="7635240" y="4498848"/>
-            <a:ext cx="3474720" cy="1143000"/>
+            <a:off x="7635240" y="4184294"/>
+            <a:ext cx="3474720" cy="1466698"/>
           </a:xfrm>
           <a:prstGeom prst="roundRect">
             <a:avLst>
-              <a:gd name="adj" fmla="val 9600"/>
+              <a:gd name="adj" fmla="val 7481"/>
             </a:avLst>
           </a:prstGeom>
           <a:solidFill>
@@ -8605,7 +8821,7 @@
         </p:nvSpPr>
         <p:spPr>
           <a:xfrm>
-            <a:off x="7799832" y="4645152"/>
+            <a:off x="7799832" y="4330598"/>
             <a:ext cx="3145536" cy="256032"/>
           </a:xfrm>
           <a:prstGeom prst="rect">
@@ -8644,8 +8860,8 @@
         </p:nvSpPr>
         <p:spPr>
           <a:xfrm>
-            <a:off x="7799832" y="4974336"/>
-            <a:ext cx="3145536" cy="576072"/>
+            <a:off x="7799832" y="4659782"/>
+            <a:ext cx="3145536" cy="899770"/>
           </a:xfrm>
           <a:prstGeom prst="rect">
             <a:avLst/>
@@ -8671,7 +8887,7 @@
                 <a:ea typeface="Aptos" pitchFamily="34" charset="-122"/>
                 <a:cs typeface="Aptos" pitchFamily="34" charset="-120"/>
               </a:rPr>
-              <a:t>Use the assignment to test whether you can explain the concept, apply it to a realistic public health situation, and.</a:t>
+              <a:t>Use the assignment to test whether you can explain the concept, apply it to a realistic public health situation, and identify what would need review before the work moves forward.</a:t>
             </a:r>
             <a:endParaRPr lang="en-US" sz="1320" dirty="0"/>
           </a:p>
@@ -9040,11 +9256,11 @@
         <p:spPr>
           <a:xfrm>
             <a:off x="7635240" y="1325880"/>
-            <a:ext cx="3474720" cy="1325880"/>
+            <a:ext cx="3474720" cy="1207008"/>
           </a:xfrm>
           <a:prstGeom prst="roundRect">
             <a:avLst>
-              <a:gd name="adj" fmla="val 8276"/>
+              <a:gd name="adj" fmla="val 9091"/>
             </a:avLst>
           </a:prstGeom>
           <a:solidFill>
@@ -9106,7 +9322,7 @@
         <p:spPr>
           <a:xfrm>
             <a:off x="7799832" y="1801368"/>
-            <a:ext cx="3145536" cy="758952"/>
+            <a:ext cx="3145536" cy="640080"/>
           </a:xfrm>
           <a:prstGeom prst="rect">
             <a:avLst/>
@@ -9146,12 +9362,12 @@
         </p:nvSpPr>
         <p:spPr>
           <a:xfrm>
-            <a:off x="7635240" y="2788920"/>
-            <a:ext cx="3474720" cy="1536192"/>
+            <a:off x="7635240" y="2670048"/>
+            <a:ext cx="3474720" cy="1377086"/>
           </a:xfrm>
           <a:prstGeom prst="roundRect">
             <a:avLst>
-              <a:gd name="adj" fmla="val 7143"/>
+              <a:gd name="adj" fmla="val 7968"/>
             </a:avLst>
           </a:prstGeom>
           <a:solidFill>
@@ -9173,7 +9389,7 @@
         </p:nvSpPr>
         <p:spPr>
           <a:xfrm>
-            <a:off x="7799832" y="2935224"/>
+            <a:off x="7799832" y="2816352"/>
             <a:ext cx="3145536" cy="256032"/>
           </a:xfrm>
           <a:prstGeom prst="rect">
@@ -9212,8 +9428,8 @@
         </p:nvSpPr>
         <p:spPr>
           <a:xfrm>
-            <a:off x="7818120" y="3300984"/>
-            <a:ext cx="3090672" cy="877824"/>
+            <a:off x="7818120" y="3182112"/>
+            <a:ext cx="3090672" cy="718718"/>
           </a:xfrm>
           <a:prstGeom prst="rect">
             <a:avLst/>
@@ -9287,12 +9503,12 @@
         </p:nvSpPr>
         <p:spPr>
           <a:xfrm>
-            <a:off x="7635240" y="4498848"/>
-            <a:ext cx="3474720" cy="1143000"/>
+            <a:off x="7635240" y="4184294"/>
+            <a:ext cx="3474720" cy="1466698"/>
           </a:xfrm>
           <a:prstGeom prst="roundRect">
             <a:avLst>
-              <a:gd name="adj" fmla="val 9600"/>
+              <a:gd name="adj" fmla="val 7481"/>
             </a:avLst>
           </a:prstGeom>
           <a:solidFill>
@@ -9314,7 +9530,7 @@
         </p:nvSpPr>
         <p:spPr>
           <a:xfrm>
-            <a:off x="7799832" y="4645152"/>
+            <a:off x="7799832" y="4330598"/>
             <a:ext cx="3145536" cy="256032"/>
           </a:xfrm>
           <a:prstGeom prst="rect">
@@ -9353,8 +9569,8 @@
         </p:nvSpPr>
         <p:spPr>
           <a:xfrm>
-            <a:off x="7799832" y="4974336"/>
-            <a:ext cx="3145536" cy="576072"/>
+            <a:off x="7799832" y="4659782"/>
+            <a:ext cx="3145536" cy="899770"/>
           </a:xfrm>
           <a:prstGeom prst="rect">
             <a:avLst/>
@@ -9380,7 +9596,7 @@
                 <a:ea typeface="Aptos" pitchFamily="34" charset="-122"/>
                 <a:cs typeface="Aptos" pitchFamily="34" charset="-120"/>
               </a:rPr>
-              <a:t>Connect the concept to public health purpose, responsible use, required safeguards, documentation, and the next action a.</a:t>
+              <a:t>Connect the concept to public health purpose, responsible use, required safeguards, documentation, and the next action a department should take.</a:t>
             </a:r>
             <a:endParaRPr lang="en-US" sz="1320" dirty="0"/>
           </a:p>
@@ -9715,11 +9931,11 @@
         <p:spPr>
           <a:xfrm>
             <a:off x="7635240" y="1325880"/>
-            <a:ext cx="3474720" cy="1325880"/>
+            <a:ext cx="3474720" cy="1207008"/>
           </a:xfrm>
           <a:prstGeom prst="roundRect">
             <a:avLst>
-              <a:gd name="adj" fmla="val 8276"/>
+              <a:gd name="adj" fmla="val 9091"/>
             </a:avLst>
           </a:prstGeom>
           <a:solidFill>
@@ -9781,7 +9997,7 @@
         <p:spPr>
           <a:xfrm>
             <a:off x="7799832" y="1801368"/>
-            <a:ext cx="3145536" cy="758952"/>
+            <a:ext cx="3145536" cy="640080"/>
           </a:xfrm>
           <a:prstGeom prst="rect">
             <a:avLst/>
@@ -9821,12 +10037,12 @@
         </p:nvSpPr>
         <p:spPr>
           <a:xfrm>
-            <a:off x="7635240" y="2788920"/>
-            <a:ext cx="3474720" cy="1536192"/>
+            <a:off x="7635240" y="2670048"/>
+            <a:ext cx="3474720" cy="1377086"/>
           </a:xfrm>
           <a:prstGeom prst="roundRect">
             <a:avLst>
-              <a:gd name="adj" fmla="val 7143"/>
+              <a:gd name="adj" fmla="val 7968"/>
             </a:avLst>
           </a:prstGeom>
           <a:solidFill>
@@ -9848,7 +10064,7 @@
         </p:nvSpPr>
         <p:spPr>
           <a:xfrm>
-            <a:off x="7799832" y="2935224"/>
+            <a:off x="7799832" y="2816352"/>
             <a:ext cx="3145536" cy="256032"/>
           </a:xfrm>
           <a:prstGeom prst="rect">
@@ -9887,8 +10103,8 @@
         </p:nvSpPr>
         <p:spPr>
           <a:xfrm>
-            <a:off x="7818120" y="3300984"/>
-            <a:ext cx="3090672" cy="877824"/>
+            <a:off x="7818120" y="3182112"/>
+            <a:ext cx="3090672" cy="718718"/>
           </a:xfrm>
           <a:prstGeom prst="rect">
             <a:avLst/>
@@ -9928,12 +10144,12 @@
         </p:nvSpPr>
         <p:spPr>
           <a:xfrm>
-            <a:off x="7635240" y="4498848"/>
-            <a:ext cx="3474720" cy="1143000"/>
+            <a:off x="7635240" y="4184294"/>
+            <a:ext cx="3474720" cy="1466698"/>
           </a:xfrm>
           <a:prstGeom prst="roundRect">
             <a:avLst>
-              <a:gd name="adj" fmla="val 9600"/>
+              <a:gd name="adj" fmla="val 7481"/>
             </a:avLst>
           </a:prstGeom>
           <a:solidFill>
@@ -9955,7 +10171,7 @@
         </p:nvSpPr>
         <p:spPr>
           <a:xfrm>
-            <a:off x="7799832" y="4645152"/>
+            <a:off x="7799832" y="4330598"/>
             <a:ext cx="3145536" cy="256032"/>
           </a:xfrm>
           <a:prstGeom prst="rect">
@@ -9994,8 +10210,8 @@
         </p:nvSpPr>
         <p:spPr>
           <a:xfrm>
-            <a:off x="7799832" y="4974336"/>
-            <a:ext cx="3145536" cy="576072"/>
+            <a:off x="7799832" y="4659782"/>
+            <a:ext cx="3145536" cy="899770"/>
           </a:xfrm>
           <a:prstGeom prst="rect">
             <a:avLst/>
@@ -10021,7 +10237,7 @@
                 <a:ea typeface="Aptos" pitchFamily="34" charset="-122"/>
                 <a:cs typeface="Aptos" pitchFamily="34" charset="-120"/>
               </a:rPr>
-              <a:t>Connect the concept to public health purpose, responsible use, required safeguards, documentation, and the next action a.</a:t>
+              <a:t>Connect the concept to public health purpose, responsible use, required safeguards, documentation, and the next action a department should take.</a:t>
             </a:r>
             <a:endParaRPr lang="en-US" sz="1320" dirty="0"/>
           </a:p>
@@ -10992,11 +11208,11 @@
         <p:spPr>
           <a:xfrm>
             <a:off x="7635240" y="1325880"/>
-            <a:ext cx="3474720" cy="1325880"/>
+            <a:ext cx="3474720" cy="1207008"/>
           </a:xfrm>
           <a:prstGeom prst="roundRect">
             <a:avLst>
-              <a:gd name="adj" fmla="val 8276"/>
+              <a:gd name="adj" fmla="val 9091"/>
             </a:avLst>
           </a:prstGeom>
           <a:solidFill>
@@ -11058,7 +11274,7 @@
         <p:spPr>
           <a:xfrm>
             <a:off x="7799832" y="1801368"/>
-            <a:ext cx="3145536" cy="758952"/>
+            <a:ext cx="3145536" cy="640080"/>
           </a:xfrm>
           <a:prstGeom prst="rect">
             <a:avLst/>
@@ -11098,12 +11314,12 @@
         </p:nvSpPr>
         <p:spPr>
           <a:xfrm>
-            <a:off x="7635240" y="2788920"/>
-            <a:ext cx="3474720" cy="1536192"/>
+            <a:off x="7635240" y="2670048"/>
+            <a:ext cx="3474720" cy="1377086"/>
           </a:xfrm>
           <a:prstGeom prst="roundRect">
             <a:avLst>
-              <a:gd name="adj" fmla="val 7143"/>
+              <a:gd name="adj" fmla="val 7968"/>
             </a:avLst>
           </a:prstGeom>
           <a:solidFill>
@@ -11125,7 +11341,7 @@
         </p:nvSpPr>
         <p:spPr>
           <a:xfrm>
-            <a:off x="7799832" y="2935224"/>
+            <a:off x="7799832" y="2816352"/>
             <a:ext cx="3145536" cy="256032"/>
           </a:xfrm>
           <a:prstGeom prst="rect">
@@ -11164,8 +11380,8 @@
         </p:nvSpPr>
         <p:spPr>
           <a:xfrm>
-            <a:off x="7818120" y="3300984"/>
-            <a:ext cx="3090672" cy="877824"/>
+            <a:off x="7818120" y="3182112"/>
+            <a:ext cx="3090672" cy="718718"/>
           </a:xfrm>
           <a:prstGeom prst="rect">
             <a:avLst/>
@@ -11239,12 +11455,12 @@
         </p:nvSpPr>
         <p:spPr>
           <a:xfrm>
-            <a:off x="7635240" y="4498848"/>
-            <a:ext cx="3474720" cy="1143000"/>
+            <a:off x="7635240" y="4184294"/>
+            <a:ext cx="3474720" cy="1466698"/>
           </a:xfrm>
           <a:prstGeom prst="roundRect">
             <a:avLst>
-              <a:gd name="adj" fmla="val 9600"/>
+              <a:gd name="adj" fmla="val 7481"/>
             </a:avLst>
           </a:prstGeom>
           <a:solidFill>
@@ -11266,7 +11482,7 @@
         </p:nvSpPr>
         <p:spPr>
           <a:xfrm>
-            <a:off x="7799832" y="4645152"/>
+            <a:off x="7799832" y="4330598"/>
             <a:ext cx="3145536" cy="256032"/>
           </a:xfrm>
           <a:prstGeom prst="rect">
@@ -11305,8 +11521,8 @@
         </p:nvSpPr>
         <p:spPr>
           <a:xfrm>
-            <a:off x="7799832" y="4974336"/>
-            <a:ext cx="3145536" cy="576072"/>
+            <a:off x="7799832" y="4659782"/>
+            <a:ext cx="3145536" cy="899770"/>
           </a:xfrm>
           <a:prstGeom prst="rect">
             <a:avLst/>
@@ -11332,7 +11548,7 @@
                 <a:ea typeface="Aptos" pitchFamily="34" charset="-122"/>
                 <a:cs typeface="Aptos" pitchFamily="34" charset="-120"/>
               </a:rPr>
-              <a:t>Use the assignment to test whether you can explain the concept, apply it to a realistic public health situation, and.</a:t>
+              <a:t>Use the assignment to test whether you can explain the concept, apply it to a realistic public health situation, and identify what would need review before the work moves forward.</a:t>
             </a:r>
             <a:endParaRPr lang="en-US" sz="1320" dirty="0"/>
           </a:p>
@@ -11701,11 +11917,11 @@
         <p:spPr>
           <a:xfrm>
             <a:off x="7635240" y="1325880"/>
-            <a:ext cx="3474720" cy="1325880"/>
+            <a:ext cx="3474720" cy="1207008"/>
           </a:xfrm>
           <a:prstGeom prst="roundRect">
             <a:avLst>
-              <a:gd name="adj" fmla="val 8276"/>
+              <a:gd name="adj" fmla="val 9091"/>
             </a:avLst>
           </a:prstGeom>
           <a:solidFill>
@@ -11767,7 +11983,7 @@
         <p:spPr>
           <a:xfrm>
             <a:off x="7799832" y="1801368"/>
-            <a:ext cx="3145536" cy="758952"/>
+            <a:ext cx="3145536" cy="640080"/>
           </a:xfrm>
           <a:prstGeom prst="rect">
             <a:avLst/>
@@ -11807,12 +12023,12 @@
         </p:nvSpPr>
         <p:spPr>
           <a:xfrm>
-            <a:off x="7635240" y="2788920"/>
-            <a:ext cx="3474720" cy="1536192"/>
+            <a:off x="7635240" y="2670048"/>
+            <a:ext cx="3474720" cy="1377086"/>
           </a:xfrm>
           <a:prstGeom prst="roundRect">
             <a:avLst>
-              <a:gd name="adj" fmla="val 7143"/>
+              <a:gd name="adj" fmla="val 7968"/>
             </a:avLst>
           </a:prstGeom>
           <a:solidFill>
@@ -11834,7 +12050,7 @@
         </p:nvSpPr>
         <p:spPr>
           <a:xfrm>
-            <a:off x="7799832" y="2935224"/>
+            <a:off x="7799832" y="2816352"/>
             <a:ext cx="3145536" cy="256032"/>
           </a:xfrm>
           <a:prstGeom prst="rect">
@@ -11873,8 +12089,8 @@
         </p:nvSpPr>
         <p:spPr>
           <a:xfrm>
-            <a:off x="7818120" y="3300984"/>
-            <a:ext cx="3090672" cy="877824"/>
+            <a:off x="7818120" y="3182112"/>
+            <a:ext cx="3090672" cy="718718"/>
           </a:xfrm>
           <a:prstGeom prst="rect">
             <a:avLst/>
@@ -11948,12 +12164,12 @@
         </p:nvSpPr>
         <p:spPr>
           <a:xfrm>
-            <a:off x="7635240" y="4498848"/>
-            <a:ext cx="3474720" cy="1143000"/>
+            <a:off x="7635240" y="4184294"/>
+            <a:ext cx="3474720" cy="1466698"/>
           </a:xfrm>
           <a:prstGeom prst="roundRect">
             <a:avLst>
-              <a:gd name="adj" fmla="val 9600"/>
+              <a:gd name="adj" fmla="val 7481"/>
             </a:avLst>
           </a:prstGeom>
           <a:solidFill>
@@ -11975,7 +12191,7 @@
         </p:nvSpPr>
         <p:spPr>
           <a:xfrm>
-            <a:off x="7799832" y="4645152"/>
+            <a:off x="7799832" y="4330598"/>
             <a:ext cx="3145536" cy="256032"/>
           </a:xfrm>
           <a:prstGeom prst="rect">
@@ -12014,8 +12230,8 @@
         </p:nvSpPr>
         <p:spPr>
           <a:xfrm>
-            <a:off x="7799832" y="4974336"/>
-            <a:ext cx="3145536" cy="576072"/>
+            <a:off x="7799832" y="4659782"/>
+            <a:ext cx="3145536" cy="899770"/>
           </a:xfrm>
           <a:prstGeom prst="rect">
             <a:avLst/>
@@ -12041,7 +12257,7 @@
                 <a:ea typeface="Aptos" pitchFamily="34" charset="-122"/>
                 <a:cs typeface="Aptos" pitchFamily="34" charset="-120"/>
               </a:rPr>
-              <a:t>Use the assignment to test whether you can explain the concept, apply it to a realistic public health situation, and.</a:t>
+              <a:t>Use the assignment to test whether you can explain the concept, apply it to a realistic public health situation, and identify what would need review before the work moves forward.</a:t>
             </a:r>
             <a:endParaRPr lang="en-US" sz="1320" dirty="0"/>
           </a:p>
@@ -12410,11 +12626,11 @@
         <p:spPr>
           <a:xfrm>
             <a:off x="7635240" y="1325880"/>
-            <a:ext cx="3474720" cy="1325880"/>
+            <a:ext cx="3474720" cy="1207008"/>
           </a:xfrm>
           <a:prstGeom prst="roundRect">
             <a:avLst>
-              <a:gd name="adj" fmla="val 8276"/>
+              <a:gd name="adj" fmla="val 9091"/>
             </a:avLst>
           </a:prstGeom>
           <a:solidFill>
@@ -12476,7 +12692,7 @@
         <p:spPr>
           <a:xfrm>
             <a:off x="7799832" y="1801368"/>
-            <a:ext cx="3145536" cy="758952"/>
+            <a:ext cx="3145536" cy="640080"/>
           </a:xfrm>
           <a:prstGeom prst="rect">
             <a:avLst/>
@@ -12516,12 +12732,12 @@
         </p:nvSpPr>
         <p:spPr>
           <a:xfrm>
-            <a:off x="7635240" y="2788920"/>
-            <a:ext cx="3474720" cy="1536192"/>
+            <a:off x="7635240" y="2670048"/>
+            <a:ext cx="3474720" cy="1377086"/>
           </a:xfrm>
           <a:prstGeom prst="roundRect">
             <a:avLst>
-              <a:gd name="adj" fmla="val 7143"/>
+              <a:gd name="adj" fmla="val 7968"/>
             </a:avLst>
           </a:prstGeom>
           <a:solidFill>
@@ -12543,7 +12759,7 @@
         </p:nvSpPr>
         <p:spPr>
           <a:xfrm>
-            <a:off x="7799832" y="2935224"/>
+            <a:off x="7799832" y="2816352"/>
             <a:ext cx="3145536" cy="256032"/>
           </a:xfrm>
           <a:prstGeom prst="rect">
@@ -12582,8 +12798,8 @@
         </p:nvSpPr>
         <p:spPr>
           <a:xfrm>
-            <a:off x="7818120" y="3300984"/>
-            <a:ext cx="3090672" cy="877824"/>
+            <a:off x="7818120" y="3182112"/>
+            <a:ext cx="3090672" cy="718718"/>
           </a:xfrm>
           <a:prstGeom prst="rect">
             <a:avLst/>
@@ -12640,12 +12856,12 @@
         </p:nvSpPr>
         <p:spPr>
           <a:xfrm>
-            <a:off x="7635240" y="4498848"/>
-            <a:ext cx="3474720" cy="1143000"/>
+            <a:off x="7635240" y="4184294"/>
+            <a:ext cx="3474720" cy="1466698"/>
           </a:xfrm>
           <a:prstGeom prst="roundRect">
             <a:avLst>
-              <a:gd name="adj" fmla="val 9600"/>
+              <a:gd name="adj" fmla="val 7481"/>
             </a:avLst>
           </a:prstGeom>
           <a:solidFill>
@@ -12667,7 +12883,7 @@
         </p:nvSpPr>
         <p:spPr>
           <a:xfrm>
-            <a:off x="7799832" y="4645152"/>
+            <a:off x="7799832" y="4330598"/>
             <a:ext cx="3145536" cy="256032"/>
           </a:xfrm>
           <a:prstGeom prst="rect">
@@ -12706,8 +12922,8 @@
         </p:nvSpPr>
         <p:spPr>
           <a:xfrm>
-            <a:off x="7799832" y="4974336"/>
-            <a:ext cx="3145536" cy="576072"/>
+            <a:off x="7799832" y="4659782"/>
+            <a:ext cx="3145536" cy="899770"/>
           </a:xfrm>
           <a:prstGeom prst="rect">
             <a:avLst/>
@@ -12733,7 +12949,7 @@
                 <a:ea typeface="Aptos" pitchFamily="34" charset="-122"/>
                 <a:cs typeface="Aptos" pitchFamily="34" charset="-120"/>
               </a:rPr>
-              <a:t>Connect the concept to public health purpose, responsible use, required safeguards, documentation, and the next action a.</a:t>
+              <a:t>Connect the concept to public health purpose, responsible use, required safeguards, documentation, and the next action a department should take.</a:t>
             </a:r>
             <a:endParaRPr lang="en-US" sz="1320" dirty="0"/>
           </a:p>
@@ -13211,7 +13427,7 @@
                 <a:ea typeface="Aptos" pitchFamily="34" charset="-122"/>
                 <a:cs typeface="Aptos" pitchFamily="34" charset="-120"/>
               </a:rPr>
-              <a:t>Use the related plays to identify decisions, participants, timing, approvals, and documentation needed for responsible.</a:t>
+              <a:t>Use the related plays to identify decisions, participants, timing, approvals, and documentation needed for responsible implementation.</a:t>
             </a:r>
             <a:endParaRPr lang="en-US" sz="1320" dirty="0"/>
           </a:p>
@@ -13830,7 +14046,7 @@
                 <a:ea typeface="Aptos" pitchFamily="34" charset="-122"/>
                 <a:cs typeface="Aptos" pitchFamily="34" charset="-120"/>
               </a:rPr>
-              <a:t>Use linked tools when your department needs a structured worksheet, template, checklist, review process, or.</a:t>
+              <a:t>Use linked tools when your department needs a structured worksheet, template, checklist, review process, or documentation artifact.</a:t>
             </a:r>
             <a:endParaRPr lang="en-US" sz="1320" dirty="0"/>
           </a:p>
@@ -14340,11 +14556,11 @@
         <p:spPr>
           <a:xfrm>
             <a:off x="7635240" y="1325880"/>
-            <a:ext cx="3474720" cy="1325880"/>
+            <a:ext cx="3474720" cy="1255471"/>
           </a:xfrm>
           <a:prstGeom prst="roundRect">
             <a:avLst>
-              <a:gd name="adj" fmla="val 8276"/>
+              <a:gd name="adj" fmla="val 8740"/>
             </a:avLst>
           </a:prstGeom>
           <a:solidFill>
@@ -14406,7 +14622,7 @@
         <p:spPr>
           <a:xfrm>
             <a:off x="7799832" y="1801368"/>
-            <a:ext cx="3145536" cy="758952"/>
+            <a:ext cx="3145536" cy="688543"/>
           </a:xfrm>
           <a:prstGeom prst="rect">
             <a:avLst/>
@@ -14446,12 +14662,12 @@
         </p:nvSpPr>
         <p:spPr>
           <a:xfrm>
-            <a:off x="7635240" y="2788920"/>
-            <a:ext cx="3474720" cy="1536192"/>
+            <a:off x="7635240" y="2718511"/>
+            <a:ext cx="3474720" cy="1328623"/>
           </a:xfrm>
           <a:prstGeom prst="roundRect">
             <a:avLst>
-              <a:gd name="adj" fmla="val 7143"/>
+              <a:gd name="adj" fmla="val 8259"/>
             </a:avLst>
           </a:prstGeom>
           <a:solidFill>
@@ -14473,7 +14689,7 @@
         </p:nvSpPr>
         <p:spPr>
           <a:xfrm>
-            <a:off x="7799832" y="2935224"/>
+            <a:off x="7799832" y="2864815"/>
             <a:ext cx="3145536" cy="256032"/>
           </a:xfrm>
           <a:prstGeom prst="rect">
@@ -14512,8 +14728,8 @@
         </p:nvSpPr>
         <p:spPr>
           <a:xfrm>
-            <a:off x="7818120" y="3300984"/>
-            <a:ext cx="3090672" cy="877824"/>
+            <a:off x="7818120" y="3230575"/>
+            <a:ext cx="3090672" cy="670255"/>
           </a:xfrm>
           <a:prstGeom prst="rect">
             <a:avLst/>
@@ -14587,12 +14803,12 @@
         </p:nvSpPr>
         <p:spPr>
           <a:xfrm>
-            <a:off x="7635240" y="4498848"/>
-            <a:ext cx="3474720" cy="1143000"/>
+            <a:off x="7635240" y="4184294"/>
+            <a:ext cx="3474720" cy="1466698"/>
           </a:xfrm>
           <a:prstGeom prst="roundRect">
             <a:avLst>
-              <a:gd name="adj" fmla="val 9600"/>
+              <a:gd name="adj" fmla="val 7481"/>
             </a:avLst>
           </a:prstGeom>
           <a:solidFill>
@@ -14614,7 +14830,7 @@
         </p:nvSpPr>
         <p:spPr>
           <a:xfrm>
-            <a:off x="7799832" y="4645152"/>
+            <a:off x="7799832" y="4330598"/>
             <a:ext cx="3145536" cy="256032"/>
           </a:xfrm>
           <a:prstGeom prst="rect">
@@ -14653,8 +14869,8 @@
         </p:nvSpPr>
         <p:spPr>
           <a:xfrm>
-            <a:off x="7799832" y="4974336"/>
-            <a:ext cx="3145536" cy="576072"/>
+            <a:off x="7799832" y="4659782"/>
+            <a:ext cx="3145536" cy="899770"/>
           </a:xfrm>
           <a:prstGeom prst="rect">
             <a:avLst/>
@@ -14680,7 +14896,7 @@
                 <a:ea typeface="Aptos" pitchFamily="34" charset="-122"/>
                 <a:cs typeface="Aptos" pitchFamily="34" charset="-120"/>
               </a:rPr>
-              <a:t>Use the assignment to test whether you can explain the concept, apply it to a realistic public health situation, and.</a:t>
+              <a:t>Use the assignment to test whether you can explain the concept, apply it to a realistic public health situation, and identify what would need review before the work moves forward.</a:t>
             </a:r>
             <a:endParaRPr lang="en-US" sz="1320" dirty="0"/>
           </a:p>
@@ -15015,11 +15231,11 @@
         <p:spPr>
           <a:xfrm>
             <a:off x="7635240" y="1325880"/>
-            <a:ext cx="3474720" cy="1325880"/>
+            <a:ext cx="3474720" cy="1255471"/>
           </a:xfrm>
           <a:prstGeom prst="roundRect">
             <a:avLst>
-              <a:gd name="adj" fmla="val 8276"/>
+              <a:gd name="adj" fmla="val 8740"/>
             </a:avLst>
           </a:prstGeom>
           <a:solidFill>
@@ -15081,7 +15297,7 @@
         <p:spPr>
           <a:xfrm>
             <a:off x="7799832" y="1801368"/>
-            <a:ext cx="3145536" cy="758952"/>
+            <a:ext cx="3145536" cy="688543"/>
           </a:xfrm>
           <a:prstGeom prst="rect">
             <a:avLst/>
@@ -15121,12 +15337,12 @@
         </p:nvSpPr>
         <p:spPr>
           <a:xfrm>
-            <a:off x="7635240" y="2788920"/>
-            <a:ext cx="3474720" cy="1536192"/>
+            <a:off x="7635240" y="2718511"/>
+            <a:ext cx="3474720" cy="1328623"/>
           </a:xfrm>
           <a:prstGeom prst="roundRect">
             <a:avLst>
-              <a:gd name="adj" fmla="val 7143"/>
+              <a:gd name="adj" fmla="val 8259"/>
             </a:avLst>
           </a:prstGeom>
           <a:solidFill>
@@ -15148,7 +15364,7 @@
         </p:nvSpPr>
         <p:spPr>
           <a:xfrm>
-            <a:off x="7799832" y="2935224"/>
+            <a:off x="7799832" y="2864815"/>
             <a:ext cx="3145536" cy="256032"/>
           </a:xfrm>
           <a:prstGeom prst="rect">
@@ -15187,8 +15403,8 @@
         </p:nvSpPr>
         <p:spPr>
           <a:xfrm>
-            <a:off x="7818120" y="3300984"/>
-            <a:ext cx="3090672" cy="877824"/>
+            <a:off x="7818120" y="3230575"/>
+            <a:ext cx="3090672" cy="670255"/>
           </a:xfrm>
           <a:prstGeom prst="rect">
             <a:avLst/>
@@ -15228,12 +15444,12 @@
         </p:nvSpPr>
         <p:spPr>
           <a:xfrm>
-            <a:off x="7635240" y="4498848"/>
-            <a:ext cx="3474720" cy="1143000"/>
+            <a:off x="7635240" y="4184294"/>
+            <a:ext cx="3474720" cy="1466698"/>
           </a:xfrm>
           <a:prstGeom prst="roundRect">
             <a:avLst>
-              <a:gd name="adj" fmla="val 9600"/>
+              <a:gd name="adj" fmla="val 7481"/>
             </a:avLst>
           </a:prstGeom>
           <a:solidFill>
@@ -15255,7 +15471,7 @@
         </p:nvSpPr>
         <p:spPr>
           <a:xfrm>
-            <a:off x="7799832" y="4645152"/>
+            <a:off x="7799832" y="4330598"/>
             <a:ext cx="3145536" cy="256032"/>
           </a:xfrm>
           <a:prstGeom prst="rect">
@@ -15294,8 +15510,8 @@
         </p:nvSpPr>
         <p:spPr>
           <a:xfrm>
-            <a:off x="7799832" y="4974336"/>
-            <a:ext cx="3145536" cy="576072"/>
+            <a:off x="7799832" y="4659782"/>
+            <a:ext cx="3145536" cy="899770"/>
           </a:xfrm>
           <a:prstGeom prst="rect">
             <a:avLst/>
@@ -15321,7 +15537,7 @@
                 <a:ea typeface="Aptos" pitchFamily="34" charset="-122"/>
                 <a:cs typeface="Aptos" pitchFamily="34" charset="-120"/>
               </a:rPr>
-              <a:t>Use the assignment to test whether you can explain the concept, apply it to a realistic public health situation, and.</a:t>
+              <a:t>Use the assignment to test whether you can explain the concept, apply it to a realistic public health situation, and identify what would need review before the work moves forward.</a:t>
             </a:r>
             <a:endParaRPr lang="en-US" sz="1320" dirty="0"/>
           </a:p>
@@ -15690,11 +15906,11 @@
         <p:spPr>
           <a:xfrm>
             <a:off x="7635240" y="1325880"/>
-            <a:ext cx="3474720" cy="1325880"/>
+            <a:ext cx="3474720" cy="1255471"/>
           </a:xfrm>
           <a:prstGeom prst="roundRect">
             <a:avLst>
-              <a:gd name="adj" fmla="val 8276"/>
+              <a:gd name="adj" fmla="val 8740"/>
             </a:avLst>
           </a:prstGeom>
           <a:solidFill>
@@ -15756,7 +15972,7 @@
         <p:spPr>
           <a:xfrm>
             <a:off x="7799832" y="1801368"/>
-            <a:ext cx="3145536" cy="758952"/>
+            <a:ext cx="3145536" cy="688543"/>
           </a:xfrm>
           <a:prstGeom prst="rect">
             <a:avLst/>
@@ -15796,12 +16012,12 @@
         </p:nvSpPr>
         <p:spPr>
           <a:xfrm>
-            <a:off x="7635240" y="2788920"/>
-            <a:ext cx="3474720" cy="1536192"/>
+            <a:off x="7635240" y="2718511"/>
+            <a:ext cx="3474720" cy="1328623"/>
           </a:xfrm>
           <a:prstGeom prst="roundRect">
             <a:avLst>
-              <a:gd name="adj" fmla="val 7143"/>
+              <a:gd name="adj" fmla="val 8259"/>
             </a:avLst>
           </a:prstGeom>
           <a:solidFill>
@@ -15823,8 +16039,8 @@
         </p:nvSpPr>
         <p:spPr>
           <a:xfrm>
-            <a:off x="7799832" y="2935224"/>
-            <a:ext cx="3145536" cy="256032"/>
+            <a:off x="7799832" y="2846527"/>
+            <a:ext cx="3145536" cy="237744"/>
           </a:xfrm>
           <a:prstGeom prst="rect">
             <a:avLst/>
@@ -15840,7 +16056,7 @@
               <a:buNone/>
             </a:pPr>
             <a:r>
-              <a:rPr lang="en-US" sz="1300" b="1" dirty="0">
+              <a:rPr lang="en-US" sz="1250" b="1" dirty="0">
                 <a:solidFill>
                   <a:srgbClr val="0068B7"/>
                 </a:solidFill>
@@ -15848,101 +16064,317 @@
                 <a:ea typeface="Aptos" pitchFamily="34" charset="-122"/>
                 <a:cs typeface="Aptos" pitchFamily="34" charset="-120"/>
               </a:rPr>
-              <a:t>Concept checkpoints</a:t>
-            </a:r>
-            <a:endParaRPr lang="en-US" sz="1300" dirty="0"/>
-          </a:p>
-        </p:txBody>
-      </p:sp>
-      <p:sp>
-        <p:nvSpPr>
-          <p:cNvPr id="15" name="Text 13"/>
-          <p:cNvSpPr/>
-          <p:nvPr/>
-        </p:nvSpPr>
-        <p:spPr>
-          <a:xfrm>
-            <a:off x="7818120" y="3300984"/>
-            <a:ext cx="3090672" cy="877824"/>
-          </a:xfrm>
-          <a:prstGeom prst="rect">
-            <a:avLst/>
-          </a:prstGeom>
-          <a:noFill/>
-          <a:ln/>
-        </p:spPr>
-        <p:txBody>
-          <a:bodyPr wrap="square" lIns="508" tIns="508" rIns="508" bIns="508" rtlCol="0" anchor="t">
+              <a:t>Data-to-decision flow</a:t>
+            </a:r>
+            <a:endParaRPr lang="en-US" sz="1250" dirty="0"/>
+          </a:p>
+        </p:txBody>
+      </p:sp>
+      <p:sp>
+        <p:nvSpPr>
+          <p:cNvPr id="15" name="Shape 13"/>
+          <p:cNvSpPr/>
+          <p:nvPr/>
+        </p:nvSpPr>
+        <p:spPr>
+          <a:xfrm>
+            <a:off x="8763000" y="3399739"/>
+            <a:ext cx="164592" cy="0"/>
+          </a:xfrm>
+          <a:prstGeom prst="line">
+            <a:avLst/>
+          </a:prstGeom>
+          <a:noFill/>
+          <a:ln w="15240">
+            <a:solidFill>
+              <a:srgbClr val="8ABBD8"/>
+            </a:solidFill>
+            <a:prstDash val="solid"/>
+          </a:ln>
+        </p:spPr>
+      </p:sp>
+      <p:sp>
+        <p:nvSpPr>
+          <p:cNvPr id="16" name="Shape 14"/>
+          <p:cNvSpPr/>
+          <p:nvPr/>
+        </p:nvSpPr>
+        <p:spPr>
+          <a:xfrm>
+            <a:off x="7872984" y="3248863"/>
+            <a:ext cx="890016" cy="301752"/>
+          </a:xfrm>
+          <a:prstGeom prst="roundRect">
+            <a:avLst>
+              <a:gd name="adj" fmla="val 24242"/>
+            </a:avLst>
+          </a:prstGeom>
+          <a:solidFill>
+            <a:srgbClr val="0068B7"/>
+          </a:solidFill>
+          <a:ln w="12700">
+            <a:solidFill>
+              <a:srgbClr val="0068B7"/>
+            </a:solidFill>
+            <a:prstDash val="solid"/>
+          </a:ln>
+        </p:spPr>
+      </p:sp>
+      <p:sp>
+        <p:nvSpPr>
+          <p:cNvPr id="17" name="Text 15"/>
+          <p:cNvSpPr/>
+          <p:nvPr/>
+        </p:nvSpPr>
+        <p:spPr>
+          <a:xfrm>
+            <a:off x="7909560" y="3322015"/>
+            <a:ext cx="816864" cy="146304"/>
+          </a:xfrm>
+          <a:prstGeom prst="rect">
+            <a:avLst/>
+          </a:prstGeom>
+          <a:noFill/>
+          <a:ln/>
+        </p:spPr>
+        <p:txBody>
+          <a:bodyPr wrap="square" lIns="0" tIns="0" rIns="0" bIns="0" rtlCol="0" anchor="ctr">
             <a:normAutofit/>
           </a:bodyPr>
           <a:lstStyle/>
           <a:p>
-            <a:pPr indent="0" marL="0">
-              <a:buNone/>
-            </a:pPr>
-            <a:r>
-              <a:rPr lang="en-US" sz="1220" dirty="0">
-                <a:solidFill>
-                  <a:srgbClr val="17364A"/>
-                </a:solidFill>
-                <a:latin typeface="Aptos" pitchFamily="34" charset="0"/>
-                <a:ea typeface="Aptos" pitchFamily="34" charset="-122"/>
-                <a:cs typeface="Aptos" pitchFamily="34" charset="-120"/>
-              </a:rPr>
-              <a:t>Machine learning is a set of methods that allow computer systems.</a:t>
-            </a:r>
-            <a:endParaRPr lang="en-US" sz="1220" dirty="0"/>
-          </a:p>
-          <a:p>
-            <a:pPr indent="0" marL="0">
-              <a:buNone/>
-            </a:pPr>
-            <a:r>
-              <a:rPr lang="en-US" sz="1220" dirty="0">
-                <a:solidFill>
-                  <a:srgbClr val="17364A"/>
-                </a:solidFill>
-                <a:latin typeface="Aptos" pitchFamily="34" charset="0"/>
-                <a:ea typeface="Aptos" pitchFamily="34" charset="-122"/>
-                <a:cs typeface="Aptos" pitchFamily="34" charset="-120"/>
-              </a:rPr>
-              <a:t>In public health, machine learning may support surveillance.</a:t>
-            </a:r>
-            <a:endParaRPr lang="en-US" sz="1220" dirty="0"/>
-          </a:p>
-          <a:p>
-            <a:pPr indent="0" marL="0">
-              <a:buNone/>
-            </a:pPr>
-            <a:r>
-              <a:rPr lang="en-US" sz="1220" dirty="0">
-                <a:solidFill>
-                  <a:srgbClr val="17364A"/>
-                </a:solidFill>
-                <a:latin typeface="Aptos" pitchFamily="34" charset="0"/>
-                <a:ea typeface="Aptos" pitchFamily="34" charset="-122"/>
-                <a:cs typeface="Aptos" pitchFamily="34" charset="-120"/>
-              </a:rPr>
-              <a:t>The purpose is to help public health informaticians,.</a:t>
-            </a:r>
-            <a:endParaRPr lang="en-US" sz="1220" dirty="0"/>
-          </a:p>
-        </p:txBody>
-      </p:sp>
-      <p:sp>
-        <p:nvSpPr>
-          <p:cNvPr id="16" name="Shape 14"/>
-          <p:cNvSpPr/>
-          <p:nvPr/>
-        </p:nvSpPr>
-        <p:spPr>
-          <a:xfrm>
-            <a:off x="7635240" y="4498848"/>
-            <a:ext cx="3474720" cy="1143000"/>
+            <a:pPr algn="ctr" indent="0" marL="0">
+              <a:buNone/>
+            </a:pPr>
+            <a:r>
+              <a:rPr lang="en-US" sz="880" b="1" dirty="0">
+                <a:solidFill>
+                  <a:srgbClr val="FFFFFF"/>
+                </a:solidFill>
+                <a:latin typeface="Aptos" pitchFamily="34" charset="0"/>
+                <a:ea typeface="Aptos" pitchFamily="34" charset="-122"/>
+                <a:cs typeface="Aptos" pitchFamily="34" charset="-120"/>
+              </a:rPr>
+              <a:t>Data</a:t>
+            </a:r>
+            <a:endParaRPr lang="en-US" sz="880" dirty="0"/>
+          </a:p>
+        </p:txBody>
+      </p:sp>
+      <p:sp>
+        <p:nvSpPr>
+          <p:cNvPr id="18" name="Shape 16"/>
+          <p:cNvSpPr/>
+          <p:nvPr/>
+        </p:nvSpPr>
+        <p:spPr>
+          <a:xfrm>
+            <a:off x="9817608" y="3399739"/>
+            <a:ext cx="164592" cy="0"/>
+          </a:xfrm>
+          <a:prstGeom prst="line">
+            <a:avLst/>
+          </a:prstGeom>
+          <a:noFill/>
+          <a:ln w="15240">
+            <a:solidFill>
+              <a:srgbClr val="8ABBD8"/>
+            </a:solidFill>
+            <a:prstDash val="solid"/>
+          </a:ln>
+        </p:spPr>
+      </p:sp>
+      <p:sp>
+        <p:nvSpPr>
+          <p:cNvPr id="19" name="Shape 17"/>
+          <p:cNvSpPr/>
+          <p:nvPr/>
+        </p:nvSpPr>
+        <p:spPr>
+          <a:xfrm>
+            <a:off x="8927592" y="3248863"/>
+            <a:ext cx="890016" cy="301752"/>
           </a:xfrm>
           <a:prstGeom prst="roundRect">
             <a:avLst>
-              <a:gd name="adj" fmla="val 9600"/>
+              <a:gd name="adj" fmla="val 24242"/>
+            </a:avLst>
+          </a:prstGeom>
+          <a:solidFill>
+            <a:srgbClr val="2F8A28"/>
+          </a:solidFill>
+          <a:ln w="12700">
+            <a:solidFill>
+              <a:srgbClr val="2F8A28"/>
+            </a:solidFill>
+            <a:prstDash val="solid"/>
+          </a:ln>
+        </p:spPr>
+      </p:sp>
+      <p:sp>
+        <p:nvSpPr>
+          <p:cNvPr id="20" name="Text 18"/>
+          <p:cNvSpPr/>
+          <p:nvPr/>
+        </p:nvSpPr>
+        <p:spPr>
+          <a:xfrm>
+            <a:off x="8964168" y="3322015"/>
+            <a:ext cx="816864" cy="146304"/>
+          </a:xfrm>
+          <a:prstGeom prst="rect">
+            <a:avLst/>
+          </a:prstGeom>
+          <a:noFill/>
+          <a:ln/>
+        </p:spPr>
+        <p:txBody>
+          <a:bodyPr wrap="square" lIns="0" tIns="0" rIns="0" bIns="0" rtlCol="0" anchor="ctr">
+            <a:normAutofit/>
+          </a:bodyPr>
+          <a:lstStyle/>
+          <a:p>
+            <a:pPr algn="ctr" indent="0" marL="0">
+              <a:buNone/>
+            </a:pPr>
+            <a:r>
+              <a:rPr lang="en-US" sz="880" b="1" dirty="0">
+                <a:solidFill>
+                  <a:srgbClr val="FFFFFF"/>
+                </a:solidFill>
+                <a:latin typeface="Aptos" pitchFamily="34" charset="0"/>
+                <a:ea typeface="Aptos" pitchFamily="34" charset="-122"/>
+                <a:cs typeface="Aptos" pitchFamily="34" charset="-120"/>
+              </a:rPr>
+              <a:t>Analysis</a:t>
+            </a:r>
+            <a:endParaRPr lang="en-US" sz="880" dirty="0"/>
+          </a:p>
+        </p:txBody>
+      </p:sp>
+      <p:sp>
+        <p:nvSpPr>
+          <p:cNvPr id="21" name="Shape 19"/>
+          <p:cNvSpPr/>
+          <p:nvPr/>
+        </p:nvSpPr>
+        <p:spPr>
+          <a:xfrm>
+            <a:off x="9982200" y="3248863"/>
+            <a:ext cx="890016" cy="301752"/>
+          </a:xfrm>
+          <a:prstGeom prst="roundRect">
+            <a:avLst>
+              <a:gd name="adj" fmla="val 24242"/>
+            </a:avLst>
+          </a:prstGeom>
+          <a:solidFill>
+            <a:srgbClr val="6A4CA3"/>
+          </a:solidFill>
+          <a:ln w="12700">
+            <a:solidFill>
+              <a:srgbClr val="6A4CA3"/>
+            </a:solidFill>
+            <a:prstDash val="solid"/>
+          </a:ln>
+        </p:spPr>
+      </p:sp>
+      <p:sp>
+        <p:nvSpPr>
+          <p:cNvPr id="22" name="Text 20"/>
+          <p:cNvSpPr/>
+          <p:nvPr/>
+        </p:nvSpPr>
+        <p:spPr>
+          <a:xfrm>
+            <a:off x="10018776" y="3322015"/>
+            <a:ext cx="816864" cy="146304"/>
+          </a:xfrm>
+          <a:prstGeom prst="rect">
+            <a:avLst/>
+          </a:prstGeom>
+          <a:noFill/>
+          <a:ln/>
+        </p:spPr>
+        <p:txBody>
+          <a:bodyPr wrap="square" lIns="0" tIns="0" rIns="0" bIns="0" rtlCol="0" anchor="ctr">
+            <a:normAutofit/>
+          </a:bodyPr>
+          <a:lstStyle/>
+          <a:p>
+            <a:pPr algn="ctr" indent="0" marL="0">
+              <a:buNone/>
+            </a:pPr>
+            <a:r>
+              <a:rPr lang="en-US" sz="880" b="1" dirty="0">
+                <a:solidFill>
+                  <a:srgbClr val="FFFFFF"/>
+                </a:solidFill>
+                <a:latin typeface="Aptos" pitchFamily="34" charset="0"/>
+                <a:ea typeface="Aptos" pitchFamily="34" charset="-122"/>
+                <a:cs typeface="Aptos" pitchFamily="34" charset="-120"/>
+              </a:rPr>
+              <a:t>Review</a:t>
+            </a:r>
+            <a:endParaRPr lang="en-US" sz="880" dirty="0"/>
+          </a:p>
+        </p:txBody>
+      </p:sp>
+      <p:sp>
+        <p:nvSpPr>
+          <p:cNvPr id="23" name="Text 21"/>
+          <p:cNvSpPr/>
+          <p:nvPr/>
+        </p:nvSpPr>
+        <p:spPr>
+          <a:xfrm>
+            <a:off x="7854696" y="3742639"/>
+            <a:ext cx="3035808" cy="158191"/>
+          </a:xfrm>
+          <a:prstGeom prst="rect">
+            <a:avLst/>
+          </a:prstGeom>
+          <a:noFill/>
+          <a:ln/>
+        </p:spPr>
+        <p:txBody>
+          <a:bodyPr wrap="square" lIns="254" tIns="254" rIns="254" bIns="254" rtlCol="0" anchor="t">
+            <a:normAutofit/>
+          </a:bodyPr>
+          <a:lstStyle/>
+          <a:p>
+            <a:pPr indent="0" marL="0">
+              <a:buNone/>
+            </a:pPr>
+            <a:r>
+              <a:rPr lang="en-US" sz="1120" dirty="0">
+                <a:solidFill>
+                  <a:srgbClr val="17364A"/>
+                </a:solidFill>
+                <a:latin typeface="Aptos" pitchFamily="34" charset="0"/>
+                <a:ea typeface="Aptos" pitchFamily="34" charset="-122"/>
+                <a:cs typeface="Aptos" pitchFamily="34" charset="-120"/>
+              </a:rPr>
+              <a:t>The important handoff is not from data to AI; it is from analysis to accountable human review.</a:t>
+            </a:r>
+            <a:endParaRPr lang="en-US" sz="1120" dirty="0"/>
+          </a:p>
+        </p:txBody>
+      </p:sp>
+      <p:sp>
+        <p:nvSpPr>
+          <p:cNvPr id="24" name="Shape 22"/>
+          <p:cNvSpPr/>
+          <p:nvPr/>
+        </p:nvSpPr>
+        <p:spPr>
+          <a:xfrm>
+            <a:off x="7635240" y="4184294"/>
+            <a:ext cx="3474720" cy="1466698"/>
+          </a:xfrm>
+          <a:prstGeom prst="roundRect">
+            <a:avLst>
+              <a:gd name="adj" fmla="val 7481"/>
             </a:avLst>
           </a:prstGeom>
           <a:solidFill>
@@ -15958,13 +16390,13 @@
       </p:sp>
       <p:sp>
         <p:nvSpPr>
-          <p:cNvPr id="17" name="Text 15"/>
-          <p:cNvSpPr/>
-          <p:nvPr/>
-        </p:nvSpPr>
-        <p:spPr>
-          <a:xfrm>
-            <a:off x="7799832" y="4645152"/>
+          <p:cNvPr id="25" name="Text 23"/>
+          <p:cNvSpPr/>
+          <p:nvPr/>
+        </p:nvSpPr>
+        <p:spPr>
+          <a:xfrm>
+            <a:off x="7799832" y="4330598"/>
             <a:ext cx="3145536" cy="256032"/>
           </a:xfrm>
           <a:prstGeom prst="rect">
@@ -15997,14 +16429,14 @@
       </p:sp>
       <p:sp>
         <p:nvSpPr>
-          <p:cNvPr id="18" name="Text 16"/>
-          <p:cNvSpPr/>
-          <p:nvPr/>
-        </p:nvSpPr>
-        <p:spPr>
-          <a:xfrm>
-            <a:off x="7799832" y="4974336"/>
-            <a:ext cx="3145536" cy="576072"/>
+          <p:cNvPr id="26" name="Text 24"/>
+          <p:cNvSpPr/>
+          <p:nvPr/>
+        </p:nvSpPr>
+        <p:spPr>
+          <a:xfrm>
+            <a:off x="7799832" y="4659782"/>
+            <a:ext cx="3145536" cy="899770"/>
           </a:xfrm>
           <a:prstGeom prst="rect">
             <a:avLst/>
@@ -16030,7 +16462,7 @@
                 <a:ea typeface="Aptos" pitchFamily="34" charset="-122"/>
                 <a:cs typeface="Aptos" pitchFamily="34" charset="-120"/>
               </a:rPr>
-              <a:t>Connect the concept to public health purpose, responsible use, required safeguards, documentation, and the next action a.</a:t>
+              <a:t>Connect the concept to public health purpose, responsible use, required safeguards, documentation, and the next action a department should take.</a:t>
             </a:r>
             <a:endParaRPr lang="en-US" sz="1320" dirty="0"/>
           </a:p>
@@ -16399,11 +16831,11 @@
         <p:spPr>
           <a:xfrm>
             <a:off x="7635240" y="1325880"/>
-            <a:ext cx="3474720" cy="1325880"/>
+            <a:ext cx="3474720" cy="1255471"/>
           </a:xfrm>
           <a:prstGeom prst="roundRect">
             <a:avLst>
-              <a:gd name="adj" fmla="val 8276"/>
+              <a:gd name="adj" fmla="val 8740"/>
             </a:avLst>
           </a:prstGeom>
           <a:solidFill>
@@ -16465,7 +16897,7 @@
         <p:spPr>
           <a:xfrm>
             <a:off x="7799832" y="1801368"/>
-            <a:ext cx="3145536" cy="758952"/>
+            <a:ext cx="3145536" cy="688543"/>
           </a:xfrm>
           <a:prstGeom prst="rect">
             <a:avLst/>
@@ -16505,12 +16937,12 @@
         </p:nvSpPr>
         <p:spPr>
           <a:xfrm>
-            <a:off x="7635240" y="2788920"/>
-            <a:ext cx="3474720" cy="1536192"/>
+            <a:off x="7635240" y="2718511"/>
+            <a:ext cx="3474720" cy="1328623"/>
           </a:xfrm>
           <a:prstGeom prst="roundRect">
             <a:avLst>
-              <a:gd name="adj" fmla="val 7143"/>
+              <a:gd name="adj" fmla="val 8259"/>
             </a:avLst>
           </a:prstGeom>
           <a:solidFill>
@@ -16532,8 +16964,8 @@
         </p:nvSpPr>
         <p:spPr>
           <a:xfrm>
-            <a:off x="7799832" y="2935224"/>
-            <a:ext cx="3145536" cy="256032"/>
+            <a:off x="7799832" y="2846527"/>
+            <a:ext cx="3145536" cy="237744"/>
           </a:xfrm>
           <a:prstGeom prst="rect">
             <a:avLst/>
@@ -16549,7 +16981,7 @@
               <a:buNone/>
             </a:pPr>
             <a:r>
-              <a:rPr lang="en-US" sz="1300" b="1" dirty="0">
+              <a:rPr lang="en-US" sz="1250" b="1" dirty="0">
                 <a:solidFill>
                   <a:srgbClr val="0068B7"/>
                 </a:solidFill>
@@ -16557,101 +16989,317 @@
                 <a:ea typeface="Aptos" pitchFamily="34" charset="-122"/>
                 <a:cs typeface="Aptos" pitchFamily="34" charset="-120"/>
               </a:rPr>
-              <a:t>Concept checkpoints</a:t>
-            </a:r>
-            <a:endParaRPr lang="en-US" sz="1300" dirty="0"/>
-          </a:p>
-        </p:txBody>
-      </p:sp>
-      <p:sp>
-        <p:nvSpPr>
-          <p:cNvPr id="15" name="Text 13"/>
-          <p:cNvSpPr/>
-          <p:nvPr/>
-        </p:nvSpPr>
-        <p:spPr>
-          <a:xfrm>
-            <a:off x="7818120" y="3300984"/>
-            <a:ext cx="3090672" cy="877824"/>
-          </a:xfrm>
-          <a:prstGeom prst="rect">
-            <a:avLst/>
-          </a:prstGeom>
-          <a:noFill/>
-          <a:ln/>
-        </p:spPr>
-        <p:txBody>
-          <a:bodyPr wrap="square" lIns="508" tIns="508" rIns="508" bIns="508" rtlCol="0" anchor="t">
+              <a:t>Data-to-decision flow</a:t>
+            </a:r>
+            <a:endParaRPr lang="en-US" sz="1250" dirty="0"/>
+          </a:p>
+        </p:txBody>
+      </p:sp>
+      <p:sp>
+        <p:nvSpPr>
+          <p:cNvPr id="15" name="Shape 13"/>
+          <p:cNvSpPr/>
+          <p:nvPr/>
+        </p:nvSpPr>
+        <p:spPr>
+          <a:xfrm>
+            <a:off x="8763000" y="3399739"/>
+            <a:ext cx="164592" cy="0"/>
+          </a:xfrm>
+          <a:prstGeom prst="line">
+            <a:avLst/>
+          </a:prstGeom>
+          <a:noFill/>
+          <a:ln w="15240">
+            <a:solidFill>
+              <a:srgbClr val="8ABBD8"/>
+            </a:solidFill>
+            <a:prstDash val="solid"/>
+          </a:ln>
+        </p:spPr>
+      </p:sp>
+      <p:sp>
+        <p:nvSpPr>
+          <p:cNvPr id="16" name="Shape 14"/>
+          <p:cNvSpPr/>
+          <p:nvPr/>
+        </p:nvSpPr>
+        <p:spPr>
+          <a:xfrm>
+            <a:off x="7872984" y="3248863"/>
+            <a:ext cx="890016" cy="301752"/>
+          </a:xfrm>
+          <a:prstGeom prst="roundRect">
+            <a:avLst>
+              <a:gd name="adj" fmla="val 24242"/>
+            </a:avLst>
+          </a:prstGeom>
+          <a:solidFill>
+            <a:srgbClr val="0068B7"/>
+          </a:solidFill>
+          <a:ln w="12700">
+            <a:solidFill>
+              <a:srgbClr val="0068B7"/>
+            </a:solidFill>
+            <a:prstDash val="solid"/>
+          </a:ln>
+        </p:spPr>
+      </p:sp>
+      <p:sp>
+        <p:nvSpPr>
+          <p:cNvPr id="17" name="Text 15"/>
+          <p:cNvSpPr/>
+          <p:nvPr/>
+        </p:nvSpPr>
+        <p:spPr>
+          <a:xfrm>
+            <a:off x="7909560" y="3322015"/>
+            <a:ext cx="816864" cy="146304"/>
+          </a:xfrm>
+          <a:prstGeom prst="rect">
+            <a:avLst/>
+          </a:prstGeom>
+          <a:noFill/>
+          <a:ln/>
+        </p:spPr>
+        <p:txBody>
+          <a:bodyPr wrap="square" lIns="0" tIns="0" rIns="0" bIns="0" rtlCol="0" anchor="ctr">
             <a:normAutofit/>
           </a:bodyPr>
           <a:lstStyle/>
           <a:p>
-            <a:pPr indent="0" marL="0">
-              <a:buNone/>
-            </a:pPr>
-            <a:r>
-              <a:rPr lang="en-US" sz="1220" dirty="0">
-                <a:solidFill>
-                  <a:srgbClr val="17364A"/>
-                </a:solidFill>
-                <a:latin typeface="Aptos" pitchFamily="34" charset="0"/>
-                <a:ea typeface="Aptos" pitchFamily="34" charset="-122"/>
-                <a:cs typeface="Aptos" pitchFamily="34" charset="-120"/>
-              </a:rPr>
-              <a:t>Machine learning matters for public health AI because many.</a:t>
-            </a:r>
-            <a:endParaRPr lang="en-US" sz="1220" dirty="0"/>
-          </a:p>
-          <a:p>
-            <a:pPr indent="0" marL="0">
-              <a:buNone/>
-            </a:pPr>
-            <a:r>
-              <a:rPr lang="en-US" sz="1220" dirty="0">
-                <a:solidFill>
-                  <a:srgbClr val="17364A"/>
-                </a:solidFill>
-                <a:latin typeface="Aptos" pitchFamily="34" charset="0"/>
-                <a:ea typeface="Aptos" pitchFamily="34" charset="-122"/>
-                <a:cs typeface="Aptos" pitchFamily="34" charset="-120"/>
-              </a:rPr>
-              <a:t>A program may want to prioritize outreach based on predicted risk.</a:t>
-            </a:r>
-            <a:endParaRPr lang="en-US" sz="1220" dirty="0"/>
-          </a:p>
-          <a:p>
-            <a:pPr indent="0" marL="0">
-              <a:buNone/>
-            </a:pPr>
-            <a:r>
-              <a:rPr lang="en-US" sz="1220" dirty="0">
-                <a:solidFill>
-                  <a:srgbClr val="17364A"/>
-                </a:solidFill>
-                <a:latin typeface="Aptos" pitchFamily="34" charset="0"/>
-                <a:ea typeface="Aptos" pitchFamily="34" charset="-122"/>
-                <a:cs typeface="Aptos" pitchFamily="34" charset="-120"/>
-              </a:rPr>
-              <a:t>Each of these uses can affect who receives attention, services,.</a:t>
-            </a:r>
-            <a:endParaRPr lang="en-US" sz="1220" dirty="0"/>
-          </a:p>
-        </p:txBody>
-      </p:sp>
-      <p:sp>
-        <p:nvSpPr>
-          <p:cNvPr id="16" name="Shape 14"/>
-          <p:cNvSpPr/>
-          <p:nvPr/>
-        </p:nvSpPr>
-        <p:spPr>
-          <a:xfrm>
-            <a:off x="7635240" y="4498848"/>
-            <a:ext cx="3474720" cy="1143000"/>
+            <a:pPr algn="ctr" indent="0" marL="0">
+              <a:buNone/>
+            </a:pPr>
+            <a:r>
+              <a:rPr lang="en-US" sz="880" b="1" dirty="0">
+                <a:solidFill>
+                  <a:srgbClr val="FFFFFF"/>
+                </a:solidFill>
+                <a:latin typeface="Aptos" pitchFamily="34" charset="0"/>
+                <a:ea typeface="Aptos" pitchFamily="34" charset="-122"/>
+                <a:cs typeface="Aptos" pitchFamily="34" charset="-120"/>
+              </a:rPr>
+              <a:t>Data</a:t>
+            </a:r>
+            <a:endParaRPr lang="en-US" sz="880" dirty="0"/>
+          </a:p>
+        </p:txBody>
+      </p:sp>
+      <p:sp>
+        <p:nvSpPr>
+          <p:cNvPr id="18" name="Shape 16"/>
+          <p:cNvSpPr/>
+          <p:nvPr/>
+        </p:nvSpPr>
+        <p:spPr>
+          <a:xfrm>
+            <a:off x="9817608" y="3399739"/>
+            <a:ext cx="164592" cy="0"/>
+          </a:xfrm>
+          <a:prstGeom prst="line">
+            <a:avLst/>
+          </a:prstGeom>
+          <a:noFill/>
+          <a:ln w="15240">
+            <a:solidFill>
+              <a:srgbClr val="8ABBD8"/>
+            </a:solidFill>
+            <a:prstDash val="solid"/>
+          </a:ln>
+        </p:spPr>
+      </p:sp>
+      <p:sp>
+        <p:nvSpPr>
+          <p:cNvPr id="19" name="Shape 17"/>
+          <p:cNvSpPr/>
+          <p:nvPr/>
+        </p:nvSpPr>
+        <p:spPr>
+          <a:xfrm>
+            <a:off x="8927592" y="3248863"/>
+            <a:ext cx="890016" cy="301752"/>
           </a:xfrm>
           <a:prstGeom prst="roundRect">
             <a:avLst>
-              <a:gd name="adj" fmla="val 9600"/>
+              <a:gd name="adj" fmla="val 24242"/>
+            </a:avLst>
+          </a:prstGeom>
+          <a:solidFill>
+            <a:srgbClr val="2F8A28"/>
+          </a:solidFill>
+          <a:ln w="12700">
+            <a:solidFill>
+              <a:srgbClr val="2F8A28"/>
+            </a:solidFill>
+            <a:prstDash val="solid"/>
+          </a:ln>
+        </p:spPr>
+      </p:sp>
+      <p:sp>
+        <p:nvSpPr>
+          <p:cNvPr id="20" name="Text 18"/>
+          <p:cNvSpPr/>
+          <p:nvPr/>
+        </p:nvSpPr>
+        <p:spPr>
+          <a:xfrm>
+            <a:off x="8964168" y="3322015"/>
+            <a:ext cx="816864" cy="146304"/>
+          </a:xfrm>
+          <a:prstGeom prst="rect">
+            <a:avLst/>
+          </a:prstGeom>
+          <a:noFill/>
+          <a:ln/>
+        </p:spPr>
+        <p:txBody>
+          <a:bodyPr wrap="square" lIns="0" tIns="0" rIns="0" bIns="0" rtlCol="0" anchor="ctr">
+            <a:normAutofit/>
+          </a:bodyPr>
+          <a:lstStyle/>
+          <a:p>
+            <a:pPr algn="ctr" indent="0" marL="0">
+              <a:buNone/>
+            </a:pPr>
+            <a:r>
+              <a:rPr lang="en-US" sz="880" b="1" dirty="0">
+                <a:solidFill>
+                  <a:srgbClr val="FFFFFF"/>
+                </a:solidFill>
+                <a:latin typeface="Aptos" pitchFamily="34" charset="0"/>
+                <a:ea typeface="Aptos" pitchFamily="34" charset="-122"/>
+                <a:cs typeface="Aptos" pitchFamily="34" charset="-120"/>
+              </a:rPr>
+              <a:t>Analysis</a:t>
+            </a:r>
+            <a:endParaRPr lang="en-US" sz="880" dirty="0"/>
+          </a:p>
+        </p:txBody>
+      </p:sp>
+      <p:sp>
+        <p:nvSpPr>
+          <p:cNvPr id="21" name="Shape 19"/>
+          <p:cNvSpPr/>
+          <p:nvPr/>
+        </p:nvSpPr>
+        <p:spPr>
+          <a:xfrm>
+            <a:off x="9982200" y="3248863"/>
+            <a:ext cx="890016" cy="301752"/>
+          </a:xfrm>
+          <a:prstGeom prst="roundRect">
+            <a:avLst>
+              <a:gd name="adj" fmla="val 24242"/>
+            </a:avLst>
+          </a:prstGeom>
+          <a:solidFill>
+            <a:srgbClr val="6A4CA3"/>
+          </a:solidFill>
+          <a:ln w="12700">
+            <a:solidFill>
+              <a:srgbClr val="6A4CA3"/>
+            </a:solidFill>
+            <a:prstDash val="solid"/>
+          </a:ln>
+        </p:spPr>
+      </p:sp>
+      <p:sp>
+        <p:nvSpPr>
+          <p:cNvPr id="22" name="Text 20"/>
+          <p:cNvSpPr/>
+          <p:nvPr/>
+        </p:nvSpPr>
+        <p:spPr>
+          <a:xfrm>
+            <a:off x="10018776" y="3322015"/>
+            <a:ext cx="816864" cy="146304"/>
+          </a:xfrm>
+          <a:prstGeom prst="rect">
+            <a:avLst/>
+          </a:prstGeom>
+          <a:noFill/>
+          <a:ln/>
+        </p:spPr>
+        <p:txBody>
+          <a:bodyPr wrap="square" lIns="0" tIns="0" rIns="0" bIns="0" rtlCol="0" anchor="ctr">
+            <a:normAutofit/>
+          </a:bodyPr>
+          <a:lstStyle/>
+          <a:p>
+            <a:pPr algn="ctr" indent="0" marL="0">
+              <a:buNone/>
+            </a:pPr>
+            <a:r>
+              <a:rPr lang="en-US" sz="880" b="1" dirty="0">
+                <a:solidFill>
+                  <a:srgbClr val="FFFFFF"/>
+                </a:solidFill>
+                <a:latin typeface="Aptos" pitchFamily="34" charset="0"/>
+                <a:ea typeface="Aptos" pitchFamily="34" charset="-122"/>
+                <a:cs typeface="Aptos" pitchFamily="34" charset="-120"/>
+              </a:rPr>
+              <a:t>Review</a:t>
+            </a:r>
+            <a:endParaRPr lang="en-US" sz="880" dirty="0"/>
+          </a:p>
+        </p:txBody>
+      </p:sp>
+      <p:sp>
+        <p:nvSpPr>
+          <p:cNvPr id="23" name="Text 21"/>
+          <p:cNvSpPr/>
+          <p:nvPr/>
+        </p:nvSpPr>
+        <p:spPr>
+          <a:xfrm>
+            <a:off x="7854696" y="3742639"/>
+            <a:ext cx="3035808" cy="158191"/>
+          </a:xfrm>
+          <a:prstGeom prst="rect">
+            <a:avLst/>
+          </a:prstGeom>
+          <a:noFill/>
+          <a:ln/>
+        </p:spPr>
+        <p:txBody>
+          <a:bodyPr wrap="square" lIns="254" tIns="254" rIns="254" bIns="254" rtlCol="0" anchor="t">
+            <a:normAutofit/>
+          </a:bodyPr>
+          <a:lstStyle/>
+          <a:p>
+            <a:pPr indent="0" marL="0">
+              <a:buNone/>
+            </a:pPr>
+            <a:r>
+              <a:rPr lang="en-US" sz="1120" dirty="0">
+                <a:solidFill>
+                  <a:srgbClr val="17364A"/>
+                </a:solidFill>
+                <a:latin typeface="Aptos" pitchFamily="34" charset="0"/>
+                <a:ea typeface="Aptos" pitchFamily="34" charset="-122"/>
+                <a:cs typeface="Aptos" pitchFamily="34" charset="-120"/>
+              </a:rPr>
+              <a:t>The important handoff is not from data to AI; it is from analysis to accountable human review.</a:t>
+            </a:r>
+            <a:endParaRPr lang="en-US" sz="1120" dirty="0"/>
+          </a:p>
+        </p:txBody>
+      </p:sp>
+      <p:sp>
+        <p:nvSpPr>
+          <p:cNvPr id="24" name="Shape 22"/>
+          <p:cNvSpPr/>
+          <p:nvPr/>
+        </p:nvSpPr>
+        <p:spPr>
+          <a:xfrm>
+            <a:off x="7635240" y="4184294"/>
+            <a:ext cx="3474720" cy="1466698"/>
+          </a:xfrm>
+          <a:prstGeom prst="roundRect">
+            <a:avLst>
+              <a:gd name="adj" fmla="val 7481"/>
             </a:avLst>
           </a:prstGeom>
           <a:solidFill>
@@ -16667,13 +17315,13 @@
       </p:sp>
       <p:sp>
         <p:nvSpPr>
-          <p:cNvPr id="17" name="Text 15"/>
-          <p:cNvSpPr/>
-          <p:nvPr/>
-        </p:nvSpPr>
-        <p:spPr>
-          <a:xfrm>
-            <a:off x="7799832" y="4645152"/>
+          <p:cNvPr id="25" name="Text 23"/>
+          <p:cNvSpPr/>
+          <p:nvPr/>
+        </p:nvSpPr>
+        <p:spPr>
+          <a:xfrm>
+            <a:off x="7799832" y="4330598"/>
             <a:ext cx="3145536" cy="256032"/>
           </a:xfrm>
           <a:prstGeom prst="rect">
@@ -16706,14 +17354,14 @@
       </p:sp>
       <p:sp>
         <p:nvSpPr>
-          <p:cNvPr id="18" name="Text 16"/>
-          <p:cNvSpPr/>
-          <p:nvPr/>
-        </p:nvSpPr>
-        <p:spPr>
-          <a:xfrm>
-            <a:off x="7799832" y="4974336"/>
-            <a:ext cx="3145536" cy="576072"/>
+          <p:cNvPr id="26" name="Text 24"/>
+          <p:cNvSpPr/>
+          <p:nvPr/>
+        </p:nvSpPr>
+        <p:spPr>
+          <a:xfrm>
+            <a:off x="7799832" y="4659782"/>
+            <a:ext cx="3145536" cy="899770"/>
           </a:xfrm>
           <a:prstGeom prst="rect">
             <a:avLst/>
@@ -16739,7 +17387,7 @@
                 <a:ea typeface="Aptos" pitchFamily="34" charset="-122"/>
                 <a:cs typeface="Aptos" pitchFamily="34" charset="-120"/>
               </a:rPr>
-              <a:t>Connect the concept to public health purpose, responsible use, required safeguards, documentation, and the next action a.</a:t>
+              <a:t>Connect the concept to public health purpose, responsible use, required safeguards, documentation, and the next action a department should take.</a:t>
             </a:r>
             <a:endParaRPr lang="en-US" sz="1320" dirty="0"/>
           </a:p>
@@ -17108,11 +17756,11 @@
         <p:spPr>
           <a:xfrm>
             <a:off x="7635240" y="1325880"/>
-            <a:ext cx="3474720" cy="1325880"/>
+            <a:ext cx="3474720" cy="1255471"/>
           </a:xfrm>
           <a:prstGeom prst="roundRect">
             <a:avLst>
-              <a:gd name="adj" fmla="val 8276"/>
+              <a:gd name="adj" fmla="val 8740"/>
             </a:avLst>
           </a:prstGeom>
           <a:solidFill>
@@ -17174,7 +17822,7 @@
         <p:spPr>
           <a:xfrm>
             <a:off x="7799832" y="1801368"/>
-            <a:ext cx="3145536" cy="758952"/>
+            <a:ext cx="3145536" cy="688543"/>
           </a:xfrm>
           <a:prstGeom prst="rect">
             <a:avLst/>
@@ -17214,12 +17862,12 @@
         </p:nvSpPr>
         <p:spPr>
           <a:xfrm>
-            <a:off x="7635240" y="2788920"/>
-            <a:ext cx="3474720" cy="1536192"/>
+            <a:off x="7635240" y="2718511"/>
+            <a:ext cx="3474720" cy="1328623"/>
           </a:xfrm>
           <a:prstGeom prst="roundRect">
             <a:avLst>
-              <a:gd name="adj" fmla="val 7143"/>
+              <a:gd name="adj" fmla="val 8259"/>
             </a:avLst>
           </a:prstGeom>
           <a:solidFill>
@@ -17241,7 +17889,7 @@
         </p:nvSpPr>
         <p:spPr>
           <a:xfrm>
-            <a:off x="7799832" y="2935224"/>
+            <a:off x="7799832" y="2864815"/>
             <a:ext cx="3145536" cy="256032"/>
           </a:xfrm>
           <a:prstGeom prst="rect">
@@ -17280,8 +17928,8 @@
         </p:nvSpPr>
         <p:spPr>
           <a:xfrm>
-            <a:off x="7818120" y="3300984"/>
-            <a:ext cx="3090672" cy="877824"/>
+            <a:off x="7818120" y="3230575"/>
+            <a:ext cx="3090672" cy="670255"/>
           </a:xfrm>
           <a:prstGeom prst="rect">
             <a:avLst/>
@@ -17355,12 +18003,12 @@
         </p:nvSpPr>
         <p:spPr>
           <a:xfrm>
-            <a:off x="7635240" y="4498848"/>
-            <a:ext cx="3474720" cy="1143000"/>
+            <a:off x="7635240" y="4184294"/>
+            <a:ext cx="3474720" cy="1466698"/>
           </a:xfrm>
           <a:prstGeom prst="roundRect">
             <a:avLst>
-              <a:gd name="adj" fmla="val 9600"/>
+              <a:gd name="adj" fmla="val 7481"/>
             </a:avLst>
           </a:prstGeom>
           <a:solidFill>
@@ -17382,7 +18030,7 @@
         </p:nvSpPr>
         <p:spPr>
           <a:xfrm>
-            <a:off x="7799832" y="4645152"/>
+            <a:off x="7799832" y="4330598"/>
             <a:ext cx="3145536" cy="256032"/>
           </a:xfrm>
           <a:prstGeom prst="rect">
@@ -17421,8 +18069,8 @@
         </p:nvSpPr>
         <p:spPr>
           <a:xfrm>
-            <a:off x="7799832" y="4974336"/>
-            <a:ext cx="3145536" cy="576072"/>
+            <a:off x="7799832" y="4659782"/>
+            <a:ext cx="3145536" cy="899770"/>
           </a:xfrm>
           <a:prstGeom prst="rect">
             <a:avLst/>
@@ -17448,7 +18096,7 @@
                 <a:ea typeface="Aptos" pitchFamily="34" charset="-122"/>
                 <a:cs typeface="Aptos" pitchFamily="34" charset="-120"/>
               </a:rPr>
-              <a:t>Connect the concept to public health purpose, responsible use, required safeguards, documentation, and the next action a.</a:t>
+              <a:t>Connect the concept to public health purpose, responsible use, required safeguards, documentation, and the next action a department should take.</a:t>
             </a:r>
             <a:endParaRPr lang="en-US" sz="1320" dirty="0"/>
           </a:p>

--- a/downloads/presentations/modules/anl-210.pptx
+++ b/downloads/presentations/modules/anl-210.pptx
@@ -3343,8 +3343,8 @@
         </p:nvSpPr>
         <p:spPr>
           <a:xfrm>
-            <a:off x="868680" y="1508760"/>
-            <a:ext cx="6309360" cy="4160520"/>
+            <a:off x="822960" y="1463040"/>
+            <a:ext cx="6565392" cy="4343400"/>
           </a:xfrm>
           <a:prstGeom prst="rect">
             <a:avLst/>
@@ -3362,7 +3362,7 @@
               <a:buNone/>
             </a:pPr>
             <a:r>
-              <a:rPr lang="en-US" sz="2100" dirty="0">
+              <a:rPr lang="en-US" sz="1920" dirty="0">
                 <a:solidFill>
                   <a:srgbClr val="003A63"/>
                 </a:solidFill>
@@ -3370,16 +3370,16 @@
                 <a:ea typeface="Aptos" pitchFamily="34" charset="-122"/>
                 <a:cs typeface="Aptos" pitchFamily="34" charset="-120"/>
               </a:rPr>
-              <a:t>• Machine learning development typically begins with a defined prediction or classification task.</a:t>
-            </a:r>
-            <a:endParaRPr lang="en-US" sz="2100" dirty="0"/>
-          </a:p>
-          <a:p>
-            <a:pPr indent="0" marL="0">
-              <a:buNone/>
-            </a:pPr>
-            <a:r>
-              <a:rPr lang="en-US" sz="2100" dirty="0">
+              <a:t>• Machine learning development typically begins with a defined prediction or.</a:t>
+            </a:r>
+            <a:endParaRPr lang="en-US" sz="1920" dirty="0"/>
+          </a:p>
+          <a:p>
+            <a:pPr indent="0" marL="0">
+              <a:buNone/>
+            </a:pPr>
+            <a:r>
+              <a:rPr lang="en-US" sz="1920" dirty="0">
                 <a:solidFill>
                   <a:srgbClr val="003A63"/>
                 </a:solidFill>
@@ -3387,16 +3387,16 @@
                 <a:ea typeface="Aptos" pitchFamily="34" charset="-122"/>
                 <a:cs typeface="Aptos" pitchFamily="34" charset="-120"/>
               </a:rPr>
-              <a:t>• The task should be specific enough to test. “Use AI to improve surveillance” is too vague..</a:t>
-            </a:r>
-            <a:endParaRPr lang="en-US" sz="2100" dirty="0"/>
-          </a:p>
-          <a:p>
-            <a:pPr indent="0" marL="0">
-              <a:buNone/>
-            </a:pPr>
-            <a:r>
-              <a:rPr lang="en-US" sz="2100" dirty="0">
+              <a:t>• The task should be specific enough to test. “Use AI to improve surveillance”.</a:t>
+            </a:r>
+            <a:endParaRPr lang="en-US" sz="1920" dirty="0"/>
+          </a:p>
+          <a:p>
+            <a:pPr indent="0" marL="0">
+              <a:buNone/>
+            </a:pPr>
+            <a:r>
+              <a:rPr lang="en-US" sz="1920" dirty="0">
                 <a:solidFill>
                   <a:srgbClr val="003A63"/>
                 </a:solidFill>
@@ -3404,9 +3404,9 @@
                 <a:ea typeface="Aptos" pitchFamily="34" charset="-122"/>
                 <a:cs typeface="Aptos" pitchFamily="34" charset="-120"/>
               </a:rPr>
-              <a:t>• A clear task allows staff to define the target label, required features, acceptance criteria,.</a:t>
-            </a:r>
-            <a:endParaRPr lang="en-US" sz="2100" dirty="0"/>
+              <a:t>• A clear task allows staff to define the target label, required features,.</a:t>
+            </a:r>
+            <a:endParaRPr lang="en-US" sz="1920" dirty="0"/>
           </a:p>
         </p:txBody>
       </p:sp>
@@ -3418,12 +3418,12 @@
         </p:nvSpPr>
         <p:spPr>
           <a:xfrm>
-            <a:off x="7635240" y="1325880"/>
-            <a:ext cx="3474720" cy="1255471"/>
+            <a:off x="7543800" y="1325880"/>
+            <a:ext cx="3611880" cy="1261872"/>
           </a:xfrm>
           <a:prstGeom prst="roundRect">
             <a:avLst>
-              <a:gd name="adj" fmla="val 8740"/>
+              <a:gd name="adj" fmla="val 8696"/>
             </a:avLst>
           </a:prstGeom>
           <a:solidFill>
@@ -3445,8 +3445,8 @@
         </p:nvSpPr>
         <p:spPr>
           <a:xfrm>
-            <a:off x="7799832" y="1472184"/>
-            <a:ext cx="3145536" cy="256032"/>
+            <a:off x="7708392" y="1453896"/>
+            <a:ext cx="3282696" cy="228600"/>
           </a:xfrm>
           <a:prstGeom prst="rect">
             <a:avLst/>
@@ -3462,7 +3462,7 @@
               <a:buNone/>
             </a:pPr>
             <a:r>
-              <a:rPr lang="en-US" sz="1300" b="1" dirty="0">
+              <a:rPr lang="en-US" sz="1220" b="1" dirty="0">
                 <a:solidFill>
                   <a:srgbClr val="0068B7"/>
                 </a:solidFill>
@@ -3472,7 +3472,7 @@
               </a:rPr>
               <a:t>Core concept</a:t>
             </a:r>
-            <a:endParaRPr lang="en-US" sz="1300" dirty="0"/>
+            <a:endParaRPr lang="en-US" sz="1220" dirty="0"/>
           </a:p>
         </p:txBody>
       </p:sp>
@@ -3484,8 +3484,8 @@
         </p:nvSpPr>
         <p:spPr>
           <a:xfrm>
-            <a:off x="7799832" y="1801368"/>
-            <a:ext cx="3145536" cy="688543"/>
+            <a:off x="7708392" y="1764792"/>
+            <a:ext cx="3282696" cy="749808"/>
           </a:xfrm>
           <a:prstGeom prst="rect">
             <a:avLst/>
@@ -3503,7 +3503,7 @@
               <a:buNone/>
             </a:pPr>
             <a:r>
-              <a:rPr lang="en-US" sz="1320" dirty="0">
+              <a:rPr lang="en-US" sz="1220" dirty="0">
                 <a:solidFill>
                   <a:srgbClr val="17364A"/>
                 </a:solidFill>
@@ -3511,9 +3511,9 @@
                 <a:ea typeface="Aptos" pitchFamily="34" charset="-122"/>
                 <a:cs typeface="Aptos" pitchFamily="34" charset="-120"/>
               </a:rPr>
-              <a:t>Machine learning development typically begins with a defined prediction or classification task.</a:t>
-            </a:r>
-            <a:endParaRPr lang="en-US" sz="1320" dirty="0"/>
+              <a:t>Machine learning development typically begins with a defined prediction or.</a:t>
+            </a:r>
+            <a:endParaRPr lang="en-US" sz="1220" dirty="0"/>
           </a:p>
         </p:txBody>
       </p:sp>
@@ -3525,12 +3525,12 @@
         </p:nvSpPr>
         <p:spPr>
           <a:xfrm>
-            <a:off x="7635240" y="2718511"/>
-            <a:ext cx="3474720" cy="1328623"/>
+            <a:off x="7543800" y="2724912"/>
+            <a:ext cx="3611880" cy="1527048"/>
           </a:xfrm>
           <a:prstGeom prst="roundRect">
             <a:avLst>
-              <a:gd name="adj" fmla="val 8259"/>
+              <a:gd name="adj" fmla="val 7186"/>
             </a:avLst>
           </a:prstGeom>
           <a:solidFill>
@@ -3552,24 +3552,26 @@
         </p:nvSpPr>
         <p:spPr>
           <a:xfrm>
-            <a:off x="7799832" y="2846527"/>
-            <a:ext cx="3145536" cy="237744"/>
-          </a:xfrm>
-          <a:prstGeom prst="rect">
-            <a:avLst/>
-          </a:prstGeom>
-          <a:noFill/>
-          <a:ln/>
-        </p:spPr>
-        <p:txBody>
-          <a:bodyPr wrap="square" lIns="0" tIns="0" rIns="0" bIns="0" rtlCol="0" anchor="ctr"/>
-          <a:lstStyle/>
-          <a:p>
-            <a:pPr indent="0" marL="0">
-              <a:buNone/>
-            </a:pPr>
-            <a:r>
-              <a:rPr lang="en-US" sz="1250" b="1" dirty="0">
+            <a:off x="7708392" y="2852928"/>
+            <a:ext cx="3282696" cy="219456"/>
+          </a:xfrm>
+          <a:prstGeom prst="rect">
+            <a:avLst/>
+          </a:prstGeom>
+          <a:noFill/>
+          <a:ln/>
+        </p:spPr>
+        <p:txBody>
+          <a:bodyPr wrap="square" lIns="0" tIns="0" rIns="0" bIns="0" rtlCol="0" anchor="ctr">
+            <a:normAutofit/>
+          </a:bodyPr>
+          <a:lstStyle/>
+          <a:p>
+            <a:pPr indent="0" marL="0">
+              <a:buNone/>
+            </a:pPr>
+            <a:r>
+              <a:rPr lang="en-US" sz="1160" b="1" dirty="0">
                 <a:solidFill>
                   <a:srgbClr val="0068B7"/>
                 </a:solidFill>
@@ -3579,7 +3581,7 @@
               </a:rPr>
               <a:t>Data-to-decision flow</a:t>
             </a:r>
-            <a:endParaRPr lang="en-US" sz="1250" dirty="0"/>
+            <a:endParaRPr lang="en-US" sz="1160" dirty="0"/>
           </a:p>
         </p:txBody>
       </p:sp>
@@ -3591,7 +3593,7 @@
         </p:nvSpPr>
         <p:spPr>
           <a:xfrm>
-            <a:off x="8763000" y="3399739"/>
+            <a:off x="8717280" y="3406140"/>
             <a:ext cx="164592" cy="0"/>
           </a:xfrm>
           <a:prstGeom prst="line">
@@ -3614,8 +3616,8 @@
         </p:nvSpPr>
         <p:spPr>
           <a:xfrm>
-            <a:off x="7872984" y="3248863"/>
-            <a:ext cx="890016" cy="301752"/>
+            <a:off x="7781544" y="3255264"/>
+            <a:ext cx="935736" cy="301752"/>
           </a:xfrm>
           <a:prstGeom prst="roundRect">
             <a:avLst>
@@ -3641,8 +3643,8 @@
         </p:nvSpPr>
         <p:spPr>
           <a:xfrm>
-            <a:off x="7909560" y="3322015"/>
-            <a:ext cx="816864" cy="146304"/>
+            <a:off x="7818120" y="3328416"/>
+            <a:ext cx="862584" cy="146304"/>
           </a:xfrm>
           <a:prstGeom prst="rect">
             <a:avLst/>
@@ -3682,7 +3684,7 @@
         </p:nvSpPr>
         <p:spPr>
           <a:xfrm>
-            <a:off x="9817608" y="3399739"/>
+            <a:off x="9817608" y="3406140"/>
             <a:ext cx="164592" cy="0"/>
           </a:xfrm>
           <a:prstGeom prst="line">
@@ -3705,8 +3707,8 @@
         </p:nvSpPr>
         <p:spPr>
           <a:xfrm>
-            <a:off x="8927592" y="3248863"/>
-            <a:ext cx="890016" cy="301752"/>
+            <a:off x="8881872" y="3255264"/>
+            <a:ext cx="935736" cy="301752"/>
           </a:xfrm>
           <a:prstGeom prst="roundRect">
             <a:avLst>
@@ -3732,8 +3734,8 @@
         </p:nvSpPr>
         <p:spPr>
           <a:xfrm>
-            <a:off x="8964168" y="3322015"/>
-            <a:ext cx="816864" cy="146304"/>
+            <a:off x="8918448" y="3328416"/>
+            <a:ext cx="862584" cy="146304"/>
           </a:xfrm>
           <a:prstGeom prst="rect">
             <a:avLst/>
@@ -3773,8 +3775,8 @@
         </p:nvSpPr>
         <p:spPr>
           <a:xfrm>
-            <a:off x="9982200" y="3248863"/>
-            <a:ext cx="890016" cy="301752"/>
+            <a:off x="9982200" y="3255264"/>
+            <a:ext cx="935736" cy="301752"/>
           </a:xfrm>
           <a:prstGeom prst="roundRect">
             <a:avLst>
@@ -3800,8 +3802,8 @@
         </p:nvSpPr>
         <p:spPr>
           <a:xfrm>
-            <a:off x="10018776" y="3322015"/>
-            <a:ext cx="816864" cy="146304"/>
+            <a:off x="10018776" y="3328416"/>
+            <a:ext cx="862584" cy="146304"/>
           </a:xfrm>
           <a:prstGeom prst="rect">
             <a:avLst/>
@@ -3841,8 +3843,8 @@
         </p:nvSpPr>
         <p:spPr>
           <a:xfrm>
-            <a:off x="7854696" y="3742639"/>
-            <a:ext cx="3035808" cy="158191"/>
+            <a:off x="7763256" y="3749040"/>
+            <a:ext cx="3172968" cy="356616"/>
           </a:xfrm>
           <a:prstGeom prst="rect">
             <a:avLst/>
@@ -3860,7 +3862,7 @@
               <a:buNone/>
             </a:pPr>
             <a:r>
-              <a:rPr lang="en-US" sz="1120" dirty="0">
+              <a:rPr lang="en-US" sz="1040" dirty="0">
                 <a:solidFill>
                   <a:srgbClr val="17364A"/>
                 </a:solidFill>
@@ -3868,9 +3870,9 @@
                 <a:ea typeface="Aptos" pitchFamily="34" charset="-122"/>
                 <a:cs typeface="Aptos" pitchFamily="34" charset="-120"/>
               </a:rPr>
-              <a:t>The important handoff is not from data to AI; it is from analysis to accountable human review.</a:t>
-            </a:r>
-            <a:endParaRPr lang="en-US" sz="1120" dirty="0"/>
+              <a:t>The important handoff is not from data to AI; it is from analysis to.</a:t>
+            </a:r>
+            <a:endParaRPr lang="en-US" sz="1040" dirty="0"/>
           </a:p>
         </p:txBody>
       </p:sp>
@@ -3882,12 +3884,12 @@
         </p:nvSpPr>
         <p:spPr>
           <a:xfrm>
-            <a:off x="7635240" y="4184294"/>
-            <a:ext cx="3474720" cy="1466698"/>
+            <a:off x="7543800" y="4389120"/>
+            <a:ext cx="3611880" cy="1261872"/>
           </a:xfrm>
           <a:prstGeom prst="roundRect">
             <a:avLst>
-              <a:gd name="adj" fmla="val 7481"/>
+              <a:gd name="adj" fmla="val 8696"/>
             </a:avLst>
           </a:prstGeom>
           <a:solidFill>
@@ -3909,8 +3911,8 @@
         </p:nvSpPr>
         <p:spPr>
           <a:xfrm>
-            <a:off x="7799832" y="4330598"/>
-            <a:ext cx="3145536" cy="256032"/>
+            <a:off x="7708392" y="4517136"/>
+            <a:ext cx="3282696" cy="228600"/>
           </a:xfrm>
           <a:prstGeom prst="rect">
             <a:avLst/>
@@ -3926,7 +3928,7 @@
               <a:buNone/>
             </a:pPr>
             <a:r>
-              <a:rPr lang="en-US" sz="1300" b="1" dirty="0">
+              <a:rPr lang="en-US" sz="1220" b="1" dirty="0">
                 <a:solidFill>
                   <a:srgbClr val="0068B7"/>
                 </a:solidFill>
@@ -3936,7 +3938,7 @@
               </a:rPr>
               <a:t>Apply it</a:t>
             </a:r>
-            <a:endParaRPr lang="en-US" sz="1300" dirty="0"/>
+            <a:endParaRPr lang="en-US" sz="1220" dirty="0"/>
           </a:p>
         </p:txBody>
       </p:sp>
@@ -3948,8 +3950,8 @@
         </p:nvSpPr>
         <p:spPr>
           <a:xfrm>
-            <a:off x="7799832" y="4659782"/>
-            <a:ext cx="3145536" cy="899770"/>
+            <a:off x="7708392" y="4828032"/>
+            <a:ext cx="3282696" cy="749808"/>
           </a:xfrm>
           <a:prstGeom prst="rect">
             <a:avLst/>
@@ -3967,7 +3969,7 @@
               <a:buNone/>
             </a:pPr>
             <a:r>
-              <a:rPr lang="en-US" sz="1320" dirty="0">
+              <a:rPr lang="en-US" sz="1220" dirty="0">
                 <a:solidFill>
                   <a:srgbClr val="17364A"/>
                 </a:solidFill>
@@ -3975,9 +3977,9 @@
                 <a:ea typeface="Aptos" pitchFamily="34" charset="-122"/>
                 <a:cs typeface="Aptos" pitchFamily="34" charset="-120"/>
               </a:rPr>
-              <a:t>Connect the concept to public health purpose, responsible use, required safeguards, documentation, and the next action a department should take.</a:t>
-            </a:r>
-            <a:endParaRPr lang="en-US" sz="1320" dirty="0"/>
+              <a:t>Connect the concept to public health purpose, responsible use, required.</a:t>
+            </a:r>
+            <a:endParaRPr lang="en-US" sz="1220" dirty="0"/>
           </a:p>
         </p:txBody>
       </p:sp>
@@ -4268,8 +4270,8 @@
         </p:nvSpPr>
         <p:spPr>
           <a:xfrm>
-            <a:off x="868680" y="1508760"/>
-            <a:ext cx="6309360" cy="4160520"/>
+            <a:off x="822960" y="1463040"/>
+            <a:ext cx="6565392" cy="4343400"/>
           </a:xfrm>
           <a:prstGeom prst="rect">
             <a:avLst/>
@@ -4287,7 +4289,7 @@
               <a:buNone/>
             </a:pPr>
             <a:r>
-              <a:rPr lang="en-US" sz="2100" dirty="0">
+              <a:rPr lang="en-US" sz="1920" dirty="0">
                 <a:solidFill>
                   <a:srgbClr val="003A63"/>
                 </a:solidFill>
@@ -4297,14 +4299,14 @@
               </a:rPr>
               <a:t>• Model performance should be interpreted in relation to the workflow.</a:t>
             </a:r>
-            <a:endParaRPr lang="en-US" sz="2100" dirty="0"/>
-          </a:p>
-          <a:p>
-            <a:pPr indent="0" marL="0">
-              <a:buNone/>
-            </a:pPr>
-            <a:r>
-              <a:rPr lang="en-US" sz="2100" dirty="0">
+            <a:endParaRPr lang="en-US" sz="1920" dirty="0"/>
+          </a:p>
+          <a:p>
+            <a:pPr indent="0" marL="0">
+              <a:buNone/>
+            </a:pPr>
+            <a:r>
+              <a:rPr lang="en-US" sz="1920" dirty="0">
                 <a:solidFill>
                   <a:srgbClr val="003A63"/>
                 </a:solidFill>
@@ -4314,14 +4316,14 @@
               </a:rPr>
               <a:t>• A model with high overall accuracy may still miss rare but important events.</a:t>
             </a:r>
-            <a:endParaRPr lang="en-US" sz="2100" dirty="0"/>
-          </a:p>
-          <a:p>
-            <a:pPr indent="0" marL="0">
-              <a:buNone/>
-            </a:pPr>
-            <a:r>
-              <a:rPr lang="en-US" sz="2100" dirty="0">
+            <a:endParaRPr lang="en-US" sz="1920" dirty="0"/>
+          </a:p>
+          <a:p>
+            <a:pPr indent="0" marL="0">
+              <a:buNone/>
+            </a:pPr>
+            <a:r>
+              <a:rPr lang="en-US" sz="1920" dirty="0">
                 <a:solidFill>
                   <a:srgbClr val="003A63"/>
                 </a:solidFill>
@@ -4331,7 +4333,7 @@
               </a:rPr>
               <a:t>• A model with many false positives may burden staff and create alert fatigue.</a:t>
             </a:r>
-            <a:endParaRPr lang="en-US" sz="2100" dirty="0"/>
+            <a:endParaRPr lang="en-US" sz="1920" dirty="0"/>
           </a:p>
         </p:txBody>
       </p:sp>
@@ -4343,12 +4345,12 @@
         </p:nvSpPr>
         <p:spPr>
           <a:xfrm>
-            <a:off x="7635240" y="1325880"/>
-            <a:ext cx="3474720" cy="1207008"/>
+            <a:off x="7543800" y="1325880"/>
+            <a:ext cx="3611880" cy="1261872"/>
           </a:xfrm>
           <a:prstGeom prst="roundRect">
             <a:avLst>
-              <a:gd name="adj" fmla="val 9091"/>
+              <a:gd name="adj" fmla="val 8696"/>
             </a:avLst>
           </a:prstGeom>
           <a:solidFill>
@@ -4370,8 +4372,8 @@
         </p:nvSpPr>
         <p:spPr>
           <a:xfrm>
-            <a:off x="7799832" y="1472184"/>
-            <a:ext cx="3145536" cy="256032"/>
+            <a:off x="7708392" y="1453896"/>
+            <a:ext cx="3282696" cy="228600"/>
           </a:xfrm>
           <a:prstGeom prst="rect">
             <a:avLst/>
@@ -4387,7 +4389,7 @@
               <a:buNone/>
             </a:pPr>
             <a:r>
-              <a:rPr lang="en-US" sz="1300" b="1" dirty="0">
+              <a:rPr lang="en-US" sz="1220" b="1" dirty="0">
                 <a:solidFill>
                   <a:srgbClr val="0068B7"/>
                 </a:solidFill>
@@ -4397,7 +4399,7 @@
               </a:rPr>
               <a:t>Core concept</a:t>
             </a:r>
-            <a:endParaRPr lang="en-US" sz="1300" dirty="0"/>
+            <a:endParaRPr lang="en-US" sz="1220" dirty="0"/>
           </a:p>
         </p:txBody>
       </p:sp>
@@ -4409,8 +4411,8 @@
         </p:nvSpPr>
         <p:spPr>
           <a:xfrm>
-            <a:off x="7799832" y="1801368"/>
-            <a:ext cx="3145536" cy="640080"/>
+            <a:off x="7708392" y="1764792"/>
+            <a:ext cx="3282696" cy="749808"/>
           </a:xfrm>
           <a:prstGeom prst="rect">
             <a:avLst/>
@@ -4428,7 +4430,7 @@
               <a:buNone/>
             </a:pPr>
             <a:r>
-              <a:rPr lang="en-US" sz="1320" dirty="0">
+              <a:rPr lang="en-US" sz="1220" dirty="0">
                 <a:solidFill>
                   <a:srgbClr val="17364A"/>
                 </a:solidFill>
@@ -4438,7 +4440,7 @@
               </a:rPr>
               <a:t>Model performance should be interpreted in relation to the workflow.</a:t>
             </a:r>
-            <a:endParaRPr lang="en-US" sz="1320" dirty="0"/>
+            <a:endParaRPr lang="en-US" sz="1220" dirty="0"/>
           </a:p>
         </p:txBody>
       </p:sp>
@@ -4450,12 +4452,12 @@
         </p:nvSpPr>
         <p:spPr>
           <a:xfrm>
-            <a:off x="7635240" y="2670048"/>
-            <a:ext cx="3474720" cy="1377086"/>
+            <a:off x="7543800" y="2724912"/>
+            <a:ext cx="3611880" cy="1527048"/>
           </a:xfrm>
           <a:prstGeom prst="roundRect">
             <a:avLst>
-              <a:gd name="adj" fmla="val 7968"/>
+              <a:gd name="adj" fmla="val 7186"/>
             </a:avLst>
           </a:prstGeom>
           <a:solidFill>
@@ -4477,8 +4479,8 @@
         </p:nvSpPr>
         <p:spPr>
           <a:xfrm>
-            <a:off x="7799832" y="2816352"/>
-            <a:ext cx="3145536" cy="256032"/>
+            <a:off x="7708392" y="2852928"/>
+            <a:ext cx="3282696" cy="228600"/>
           </a:xfrm>
           <a:prstGeom prst="rect">
             <a:avLst/>
@@ -4494,7 +4496,7 @@
               <a:buNone/>
             </a:pPr>
             <a:r>
-              <a:rPr lang="en-US" sz="1300" b="1" dirty="0">
+              <a:rPr lang="en-US" sz="1220" b="1" dirty="0">
                 <a:solidFill>
                   <a:srgbClr val="0068B7"/>
                 </a:solidFill>
@@ -4504,7 +4506,7 @@
               </a:rPr>
               <a:t>Concept checkpoints</a:t>
             </a:r>
-            <a:endParaRPr lang="en-US" sz="1300" dirty="0"/>
+            <a:endParaRPr lang="en-US" sz="1220" dirty="0"/>
           </a:p>
         </p:txBody>
       </p:sp>
@@ -4516,8 +4518,8 @@
         </p:nvSpPr>
         <p:spPr>
           <a:xfrm>
-            <a:off x="7818120" y="3182112"/>
-            <a:ext cx="3090672" cy="718718"/>
+            <a:off x="7726680" y="3182112"/>
+            <a:ext cx="3227832" cy="960120"/>
           </a:xfrm>
           <a:prstGeom prst="rect">
             <a:avLst/>
@@ -4535,7 +4537,7 @@
               <a:buNone/>
             </a:pPr>
             <a:r>
-              <a:rPr lang="en-US" sz="1220" dirty="0">
+              <a:rPr lang="en-US" sz="1140" dirty="0">
                 <a:solidFill>
                   <a:srgbClr val="17364A"/>
                 </a:solidFill>
@@ -4543,16 +4545,16 @@
                 <a:ea typeface="Aptos" pitchFamily="34" charset="-122"/>
                 <a:cs typeface="Aptos" pitchFamily="34" charset="-120"/>
               </a:rPr>
-              <a:t>A model with many false negatives may miss cases, outbreaks, or.</a:t>
-            </a:r>
-            <a:endParaRPr lang="en-US" sz="1220" dirty="0"/>
-          </a:p>
-          <a:p>
-            <a:pPr indent="0" marL="0">
-              <a:buNone/>
-            </a:pPr>
-            <a:r>
-              <a:rPr lang="en-US" sz="1220" dirty="0">
+              <a:t>A model with many false negatives may miss cases,.</a:t>
+            </a:r>
+            <a:endParaRPr lang="en-US" sz="1140" dirty="0"/>
+          </a:p>
+          <a:p>
+            <a:pPr indent="0" marL="0">
+              <a:buNone/>
+            </a:pPr>
+            <a:r>
+              <a:rPr lang="en-US" sz="1140" dirty="0">
                 <a:solidFill>
                   <a:srgbClr val="17364A"/>
                 </a:solidFill>
@@ -4560,16 +4562,16 @@
                 <a:ea typeface="Aptos" pitchFamily="34" charset="-122"/>
                 <a:cs typeface="Aptos" pitchFamily="34" charset="-120"/>
               </a:rPr>
-              <a:t>Thresholds should be selected based on public health consequences,.</a:t>
-            </a:r>
-            <a:endParaRPr lang="en-US" sz="1220" dirty="0"/>
-          </a:p>
-          <a:p>
-            <a:pPr indent="0" marL="0">
-              <a:buNone/>
-            </a:pPr>
-            <a:r>
-              <a:rPr lang="en-US" sz="1220" dirty="0">
+              <a:t>Thresholds should be selected based on public.</a:t>
+            </a:r>
+            <a:endParaRPr lang="en-US" sz="1140" dirty="0"/>
+          </a:p>
+          <a:p>
+            <a:pPr indent="0" marL="0">
+              <a:buNone/>
+            </a:pPr>
+            <a:r>
+              <a:rPr lang="en-US" sz="1140" dirty="0">
                 <a:solidFill>
                   <a:srgbClr val="17364A"/>
                 </a:solidFill>
@@ -4577,9 +4579,9 @@
                 <a:ea typeface="Aptos" pitchFamily="34" charset="-122"/>
                 <a:cs typeface="Aptos" pitchFamily="34" charset="-120"/>
               </a:rPr>
-              <a:t>Human review should be designed into the workflow before deployment.</a:t>
-            </a:r>
-            <a:endParaRPr lang="en-US" sz="1220" dirty="0"/>
+              <a:t>Human review should be designed into the workflow.</a:t>
+            </a:r>
+            <a:endParaRPr lang="en-US" sz="1140" dirty="0"/>
           </a:p>
         </p:txBody>
       </p:sp>
@@ -4591,12 +4593,12 @@
         </p:nvSpPr>
         <p:spPr>
           <a:xfrm>
-            <a:off x="7635240" y="4184294"/>
-            <a:ext cx="3474720" cy="1466698"/>
+            <a:off x="7543800" y="4389120"/>
+            <a:ext cx="3611880" cy="1261872"/>
           </a:xfrm>
           <a:prstGeom prst="roundRect">
             <a:avLst>
-              <a:gd name="adj" fmla="val 7481"/>
+              <a:gd name="adj" fmla="val 8696"/>
             </a:avLst>
           </a:prstGeom>
           <a:solidFill>
@@ -4618,8 +4620,8 @@
         </p:nvSpPr>
         <p:spPr>
           <a:xfrm>
-            <a:off x="7799832" y="4330598"/>
-            <a:ext cx="3145536" cy="256032"/>
+            <a:off x="7708392" y="4517136"/>
+            <a:ext cx="3282696" cy="228600"/>
           </a:xfrm>
           <a:prstGeom prst="rect">
             <a:avLst/>
@@ -4635,7 +4637,7 @@
               <a:buNone/>
             </a:pPr>
             <a:r>
-              <a:rPr lang="en-US" sz="1300" b="1" dirty="0">
+              <a:rPr lang="en-US" sz="1220" b="1" dirty="0">
                 <a:solidFill>
                   <a:srgbClr val="0068B7"/>
                 </a:solidFill>
@@ -4645,7 +4647,7 @@
               </a:rPr>
               <a:t>Apply it</a:t>
             </a:r>
-            <a:endParaRPr lang="en-US" sz="1300" dirty="0"/>
+            <a:endParaRPr lang="en-US" sz="1220" dirty="0"/>
           </a:p>
         </p:txBody>
       </p:sp>
@@ -4657,8 +4659,8 @@
         </p:nvSpPr>
         <p:spPr>
           <a:xfrm>
-            <a:off x="7799832" y="4659782"/>
-            <a:ext cx="3145536" cy="899770"/>
+            <a:off x="7708392" y="4828032"/>
+            <a:ext cx="3282696" cy="749808"/>
           </a:xfrm>
           <a:prstGeom prst="rect">
             <a:avLst/>
@@ -4676,7 +4678,7 @@
               <a:buNone/>
             </a:pPr>
             <a:r>
-              <a:rPr lang="en-US" sz="1320" dirty="0">
+              <a:rPr lang="en-US" sz="1220" dirty="0">
                 <a:solidFill>
                   <a:srgbClr val="17364A"/>
                 </a:solidFill>
@@ -4684,9 +4686,9 @@
                 <a:ea typeface="Aptos" pitchFamily="34" charset="-122"/>
                 <a:cs typeface="Aptos" pitchFamily="34" charset="-120"/>
               </a:rPr>
-              <a:t>Connect the concept to public health purpose, responsible use, required safeguards, documentation, and the next action a department should take.</a:t>
-            </a:r>
-            <a:endParaRPr lang="en-US" sz="1320" dirty="0"/>
+              <a:t>Connect the concept to public health purpose, responsible use, required.</a:t>
+            </a:r>
+            <a:endParaRPr lang="en-US" sz="1220" dirty="0"/>
           </a:p>
         </p:txBody>
       </p:sp>
@@ -4977,8 +4979,8 @@
         </p:nvSpPr>
         <p:spPr>
           <a:xfrm>
-            <a:off x="868680" y="1508760"/>
-            <a:ext cx="6309360" cy="4160520"/>
+            <a:off x="822960" y="1463040"/>
+            <a:ext cx="6565392" cy="4343400"/>
           </a:xfrm>
           <a:prstGeom prst="rect">
             <a:avLst/>
@@ -4996,7 +4998,7 @@
               <a:buNone/>
             </a:pPr>
             <a:r>
-              <a:rPr lang="en-US" sz="2100" dirty="0">
+              <a:rPr lang="en-US" sz="1920" dirty="0">
                 <a:solidFill>
                   <a:srgbClr val="003A63"/>
                 </a:solidFill>
@@ -5006,14 +5008,14 @@
               </a:rPr>
               <a:t>• Biased or inconsistent labels.</a:t>
             </a:r>
-            <a:endParaRPr lang="en-US" sz="2100" dirty="0"/>
-          </a:p>
-          <a:p>
-            <a:pPr indent="0" marL="0">
-              <a:buNone/>
-            </a:pPr>
-            <a:r>
-              <a:rPr lang="en-US" sz="2100" dirty="0">
+            <a:endParaRPr lang="en-US" sz="1920" dirty="0"/>
+          </a:p>
+          <a:p>
+            <a:pPr indent="0" marL="0">
+              <a:buNone/>
+            </a:pPr>
+            <a:r>
+              <a:rPr lang="en-US" sz="1920" dirty="0">
                 <a:solidFill>
                   <a:srgbClr val="003A63"/>
                 </a:solidFill>
@@ -5021,16 +5023,16 @@
                 <a:ea typeface="Aptos" pitchFamily="34" charset="-122"/>
                 <a:cs typeface="Aptos" pitchFamily="34" charset="-120"/>
               </a:rPr>
-              <a:t>• If historical labels reflect unequal detection, inconsistent review, or limited resources, the.</a:t>
-            </a:r>
-            <a:endParaRPr lang="en-US" sz="2100" dirty="0"/>
-          </a:p>
-          <a:p>
-            <a:pPr indent="0" marL="0">
-              <a:buNone/>
-            </a:pPr>
-            <a:r>
-              <a:rPr lang="en-US" sz="2100" dirty="0">
+              <a:t>• If historical labels reflect unequal detection, inconsistent review, or.</a:t>
+            </a:r>
+            <a:endParaRPr lang="en-US" sz="1920" dirty="0"/>
+          </a:p>
+          <a:p>
+            <a:pPr indent="0" marL="0">
+              <a:buNone/>
+            </a:pPr>
+            <a:r>
+              <a:rPr lang="en-US" sz="1920" dirty="0">
                 <a:solidFill>
                   <a:srgbClr val="003A63"/>
                 </a:solidFill>
@@ -5038,9 +5040,9 @@
                 <a:ea typeface="Aptos" pitchFamily="34" charset="-122"/>
                 <a:cs typeface="Aptos" pitchFamily="34" charset="-120"/>
               </a:rPr>
-              <a:t>• Guardrails include label audits, expert review, subgroup analysis, and documentation of label.</a:t>
-            </a:r>
-            <a:endParaRPr lang="en-US" sz="2100" dirty="0"/>
+              <a:t>• Guardrails include label audits, expert review, subgroup analysis, and.</a:t>
+            </a:r>
+            <a:endParaRPr lang="en-US" sz="1920" dirty="0"/>
           </a:p>
         </p:txBody>
       </p:sp>
@@ -5052,12 +5054,12 @@
         </p:nvSpPr>
         <p:spPr>
           <a:xfrm>
-            <a:off x="7635240" y="1325880"/>
-            <a:ext cx="3474720" cy="1207008"/>
+            <a:off x="7543800" y="1325880"/>
+            <a:ext cx="3611880" cy="1261872"/>
           </a:xfrm>
           <a:prstGeom prst="roundRect">
             <a:avLst>
-              <a:gd name="adj" fmla="val 9091"/>
+              <a:gd name="adj" fmla="val 8696"/>
             </a:avLst>
           </a:prstGeom>
           <a:solidFill>
@@ -5079,8 +5081,8 @@
         </p:nvSpPr>
         <p:spPr>
           <a:xfrm>
-            <a:off x="7799832" y="1472184"/>
-            <a:ext cx="3145536" cy="256032"/>
+            <a:off x="7708392" y="1453896"/>
+            <a:ext cx="3282696" cy="228600"/>
           </a:xfrm>
           <a:prstGeom prst="rect">
             <a:avLst/>
@@ -5096,7 +5098,7 @@
               <a:buNone/>
             </a:pPr>
             <a:r>
-              <a:rPr lang="en-US" sz="1300" b="1" dirty="0">
+              <a:rPr lang="en-US" sz="1220" b="1" dirty="0">
                 <a:solidFill>
                   <a:srgbClr val="0068B7"/>
                 </a:solidFill>
@@ -5106,7 +5108,7 @@
               </a:rPr>
               <a:t>Risk check</a:t>
             </a:r>
-            <a:endParaRPr lang="en-US" sz="1300" dirty="0"/>
+            <a:endParaRPr lang="en-US" sz="1220" dirty="0"/>
           </a:p>
         </p:txBody>
       </p:sp>
@@ -5118,8 +5120,8 @@
         </p:nvSpPr>
         <p:spPr>
           <a:xfrm>
-            <a:off x="7799832" y="1801368"/>
-            <a:ext cx="3145536" cy="640080"/>
+            <a:off x="7708392" y="1764792"/>
+            <a:ext cx="3282696" cy="749808"/>
           </a:xfrm>
           <a:prstGeom prst="rect">
             <a:avLst/>
@@ -5137,7 +5139,7 @@
               <a:buNone/>
             </a:pPr>
             <a:r>
-              <a:rPr lang="en-US" sz="1320" dirty="0">
+              <a:rPr lang="en-US" sz="1220" dirty="0">
                 <a:solidFill>
                   <a:srgbClr val="17364A"/>
                 </a:solidFill>
@@ -5147,7 +5149,7 @@
               </a:rPr>
               <a:t>Biased or inconsistent labels.</a:t>
             </a:r>
-            <a:endParaRPr lang="en-US" sz="1320" dirty="0"/>
+            <a:endParaRPr lang="en-US" sz="1220" dirty="0"/>
           </a:p>
         </p:txBody>
       </p:sp>
@@ -5159,12 +5161,12 @@
         </p:nvSpPr>
         <p:spPr>
           <a:xfrm>
-            <a:off x="7635240" y="2670048"/>
-            <a:ext cx="3474720" cy="1536192"/>
+            <a:off x="7543800" y="2724912"/>
+            <a:ext cx="3611880" cy="1527048"/>
           </a:xfrm>
           <a:prstGeom prst="roundRect">
             <a:avLst>
-              <a:gd name="adj" fmla="val 7143"/>
+              <a:gd name="adj" fmla="val 7186"/>
             </a:avLst>
           </a:prstGeom>
           <a:solidFill>
@@ -5186,8 +5188,8 @@
         </p:nvSpPr>
         <p:spPr>
           <a:xfrm>
-            <a:off x="7799832" y="2816352"/>
-            <a:ext cx="3145536" cy="256032"/>
+            <a:off x="7708392" y="2852928"/>
+            <a:ext cx="3282696" cy="228600"/>
           </a:xfrm>
           <a:prstGeom prst="rect">
             <a:avLst/>
@@ -5203,7 +5205,7 @@
               <a:buNone/>
             </a:pPr>
             <a:r>
-              <a:rPr lang="en-US" sz="1300" b="1" dirty="0">
+              <a:rPr lang="en-US" sz="1220" b="1" dirty="0">
                 <a:solidFill>
                   <a:srgbClr val="0068B7"/>
                 </a:solidFill>
@@ -5213,7 +5215,7 @@
               </a:rPr>
               <a:t>Concept checkpoints</a:t>
             </a:r>
-            <a:endParaRPr lang="en-US" sz="1300" dirty="0"/>
+            <a:endParaRPr lang="en-US" sz="1220" dirty="0"/>
           </a:p>
         </p:txBody>
       </p:sp>
@@ -5225,8 +5227,8 @@
         </p:nvSpPr>
         <p:spPr>
           <a:xfrm>
-            <a:off x="7818120" y="3182112"/>
-            <a:ext cx="3090672" cy="877824"/>
+            <a:off x="7726680" y="3182112"/>
+            <a:ext cx="3227832" cy="960120"/>
           </a:xfrm>
           <a:prstGeom prst="rect">
             <a:avLst/>
@@ -5244,7 +5246,7 @@
               <a:buNone/>
             </a:pPr>
             <a:r>
-              <a:rPr lang="en-US" sz="1220" dirty="0">
+              <a:rPr lang="en-US" sz="1140" dirty="0">
                 <a:solidFill>
                   <a:srgbClr val="17364A"/>
                 </a:solidFill>
@@ -5252,16 +5254,16 @@
                 <a:ea typeface="Aptos" pitchFamily="34" charset="-122"/>
                 <a:cs typeface="Aptos" pitchFamily="34" charset="-120"/>
               </a:rPr>
-              <a:t>If historical labels reflect unequal detection, inconsistent.</a:t>
-            </a:r>
-            <a:endParaRPr lang="en-US" sz="1220" dirty="0"/>
-          </a:p>
-          <a:p>
-            <a:pPr indent="0" marL="0">
-              <a:buNone/>
-            </a:pPr>
-            <a:r>
-              <a:rPr lang="en-US" sz="1220" dirty="0">
+              <a:t>If historical labels reflect unequal detection,.</a:t>
+            </a:r>
+            <a:endParaRPr lang="en-US" sz="1140" dirty="0"/>
+          </a:p>
+          <a:p>
+            <a:pPr indent="0" marL="0">
+              <a:buNone/>
+            </a:pPr>
+            <a:r>
+              <a:rPr lang="en-US" sz="1140" dirty="0">
                 <a:solidFill>
                   <a:srgbClr val="17364A"/>
                 </a:solidFill>
@@ -5269,16 +5271,16 @@
                 <a:ea typeface="Aptos" pitchFamily="34" charset="-122"/>
                 <a:cs typeface="Aptos" pitchFamily="34" charset="-120"/>
               </a:rPr>
-              <a:t>Guardrails include label audits, expert review, subgroup analysis,.</a:t>
-            </a:r>
-            <a:endParaRPr lang="en-US" sz="1220" dirty="0"/>
-          </a:p>
-          <a:p>
-            <a:pPr indent="0" marL="0">
-              <a:buNone/>
-            </a:pPr>
-            <a:r>
-              <a:rPr lang="en-US" sz="1220" dirty="0">
+              <a:t>Guardrails include label audits, expert review,.</a:t>
+            </a:r>
+            <a:endParaRPr lang="en-US" sz="1140" dirty="0"/>
+          </a:p>
+          <a:p>
+            <a:pPr indent="0" marL="0">
+              <a:buNone/>
+            </a:pPr>
+            <a:r>
+              <a:rPr lang="en-US" sz="1140" dirty="0">
                 <a:solidFill>
                   <a:srgbClr val="17364A"/>
                 </a:solidFill>
@@ -5288,7 +5290,7 @@
               </a:rPr>
               <a:t>Data leakage.</a:t>
             </a:r>
-            <a:endParaRPr lang="en-US" sz="1220" dirty="0"/>
+            <a:endParaRPr lang="en-US" sz="1140" dirty="0"/>
           </a:p>
         </p:txBody>
       </p:sp>
@@ -5300,12 +5302,12 @@
         </p:nvSpPr>
         <p:spPr>
           <a:xfrm>
-            <a:off x="7635240" y="4343400"/>
-            <a:ext cx="3474720" cy="1255471"/>
+            <a:off x="7543800" y="4389120"/>
+            <a:ext cx="3611880" cy="1261872"/>
           </a:xfrm>
           <a:prstGeom prst="roundRect">
             <a:avLst>
-              <a:gd name="adj" fmla="val 8740"/>
+              <a:gd name="adj" fmla="val 8696"/>
             </a:avLst>
           </a:prstGeom>
           <a:solidFill>
@@ -5327,8 +5329,8 @@
         </p:nvSpPr>
         <p:spPr>
           <a:xfrm>
-            <a:off x="7799832" y="4489704"/>
-            <a:ext cx="3145536" cy="256032"/>
+            <a:off x="7708392" y="4517136"/>
+            <a:ext cx="3282696" cy="228600"/>
           </a:xfrm>
           <a:prstGeom prst="rect">
             <a:avLst/>
@@ -5344,7 +5346,7 @@
               <a:buNone/>
             </a:pPr>
             <a:r>
-              <a:rPr lang="en-US" sz="1300" b="1" dirty="0">
+              <a:rPr lang="en-US" sz="1220" b="1" dirty="0">
                 <a:solidFill>
                   <a:srgbClr val="0068B7"/>
                 </a:solidFill>
@@ -5354,7 +5356,7 @@
               </a:rPr>
               <a:t>Safeguard to plan</a:t>
             </a:r>
-            <a:endParaRPr lang="en-US" sz="1300" dirty="0"/>
+            <a:endParaRPr lang="en-US" sz="1220" dirty="0"/>
           </a:p>
         </p:txBody>
       </p:sp>
@@ -5366,8 +5368,8 @@
         </p:nvSpPr>
         <p:spPr>
           <a:xfrm>
-            <a:off x="7799832" y="4818888"/>
-            <a:ext cx="3145536" cy="688543"/>
+            <a:off x="7708392" y="4828032"/>
+            <a:ext cx="3282696" cy="749808"/>
           </a:xfrm>
           <a:prstGeom prst="rect">
             <a:avLst/>
@@ -5385,7 +5387,7 @@
               <a:buNone/>
             </a:pPr>
             <a:r>
-              <a:rPr lang="en-US" sz="1320" dirty="0">
+              <a:rPr lang="en-US" sz="1220" dirty="0">
                 <a:solidFill>
                   <a:srgbClr val="17364A"/>
                 </a:solidFill>
@@ -5393,9 +5395,9 @@
                 <a:ea typeface="Aptos" pitchFamily="34" charset="-122"/>
                 <a:cs typeface="Aptos" pitchFamily="34" charset="-120"/>
               </a:rPr>
-              <a:t>Identify what could go wrong, who could be affected, what safeguards are needed, and what evidence should be reviewed before use.</a:t>
-            </a:r>
-            <a:endParaRPr lang="en-US" sz="1320" dirty="0"/>
+              <a:t>Identify what could go wrong, who could be affected, what safeguards are needed,.</a:t>
+            </a:r>
+            <a:endParaRPr lang="en-US" sz="1220" dirty="0"/>
           </a:p>
         </p:txBody>
       </p:sp>
@@ -5686,8 +5688,8 @@
         </p:nvSpPr>
         <p:spPr>
           <a:xfrm>
-            <a:off x="868680" y="1508760"/>
-            <a:ext cx="6309360" cy="4160520"/>
+            <a:off x="822960" y="1463040"/>
+            <a:ext cx="6565392" cy="4343400"/>
           </a:xfrm>
           <a:prstGeom prst="rect">
             <a:avLst/>
@@ -5705,7 +5707,7 @@
               <a:buNone/>
             </a:pPr>
             <a:r>
-              <a:rPr lang="en-US" sz="2100" dirty="0">
+              <a:rPr lang="en-US" sz="1920" dirty="0">
                 <a:solidFill>
                   <a:srgbClr val="003A63"/>
                 </a:solidFill>
@@ -5715,14 +5717,14 @@
               </a:rPr>
               <a:t>• Misuse of prediction as explanation.</a:t>
             </a:r>
-            <a:endParaRPr lang="en-US" sz="2100" dirty="0"/>
-          </a:p>
-          <a:p>
-            <a:pPr indent="0" marL="0">
-              <a:buNone/>
-            </a:pPr>
-            <a:r>
-              <a:rPr lang="en-US" sz="2100" dirty="0">
+            <a:endParaRPr lang="en-US" sz="1920" dirty="0"/>
+          </a:p>
+          <a:p>
+            <a:pPr indent="0" marL="0">
+              <a:buNone/>
+            </a:pPr>
+            <a:r>
+              <a:rPr lang="en-US" sz="1920" dirty="0">
                 <a:solidFill>
                   <a:srgbClr val="003A63"/>
                 </a:solidFill>
@@ -5732,14 +5734,14 @@
               </a:rPr>
               <a:t>• A model can predict risk without explaining cause.</a:t>
             </a:r>
-            <a:endParaRPr lang="en-US" sz="2100" dirty="0"/>
-          </a:p>
-          <a:p>
-            <a:pPr indent="0" marL="0">
-              <a:buNone/>
-            </a:pPr>
-            <a:r>
-              <a:rPr lang="en-US" sz="2100" dirty="0">
+            <a:endParaRPr lang="en-US" sz="1920" dirty="0"/>
+          </a:p>
+          <a:p>
+            <a:pPr indent="0" marL="0">
+              <a:buNone/>
+            </a:pPr>
+            <a:r>
+              <a:rPr lang="en-US" sz="1920" dirty="0">
                 <a:solidFill>
                   <a:srgbClr val="003A63"/>
                 </a:solidFill>
@@ -5747,9 +5749,9 @@
                 <a:ea typeface="Aptos" pitchFamily="34" charset="-122"/>
                 <a:cs typeface="Aptos" pitchFamily="34" charset="-120"/>
               </a:rPr>
-              <a:t>• Guardrails include clear communication, training, and restrictions against causal claims unless.</a:t>
-            </a:r>
-            <a:endParaRPr lang="en-US" sz="2100" dirty="0"/>
+              <a:t>• Guardrails include clear communication, training, and restrictions against.</a:t>
+            </a:r>
+            <a:endParaRPr lang="en-US" sz="1920" dirty="0"/>
           </a:p>
         </p:txBody>
       </p:sp>
@@ -5761,12 +5763,12 @@
         </p:nvSpPr>
         <p:spPr>
           <a:xfrm>
-            <a:off x="7635240" y="1325880"/>
-            <a:ext cx="3474720" cy="1207008"/>
+            <a:off x="7543800" y="1325880"/>
+            <a:ext cx="3611880" cy="1261872"/>
           </a:xfrm>
           <a:prstGeom prst="roundRect">
             <a:avLst>
-              <a:gd name="adj" fmla="val 9091"/>
+              <a:gd name="adj" fmla="val 8696"/>
             </a:avLst>
           </a:prstGeom>
           <a:solidFill>
@@ -5788,8 +5790,8 @@
         </p:nvSpPr>
         <p:spPr>
           <a:xfrm>
-            <a:off x="7799832" y="1472184"/>
-            <a:ext cx="3145536" cy="256032"/>
+            <a:off x="7708392" y="1453896"/>
+            <a:ext cx="3282696" cy="228600"/>
           </a:xfrm>
           <a:prstGeom prst="rect">
             <a:avLst/>
@@ -5805,7 +5807,7 @@
               <a:buNone/>
             </a:pPr>
             <a:r>
-              <a:rPr lang="en-US" sz="1300" b="1" dirty="0">
+              <a:rPr lang="en-US" sz="1220" b="1" dirty="0">
                 <a:solidFill>
                   <a:srgbClr val="0068B7"/>
                 </a:solidFill>
@@ -5815,7 +5817,7 @@
               </a:rPr>
               <a:t>Risk check</a:t>
             </a:r>
-            <a:endParaRPr lang="en-US" sz="1300" dirty="0"/>
+            <a:endParaRPr lang="en-US" sz="1220" dirty="0"/>
           </a:p>
         </p:txBody>
       </p:sp>
@@ -5827,8 +5829,8 @@
         </p:nvSpPr>
         <p:spPr>
           <a:xfrm>
-            <a:off x="7799832" y="1801368"/>
-            <a:ext cx="3145536" cy="640080"/>
+            <a:off x="7708392" y="1764792"/>
+            <a:ext cx="3282696" cy="749808"/>
           </a:xfrm>
           <a:prstGeom prst="rect">
             <a:avLst/>
@@ -5846,7 +5848,7 @@
               <a:buNone/>
             </a:pPr>
             <a:r>
-              <a:rPr lang="en-US" sz="1320" dirty="0">
+              <a:rPr lang="en-US" sz="1220" dirty="0">
                 <a:solidFill>
                   <a:srgbClr val="17364A"/>
                 </a:solidFill>
@@ -5856,7 +5858,7 @@
               </a:rPr>
               <a:t>Misuse of prediction as explanation.</a:t>
             </a:r>
-            <a:endParaRPr lang="en-US" sz="1320" dirty="0"/>
+            <a:endParaRPr lang="en-US" sz="1220" dirty="0"/>
           </a:p>
         </p:txBody>
       </p:sp>
@@ -5868,12 +5870,12 @@
         </p:nvSpPr>
         <p:spPr>
           <a:xfrm>
-            <a:off x="7635240" y="2670048"/>
-            <a:ext cx="3474720" cy="1536192"/>
+            <a:off x="7543800" y="2724912"/>
+            <a:ext cx="3611880" cy="1527048"/>
           </a:xfrm>
           <a:prstGeom prst="roundRect">
             <a:avLst>
-              <a:gd name="adj" fmla="val 7143"/>
+              <a:gd name="adj" fmla="val 7186"/>
             </a:avLst>
           </a:prstGeom>
           <a:solidFill>
@@ -5895,8 +5897,8 @@
         </p:nvSpPr>
         <p:spPr>
           <a:xfrm>
-            <a:off x="7799832" y="2816352"/>
-            <a:ext cx="3145536" cy="256032"/>
+            <a:off x="7708392" y="2852928"/>
+            <a:ext cx="3282696" cy="228600"/>
           </a:xfrm>
           <a:prstGeom prst="rect">
             <a:avLst/>
@@ -5912,7 +5914,7 @@
               <a:buNone/>
             </a:pPr>
             <a:r>
-              <a:rPr lang="en-US" sz="1300" b="1" dirty="0">
+              <a:rPr lang="en-US" sz="1220" b="1" dirty="0">
                 <a:solidFill>
                   <a:srgbClr val="0068B7"/>
                 </a:solidFill>
@@ -5922,7 +5924,7 @@
               </a:rPr>
               <a:t>Concept checkpoints</a:t>
             </a:r>
-            <a:endParaRPr lang="en-US" sz="1300" dirty="0"/>
+            <a:endParaRPr lang="en-US" sz="1220" dirty="0"/>
           </a:p>
         </p:txBody>
       </p:sp>
@@ -5934,8 +5936,8 @@
         </p:nvSpPr>
         <p:spPr>
           <a:xfrm>
-            <a:off x="7818120" y="3182112"/>
-            <a:ext cx="3090672" cy="877824"/>
+            <a:off x="7726680" y="3182112"/>
+            <a:ext cx="3227832" cy="960120"/>
           </a:xfrm>
           <a:prstGeom prst="rect">
             <a:avLst/>
@@ -5953,7 +5955,7 @@
               <a:buNone/>
             </a:pPr>
             <a:r>
-              <a:rPr lang="en-US" sz="1220" dirty="0">
+              <a:rPr lang="en-US" sz="1140" dirty="0">
                 <a:solidFill>
                   <a:srgbClr val="17364A"/>
                 </a:solidFill>
@@ -5963,14 +5965,14 @@
               </a:rPr>
               <a:t>Misuse of prediction as explanation.</a:t>
             </a:r>
-            <a:endParaRPr lang="en-US" sz="1220" dirty="0"/>
-          </a:p>
-          <a:p>
-            <a:pPr indent="0" marL="0">
-              <a:buNone/>
-            </a:pPr>
-            <a:r>
-              <a:rPr lang="en-US" sz="1220" dirty="0">
+            <a:endParaRPr lang="en-US" sz="1140" dirty="0"/>
+          </a:p>
+          <a:p>
+            <a:pPr indent="0" marL="0">
+              <a:buNone/>
+            </a:pPr>
+            <a:r>
+              <a:rPr lang="en-US" sz="1140" dirty="0">
                 <a:solidFill>
                   <a:srgbClr val="17364A"/>
                 </a:solidFill>
@@ -5980,14 +5982,14 @@
               </a:rPr>
               <a:t>A model can predict risk without explaining cause.</a:t>
             </a:r>
-            <a:endParaRPr lang="en-US" sz="1220" dirty="0"/>
-          </a:p>
-          <a:p>
-            <a:pPr indent="0" marL="0">
-              <a:buNone/>
-            </a:pPr>
-            <a:r>
-              <a:rPr lang="en-US" sz="1220" dirty="0">
+            <a:endParaRPr lang="en-US" sz="1140" dirty="0"/>
+          </a:p>
+          <a:p>
+            <a:pPr indent="0" marL="0">
+              <a:buNone/>
+            </a:pPr>
+            <a:r>
+              <a:rPr lang="en-US" sz="1140" dirty="0">
                 <a:solidFill>
                   <a:srgbClr val="17364A"/>
                 </a:solidFill>
@@ -5995,9 +5997,9 @@
                 <a:ea typeface="Aptos" pitchFamily="34" charset="-122"/>
                 <a:cs typeface="Aptos" pitchFamily="34" charset="-120"/>
               </a:rPr>
-              <a:t>Guardrails include clear communication, training, and restrictions.</a:t>
-            </a:r>
-            <a:endParaRPr lang="en-US" sz="1220" dirty="0"/>
+              <a:t>Guardrails include clear communication, training,.</a:t>
+            </a:r>
+            <a:endParaRPr lang="en-US" sz="1140" dirty="0"/>
           </a:p>
         </p:txBody>
       </p:sp>
@@ -6009,12 +6011,12 @@
         </p:nvSpPr>
         <p:spPr>
           <a:xfrm>
-            <a:off x="7635240" y="4343400"/>
-            <a:ext cx="3474720" cy="1255471"/>
+            <a:off x="7543800" y="4389120"/>
+            <a:ext cx="3611880" cy="1261872"/>
           </a:xfrm>
           <a:prstGeom prst="roundRect">
             <a:avLst>
-              <a:gd name="adj" fmla="val 8740"/>
+              <a:gd name="adj" fmla="val 8696"/>
             </a:avLst>
           </a:prstGeom>
           <a:solidFill>
@@ -6036,8 +6038,8 @@
         </p:nvSpPr>
         <p:spPr>
           <a:xfrm>
-            <a:off x="7799832" y="4489704"/>
-            <a:ext cx="3145536" cy="256032"/>
+            <a:off x="7708392" y="4517136"/>
+            <a:ext cx="3282696" cy="228600"/>
           </a:xfrm>
           <a:prstGeom prst="rect">
             <a:avLst/>
@@ -6053,7 +6055,7 @@
               <a:buNone/>
             </a:pPr>
             <a:r>
-              <a:rPr lang="en-US" sz="1300" b="1" dirty="0">
+              <a:rPr lang="en-US" sz="1220" b="1" dirty="0">
                 <a:solidFill>
                   <a:srgbClr val="0068B7"/>
                 </a:solidFill>
@@ -6063,7 +6065,7 @@
               </a:rPr>
               <a:t>Safeguard to plan</a:t>
             </a:r>
-            <a:endParaRPr lang="en-US" sz="1300" dirty="0"/>
+            <a:endParaRPr lang="en-US" sz="1220" dirty="0"/>
           </a:p>
         </p:txBody>
       </p:sp>
@@ -6075,8 +6077,8 @@
         </p:nvSpPr>
         <p:spPr>
           <a:xfrm>
-            <a:off x="7799832" y="4818888"/>
-            <a:ext cx="3145536" cy="688543"/>
+            <a:off x="7708392" y="4828032"/>
+            <a:ext cx="3282696" cy="749808"/>
           </a:xfrm>
           <a:prstGeom prst="rect">
             <a:avLst/>
@@ -6094,7 +6096,7 @@
               <a:buNone/>
             </a:pPr>
             <a:r>
-              <a:rPr lang="en-US" sz="1320" dirty="0">
+              <a:rPr lang="en-US" sz="1220" dirty="0">
                 <a:solidFill>
                   <a:srgbClr val="17364A"/>
                 </a:solidFill>
@@ -6102,9 +6104,9 @@
                 <a:ea typeface="Aptos" pitchFamily="34" charset="-122"/>
                 <a:cs typeface="Aptos" pitchFamily="34" charset="-120"/>
               </a:rPr>
-              <a:t>Identify what could go wrong, who could be affected, what safeguards are needed, and what evidence should be reviewed before use.</a:t>
-            </a:r>
-            <a:endParaRPr lang="en-US" sz="1320" dirty="0"/>
+              <a:t>Identify what could go wrong, who could be affected, what safeguards are needed,.</a:t>
+            </a:r>
+            <a:endParaRPr lang="en-US" sz="1220" dirty="0"/>
           </a:p>
         </p:txBody>
       </p:sp>
@@ -6395,8 +6397,8 @@
         </p:nvSpPr>
         <p:spPr>
           <a:xfrm>
-            <a:off x="868680" y="1508760"/>
-            <a:ext cx="6309360" cy="4160520"/>
+            <a:off x="822960" y="1463040"/>
+            <a:ext cx="6565392" cy="4343400"/>
           </a:xfrm>
           <a:prstGeom prst="rect">
             <a:avLst/>
@@ -6414,7 +6416,7 @@
               <a:buNone/>
             </a:pPr>
             <a:r>
-              <a:rPr lang="en-US" sz="2100" dirty="0">
+              <a:rPr lang="en-US" sz="1920" dirty="0">
                 <a:solidFill>
                   <a:srgbClr val="003A63"/>
                 </a:solidFill>
@@ -6422,16 +6424,16 @@
                 <a:ea typeface="Aptos" pitchFamily="34" charset="-122"/>
                 <a:cs typeface="Aptos" pitchFamily="34" charset="-120"/>
               </a:rPr>
-              <a:t>• Machine learning may support generative AI, predictive analytics, NLP, anomaly detection, and.</a:t>
-            </a:r>
-            <a:endParaRPr lang="en-US" sz="2100" dirty="0"/>
-          </a:p>
-          <a:p>
-            <a:pPr indent="0" marL="0">
-              <a:buNone/>
-            </a:pPr>
-            <a:r>
-              <a:rPr lang="en-US" sz="2100" dirty="0">
+              <a:t>• Machine learning may support generative AI, predictive analytics, NLP,.</a:t>
+            </a:r>
+            <a:endParaRPr lang="en-US" sz="1920" dirty="0"/>
+          </a:p>
+          <a:p>
+            <a:pPr indent="0" marL="0">
+              <a:buNone/>
+            </a:pPr>
+            <a:r>
+              <a:rPr lang="en-US" sz="1920" dirty="0">
                 <a:solidFill>
                   <a:srgbClr val="003A63"/>
                 </a:solidFill>
@@ -6439,16 +6441,16 @@
                 <a:ea typeface="Aptos" pitchFamily="34" charset="-122"/>
                 <a:cs typeface="Aptos" pitchFamily="34" charset="-120"/>
               </a:rPr>
-              <a:t>• In generative AI systems, machine learning concepts help staff understand why outputs may be.</a:t>
-            </a:r>
-            <a:endParaRPr lang="en-US" sz="2100" dirty="0"/>
-          </a:p>
-          <a:p>
-            <a:pPr indent="0" marL="0">
-              <a:buNone/>
-            </a:pPr>
-            <a:r>
-              <a:rPr lang="en-US" sz="2100" dirty="0">
+              <a:t>• In generative AI systems, machine learning concepts help staff understand.</a:t>
+            </a:r>
+            <a:endParaRPr lang="en-US" sz="1920" dirty="0"/>
+          </a:p>
+          <a:p>
+            <a:pPr indent="0" marL="0">
+              <a:buNone/>
+            </a:pPr>
+            <a:r>
+              <a:rPr lang="en-US" sz="1920" dirty="0">
                 <a:solidFill>
                   <a:srgbClr val="003A63"/>
                 </a:solidFill>
@@ -6456,9 +6458,9 @@
                 <a:ea typeface="Aptos" pitchFamily="34" charset="-122"/>
                 <a:cs typeface="Aptos" pitchFamily="34" charset="-120"/>
               </a:rPr>
-              <a:t>• In predictive workflows, machine learning literacy helps staff evaluate risk scores,.</a:t>
-            </a:r>
-            <a:endParaRPr lang="en-US" sz="2100" dirty="0"/>
+              <a:t>• In predictive workflows, machine learning literacy helps staff evaluate risk.</a:t>
+            </a:r>
+            <a:endParaRPr lang="en-US" sz="1920" dirty="0"/>
           </a:p>
         </p:txBody>
       </p:sp>
@@ -6470,12 +6472,12 @@
         </p:nvSpPr>
         <p:spPr>
           <a:xfrm>
-            <a:off x="7635240" y="1325880"/>
-            <a:ext cx="3474720" cy="1255471"/>
+            <a:off x="7543800" y="1325880"/>
+            <a:ext cx="3611880" cy="1261872"/>
           </a:xfrm>
           <a:prstGeom prst="roundRect">
             <a:avLst>
-              <a:gd name="adj" fmla="val 8740"/>
+              <a:gd name="adj" fmla="val 8696"/>
             </a:avLst>
           </a:prstGeom>
           <a:solidFill>
@@ -6497,8 +6499,8 @@
         </p:nvSpPr>
         <p:spPr>
           <a:xfrm>
-            <a:off x="7799832" y="1472184"/>
-            <a:ext cx="3145536" cy="256032"/>
+            <a:off x="7708392" y="1453896"/>
+            <a:ext cx="3282696" cy="228600"/>
           </a:xfrm>
           <a:prstGeom prst="rect">
             <a:avLst/>
@@ -6514,7 +6516,7 @@
               <a:buNone/>
             </a:pPr>
             <a:r>
-              <a:rPr lang="en-US" sz="1300" b="1" dirty="0">
+              <a:rPr lang="en-US" sz="1220" b="1" dirty="0">
                 <a:solidFill>
                   <a:srgbClr val="0068B7"/>
                 </a:solidFill>
@@ -6524,7 +6526,7 @@
               </a:rPr>
               <a:t>Implementation cue</a:t>
             </a:r>
-            <a:endParaRPr lang="en-US" sz="1300" dirty="0"/>
+            <a:endParaRPr lang="en-US" sz="1220" dirty="0"/>
           </a:p>
         </p:txBody>
       </p:sp>
@@ -6536,8 +6538,8 @@
         </p:nvSpPr>
         <p:spPr>
           <a:xfrm>
-            <a:off x="7799832" y="1801368"/>
-            <a:ext cx="3145536" cy="688543"/>
+            <a:off x="7708392" y="1764792"/>
+            <a:ext cx="3282696" cy="749808"/>
           </a:xfrm>
           <a:prstGeom prst="rect">
             <a:avLst/>
@@ -6555,7 +6557,7 @@
               <a:buNone/>
             </a:pPr>
             <a:r>
-              <a:rPr lang="en-US" sz="1320" dirty="0">
+              <a:rPr lang="en-US" sz="1220" dirty="0">
                 <a:solidFill>
                   <a:srgbClr val="17364A"/>
                 </a:solidFill>
@@ -6563,9 +6565,9 @@
                 <a:ea typeface="Aptos" pitchFamily="34" charset="-122"/>
                 <a:cs typeface="Aptos" pitchFamily="34" charset="-120"/>
               </a:rPr>
-              <a:t>Machine learning may support generative AI, predictive analytics, NLP, anomaly detection, and agentic.</a:t>
-            </a:r>
-            <a:endParaRPr lang="en-US" sz="1320" dirty="0"/>
+              <a:t>Machine learning may support generative AI, predictive analytics, NLP, anomaly.</a:t>
+            </a:r>
+            <a:endParaRPr lang="en-US" sz="1220" dirty="0"/>
           </a:p>
         </p:txBody>
       </p:sp>
@@ -6577,12 +6579,12 @@
         </p:nvSpPr>
         <p:spPr>
           <a:xfrm>
-            <a:off x="7635240" y="2718511"/>
-            <a:ext cx="3474720" cy="1328623"/>
+            <a:off x="7543800" y="2724912"/>
+            <a:ext cx="3611880" cy="1527048"/>
           </a:xfrm>
           <a:prstGeom prst="roundRect">
             <a:avLst>
-              <a:gd name="adj" fmla="val 8259"/>
+              <a:gd name="adj" fmla="val 7186"/>
             </a:avLst>
           </a:prstGeom>
           <a:solidFill>
@@ -6604,8 +6606,8 @@
         </p:nvSpPr>
         <p:spPr>
           <a:xfrm>
-            <a:off x="7799832" y="2864815"/>
-            <a:ext cx="3145536" cy="256032"/>
+            <a:off x="7708392" y="2852928"/>
+            <a:ext cx="3282696" cy="228600"/>
           </a:xfrm>
           <a:prstGeom prst="rect">
             <a:avLst/>
@@ -6621,7 +6623,7 @@
               <a:buNone/>
             </a:pPr>
             <a:r>
-              <a:rPr lang="en-US" sz="1300" b="1" dirty="0">
+              <a:rPr lang="en-US" sz="1220" b="1" dirty="0">
                 <a:solidFill>
                   <a:srgbClr val="0068B7"/>
                 </a:solidFill>
@@ -6631,7 +6633,7 @@
               </a:rPr>
               <a:t>Concept checkpoints</a:t>
             </a:r>
-            <a:endParaRPr lang="en-US" sz="1300" dirty="0"/>
+            <a:endParaRPr lang="en-US" sz="1220" dirty="0"/>
           </a:p>
         </p:txBody>
       </p:sp>
@@ -6643,8 +6645,8 @@
         </p:nvSpPr>
         <p:spPr>
           <a:xfrm>
-            <a:off x="7818120" y="3230575"/>
-            <a:ext cx="3090672" cy="670255"/>
+            <a:off x="7726680" y="3182112"/>
+            <a:ext cx="3227832" cy="960120"/>
           </a:xfrm>
           <a:prstGeom prst="rect">
             <a:avLst/>
@@ -6662,7 +6664,7 @@
               <a:buNone/>
             </a:pPr>
             <a:r>
-              <a:rPr lang="en-US" sz="1220" dirty="0">
+              <a:rPr lang="en-US" sz="1140" dirty="0">
                 <a:solidFill>
                   <a:srgbClr val="17364A"/>
                 </a:solidFill>
@@ -6670,16 +6672,16 @@
                 <a:ea typeface="Aptos" pitchFamily="34" charset="-122"/>
                 <a:cs typeface="Aptos" pitchFamily="34" charset="-120"/>
               </a:rPr>
-              <a:t>Machine learning may support generative AI, predictive analytics,.</a:t>
-            </a:r>
-            <a:endParaRPr lang="en-US" sz="1220" dirty="0"/>
-          </a:p>
-          <a:p>
-            <a:pPr indent="0" marL="0">
-              <a:buNone/>
-            </a:pPr>
-            <a:r>
-              <a:rPr lang="en-US" sz="1220" dirty="0">
+              <a:t>Machine learning may support generative AI,.</a:t>
+            </a:r>
+            <a:endParaRPr lang="en-US" sz="1140" dirty="0"/>
+          </a:p>
+          <a:p>
+            <a:pPr indent="0" marL="0">
+              <a:buNone/>
+            </a:pPr>
+            <a:r>
+              <a:rPr lang="en-US" sz="1140" dirty="0">
                 <a:solidFill>
                   <a:srgbClr val="17364A"/>
                 </a:solidFill>
@@ -6687,16 +6689,16 @@
                 <a:ea typeface="Aptos" pitchFamily="34" charset="-122"/>
                 <a:cs typeface="Aptos" pitchFamily="34" charset="-120"/>
               </a:rPr>
-              <a:t>In generative AI systems, machine learning concepts help staff.</a:t>
-            </a:r>
-            <a:endParaRPr lang="en-US" sz="1220" dirty="0"/>
-          </a:p>
-          <a:p>
-            <a:pPr indent="0" marL="0">
-              <a:buNone/>
-            </a:pPr>
-            <a:r>
-              <a:rPr lang="en-US" sz="1220" dirty="0">
+              <a:t>In generative AI systems, machine learning.</a:t>
+            </a:r>
+            <a:endParaRPr lang="en-US" sz="1140" dirty="0"/>
+          </a:p>
+          <a:p>
+            <a:pPr indent="0" marL="0">
+              <a:buNone/>
+            </a:pPr>
+            <a:r>
+              <a:rPr lang="en-US" sz="1140" dirty="0">
                 <a:solidFill>
                   <a:srgbClr val="17364A"/>
                 </a:solidFill>
@@ -6704,9 +6706,9 @@
                 <a:ea typeface="Aptos" pitchFamily="34" charset="-122"/>
                 <a:cs typeface="Aptos" pitchFamily="34" charset="-120"/>
               </a:rPr>
-              <a:t>In predictive workflows, machine learning literacy helps staff.</a:t>
-            </a:r>
-            <a:endParaRPr lang="en-US" sz="1220" dirty="0"/>
+              <a:t>In predictive workflows, machine learning literacy.</a:t>
+            </a:r>
+            <a:endParaRPr lang="en-US" sz="1140" dirty="0"/>
           </a:p>
         </p:txBody>
       </p:sp>
@@ -6718,12 +6720,12 @@
         </p:nvSpPr>
         <p:spPr>
           <a:xfrm>
-            <a:off x="7635240" y="4184294"/>
-            <a:ext cx="3474720" cy="1466698"/>
+            <a:off x="7543800" y="4389120"/>
+            <a:ext cx="3611880" cy="1261872"/>
           </a:xfrm>
           <a:prstGeom prst="roundRect">
             <a:avLst>
-              <a:gd name="adj" fmla="val 7481"/>
+              <a:gd name="adj" fmla="val 8696"/>
             </a:avLst>
           </a:prstGeom>
           <a:solidFill>
@@ -6745,8 +6747,8 @@
         </p:nvSpPr>
         <p:spPr>
           <a:xfrm>
-            <a:off x="7799832" y="4330598"/>
-            <a:ext cx="3145536" cy="256032"/>
+            <a:off x="7708392" y="4517136"/>
+            <a:ext cx="3282696" cy="228600"/>
           </a:xfrm>
           <a:prstGeom prst="rect">
             <a:avLst/>
@@ -6762,7 +6764,7 @@
               <a:buNone/>
             </a:pPr>
             <a:r>
-              <a:rPr lang="en-US" sz="1300" b="1" dirty="0">
+              <a:rPr lang="en-US" sz="1220" b="1" dirty="0">
                 <a:solidFill>
                   <a:srgbClr val="0068B7"/>
                 </a:solidFill>
@@ -6772,7 +6774,7 @@
               </a:rPr>
               <a:t>Next action</a:t>
             </a:r>
-            <a:endParaRPr lang="en-US" sz="1300" dirty="0"/>
+            <a:endParaRPr lang="en-US" sz="1220" dirty="0"/>
           </a:p>
         </p:txBody>
       </p:sp>
@@ -6784,8 +6786,8 @@
         </p:nvSpPr>
         <p:spPr>
           <a:xfrm>
-            <a:off x="7799832" y="4659782"/>
-            <a:ext cx="3145536" cy="899770"/>
+            <a:off x="7708392" y="4828032"/>
+            <a:ext cx="3282696" cy="749808"/>
           </a:xfrm>
           <a:prstGeom prst="rect">
             <a:avLst/>
@@ -6803,7 +6805,7 @@
               <a:buNone/>
             </a:pPr>
             <a:r>
-              <a:rPr lang="en-US" sz="1320" dirty="0">
+              <a:rPr lang="en-US" sz="1220" dirty="0">
                 <a:solidFill>
                   <a:srgbClr val="17364A"/>
                 </a:solidFill>
@@ -6811,9 +6813,9 @@
                 <a:ea typeface="Aptos" pitchFamily="34" charset="-122"/>
                 <a:cs typeface="Aptos" pitchFamily="34" charset="-120"/>
               </a:rPr>
-              <a:t>Use the concept to clarify workflow changes, dependencies, staffing, procurement requirements, training needs, and implementation checkpoints.</a:t>
-            </a:r>
-            <a:endParaRPr lang="en-US" sz="1320" dirty="0"/>
+              <a:t>Use the concept to clarify workflow changes, dependencies, staffing, procurement.</a:t>
+            </a:r>
+            <a:endParaRPr lang="en-US" sz="1220" dirty="0"/>
           </a:p>
         </p:txBody>
       </p:sp>
@@ -7104,8 +7106,8 @@
         </p:nvSpPr>
         <p:spPr>
           <a:xfrm>
-            <a:off x="868680" y="1508760"/>
-            <a:ext cx="6309360" cy="4160520"/>
+            <a:off x="822960" y="1463040"/>
+            <a:ext cx="6565392" cy="4343400"/>
           </a:xfrm>
           <a:prstGeom prst="rect">
             <a:avLst/>
@@ -7123,7 +7125,7 @@
               <a:buNone/>
             </a:pPr>
             <a:r>
-              <a:rPr lang="en-US" sz="2100" dirty="0">
+              <a:rPr lang="en-US" sz="1920" dirty="0">
                 <a:solidFill>
                   <a:srgbClr val="003A63"/>
                 </a:solidFill>
@@ -7131,16 +7133,16 @@
                 <a:ea typeface="Aptos" pitchFamily="34" charset="-122"/>
                 <a:cs typeface="Aptos" pitchFamily="34" charset="-120"/>
               </a:rPr>
-              <a:t>• What public health task would the model support: classification, prediction, ranking,.</a:t>
-            </a:r>
-            <a:endParaRPr lang="en-US" sz="2100" dirty="0"/>
-          </a:p>
-          <a:p>
-            <a:pPr indent="0" marL="0">
-              <a:buNone/>
-            </a:pPr>
-            <a:r>
-              <a:rPr lang="en-US" sz="2100" dirty="0">
+              <a:t>• What public health task would the model support: classification, prediction,.</a:t>
+            </a:r>
+            <a:endParaRPr lang="en-US" sz="1920" dirty="0"/>
+          </a:p>
+          <a:p>
+            <a:pPr indent="0" marL="0">
+              <a:buNone/>
+            </a:pPr>
+            <a:r>
+              <a:rPr lang="en-US" sz="1920" dirty="0">
                 <a:solidFill>
                   <a:srgbClr val="003A63"/>
                 </a:solidFill>
@@ -7150,14 +7152,14 @@
               </a:rPr>
               <a:t>• What label would be used, and how reliable or equitable is that label?</a:t>
             </a:r>
-            <a:endParaRPr lang="en-US" sz="2100" dirty="0"/>
-          </a:p>
-          <a:p>
-            <a:pPr indent="0" marL="0">
-              <a:buNone/>
-            </a:pPr>
-            <a:r>
-              <a:rPr lang="en-US" sz="2100" dirty="0">
+            <a:endParaRPr lang="en-US" sz="1920" dirty="0"/>
+          </a:p>
+          <a:p>
+            <a:pPr indent="0" marL="0">
+              <a:buNone/>
+            </a:pPr>
+            <a:r>
+              <a:rPr lang="en-US" sz="1920" dirty="0">
                 <a:solidFill>
                   <a:srgbClr val="003A63"/>
                 </a:solidFill>
@@ -7165,9 +7167,9 @@
                 <a:ea typeface="Aptos" pitchFamily="34" charset="-122"/>
                 <a:cs typeface="Aptos" pitchFamily="34" charset="-120"/>
               </a:rPr>
-              <a:t>• Which features might reflect access, documentation, or reporting bias rather than true risk?</a:t>
-            </a:r>
-            <a:endParaRPr lang="en-US" sz="2100" dirty="0"/>
+              <a:t>• Which features might reflect access, documentation, or reporting bias rather.</a:t>
+            </a:r>
+            <a:endParaRPr lang="en-US" sz="1920" dirty="0"/>
           </a:p>
         </p:txBody>
       </p:sp>
@@ -7179,12 +7181,12 @@
         </p:nvSpPr>
         <p:spPr>
           <a:xfrm>
-            <a:off x="7635240" y="1325880"/>
-            <a:ext cx="3474720" cy="1255471"/>
+            <a:off x="7543800" y="1325880"/>
+            <a:ext cx="3611880" cy="1261872"/>
           </a:xfrm>
           <a:prstGeom prst="roundRect">
             <a:avLst>
-              <a:gd name="adj" fmla="val 8740"/>
+              <a:gd name="adj" fmla="val 8696"/>
             </a:avLst>
           </a:prstGeom>
           <a:solidFill>
@@ -7206,8 +7208,8 @@
         </p:nvSpPr>
         <p:spPr>
           <a:xfrm>
-            <a:off x="7799832" y="1472184"/>
-            <a:ext cx="3145536" cy="256032"/>
+            <a:off x="7708392" y="1453896"/>
+            <a:ext cx="3282696" cy="228600"/>
           </a:xfrm>
           <a:prstGeom prst="rect">
             <a:avLst/>
@@ -7223,7 +7225,7 @@
               <a:buNone/>
             </a:pPr>
             <a:r>
-              <a:rPr lang="en-US" sz="1300" b="1" dirty="0">
+              <a:rPr lang="en-US" sz="1220" b="1" dirty="0">
                 <a:solidFill>
                   <a:srgbClr val="0068B7"/>
                 </a:solidFill>
@@ -7233,7 +7235,7 @@
               </a:rPr>
               <a:t>Core concept</a:t>
             </a:r>
-            <a:endParaRPr lang="en-US" sz="1300" dirty="0"/>
+            <a:endParaRPr lang="en-US" sz="1220" dirty="0"/>
           </a:p>
         </p:txBody>
       </p:sp>
@@ -7245,8 +7247,8 @@
         </p:nvSpPr>
         <p:spPr>
           <a:xfrm>
-            <a:off x="7799832" y="1801368"/>
-            <a:ext cx="3145536" cy="688543"/>
+            <a:off x="7708392" y="1764792"/>
+            <a:ext cx="3282696" cy="749808"/>
           </a:xfrm>
           <a:prstGeom prst="rect">
             <a:avLst/>
@@ -7264,7 +7266,7 @@
               <a:buNone/>
             </a:pPr>
             <a:r>
-              <a:rPr lang="en-US" sz="1320" dirty="0">
+              <a:rPr lang="en-US" sz="1220" dirty="0">
                 <a:solidFill>
                   <a:srgbClr val="17364A"/>
                 </a:solidFill>
@@ -7272,9 +7274,9 @@
                 <a:ea typeface="Aptos" pitchFamily="34" charset="-122"/>
                 <a:cs typeface="Aptos" pitchFamily="34" charset="-120"/>
               </a:rPr>
-              <a:t>What public health task would the model support: classification, prediction, ranking, clustering, or.</a:t>
-            </a:r>
-            <a:endParaRPr lang="en-US" sz="1320" dirty="0"/>
+              <a:t>What public health task would the model support: classification, prediction,.</a:t>
+            </a:r>
+            <a:endParaRPr lang="en-US" sz="1220" dirty="0"/>
           </a:p>
         </p:txBody>
       </p:sp>
@@ -7286,12 +7288,12 @@
         </p:nvSpPr>
         <p:spPr>
           <a:xfrm>
-            <a:off x="7635240" y="2718511"/>
-            <a:ext cx="3474720" cy="1328623"/>
+            <a:off x="7543800" y="2724912"/>
+            <a:ext cx="3611880" cy="1527048"/>
           </a:xfrm>
           <a:prstGeom prst="roundRect">
             <a:avLst>
-              <a:gd name="adj" fmla="val 8259"/>
+              <a:gd name="adj" fmla="val 7186"/>
             </a:avLst>
           </a:prstGeom>
           <a:solidFill>
@@ -7313,8 +7315,8 @@
         </p:nvSpPr>
         <p:spPr>
           <a:xfrm>
-            <a:off x="7799832" y="2864815"/>
-            <a:ext cx="3145536" cy="256032"/>
+            <a:off x="7708392" y="2852928"/>
+            <a:ext cx="3282696" cy="228600"/>
           </a:xfrm>
           <a:prstGeom prst="rect">
             <a:avLst/>
@@ -7330,7 +7332,7 @@
               <a:buNone/>
             </a:pPr>
             <a:r>
-              <a:rPr lang="en-US" sz="1300" b="1" dirty="0">
+              <a:rPr lang="en-US" sz="1220" b="1" dirty="0">
                 <a:solidFill>
                   <a:srgbClr val="0068B7"/>
                 </a:solidFill>
@@ -7340,7 +7342,7 @@
               </a:rPr>
               <a:t>Concept checkpoints</a:t>
             </a:r>
-            <a:endParaRPr lang="en-US" sz="1300" dirty="0"/>
+            <a:endParaRPr lang="en-US" sz="1220" dirty="0"/>
           </a:p>
         </p:txBody>
       </p:sp>
@@ -7352,8 +7354,8 @@
         </p:nvSpPr>
         <p:spPr>
           <a:xfrm>
-            <a:off x="7818120" y="3230575"/>
-            <a:ext cx="3090672" cy="670255"/>
+            <a:off x="7726680" y="3182112"/>
+            <a:ext cx="3227832" cy="960120"/>
           </a:xfrm>
           <a:prstGeom prst="rect">
             <a:avLst/>
@@ -7371,7 +7373,7 @@
               <a:buNone/>
             </a:pPr>
             <a:r>
-              <a:rPr lang="en-US" sz="1220" dirty="0">
+              <a:rPr lang="en-US" sz="1140" dirty="0">
                 <a:solidFill>
                   <a:srgbClr val="17364A"/>
                 </a:solidFill>
@@ -7379,16 +7381,16 @@
                 <a:ea typeface="Aptos" pitchFamily="34" charset="-122"/>
                 <a:cs typeface="Aptos" pitchFamily="34" charset="-120"/>
               </a:rPr>
-              <a:t>What public health task would the model support: classification,.</a:t>
-            </a:r>
-            <a:endParaRPr lang="en-US" sz="1220" dirty="0"/>
-          </a:p>
-          <a:p>
-            <a:pPr indent="0" marL="0">
-              <a:buNone/>
-            </a:pPr>
-            <a:r>
-              <a:rPr lang="en-US" sz="1220" dirty="0">
+              <a:t>What public health task would the model support:.</a:t>
+            </a:r>
+            <a:endParaRPr lang="en-US" sz="1140" dirty="0"/>
+          </a:p>
+          <a:p>
+            <a:pPr indent="0" marL="0">
+              <a:buNone/>
+            </a:pPr>
+            <a:r>
+              <a:rPr lang="en-US" sz="1140" dirty="0">
                 <a:solidFill>
                   <a:srgbClr val="17364A"/>
                 </a:solidFill>
@@ -7396,16 +7398,16 @@
                 <a:ea typeface="Aptos" pitchFamily="34" charset="-122"/>
                 <a:cs typeface="Aptos" pitchFamily="34" charset="-120"/>
               </a:rPr>
-              <a:t>What label would be used, and how reliable or equitable is that.</a:t>
-            </a:r>
-            <a:endParaRPr lang="en-US" sz="1220" dirty="0"/>
-          </a:p>
-          <a:p>
-            <a:pPr indent="0" marL="0">
-              <a:buNone/>
-            </a:pPr>
-            <a:r>
-              <a:rPr lang="en-US" sz="1220" dirty="0">
+              <a:t>What label would be used, and how reliable or.</a:t>
+            </a:r>
+            <a:endParaRPr lang="en-US" sz="1140" dirty="0"/>
+          </a:p>
+          <a:p>
+            <a:pPr indent="0" marL="0">
+              <a:buNone/>
+            </a:pPr>
+            <a:r>
+              <a:rPr lang="en-US" sz="1140" dirty="0">
                 <a:solidFill>
                   <a:srgbClr val="17364A"/>
                 </a:solidFill>
@@ -7413,9 +7415,9 @@
                 <a:ea typeface="Aptos" pitchFamily="34" charset="-122"/>
                 <a:cs typeface="Aptos" pitchFamily="34" charset="-120"/>
               </a:rPr>
-              <a:t>Which features might reflect access, documentation, or reporting.</a:t>
-            </a:r>
-            <a:endParaRPr lang="en-US" sz="1220" dirty="0"/>
+              <a:t>Which features might reflect access,.</a:t>
+            </a:r>
+            <a:endParaRPr lang="en-US" sz="1140" dirty="0"/>
           </a:p>
         </p:txBody>
       </p:sp>
@@ -7427,12 +7429,12 @@
         </p:nvSpPr>
         <p:spPr>
           <a:xfrm>
-            <a:off x="7635240" y="4184294"/>
-            <a:ext cx="3474720" cy="1466698"/>
+            <a:off x="7543800" y="4389120"/>
+            <a:ext cx="3611880" cy="1261872"/>
           </a:xfrm>
           <a:prstGeom prst="roundRect">
             <a:avLst>
-              <a:gd name="adj" fmla="val 7481"/>
+              <a:gd name="adj" fmla="val 8696"/>
             </a:avLst>
           </a:prstGeom>
           <a:solidFill>
@@ -7454,8 +7456,8 @@
         </p:nvSpPr>
         <p:spPr>
           <a:xfrm>
-            <a:off x="7799832" y="4330598"/>
-            <a:ext cx="3145536" cy="256032"/>
+            <a:off x="7708392" y="4517136"/>
+            <a:ext cx="3282696" cy="228600"/>
           </a:xfrm>
           <a:prstGeom prst="rect">
             <a:avLst/>
@@ -7471,7 +7473,7 @@
               <a:buNone/>
             </a:pPr>
             <a:r>
-              <a:rPr lang="en-US" sz="1300" b="1" dirty="0">
+              <a:rPr lang="en-US" sz="1220" b="1" dirty="0">
                 <a:solidFill>
                   <a:srgbClr val="0068B7"/>
                 </a:solidFill>
@@ -7481,7 +7483,7 @@
               </a:rPr>
               <a:t>Apply it</a:t>
             </a:r>
-            <a:endParaRPr lang="en-US" sz="1300" dirty="0"/>
+            <a:endParaRPr lang="en-US" sz="1220" dirty="0"/>
           </a:p>
         </p:txBody>
       </p:sp>
@@ -7493,8 +7495,8 @@
         </p:nvSpPr>
         <p:spPr>
           <a:xfrm>
-            <a:off x="7799832" y="4659782"/>
-            <a:ext cx="3145536" cy="899770"/>
+            <a:off x="7708392" y="4828032"/>
+            <a:ext cx="3282696" cy="749808"/>
           </a:xfrm>
           <a:prstGeom prst="rect">
             <a:avLst/>
@@ -7512,7 +7514,7 @@
               <a:buNone/>
             </a:pPr>
             <a:r>
-              <a:rPr lang="en-US" sz="1320" dirty="0">
+              <a:rPr lang="en-US" sz="1220" dirty="0">
                 <a:solidFill>
                   <a:srgbClr val="17364A"/>
                 </a:solidFill>
@@ -7520,9 +7522,9 @@
                 <a:ea typeface="Aptos" pitchFamily="34" charset="-122"/>
                 <a:cs typeface="Aptos" pitchFamily="34" charset="-120"/>
               </a:rPr>
-              <a:t>Connect the concept to public health purpose, responsible use, required safeguards, documentation, and the next action a department should take.</a:t>
-            </a:r>
-            <a:endParaRPr lang="en-US" sz="1320" dirty="0"/>
+              <a:t>Connect the concept to public health purpose, responsible use, required.</a:t>
+            </a:r>
+            <a:endParaRPr lang="en-US" sz="1220" dirty="0"/>
           </a:p>
         </p:txBody>
       </p:sp>
@@ -7813,8 +7815,8 @@
         </p:nvSpPr>
         <p:spPr>
           <a:xfrm>
-            <a:off x="868680" y="1508760"/>
-            <a:ext cx="6309360" cy="4160520"/>
+            <a:off x="822960" y="1463040"/>
+            <a:ext cx="6565392" cy="4343400"/>
           </a:xfrm>
           <a:prstGeom prst="rect">
             <a:avLst/>
@@ -7832,7 +7834,7 @@
               <a:buNone/>
             </a:pPr>
             <a:r>
-              <a:rPr lang="en-US" sz="2100" dirty="0">
+              <a:rPr lang="en-US" sz="1920" dirty="0">
                 <a:solidFill>
                   <a:srgbClr val="003A63"/>
                 </a:solidFill>
@@ -7842,14 +7844,14 @@
               </a:rPr>
               <a:t>• What errors would be most harmful in this workflow?</a:t>
             </a:r>
-            <a:endParaRPr lang="en-US" sz="2100" dirty="0"/>
-          </a:p>
-          <a:p>
-            <a:pPr indent="0" marL="0">
-              <a:buNone/>
-            </a:pPr>
-            <a:r>
-              <a:rPr lang="en-US" sz="2100" dirty="0">
+            <a:endParaRPr lang="en-US" sz="1920" dirty="0"/>
+          </a:p>
+          <a:p>
+            <a:pPr indent="0" marL="0">
+              <a:buNone/>
+            </a:pPr>
+            <a:r>
+              <a:rPr lang="en-US" sz="1920" dirty="0">
                 <a:solidFill>
                   <a:srgbClr val="003A63"/>
                 </a:solidFill>
@@ -7859,7 +7861,7 @@
               </a:rPr>
               <a:t>• Who would review model outputs, override them, and document concerns?</a:t>
             </a:r>
-            <a:endParaRPr lang="en-US" sz="2100" dirty="0"/>
+            <a:endParaRPr lang="en-US" sz="1920" dirty="0"/>
           </a:p>
         </p:txBody>
       </p:sp>
@@ -7871,12 +7873,12 @@
         </p:nvSpPr>
         <p:spPr>
           <a:xfrm>
-            <a:off x="7635240" y="1325880"/>
-            <a:ext cx="3474720" cy="1207008"/>
+            <a:off x="7543800" y="1325880"/>
+            <a:ext cx="3611880" cy="1261872"/>
           </a:xfrm>
           <a:prstGeom prst="roundRect">
             <a:avLst>
-              <a:gd name="adj" fmla="val 9091"/>
+              <a:gd name="adj" fmla="val 8696"/>
             </a:avLst>
           </a:prstGeom>
           <a:solidFill>
@@ -7898,8 +7900,8 @@
         </p:nvSpPr>
         <p:spPr>
           <a:xfrm>
-            <a:off x="7799832" y="1472184"/>
-            <a:ext cx="3145536" cy="256032"/>
+            <a:off x="7708392" y="1453896"/>
+            <a:ext cx="3282696" cy="228600"/>
           </a:xfrm>
           <a:prstGeom prst="rect">
             <a:avLst/>
@@ -7915,7 +7917,7 @@
               <a:buNone/>
             </a:pPr>
             <a:r>
-              <a:rPr lang="en-US" sz="1300" b="1" dirty="0">
+              <a:rPr lang="en-US" sz="1220" b="1" dirty="0">
                 <a:solidFill>
                   <a:srgbClr val="0068B7"/>
                 </a:solidFill>
@@ -7925,7 +7927,7 @@
               </a:rPr>
               <a:t>Core concept</a:t>
             </a:r>
-            <a:endParaRPr lang="en-US" sz="1300" dirty="0"/>
+            <a:endParaRPr lang="en-US" sz="1220" dirty="0"/>
           </a:p>
         </p:txBody>
       </p:sp>
@@ -7937,8 +7939,8 @@
         </p:nvSpPr>
         <p:spPr>
           <a:xfrm>
-            <a:off x="7799832" y="1801368"/>
-            <a:ext cx="3145536" cy="640080"/>
+            <a:off x="7708392" y="1764792"/>
+            <a:ext cx="3282696" cy="749808"/>
           </a:xfrm>
           <a:prstGeom prst="rect">
             <a:avLst/>
@@ -7956,7 +7958,7 @@
               <a:buNone/>
             </a:pPr>
             <a:r>
-              <a:rPr lang="en-US" sz="1320" dirty="0">
+              <a:rPr lang="en-US" sz="1220" dirty="0">
                 <a:solidFill>
                   <a:srgbClr val="17364A"/>
                 </a:solidFill>
@@ -7966,7 +7968,7 @@
               </a:rPr>
               <a:t>What errors would be most harmful in this workflow?</a:t>
             </a:r>
-            <a:endParaRPr lang="en-US" sz="1320" dirty="0"/>
+            <a:endParaRPr lang="en-US" sz="1220" dirty="0"/>
           </a:p>
         </p:txBody>
       </p:sp>
@@ -7978,12 +7980,12 @@
         </p:nvSpPr>
         <p:spPr>
           <a:xfrm>
-            <a:off x="7635240" y="2670048"/>
-            <a:ext cx="3474720" cy="1377086"/>
+            <a:off x="7543800" y="2724912"/>
+            <a:ext cx="3611880" cy="1527048"/>
           </a:xfrm>
           <a:prstGeom prst="roundRect">
             <a:avLst>
-              <a:gd name="adj" fmla="val 7968"/>
+              <a:gd name="adj" fmla="val 7186"/>
             </a:avLst>
           </a:prstGeom>
           <a:solidFill>
@@ -8005,8 +8007,8 @@
         </p:nvSpPr>
         <p:spPr>
           <a:xfrm>
-            <a:off x="7799832" y="2816352"/>
-            <a:ext cx="3145536" cy="256032"/>
+            <a:off x="7708392" y="2852928"/>
+            <a:ext cx="3282696" cy="228600"/>
           </a:xfrm>
           <a:prstGeom prst="rect">
             <a:avLst/>
@@ -8022,7 +8024,7 @@
               <a:buNone/>
             </a:pPr>
             <a:r>
-              <a:rPr lang="en-US" sz="1300" b="1" dirty="0">
+              <a:rPr lang="en-US" sz="1220" b="1" dirty="0">
                 <a:solidFill>
                   <a:srgbClr val="0068B7"/>
                 </a:solidFill>
@@ -8032,7 +8034,7 @@
               </a:rPr>
               <a:t>Concept checkpoints</a:t>
             </a:r>
-            <a:endParaRPr lang="en-US" sz="1300" dirty="0"/>
+            <a:endParaRPr lang="en-US" sz="1220" dirty="0"/>
           </a:p>
         </p:txBody>
       </p:sp>
@@ -8044,8 +8046,8 @@
         </p:nvSpPr>
         <p:spPr>
           <a:xfrm>
-            <a:off x="7818120" y="3182112"/>
-            <a:ext cx="3090672" cy="718718"/>
+            <a:off x="7726680" y="3182112"/>
+            <a:ext cx="3227832" cy="960120"/>
           </a:xfrm>
           <a:prstGeom prst="rect">
             <a:avLst/>
@@ -8063,7 +8065,7 @@
               <a:buNone/>
             </a:pPr>
             <a:r>
-              <a:rPr lang="en-US" sz="1220" dirty="0">
+              <a:rPr lang="en-US" sz="1140" dirty="0">
                 <a:solidFill>
                   <a:srgbClr val="17364A"/>
                 </a:solidFill>
@@ -8073,14 +8075,14 @@
               </a:rPr>
               <a:t>What errors would be most harmful in this workflow?</a:t>
             </a:r>
-            <a:endParaRPr lang="en-US" sz="1220" dirty="0"/>
-          </a:p>
-          <a:p>
-            <a:pPr indent="0" marL="0">
-              <a:buNone/>
-            </a:pPr>
-            <a:r>
-              <a:rPr lang="en-US" sz="1220" dirty="0">
+            <a:endParaRPr lang="en-US" sz="1140" dirty="0"/>
+          </a:p>
+          <a:p>
+            <a:pPr indent="0" marL="0">
+              <a:buNone/>
+            </a:pPr>
+            <a:r>
+              <a:rPr lang="en-US" sz="1140" dirty="0">
                 <a:solidFill>
                   <a:srgbClr val="17364A"/>
                 </a:solidFill>
@@ -8088,9 +8090,9 @@
                 <a:ea typeface="Aptos" pitchFamily="34" charset="-122"/>
                 <a:cs typeface="Aptos" pitchFamily="34" charset="-120"/>
               </a:rPr>
-              <a:t>Who would review model outputs, override them, and document.</a:t>
-            </a:r>
-            <a:endParaRPr lang="en-US" sz="1220" dirty="0"/>
+              <a:t>Who would review model outputs, override them, and.</a:t>
+            </a:r>
+            <a:endParaRPr lang="en-US" sz="1140" dirty="0"/>
           </a:p>
         </p:txBody>
       </p:sp>
@@ -8102,12 +8104,12 @@
         </p:nvSpPr>
         <p:spPr>
           <a:xfrm>
-            <a:off x="7635240" y="4184294"/>
-            <a:ext cx="3474720" cy="1466698"/>
+            <a:off x="7543800" y="4389120"/>
+            <a:ext cx="3611880" cy="1261872"/>
           </a:xfrm>
           <a:prstGeom prst="roundRect">
             <a:avLst>
-              <a:gd name="adj" fmla="val 7481"/>
+              <a:gd name="adj" fmla="val 8696"/>
             </a:avLst>
           </a:prstGeom>
           <a:solidFill>
@@ -8129,8 +8131,8 @@
         </p:nvSpPr>
         <p:spPr>
           <a:xfrm>
-            <a:off x="7799832" y="4330598"/>
-            <a:ext cx="3145536" cy="256032"/>
+            <a:off x="7708392" y="4517136"/>
+            <a:ext cx="3282696" cy="228600"/>
           </a:xfrm>
           <a:prstGeom prst="rect">
             <a:avLst/>
@@ -8146,7 +8148,7 @@
               <a:buNone/>
             </a:pPr>
             <a:r>
-              <a:rPr lang="en-US" sz="1300" b="1" dirty="0">
+              <a:rPr lang="en-US" sz="1220" b="1" dirty="0">
                 <a:solidFill>
                   <a:srgbClr val="0068B7"/>
                 </a:solidFill>
@@ -8156,7 +8158,7 @@
               </a:rPr>
               <a:t>Apply it</a:t>
             </a:r>
-            <a:endParaRPr lang="en-US" sz="1300" dirty="0"/>
+            <a:endParaRPr lang="en-US" sz="1220" dirty="0"/>
           </a:p>
         </p:txBody>
       </p:sp>
@@ -8168,8 +8170,8 @@
         </p:nvSpPr>
         <p:spPr>
           <a:xfrm>
-            <a:off x="7799832" y="4659782"/>
-            <a:ext cx="3145536" cy="899770"/>
+            <a:off x="7708392" y="4828032"/>
+            <a:ext cx="3282696" cy="749808"/>
           </a:xfrm>
           <a:prstGeom prst="rect">
             <a:avLst/>
@@ -8187,7 +8189,7 @@
               <a:buNone/>
             </a:pPr>
             <a:r>
-              <a:rPr lang="en-US" sz="1320" dirty="0">
+              <a:rPr lang="en-US" sz="1220" dirty="0">
                 <a:solidFill>
                   <a:srgbClr val="17364A"/>
                 </a:solidFill>
@@ -8195,9 +8197,9 @@
                 <a:ea typeface="Aptos" pitchFamily="34" charset="-122"/>
                 <a:cs typeface="Aptos" pitchFamily="34" charset="-120"/>
               </a:rPr>
-              <a:t>Connect the concept to public health purpose, responsible use, required safeguards, documentation, and the next action a department should take.</a:t>
-            </a:r>
-            <a:endParaRPr lang="en-US" sz="1320" dirty="0"/>
+              <a:t>Connect the concept to public health purpose, responsible use, required.</a:t>
+            </a:r>
+            <a:endParaRPr lang="en-US" sz="1220" dirty="0"/>
           </a:p>
         </p:txBody>
       </p:sp>
@@ -8488,8 +8490,8 @@
         </p:nvSpPr>
         <p:spPr>
           <a:xfrm>
-            <a:off x="868680" y="1508760"/>
-            <a:ext cx="6309360" cy="4160520"/>
+            <a:off x="822960" y="1463040"/>
+            <a:ext cx="6565392" cy="4343400"/>
           </a:xfrm>
           <a:prstGeom prst="rect">
             <a:avLst/>
@@ -8507,7 +8509,7 @@
               <a:buNone/>
             </a:pPr>
             <a:r>
-              <a:rPr lang="en-US" sz="2100" dirty="0">
+              <a:rPr lang="en-US" sz="1920" dirty="0">
                 <a:solidFill>
                   <a:srgbClr val="003A63"/>
                 </a:solidFill>
@@ -8515,16 +8517,16 @@
                 <a:ea typeface="Aptos" pitchFamily="34" charset="-122"/>
                 <a:cs typeface="Aptos" pitchFamily="34" charset="-120"/>
               </a:rPr>
-              <a:t>• Create a machine learning use case review worksheet for one public health workflow.</a:t>
-            </a:r>
-            <a:endParaRPr lang="en-US" sz="2100" dirty="0"/>
-          </a:p>
-          <a:p>
-            <a:pPr indent="0" marL="0">
-              <a:buNone/>
-            </a:pPr>
-            <a:r>
-              <a:rPr lang="en-US" sz="2100" dirty="0">
+              <a:t>• Create a machine learning use case review worksheet for one public health.</a:t>
+            </a:r>
+            <a:endParaRPr lang="en-US" sz="1920" dirty="0"/>
+          </a:p>
+          <a:p>
+            <a:pPr indent="0" marL="0">
+              <a:buNone/>
+            </a:pPr>
+            <a:r>
+              <a:rPr lang="en-US" sz="1920" dirty="0">
                 <a:solidFill>
                   <a:srgbClr val="003A63"/>
                 </a:solidFill>
@@ -8532,16 +8534,16 @@
                 <a:ea typeface="Aptos" pitchFamily="34" charset="-122"/>
                 <a:cs typeface="Aptos" pitchFamily="34" charset="-120"/>
               </a:rPr>
-              <a:t>• The worksheet should describe the public health task, intended use, data sources, candidate.</a:t>
-            </a:r>
-            <a:endParaRPr lang="en-US" sz="2100" dirty="0"/>
-          </a:p>
-          <a:p>
-            <a:pPr indent="0" marL="0">
-              <a:buNone/>
-            </a:pPr>
-            <a:r>
-              <a:rPr lang="en-US" sz="2100" dirty="0">
+              <a:t>• The worksheet should describe the public health task, intended use, data.</a:t>
+            </a:r>
+            <a:endParaRPr lang="en-US" sz="1920" dirty="0"/>
+          </a:p>
+          <a:p>
+            <a:pPr indent="0" marL="0">
+              <a:buNone/>
+            </a:pPr>
+            <a:r>
+              <a:rPr lang="en-US" sz="1920" dirty="0">
                 <a:solidFill>
                   <a:srgbClr val="003A63"/>
                 </a:solidFill>
@@ -8551,7 +8553,7 @@
               </a:rPr>
               <a:t>• This exercise should produce a governance-ready artifact.</a:t>
             </a:r>
-            <a:endParaRPr lang="en-US" sz="2100" dirty="0"/>
+            <a:endParaRPr lang="en-US" sz="1920" dirty="0"/>
           </a:p>
         </p:txBody>
       </p:sp>
@@ -8563,12 +8565,12 @@
         </p:nvSpPr>
         <p:spPr>
           <a:xfrm>
-            <a:off x="7635240" y="1325880"/>
-            <a:ext cx="3474720" cy="1207008"/>
+            <a:off x="7543800" y="1325880"/>
+            <a:ext cx="3611880" cy="1261872"/>
           </a:xfrm>
           <a:prstGeom prst="roundRect">
             <a:avLst>
-              <a:gd name="adj" fmla="val 9091"/>
+              <a:gd name="adj" fmla="val 8696"/>
             </a:avLst>
           </a:prstGeom>
           <a:solidFill>
@@ -8590,8 +8592,8 @@
         </p:nvSpPr>
         <p:spPr>
           <a:xfrm>
-            <a:off x="7799832" y="1472184"/>
-            <a:ext cx="3145536" cy="256032"/>
+            <a:off x="7708392" y="1453896"/>
+            <a:ext cx="3282696" cy="228600"/>
           </a:xfrm>
           <a:prstGeom prst="rect">
             <a:avLst/>
@@ -8607,7 +8609,7 @@
               <a:buNone/>
             </a:pPr>
             <a:r>
-              <a:rPr lang="en-US" sz="1300" b="1" dirty="0">
+              <a:rPr lang="en-US" sz="1220" b="1" dirty="0">
                 <a:solidFill>
                   <a:srgbClr val="0068B7"/>
                 </a:solidFill>
@@ -8617,7 +8619,7 @@
               </a:rPr>
               <a:t>Practice focus</a:t>
             </a:r>
-            <a:endParaRPr lang="en-US" sz="1300" dirty="0"/>
+            <a:endParaRPr lang="en-US" sz="1220" dirty="0"/>
           </a:p>
         </p:txBody>
       </p:sp>
@@ -8629,8 +8631,8 @@
         </p:nvSpPr>
         <p:spPr>
           <a:xfrm>
-            <a:off x="7799832" y="1801368"/>
-            <a:ext cx="3145536" cy="640080"/>
+            <a:off x="7708392" y="1764792"/>
+            <a:ext cx="3282696" cy="749808"/>
           </a:xfrm>
           <a:prstGeom prst="rect">
             <a:avLst/>
@@ -8648,7 +8650,7 @@
               <a:buNone/>
             </a:pPr>
             <a:r>
-              <a:rPr lang="en-US" sz="1320" dirty="0">
+              <a:rPr lang="en-US" sz="1220" dirty="0">
                 <a:solidFill>
                   <a:srgbClr val="17364A"/>
                 </a:solidFill>
@@ -8656,9 +8658,9 @@
                 <a:ea typeface="Aptos" pitchFamily="34" charset="-122"/>
                 <a:cs typeface="Aptos" pitchFamily="34" charset="-120"/>
               </a:rPr>
-              <a:t>Create a machine learning use case review worksheet for one public health workflow.</a:t>
-            </a:r>
-            <a:endParaRPr lang="en-US" sz="1320" dirty="0"/>
+              <a:t>Create a machine learning use case review worksheet for one public health.</a:t>
+            </a:r>
+            <a:endParaRPr lang="en-US" sz="1220" dirty="0"/>
           </a:p>
         </p:txBody>
       </p:sp>
@@ -8670,12 +8672,12 @@
         </p:nvSpPr>
         <p:spPr>
           <a:xfrm>
-            <a:off x="7635240" y="2670048"/>
-            <a:ext cx="3474720" cy="1377086"/>
+            <a:off x="7543800" y="2724912"/>
+            <a:ext cx="3611880" cy="1527048"/>
           </a:xfrm>
           <a:prstGeom prst="roundRect">
             <a:avLst>
-              <a:gd name="adj" fmla="val 7968"/>
+              <a:gd name="adj" fmla="val 7186"/>
             </a:avLst>
           </a:prstGeom>
           <a:solidFill>
@@ -8697,8 +8699,8 @@
         </p:nvSpPr>
         <p:spPr>
           <a:xfrm>
-            <a:off x="7799832" y="2816352"/>
-            <a:ext cx="3145536" cy="256032"/>
+            <a:off x="7708392" y="2852928"/>
+            <a:ext cx="3282696" cy="228600"/>
           </a:xfrm>
           <a:prstGeom prst="rect">
             <a:avLst/>
@@ -8714,7 +8716,7 @@
               <a:buNone/>
             </a:pPr>
             <a:r>
-              <a:rPr lang="en-US" sz="1300" b="1" dirty="0">
+              <a:rPr lang="en-US" sz="1220" b="1" dirty="0">
                 <a:solidFill>
                   <a:srgbClr val="0068B7"/>
                 </a:solidFill>
@@ -8724,7 +8726,7 @@
               </a:rPr>
               <a:t>Concept checkpoints</a:t>
             </a:r>
-            <a:endParaRPr lang="en-US" sz="1300" dirty="0"/>
+            <a:endParaRPr lang="en-US" sz="1220" dirty="0"/>
           </a:p>
         </p:txBody>
       </p:sp>
@@ -8736,8 +8738,8 @@
         </p:nvSpPr>
         <p:spPr>
           <a:xfrm>
-            <a:off x="7818120" y="3182112"/>
-            <a:ext cx="3090672" cy="718718"/>
+            <a:off x="7726680" y="3182112"/>
+            <a:ext cx="3227832" cy="960120"/>
           </a:xfrm>
           <a:prstGeom prst="rect">
             <a:avLst/>
@@ -8755,7 +8757,7 @@
               <a:buNone/>
             </a:pPr>
             <a:r>
-              <a:rPr lang="en-US" sz="1220" dirty="0">
+              <a:rPr lang="en-US" sz="1140" dirty="0">
                 <a:solidFill>
                   <a:srgbClr val="17364A"/>
                 </a:solidFill>
@@ -8763,16 +8765,16 @@
                 <a:ea typeface="Aptos" pitchFamily="34" charset="-122"/>
                 <a:cs typeface="Aptos" pitchFamily="34" charset="-120"/>
               </a:rPr>
-              <a:t>The worksheet should describe the public health task, intended.</a:t>
-            </a:r>
-            <a:endParaRPr lang="en-US" sz="1220" dirty="0"/>
-          </a:p>
-          <a:p>
-            <a:pPr indent="0" marL="0">
-              <a:buNone/>
-            </a:pPr>
-            <a:r>
-              <a:rPr lang="en-US" sz="1220" dirty="0">
+              <a:t>The worksheet should describe the public health.</a:t>
+            </a:r>
+            <a:endParaRPr lang="en-US" sz="1140" dirty="0"/>
+          </a:p>
+          <a:p>
+            <a:pPr indent="0" marL="0">
+              <a:buNone/>
+            </a:pPr>
+            <a:r>
+              <a:rPr lang="en-US" sz="1140" dirty="0">
                 <a:solidFill>
                   <a:srgbClr val="17364A"/>
                 </a:solidFill>
@@ -8780,9 +8782,9 @@
                 <a:ea typeface="Aptos" pitchFamily="34" charset="-122"/>
                 <a:cs typeface="Aptos" pitchFamily="34" charset="-120"/>
               </a:rPr>
-              <a:t>Learners should identify at least three reasons the model might.</a:t>
-            </a:r>
-            <a:endParaRPr lang="en-US" sz="1220" dirty="0"/>
+              <a:t>Learners should identify at least three reasons.</a:t>
+            </a:r>
+            <a:endParaRPr lang="en-US" sz="1140" dirty="0"/>
           </a:p>
         </p:txBody>
       </p:sp>
@@ -8794,12 +8796,12 @@
         </p:nvSpPr>
         <p:spPr>
           <a:xfrm>
-            <a:off x="7635240" y="4184294"/>
-            <a:ext cx="3474720" cy="1466698"/>
+            <a:off x="7543800" y="4389120"/>
+            <a:ext cx="3611880" cy="1261872"/>
           </a:xfrm>
           <a:prstGeom prst="roundRect">
             <a:avLst>
-              <a:gd name="adj" fmla="val 7481"/>
+              <a:gd name="adj" fmla="val 8696"/>
             </a:avLst>
           </a:prstGeom>
           <a:solidFill>
@@ -8821,8 +8823,8 @@
         </p:nvSpPr>
         <p:spPr>
           <a:xfrm>
-            <a:off x="7799832" y="4330598"/>
-            <a:ext cx="3145536" cy="256032"/>
+            <a:off x="7708392" y="4517136"/>
+            <a:ext cx="3282696" cy="228600"/>
           </a:xfrm>
           <a:prstGeom prst="rect">
             <a:avLst/>
@@ -8838,7 +8840,7 @@
               <a:buNone/>
             </a:pPr>
             <a:r>
-              <a:rPr lang="en-US" sz="1300" b="1" dirty="0">
+              <a:rPr lang="en-US" sz="1220" b="1" dirty="0">
                 <a:solidFill>
                   <a:srgbClr val="0068B7"/>
                 </a:solidFill>
@@ -8848,7 +8850,7 @@
               </a:rPr>
               <a:t>What to produce</a:t>
             </a:r>
-            <a:endParaRPr lang="en-US" sz="1300" dirty="0"/>
+            <a:endParaRPr lang="en-US" sz="1220" dirty="0"/>
           </a:p>
         </p:txBody>
       </p:sp>
@@ -8860,8 +8862,8 @@
         </p:nvSpPr>
         <p:spPr>
           <a:xfrm>
-            <a:off x="7799832" y="4659782"/>
-            <a:ext cx="3145536" cy="899770"/>
+            <a:off x="7708392" y="4828032"/>
+            <a:ext cx="3282696" cy="749808"/>
           </a:xfrm>
           <a:prstGeom prst="rect">
             <a:avLst/>
@@ -8879,7 +8881,7 @@
               <a:buNone/>
             </a:pPr>
             <a:r>
-              <a:rPr lang="en-US" sz="1320" dirty="0">
+              <a:rPr lang="en-US" sz="1220" dirty="0">
                 <a:solidFill>
                   <a:srgbClr val="17364A"/>
                 </a:solidFill>
@@ -8887,9 +8889,9 @@
                 <a:ea typeface="Aptos" pitchFamily="34" charset="-122"/>
                 <a:cs typeface="Aptos" pitchFamily="34" charset="-120"/>
               </a:rPr>
-              <a:t>Use the assignment to test whether you can explain the concept, apply it to a realistic public health situation, and identify what would need review before the work moves forward.</a:t>
-            </a:r>
-            <a:endParaRPr lang="en-US" sz="1320" dirty="0"/>
+              <a:t>Use the assignment to test whether you can explain the concept, apply it to a.</a:t>
+            </a:r>
+            <a:endParaRPr lang="en-US" sz="1220" dirty="0"/>
           </a:p>
         </p:txBody>
       </p:sp>
@@ -9180,8 +9182,8 @@
         </p:nvSpPr>
         <p:spPr>
           <a:xfrm>
-            <a:off x="868680" y="1508760"/>
-            <a:ext cx="6309360" cy="4160520"/>
+            <a:off x="822960" y="1463040"/>
+            <a:ext cx="6565392" cy="4343400"/>
           </a:xfrm>
           <a:prstGeom prst="rect">
             <a:avLst/>
@@ -9199,7 +9201,7 @@
               <a:buNone/>
             </a:pPr>
             <a:r>
-              <a:rPr lang="en-US" sz="2100" dirty="0">
+              <a:rPr lang="en-US" sz="1920" dirty="0">
                 <a:solidFill>
                   <a:srgbClr val="003A63"/>
                 </a:solidFill>
@@ -9209,14 +9211,14 @@
               </a:rPr>
               <a:t>• Machine learning use case review worksheet</a:t>
             </a:r>
-            <a:endParaRPr lang="en-US" sz="2100" dirty="0"/>
-          </a:p>
-          <a:p>
-            <a:pPr indent="0" marL="0">
-              <a:buNone/>
-            </a:pPr>
-            <a:r>
-              <a:rPr lang="en-US" sz="2100" dirty="0">
+            <a:endParaRPr lang="en-US" sz="1920" dirty="0"/>
+          </a:p>
+          <a:p>
+            <a:pPr indent="0" marL="0">
+              <a:buNone/>
+            </a:pPr>
+            <a:r>
+              <a:rPr lang="en-US" sz="1920" dirty="0">
                 <a:solidFill>
                   <a:srgbClr val="003A63"/>
                 </a:solidFill>
@@ -9226,14 +9228,14 @@
               </a:rPr>
               <a:t>• Feature and label inventory</a:t>
             </a:r>
-            <a:endParaRPr lang="en-US" sz="2100" dirty="0"/>
-          </a:p>
-          <a:p>
-            <a:pPr indent="0" marL="0">
-              <a:buNone/>
-            </a:pPr>
-            <a:r>
-              <a:rPr lang="en-US" sz="2100" dirty="0">
+            <a:endParaRPr lang="en-US" sz="1920" dirty="0"/>
+          </a:p>
+          <a:p>
+            <a:pPr indent="0" marL="0">
+              <a:buNone/>
+            </a:pPr>
+            <a:r>
+              <a:rPr lang="en-US" sz="1920" dirty="0">
                 <a:solidFill>
                   <a:srgbClr val="003A63"/>
                 </a:solidFill>
@@ -9243,7 +9245,7 @@
               </a:rPr>
               <a:t>• Initial model risk and safeguard list</a:t>
             </a:r>
-            <a:endParaRPr lang="en-US" sz="2100" dirty="0"/>
+            <a:endParaRPr lang="en-US" sz="1920" dirty="0"/>
           </a:p>
         </p:txBody>
       </p:sp>
@@ -9255,12 +9257,12 @@
         </p:nvSpPr>
         <p:spPr>
           <a:xfrm>
-            <a:off x="7635240" y="1325880"/>
-            <a:ext cx="3474720" cy="1207008"/>
+            <a:off x="7543800" y="1325880"/>
+            <a:ext cx="3611880" cy="1261872"/>
           </a:xfrm>
           <a:prstGeom prst="roundRect">
             <a:avLst>
-              <a:gd name="adj" fmla="val 9091"/>
+              <a:gd name="adj" fmla="val 8696"/>
             </a:avLst>
           </a:prstGeom>
           <a:solidFill>
@@ -9282,8 +9284,8 @@
         </p:nvSpPr>
         <p:spPr>
           <a:xfrm>
-            <a:off x="7799832" y="1472184"/>
-            <a:ext cx="3145536" cy="256032"/>
+            <a:off x="7708392" y="1453896"/>
+            <a:ext cx="3282696" cy="228600"/>
           </a:xfrm>
           <a:prstGeom prst="rect">
             <a:avLst/>
@@ -9299,7 +9301,7 @@
               <a:buNone/>
             </a:pPr>
             <a:r>
-              <a:rPr lang="en-US" sz="1300" b="1" dirty="0">
+              <a:rPr lang="en-US" sz="1220" b="1" dirty="0">
                 <a:solidFill>
                   <a:srgbClr val="0068B7"/>
                 </a:solidFill>
@@ -9309,7 +9311,7 @@
               </a:rPr>
               <a:t>Core concept</a:t>
             </a:r>
-            <a:endParaRPr lang="en-US" sz="1300" dirty="0"/>
+            <a:endParaRPr lang="en-US" sz="1220" dirty="0"/>
           </a:p>
         </p:txBody>
       </p:sp>
@@ -9321,8 +9323,8 @@
         </p:nvSpPr>
         <p:spPr>
           <a:xfrm>
-            <a:off x="7799832" y="1801368"/>
-            <a:ext cx="3145536" cy="640080"/>
+            <a:off x="7708392" y="1764792"/>
+            <a:ext cx="3282696" cy="749808"/>
           </a:xfrm>
           <a:prstGeom prst="rect">
             <a:avLst/>
@@ -9340,7 +9342,7 @@
               <a:buNone/>
             </a:pPr>
             <a:r>
-              <a:rPr lang="en-US" sz="1320" dirty="0">
+              <a:rPr lang="en-US" sz="1220" dirty="0">
                 <a:solidFill>
                   <a:srgbClr val="17364A"/>
                 </a:solidFill>
@@ -9350,7 +9352,7 @@
               </a:rPr>
               <a:t>Machine learning use case review worksheet</a:t>
             </a:r>
-            <a:endParaRPr lang="en-US" sz="1320" dirty="0"/>
+            <a:endParaRPr lang="en-US" sz="1220" dirty="0"/>
           </a:p>
         </p:txBody>
       </p:sp>
@@ -9362,12 +9364,12 @@
         </p:nvSpPr>
         <p:spPr>
           <a:xfrm>
-            <a:off x="7635240" y="2670048"/>
-            <a:ext cx="3474720" cy="1377086"/>
+            <a:off x="7543800" y="2724912"/>
+            <a:ext cx="3611880" cy="1527048"/>
           </a:xfrm>
           <a:prstGeom prst="roundRect">
             <a:avLst>
-              <a:gd name="adj" fmla="val 7968"/>
+              <a:gd name="adj" fmla="val 7186"/>
             </a:avLst>
           </a:prstGeom>
           <a:solidFill>
@@ -9389,8 +9391,8 @@
         </p:nvSpPr>
         <p:spPr>
           <a:xfrm>
-            <a:off x="7799832" y="2816352"/>
-            <a:ext cx="3145536" cy="256032"/>
+            <a:off x="7708392" y="2852928"/>
+            <a:ext cx="3282696" cy="228600"/>
           </a:xfrm>
           <a:prstGeom prst="rect">
             <a:avLst/>
@@ -9406,7 +9408,7 @@
               <a:buNone/>
             </a:pPr>
             <a:r>
-              <a:rPr lang="en-US" sz="1300" b="1" dirty="0">
+              <a:rPr lang="en-US" sz="1220" b="1" dirty="0">
                 <a:solidFill>
                   <a:srgbClr val="0068B7"/>
                 </a:solidFill>
@@ -9416,7 +9418,7 @@
               </a:rPr>
               <a:t>Concept checkpoints</a:t>
             </a:r>
-            <a:endParaRPr lang="en-US" sz="1300" dirty="0"/>
+            <a:endParaRPr lang="en-US" sz="1220" dirty="0"/>
           </a:p>
         </p:txBody>
       </p:sp>
@@ -9428,8 +9430,8 @@
         </p:nvSpPr>
         <p:spPr>
           <a:xfrm>
-            <a:off x="7818120" y="3182112"/>
-            <a:ext cx="3090672" cy="718718"/>
+            <a:off x="7726680" y="3182112"/>
+            <a:ext cx="3227832" cy="960120"/>
           </a:xfrm>
           <a:prstGeom prst="rect">
             <a:avLst/>
@@ -9447,7 +9449,7 @@
               <a:buNone/>
             </a:pPr>
             <a:r>
-              <a:rPr lang="en-US" sz="1220" dirty="0">
+              <a:rPr lang="en-US" sz="1140" dirty="0">
                 <a:solidFill>
                   <a:srgbClr val="17364A"/>
                 </a:solidFill>
@@ -9457,14 +9459,14 @@
               </a:rPr>
               <a:t>Machine learning use case review worksheet</a:t>
             </a:r>
-            <a:endParaRPr lang="en-US" sz="1220" dirty="0"/>
-          </a:p>
-          <a:p>
-            <a:pPr indent="0" marL="0">
-              <a:buNone/>
-            </a:pPr>
-            <a:r>
-              <a:rPr lang="en-US" sz="1220" dirty="0">
+            <a:endParaRPr lang="en-US" sz="1140" dirty="0"/>
+          </a:p>
+          <a:p>
+            <a:pPr indent="0" marL="0">
+              <a:buNone/>
+            </a:pPr>
+            <a:r>
+              <a:rPr lang="en-US" sz="1140" dirty="0">
                 <a:solidFill>
                   <a:srgbClr val="17364A"/>
                 </a:solidFill>
@@ -9474,14 +9476,14 @@
               </a:rPr>
               <a:t>Feature and label inventory</a:t>
             </a:r>
-            <a:endParaRPr lang="en-US" sz="1220" dirty="0"/>
-          </a:p>
-          <a:p>
-            <a:pPr indent="0" marL="0">
-              <a:buNone/>
-            </a:pPr>
-            <a:r>
-              <a:rPr lang="en-US" sz="1220" dirty="0">
+            <a:endParaRPr lang="en-US" sz="1140" dirty="0"/>
+          </a:p>
+          <a:p>
+            <a:pPr indent="0" marL="0">
+              <a:buNone/>
+            </a:pPr>
+            <a:r>
+              <a:rPr lang="en-US" sz="1140" dirty="0">
                 <a:solidFill>
                   <a:srgbClr val="17364A"/>
                 </a:solidFill>
@@ -9491,7 +9493,7 @@
               </a:rPr>
               <a:t>Initial model risk and safeguard list</a:t>
             </a:r>
-            <a:endParaRPr lang="en-US" sz="1220" dirty="0"/>
+            <a:endParaRPr lang="en-US" sz="1140" dirty="0"/>
           </a:p>
         </p:txBody>
       </p:sp>
@@ -9503,12 +9505,12 @@
         </p:nvSpPr>
         <p:spPr>
           <a:xfrm>
-            <a:off x="7635240" y="4184294"/>
-            <a:ext cx="3474720" cy="1466698"/>
+            <a:off x="7543800" y="4389120"/>
+            <a:ext cx="3611880" cy="1261872"/>
           </a:xfrm>
           <a:prstGeom prst="roundRect">
             <a:avLst>
-              <a:gd name="adj" fmla="val 7481"/>
+              <a:gd name="adj" fmla="val 8696"/>
             </a:avLst>
           </a:prstGeom>
           <a:solidFill>
@@ -9530,8 +9532,8 @@
         </p:nvSpPr>
         <p:spPr>
           <a:xfrm>
-            <a:off x="7799832" y="4330598"/>
-            <a:ext cx="3145536" cy="256032"/>
+            <a:off x="7708392" y="4517136"/>
+            <a:ext cx="3282696" cy="228600"/>
           </a:xfrm>
           <a:prstGeom prst="rect">
             <a:avLst/>
@@ -9547,7 +9549,7 @@
               <a:buNone/>
             </a:pPr>
             <a:r>
-              <a:rPr lang="en-US" sz="1300" b="1" dirty="0">
+              <a:rPr lang="en-US" sz="1220" b="1" dirty="0">
                 <a:solidFill>
                   <a:srgbClr val="0068B7"/>
                 </a:solidFill>
@@ -9557,7 +9559,7 @@
               </a:rPr>
               <a:t>Apply it</a:t>
             </a:r>
-            <a:endParaRPr lang="en-US" sz="1300" dirty="0"/>
+            <a:endParaRPr lang="en-US" sz="1220" dirty="0"/>
           </a:p>
         </p:txBody>
       </p:sp>
@@ -9569,8 +9571,8 @@
         </p:nvSpPr>
         <p:spPr>
           <a:xfrm>
-            <a:off x="7799832" y="4659782"/>
-            <a:ext cx="3145536" cy="899770"/>
+            <a:off x="7708392" y="4828032"/>
+            <a:ext cx="3282696" cy="749808"/>
           </a:xfrm>
           <a:prstGeom prst="rect">
             <a:avLst/>
@@ -9588,7 +9590,7 @@
               <a:buNone/>
             </a:pPr>
             <a:r>
-              <a:rPr lang="en-US" sz="1320" dirty="0">
+              <a:rPr lang="en-US" sz="1220" dirty="0">
                 <a:solidFill>
                   <a:srgbClr val="17364A"/>
                 </a:solidFill>
@@ -9596,9 +9598,9 @@
                 <a:ea typeface="Aptos" pitchFamily="34" charset="-122"/>
                 <a:cs typeface="Aptos" pitchFamily="34" charset="-120"/>
               </a:rPr>
-              <a:t>Connect the concept to public health purpose, responsible use, required safeguards, documentation, and the next action a department should take.</a:t>
-            </a:r>
-            <a:endParaRPr lang="en-US" sz="1320" dirty="0"/>
+              <a:t>Connect the concept to public health purpose, responsible use, required.</a:t>
+            </a:r>
+            <a:endParaRPr lang="en-US" sz="1220" dirty="0"/>
           </a:p>
         </p:txBody>
       </p:sp>
@@ -9889,8 +9891,8 @@
         </p:nvSpPr>
         <p:spPr>
           <a:xfrm>
-            <a:off x="868680" y="1508760"/>
-            <a:ext cx="6309360" cy="4160520"/>
+            <a:off x="822960" y="1463040"/>
+            <a:ext cx="6565392" cy="4343400"/>
           </a:xfrm>
           <a:prstGeom prst="rect">
             <a:avLst/>
@@ -9908,7 +9910,7 @@
               <a:buNone/>
             </a:pPr>
             <a:r>
-              <a:rPr lang="en-US" sz="2100" dirty="0">
+              <a:rPr lang="en-US" sz="1920" dirty="0">
                 <a:solidFill>
                   <a:srgbClr val="003A63"/>
                 </a:solidFill>
@@ -9918,7 +9920,7 @@
               </a:rPr>
               <a:t>• Human review and monitoring notes</a:t>
             </a:r>
-            <a:endParaRPr lang="en-US" sz="2100" dirty="0"/>
+            <a:endParaRPr lang="en-US" sz="1920" dirty="0"/>
           </a:p>
         </p:txBody>
       </p:sp>
@@ -9930,12 +9932,12 @@
         </p:nvSpPr>
         <p:spPr>
           <a:xfrm>
-            <a:off x="7635240" y="1325880"/>
-            <a:ext cx="3474720" cy="1207008"/>
+            <a:off x="7543800" y="1325880"/>
+            <a:ext cx="3611880" cy="1261872"/>
           </a:xfrm>
           <a:prstGeom prst="roundRect">
             <a:avLst>
-              <a:gd name="adj" fmla="val 9091"/>
+              <a:gd name="adj" fmla="val 8696"/>
             </a:avLst>
           </a:prstGeom>
           <a:solidFill>
@@ -9957,8 +9959,8 @@
         </p:nvSpPr>
         <p:spPr>
           <a:xfrm>
-            <a:off x="7799832" y="1472184"/>
-            <a:ext cx="3145536" cy="256032"/>
+            <a:off x="7708392" y="1453896"/>
+            <a:ext cx="3282696" cy="228600"/>
           </a:xfrm>
           <a:prstGeom prst="rect">
             <a:avLst/>
@@ -9974,7 +9976,7 @@
               <a:buNone/>
             </a:pPr>
             <a:r>
-              <a:rPr lang="en-US" sz="1300" b="1" dirty="0">
+              <a:rPr lang="en-US" sz="1220" b="1" dirty="0">
                 <a:solidFill>
                   <a:srgbClr val="0068B7"/>
                 </a:solidFill>
@@ -9984,7 +9986,7 @@
               </a:rPr>
               <a:t>Core concept</a:t>
             </a:r>
-            <a:endParaRPr lang="en-US" sz="1300" dirty="0"/>
+            <a:endParaRPr lang="en-US" sz="1220" dirty="0"/>
           </a:p>
         </p:txBody>
       </p:sp>
@@ -9996,8 +9998,8 @@
         </p:nvSpPr>
         <p:spPr>
           <a:xfrm>
-            <a:off x="7799832" y="1801368"/>
-            <a:ext cx="3145536" cy="640080"/>
+            <a:off x="7708392" y="1764792"/>
+            <a:ext cx="3282696" cy="749808"/>
           </a:xfrm>
           <a:prstGeom prst="rect">
             <a:avLst/>
@@ -10015,7 +10017,7 @@
               <a:buNone/>
             </a:pPr>
             <a:r>
-              <a:rPr lang="en-US" sz="1320" dirty="0">
+              <a:rPr lang="en-US" sz="1220" dirty="0">
                 <a:solidFill>
                   <a:srgbClr val="17364A"/>
                 </a:solidFill>
@@ -10025,7 +10027,7 @@
               </a:rPr>
               <a:t>Human review and monitoring notes</a:t>
             </a:r>
-            <a:endParaRPr lang="en-US" sz="1320" dirty="0"/>
+            <a:endParaRPr lang="en-US" sz="1220" dirty="0"/>
           </a:p>
         </p:txBody>
       </p:sp>
@@ -10037,12 +10039,12 @@
         </p:nvSpPr>
         <p:spPr>
           <a:xfrm>
-            <a:off x="7635240" y="2670048"/>
-            <a:ext cx="3474720" cy="1377086"/>
+            <a:off x="7543800" y="2724912"/>
+            <a:ext cx="3611880" cy="1527048"/>
           </a:xfrm>
           <a:prstGeom prst="roundRect">
             <a:avLst>
-              <a:gd name="adj" fmla="val 7968"/>
+              <a:gd name="adj" fmla="val 7186"/>
             </a:avLst>
           </a:prstGeom>
           <a:solidFill>
@@ -10064,8 +10066,8 @@
         </p:nvSpPr>
         <p:spPr>
           <a:xfrm>
-            <a:off x="7799832" y="2816352"/>
-            <a:ext cx="3145536" cy="256032"/>
+            <a:off x="7708392" y="2852928"/>
+            <a:ext cx="3282696" cy="228600"/>
           </a:xfrm>
           <a:prstGeom prst="rect">
             <a:avLst/>
@@ -10081,7 +10083,7 @@
               <a:buNone/>
             </a:pPr>
             <a:r>
-              <a:rPr lang="en-US" sz="1300" b="1" dirty="0">
+              <a:rPr lang="en-US" sz="1220" b="1" dirty="0">
                 <a:solidFill>
                   <a:srgbClr val="0068B7"/>
                 </a:solidFill>
@@ -10091,7 +10093,7 @@
               </a:rPr>
               <a:t>Concept checkpoints</a:t>
             </a:r>
-            <a:endParaRPr lang="en-US" sz="1300" dirty="0"/>
+            <a:endParaRPr lang="en-US" sz="1220" dirty="0"/>
           </a:p>
         </p:txBody>
       </p:sp>
@@ -10103,8 +10105,8 @@
         </p:nvSpPr>
         <p:spPr>
           <a:xfrm>
-            <a:off x="7818120" y="3182112"/>
-            <a:ext cx="3090672" cy="718718"/>
+            <a:off x="7726680" y="3182112"/>
+            <a:ext cx="3227832" cy="960120"/>
           </a:xfrm>
           <a:prstGeom prst="rect">
             <a:avLst/>
@@ -10122,7 +10124,7 @@
               <a:buNone/>
             </a:pPr>
             <a:r>
-              <a:rPr lang="en-US" sz="1220" dirty="0">
+              <a:rPr lang="en-US" sz="1140" dirty="0">
                 <a:solidFill>
                   <a:srgbClr val="17364A"/>
                 </a:solidFill>
@@ -10132,7 +10134,7 @@
               </a:rPr>
               <a:t>Human review and monitoring notes</a:t>
             </a:r>
-            <a:endParaRPr lang="en-US" sz="1220" dirty="0"/>
+            <a:endParaRPr lang="en-US" sz="1140" dirty="0"/>
           </a:p>
         </p:txBody>
       </p:sp>
@@ -10144,12 +10146,12 @@
         </p:nvSpPr>
         <p:spPr>
           <a:xfrm>
-            <a:off x="7635240" y="4184294"/>
-            <a:ext cx="3474720" cy="1466698"/>
+            <a:off x="7543800" y="4389120"/>
+            <a:ext cx="3611880" cy="1261872"/>
           </a:xfrm>
           <a:prstGeom prst="roundRect">
             <a:avLst>
-              <a:gd name="adj" fmla="val 7481"/>
+              <a:gd name="adj" fmla="val 8696"/>
             </a:avLst>
           </a:prstGeom>
           <a:solidFill>
@@ -10171,8 +10173,8 @@
         </p:nvSpPr>
         <p:spPr>
           <a:xfrm>
-            <a:off x="7799832" y="4330598"/>
-            <a:ext cx="3145536" cy="256032"/>
+            <a:off x="7708392" y="4517136"/>
+            <a:ext cx="3282696" cy="228600"/>
           </a:xfrm>
           <a:prstGeom prst="rect">
             <a:avLst/>
@@ -10188,7 +10190,7 @@
               <a:buNone/>
             </a:pPr>
             <a:r>
-              <a:rPr lang="en-US" sz="1300" b="1" dirty="0">
+              <a:rPr lang="en-US" sz="1220" b="1" dirty="0">
                 <a:solidFill>
                   <a:srgbClr val="0068B7"/>
                 </a:solidFill>
@@ -10198,7 +10200,7 @@
               </a:rPr>
               <a:t>Apply it</a:t>
             </a:r>
-            <a:endParaRPr lang="en-US" sz="1300" dirty="0"/>
+            <a:endParaRPr lang="en-US" sz="1220" dirty="0"/>
           </a:p>
         </p:txBody>
       </p:sp>
@@ -10210,8 +10212,8 @@
         </p:nvSpPr>
         <p:spPr>
           <a:xfrm>
-            <a:off x="7799832" y="4659782"/>
-            <a:ext cx="3145536" cy="899770"/>
+            <a:off x="7708392" y="4828032"/>
+            <a:ext cx="3282696" cy="749808"/>
           </a:xfrm>
           <a:prstGeom prst="rect">
             <a:avLst/>
@@ -10229,7 +10231,7 @@
               <a:buNone/>
             </a:pPr>
             <a:r>
-              <a:rPr lang="en-US" sz="1320" dirty="0">
+              <a:rPr lang="en-US" sz="1220" dirty="0">
                 <a:solidFill>
                   <a:srgbClr val="17364A"/>
                 </a:solidFill>
@@ -10237,9 +10239,9 @@
                 <a:ea typeface="Aptos" pitchFamily="34" charset="-122"/>
                 <a:cs typeface="Aptos" pitchFamily="34" charset="-120"/>
               </a:rPr>
-              <a:t>Connect the concept to public health purpose, responsible use, required safeguards, documentation, and the next action a department should take.</a:t>
-            </a:r>
-            <a:endParaRPr lang="en-US" sz="1320" dirty="0"/>
+              <a:t>Connect the concept to public health purpose, responsible use, required.</a:t>
+            </a:r>
+            <a:endParaRPr lang="en-US" sz="1220" dirty="0"/>
           </a:p>
         </p:txBody>
       </p:sp>
@@ -10557,7 +10559,7 @@
                 <a:ea typeface="Aptos" pitchFamily="34" charset="-122"/>
                 <a:cs typeface="Aptos" pitchFamily="34" charset="-120"/>
               </a:rPr>
-              <a:t>• Machine learning is a set of methods that allow computer systems to identify patterns in data.</a:t>
+              <a:t>• Machine learning is a set of methods that allow computer systems to identify.</a:t>
             </a:r>
             <a:endParaRPr lang="en-US" sz="2100" dirty="0"/>
           </a:p>
@@ -10574,7 +10576,7 @@
                 <a:ea typeface="Aptos" pitchFamily="34" charset="-122"/>
                 <a:cs typeface="Aptos" pitchFamily="34" charset="-120"/>
               </a:rPr>
-              <a:t>• In public health, machine learning may support surveillance triage, outbreak signal review,.</a:t>
+              <a:t>• In public health, machine learning may support surveillance triage, outbreak.</a:t>
             </a:r>
             <a:endParaRPr lang="en-US" sz="2100" dirty="0"/>
           </a:p>
@@ -10632,8 +10634,8 @@
         </p:nvSpPr>
         <p:spPr>
           <a:xfrm>
-            <a:off x="8074152" y="1563624"/>
-            <a:ext cx="2825496" cy="256032"/>
+            <a:off x="8074152" y="1545336"/>
+            <a:ext cx="2825496" cy="228600"/>
           </a:xfrm>
           <a:prstGeom prst="rect">
             <a:avLst/>
@@ -10649,7 +10651,7 @@
               <a:buNone/>
             </a:pPr>
             <a:r>
-              <a:rPr lang="en-US" sz="1300" b="1" dirty="0">
+              <a:rPr lang="en-US" sz="1220" b="1" dirty="0">
                 <a:solidFill>
                   <a:srgbClr val="0068B7"/>
                 </a:solidFill>
@@ -10659,7 +10661,7 @@
               </a:rPr>
               <a:t>Module details</a:t>
             </a:r>
-            <a:endParaRPr lang="en-US" sz="1300" dirty="0"/>
+            <a:endParaRPr lang="en-US" sz="1220" dirty="0"/>
           </a:p>
         </p:txBody>
       </p:sp>
@@ -10671,8 +10673,8 @@
         </p:nvSpPr>
         <p:spPr>
           <a:xfrm>
-            <a:off x="8074152" y="1892808"/>
-            <a:ext cx="2825496" cy="1353312"/>
+            <a:off x="8074152" y="1856232"/>
+            <a:ext cx="2825496" cy="1408176"/>
           </a:xfrm>
           <a:prstGeom prst="rect">
             <a:avLst/>
@@ -10690,7 +10692,7 @@
               <a:buNone/>
             </a:pPr>
             <a:r>
-              <a:rPr lang="en-US" sz="1320" dirty="0">
+              <a:rPr lang="en-US" sz="1220" dirty="0">
                 <a:solidFill>
                   <a:srgbClr val="17364A"/>
                 </a:solidFill>
@@ -10698,9 +10700,9 @@
                 <a:ea typeface="Aptos" pitchFamily="34" charset="-122"/>
                 <a:cs typeface="Aptos" pitchFamily="34" charset="-120"/>
               </a:rPr>
-              <a:t>Level: applied/foundational Primary track: Analytics and Modeling Track Appears in tracks: analytics-modeling</a:t>
-            </a:r>
-            <a:endParaRPr lang="en-US" sz="1320" dirty="0"/>
+              <a:t>Level: applied/foundational Primary track: Analytics and Modeling Track Appears.</a:t>
+            </a:r>
+            <a:endParaRPr lang="en-US" sz="1220" dirty="0"/>
           </a:p>
         </p:txBody>
       </p:sp>
@@ -10739,8 +10741,8 @@
         </p:nvSpPr>
         <p:spPr>
           <a:xfrm>
-            <a:off x="8074152" y="3822192"/>
-            <a:ext cx="2825496" cy="256032"/>
+            <a:off x="8074152" y="3803904"/>
+            <a:ext cx="2825496" cy="228600"/>
           </a:xfrm>
           <a:prstGeom prst="rect">
             <a:avLst/>
@@ -10756,7 +10758,7 @@
               <a:buNone/>
             </a:pPr>
             <a:r>
-              <a:rPr lang="en-US" sz="1300" b="1" dirty="0">
+              <a:rPr lang="en-US" sz="1220" b="1" dirty="0">
                 <a:solidFill>
                   <a:srgbClr val="0068B7"/>
                 </a:solidFill>
@@ -10766,7 +10768,7 @@
               </a:rPr>
               <a:t>Learning sequence</a:t>
             </a:r>
-            <a:endParaRPr lang="en-US" sz="1300" dirty="0"/>
+            <a:endParaRPr lang="en-US" sz="1220" dirty="0"/>
           </a:p>
         </p:txBody>
       </p:sp>
@@ -10778,8 +10780,8 @@
         </p:nvSpPr>
         <p:spPr>
           <a:xfrm>
-            <a:off x="8092440" y="4187952"/>
-            <a:ext cx="2770632" cy="1033272"/>
+            <a:off x="8092440" y="4133088"/>
+            <a:ext cx="2770632" cy="1124712"/>
           </a:xfrm>
           <a:prstGeom prst="rect">
             <a:avLst/>
@@ -10797,7 +10799,7 @@
               <a:buNone/>
             </a:pPr>
             <a:r>
-              <a:rPr lang="en-US" sz="1220" dirty="0">
+              <a:rPr lang="en-US" sz="1140" dirty="0">
                 <a:solidFill>
                   <a:srgbClr val="17364A"/>
                 </a:solidFill>
@@ -10807,14 +10809,14 @@
               </a:rPr>
               <a:t>Read the module for shared vocabulary and context.</a:t>
             </a:r>
-            <a:endParaRPr lang="en-US" sz="1220" dirty="0"/>
-          </a:p>
-          <a:p>
-            <a:pPr indent="0" marL="0">
-              <a:buNone/>
-            </a:pPr>
-            <a:r>
-              <a:rPr lang="en-US" sz="1220" dirty="0">
+            <a:endParaRPr lang="en-US" sz="1140" dirty="0"/>
+          </a:p>
+          <a:p>
+            <a:pPr indent="0" marL="0">
+              <a:buNone/>
+            </a:pPr>
+            <a:r>
+              <a:rPr lang="en-US" sz="1140" dirty="0">
                 <a:solidFill>
                   <a:srgbClr val="17364A"/>
                 </a:solidFill>
@@ -10822,16 +10824,16 @@
                 <a:ea typeface="Aptos" pitchFamily="34" charset="-122"/>
                 <a:cs typeface="Aptos" pitchFamily="34" charset="-120"/>
               </a:rPr>
-              <a:t>Complete the practical exercise to apply the concept.</a:t>
-            </a:r>
-            <a:endParaRPr lang="en-US" sz="1220" dirty="0"/>
-          </a:p>
-          <a:p>
-            <a:pPr indent="0" marL="0">
-              <a:buNone/>
-            </a:pPr>
-            <a:r>
-              <a:rPr lang="en-US" sz="1220" dirty="0">
+              <a:t>Complete the practical exercise to apply the.</a:t>
+            </a:r>
+            <a:endParaRPr lang="en-US" sz="1140" dirty="0"/>
+          </a:p>
+          <a:p>
+            <a:pPr indent="0" marL="0">
+              <a:buNone/>
+            </a:pPr>
+            <a:r>
+              <a:rPr lang="en-US" sz="1140" dirty="0">
                 <a:solidFill>
                   <a:srgbClr val="17364A"/>
                 </a:solidFill>
@@ -10841,7 +10843,7 @@
               </a:rPr>
               <a:t>Use the notes and references for deeper review.</a:t>
             </a:r>
-            <a:endParaRPr lang="en-US" sz="1220" dirty="0"/>
+            <a:endParaRPr lang="en-US" sz="1140" dirty="0"/>
           </a:p>
         </p:txBody>
       </p:sp>
@@ -11132,8 +11134,8 @@
         </p:nvSpPr>
         <p:spPr>
           <a:xfrm>
-            <a:off x="868680" y="1508760"/>
-            <a:ext cx="6309360" cy="4160520"/>
+            <a:off x="822960" y="1463040"/>
+            <a:ext cx="6565392" cy="4343400"/>
           </a:xfrm>
           <a:prstGeom prst="rect">
             <a:avLst/>
@@ -11151,7 +11153,7 @@
               <a:buNone/>
             </a:pPr>
             <a:r>
-              <a:rPr lang="en-US" sz="2100" dirty="0">
+              <a:rPr lang="en-US" sz="1920" dirty="0">
                 <a:solidFill>
                   <a:srgbClr val="003A63"/>
                 </a:solidFill>
@@ -11161,14 +11163,14 @@
               </a:rPr>
               <a:t>• Machine learning use case review worksheet</a:t>
             </a:r>
-            <a:endParaRPr lang="en-US" sz="2100" dirty="0"/>
-          </a:p>
-          <a:p>
-            <a:pPr indent="0" marL="0">
-              <a:buNone/>
-            </a:pPr>
-            <a:r>
-              <a:rPr lang="en-US" sz="2100" dirty="0">
+            <a:endParaRPr lang="en-US" sz="1920" dirty="0"/>
+          </a:p>
+          <a:p>
+            <a:pPr indent="0" marL="0">
+              <a:buNone/>
+            </a:pPr>
+            <a:r>
+              <a:rPr lang="en-US" sz="1920" dirty="0">
                 <a:solidFill>
                   <a:srgbClr val="003A63"/>
                 </a:solidFill>
@@ -11178,14 +11180,14 @@
               </a:rPr>
               <a:t>• Feature and label inventory</a:t>
             </a:r>
-            <a:endParaRPr lang="en-US" sz="2100" dirty="0"/>
-          </a:p>
-          <a:p>
-            <a:pPr indent="0" marL="0">
-              <a:buNone/>
-            </a:pPr>
-            <a:r>
-              <a:rPr lang="en-US" sz="2100" dirty="0">
+            <a:endParaRPr lang="en-US" sz="1920" dirty="0"/>
+          </a:p>
+          <a:p>
+            <a:pPr indent="0" marL="0">
+              <a:buNone/>
+            </a:pPr>
+            <a:r>
+              <a:rPr lang="en-US" sz="1920" dirty="0">
                 <a:solidFill>
                   <a:srgbClr val="003A63"/>
                 </a:solidFill>
@@ -11195,7 +11197,7 @@
               </a:rPr>
               <a:t>• Initial model risk and safeguard list</a:t>
             </a:r>
-            <a:endParaRPr lang="en-US" sz="2100" dirty="0"/>
+            <a:endParaRPr lang="en-US" sz="1920" dirty="0"/>
           </a:p>
         </p:txBody>
       </p:sp>
@@ -11207,12 +11209,12 @@
         </p:nvSpPr>
         <p:spPr>
           <a:xfrm>
-            <a:off x="7635240" y="1325880"/>
-            <a:ext cx="3474720" cy="1207008"/>
+            <a:off x="7543800" y="1325880"/>
+            <a:ext cx="3611880" cy="1261872"/>
           </a:xfrm>
           <a:prstGeom prst="roundRect">
             <a:avLst>
-              <a:gd name="adj" fmla="val 9091"/>
+              <a:gd name="adj" fmla="val 8696"/>
             </a:avLst>
           </a:prstGeom>
           <a:solidFill>
@@ -11234,8 +11236,8 @@
         </p:nvSpPr>
         <p:spPr>
           <a:xfrm>
-            <a:off x="7799832" y="1472184"/>
-            <a:ext cx="3145536" cy="256032"/>
+            <a:off x="7708392" y="1453896"/>
+            <a:ext cx="3282696" cy="228600"/>
           </a:xfrm>
           <a:prstGeom prst="rect">
             <a:avLst/>
@@ -11251,7 +11253,7 @@
               <a:buNone/>
             </a:pPr>
             <a:r>
-              <a:rPr lang="en-US" sz="1300" b="1" dirty="0">
+              <a:rPr lang="en-US" sz="1220" b="1" dirty="0">
                 <a:solidFill>
                   <a:srgbClr val="0068B7"/>
                 </a:solidFill>
@@ -11261,7 +11263,7 @@
               </a:rPr>
               <a:t>Practice focus</a:t>
             </a:r>
-            <a:endParaRPr lang="en-US" sz="1300" dirty="0"/>
+            <a:endParaRPr lang="en-US" sz="1220" dirty="0"/>
           </a:p>
         </p:txBody>
       </p:sp>
@@ -11273,8 +11275,8 @@
         </p:nvSpPr>
         <p:spPr>
           <a:xfrm>
-            <a:off x="7799832" y="1801368"/>
-            <a:ext cx="3145536" cy="640080"/>
+            <a:off x="7708392" y="1764792"/>
+            <a:ext cx="3282696" cy="749808"/>
           </a:xfrm>
           <a:prstGeom prst="rect">
             <a:avLst/>
@@ -11292,7 +11294,7 @@
               <a:buNone/>
             </a:pPr>
             <a:r>
-              <a:rPr lang="en-US" sz="1320" dirty="0">
+              <a:rPr lang="en-US" sz="1220" dirty="0">
                 <a:solidFill>
                   <a:srgbClr val="17364A"/>
                 </a:solidFill>
@@ -11302,7 +11304,7 @@
               </a:rPr>
               <a:t>Machine learning use case review worksheet</a:t>
             </a:r>
-            <a:endParaRPr lang="en-US" sz="1320" dirty="0"/>
+            <a:endParaRPr lang="en-US" sz="1220" dirty="0"/>
           </a:p>
         </p:txBody>
       </p:sp>
@@ -11314,12 +11316,12 @@
         </p:nvSpPr>
         <p:spPr>
           <a:xfrm>
-            <a:off x="7635240" y="2670048"/>
-            <a:ext cx="3474720" cy="1377086"/>
+            <a:off x="7543800" y="2724912"/>
+            <a:ext cx="3611880" cy="1527048"/>
           </a:xfrm>
           <a:prstGeom prst="roundRect">
             <a:avLst>
-              <a:gd name="adj" fmla="val 7968"/>
+              <a:gd name="adj" fmla="val 7186"/>
             </a:avLst>
           </a:prstGeom>
           <a:solidFill>
@@ -11341,8 +11343,8 @@
         </p:nvSpPr>
         <p:spPr>
           <a:xfrm>
-            <a:off x="7799832" y="2816352"/>
-            <a:ext cx="3145536" cy="256032"/>
+            <a:off x="7708392" y="2852928"/>
+            <a:ext cx="3282696" cy="228600"/>
           </a:xfrm>
           <a:prstGeom prst="rect">
             <a:avLst/>
@@ -11358,7 +11360,7 @@
               <a:buNone/>
             </a:pPr>
             <a:r>
-              <a:rPr lang="en-US" sz="1300" b="1" dirty="0">
+              <a:rPr lang="en-US" sz="1220" b="1" dirty="0">
                 <a:solidFill>
                   <a:srgbClr val="0068B7"/>
                 </a:solidFill>
@@ -11368,7 +11370,7 @@
               </a:rPr>
               <a:t>Concept checkpoints</a:t>
             </a:r>
-            <a:endParaRPr lang="en-US" sz="1300" dirty="0"/>
+            <a:endParaRPr lang="en-US" sz="1220" dirty="0"/>
           </a:p>
         </p:txBody>
       </p:sp>
@@ -11380,8 +11382,8 @@
         </p:nvSpPr>
         <p:spPr>
           <a:xfrm>
-            <a:off x="7818120" y="3182112"/>
-            <a:ext cx="3090672" cy="718718"/>
+            <a:off x="7726680" y="3182112"/>
+            <a:ext cx="3227832" cy="960120"/>
           </a:xfrm>
           <a:prstGeom prst="rect">
             <a:avLst/>
@@ -11399,7 +11401,7 @@
               <a:buNone/>
             </a:pPr>
             <a:r>
-              <a:rPr lang="en-US" sz="1220" dirty="0">
+              <a:rPr lang="en-US" sz="1140" dirty="0">
                 <a:solidFill>
                   <a:srgbClr val="17364A"/>
                 </a:solidFill>
@@ -11409,14 +11411,14 @@
               </a:rPr>
               <a:t>Machine learning use case review worksheet</a:t>
             </a:r>
-            <a:endParaRPr lang="en-US" sz="1220" dirty="0"/>
-          </a:p>
-          <a:p>
-            <a:pPr indent="0" marL="0">
-              <a:buNone/>
-            </a:pPr>
-            <a:r>
-              <a:rPr lang="en-US" sz="1220" dirty="0">
+            <a:endParaRPr lang="en-US" sz="1140" dirty="0"/>
+          </a:p>
+          <a:p>
+            <a:pPr indent="0" marL="0">
+              <a:buNone/>
+            </a:pPr>
+            <a:r>
+              <a:rPr lang="en-US" sz="1140" dirty="0">
                 <a:solidFill>
                   <a:srgbClr val="17364A"/>
                 </a:solidFill>
@@ -11426,14 +11428,14 @@
               </a:rPr>
               <a:t>Feature and label inventory</a:t>
             </a:r>
-            <a:endParaRPr lang="en-US" sz="1220" dirty="0"/>
-          </a:p>
-          <a:p>
-            <a:pPr indent="0" marL="0">
-              <a:buNone/>
-            </a:pPr>
-            <a:r>
-              <a:rPr lang="en-US" sz="1220" dirty="0">
+            <a:endParaRPr lang="en-US" sz="1140" dirty="0"/>
+          </a:p>
+          <a:p>
+            <a:pPr indent="0" marL="0">
+              <a:buNone/>
+            </a:pPr>
+            <a:r>
+              <a:rPr lang="en-US" sz="1140" dirty="0">
                 <a:solidFill>
                   <a:srgbClr val="17364A"/>
                 </a:solidFill>
@@ -11443,7 +11445,7 @@
               </a:rPr>
               <a:t>Initial model risk and safeguard list</a:t>
             </a:r>
-            <a:endParaRPr lang="en-US" sz="1220" dirty="0"/>
+            <a:endParaRPr lang="en-US" sz="1140" dirty="0"/>
           </a:p>
         </p:txBody>
       </p:sp>
@@ -11455,12 +11457,12 @@
         </p:nvSpPr>
         <p:spPr>
           <a:xfrm>
-            <a:off x="7635240" y="4184294"/>
-            <a:ext cx="3474720" cy="1466698"/>
+            <a:off x="7543800" y="4389120"/>
+            <a:ext cx="3611880" cy="1261872"/>
           </a:xfrm>
           <a:prstGeom prst="roundRect">
             <a:avLst>
-              <a:gd name="adj" fmla="val 7481"/>
+              <a:gd name="adj" fmla="val 8696"/>
             </a:avLst>
           </a:prstGeom>
           <a:solidFill>
@@ -11482,8 +11484,8 @@
         </p:nvSpPr>
         <p:spPr>
           <a:xfrm>
-            <a:off x="7799832" y="4330598"/>
-            <a:ext cx="3145536" cy="256032"/>
+            <a:off x="7708392" y="4517136"/>
+            <a:ext cx="3282696" cy="228600"/>
           </a:xfrm>
           <a:prstGeom prst="rect">
             <a:avLst/>
@@ -11499,7 +11501,7 @@
               <a:buNone/>
             </a:pPr>
             <a:r>
-              <a:rPr lang="en-US" sz="1300" b="1" dirty="0">
+              <a:rPr lang="en-US" sz="1220" b="1" dirty="0">
                 <a:solidFill>
                   <a:srgbClr val="0068B7"/>
                 </a:solidFill>
@@ -11509,7 +11511,7 @@
               </a:rPr>
               <a:t>What to produce</a:t>
             </a:r>
-            <a:endParaRPr lang="en-US" sz="1300" dirty="0"/>
+            <a:endParaRPr lang="en-US" sz="1220" dirty="0"/>
           </a:p>
         </p:txBody>
       </p:sp>
@@ -11521,8 +11523,8 @@
         </p:nvSpPr>
         <p:spPr>
           <a:xfrm>
-            <a:off x="7799832" y="4659782"/>
-            <a:ext cx="3145536" cy="899770"/>
+            <a:off x="7708392" y="4828032"/>
+            <a:ext cx="3282696" cy="749808"/>
           </a:xfrm>
           <a:prstGeom prst="rect">
             <a:avLst/>
@@ -11540,7 +11542,7 @@
               <a:buNone/>
             </a:pPr>
             <a:r>
-              <a:rPr lang="en-US" sz="1320" dirty="0">
+              <a:rPr lang="en-US" sz="1220" dirty="0">
                 <a:solidFill>
                   <a:srgbClr val="17364A"/>
                 </a:solidFill>
@@ -11548,9 +11550,9 @@
                 <a:ea typeface="Aptos" pitchFamily="34" charset="-122"/>
                 <a:cs typeface="Aptos" pitchFamily="34" charset="-120"/>
               </a:rPr>
-              <a:t>Use the assignment to test whether you can explain the concept, apply it to a realistic public health situation, and identify what would need review before the work moves forward.</a:t>
-            </a:r>
-            <a:endParaRPr lang="en-US" sz="1320" dirty="0"/>
+              <a:t>Use the assignment to test whether you can explain the concept, apply it to a.</a:t>
+            </a:r>
+            <a:endParaRPr lang="en-US" sz="1220" dirty="0"/>
           </a:p>
         </p:txBody>
       </p:sp>
@@ -11841,8 +11843,8 @@
         </p:nvSpPr>
         <p:spPr>
           <a:xfrm>
-            <a:off x="868680" y="1508760"/>
-            <a:ext cx="6309360" cy="4160520"/>
+            <a:off x="822960" y="1463040"/>
+            <a:ext cx="6565392" cy="4343400"/>
           </a:xfrm>
           <a:prstGeom prst="rect">
             <a:avLst/>
@@ -11860,7 +11862,7 @@
               <a:buNone/>
             </a:pPr>
             <a:r>
-              <a:rPr lang="en-US" sz="2100" dirty="0">
+              <a:rPr lang="en-US" sz="1920" dirty="0">
                 <a:solidFill>
                   <a:srgbClr val="003A63"/>
                 </a:solidFill>
@@ -11870,14 +11872,14 @@
               </a:rPr>
               <a:t>• 1. Which statement best describes supervised learning?</a:t>
             </a:r>
-            <a:endParaRPr lang="en-US" sz="2100" dirty="0"/>
-          </a:p>
-          <a:p>
-            <a:pPr indent="0" marL="0">
-              <a:buNone/>
-            </a:pPr>
-            <a:r>
-              <a:rPr lang="en-US" sz="2100" dirty="0">
+            <a:endParaRPr lang="en-US" sz="1920" dirty="0"/>
+          </a:p>
+          <a:p>
+            <a:pPr indent="0" marL="0">
+              <a:buNone/>
+            </a:pPr>
+            <a:r>
+              <a:rPr lang="en-US" sz="1920" dirty="0">
                 <a:solidFill>
                   <a:srgbClr val="003A63"/>
                 </a:solidFill>
@@ -11887,14 +11889,14 @@
               </a:rPr>
               <a:t>• 2. Why can historical labels create risk?</a:t>
             </a:r>
-            <a:endParaRPr lang="en-US" sz="2100" dirty="0"/>
-          </a:p>
-          <a:p>
-            <a:pPr indent="0" marL="0">
-              <a:buNone/>
-            </a:pPr>
-            <a:r>
-              <a:rPr lang="en-US" sz="2100" dirty="0">
+            <a:endParaRPr lang="en-US" sz="1920" dirty="0"/>
+          </a:p>
+          <a:p>
+            <a:pPr indent="0" marL="0">
+              <a:buNone/>
+            </a:pPr>
+            <a:r>
+              <a:rPr lang="en-US" sz="1920" dirty="0">
                 <a:solidFill>
                   <a:srgbClr val="003A63"/>
                 </a:solidFill>
@@ -11904,7 +11906,7 @@
               </a:rPr>
               <a:t>• 3. What is overfitting?</a:t>
             </a:r>
-            <a:endParaRPr lang="en-US" sz="2100" dirty="0"/>
+            <a:endParaRPr lang="en-US" sz="1920" dirty="0"/>
           </a:p>
         </p:txBody>
       </p:sp>
@@ -11916,12 +11918,12 @@
         </p:nvSpPr>
         <p:spPr>
           <a:xfrm>
-            <a:off x="7635240" y="1325880"/>
-            <a:ext cx="3474720" cy="1207008"/>
+            <a:off x="7543800" y="1325880"/>
+            <a:ext cx="3611880" cy="1261872"/>
           </a:xfrm>
           <a:prstGeom prst="roundRect">
             <a:avLst>
-              <a:gd name="adj" fmla="val 9091"/>
+              <a:gd name="adj" fmla="val 8696"/>
             </a:avLst>
           </a:prstGeom>
           <a:solidFill>
@@ -11943,8 +11945,8 @@
         </p:nvSpPr>
         <p:spPr>
           <a:xfrm>
-            <a:off x="7799832" y="1472184"/>
-            <a:ext cx="3145536" cy="256032"/>
+            <a:off x="7708392" y="1453896"/>
+            <a:ext cx="3282696" cy="228600"/>
           </a:xfrm>
           <a:prstGeom prst="rect">
             <a:avLst/>
@@ -11960,7 +11962,7 @@
               <a:buNone/>
             </a:pPr>
             <a:r>
-              <a:rPr lang="en-US" sz="1300" b="1" dirty="0">
+              <a:rPr lang="en-US" sz="1220" b="1" dirty="0">
                 <a:solidFill>
                   <a:srgbClr val="0068B7"/>
                 </a:solidFill>
@@ -11970,7 +11972,7 @@
               </a:rPr>
               <a:t>Practice focus</a:t>
             </a:r>
-            <a:endParaRPr lang="en-US" sz="1300" dirty="0"/>
+            <a:endParaRPr lang="en-US" sz="1220" dirty="0"/>
           </a:p>
         </p:txBody>
       </p:sp>
@@ -11982,8 +11984,8 @@
         </p:nvSpPr>
         <p:spPr>
           <a:xfrm>
-            <a:off x="7799832" y="1801368"/>
-            <a:ext cx="3145536" cy="640080"/>
+            <a:off x="7708392" y="1764792"/>
+            <a:ext cx="3282696" cy="749808"/>
           </a:xfrm>
           <a:prstGeom prst="rect">
             <a:avLst/>
@@ -12001,7 +12003,7 @@
               <a:buNone/>
             </a:pPr>
             <a:r>
-              <a:rPr lang="en-US" sz="1320" dirty="0">
+              <a:rPr lang="en-US" sz="1220" dirty="0">
                 <a:solidFill>
                   <a:srgbClr val="17364A"/>
                 </a:solidFill>
@@ -12011,7 +12013,7 @@
               </a:rPr>
               <a:t>1. Which statement best describes supervised learning?</a:t>
             </a:r>
-            <a:endParaRPr lang="en-US" sz="1320" dirty="0"/>
+            <a:endParaRPr lang="en-US" sz="1220" dirty="0"/>
           </a:p>
         </p:txBody>
       </p:sp>
@@ -12023,12 +12025,12 @@
         </p:nvSpPr>
         <p:spPr>
           <a:xfrm>
-            <a:off x="7635240" y="2670048"/>
-            <a:ext cx="3474720" cy="1377086"/>
+            <a:off x="7543800" y="2724912"/>
+            <a:ext cx="3611880" cy="1527048"/>
           </a:xfrm>
           <a:prstGeom prst="roundRect">
             <a:avLst>
-              <a:gd name="adj" fmla="val 7968"/>
+              <a:gd name="adj" fmla="val 7186"/>
             </a:avLst>
           </a:prstGeom>
           <a:solidFill>
@@ -12050,8 +12052,8 @@
         </p:nvSpPr>
         <p:spPr>
           <a:xfrm>
-            <a:off x="7799832" y="2816352"/>
-            <a:ext cx="3145536" cy="256032"/>
+            <a:off x="7708392" y="2852928"/>
+            <a:ext cx="3282696" cy="228600"/>
           </a:xfrm>
           <a:prstGeom prst="rect">
             <a:avLst/>
@@ -12067,7 +12069,7 @@
               <a:buNone/>
             </a:pPr>
             <a:r>
-              <a:rPr lang="en-US" sz="1300" b="1" dirty="0">
+              <a:rPr lang="en-US" sz="1220" b="1" dirty="0">
                 <a:solidFill>
                   <a:srgbClr val="0068B7"/>
                 </a:solidFill>
@@ -12077,7 +12079,7 @@
               </a:rPr>
               <a:t>Concept checkpoints</a:t>
             </a:r>
-            <a:endParaRPr lang="en-US" sz="1300" dirty="0"/>
+            <a:endParaRPr lang="en-US" sz="1220" dirty="0"/>
           </a:p>
         </p:txBody>
       </p:sp>
@@ -12089,8 +12091,8 @@
         </p:nvSpPr>
         <p:spPr>
           <a:xfrm>
-            <a:off x="7818120" y="3182112"/>
-            <a:ext cx="3090672" cy="718718"/>
+            <a:off x="7726680" y="3182112"/>
+            <a:ext cx="3227832" cy="960120"/>
           </a:xfrm>
           <a:prstGeom prst="rect">
             <a:avLst/>
@@ -12108,7 +12110,7 @@
               <a:buNone/>
             </a:pPr>
             <a:r>
-              <a:rPr lang="en-US" sz="1220" dirty="0">
+              <a:rPr lang="en-US" sz="1140" dirty="0">
                 <a:solidFill>
                   <a:srgbClr val="17364A"/>
                 </a:solidFill>
@@ -12118,14 +12120,14 @@
               </a:rPr>
               <a:t>1.</a:t>
             </a:r>
-            <a:endParaRPr lang="en-US" sz="1220" dirty="0"/>
-          </a:p>
-          <a:p>
-            <a:pPr indent="0" marL="0">
-              <a:buNone/>
-            </a:pPr>
-            <a:r>
-              <a:rPr lang="en-US" sz="1220" dirty="0">
+            <a:endParaRPr lang="en-US" sz="1140" dirty="0"/>
+          </a:p>
+          <a:p>
+            <a:pPr indent="0" marL="0">
+              <a:buNone/>
+            </a:pPr>
+            <a:r>
+              <a:rPr lang="en-US" sz="1140" dirty="0">
                 <a:solidFill>
                   <a:srgbClr val="17364A"/>
                 </a:solidFill>
@@ -12135,14 +12137,14 @@
               </a:rPr>
               <a:t>Which statement best describes supervised learning?</a:t>
             </a:r>
-            <a:endParaRPr lang="en-US" sz="1220" dirty="0"/>
-          </a:p>
-          <a:p>
-            <a:pPr indent="0" marL="0">
-              <a:buNone/>
-            </a:pPr>
-            <a:r>
-              <a:rPr lang="en-US" sz="1220" dirty="0">
+            <a:endParaRPr lang="en-US" sz="1140" dirty="0"/>
+          </a:p>
+          <a:p>
+            <a:pPr indent="0" marL="0">
+              <a:buNone/>
+            </a:pPr>
+            <a:r>
+              <a:rPr lang="en-US" sz="1140" dirty="0">
                 <a:solidFill>
                   <a:srgbClr val="17364A"/>
                 </a:solidFill>
@@ -12152,7 +12154,7 @@
               </a:rPr>
               <a:t>2.</a:t>
             </a:r>
-            <a:endParaRPr lang="en-US" sz="1220" dirty="0"/>
+            <a:endParaRPr lang="en-US" sz="1140" dirty="0"/>
           </a:p>
         </p:txBody>
       </p:sp>
@@ -12164,12 +12166,12 @@
         </p:nvSpPr>
         <p:spPr>
           <a:xfrm>
-            <a:off x="7635240" y="4184294"/>
-            <a:ext cx="3474720" cy="1466698"/>
+            <a:off x="7543800" y="4389120"/>
+            <a:ext cx="3611880" cy="1261872"/>
           </a:xfrm>
           <a:prstGeom prst="roundRect">
             <a:avLst>
-              <a:gd name="adj" fmla="val 7481"/>
+              <a:gd name="adj" fmla="val 8696"/>
             </a:avLst>
           </a:prstGeom>
           <a:solidFill>
@@ -12191,8 +12193,8 @@
         </p:nvSpPr>
         <p:spPr>
           <a:xfrm>
-            <a:off x="7799832" y="4330598"/>
-            <a:ext cx="3145536" cy="256032"/>
+            <a:off x="7708392" y="4517136"/>
+            <a:ext cx="3282696" cy="228600"/>
           </a:xfrm>
           <a:prstGeom prst="rect">
             <a:avLst/>
@@ -12208,7 +12210,7 @@
               <a:buNone/>
             </a:pPr>
             <a:r>
-              <a:rPr lang="en-US" sz="1300" b="1" dirty="0">
+              <a:rPr lang="en-US" sz="1220" b="1" dirty="0">
                 <a:solidFill>
                   <a:srgbClr val="0068B7"/>
                 </a:solidFill>
@@ -12218,7 +12220,7 @@
               </a:rPr>
               <a:t>What to produce</a:t>
             </a:r>
-            <a:endParaRPr lang="en-US" sz="1300" dirty="0"/>
+            <a:endParaRPr lang="en-US" sz="1220" dirty="0"/>
           </a:p>
         </p:txBody>
       </p:sp>
@@ -12230,8 +12232,8 @@
         </p:nvSpPr>
         <p:spPr>
           <a:xfrm>
-            <a:off x="7799832" y="4659782"/>
-            <a:ext cx="3145536" cy="899770"/>
+            <a:off x="7708392" y="4828032"/>
+            <a:ext cx="3282696" cy="749808"/>
           </a:xfrm>
           <a:prstGeom prst="rect">
             <a:avLst/>
@@ -12249,7 +12251,7 @@
               <a:buNone/>
             </a:pPr>
             <a:r>
-              <a:rPr lang="en-US" sz="1320" dirty="0">
+              <a:rPr lang="en-US" sz="1220" dirty="0">
                 <a:solidFill>
                   <a:srgbClr val="17364A"/>
                 </a:solidFill>
@@ -12257,9 +12259,9 @@
                 <a:ea typeface="Aptos" pitchFamily="34" charset="-122"/>
                 <a:cs typeface="Aptos" pitchFamily="34" charset="-120"/>
               </a:rPr>
-              <a:t>Use the assignment to test whether you can explain the concept, apply it to a realistic public health situation, and identify what would need review before the work moves forward.</a:t>
-            </a:r>
-            <a:endParaRPr lang="en-US" sz="1320" dirty="0"/>
+              <a:t>Use the assignment to test whether you can explain the concept, apply it to a.</a:t>
+            </a:r>
+            <a:endParaRPr lang="en-US" sz="1220" dirty="0"/>
           </a:p>
         </p:txBody>
       </p:sp>
@@ -12550,8 +12552,8 @@
         </p:nvSpPr>
         <p:spPr>
           <a:xfrm>
-            <a:off x="868680" y="1508760"/>
-            <a:ext cx="6309360" cy="4160520"/>
+            <a:off x="822960" y="1463040"/>
+            <a:ext cx="6565392" cy="4343400"/>
           </a:xfrm>
           <a:prstGeom prst="rect">
             <a:avLst/>
@@ -12569,7 +12571,7 @@
               <a:buNone/>
             </a:pPr>
             <a:r>
-              <a:rPr lang="en-US" sz="2100" dirty="0">
+              <a:rPr lang="en-US" sz="1920" dirty="0">
                 <a:solidFill>
                   <a:srgbClr val="003A63"/>
                 </a:solidFill>
@@ -12579,14 +12581,14 @@
               </a:rPr>
               <a:t>• CDC Evaluation Framework: https://www.cdc.gov/evaluation/</a:t>
             </a:r>
-            <a:endParaRPr lang="en-US" sz="2100" dirty="0"/>
-          </a:p>
-          <a:p>
-            <a:pPr indent="0" marL="0">
-              <a:buNone/>
-            </a:pPr>
-            <a:r>
-              <a:rPr lang="en-US" sz="2100" dirty="0">
+            <a:endParaRPr lang="en-US" sz="1920" dirty="0"/>
+          </a:p>
+          <a:p>
+            <a:pPr indent="0" marL="0">
+              <a:buNone/>
+            </a:pPr>
+            <a:r>
+              <a:rPr lang="en-US" sz="1920" dirty="0">
                 <a:solidFill>
                   <a:srgbClr val="003A63"/>
                 </a:solidFill>
@@ -12596,14 +12598,14 @@
               </a:rPr>
               <a:t>• NIST Artificial Intelligence Risk Management Framework:.</a:t>
             </a:r>
-            <a:endParaRPr lang="en-US" sz="2100" dirty="0"/>
-          </a:p>
-          <a:p>
-            <a:pPr indent="0" marL="0">
-              <a:buNone/>
-            </a:pPr>
-            <a:r>
-              <a:rPr lang="en-US" sz="2100" dirty="0">
+            <a:endParaRPr lang="en-US" sz="1920" dirty="0"/>
+          </a:p>
+          <a:p>
+            <a:pPr indent="0" marL="0">
+              <a:buNone/>
+            </a:pPr>
+            <a:r>
+              <a:rPr lang="en-US" sz="1920" dirty="0">
                 <a:solidFill>
                   <a:srgbClr val="003A63"/>
                 </a:solidFill>
@@ -12613,7 +12615,7 @@
               </a:rPr>
               <a:t>• NIST AI RMF Generative AI Profile:.</a:t>
             </a:r>
-            <a:endParaRPr lang="en-US" sz="2100" dirty="0"/>
+            <a:endParaRPr lang="en-US" sz="1920" dirty="0"/>
           </a:p>
         </p:txBody>
       </p:sp>
@@ -12625,12 +12627,12 @@
         </p:nvSpPr>
         <p:spPr>
           <a:xfrm>
-            <a:off x="7635240" y="1325880"/>
-            <a:ext cx="3474720" cy="1207008"/>
+            <a:off x="7543800" y="1325880"/>
+            <a:ext cx="3611880" cy="1261872"/>
           </a:xfrm>
           <a:prstGeom prst="roundRect">
             <a:avLst>
-              <a:gd name="adj" fmla="val 9091"/>
+              <a:gd name="adj" fmla="val 8696"/>
             </a:avLst>
           </a:prstGeom>
           <a:solidFill>
@@ -12652,8 +12654,8 @@
         </p:nvSpPr>
         <p:spPr>
           <a:xfrm>
-            <a:off x="7799832" y="1472184"/>
-            <a:ext cx="3145536" cy="256032"/>
+            <a:off x="7708392" y="1453896"/>
+            <a:ext cx="3282696" cy="228600"/>
           </a:xfrm>
           <a:prstGeom prst="rect">
             <a:avLst/>
@@ -12669,7 +12671,7 @@
               <a:buNone/>
             </a:pPr>
             <a:r>
-              <a:rPr lang="en-US" sz="1300" b="1" dirty="0">
+              <a:rPr lang="en-US" sz="1220" b="1" dirty="0">
                 <a:solidFill>
                   <a:srgbClr val="0068B7"/>
                 </a:solidFill>
@@ -12679,7 +12681,7 @@
               </a:rPr>
               <a:t>Core concept</a:t>
             </a:r>
-            <a:endParaRPr lang="en-US" sz="1300" dirty="0"/>
+            <a:endParaRPr lang="en-US" sz="1220" dirty="0"/>
           </a:p>
         </p:txBody>
       </p:sp>
@@ -12691,8 +12693,8 @@
         </p:nvSpPr>
         <p:spPr>
           <a:xfrm>
-            <a:off x="7799832" y="1801368"/>
-            <a:ext cx="3145536" cy="640080"/>
+            <a:off x="7708392" y="1764792"/>
+            <a:ext cx="3282696" cy="749808"/>
           </a:xfrm>
           <a:prstGeom prst="rect">
             <a:avLst/>
@@ -12710,7 +12712,7 @@
               <a:buNone/>
             </a:pPr>
             <a:r>
-              <a:rPr lang="en-US" sz="1320" dirty="0">
+              <a:rPr lang="en-US" sz="1220" dirty="0">
                 <a:solidFill>
                   <a:srgbClr val="17364A"/>
                 </a:solidFill>
@@ -12720,7 +12722,7 @@
               </a:rPr>
               <a:t>CDC Evaluation Framework: https://www.cdc.gov/evaluation/</a:t>
             </a:r>
-            <a:endParaRPr lang="en-US" sz="1320" dirty="0"/>
+            <a:endParaRPr lang="en-US" sz="1220" dirty="0"/>
           </a:p>
         </p:txBody>
       </p:sp>
@@ -12732,12 +12734,12 @@
         </p:nvSpPr>
         <p:spPr>
           <a:xfrm>
-            <a:off x="7635240" y="2670048"/>
-            <a:ext cx="3474720" cy="1377086"/>
+            <a:off x="7543800" y="2724912"/>
+            <a:ext cx="3611880" cy="1527048"/>
           </a:xfrm>
           <a:prstGeom prst="roundRect">
             <a:avLst>
-              <a:gd name="adj" fmla="val 7968"/>
+              <a:gd name="adj" fmla="val 7186"/>
             </a:avLst>
           </a:prstGeom>
           <a:solidFill>
@@ -12759,8 +12761,8 @@
         </p:nvSpPr>
         <p:spPr>
           <a:xfrm>
-            <a:off x="7799832" y="2816352"/>
-            <a:ext cx="3145536" cy="256032"/>
+            <a:off x="7708392" y="2852928"/>
+            <a:ext cx="3282696" cy="228600"/>
           </a:xfrm>
           <a:prstGeom prst="rect">
             <a:avLst/>
@@ -12776,7 +12778,7 @@
               <a:buNone/>
             </a:pPr>
             <a:r>
-              <a:rPr lang="en-US" sz="1300" b="1" dirty="0">
+              <a:rPr lang="en-US" sz="1220" b="1" dirty="0">
                 <a:solidFill>
                   <a:srgbClr val="0068B7"/>
                 </a:solidFill>
@@ -12786,7 +12788,7 @@
               </a:rPr>
               <a:t>Concept checkpoints</a:t>
             </a:r>
-            <a:endParaRPr lang="en-US" sz="1300" dirty="0"/>
+            <a:endParaRPr lang="en-US" sz="1220" dirty="0"/>
           </a:p>
         </p:txBody>
       </p:sp>
@@ -12798,8 +12800,8 @@
         </p:nvSpPr>
         <p:spPr>
           <a:xfrm>
-            <a:off x="7818120" y="3182112"/>
-            <a:ext cx="3090672" cy="718718"/>
+            <a:off x="7726680" y="3182112"/>
+            <a:ext cx="3227832" cy="960120"/>
           </a:xfrm>
           <a:prstGeom prst="rect">
             <a:avLst/>
@@ -12817,7 +12819,7 @@
               <a:buNone/>
             </a:pPr>
             <a:r>
-              <a:rPr lang="en-US" sz="1220" dirty="0">
+              <a:rPr lang="en-US" sz="1140" dirty="0">
                 <a:solidFill>
                   <a:srgbClr val="17364A"/>
                 </a:solidFill>
@@ -12825,16 +12827,16 @@
                 <a:ea typeface="Aptos" pitchFamily="34" charset="-122"/>
                 <a:cs typeface="Aptos" pitchFamily="34" charset="-120"/>
               </a:rPr>
-              <a:t>NIST Artificial Intelligence Risk Management Framework:.</a:t>
-            </a:r>
-            <a:endParaRPr lang="en-US" sz="1220" dirty="0"/>
-          </a:p>
-          <a:p>
-            <a:pPr indent="0" marL="0">
-              <a:buNone/>
-            </a:pPr>
-            <a:r>
-              <a:rPr lang="en-US" sz="1220" dirty="0">
+              <a:t>NIST Artificial Intelligence Risk Management.</a:t>
+            </a:r>
+            <a:endParaRPr lang="en-US" sz="1140" dirty="0"/>
+          </a:p>
+          <a:p>
+            <a:pPr indent="0" marL="0">
+              <a:buNone/>
+            </a:pPr>
+            <a:r>
+              <a:rPr lang="en-US" sz="1140" dirty="0">
                 <a:solidFill>
                   <a:srgbClr val="17364A"/>
                 </a:solidFill>
@@ -12844,7 +12846,7 @@
               </a:rPr>
               <a:t>CDC Public Health Data Strategy:.</a:t>
             </a:r>
-            <a:endParaRPr lang="en-US" sz="1220" dirty="0"/>
+            <a:endParaRPr lang="en-US" sz="1140" dirty="0"/>
           </a:p>
         </p:txBody>
       </p:sp>
@@ -12856,12 +12858,12 @@
         </p:nvSpPr>
         <p:spPr>
           <a:xfrm>
-            <a:off x="7635240" y="4184294"/>
-            <a:ext cx="3474720" cy="1466698"/>
+            <a:off x="7543800" y="4389120"/>
+            <a:ext cx="3611880" cy="1261872"/>
           </a:xfrm>
           <a:prstGeom prst="roundRect">
             <a:avLst>
-              <a:gd name="adj" fmla="val 7481"/>
+              <a:gd name="adj" fmla="val 8696"/>
             </a:avLst>
           </a:prstGeom>
           <a:solidFill>
@@ -12883,8 +12885,8 @@
         </p:nvSpPr>
         <p:spPr>
           <a:xfrm>
-            <a:off x="7799832" y="4330598"/>
-            <a:ext cx="3145536" cy="256032"/>
+            <a:off x="7708392" y="4517136"/>
+            <a:ext cx="3282696" cy="228600"/>
           </a:xfrm>
           <a:prstGeom prst="rect">
             <a:avLst/>
@@ -12900,7 +12902,7 @@
               <a:buNone/>
             </a:pPr>
             <a:r>
-              <a:rPr lang="en-US" sz="1300" b="1" dirty="0">
+              <a:rPr lang="en-US" sz="1220" b="1" dirty="0">
                 <a:solidFill>
                   <a:srgbClr val="0068B7"/>
                 </a:solidFill>
@@ -12910,7 +12912,7 @@
               </a:rPr>
               <a:t>Apply it</a:t>
             </a:r>
-            <a:endParaRPr lang="en-US" sz="1300" dirty="0"/>
+            <a:endParaRPr lang="en-US" sz="1220" dirty="0"/>
           </a:p>
         </p:txBody>
       </p:sp>
@@ -12922,8 +12924,8 @@
         </p:nvSpPr>
         <p:spPr>
           <a:xfrm>
-            <a:off x="7799832" y="4659782"/>
-            <a:ext cx="3145536" cy="899770"/>
+            <a:off x="7708392" y="4828032"/>
+            <a:ext cx="3282696" cy="749808"/>
           </a:xfrm>
           <a:prstGeom prst="rect">
             <a:avLst/>
@@ -12941,7 +12943,7 @@
               <a:buNone/>
             </a:pPr>
             <a:r>
-              <a:rPr lang="en-US" sz="1320" dirty="0">
+              <a:rPr lang="en-US" sz="1220" dirty="0">
                 <a:solidFill>
                   <a:srgbClr val="17364A"/>
                 </a:solidFill>
@@ -12949,9 +12951,9 @@
                 <a:ea typeface="Aptos" pitchFamily="34" charset="-122"/>
                 <a:cs typeface="Aptos" pitchFamily="34" charset="-120"/>
               </a:rPr>
-              <a:t>Connect the concept to public health purpose, responsible use, required safeguards, documentation, and the next action a department should take.</a:t>
-            </a:r>
-            <a:endParaRPr lang="en-US" sz="1320" dirty="0"/>
+              <a:t>Connect the concept to public health purpose, responsible use, required.</a:t>
+            </a:r>
+            <a:endParaRPr lang="en-US" sz="1220" dirty="0"/>
           </a:p>
         </p:txBody>
       </p:sp>
@@ -13269,7 +13271,7 @@
                 <a:ea typeface="Aptos" pitchFamily="34" charset="-122"/>
                 <a:cs typeface="Aptos" pitchFamily="34" charset="-120"/>
               </a:rPr>
-              <a:t>• Play 13: Monitor and Evaluate AI Systems - This lesson informs Play 13 by helping learners.</a:t>
+              <a:t>• Play 13: Monitor and Evaluate AI Systems - This lesson informs Play 13 by.</a:t>
             </a:r>
             <a:endParaRPr lang="en-US" sz="1900" dirty="0"/>
           </a:p>
@@ -13286,7 +13288,7 @@
                 <a:ea typeface="Aptos" pitchFamily="34" charset="-122"/>
                 <a:cs typeface="Aptos" pitchFamily="34" charset="-120"/>
               </a:rPr>
-              <a:t>• Play 11: Build and Deploy AI Solutions - This lesson informs Play 11 by helping learners.</a:t>
+              <a:t>• Play 11: Build and Deploy AI Solutions - This lesson informs Play 11 by.</a:t>
             </a:r>
             <a:endParaRPr lang="en-US" sz="1900" dirty="0"/>
           </a:p>
@@ -13303,7 +13305,7 @@
                 <a:ea typeface="Aptos" pitchFamily="34" charset="-122"/>
                 <a:cs typeface="Aptos" pitchFamily="34" charset="-120"/>
               </a:rPr>
-              <a:t>• Play 1: Vision &amp; Guardrails - This lesson informs Play 1 by helping learners connect the.</a:t>
+              <a:t>• Play 1: Vision &amp; Guardrails - This lesson informs Play 1 by helping learners.</a:t>
             </a:r>
             <a:endParaRPr lang="en-US" sz="1900" dirty="0"/>
           </a:p>
@@ -13320,7 +13322,7 @@
                 <a:ea typeface="Aptos" pitchFamily="34" charset="-122"/>
                 <a:cs typeface="Aptos" pitchFamily="34" charset="-120"/>
               </a:rPr>
-              <a:t>• Play 7: Prioritize Use Cases - This lesson informs Play 7 by helping learners connect the.</a:t>
+              <a:t>• Play 7: Prioritize Use Cases - This lesson informs Play 7 by helping.</a:t>
             </a:r>
             <a:endParaRPr lang="en-US" sz="1900" dirty="0"/>
           </a:p>
@@ -13361,8 +13363,8 @@
         </p:nvSpPr>
         <p:spPr>
           <a:xfrm>
-            <a:off x="8211312" y="1563624"/>
-            <a:ext cx="2734056" cy="256032"/>
+            <a:off x="8211312" y="1545336"/>
+            <a:ext cx="2734056" cy="228600"/>
           </a:xfrm>
           <a:prstGeom prst="rect">
             <a:avLst/>
@@ -13378,7 +13380,7 @@
               <a:buNone/>
             </a:pPr>
             <a:r>
-              <a:rPr lang="en-US" sz="1300" b="1" dirty="0">
+              <a:rPr lang="en-US" sz="1220" b="1" dirty="0">
                 <a:solidFill>
                   <a:srgbClr val="0068B7"/>
                 </a:solidFill>
@@ -13388,7 +13390,7 @@
               </a:rPr>
               <a:t>Apply the lesson</a:t>
             </a:r>
-            <a:endParaRPr lang="en-US" sz="1300" dirty="0"/>
+            <a:endParaRPr lang="en-US" sz="1220" dirty="0"/>
           </a:p>
         </p:txBody>
       </p:sp>
@@ -13400,8 +13402,8 @@
         </p:nvSpPr>
         <p:spPr>
           <a:xfrm>
-            <a:off x="8211312" y="1892808"/>
-            <a:ext cx="2734056" cy="1536192"/>
+            <a:off x="8211312" y="1856232"/>
+            <a:ext cx="2734056" cy="1591056"/>
           </a:xfrm>
           <a:prstGeom prst="rect">
             <a:avLst/>
@@ -13419,7 +13421,7 @@
               <a:buNone/>
             </a:pPr>
             <a:r>
-              <a:rPr lang="en-US" sz="1320" dirty="0">
+              <a:rPr lang="en-US" sz="1220" dirty="0">
                 <a:solidFill>
                   <a:srgbClr val="17364A"/>
                 </a:solidFill>
@@ -13427,9 +13429,9 @@
                 <a:ea typeface="Aptos" pitchFamily="34" charset="-122"/>
                 <a:cs typeface="Aptos" pitchFamily="34" charset="-120"/>
               </a:rPr>
-              <a:t>Use the related plays to identify decisions, participants, timing, approvals, and documentation needed for responsible implementation.</a:t>
-            </a:r>
-            <a:endParaRPr lang="en-US" sz="1320" dirty="0"/>
+              <a:t>Use the related plays to identify decisions, participants, timing, approvals,.</a:t>
+            </a:r>
+            <a:endParaRPr lang="en-US" sz="1220" dirty="0"/>
           </a:p>
         </p:txBody>
       </p:sp>
@@ -13468,8 +13470,8 @@
         </p:nvSpPr>
         <p:spPr>
           <a:xfrm>
-            <a:off x="8211312" y="3941064"/>
-            <a:ext cx="2734056" cy="256032"/>
+            <a:off x="8211312" y="3922776"/>
+            <a:ext cx="2734056" cy="228600"/>
           </a:xfrm>
           <a:prstGeom prst="rect">
             <a:avLst/>
@@ -13485,7 +13487,7 @@
               <a:buNone/>
             </a:pPr>
             <a:r>
-              <a:rPr lang="en-US" sz="1300" b="1" dirty="0">
+              <a:rPr lang="en-US" sz="1220" b="1" dirty="0">
                 <a:solidFill>
                   <a:srgbClr val="0068B7"/>
                 </a:solidFill>
@@ -13495,7 +13497,7 @@
               </a:rPr>
               <a:t>Use the play links to</a:t>
             </a:r>
-            <a:endParaRPr lang="en-US" sz="1300" dirty="0"/>
+            <a:endParaRPr lang="en-US" sz="1220" dirty="0"/>
           </a:p>
         </p:txBody>
       </p:sp>
@@ -13507,8 +13509,8 @@
         </p:nvSpPr>
         <p:spPr>
           <a:xfrm>
-            <a:off x="8229600" y="4306824"/>
-            <a:ext cx="2679192" cy="941832"/>
+            <a:off x="8229600" y="4251960"/>
+            <a:ext cx="2679192" cy="1033272"/>
           </a:xfrm>
           <a:prstGeom prst="rect">
             <a:avLst/>
@@ -13526,7 +13528,7 @@
               <a:buNone/>
             </a:pPr>
             <a:r>
-              <a:rPr lang="en-US" sz="1220" dirty="0">
+              <a:rPr lang="en-US" sz="1140" dirty="0">
                 <a:solidFill>
                   <a:srgbClr val="17364A"/>
                 </a:solidFill>
@@ -13536,14 +13538,14 @@
               </a:rPr>
               <a:t>Locate the decision point in the playbook sequence.</a:t>
             </a:r>
-            <a:endParaRPr lang="en-US" sz="1220" dirty="0"/>
-          </a:p>
-          <a:p>
-            <a:pPr indent="0" marL="0">
-              <a:buNone/>
-            </a:pPr>
-            <a:r>
-              <a:rPr lang="en-US" sz="1220" dirty="0">
+            <a:endParaRPr lang="en-US" sz="1140" dirty="0"/>
+          </a:p>
+          <a:p>
+            <a:pPr indent="0" marL="0">
+              <a:buNone/>
+            </a:pPr>
+            <a:r>
+              <a:rPr lang="en-US" sz="1140" dirty="0">
                 <a:solidFill>
                   <a:srgbClr val="17364A"/>
                 </a:solidFill>
@@ -13553,14 +13555,14 @@
               </a:rPr>
               <a:t>Identify who should participate in the work.</a:t>
             </a:r>
-            <a:endParaRPr lang="en-US" sz="1220" dirty="0"/>
-          </a:p>
-          <a:p>
-            <a:pPr indent="0" marL="0">
-              <a:buNone/>
-            </a:pPr>
-            <a:r>
-              <a:rPr lang="en-US" sz="1220" dirty="0">
+            <a:endParaRPr lang="en-US" sz="1140" dirty="0"/>
+          </a:p>
+          <a:p>
+            <a:pPr indent="0" marL="0">
+              <a:buNone/>
+            </a:pPr>
+            <a:r>
+              <a:rPr lang="en-US" sz="1140" dirty="0">
                 <a:solidFill>
                   <a:srgbClr val="17364A"/>
                 </a:solidFill>
@@ -13568,9 +13570,9 @@
                 <a:ea typeface="Aptos" pitchFamily="34" charset="-122"/>
                 <a:cs typeface="Aptos" pitchFamily="34" charset="-120"/>
               </a:rPr>
-              <a:t>Document the review, approval, or implementation step.</a:t>
-            </a:r>
-            <a:endParaRPr lang="en-US" sz="1220" dirty="0"/>
+              <a:t>Document the review, approval, or implementation.</a:t>
+            </a:r>
+            <a:endParaRPr lang="en-US" sz="1140" dirty="0"/>
           </a:p>
         </p:txBody>
       </p:sp>
@@ -13888,7 +13890,7 @@
                 <a:ea typeface="Aptos" pitchFamily="34" charset="-122"/>
                 <a:cs typeface="Aptos" pitchFamily="34" charset="-120"/>
               </a:rPr>
-              <a:t>• Tool 44: Performance Monitoring Dashboard (Dashboard) - Use this tool to complete or.</a:t>
+              <a:t>• Tool 44: Performance Monitoring Dashboard (Dashboard) - Use this tool to.</a:t>
             </a:r>
             <a:endParaRPr lang="en-US" sz="1850" dirty="0"/>
           </a:p>
@@ -13905,7 +13907,7 @@
                 <a:ea typeface="Aptos" pitchFamily="34" charset="-122"/>
                 <a:cs typeface="Aptos" pitchFamily="34" charset="-120"/>
               </a:rPr>
-              <a:t>• Tool 45: Continuous Improvement Log (Log) - Use this tool to complete or strengthen the.</a:t>
+              <a:t>• Tool 45: Continuous Improvement Log (Log) - Use this tool to complete or.</a:t>
             </a:r>
             <a:endParaRPr lang="en-US" sz="1850" dirty="0"/>
           </a:p>
@@ -13922,7 +13924,7 @@
                 <a:ea typeface="Aptos" pitchFamily="34" charset="-122"/>
                 <a:cs typeface="Aptos" pitchFamily="34" charset="-120"/>
               </a:rPr>
-              <a:t>• Tool 48: AI Evaluation &amp; Outcomes Reporting (Template) - Use this tool to complete or.</a:t>
+              <a:t>• Tool 48: AI Evaluation &amp; Outcomes Reporting (Template) - Use this tool to.</a:t>
             </a:r>
             <a:endParaRPr lang="en-US" sz="1850" dirty="0"/>
           </a:p>
@@ -13939,7 +13941,7 @@
                 <a:ea typeface="Aptos" pitchFamily="34" charset="-122"/>
                 <a:cs typeface="Aptos" pitchFamily="34" charset="-120"/>
               </a:rPr>
-              <a:t>• Tool 1: AI Vision &amp; Principles Workshop (Workshop) - Use AI Vision &amp; Principles Workshop to.</a:t>
+              <a:t>• Tool 1: AI Vision &amp; Principles Workshop (Workshop) - Use AI Vision &amp;.</a:t>
             </a:r>
             <a:endParaRPr lang="en-US" sz="1850" dirty="0"/>
           </a:p>
@@ -13980,8 +13982,8 @@
         </p:nvSpPr>
         <p:spPr>
           <a:xfrm>
-            <a:off x="8211312" y="1563624"/>
-            <a:ext cx="2734056" cy="256032"/>
+            <a:off x="8211312" y="1545336"/>
+            <a:ext cx="2734056" cy="228600"/>
           </a:xfrm>
           <a:prstGeom prst="rect">
             <a:avLst/>
@@ -13997,7 +13999,7 @@
               <a:buNone/>
             </a:pPr>
             <a:r>
-              <a:rPr lang="en-US" sz="1300" b="1" dirty="0">
+              <a:rPr lang="en-US" sz="1220" b="1" dirty="0">
                 <a:solidFill>
                   <a:srgbClr val="0068B7"/>
                 </a:solidFill>
@@ -14007,7 +14009,7 @@
               </a:rPr>
               <a:t>Use the tools</a:t>
             </a:r>
-            <a:endParaRPr lang="en-US" sz="1300" dirty="0"/>
+            <a:endParaRPr lang="en-US" sz="1220" dirty="0"/>
           </a:p>
         </p:txBody>
       </p:sp>
@@ -14019,8 +14021,8 @@
         </p:nvSpPr>
         <p:spPr>
           <a:xfrm>
-            <a:off x="8211312" y="1892808"/>
-            <a:ext cx="2734056" cy="1536192"/>
+            <a:off x="8211312" y="1856232"/>
+            <a:ext cx="2734056" cy="1591056"/>
           </a:xfrm>
           <a:prstGeom prst="rect">
             <a:avLst/>
@@ -14038,7 +14040,7 @@
               <a:buNone/>
             </a:pPr>
             <a:r>
-              <a:rPr lang="en-US" sz="1320" dirty="0">
+              <a:rPr lang="en-US" sz="1220" dirty="0">
                 <a:solidFill>
                   <a:srgbClr val="17364A"/>
                 </a:solidFill>
@@ -14046,9 +14048,9 @@
                 <a:ea typeface="Aptos" pitchFamily="34" charset="-122"/>
                 <a:cs typeface="Aptos" pitchFamily="34" charset="-120"/>
               </a:rPr>
-              <a:t>Use linked tools when your department needs a structured worksheet, template, checklist, review process, or documentation artifact.</a:t>
-            </a:r>
-            <a:endParaRPr lang="en-US" sz="1320" dirty="0"/>
+              <a:t>Use linked tools when your department needs a structured worksheet, template,.</a:t>
+            </a:r>
+            <a:endParaRPr lang="en-US" sz="1220" dirty="0"/>
           </a:p>
         </p:txBody>
       </p:sp>
@@ -14087,8 +14089,8 @@
         </p:nvSpPr>
         <p:spPr>
           <a:xfrm>
-            <a:off x="8211312" y="3941064"/>
-            <a:ext cx="2734056" cy="256032"/>
+            <a:off x="8211312" y="3922776"/>
+            <a:ext cx="2734056" cy="228600"/>
           </a:xfrm>
           <a:prstGeom prst="rect">
             <a:avLst/>
@@ -14104,7 +14106,7 @@
               <a:buNone/>
             </a:pPr>
             <a:r>
-              <a:rPr lang="en-US" sz="1300" b="1" dirty="0">
+              <a:rPr lang="en-US" sz="1220" b="1" dirty="0">
                 <a:solidFill>
                   <a:srgbClr val="0068B7"/>
                 </a:solidFill>
@@ -14114,7 +14116,7 @@
               </a:rPr>
               <a:t>Tool selection cues</a:t>
             </a:r>
-            <a:endParaRPr lang="en-US" sz="1300" dirty="0"/>
+            <a:endParaRPr lang="en-US" sz="1220" dirty="0"/>
           </a:p>
         </p:txBody>
       </p:sp>
@@ -14126,8 +14128,8 @@
         </p:nvSpPr>
         <p:spPr>
           <a:xfrm>
-            <a:off x="8229600" y="4306824"/>
-            <a:ext cx="2679192" cy="941832"/>
+            <a:off x="8229600" y="4251960"/>
+            <a:ext cx="2679192" cy="1033272"/>
           </a:xfrm>
           <a:prstGeom prst="rect">
             <a:avLst/>
@@ -14145,7 +14147,7 @@
               <a:buNone/>
             </a:pPr>
             <a:r>
-              <a:rPr lang="en-US" sz="1220" dirty="0">
+              <a:rPr lang="en-US" sz="1140" dirty="0">
                 <a:solidFill>
                   <a:srgbClr val="17364A"/>
                 </a:solidFill>
@@ -14155,14 +14157,14 @@
               </a:rPr>
               <a:t>Use a tool when no comparable local process exists.</a:t>
             </a:r>
-            <a:endParaRPr lang="en-US" sz="1220" dirty="0"/>
-          </a:p>
-          <a:p>
-            <a:pPr indent="0" marL="0">
-              <a:buNone/>
-            </a:pPr>
-            <a:r>
-              <a:rPr lang="en-US" sz="1220" dirty="0">
+            <a:endParaRPr lang="en-US" sz="1140" dirty="0"/>
+          </a:p>
+          <a:p>
+            <a:pPr indent="0" marL="0">
+              <a:buNone/>
+            </a:pPr>
+            <a:r>
+              <a:rPr lang="en-US" sz="1140" dirty="0">
                 <a:solidFill>
                   <a:srgbClr val="17364A"/>
                 </a:solidFill>
@@ -14170,16 +14172,16 @@
                 <a:ea typeface="Aptos" pitchFamily="34" charset="-122"/>
                 <a:cs typeface="Aptos" pitchFamily="34" charset="-120"/>
               </a:rPr>
-              <a:t>Adapt existing department templates when they already fit the.</a:t>
-            </a:r>
-            <a:endParaRPr lang="en-US" sz="1220" dirty="0"/>
-          </a:p>
-          <a:p>
-            <a:pPr indent="0" marL="0">
-              <a:buNone/>
-            </a:pPr>
-            <a:r>
-              <a:rPr lang="en-US" sz="1220" dirty="0">
+              <a:t>Adapt existing department templates when they.</a:t>
+            </a:r>
+            <a:endParaRPr lang="en-US" sz="1140" dirty="0"/>
+          </a:p>
+          <a:p>
+            <a:pPr indent="0" marL="0">
+              <a:buNone/>
+            </a:pPr>
+            <a:r>
+              <a:rPr lang="en-US" sz="1140" dirty="0">
                 <a:solidFill>
                   <a:srgbClr val="17364A"/>
                 </a:solidFill>
@@ -14187,9 +14189,9 @@
                 <a:ea typeface="Aptos" pitchFamily="34" charset="-122"/>
                 <a:cs typeface="Aptos" pitchFamily="34" charset="-120"/>
               </a:rPr>
-              <a:t>Save the completed artifact as evidence of the decision.</a:t>
-            </a:r>
-            <a:endParaRPr lang="en-US" sz="1220" dirty="0"/>
+              <a:t>Save the completed artifact as evidence of the.</a:t>
+            </a:r>
+            <a:endParaRPr lang="en-US" sz="1140" dirty="0"/>
           </a:p>
         </p:txBody>
       </p:sp>
@@ -14480,8 +14482,8 @@
         </p:nvSpPr>
         <p:spPr>
           <a:xfrm>
-            <a:off x="868680" y="1508760"/>
-            <a:ext cx="6309360" cy="4160520"/>
+            <a:off x="822960" y="1463040"/>
+            <a:ext cx="6565392" cy="4343400"/>
           </a:xfrm>
           <a:prstGeom prst="rect">
             <a:avLst/>
@@ -14499,7 +14501,7 @@
               <a:buNone/>
             </a:pPr>
             <a:r>
-              <a:rPr lang="en-US" sz="2100" dirty="0">
+              <a:rPr lang="en-US" sz="1920" dirty="0">
                 <a:solidFill>
                   <a:srgbClr val="003A63"/>
                 </a:solidFill>
@@ -14507,16 +14509,16 @@
                 <a:ea typeface="Aptos" pitchFamily="34" charset="-122"/>
                 <a:cs typeface="Aptos" pitchFamily="34" charset="-120"/>
               </a:rPr>
-              <a:t>• Explain the difference between supervised, unsupervised, and semi-supervised learning in.</a:t>
-            </a:r>
-            <a:endParaRPr lang="en-US" sz="2100" dirty="0"/>
-          </a:p>
-          <a:p>
-            <a:pPr indent="0" marL="0">
-              <a:buNone/>
-            </a:pPr>
-            <a:r>
-              <a:rPr lang="en-US" sz="2100" dirty="0">
+              <a:t>• Explain the difference between supervised, unsupervised, and semi-supervised.</a:t>
+            </a:r>
+            <a:endParaRPr lang="en-US" sz="1920" dirty="0"/>
+          </a:p>
+          <a:p>
+            <a:pPr indent="0" marL="0">
+              <a:buNone/>
+            </a:pPr>
+            <a:r>
+              <a:rPr lang="en-US" sz="1920" dirty="0">
                 <a:solidFill>
                   <a:srgbClr val="003A63"/>
                 </a:solidFill>
@@ -14526,14 +14528,14 @@
               </a:rPr>
               <a:t>• Describe features, labels, training data, validation data, and test data.</a:t>
             </a:r>
-            <a:endParaRPr lang="en-US" sz="2100" dirty="0"/>
-          </a:p>
-          <a:p>
-            <a:pPr indent="0" marL="0">
-              <a:buNone/>
-            </a:pPr>
-            <a:r>
-              <a:rPr lang="en-US" sz="2100" dirty="0">
+            <a:endParaRPr lang="en-US" sz="1920" dirty="0"/>
+          </a:p>
+          <a:p>
+            <a:pPr indent="0" marL="0">
+              <a:buNone/>
+            </a:pPr>
+            <a:r>
+              <a:rPr lang="en-US" sz="1920" dirty="0">
                 <a:solidFill>
                   <a:srgbClr val="003A63"/>
                 </a:solidFill>
@@ -14541,9 +14543,9 @@
                 <a:ea typeface="Aptos" pitchFamily="34" charset="-122"/>
                 <a:cs typeface="Aptos" pitchFamily="34" charset="-120"/>
               </a:rPr>
-              <a:t>• Identify when a machine learning approach may be appropriate for a public health workflow and.</a:t>
-            </a:r>
-            <a:endParaRPr lang="en-US" sz="2100" dirty="0"/>
+              <a:t>• Identify when a machine learning approach may be appropriate for a public.</a:t>
+            </a:r>
+            <a:endParaRPr lang="en-US" sz="1920" dirty="0"/>
           </a:p>
         </p:txBody>
       </p:sp>
@@ -14555,12 +14557,12 @@
         </p:nvSpPr>
         <p:spPr>
           <a:xfrm>
-            <a:off x="7635240" y="1325880"/>
-            <a:ext cx="3474720" cy="1255471"/>
+            <a:off x="7543800" y="1325880"/>
+            <a:ext cx="3611880" cy="1261872"/>
           </a:xfrm>
           <a:prstGeom prst="roundRect">
             <a:avLst>
-              <a:gd name="adj" fmla="val 8740"/>
+              <a:gd name="adj" fmla="val 8696"/>
             </a:avLst>
           </a:prstGeom>
           <a:solidFill>
@@ -14582,8 +14584,8 @@
         </p:nvSpPr>
         <p:spPr>
           <a:xfrm>
-            <a:off x="7799832" y="1472184"/>
-            <a:ext cx="3145536" cy="256032"/>
+            <a:off x="7708392" y="1453896"/>
+            <a:ext cx="3282696" cy="228600"/>
           </a:xfrm>
           <a:prstGeom prst="rect">
             <a:avLst/>
@@ -14599,7 +14601,7 @@
               <a:buNone/>
             </a:pPr>
             <a:r>
-              <a:rPr lang="en-US" sz="1300" b="1" dirty="0">
+              <a:rPr lang="en-US" sz="1220" b="1" dirty="0">
                 <a:solidFill>
                   <a:srgbClr val="0068B7"/>
                 </a:solidFill>
@@ -14609,7 +14611,7 @@
               </a:rPr>
               <a:t>Practice focus</a:t>
             </a:r>
-            <a:endParaRPr lang="en-US" sz="1300" dirty="0"/>
+            <a:endParaRPr lang="en-US" sz="1220" dirty="0"/>
           </a:p>
         </p:txBody>
       </p:sp>
@@ -14621,8 +14623,8 @@
         </p:nvSpPr>
         <p:spPr>
           <a:xfrm>
-            <a:off x="7799832" y="1801368"/>
-            <a:ext cx="3145536" cy="688543"/>
+            <a:off x="7708392" y="1764792"/>
+            <a:ext cx="3282696" cy="749808"/>
           </a:xfrm>
           <a:prstGeom prst="rect">
             <a:avLst/>
@@ -14640,7 +14642,7 @@
               <a:buNone/>
             </a:pPr>
             <a:r>
-              <a:rPr lang="en-US" sz="1320" dirty="0">
+              <a:rPr lang="en-US" sz="1220" dirty="0">
                 <a:solidFill>
                   <a:srgbClr val="17364A"/>
                 </a:solidFill>
@@ -14648,9 +14650,9 @@
                 <a:ea typeface="Aptos" pitchFamily="34" charset="-122"/>
                 <a:cs typeface="Aptos" pitchFamily="34" charset="-120"/>
               </a:rPr>
-              <a:t>Explain the difference between supervised, unsupervised, and semi-supervised learning in public health.</a:t>
-            </a:r>
-            <a:endParaRPr lang="en-US" sz="1320" dirty="0"/>
+              <a:t>Explain the difference between supervised, unsupervised, and semi-supervised.</a:t>
+            </a:r>
+            <a:endParaRPr lang="en-US" sz="1220" dirty="0"/>
           </a:p>
         </p:txBody>
       </p:sp>
@@ -14662,12 +14664,12 @@
         </p:nvSpPr>
         <p:spPr>
           <a:xfrm>
-            <a:off x="7635240" y="2718511"/>
-            <a:ext cx="3474720" cy="1328623"/>
+            <a:off x="7543800" y="2724912"/>
+            <a:ext cx="3611880" cy="1527048"/>
           </a:xfrm>
           <a:prstGeom prst="roundRect">
             <a:avLst>
-              <a:gd name="adj" fmla="val 8259"/>
+              <a:gd name="adj" fmla="val 7186"/>
             </a:avLst>
           </a:prstGeom>
           <a:solidFill>
@@ -14689,8 +14691,8 @@
         </p:nvSpPr>
         <p:spPr>
           <a:xfrm>
-            <a:off x="7799832" y="2864815"/>
-            <a:ext cx="3145536" cy="256032"/>
+            <a:off x="7708392" y="2852928"/>
+            <a:ext cx="3282696" cy="228600"/>
           </a:xfrm>
           <a:prstGeom prst="rect">
             <a:avLst/>
@@ -14706,7 +14708,7 @@
               <a:buNone/>
             </a:pPr>
             <a:r>
-              <a:rPr lang="en-US" sz="1300" b="1" dirty="0">
+              <a:rPr lang="en-US" sz="1220" b="1" dirty="0">
                 <a:solidFill>
                   <a:srgbClr val="0068B7"/>
                 </a:solidFill>
@@ -14716,7 +14718,7 @@
               </a:rPr>
               <a:t>Concept checkpoints</a:t>
             </a:r>
-            <a:endParaRPr lang="en-US" sz="1300" dirty="0"/>
+            <a:endParaRPr lang="en-US" sz="1220" dirty="0"/>
           </a:p>
         </p:txBody>
       </p:sp>
@@ -14728,8 +14730,8 @@
         </p:nvSpPr>
         <p:spPr>
           <a:xfrm>
-            <a:off x="7818120" y="3230575"/>
-            <a:ext cx="3090672" cy="670255"/>
+            <a:off x="7726680" y="3182112"/>
+            <a:ext cx="3227832" cy="960120"/>
           </a:xfrm>
           <a:prstGeom prst="rect">
             <a:avLst/>
@@ -14747,7 +14749,7 @@
               <a:buNone/>
             </a:pPr>
             <a:r>
-              <a:rPr lang="en-US" sz="1220" dirty="0">
+              <a:rPr lang="en-US" sz="1140" dirty="0">
                 <a:solidFill>
                   <a:srgbClr val="17364A"/>
                 </a:solidFill>
@@ -14755,16 +14757,16 @@
                 <a:ea typeface="Aptos" pitchFamily="34" charset="-122"/>
                 <a:cs typeface="Aptos" pitchFamily="34" charset="-120"/>
               </a:rPr>
-              <a:t>Explain the difference between supervised, unsupervised, and.</a:t>
-            </a:r>
-            <a:endParaRPr lang="en-US" sz="1220" dirty="0"/>
-          </a:p>
-          <a:p>
-            <a:pPr indent="0" marL="0">
-              <a:buNone/>
-            </a:pPr>
-            <a:r>
-              <a:rPr lang="en-US" sz="1220" dirty="0">
+              <a:t>Explain the difference between supervised,.</a:t>
+            </a:r>
+            <a:endParaRPr lang="en-US" sz="1140" dirty="0"/>
+          </a:p>
+          <a:p>
+            <a:pPr indent="0" marL="0">
+              <a:buNone/>
+            </a:pPr>
+            <a:r>
+              <a:rPr lang="en-US" sz="1140" dirty="0">
                 <a:solidFill>
                   <a:srgbClr val="17364A"/>
                 </a:solidFill>
@@ -14772,16 +14774,16 @@
                 <a:ea typeface="Aptos" pitchFamily="34" charset="-122"/>
                 <a:cs typeface="Aptos" pitchFamily="34" charset="-120"/>
               </a:rPr>
-              <a:t>Identify when a machine learning approach may be appropriate for a.</a:t>
-            </a:r>
-            <a:endParaRPr lang="en-US" sz="1220" dirty="0"/>
-          </a:p>
-          <a:p>
-            <a:pPr indent="0" marL="0">
-              <a:buNone/>
-            </a:pPr>
-            <a:r>
-              <a:rPr lang="en-US" sz="1220" dirty="0">
+              <a:t>Identify when a machine learning approach may be.</a:t>
+            </a:r>
+            <a:endParaRPr lang="en-US" sz="1140" dirty="0"/>
+          </a:p>
+          <a:p>
+            <a:pPr indent="0" marL="0">
+              <a:buNone/>
+            </a:pPr>
+            <a:r>
+              <a:rPr lang="en-US" sz="1140" dirty="0">
                 <a:solidFill>
                   <a:srgbClr val="17364A"/>
                 </a:solidFill>
@@ -14789,9 +14791,9 @@
                 <a:ea typeface="Aptos" pitchFamily="34" charset="-122"/>
                 <a:cs typeface="Aptos" pitchFamily="34" charset="-120"/>
               </a:rPr>
-              <a:t>Recognize common machine learning risks, including overfitting,.</a:t>
-            </a:r>
-            <a:endParaRPr lang="en-US" sz="1220" dirty="0"/>
+              <a:t>Recognize common machine learning risks, including.</a:t>
+            </a:r>
+            <a:endParaRPr lang="en-US" sz="1140" dirty="0"/>
           </a:p>
         </p:txBody>
       </p:sp>
@@ -14803,12 +14805,12 @@
         </p:nvSpPr>
         <p:spPr>
           <a:xfrm>
-            <a:off x="7635240" y="4184294"/>
-            <a:ext cx="3474720" cy="1466698"/>
+            <a:off x="7543800" y="4389120"/>
+            <a:ext cx="3611880" cy="1261872"/>
           </a:xfrm>
           <a:prstGeom prst="roundRect">
             <a:avLst>
-              <a:gd name="adj" fmla="val 7481"/>
+              <a:gd name="adj" fmla="val 8696"/>
             </a:avLst>
           </a:prstGeom>
           <a:solidFill>
@@ -14830,8 +14832,8 @@
         </p:nvSpPr>
         <p:spPr>
           <a:xfrm>
-            <a:off x="7799832" y="4330598"/>
-            <a:ext cx="3145536" cy="256032"/>
+            <a:off x="7708392" y="4517136"/>
+            <a:ext cx="3282696" cy="228600"/>
           </a:xfrm>
           <a:prstGeom prst="rect">
             <a:avLst/>
@@ -14847,7 +14849,7 @@
               <a:buNone/>
             </a:pPr>
             <a:r>
-              <a:rPr lang="en-US" sz="1300" b="1" dirty="0">
+              <a:rPr lang="en-US" sz="1220" b="1" dirty="0">
                 <a:solidFill>
                   <a:srgbClr val="0068B7"/>
                 </a:solidFill>
@@ -14857,7 +14859,7 @@
               </a:rPr>
               <a:t>What to produce</a:t>
             </a:r>
-            <a:endParaRPr lang="en-US" sz="1300" dirty="0"/>
+            <a:endParaRPr lang="en-US" sz="1220" dirty="0"/>
           </a:p>
         </p:txBody>
       </p:sp>
@@ -14869,8 +14871,8 @@
         </p:nvSpPr>
         <p:spPr>
           <a:xfrm>
-            <a:off x="7799832" y="4659782"/>
-            <a:ext cx="3145536" cy="899770"/>
+            <a:off x="7708392" y="4828032"/>
+            <a:ext cx="3282696" cy="749808"/>
           </a:xfrm>
           <a:prstGeom prst="rect">
             <a:avLst/>
@@ -14888,7 +14890,7 @@
               <a:buNone/>
             </a:pPr>
             <a:r>
-              <a:rPr lang="en-US" sz="1320" dirty="0">
+              <a:rPr lang="en-US" sz="1220" dirty="0">
                 <a:solidFill>
                   <a:srgbClr val="17364A"/>
                 </a:solidFill>
@@ -14896,9 +14898,9 @@
                 <a:ea typeface="Aptos" pitchFamily="34" charset="-122"/>
                 <a:cs typeface="Aptos" pitchFamily="34" charset="-120"/>
               </a:rPr>
-              <a:t>Use the assignment to test whether you can explain the concept, apply it to a realistic public health situation, and identify what would need review before the work moves forward.</a:t>
-            </a:r>
-            <a:endParaRPr lang="en-US" sz="1320" dirty="0"/>
+              <a:t>Use the assignment to test whether you can explain the concept, apply it to a.</a:t>
+            </a:r>
+            <a:endParaRPr lang="en-US" sz="1220" dirty="0"/>
           </a:p>
         </p:txBody>
       </p:sp>
@@ -15189,8 +15191,8 @@
         </p:nvSpPr>
         <p:spPr>
           <a:xfrm>
-            <a:off x="868680" y="1508760"/>
-            <a:ext cx="6309360" cy="4160520"/>
+            <a:off x="822960" y="1463040"/>
+            <a:ext cx="6565392" cy="4343400"/>
           </a:xfrm>
           <a:prstGeom prst="rect">
             <a:avLst/>
@@ -15208,7 +15210,7 @@
               <a:buNone/>
             </a:pPr>
             <a:r>
-              <a:rPr lang="en-US" sz="2100" dirty="0">
+              <a:rPr lang="en-US" sz="1920" dirty="0">
                 <a:solidFill>
                   <a:srgbClr val="003A63"/>
                 </a:solidFill>
@@ -15216,9 +15218,9 @@
                 <a:ea typeface="Aptos" pitchFamily="34" charset="-122"/>
                 <a:cs typeface="Aptos" pitchFamily="34" charset="-120"/>
               </a:rPr>
-              <a:t>• Produce a machine learning use case review worksheet for a real or realistic public health.</a:t>
-            </a:r>
-            <a:endParaRPr lang="en-US" sz="2100" dirty="0"/>
+              <a:t>• Produce a machine learning use case review worksheet for a real or realistic.</a:t>
+            </a:r>
+            <a:endParaRPr lang="en-US" sz="1920" dirty="0"/>
           </a:p>
         </p:txBody>
       </p:sp>
@@ -15230,12 +15232,12 @@
         </p:nvSpPr>
         <p:spPr>
           <a:xfrm>
-            <a:off x="7635240" y="1325880"/>
-            <a:ext cx="3474720" cy="1255471"/>
+            <a:off x="7543800" y="1325880"/>
+            <a:ext cx="3611880" cy="1261872"/>
           </a:xfrm>
           <a:prstGeom prst="roundRect">
             <a:avLst>
-              <a:gd name="adj" fmla="val 8740"/>
+              <a:gd name="adj" fmla="val 8696"/>
             </a:avLst>
           </a:prstGeom>
           <a:solidFill>
@@ -15257,8 +15259,8 @@
         </p:nvSpPr>
         <p:spPr>
           <a:xfrm>
-            <a:off x="7799832" y="1472184"/>
-            <a:ext cx="3145536" cy="256032"/>
+            <a:off x="7708392" y="1453896"/>
+            <a:ext cx="3282696" cy="228600"/>
           </a:xfrm>
           <a:prstGeom prst="rect">
             <a:avLst/>
@@ -15274,7 +15276,7 @@
               <a:buNone/>
             </a:pPr>
             <a:r>
-              <a:rPr lang="en-US" sz="1300" b="1" dirty="0">
+              <a:rPr lang="en-US" sz="1220" b="1" dirty="0">
                 <a:solidFill>
                   <a:srgbClr val="0068B7"/>
                 </a:solidFill>
@@ -15284,7 +15286,7 @@
               </a:rPr>
               <a:t>Practice focus</a:t>
             </a:r>
-            <a:endParaRPr lang="en-US" sz="1300" dirty="0"/>
+            <a:endParaRPr lang="en-US" sz="1220" dirty="0"/>
           </a:p>
         </p:txBody>
       </p:sp>
@@ -15296,8 +15298,8 @@
         </p:nvSpPr>
         <p:spPr>
           <a:xfrm>
-            <a:off x="7799832" y="1801368"/>
-            <a:ext cx="3145536" cy="688543"/>
+            <a:off x="7708392" y="1764792"/>
+            <a:ext cx="3282696" cy="749808"/>
           </a:xfrm>
           <a:prstGeom prst="rect">
             <a:avLst/>
@@ -15315,7 +15317,7 @@
               <a:buNone/>
             </a:pPr>
             <a:r>
-              <a:rPr lang="en-US" sz="1320" dirty="0">
+              <a:rPr lang="en-US" sz="1220" dirty="0">
                 <a:solidFill>
                   <a:srgbClr val="17364A"/>
                 </a:solidFill>
@@ -15323,9 +15325,9 @@
                 <a:ea typeface="Aptos" pitchFamily="34" charset="-122"/>
                 <a:cs typeface="Aptos" pitchFamily="34" charset="-120"/>
               </a:rPr>
-              <a:t>Produce a machine learning use case review worksheet for a real or realistic public health workflow.</a:t>
-            </a:r>
-            <a:endParaRPr lang="en-US" sz="1320" dirty="0"/>
+              <a:t>Produce a machine learning use case review worksheet for a real or realistic.</a:t>
+            </a:r>
+            <a:endParaRPr lang="en-US" sz="1220" dirty="0"/>
           </a:p>
         </p:txBody>
       </p:sp>
@@ -15337,12 +15339,12 @@
         </p:nvSpPr>
         <p:spPr>
           <a:xfrm>
-            <a:off x="7635240" y="2718511"/>
-            <a:ext cx="3474720" cy="1328623"/>
+            <a:off x="7543800" y="2724912"/>
+            <a:ext cx="3611880" cy="1527048"/>
           </a:xfrm>
           <a:prstGeom prst="roundRect">
             <a:avLst>
-              <a:gd name="adj" fmla="val 8259"/>
+              <a:gd name="adj" fmla="val 7186"/>
             </a:avLst>
           </a:prstGeom>
           <a:solidFill>
@@ -15364,8 +15366,8 @@
         </p:nvSpPr>
         <p:spPr>
           <a:xfrm>
-            <a:off x="7799832" y="2864815"/>
-            <a:ext cx="3145536" cy="256032"/>
+            <a:off x="7708392" y="2852928"/>
+            <a:ext cx="3282696" cy="228600"/>
           </a:xfrm>
           <a:prstGeom prst="rect">
             <a:avLst/>
@@ -15381,7 +15383,7 @@
               <a:buNone/>
             </a:pPr>
             <a:r>
-              <a:rPr lang="en-US" sz="1300" b="1" dirty="0">
+              <a:rPr lang="en-US" sz="1220" b="1" dirty="0">
                 <a:solidFill>
                   <a:srgbClr val="0068B7"/>
                 </a:solidFill>
@@ -15391,7 +15393,7 @@
               </a:rPr>
               <a:t>Concept checkpoints</a:t>
             </a:r>
-            <a:endParaRPr lang="en-US" sz="1300" dirty="0"/>
+            <a:endParaRPr lang="en-US" sz="1220" dirty="0"/>
           </a:p>
         </p:txBody>
       </p:sp>
@@ -15403,8 +15405,8 @@
         </p:nvSpPr>
         <p:spPr>
           <a:xfrm>
-            <a:off x="7818120" y="3230575"/>
-            <a:ext cx="3090672" cy="670255"/>
+            <a:off x="7726680" y="3182112"/>
+            <a:ext cx="3227832" cy="960120"/>
           </a:xfrm>
           <a:prstGeom prst="rect">
             <a:avLst/>
@@ -15422,7 +15424,7 @@
               <a:buNone/>
             </a:pPr>
             <a:r>
-              <a:rPr lang="en-US" sz="1220" dirty="0">
+              <a:rPr lang="en-US" sz="1140" dirty="0">
                 <a:solidFill>
                   <a:srgbClr val="17364A"/>
                 </a:solidFill>
@@ -15430,9 +15432,9 @@
                 <a:ea typeface="Aptos" pitchFamily="34" charset="-122"/>
                 <a:cs typeface="Aptos" pitchFamily="34" charset="-120"/>
               </a:rPr>
-              <a:t>Produce a machine learning use case review worksheet for a real or.</a:t>
-            </a:r>
-            <a:endParaRPr lang="en-US" sz="1220" dirty="0"/>
+              <a:t>Produce a machine learning use case review.</a:t>
+            </a:r>
+            <a:endParaRPr lang="en-US" sz="1140" dirty="0"/>
           </a:p>
         </p:txBody>
       </p:sp>
@@ -15444,12 +15446,12 @@
         </p:nvSpPr>
         <p:spPr>
           <a:xfrm>
-            <a:off x="7635240" y="4184294"/>
-            <a:ext cx="3474720" cy="1466698"/>
+            <a:off x="7543800" y="4389120"/>
+            <a:ext cx="3611880" cy="1261872"/>
           </a:xfrm>
           <a:prstGeom prst="roundRect">
             <a:avLst>
-              <a:gd name="adj" fmla="val 7481"/>
+              <a:gd name="adj" fmla="val 8696"/>
             </a:avLst>
           </a:prstGeom>
           <a:solidFill>
@@ -15471,8 +15473,8 @@
         </p:nvSpPr>
         <p:spPr>
           <a:xfrm>
-            <a:off x="7799832" y="4330598"/>
-            <a:ext cx="3145536" cy="256032"/>
+            <a:off x="7708392" y="4517136"/>
+            <a:ext cx="3282696" cy="228600"/>
           </a:xfrm>
           <a:prstGeom prst="rect">
             <a:avLst/>
@@ -15488,7 +15490,7 @@
               <a:buNone/>
             </a:pPr>
             <a:r>
-              <a:rPr lang="en-US" sz="1300" b="1" dirty="0">
+              <a:rPr lang="en-US" sz="1220" b="1" dirty="0">
                 <a:solidFill>
                   <a:srgbClr val="0068B7"/>
                 </a:solidFill>
@@ -15498,7 +15500,7 @@
               </a:rPr>
               <a:t>What to produce</a:t>
             </a:r>
-            <a:endParaRPr lang="en-US" sz="1300" dirty="0"/>
+            <a:endParaRPr lang="en-US" sz="1220" dirty="0"/>
           </a:p>
         </p:txBody>
       </p:sp>
@@ -15510,8 +15512,8 @@
         </p:nvSpPr>
         <p:spPr>
           <a:xfrm>
-            <a:off x="7799832" y="4659782"/>
-            <a:ext cx="3145536" cy="899770"/>
+            <a:off x="7708392" y="4828032"/>
+            <a:ext cx="3282696" cy="749808"/>
           </a:xfrm>
           <a:prstGeom prst="rect">
             <a:avLst/>
@@ -15529,7 +15531,7 @@
               <a:buNone/>
             </a:pPr>
             <a:r>
-              <a:rPr lang="en-US" sz="1320" dirty="0">
+              <a:rPr lang="en-US" sz="1220" dirty="0">
                 <a:solidFill>
                   <a:srgbClr val="17364A"/>
                 </a:solidFill>
@@ -15537,9 +15539,9 @@
                 <a:ea typeface="Aptos" pitchFamily="34" charset="-122"/>
                 <a:cs typeface="Aptos" pitchFamily="34" charset="-120"/>
               </a:rPr>
-              <a:t>Use the assignment to test whether you can explain the concept, apply it to a realistic public health situation, and identify what would need review before the work moves forward.</a:t>
-            </a:r>
-            <a:endParaRPr lang="en-US" sz="1320" dirty="0"/>
+              <a:t>Use the assignment to test whether you can explain the concept, apply it to a.</a:t>
+            </a:r>
+            <a:endParaRPr lang="en-US" sz="1220" dirty="0"/>
           </a:p>
         </p:txBody>
       </p:sp>
@@ -15830,8 +15832,8 @@
         </p:nvSpPr>
         <p:spPr>
           <a:xfrm>
-            <a:off x="868680" y="1508760"/>
-            <a:ext cx="6309360" cy="4160520"/>
+            <a:off x="822960" y="1463040"/>
+            <a:ext cx="6565392" cy="4343400"/>
           </a:xfrm>
           <a:prstGeom prst="rect">
             <a:avLst/>
@@ -15849,7 +15851,7 @@
               <a:buNone/>
             </a:pPr>
             <a:r>
-              <a:rPr lang="en-US" sz="2100" dirty="0">
+              <a:rPr lang="en-US" sz="1920" dirty="0">
                 <a:solidFill>
                   <a:srgbClr val="003A63"/>
                 </a:solidFill>
@@ -15857,16 +15859,16 @@
                 <a:ea typeface="Aptos" pitchFamily="34" charset="-122"/>
                 <a:cs typeface="Aptos" pitchFamily="34" charset="-120"/>
               </a:rPr>
-              <a:t>• Machine learning is a set of methods that allow computer systems to identify patterns in data.</a:t>
-            </a:r>
-            <a:endParaRPr lang="en-US" sz="2100" dirty="0"/>
-          </a:p>
-          <a:p>
-            <a:pPr indent="0" marL="0">
-              <a:buNone/>
-            </a:pPr>
-            <a:r>
-              <a:rPr lang="en-US" sz="2100" dirty="0">
+              <a:t>• Machine learning is a set of methods that allow computer systems to identify.</a:t>
+            </a:r>
+            <a:endParaRPr lang="en-US" sz="1920" dirty="0"/>
+          </a:p>
+          <a:p>
+            <a:pPr indent="0" marL="0">
+              <a:buNone/>
+            </a:pPr>
+            <a:r>
+              <a:rPr lang="en-US" sz="1920" dirty="0">
                 <a:solidFill>
                   <a:srgbClr val="003A63"/>
                 </a:solidFill>
@@ -15874,16 +15876,16 @@
                 <a:ea typeface="Aptos" pitchFamily="34" charset="-122"/>
                 <a:cs typeface="Aptos" pitchFamily="34" charset="-120"/>
               </a:rPr>
-              <a:t>• In public health, machine learning may support surveillance triage, outbreak signal review,.</a:t>
-            </a:r>
-            <a:endParaRPr lang="en-US" sz="2100" dirty="0"/>
-          </a:p>
-          <a:p>
-            <a:pPr indent="0" marL="0">
-              <a:buNone/>
-            </a:pPr>
-            <a:r>
-              <a:rPr lang="en-US" sz="2100" dirty="0">
+              <a:t>• In public health, machine learning may support surveillance triage, outbreak.</a:t>
+            </a:r>
+            <a:endParaRPr lang="en-US" sz="1920" dirty="0"/>
+          </a:p>
+          <a:p>
+            <a:pPr indent="0" marL="0">
+              <a:buNone/>
+            </a:pPr>
+            <a:r>
+              <a:rPr lang="en-US" sz="1920" dirty="0">
                 <a:solidFill>
                   <a:srgbClr val="003A63"/>
                 </a:solidFill>
@@ -15893,7 +15895,7 @@
               </a:rPr>
               <a:t>• The purpose of this module is not to turn every learner into a data scientist.</a:t>
             </a:r>
-            <a:endParaRPr lang="en-US" sz="2100" dirty="0"/>
+            <a:endParaRPr lang="en-US" sz="1920" dirty="0"/>
           </a:p>
         </p:txBody>
       </p:sp>
@@ -15905,12 +15907,12 @@
         </p:nvSpPr>
         <p:spPr>
           <a:xfrm>
-            <a:off x="7635240" y="1325880"/>
-            <a:ext cx="3474720" cy="1255471"/>
+            <a:off x="7543800" y="1325880"/>
+            <a:ext cx="3611880" cy="1261872"/>
           </a:xfrm>
           <a:prstGeom prst="roundRect">
             <a:avLst>
-              <a:gd name="adj" fmla="val 8740"/>
+              <a:gd name="adj" fmla="val 8696"/>
             </a:avLst>
           </a:prstGeom>
           <a:solidFill>
@@ -15932,8 +15934,8 @@
         </p:nvSpPr>
         <p:spPr>
           <a:xfrm>
-            <a:off x="7799832" y="1472184"/>
-            <a:ext cx="3145536" cy="256032"/>
+            <a:off x="7708392" y="1453896"/>
+            <a:ext cx="3282696" cy="228600"/>
           </a:xfrm>
           <a:prstGeom prst="rect">
             <a:avLst/>
@@ -15949,7 +15951,7 @@
               <a:buNone/>
             </a:pPr>
             <a:r>
-              <a:rPr lang="en-US" sz="1300" b="1" dirty="0">
+              <a:rPr lang="en-US" sz="1220" b="1" dirty="0">
                 <a:solidFill>
                   <a:srgbClr val="0068B7"/>
                 </a:solidFill>
@@ -15959,7 +15961,7 @@
               </a:rPr>
               <a:t>Core concept</a:t>
             </a:r>
-            <a:endParaRPr lang="en-US" sz="1300" dirty="0"/>
+            <a:endParaRPr lang="en-US" sz="1220" dirty="0"/>
           </a:p>
         </p:txBody>
       </p:sp>
@@ -15971,8 +15973,8 @@
         </p:nvSpPr>
         <p:spPr>
           <a:xfrm>
-            <a:off x="7799832" y="1801368"/>
-            <a:ext cx="3145536" cy="688543"/>
+            <a:off x="7708392" y="1764792"/>
+            <a:ext cx="3282696" cy="749808"/>
           </a:xfrm>
           <a:prstGeom prst="rect">
             <a:avLst/>
@@ -15990,7 +15992,7 @@
               <a:buNone/>
             </a:pPr>
             <a:r>
-              <a:rPr lang="en-US" sz="1320" dirty="0">
+              <a:rPr lang="en-US" sz="1220" dirty="0">
                 <a:solidFill>
                   <a:srgbClr val="17364A"/>
                 </a:solidFill>
@@ -15998,9 +16000,9 @@
                 <a:ea typeface="Aptos" pitchFamily="34" charset="-122"/>
                 <a:cs typeface="Aptos" pitchFamily="34" charset="-120"/>
               </a:rPr>
-              <a:t>Machine learning is a set of methods that allow computer systems to identify patterns in data and use.</a:t>
-            </a:r>
-            <a:endParaRPr lang="en-US" sz="1320" dirty="0"/>
+              <a:t>Machine learning is a set of methods that allow computer systems to identify.</a:t>
+            </a:r>
+            <a:endParaRPr lang="en-US" sz="1220" dirty="0"/>
           </a:p>
         </p:txBody>
       </p:sp>
@@ -16012,12 +16014,12 @@
         </p:nvSpPr>
         <p:spPr>
           <a:xfrm>
-            <a:off x="7635240" y="2718511"/>
-            <a:ext cx="3474720" cy="1328623"/>
+            <a:off x="7543800" y="2724912"/>
+            <a:ext cx="3611880" cy="1527048"/>
           </a:xfrm>
           <a:prstGeom prst="roundRect">
             <a:avLst>
-              <a:gd name="adj" fmla="val 8259"/>
+              <a:gd name="adj" fmla="val 7186"/>
             </a:avLst>
           </a:prstGeom>
           <a:solidFill>
@@ -16039,24 +16041,26 @@
         </p:nvSpPr>
         <p:spPr>
           <a:xfrm>
-            <a:off x="7799832" y="2846527"/>
-            <a:ext cx="3145536" cy="237744"/>
-          </a:xfrm>
-          <a:prstGeom prst="rect">
-            <a:avLst/>
-          </a:prstGeom>
-          <a:noFill/>
-          <a:ln/>
-        </p:spPr>
-        <p:txBody>
-          <a:bodyPr wrap="square" lIns="0" tIns="0" rIns="0" bIns="0" rtlCol="0" anchor="ctr"/>
-          <a:lstStyle/>
-          <a:p>
-            <a:pPr indent="0" marL="0">
-              <a:buNone/>
-            </a:pPr>
-            <a:r>
-              <a:rPr lang="en-US" sz="1250" b="1" dirty="0">
+            <a:off x="7708392" y="2852928"/>
+            <a:ext cx="3282696" cy="219456"/>
+          </a:xfrm>
+          <a:prstGeom prst="rect">
+            <a:avLst/>
+          </a:prstGeom>
+          <a:noFill/>
+          <a:ln/>
+        </p:spPr>
+        <p:txBody>
+          <a:bodyPr wrap="square" lIns="0" tIns="0" rIns="0" bIns="0" rtlCol="0" anchor="ctr">
+            <a:normAutofit/>
+          </a:bodyPr>
+          <a:lstStyle/>
+          <a:p>
+            <a:pPr indent="0" marL="0">
+              <a:buNone/>
+            </a:pPr>
+            <a:r>
+              <a:rPr lang="en-US" sz="1160" b="1" dirty="0">
                 <a:solidFill>
                   <a:srgbClr val="0068B7"/>
                 </a:solidFill>
@@ -16066,7 +16070,7 @@
               </a:rPr>
               <a:t>Data-to-decision flow</a:t>
             </a:r>
-            <a:endParaRPr lang="en-US" sz="1250" dirty="0"/>
+            <a:endParaRPr lang="en-US" sz="1160" dirty="0"/>
           </a:p>
         </p:txBody>
       </p:sp>
@@ -16078,7 +16082,7 @@
         </p:nvSpPr>
         <p:spPr>
           <a:xfrm>
-            <a:off x="8763000" y="3399739"/>
+            <a:off x="8717280" y="3406140"/>
             <a:ext cx="164592" cy="0"/>
           </a:xfrm>
           <a:prstGeom prst="line">
@@ -16101,8 +16105,8 @@
         </p:nvSpPr>
         <p:spPr>
           <a:xfrm>
-            <a:off x="7872984" y="3248863"/>
-            <a:ext cx="890016" cy="301752"/>
+            <a:off x="7781544" y="3255264"/>
+            <a:ext cx="935736" cy="301752"/>
           </a:xfrm>
           <a:prstGeom prst="roundRect">
             <a:avLst>
@@ -16128,8 +16132,8 @@
         </p:nvSpPr>
         <p:spPr>
           <a:xfrm>
-            <a:off x="7909560" y="3322015"/>
-            <a:ext cx="816864" cy="146304"/>
+            <a:off x="7818120" y="3328416"/>
+            <a:ext cx="862584" cy="146304"/>
           </a:xfrm>
           <a:prstGeom prst="rect">
             <a:avLst/>
@@ -16169,7 +16173,7 @@
         </p:nvSpPr>
         <p:spPr>
           <a:xfrm>
-            <a:off x="9817608" y="3399739"/>
+            <a:off x="9817608" y="3406140"/>
             <a:ext cx="164592" cy="0"/>
           </a:xfrm>
           <a:prstGeom prst="line">
@@ -16192,8 +16196,8 @@
         </p:nvSpPr>
         <p:spPr>
           <a:xfrm>
-            <a:off x="8927592" y="3248863"/>
-            <a:ext cx="890016" cy="301752"/>
+            <a:off x="8881872" y="3255264"/>
+            <a:ext cx="935736" cy="301752"/>
           </a:xfrm>
           <a:prstGeom prst="roundRect">
             <a:avLst>
@@ -16219,8 +16223,8 @@
         </p:nvSpPr>
         <p:spPr>
           <a:xfrm>
-            <a:off x="8964168" y="3322015"/>
-            <a:ext cx="816864" cy="146304"/>
+            <a:off x="8918448" y="3328416"/>
+            <a:ext cx="862584" cy="146304"/>
           </a:xfrm>
           <a:prstGeom prst="rect">
             <a:avLst/>
@@ -16260,8 +16264,8 @@
         </p:nvSpPr>
         <p:spPr>
           <a:xfrm>
-            <a:off x="9982200" y="3248863"/>
-            <a:ext cx="890016" cy="301752"/>
+            <a:off x="9982200" y="3255264"/>
+            <a:ext cx="935736" cy="301752"/>
           </a:xfrm>
           <a:prstGeom prst="roundRect">
             <a:avLst>
@@ -16287,8 +16291,8 @@
         </p:nvSpPr>
         <p:spPr>
           <a:xfrm>
-            <a:off x="10018776" y="3322015"/>
-            <a:ext cx="816864" cy="146304"/>
+            <a:off x="10018776" y="3328416"/>
+            <a:ext cx="862584" cy="146304"/>
           </a:xfrm>
           <a:prstGeom prst="rect">
             <a:avLst/>
@@ -16328,8 +16332,8 @@
         </p:nvSpPr>
         <p:spPr>
           <a:xfrm>
-            <a:off x="7854696" y="3742639"/>
-            <a:ext cx="3035808" cy="158191"/>
+            <a:off x="7763256" y="3749040"/>
+            <a:ext cx="3172968" cy="356616"/>
           </a:xfrm>
           <a:prstGeom prst="rect">
             <a:avLst/>
@@ -16347,7 +16351,7 @@
               <a:buNone/>
             </a:pPr>
             <a:r>
-              <a:rPr lang="en-US" sz="1120" dirty="0">
+              <a:rPr lang="en-US" sz="1040" dirty="0">
                 <a:solidFill>
                   <a:srgbClr val="17364A"/>
                 </a:solidFill>
@@ -16355,9 +16359,9 @@
                 <a:ea typeface="Aptos" pitchFamily="34" charset="-122"/>
                 <a:cs typeface="Aptos" pitchFamily="34" charset="-120"/>
               </a:rPr>
-              <a:t>The important handoff is not from data to AI; it is from analysis to accountable human review.</a:t>
-            </a:r>
-            <a:endParaRPr lang="en-US" sz="1120" dirty="0"/>
+              <a:t>The important handoff is not from data to AI; it is from analysis to.</a:t>
+            </a:r>
+            <a:endParaRPr lang="en-US" sz="1040" dirty="0"/>
           </a:p>
         </p:txBody>
       </p:sp>
@@ -16369,12 +16373,12 @@
         </p:nvSpPr>
         <p:spPr>
           <a:xfrm>
-            <a:off x="7635240" y="4184294"/>
-            <a:ext cx="3474720" cy="1466698"/>
+            <a:off x="7543800" y="4389120"/>
+            <a:ext cx="3611880" cy="1261872"/>
           </a:xfrm>
           <a:prstGeom prst="roundRect">
             <a:avLst>
-              <a:gd name="adj" fmla="val 7481"/>
+              <a:gd name="adj" fmla="val 8696"/>
             </a:avLst>
           </a:prstGeom>
           <a:solidFill>
@@ -16396,8 +16400,8 @@
         </p:nvSpPr>
         <p:spPr>
           <a:xfrm>
-            <a:off x="7799832" y="4330598"/>
-            <a:ext cx="3145536" cy="256032"/>
+            <a:off x="7708392" y="4517136"/>
+            <a:ext cx="3282696" cy="228600"/>
           </a:xfrm>
           <a:prstGeom prst="rect">
             <a:avLst/>
@@ -16413,7 +16417,7 @@
               <a:buNone/>
             </a:pPr>
             <a:r>
-              <a:rPr lang="en-US" sz="1300" b="1" dirty="0">
+              <a:rPr lang="en-US" sz="1220" b="1" dirty="0">
                 <a:solidFill>
                   <a:srgbClr val="0068B7"/>
                 </a:solidFill>
@@ -16423,7 +16427,7 @@
               </a:rPr>
               <a:t>Apply it</a:t>
             </a:r>
-            <a:endParaRPr lang="en-US" sz="1300" dirty="0"/>
+            <a:endParaRPr lang="en-US" sz="1220" dirty="0"/>
           </a:p>
         </p:txBody>
       </p:sp>
@@ -16435,8 +16439,8 @@
         </p:nvSpPr>
         <p:spPr>
           <a:xfrm>
-            <a:off x="7799832" y="4659782"/>
-            <a:ext cx="3145536" cy="899770"/>
+            <a:off x="7708392" y="4828032"/>
+            <a:ext cx="3282696" cy="749808"/>
           </a:xfrm>
           <a:prstGeom prst="rect">
             <a:avLst/>
@@ -16454,7 +16458,7 @@
               <a:buNone/>
             </a:pPr>
             <a:r>
-              <a:rPr lang="en-US" sz="1320" dirty="0">
+              <a:rPr lang="en-US" sz="1220" dirty="0">
                 <a:solidFill>
                   <a:srgbClr val="17364A"/>
                 </a:solidFill>
@@ -16462,9 +16466,9 @@
                 <a:ea typeface="Aptos" pitchFamily="34" charset="-122"/>
                 <a:cs typeface="Aptos" pitchFamily="34" charset="-120"/>
               </a:rPr>
-              <a:t>Connect the concept to public health purpose, responsible use, required safeguards, documentation, and the next action a department should take.</a:t>
-            </a:r>
-            <a:endParaRPr lang="en-US" sz="1320" dirty="0"/>
+              <a:t>Connect the concept to public health purpose, responsible use, required.</a:t>
+            </a:r>
+            <a:endParaRPr lang="en-US" sz="1220" dirty="0"/>
           </a:p>
         </p:txBody>
       </p:sp>
@@ -16755,8 +16759,8 @@
         </p:nvSpPr>
         <p:spPr>
           <a:xfrm>
-            <a:off x="868680" y="1508760"/>
-            <a:ext cx="6309360" cy="4160520"/>
+            <a:off x="822960" y="1463040"/>
+            <a:ext cx="6565392" cy="4343400"/>
           </a:xfrm>
           <a:prstGeom prst="rect">
             <a:avLst/>
@@ -16774,7 +16778,7 @@
               <a:buNone/>
             </a:pPr>
             <a:r>
-              <a:rPr lang="en-US" sz="2100" dirty="0">
+              <a:rPr lang="en-US" sz="1920" dirty="0">
                 <a:solidFill>
                   <a:srgbClr val="003A63"/>
                 </a:solidFill>
@@ -16782,16 +16786,16 @@
                 <a:ea typeface="Aptos" pitchFamily="34" charset="-122"/>
                 <a:cs typeface="Aptos" pitchFamily="34" charset="-120"/>
               </a:rPr>
-              <a:t>• Machine learning matters for public health AI because many proposed tools rely on.</a:t>
-            </a:r>
-            <a:endParaRPr lang="en-US" sz="2100" dirty="0"/>
-          </a:p>
-          <a:p>
-            <a:pPr indent="0" marL="0">
-              <a:buNone/>
-            </a:pPr>
-            <a:r>
-              <a:rPr lang="en-US" sz="2100" dirty="0">
+              <a:t>• Machine learning matters for public health AI because many proposed tools.</a:t>
+            </a:r>
+            <a:endParaRPr lang="en-US" sz="1920" dirty="0"/>
+          </a:p>
+          <a:p>
+            <a:pPr indent="0" marL="0">
+              <a:buNone/>
+            </a:pPr>
+            <a:r>
+              <a:rPr lang="en-US" sz="1920" dirty="0">
                 <a:solidFill>
                   <a:srgbClr val="003A63"/>
                 </a:solidFill>
@@ -16801,14 +16805,14 @@
               </a:rPr>
               <a:t>• A surveillance team may want to classify incoming reports by urgency.</a:t>
             </a:r>
-            <a:endParaRPr lang="en-US" sz="2100" dirty="0"/>
-          </a:p>
-          <a:p>
-            <a:pPr indent="0" marL="0">
-              <a:buNone/>
-            </a:pPr>
-            <a:r>
-              <a:rPr lang="en-US" sz="2100" dirty="0">
+            <a:endParaRPr lang="en-US" sz="1920" dirty="0"/>
+          </a:p>
+          <a:p>
+            <a:pPr indent="0" marL="0">
+              <a:buNone/>
+            </a:pPr>
+            <a:r>
+              <a:rPr lang="en-US" sz="1920" dirty="0">
                 <a:solidFill>
                   <a:srgbClr val="003A63"/>
                 </a:solidFill>
@@ -16818,7 +16822,7 @@
               </a:rPr>
               <a:t>• An epidemiology team may want to detect unusual disease patterns.</a:t>
             </a:r>
-            <a:endParaRPr lang="en-US" sz="2100" dirty="0"/>
+            <a:endParaRPr lang="en-US" sz="1920" dirty="0"/>
           </a:p>
         </p:txBody>
       </p:sp>
@@ -16830,12 +16834,12 @@
         </p:nvSpPr>
         <p:spPr>
           <a:xfrm>
-            <a:off x="7635240" y="1325880"/>
-            <a:ext cx="3474720" cy="1255471"/>
+            <a:off x="7543800" y="1325880"/>
+            <a:ext cx="3611880" cy="1261872"/>
           </a:xfrm>
           <a:prstGeom prst="roundRect">
             <a:avLst>
-              <a:gd name="adj" fmla="val 8740"/>
+              <a:gd name="adj" fmla="val 8696"/>
             </a:avLst>
           </a:prstGeom>
           <a:solidFill>
@@ -16857,8 +16861,8 @@
         </p:nvSpPr>
         <p:spPr>
           <a:xfrm>
-            <a:off x="7799832" y="1472184"/>
-            <a:ext cx="3145536" cy="256032"/>
+            <a:off x="7708392" y="1453896"/>
+            <a:ext cx="3282696" cy="228600"/>
           </a:xfrm>
           <a:prstGeom prst="rect">
             <a:avLst/>
@@ -16874,7 +16878,7 @@
               <a:buNone/>
             </a:pPr>
             <a:r>
-              <a:rPr lang="en-US" sz="1300" b="1" dirty="0">
+              <a:rPr lang="en-US" sz="1220" b="1" dirty="0">
                 <a:solidFill>
                   <a:srgbClr val="0068B7"/>
                 </a:solidFill>
@@ -16884,7 +16888,7 @@
               </a:rPr>
               <a:t>Core concept</a:t>
             </a:r>
-            <a:endParaRPr lang="en-US" sz="1300" dirty="0"/>
+            <a:endParaRPr lang="en-US" sz="1220" dirty="0"/>
           </a:p>
         </p:txBody>
       </p:sp>
@@ -16896,8 +16900,8 @@
         </p:nvSpPr>
         <p:spPr>
           <a:xfrm>
-            <a:off x="7799832" y="1801368"/>
-            <a:ext cx="3145536" cy="688543"/>
+            <a:off x="7708392" y="1764792"/>
+            <a:ext cx="3282696" cy="749808"/>
           </a:xfrm>
           <a:prstGeom prst="rect">
             <a:avLst/>
@@ -16915,7 +16919,7 @@
               <a:buNone/>
             </a:pPr>
             <a:r>
-              <a:rPr lang="en-US" sz="1320" dirty="0">
+              <a:rPr lang="en-US" sz="1220" dirty="0">
                 <a:solidFill>
                   <a:srgbClr val="17364A"/>
                 </a:solidFill>
@@ -16923,9 +16927,9 @@
                 <a:ea typeface="Aptos" pitchFamily="34" charset="-122"/>
                 <a:cs typeface="Aptos" pitchFamily="34" charset="-120"/>
               </a:rPr>
-              <a:t>Machine learning matters for public health AI because many proposed tools rely on classification,.</a:t>
-            </a:r>
-            <a:endParaRPr lang="en-US" sz="1320" dirty="0"/>
+              <a:t>Machine learning matters for public health AI because many proposed tools rely.</a:t>
+            </a:r>
+            <a:endParaRPr lang="en-US" sz="1220" dirty="0"/>
           </a:p>
         </p:txBody>
       </p:sp>
@@ -16937,12 +16941,12 @@
         </p:nvSpPr>
         <p:spPr>
           <a:xfrm>
-            <a:off x="7635240" y="2718511"/>
-            <a:ext cx="3474720" cy="1328623"/>
+            <a:off x="7543800" y="2724912"/>
+            <a:ext cx="3611880" cy="1527048"/>
           </a:xfrm>
           <a:prstGeom prst="roundRect">
             <a:avLst>
-              <a:gd name="adj" fmla="val 8259"/>
+              <a:gd name="adj" fmla="val 7186"/>
             </a:avLst>
           </a:prstGeom>
           <a:solidFill>
@@ -16964,24 +16968,26 @@
         </p:nvSpPr>
         <p:spPr>
           <a:xfrm>
-            <a:off x="7799832" y="2846527"/>
-            <a:ext cx="3145536" cy="237744"/>
-          </a:xfrm>
-          <a:prstGeom prst="rect">
-            <a:avLst/>
-          </a:prstGeom>
-          <a:noFill/>
-          <a:ln/>
-        </p:spPr>
-        <p:txBody>
-          <a:bodyPr wrap="square" lIns="0" tIns="0" rIns="0" bIns="0" rtlCol="0" anchor="ctr"/>
-          <a:lstStyle/>
-          <a:p>
-            <a:pPr indent="0" marL="0">
-              <a:buNone/>
-            </a:pPr>
-            <a:r>
-              <a:rPr lang="en-US" sz="1250" b="1" dirty="0">
+            <a:off x="7708392" y="2852928"/>
+            <a:ext cx="3282696" cy="219456"/>
+          </a:xfrm>
+          <a:prstGeom prst="rect">
+            <a:avLst/>
+          </a:prstGeom>
+          <a:noFill/>
+          <a:ln/>
+        </p:spPr>
+        <p:txBody>
+          <a:bodyPr wrap="square" lIns="0" tIns="0" rIns="0" bIns="0" rtlCol="0" anchor="ctr">
+            <a:normAutofit/>
+          </a:bodyPr>
+          <a:lstStyle/>
+          <a:p>
+            <a:pPr indent="0" marL="0">
+              <a:buNone/>
+            </a:pPr>
+            <a:r>
+              <a:rPr lang="en-US" sz="1160" b="1" dirty="0">
                 <a:solidFill>
                   <a:srgbClr val="0068B7"/>
                 </a:solidFill>
@@ -16991,7 +16997,7 @@
               </a:rPr>
               <a:t>Data-to-decision flow</a:t>
             </a:r>
-            <a:endParaRPr lang="en-US" sz="1250" dirty="0"/>
+            <a:endParaRPr lang="en-US" sz="1160" dirty="0"/>
           </a:p>
         </p:txBody>
       </p:sp>
@@ -17003,7 +17009,7 @@
         </p:nvSpPr>
         <p:spPr>
           <a:xfrm>
-            <a:off x="8763000" y="3399739"/>
+            <a:off x="8717280" y="3406140"/>
             <a:ext cx="164592" cy="0"/>
           </a:xfrm>
           <a:prstGeom prst="line">
@@ -17026,8 +17032,8 @@
         </p:nvSpPr>
         <p:spPr>
           <a:xfrm>
-            <a:off x="7872984" y="3248863"/>
-            <a:ext cx="890016" cy="301752"/>
+            <a:off x="7781544" y="3255264"/>
+            <a:ext cx="935736" cy="301752"/>
           </a:xfrm>
           <a:prstGeom prst="roundRect">
             <a:avLst>
@@ -17053,8 +17059,8 @@
         </p:nvSpPr>
         <p:spPr>
           <a:xfrm>
-            <a:off x="7909560" y="3322015"/>
-            <a:ext cx="816864" cy="146304"/>
+            <a:off x="7818120" y="3328416"/>
+            <a:ext cx="862584" cy="146304"/>
           </a:xfrm>
           <a:prstGeom prst="rect">
             <a:avLst/>
@@ -17094,7 +17100,7 @@
         </p:nvSpPr>
         <p:spPr>
           <a:xfrm>
-            <a:off x="9817608" y="3399739"/>
+            <a:off x="9817608" y="3406140"/>
             <a:ext cx="164592" cy="0"/>
           </a:xfrm>
           <a:prstGeom prst="line">
@@ -17117,8 +17123,8 @@
         </p:nvSpPr>
         <p:spPr>
           <a:xfrm>
-            <a:off x="8927592" y="3248863"/>
-            <a:ext cx="890016" cy="301752"/>
+            <a:off x="8881872" y="3255264"/>
+            <a:ext cx="935736" cy="301752"/>
           </a:xfrm>
           <a:prstGeom prst="roundRect">
             <a:avLst>
@@ -17144,8 +17150,8 @@
         </p:nvSpPr>
         <p:spPr>
           <a:xfrm>
-            <a:off x="8964168" y="3322015"/>
-            <a:ext cx="816864" cy="146304"/>
+            <a:off x="8918448" y="3328416"/>
+            <a:ext cx="862584" cy="146304"/>
           </a:xfrm>
           <a:prstGeom prst="rect">
             <a:avLst/>
@@ -17185,8 +17191,8 @@
         </p:nvSpPr>
         <p:spPr>
           <a:xfrm>
-            <a:off x="9982200" y="3248863"/>
-            <a:ext cx="890016" cy="301752"/>
+            <a:off x="9982200" y="3255264"/>
+            <a:ext cx="935736" cy="301752"/>
           </a:xfrm>
           <a:prstGeom prst="roundRect">
             <a:avLst>
@@ -17212,8 +17218,8 @@
         </p:nvSpPr>
         <p:spPr>
           <a:xfrm>
-            <a:off x="10018776" y="3322015"/>
-            <a:ext cx="816864" cy="146304"/>
+            <a:off x="10018776" y="3328416"/>
+            <a:ext cx="862584" cy="146304"/>
           </a:xfrm>
           <a:prstGeom prst="rect">
             <a:avLst/>
@@ -17253,8 +17259,8 @@
         </p:nvSpPr>
         <p:spPr>
           <a:xfrm>
-            <a:off x="7854696" y="3742639"/>
-            <a:ext cx="3035808" cy="158191"/>
+            <a:off x="7763256" y="3749040"/>
+            <a:ext cx="3172968" cy="356616"/>
           </a:xfrm>
           <a:prstGeom prst="rect">
             <a:avLst/>
@@ -17272,7 +17278,7 @@
               <a:buNone/>
             </a:pPr>
             <a:r>
-              <a:rPr lang="en-US" sz="1120" dirty="0">
+              <a:rPr lang="en-US" sz="1040" dirty="0">
                 <a:solidFill>
                   <a:srgbClr val="17364A"/>
                 </a:solidFill>
@@ -17280,9 +17286,9 @@
                 <a:ea typeface="Aptos" pitchFamily="34" charset="-122"/>
                 <a:cs typeface="Aptos" pitchFamily="34" charset="-120"/>
               </a:rPr>
-              <a:t>The important handoff is not from data to AI; it is from analysis to accountable human review.</a:t>
-            </a:r>
-            <a:endParaRPr lang="en-US" sz="1120" dirty="0"/>
+              <a:t>The important handoff is not from data to AI; it is from analysis to.</a:t>
+            </a:r>
+            <a:endParaRPr lang="en-US" sz="1040" dirty="0"/>
           </a:p>
         </p:txBody>
       </p:sp>
@@ -17294,12 +17300,12 @@
         </p:nvSpPr>
         <p:spPr>
           <a:xfrm>
-            <a:off x="7635240" y="4184294"/>
-            <a:ext cx="3474720" cy="1466698"/>
+            <a:off x="7543800" y="4389120"/>
+            <a:ext cx="3611880" cy="1261872"/>
           </a:xfrm>
           <a:prstGeom prst="roundRect">
             <a:avLst>
-              <a:gd name="adj" fmla="val 7481"/>
+              <a:gd name="adj" fmla="val 8696"/>
             </a:avLst>
           </a:prstGeom>
           <a:solidFill>
@@ -17321,8 +17327,8 @@
         </p:nvSpPr>
         <p:spPr>
           <a:xfrm>
-            <a:off x="7799832" y="4330598"/>
-            <a:ext cx="3145536" cy="256032"/>
+            <a:off x="7708392" y="4517136"/>
+            <a:ext cx="3282696" cy="228600"/>
           </a:xfrm>
           <a:prstGeom prst="rect">
             <a:avLst/>
@@ -17338,7 +17344,7 @@
               <a:buNone/>
             </a:pPr>
             <a:r>
-              <a:rPr lang="en-US" sz="1300" b="1" dirty="0">
+              <a:rPr lang="en-US" sz="1220" b="1" dirty="0">
                 <a:solidFill>
                   <a:srgbClr val="0068B7"/>
                 </a:solidFill>
@@ -17348,7 +17354,7 @@
               </a:rPr>
               <a:t>Apply it</a:t>
             </a:r>
-            <a:endParaRPr lang="en-US" sz="1300" dirty="0"/>
+            <a:endParaRPr lang="en-US" sz="1220" dirty="0"/>
           </a:p>
         </p:txBody>
       </p:sp>
@@ -17360,8 +17366,8 @@
         </p:nvSpPr>
         <p:spPr>
           <a:xfrm>
-            <a:off x="7799832" y="4659782"/>
-            <a:ext cx="3145536" cy="899770"/>
+            <a:off x="7708392" y="4828032"/>
+            <a:ext cx="3282696" cy="749808"/>
           </a:xfrm>
           <a:prstGeom prst="rect">
             <a:avLst/>
@@ -17379,7 +17385,7 @@
               <a:buNone/>
             </a:pPr>
             <a:r>
-              <a:rPr lang="en-US" sz="1320" dirty="0">
+              <a:rPr lang="en-US" sz="1220" dirty="0">
                 <a:solidFill>
                   <a:srgbClr val="17364A"/>
                 </a:solidFill>
@@ -17387,9 +17393,9 @@
                 <a:ea typeface="Aptos" pitchFamily="34" charset="-122"/>
                 <a:cs typeface="Aptos" pitchFamily="34" charset="-120"/>
               </a:rPr>
-              <a:t>Connect the concept to public health purpose, responsible use, required safeguards, documentation, and the next action a department should take.</a:t>
-            </a:r>
-            <a:endParaRPr lang="en-US" sz="1320" dirty="0"/>
+              <a:t>Connect the concept to public health purpose, responsible use, required.</a:t>
+            </a:r>
+            <a:endParaRPr lang="en-US" sz="1220" dirty="0"/>
           </a:p>
         </p:txBody>
       </p:sp>
@@ -17680,8 +17686,8 @@
         </p:nvSpPr>
         <p:spPr>
           <a:xfrm>
-            <a:off x="868680" y="1508760"/>
-            <a:ext cx="6309360" cy="4160520"/>
+            <a:off x="822960" y="1463040"/>
+            <a:ext cx="6565392" cy="4343400"/>
           </a:xfrm>
           <a:prstGeom prst="rect">
             <a:avLst/>
@@ -17699,7 +17705,7 @@
               <a:buNone/>
             </a:pPr>
             <a:r>
-              <a:rPr lang="en-US" sz="2100" dirty="0">
+              <a:rPr lang="en-US" sz="1920" dirty="0">
                 <a:solidFill>
                   <a:srgbClr val="003A63"/>
                 </a:solidFill>
@@ -17707,16 +17713,16 @@
                 <a:ea typeface="Aptos" pitchFamily="34" charset="-122"/>
                 <a:cs typeface="Aptos" pitchFamily="34" charset="-120"/>
               </a:rPr>
-              <a:t>• A health department may consider a machine learning model to classify environmental health.</a:t>
-            </a:r>
-            <a:endParaRPr lang="en-US" sz="2100" dirty="0"/>
-          </a:p>
-          <a:p>
-            <a:pPr indent="0" marL="0">
-              <a:buNone/>
-            </a:pPr>
-            <a:r>
-              <a:rPr lang="en-US" sz="2100" dirty="0">
+              <a:t>• A health department may consider a machine learning model to classify.</a:t>
+            </a:r>
+            <a:endParaRPr lang="en-US" sz="1920" dirty="0"/>
+          </a:p>
+          <a:p>
+            <a:pPr indent="0" marL="0">
+              <a:buNone/>
+            </a:pPr>
+            <a:r>
+              <a:rPr lang="en-US" sz="1920" dirty="0">
                 <a:solidFill>
                   <a:srgbClr val="003A63"/>
                 </a:solidFill>
@@ -17724,16 +17730,16 @@
                 <a:ea typeface="Aptos" pitchFamily="34" charset="-122"/>
                 <a:cs typeface="Aptos" pitchFamily="34" charset="-120"/>
               </a:rPr>
-              <a:t>• Historical complaint text, location, facility type, prior violations, and resolution outcomes.</a:t>
-            </a:r>
-            <a:endParaRPr lang="en-US" sz="2100" dirty="0"/>
-          </a:p>
-          <a:p>
-            <a:pPr indent="0" marL="0">
-              <a:buNone/>
-            </a:pPr>
-            <a:r>
-              <a:rPr lang="en-US" sz="2100" dirty="0">
+              <a:t>• Historical complaint text, location, facility type, prior violations, and.</a:t>
+            </a:r>
+            <a:endParaRPr lang="en-US" sz="1920" dirty="0"/>
+          </a:p>
+          <a:p>
+            <a:pPr indent="0" marL="0">
+              <a:buNone/>
+            </a:pPr>
+            <a:r>
+              <a:rPr lang="en-US" sz="1920" dirty="0">
                 <a:solidFill>
                   <a:srgbClr val="003A63"/>
                 </a:solidFill>
@@ -17741,9 +17747,9 @@
                 <a:ea typeface="Aptos" pitchFamily="34" charset="-122"/>
                 <a:cs typeface="Aptos" pitchFamily="34" charset="-120"/>
               </a:rPr>
-              <a:t>• The label might be whether the complaint was ultimately assigned high priority by trained staff.</a:t>
-            </a:r>
-            <a:endParaRPr lang="en-US" sz="2100" dirty="0"/>
+              <a:t>• The label might be whether the complaint was ultimately assigned high.</a:t>
+            </a:r>
+            <a:endParaRPr lang="en-US" sz="1920" dirty="0"/>
           </a:p>
         </p:txBody>
       </p:sp>
@@ -17755,12 +17761,12 @@
         </p:nvSpPr>
         <p:spPr>
           <a:xfrm>
-            <a:off x="7635240" y="1325880"/>
-            <a:ext cx="3474720" cy="1255471"/>
+            <a:off x="7543800" y="1325880"/>
+            <a:ext cx="3611880" cy="1261872"/>
           </a:xfrm>
           <a:prstGeom prst="roundRect">
             <a:avLst>
-              <a:gd name="adj" fmla="val 8740"/>
+              <a:gd name="adj" fmla="val 8696"/>
             </a:avLst>
           </a:prstGeom>
           <a:solidFill>
@@ -17782,8 +17788,8 @@
         </p:nvSpPr>
         <p:spPr>
           <a:xfrm>
-            <a:off x="7799832" y="1472184"/>
-            <a:ext cx="3145536" cy="256032"/>
+            <a:off x="7708392" y="1453896"/>
+            <a:ext cx="3282696" cy="228600"/>
           </a:xfrm>
           <a:prstGeom prst="rect">
             <a:avLst/>
@@ -17799,7 +17805,7 @@
               <a:buNone/>
             </a:pPr>
             <a:r>
-              <a:rPr lang="en-US" sz="1300" b="1" dirty="0">
+              <a:rPr lang="en-US" sz="1220" b="1" dirty="0">
                 <a:solidFill>
                   <a:srgbClr val="0068B7"/>
                 </a:solidFill>
@@ -17809,7 +17815,7 @@
               </a:rPr>
               <a:t>Core concept</a:t>
             </a:r>
-            <a:endParaRPr lang="en-US" sz="1300" dirty="0"/>
+            <a:endParaRPr lang="en-US" sz="1220" dirty="0"/>
           </a:p>
         </p:txBody>
       </p:sp>
@@ -17821,8 +17827,8 @@
         </p:nvSpPr>
         <p:spPr>
           <a:xfrm>
-            <a:off x="7799832" y="1801368"/>
-            <a:ext cx="3145536" cy="688543"/>
+            <a:off x="7708392" y="1764792"/>
+            <a:ext cx="3282696" cy="749808"/>
           </a:xfrm>
           <a:prstGeom prst="rect">
             <a:avLst/>
@@ -17840,7 +17846,7 @@
               <a:buNone/>
             </a:pPr>
             <a:r>
-              <a:rPr lang="en-US" sz="1320" dirty="0">
+              <a:rPr lang="en-US" sz="1220" dirty="0">
                 <a:solidFill>
                   <a:srgbClr val="17364A"/>
                 </a:solidFill>
@@ -17848,9 +17854,9 @@
                 <a:ea typeface="Aptos" pitchFamily="34" charset="-122"/>
                 <a:cs typeface="Aptos" pitchFamily="34" charset="-120"/>
               </a:rPr>
-              <a:t>A health department may consider a machine learning model to classify environmental health complaints.</a:t>
-            </a:r>
-            <a:endParaRPr lang="en-US" sz="1320" dirty="0"/>
+              <a:t>A health department may consider a machine learning model to classify.</a:t>
+            </a:r>
+            <a:endParaRPr lang="en-US" sz="1220" dirty="0"/>
           </a:p>
         </p:txBody>
       </p:sp>
@@ -17862,12 +17868,12 @@
         </p:nvSpPr>
         <p:spPr>
           <a:xfrm>
-            <a:off x="7635240" y="2718511"/>
-            <a:ext cx="3474720" cy="1328623"/>
+            <a:off x="7543800" y="2724912"/>
+            <a:ext cx="3611880" cy="1527048"/>
           </a:xfrm>
           <a:prstGeom prst="roundRect">
             <a:avLst>
-              <a:gd name="adj" fmla="val 8259"/>
+              <a:gd name="adj" fmla="val 7186"/>
             </a:avLst>
           </a:prstGeom>
           <a:solidFill>
@@ -17889,8 +17895,8 @@
         </p:nvSpPr>
         <p:spPr>
           <a:xfrm>
-            <a:off x="7799832" y="2864815"/>
-            <a:ext cx="3145536" cy="256032"/>
+            <a:off x="7708392" y="2852928"/>
+            <a:ext cx="3282696" cy="228600"/>
           </a:xfrm>
           <a:prstGeom prst="rect">
             <a:avLst/>
@@ -17906,7 +17912,7 @@
               <a:buNone/>
             </a:pPr>
             <a:r>
-              <a:rPr lang="en-US" sz="1300" b="1" dirty="0">
+              <a:rPr lang="en-US" sz="1220" b="1" dirty="0">
                 <a:solidFill>
                   <a:srgbClr val="0068B7"/>
                 </a:solidFill>
@@ -17916,7 +17922,7 @@
               </a:rPr>
               <a:t>Concept checkpoints</a:t>
             </a:r>
-            <a:endParaRPr lang="en-US" sz="1300" dirty="0"/>
+            <a:endParaRPr lang="en-US" sz="1220" dirty="0"/>
           </a:p>
         </p:txBody>
       </p:sp>
@@ -17928,8 +17934,8 @@
         </p:nvSpPr>
         <p:spPr>
           <a:xfrm>
-            <a:off x="7818120" y="3230575"/>
-            <a:ext cx="3090672" cy="670255"/>
+            <a:off x="7726680" y="3182112"/>
+            <a:ext cx="3227832" cy="960120"/>
           </a:xfrm>
           <a:prstGeom prst="rect">
             <a:avLst/>
@@ -17947,7 +17953,7 @@
               <a:buNone/>
             </a:pPr>
             <a:r>
-              <a:rPr lang="en-US" sz="1220" dirty="0">
+              <a:rPr lang="en-US" sz="1140" dirty="0">
                 <a:solidFill>
                   <a:srgbClr val="17364A"/>
                 </a:solidFill>
@@ -17955,16 +17961,16 @@
                 <a:ea typeface="Aptos" pitchFamily="34" charset="-122"/>
                 <a:cs typeface="Aptos" pitchFamily="34" charset="-120"/>
               </a:rPr>
-              <a:t>A health department may consider a machine learning model to.</a:t>
-            </a:r>
-            <a:endParaRPr lang="en-US" sz="1220" dirty="0"/>
-          </a:p>
-          <a:p>
-            <a:pPr indent="0" marL="0">
-              <a:buNone/>
-            </a:pPr>
-            <a:r>
-              <a:rPr lang="en-US" sz="1220" dirty="0">
+              <a:t>A health department may consider a machine.</a:t>
+            </a:r>
+            <a:endParaRPr lang="en-US" sz="1140" dirty="0"/>
+          </a:p>
+          <a:p>
+            <a:pPr indent="0" marL="0">
+              <a:buNone/>
+            </a:pPr>
+            <a:r>
+              <a:rPr lang="en-US" sz="1140" dirty="0">
                 <a:solidFill>
                   <a:srgbClr val="17364A"/>
                 </a:solidFill>
@@ -17972,16 +17978,16 @@
                 <a:ea typeface="Aptos" pitchFamily="34" charset="-122"/>
                 <a:cs typeface="Aptos" pitchFamily="34" charset="-120"/>
               </a:rPr>
-              <a:t>Historical complaint text, location, facility type, prior.</a:t>
-            </a:r>
-            <a:endParaRPr lang="en-US" sz="1220" dirty="0"/>
-          </a:p>
-          <a:p>
-            <a:pPr indent="0" marL="0">
-              <a:buNone/>
-            </a:pPr>
-            <a:r>
-              <a:rPr lang="en-US" sz="1220" dirty="0">
+              <a:t>Historical complaint text, location, facility.</a:t>
+            </a:r>
+            <a:endParaRPr lang="en-US" sz="1140" dirty="0"/>
+          </a:p>
+          <a:p>
+            <a:pPr indent="0" marL="0">
+              <a:buNone/>
+            </a:pPr>
+            <a:r>
+              <a:rPr lang="en-US" sz="1140" dirty="0">
                 <a:solidFill>
                   <a:srgbClr val="17364A"/>
                 </a:solidFill>
@@ -17989,9 +17995,9 @@
                 <a:ea typeface="Aptos" pitchFamily="34" charset="-122"/>
                 <a:cs typeface="Aptos" pitchFamily="34" charset="-120"/>
               </a:rPr>
-              <a:t>This sounds useful, but the label may reflect staffing capacity or.</a:t>
-            </a:r>
-            <a:endParaRPr lang="en-US" sz="1220" dirty="0"/>
+              <a:t>This sounds useful, but the label may reflect.</a:t>
+            </a:r>
+            <a:endParaRPr lang="en-US" sz="1140" dirty="0"/>
           </a:p>
         </p:txBody>
       </p:sp>
@@ -18003,12 +18009,12 @@
         </p:nvSpPr>
         <p:spPr>
           <a:xfrm>
-            <a:off x="7635240" y="4184294"/>
-            <a:ext cx="3474720" cy="1466698"/>
+            <a:off x="7543800" y="4389120"/>
+            <a:ext cx="3611880" cy="1261872"/>
           </a:xfrm>
           <a:prstGeom prst="roundRect">
             <a:avLst>
-              <a:gd name="adj" fmla="val 7481"/>
+              <a:gd name="adj" fmla="val 8696"/>
             </a:avLst>
           </a:prstGeom>
           <a:solidFill>
@@ -18030,8 +18036,8 @@
         </p:nvSpPr>
         <p:spPr>
           <a:xfrm>
-            <a:off x="7799832" y="4330598"/>
-            <a:ext cx="3145536" cy="256032"/>
+            <a:off x="7708392" y="4517136"/>
+            <a:ext cx="3282696" cy="228600"/>
           </a:xfrm>
           <a:prstGeom prst="rect">
             <a:avLst/>
@@ -18047,7 +18053,7 @@
               <a:buNone/>
             </a:pPr>
             <a:r>
-              <a:rPr lang="en-US" sz="1300" b="1" dirty="0">
+              <a:rPr lang="en-US" sz="1220" b="1" dirty="0">
                 <a:solidFill>
                   <a:srgbClr val="0068B7"/>
                 </a:solidFill>
@@ -18057,7 +18063,7 @@
               </a:rPr>
               <a:t>Apply it</a:t>
             </a:r>
-            <a:endParaRPr lang="en-US" sz="1300" dirty="0"/>
+            <a:endParaRPr lang="en-US" sz="1220" dirty="0"/>
           </a:p>
         </p:txBody>
       </p:sp>
@@ -18069,8 +18075,8 @@
         </p:nvSpPr>
         <p:spPr>
           <a:xfrm>
-            <a:off x="7799832" y="4659782"/>
-            <a:ext cx="3145536" cy="899770"/>
+            <a:off x="7708392" y="4828032"/>
+            <a:ext cx="3282696" cy="749808"/>
           </a:xfrm>
           <a:prstGeom prst="rect">
             <a:avLst/>
@@ -18088,7 +18094,7 @@
               <a:buNone/>
             </a:pPr>
             <a:r>
-              <a:rPr lang="en-US" sz="1320" dirty="0">
+              <a:rPr lang="en-US" sz="1220" dirty="0">
                 <a:solidFill>
                   <a:srgbClr val="17364A"/>
                 </a:solidFill>
@@ -18096,9 +18102,9 @@
                 <a:ea typeface="Aptos" pitchFamily="34" charset="-122"/>
                 <a:cs typeface="Aptos" pitchFamily="34" charset="-120"/>
               </a:rPr>
-              <a:t>Connect the concept to public health purpose, responsible use, required safeguards, documentation, and the next action a department should take.</a:t>
-            </a:r>
-            <a:endParaRPr lang="en-US" sz="1320" dirty="0"/>
+              <a:t>Connect the concept to public health purpose, responsible use, required.</a:t>
+            </a:r>
+            <a:endParaRPr lang="en-US" sz="1220" dirty="0"/>
           </a:p>
         </p:txBody>
       </p:sp>

--- a/downloads/presentations/modules/anl-210.pptx
+++ b/downloads/presentations/modules/anl-210.pptx
@@ -11870,7 +11870,7 @@
                 <a:ea typeface="Aptos" pitchFamily="34" charset="-122"/>
                 <a:cs typeface="Aptos" pitchFamily="34" charset="-120"/>
               </a:rPr>
-              <a:t>• 1. Which statement best describes supervised learning?</a:t>
+              <a:t>1. Which statement best describes supervised learning?</a:t>
             </a:r>
             <a:endParaRPr lang="en-US" sz="1920" dirty="0"/>
           </a:p>
@@ -11887,7 +11887,7 @@
                 <a:ea typeface="Aptos" pitchFamily="34" charset="-122"/>
                 <a:cs typeface="Aptos" pitchFamily="34" charset="-120"/>
               </a:rPr>
-              <a:t>• 2. Why can historical labels create risk?</a:t>
+              <a:t>2. Why can historical labels create risk?</a:t>
             </a:r>
             <a:endParaRPr lang="en-US" sz="1920" dirty="0"/>
           </a:p>
@@ -11904,7 +11904,7 @@
                 <a:ea typeface="Aptos" pitchFamily="34" charset="-122"/>
                 <a:cs typeface="Aptos" pitchFamily="34" charset="-120"/>
               </a:rPr>
-              <a:t>• 3. What is overfitting?</a:t>
+              <a:t>3. What is overfitting?</a:t>
             </a:r>
             <a:endParaRPr lang="en-US" sz="1920" dirty="0"/>
           </a:p>
@@ -12011,7 +12011,7 @@
                 <a:ea typeface="Aptos" pitchFamily="34" charset="-122"/>
                 <a:cs typeface="Aptos" pitchFamily="34" charset="-120"/>
               </a:rPr>
-              <a:t>1. Which statement best describes supervised learning?</a:t>
+              <a:t>Which statement best describes supervised learning?</a:t>
             </a:r>
             <a:endParaRPr lang="en-US" sz="1220" dirty="0"/>
           </a:p>
@@ -12118,41 +12118,7 @@
                 <a:ea typeface="Aptos" pitchFamily="34" charset="-122"/>
                 <a:cs typeface="Aptos" pitchFamily="34" charset="-120"/>
               </a:rPr>
-              <a:t>1.</a:t>
-            </a:r>
-            <a:endParaRPr lang="en-US" sz="1140" dirty="0"/>
-          </a:p>
-          <a:p>
-            <a:pPr indent="0" marL="0">
-              <a:buNone/>
-            </a:pPr>
-            <a:r>
-              <a:rPr lang="en-US" sz="1140" dirty="0">
-                <a:solidFill>
-                  <a:srgbClr val="17364A"/>
-                </a:solidFill>
-                <a:latin typeface="Aptos" pitchFamily="34" charset="0"/>
-                <a:ea typeface="Aptos" pitchFamily="34" charset="-122"/>
-                <a:cs typeface="Aptos" pitchFamily="34" charset="-120"/>
-              </a:rPr>
               <a:t>Which statement best describes supervised learning?</a:t>
-            </a:r>
-            <a:endParaRPr lang="en-US" sz="1140" dirty="0"/>
-          </a:p>
-          <a:p>
-            <a:pPr indent="0" marL="0">
-              <a:buNone/>
-            </a:pPr>
-            <a:r>
-              <a:rPr lang="en-US" sz="1140" dirty="0">
-                <a:solidFill>
-                  <a:srgbClr val="17364A"/>
-                </a:solidFill>
-                <a:latin typeface="Aptos" pitchFamily="34" charset="0"/>
-                <a:ea typeface="Aptos" pitchFamily="34" charset="-122"/>
-                <a:cs typeface="Aptos" pitchFamily="34" charset="-120"/>
-              </a:rPr>
-              <a:t>2.</a:t>
             </a:r>
             <a:endParaRPr lang="en-US" sz="1140" dirty="0"/>
           </a:p>
